--- a/decks/06_10限_機器と総括.pptx
+++ b/decks/06_10限_機器と総括.pptx
@@ -1747,7 +1747,7 @@
     <p:bg>
       <p:bgPr>
         <a:solidFill>
-          <a:srgbClr val="0F2D52"/>
+          <a:srgbClr val="093259"/>
         </a:solidFill>
       </p:bgPr>
     </p:bg>
@@ -1787,9 +1787,33 @@
           <a:ln/>
         </p:spPr>
       </p:sp>
-      <p:sp>
-        <p:nvSpPr>
-          <p:cNvPr id="3" name="Text 1"/>
+      <p:pic>
+        <p:nvPicPr>
+          <p:cNvPr id="3" name="Image 0" descr="/home/user/Training-/assets/logo.png">    </p:cNvPr>
+          <p:cNvPicPr>
+            <a:picLocks noChangeAspect="1"/>
+          </p:cNvPicPr>
+          <p:nvPr/>
+        </p:nvPicPr>
+        <p:blipFill>
+          <a:blip r:embed="rId1"/>
+          <a:stretch>
+            <a:fillRect/>
+          </a:stretch>
+        </p:blipFill>
+        <p:spPr>
+          <a:xfrm>
+            <a:off x="10765231" y="332912"/>
+            <a:ext cx="786384" cy="742353"/>
+          </a:xfrm>
+          <a:prstGeom prst="rect">
+            <a:avLst/>
+          </a:prstGeom>
+        </p:spPr>
+      </p:pic>
+      <p:sp>
+        <p:nvSpPr>
+          <p:cNvPr id="4" name="Text 1"/>
           <p:cNvSpPr/>
           <p:nvPr/>
         </p:nvSpPr>
@@ -1814,7 +1838,7 @@
             <a:r>
               <a:rPr lang="en-US" sz="1300" b="1" dirty="0">
                 <a:solidFill>
-                  <a:srgbClr val="17AF98"/>
+                  <a:srgbClr val="12B198"/>
                 </a:solidFill>
                 <a:latin typeface="Yu Gothic" pitchFamily="34" charset="0"/>
                 <a:ea typeface="Yu Gothic" pitchFamily="34" charset="-122"/>
@@ -1845,7 +1869,7 @@
       </p:sp>
       <p:sp>
         <p:nvSpPr>
-          <p:cNvPr id="4" name="Text 2"/>
+          <p:cNvPr id="5" name="Text 2"/>
           <p:cNvSpPr/>
           <p:nvPr/>
         </p:nvSpPr>
@@ -1899,7 +1923,7 @@
                 <a:ea typeface="Yu Gothic" pitchFamily="34" charset="-122"/>
                 <a:cs typeface="Yu Gothic" pitchFamily="34" charset="-120"/>
               </a:rPr>
-              <a:t>― そして本日の総括</a:t>
+              <a:t>― 本日の総括</a:t>
             </a:r>
             <a:endParaRPr lang="en-US" sz="3600" dirty="0"/>
           </a:p>
@@ -1907,7 +1931,7 @@
       </p:sp>
       <p:sp>
         <p:nvSpPr>
-          <p:cNvPr id="5" name="Text 3"/>
+          <p:cNvPr id="6" name="Text 3"/>
           <p:cNvSpPr/>
           <p:nvPr/>
         </p:nvSpPr>
@@ -1938,7 +1962,7 @@
                 <a:ea typeface="Calibri" pitchFamily="34" charset="-122"/>
                 <a:cs typeface="Calibri" pitchFamily="34" charset="-120"/>
               </a:rPr>
-              <a:t>Security Equipment and Systems — and Today's Wrap-Up</a:t>
+              <a:t>Security Equipment and Systems — and Today's Summary</a:t>
             </a:r>
             <a:endParaRPr lang="en-US" sz="1600" dirty="0"/>
           </a:p>
@@ -1946,7 +1970,7 @@
       </p:sp>
       <p:sp>
         <p:nvSpPr>
-          <p:cNvPr id="6" name="Shape 4"/>
+          <p:cNvPr id="7" name="Shape 4"/>
           <p:cNvSpPr/>
           <p:nvPr/>
         </p:nvSpPr>
@@ -1959,14 +1983,14 @@
             <a:avLst/>
           </a:prstGeom>
           <a:solidFill>
-            <a:srgbClr val="17AF98"/>
+            <a:srgbClr val="12B198"/>
           </a:solidFill>
           <a:ln/>
         </p:spPr>
       </p:sp>
       <p:sp>
         <p:nvSpPr>
-          <p:cNvPr id="7" name="Text 5"/>
+          <p:cNvPr id="8" name="Text 5"/>
           <p:cNvSpPr/>
           <p:nvPr/>
         </p:nvSpPr>
@@ -2052,9 +2076,33 @@
           <a:chExt cx="0" cy="0"/>
         </a:xfrm>
       </p:grpSpPr>
-      <p:sp>
-        <p:nvSpPr>
-          <p:cNvPr id="2" name="Text 0"/>
+      <p:pic>
+        <p:nvPicPr>
+          <p:cNvPr id="2" name="Image 0" descr="/home/user/Training-/assets/logo.png">    </p:cNvPr>
+          <p:cNvPicPr>
+            <a:picLocks noChangeAspect="1"/>
+          </p:cNvPicPr>
+          <p:nvPr/>
+        </p:nvPicPr>
+        <p:blipFill>
+          <a:blip r:embed="rId1"/>
+          <a:stretch>
+            <a:fillRect/>
+          </a:stretch>
+        </p:blipFill>
+        <p:spPr>
+          <a:xfrm>
+            <a:off x="10765231" y="332912"/>
+            <a:ext cx="786384" cy="742353"/>
+          </a:xfrm>
+          <a:prstGeom prst="rect">
+            <a:avLst/>
+          </a:prstGeom>
+        </p:spPr>
+      </p:pic>
+      <p:sp>
+        <p:nvSpPr>
+          <p:cNvPr id="3" name="Text 0"/>
           <p:cNvSpPr/>
           <p:nvPr/>
         </p:nvSpPr>
@@ -2082,7 +2130,7 @@
             <a:r>
               <a:rPr lang="en-US" sz="2700" b="1" dirty="0">
                 <a:solidFill>
-                  <a:srgbClr val="0F2D52"/>
+                  <a:srgbClr val="093259"/>
                 </a:solidFill>
                 <a:latin typeface="Yu Gothic" pitchFamily="34" charset="0"/>
                 <a:ea typeface="Yu Gothic" pitchFamily="34" charset="-122"/>
@@ -2102,7 +2150,7 @@
             <a:r>
               <a:rPr lang="en-US" sz="1250" i="1" dirty="0">
                 <a:solidFill>
-                  <a:srgbClr val="17AF98"/>
+                  <a:srgbClr val="12B198"/>
                 </a:solidFill>
                 <a:latin typeface="Calibri" pitchFamily="34" charset="0"/>
                 <a:ea typeface="Calibri" pitchFamily="34" charset="-122"/>
@@ -2116,7 +2164,7 @@
       </p:sp>
       <p:sp>
         <p:nvSpPr>
-          <p:cNvPr id="3" name="Text 1"/>
+          <p:cNvPr id="4" name="Text 1"/>
           <p:cNvSpPr/>
           <p:nvPr/>
         </p:nvSpPr>
@@ -2144,13 +2192,13 @@
             <a:r>
               <a:rPr lang="en-US" sz="1300" dirty="0">
                 <a:solidFill>
-                  <a:srgbClr val="0F2D52"/>
+                  <a:srgbClr val="093259"/>
                 </a:solidFill>
                 <a:latin typeface="Yu Gothic" pitchFamily="34" charset="0"/>
                 <a:ea typeface="Yu Gothic" pitchFamily="34" charset="-122"/>
                 <a:cs typeface="Yu Gothic" pitchFamily="34" charset="-120"/>
               </a:rPr>
-              <a:t>AAR は事案・訓練の直後に行う短い振り返りです。原則は一つ ― 犯人探しをしない。</a:t>
+              <a:t>AAR は事案や訓練の直後に行う振り返りです。原則は、犯人探しをしないことです。</a:t>
             </a:r>
             <a:endParaRPr lang="en-US" sz="1300" dirty="0"/>
           </a:p>
@@ -2170,7 +2218,7 @@
                 <a:ea typeface="Calibri" pitchFamily="34" charset="-122"/>
                 <a:cs typeface="Calibri" pitchFamily="34" charset="-120"/>
               </a:rPr>
-              <a:t>An AAR is a short review held immediately after an incident or exercise. One rule governs it: no blame.</a:t>
+              <a:t>An AAR is a review held immediately after an incident or exercise. The rule is: no blame.</a:t>
             </a:r>
             <a:endParaRPr lang="en-US" sz="1300" dirty="0"/>
           </a:p>
@@ -2178,7 +2226,7 @@
       </p:sp>
       <p:sp>
         <p:nvSpPr>
-          <p:cNvPr id="4" name="Shape 2"/>
+          <p:cNvPr id="5" name="Shape 2"/>
           <p:cNvSpPr/>
           <p:nvPr/>
         </p:nvSpPr>
@@ -2200,7 +2248,7 @@
       </p:sp>
       <p:sp>
         <p:nvSpPr>
-          <p:cNvPr id="5" name="Shape 3"/>
+          <p:cNvPr id="6" name="Shape 3"/>
           <p:cNvSpPr/>
           <p:nvPr/>
         </p:nvSpPr>
@@ -2213,14 +2261,14 @@
             <a:avLst/>
           </a:prstGeom>
           <a:solidFill>
-            <a:srgbClr val="17AF98"/>
+            <a:srgbClr val="12B198"/>
           </a:solidFill>
           <a:ln/>
         </p:spPr>
       </p:sp>
       <p:sp>
         <p:nvSpPr>
-          <p:cNvPr id="6" name="Text 4"/>
+          <p:cNvPr id="7" name="Text 4"/>
           <p:cNvSpPr/>
           <p:nvPr/>
         </p:nvSpPr>
@@ -2259,7 +2307,7 @@
       </p:sp>
       <p:sp>
         <p:nvSpPr>
-          <p:cNvPr id="7" name="Text 5"/>
+          <p:cNvPr id="8" name="Text 5"/>
           <p:cNvSpPr/>
           <p:nvPr/>
         </p:nvSpPr>
@@ -2321,7 +2369,7 @@
       </p:sp>
       <p:sp>
         <p:nvSpPr>
-          <p:cNvPr id="8" name="Shape 6"/>
+          <p:cNvPr id="9" name="Shape 6"/>
           <p:cNvSpPr/>
           <p:nvPr/>
         </p:nvSpPr>
@@ -2343,7 +2391,7 @@
       </p:sp>
       <p:sp>
         <p:nvSpPr>
-          <p:cNvPr id="9" name="Shape 7"/>
+          <p:cNvPr id="10" name="Shape 7"/>
           <p:cNvSpPr/>
           <p:nvPr/>
         </p:nvSpPr>
@@ -2356,14 +2404,14 @@
             <a:avLst/>
           </a:prstGeom>
           <a:solidFill>
-            <a:srgbClr val="17AF98"/>
+            <a:srgbClr val="12B198"/>
           </a:solidFill>
           <a:ln/>
         </p:spPr>
       </p:sp>
       <p:sp>
         <p:nvSpPr>
-          <p:cNvPr id="10" name="Text 8"/>
+          <p:cNvPr id="11" name="Text 8"/>
           <p:cNvSpPr/>
           <p:nvPr/>
         </p:nvSpPr>
@@ -2402,7 +2450,7 @@
       </p:sp>
       <p:sp>
         <p:nvSpPr>
-          <p:cNvPr id="11" name="Text 9"/>
+          <p:cNvPr id="12" name="Text 9"/>
           <p:cNvSpPr/>
           <p:nvPr/>
         </p:nvSpPr>
@@ -2464,7 +2512,7 @@
       </p:sp>
       <p:sp>
         <p:nvSpPr>
-          <p:cNvPr id="12" name="Shape 10"/>
+          <p:cNvPr id="13" name="Shape 10"/>
           <p:cNvSpPr/>
           <p:nvPr/>
         </p:nvSpPr>
@@ -2486,7 +2534,7 @@
       </p:sp>
       <p:sp>
         <p:nvSpPr>
-          <p:cNvPr id="13" name="Shape 11"/>
+          <p:cNvPr id="14" name="Shape 11"/>
           <p:cNvSpPr/>
           <p:nvPr/>
         </p:nvSpPr>
@@ -2499,14 +2547,14 @@
             <a:avLst/>
           </a:prstGeom>
           <a:solidFill>
-            <a:srgbClr val="17AF98"/>
+            <a:srgbClr val="12B198"/>
           </a:solidFill>
           <a:ln/>
         </p:spPr>
       </p:sp>
       <p:sp>
         <p:nvSpPr>
-          <p:cNvPr id="14" name="Text 12"/>
+          <p:cNvPr id="15" name="Text 12"/>
           <p:cNvSpPr/>
           <p:nvPr/>
         </p:nvSpPr>
@@ -2545,7 +2593,7 @@
       </p:sp>
       <p:sp>
         <p:nvSpPr>
-          <p:cNvPr id="15" name="Text 13"/>
+          <p:cNvPr id="16" name="Text 13"/>
           <p:cNvSpPr/>
           <p:nvPr/>
         </p:nvSpPr>
@@ -2579,7 +2627,7 @@
                 <a:ea typeface="Yu Gothic" pitchFamily="34" charset="-122"/>
                 <a:cs typeface="Yu Gothic" pitchFamily="34" charset="-120"/>
               </a:rPr>
-              <a:t>なぜ差が生まれたか。</a:t>
+              <a:t>なぜ差が生じたか。</a:t>
             </a:r>
             <a:endParaRPr lang="en-US" sz="1450" dirty="0"/>
           </a:p>
@@ -2607,7 +2655,7 @@
       </p:sp>
       <p:sp>
         <p:nvSpPr>
-          <p:cNvPr id="16" name="Shape 14"/>
+          <p:cNvPr id="17" name="Shape 14"/>
           <p:cNvSpPr/>
           <p:nvPr/>
         </p:nvSpPr>
@@ -2629,7 +2677,7 @@
       </p:sp>
       <p:sp>
         <p:nvSpPr>
-          <p:cNvPr id="17" name="Shape 15"/>
+          <p:cNvPr id="18" name="Shape 15"/>
           <p:cNvSpPr/>
           <p:nvPr/>
         </p:nvSpPr>
@@ -2642,14 +2690,14 @@
             <a:avLst/>
           </a:prstGeom>
           <a:solidFill>
-            <a:srgbClr val="17AF98"/>
+            <a:srgbClr val="12B198"/>
           </a:solidFill>
           <a:ln/>
         </p:spPr>
       </p:sp>
       <p:sp>
         <p:nvSpPr>
-          <p:cNvPr id="18" name="Text 16"/>
+          <p:cNvPr id="19" name="Text 16"/>
           <p:cNvSpPr/>
           <p:nvPr/>
         </p:nvSpPr>
@@ -2688,7 +2736,7 @@
       </p:sp>
       <p:sp>
         <p:nvSpPr>
-          <p:cNvPr id="19" name="Text 17"/>
+          <p:cNvPr id="20" name="Text 17"/>
           <p:cNvSpPr/>
           <p:nvPr/>
         </p:nvSpPr>
@@ -2742,7 +2790,7 @@
                 <a:ea typeface="Calibri" pitchFamily="34" charset="-122"/>
                 <a:cs typeface="Calibri" pitchFamily="34" charset="-120"/>
               </a:rPr>
-              <a:t>What will we do differently next time?</a:t>
+              <a:t>What will we do differently?</a:t>
             </a:r>
             <a:endParaRPr lang="en-US" sz="1450" dirty="0"/>
           </a:p>
@@ -2750,7 +2798,7 @@
       </p:sp>
       <p:sp>
         <p:nvSpPr>
-          <p:cNvPr id="20" name="Shape 18"/>
+          <p:cNvPr id="21" name="Shape 18"/>
           <p:cNvSpPr/>
           <p:nvPr/>
         </p:nvSpPr>
@@ -2772,7 +2820,7 @@
       </p:sp>
       <p:sp>
         <p:nvSpPr>
-          <p:cNvPr id="21" name="Shape 19"/>
+          <p:cNvPr id="22" name="Shape 19"/>
           <p:cNvSpPr/>
           <p:nvPr/>
         </p:nvSpPr>
@@ -2785,14 +2833,14 @@
             <a:avLst/>
           </a:prstGeom>
           <a:solidFill>
-            <a:srgbClr val="17AF98"/>
+            <a:srgbClr val="12B198"/>
           </a:solidFill>
           <a:ln/>
         </p:spPr>
       </p:sp>
       <p:sp>
         <p:nvSpPr>
-          <p:cNvPr id="22" name="Text 20"/>
+          <p:cNvPr id="23" name="Text 20"/>
           <p:cNvSpPr/>
           <p:nvPr/>
         </p:nvSpPr>
@@ -2831,7 +2879,7 @@
       </p:sp>
       <p:sp>
         <p:nvSpPr>
-          <p:cNvPr id="23" name="Text 21"/>
+          <p:cNvPr id="24" name="Text 21"/>
           <p:cNvSpPr/>
           <p:nvPr/>
         </p:nvSpPr>
@@ -2865,7 +2913,7 @@
                 <a:ea typeface="Yu Gothic" pitchFamily="34" charset="-122"/>
                 <a:cs typeface="Yu Gothic" pitchFamily="34" charset="-120"/>
               </a:rPr>
-              <a:t>最後に、各自が「明日から変える行動」を1つ、声に出して宣言します。</a:t>
+              <a:t>最後に、各自が明日から変える行動を1つ、声に出して述べます。</a:t>
             </a:r>
             <a:endParaRPr lang="en-US" sz="1300" dirty="0"/>
           </a:p>
@@ -2885,7 +2933,7 @@
                 <a:ea typeface="Calibri" pitchFamily="34" charset="-122"/>
                 <a:cs typeface="Calibri" pitchFamily="34" charset="-120"/>
               </a:rPr>
-              <a:t>To close: each of you states aloud one thing you will change from tomorrow.</a:t>
+              <a:t>To close, each person states aloud one thing they will change from tomorrow.</a:t>
             </a:r>
             <a:endParaRPr lang="en-US" sz="1300" dirty="0"/>
           </a:p>
@@ -2893,7 +2941,7 @@
       </p:sp>
       <p:sp>
         <p:nvSpPr>
-          <p:cNvPr id="24" name="Text 22"/>
+          <p:cNvPr id="25" name="Text 22"/>
           <p:cNvSpPr/>
           <p:nvPr/>
         </p:nvSpPr>
@@ -2946,7 +2994,7 @@
       </p:sp>
       <p:sp>
         <p:nvSpPr>
-          <p:cNvPr id="25" name="Text 23"/>
+          <p:cNvPr id="26" name="Text 23"/>
           <p:cNvSpPr/>
           <p:nvPr/>
         </p:nvSpPr>
@@ -2997,7 +3045,7 @@
     <p:bg>
       <p:bgPr>
         <a:solidFill>
-          <a:srgbClr val="0F2D52"/>
+          <a:srgbClr val="093259"/>
         </a:solidFill>
       </p:bgPr>
     </p:bg>
@@ -3037,9 +3085,33 @@
           <a:ln/>
         </p:spPr>
       </p:sp>
-      <p:sp>
-        <p:nvSpPr>
-          <p:cNvPr id="3" name="Text 1"/>
+      <p:pic>
+        <p:nvPicPr>
+          <p:cNvPr id="3" name="Image 0" descr="/home/user/Training-/assets/logo.png">    </p:cNvPr>
+          <p:cNvPicPr>
+            <a:picLocks noChangeAspect="1"/>
+          </p:cNvPicPr>
+          <p:nvPr/>
+        </p:nvPicPr>
+        <p:blipFill>
+          <a:blip r:embed="rId1"/>
+          <a:stretch>
+            <a:fillRect/>
+          </a:stretch>
+        </p:blipFill>
+        <p:spPr>
+          <a:xfrm>
+            <a:off x="10765231" y="332912"/>
+            <a:ext cx="786384" cy="742353"/>
+          </a:xfrm>
+          <a:prstGeom prst="rect">
+            <a:avLst/>
+          </a:prstGeom>
+        </p:spPr>
+      </p:pic>
+      <p:sp>
+        <p:nvSpPr>
+          <p:cNvPr id="4" name="Text 1"/>
           <p:cNvSpPr/>
           <p:nvPr/>
         </p:nvSpPr>
@@ -3101,7 +3173,7 @@
       </p:sp>
       <p:sp>
         <p:nvSpPr>
-          <p:cNvPr id="4" name="Shape 2"/>
+          <p:cNvPr id="5" name="Shape 2"/>
           <p:cNvSpPr/>
           <p:nvPr/>
         </p:nvSpPr>
@@ -3116,14 +3188,14 @@
             </a:avLst>
           </a:prstGeom>
           <a:solidFill>
-            <a:srgbClr val="0A2039"/>
+            <a:srgbClr val="06223D"/>
           </a:solidFill>
           <a:ln/>
         </p:spPr>
       </p:sp>
       <p:sp>
         <p:nvSpPr>
-          <p:cNvPr id="5" name="Shape 3"/>
+          <p:cNvPr id="6" name="Shape 3"/>
           <p:cNvSpPr/>
           <p:nvPr/>
         </p:nvSpPr>
@@ -3136,14 +3208,14 @@
             <a:avLst/>
           </a:prstGeom>
           <a:solidFill>
-            <a:srgbClr val="17AF98"/>
+            <a:srgbClr val="12B198"/>
           </a:solidFill>
           <a:ln/>
         </p:spPr>
       </p:sp>
       <p:sp>
         <p:nvSpPr>
-          <p:cNvPr id="6" name="Text 4"/>
+          <p:cNvPr id="7" name="Text 4"/>
           <p:cNvSpPr/>
           <p:nvPr/>
         </p:nvSpPr>
@@ -3182,7 +3254,7 @@
       </p:sp>
       <p:sp>
         <p:nvSpPr>
-          <p:cNvPr id="7" name="Text 5"/>
+          <p:cNvPr id="8" name="Text 5"/>
           <p:cNvSpPr/>
           <p:nvPr/>
         </p:nvSpPr>
@@ -3216,7 +3288,7 @@
                 <a:ea typeface="Yu Gothic" pitchFamily="34" charset="-122"/>
                 <a:cs typeface="Yu Gothic" pitchFamily="34" charset="-120"/>
               </a:rPr>
-              <a:t>確認テスト10問（15分）― 解答と解説はその場で行います。</a:t>
+              <a:t>確認テスト10問（15分）。解答と解説はその場で行います。</a:t>
             </a:r>
             <a:endParaRPr lang="en-US" sz="1500" dirty="0"/>
           </a:p>
@@ -3236,7 +3308,7 @@
                 <a:ea typeface="Calibri" pitchFamily="34" charset="-122"/>
                 <a:cs typeface="Calibri" pitchFamily="34" charset="-120"/>
               </a:rPr>
-              <a:t>Ten questions, fifteen minutes — answers and explanation follow immediately.</a:t>
+              <a:t>Ten questions, fifteen minutes. Answers and explanation follow immediately.</a:t>
             </a:r>
             <a:endParaRPr lang="en-US" sz="1500" dirty="0"/>
           </a:p>
@@ -3244,7 +3316,7 @@
       </p:sp>
       <p:sp>
         <p:nvSpPr>
-          <p:cNvPr id="8" name="Shape 6"/>
+          <p:cNvPr id="9" name="Shape 6"/>
           <p:cNvSpPr/>
           <p:nvPr/>
         </p:nvSpPr>
@@ -3259,14 +3331,14 @@
             </a:avLst>
           </a:prstGeom>
           <a:solidFill>
-            <a:srgbClr val="0A2039"/>
+            <a:srgbClr val="06223D"/>
           </a:solidFill>
           <a:ln/>
         </p:spPr>
       </p:sp>
       <p:sp>
         <p:nvSpPr>
-          <p:cNvPr id="9" name="Shape 7"/>
+          <p:cNvPr id="10" name="Shape 7"/>
           <p:cNvSpPr/>
           <p:nvPr/>
         </p:nvSpPr>
@@ -3279,14 +3351,14 @@
             <a:avLst/>
           </a:prstGeom>
           <a:solidFill>
-            <a:srgbClr val="17AF98"/>
+            <a:srgbClr val="12B198"/>
           </a:solidFill>
           <a:ln/>
         </p:spPr>
       </p:sp>
       <p:sp>
         <p:nvSpPr>
-          <p:cNvPr id="10" name="Text 8"/>
+          <p:cNvPr id="11" name="Text 8"/>
           <p:cNvSpPr/>
           <p:nvPr/>
         </p:nvSpPr>
@@ -3325,7 +3397,7 @@
       </p:sp>
       <p:sp>
         <p:nvSpPr>
-          <p:cNvPr id="11" name="Text 9"/>
+          <p:cNvPr id="12" name="Text 9"/>
           <p:cNvSpPr/>
           <p:nvPr/>
         </p:nvSpPr>
@@ -3379,7 +3451,7 @@
                 <a:ea typeface="Calibri" pitchFamily="34" charset="-122"/>
                 <a:cs typeface="Calibri" pitchFamily="34" charset="-120"/>
               </a:rPr>
-              <a:t>What am I protecting — People, Assets, or Reputation?</a:t>
+              <a:t>What am I protecting? People, Assets, or Reputation.</a:t>
             </a:r>
             <a:endParaRPr lang="en-US" sz="1500" dirty="0"/>
           </a:p>
@@ -3387,7 +3459,7 @@
       </p:sp>
       <p:sp>
         <p:nvSpPr>
-          <p:cNvPr id="12" name="Shape 10"/>
+          <p:cNvPr id="13" name="Shape 10"/>
           <p:cNvSpPr/>
           <p:nvPr/>
         </p:nvSpPr>
@@ -3402,14 +3474,14 @@
             </a:avLst>
           </a:prstGeom>
           <a:solidFill>
-            <a:srgbClr val="0A2039"/>
+            <a:srgbClr val="06223D"/>
           </a:solidFill>
           <a:ln/>
         </p:spPr>
       </p:sp>
       <p:sp>
         <p:nvSpPr>
-          <p:cNvPr id="13" name="Shape 11"/>
+          <p:cNvPr id="14" name="Shape 11"/>
           <p:cNvSpPr/>
           <p:nvPr/>
         </p:nvSpPr>
@@ -3422,14 +3494,14 @@
             <a:avLst/>
           </a:prstGeom>
           <a:solidFill>
-            <a:srgbClr val="17AF98"/>
+            <a:srgbClr val="12B198"/>
           </a:solidFill>
           <a:ln/>
         </p:spPr>
       </p:sp>
       <p:sp>
         <p:nvSpPr>
-          <p:cNvPr id="14" name="Text 12"/>
+          <p:cNvPr id="15" name="Text 12"/>
           <p:cNvSpPr/>
           <p:nvPr/>
         </p:nvSpPr>
@@ -3468,7 +3540,7 @@
       </p:sp>
       <p:sp>
         <p:nvSpPr>
-          <p:cNvPr id="15" name="Text 13"/>
+          <p:cNvPr id="16" name="Text 13"/>
           <p:cNvSpPr/>
           <p:nvPr/>
         </p:nvSpPr>
@@ -3522,7 +3594,7 @@
                 <a:ea typeface="Calibri" pitchFamily="34" charset="-122"/>
                 <a:cs typeface="Calibri" pitchFamily="34" charset="-120"/>
               </a:rPr>
-              <a:t>In what capacity am I acting — citizen, or delegated agent?</a:t>
+              <a:t>In what capacity am I acting? Citizen, or delegated agent.</a:t>
             </a:r>
             <a:endParaRPr lang="en-US" sz="1500" dirty="0"/>
           </a:p>
@@ -3530,7 +3602,7 @@
       </p:sp>
       <p:sp>
         <p:nvSpPr>
-          <p:cNvPr id="16" name="Shape 14"/>
+          <p:cNvPr id="17" name="Shape 14"/>
           <p:cNvSpPr/>
           <p:nvPr/>
         </p:nvSpPr>
@@ -3545,14 +3617,14 @@
             </a:avLst>
           </a:prstGeom>
           <a:solidFill>
-            <a:srgbClr val="0A2039"/>
+            <a:srgbClr val="06223D"/>
           </a:solidFill>
           <a:ln/>
         </p:spPr>
       </p:sp>
       <p:sp>
         <p:nvSpPr>
-          <p:cNvPr id="17" name="Shape 15"/>
+          <p:cNvPr id="18" name="Shape 15"/>
           <p:cNvSpPr/>
           <p:nvPr/>
         </p:nvSpPr>
@@ -3565,14 +3637,14 @@
             <a:avLst/>
           </a:prstGeom>
           <a:solidFill>
-            <a:srgbClr val="17AF98"/>
+            <a:srgbClr val="12B198"/>
           </a:solidFill>
           <a:ln/>
         </p:spPr>
       </p:sp>
       <p:sp>
         <p:nvSpPr>
-          <p:cNvPr id="18" name="Text 16"/>
+          <p:cNvPr id="19" name="Text 16"/>
           <p:cNvSpPr/>
           <p:nvPr/>
         </p:nvSpPr>
@@ -3611,7 +3683,7 @@
       </p:sp>
       <p:sp>
         <p:nvSpPr>
-          <p:cNvPr id="19" name="Text 17"/>
+          <p:cNvPr id="20" name="Text 17"/>
           <p:cNvSpPr/>
           <p:nvPr/>
         </p:nvSpPr>
@@ -3645,7 +3717,7 @@
                 <a:ea typeface="Yu Gothic" pitchFamily="34" charset="-122"/>
                 <a:cs typeface="Yu Gothic" pitchFamily="34" charset="-120"/>
               </a:rPr>
-              <a:t>その手段は最小限か ― 越えたら、それは何になるか。</a:t>
+              <a:t>その手段は最小限か ― 越えた場合、何の罪に当たるか。</a:t>
             </a:r>
             <a:endParaRPr lang="en-US" sz="1500" dirty="0"/>
           </a:p>
@@ -3665,7 +3737,7 @@
                 <a:ea typeface="Calibri" pitchFamily="34" charset="-122"/>
                 <a:cs typeface="Calibri" pitchFamily="34" charset="-120"/>
               </a:rPr>
-              <a:t>Is this the minimum necessary — and if I exceed it, what does it become?</a:t>
+              <a:t>Is this the minimum action? If I exceed it, what offence does it become?</a:t>
             </a:r>
             <a:endParaRPr lang="en-US" sz="1500" dirty="0"/>
           </a:p>
@@ -3673,7 +3745,7 @@
       </p:sp>
       <p:sp>
         <p:nvSpPr>
-          <p:cNvPr id="20" name="Text 18"/>
+          <p:cNvPr id="21" name="Text 18"/>
           <p:cNvSpPr/>
           <p:nvPr/>
         </p:nvSpPr>
@@ -3698,7 +3770,7 @@
             <a:r>
               <a:rPr lang="en-US" sz="1200" b="1" dirty="0">
                 <a:solidFill>
-                  <a:srgbClr val="17AF98"/>
+                  <a:srgbClr val="12B198"/>
                 </a:solidFill>
                 <a:latin typeface="Yu Gothic" pitchFamily="34" charset="0"/>
                 <a:ea typeface="Yu Gothic" pitchFamily="34" charset="-122"/>
@@ -3721,7 +3793,7 @@
                 <a:ea typeface="Calibri" pitchFamily="34" charset="-122"/>
                 <a:cs typeface="Calibri" pitchFamily="34" charset="-120"/>
               </a:rPr>
-              <a:t>Today's training record is prepared by the Security Guard Instruction Supervisor and retained for the prescribed period.</a:t>
+              <a:t>Today's training record is prepared by the Instruction Supervisor and retained for the prescribed period.</a:t>
             </a:r>
             <a:endParaRPr lang="en-US" sz="1200" dirty="0"/>
           </a:p>
@@ -3759,9 +3831,33 @@
           <a:chExt cx="0" cy="0"/>
         </a:xfrm>
       </p:grpSpPr>
-      <p:sp>
-        <p:nvSpPr>
-          <p:cNvPr id="2" name="Text 0"/>
+      <p:pic>
+        <p:nvPicPr>
+          <p:cNvPr id="2" name="Image 0" descr="/home/user/Training-/assets/logo.png">    </p:cNvPr>
+          <p:cNvPicPr>
+            <a:picLocks noChangeAspect="1"/>
+          </p:cNvPicPr>
+          <p:nvPr/>
+        </p:nvPicPr>
+        <p:blipFill>
+          <a:blip r:embed="rId1"/>
+          <a:stretch>
+            <a:fillRect/>
+          </a:stretch>
+        </p:blipFill>
+        <p:spPr>
+          <a:xfrm>
+            <a:off x="10765231" y="332912"/>
+            <a:ext cx="786384" cy="742353"/>
+          </a:xfrm>
+          <a:prstGeom prst="rect">
+            <a:avLst/>
+          </a:prstGeom>
+        </p:spPr>
+      </p:pic>
+      <p:sp>
+        <p:nvSpPr>
+          <p:cNvPr id="3" name="Text 0"/>
           <p:cNvSpPr/>
           <p:nvPr/>
         </p:nvSpPr>
@@ -3789,7 +3885,7 @@
             <a:r>
               <a:rPr lang="en-US" sz="2700" b="1" dirty="0">
                 <a:solidFill>
-                  <a:srgbClr val="0F2D52"/>
+                  <a:srgbClr val="093259"/>
                 </a:solidFill>
                 <a:latin typeface="Yu Gothic" pitchFamily="34" charset="0"/>
                 <a:ea typeface="Yu Gothic" pitchFamily="34" charset="-122"/>
@@ -3809,13 +3905,13 @@
             <a:r>
               <a:rPr lang="en-US" sz="1250" i="1" dirty="0">
                 <a:solidFill>
-                  <a:srgbClr val="17AF98"/>
-                </a:solidFill>
-                <a:latin typeface="Calibri" pitchFamily="34" charset="0"/>
-                <a:ea typeface="Calibri" pitchFamily="34" charset="-122"/>
-                <a:cs typeface="Calibri" pitchFamily="34" charset="-120"/>
-              </a:rPr>
-              <a:t>The Equipment Landscape</a:t>
+                  <a:srgbClr val="12B198"/>
+                </a:solidFill>
+                <a:latin typeface="Calibri" pitchFamily="34" charset="0"/>
+                <a:ea typeface="Calibri" pitchFamily="34" charset="-122"/>
+                <a:cs typeface="Calibri" pitchFamily="34" charset="-120"/>
+              </a:rPr>
+              <a:t>Overview of Security Equipment</a:t>
             </a:r>
             <a:endParaRPr lang="en-US" sz="2700" dirty="0"/>
           </a:p>
@@ -3823,7 +3919,7 @@
       </p:sp>
       <p:sp>
         <p:nvSpPr>
-          <p:cNvPr id="3" name="Text 1"/>
+          <p:cNvPr id="4" name="Text 1"/>
           <p:cNvSpPr/>
           <p:nvPr/>
         </p:nvSpPr>
@@ -3851,13 +3947,13 @@
             <a:r>
               <a:rPr lang="en-US" sz="1300" dirty="0">
                 <a:solidFill>
-                  <a:srgbClr val="0F2D52"/>
+                  <a:srgbClr val="093259"/>
                 </a:solidFill>
                 <a:latin typeface="Yu Gothic" pitchFamily="34" charset="0"/>
                 <a:ea typeface="Yu Gothic" pitchFamily="34" charset="-122"/>
                 <a:cs typeface="Yu Gothic" pitchFamily="34" charset="-120"/>
               </a:rPr>
-              <a:t>機器は「知らせる」だけです。判断するのは、いつも人。</a:t>
+              <a:t>機器は異常を知らせます。判断は人が行います。</a:t>
             </a:r>
             <a:endParaRPr lang="en-US" sz="1300" dirty="0"/>
           </a:p>
@@ -3877,7 +3973,7 @@
                 <a:ea typeface="Calibri" pitchFamily="34" charset="-122"/>
                 <a:cs typeface="Calibri" pitchFamily="34" charset="-120"/>
               </a:rPr>
-              <a:t>Equipment only tells you. The judgement is always yours.</a:t>
+              <a:t>Equipment reports a condition. People make the decision.</a:t>
             </a:r>
             <a:endParaRPr lang="en-US" sz="1300" dirty="0"/>
           </a:p>
@@ -3885,7 +3981,7 @@
       </p:sp>
       <p:sp>
         <p:nvSpPr>
-          <p:cNvPr id="4" name="Shape 2"/>
+          <p:cNvPr id="5" name="Shape 2"/>
           <p:cNvSpPr/>
           <p:nvPr/>
         </p:nvSpPr>
@@ -3907,7 +4003,7 @@
       </p:sp>
       <p:sp>
         <p:nvSpPr>
-          <p:cNvPr id="5" name="Shape 3"/>
+          <p:cNvPr id="6" name="Shape 3"/>
           <p:cNvSpPr/>
           <p:nvPr/>
         </p:nvSpPr>
@@ -3920,14 +4016,14 @@
             <a:avLst/>
           </a:prstGeom>
           <a:solidFill>
-            <a:srgbClr val="0F2D52"/>
+            <a:srgbClr val="093259"/>
           </a:solidFill>
           <a:ln/>
         </p:spPr>
       </p:sp>
       <p:sp>
         <p:nvSpPr>
-          <p:cNvPr id="6" name="Text 4"/>
+          <p:cNvPr id="7" name="Text 4"/>
           <p:cNvSpPr/>
           <p:nvPr/>
         </p:nvSpPr>
@@ -3966,7 +4062,7 @@
       </p:sp>
       <p:sp>
         <p:nvSpPr>
-          <p:cNvPr id="7" name="Text 5"/>
+          <p:cNvPr id="8" name="Text 5"/>
           <p:cNvSpPr/>
           <p:nvPr/>
         </p:nvSpPr>
@@ -4000,7 +4096,7 @@
                 <a:ea typeface="Yu Gothic" pitchFamily="34" charset="-122"/>
                 <a:cs typeface="Yu Gothic" pitchFamily="34" charset="-120"/>
               </a:rPr>
-              <a:t>自動火災報知設備 ― 受信機・感知器・発信機</a:t>
+              <a:t>自動火災報知設備 ― 受信機、感知器、発信機</a:t>
             </a:r>
             <a:endParaRPr lang="en-US" sz="1150" dirty="0"/>
           </a:p>
@@ -4020,7 +4116,7 @@
                 <a:ea typeface="Calibri" pitchFamily="34" charset="-122"/>
                 <a:cs typeface="Calibri" pitchFamily="34" charset="-120"/>
               </a:rPr>
-              <a:t>Fire alarm system — panel, detectors, call points</a:t>
+              <a:t>Fire alarm system: panel, detectors, call points</a:t>
             </a:r>
             <a:endParaRPr lang="en-US" sz="1150" dirty="0"/>
           </a:p>
@@ -4028,7 +4124,7 @@
       </p:sp>
       <p:sp>
         <p:nvSpPr>
-          <p:cNvPr id="8" name="Shape 6"/>
+          <p:cNvPr id="9" name="Shape 6"/>
           <p:cNvSpPr/>
           <p:nvPr/>
         </p:nvSpPr>
@@ -4050,7 +4146,7 @@
       </p:sp>
       <p:sp>
         <p:nvSpPr>
-          <p:cNvPr id="9" name="Shape 7"/>
+          <p:cNvPr id="10" name="Shape 7"/>
           <p:cNvSpPr/>
           <p:nvPr/>
         </p:nvSpPr>
@@ -4063,14 +4159,14 @@
             <a:avLst/>
           </a:prstGeom>
           <a:solidFill>
-            <a:srgbClr val="0F2D52"/>
+            <a:srgbClr val="093259"/>
           </a:solidFill>
           <a:ln/>
         </p:spPr>
       </p:sp>
       <p:sp>
         <p:nvSpPr>
-          <p:cNvPr id="10" name="Text 8"/>
+          <p:cNvPr id="11" name="Text 8"/>
           <p:cNvSpPr/>
           <p:nvPr/>
         </p:nvSpPr>
@@ -4109,7 +4205,7 @@
       </p:sp>
       <p:sp>
         <p:nvSpPr>
-          <p:cNvPr id="11" name="Text 9"/>
+          <p:cNvPr id="12" name="Text 9"/>
           <p:cNvSpPr/>
           <p:nvPr/>
         </p:nvSpPr>
@@ -4143,7 +4239,7 @@
                 <a:ea typeface="Yu Gothic" pitchFamily="34" charset="-122"/>
                 <a:cs typeface="Yu Gothic" pitchFamily="34" charset="-120"/>
               </a:rPr>
-              <a:t>侵入警報 ― 扉・窓・空間センサー</a:t>
+              <a:t>侵入警報 ― 扉、窓、空間センサー</a:t>
             </a:r>
             <a:endParaRPr lang="en-US" sz="1150" dirty="0"/>
           </a:p>
@@ -4163,7 +4259,7 @@
                 <a:ea typeface="Calibri" pitchFamily="34" charset="-122"/>
                 <a:cs typeface="Calibri" pitchFamily="34" charset="-120"/>
               </a:rPr>
-              <a:t>Intrusion alarm — door, window and space sensors</a:t>
+              <a:t>Intrusion alarm: door, window and space sensors</a:t>
             </a:r>
             <a:endParaRPr lang="en-US" sz="1150" dirty="0"/>
           </a:p>
@@ -4171,7 +4267,7 @@
       </p:sp>
       <p:sp>
         <p:nvSpPr>
-          <p:cNvPr id="12" name="Shape 10"/>
+          <p:cNvPr id="13" name="Shape 10"/>
           <p:cNvSpPr/>
           <p:nvPr/>
         </p:nvSpPr>
@@ -4193,7 +4289,7 @@
       </p:sp>
       <p:sp>
         <p:nvSpPr>
-          <p:cNvPr id="13" name="Shape 11"/>
+          <p:cNvPr id="14" name="Shape 11"/>
           <p:cNvSpPr/>
           <p:nvPr/>
         </p:nvSpPr>
@@ -4206,14 +4302,14 @@
             <a:avLst/>
           </a:prstGeom>
           <a:solidFill>
-            <a:srgbClr val="0F2D52"/>
+            <a:srgbClr val="093259"/>
           </a:solidFill>
           <a:ln/>
         </p:spPr>
       </p:sp>
       <p:sp>
         <p:nvSpPr>
-          <p:cNvPr id="14" name="Text 12"/>
+          <p:cNvPr id="15" name="Text 12"/>
           <p:cNvSpPr/>
           <p:nvPr/>
         </p:nvSpPr>
@@ -4252,7 +4348,7 @@
       </p:sp>
       <p:sp>
         <p:nvSpPr>
-          <p:cNvPr id="15" name="Text 13"/>
+          <p:cNvPr id="16" name="Text 13"/>
           <p:cNvSpPr/>
           <p:nvPr/>
         </p:nvSpPr>
@@ -4286,7 +4382,7 @@
                 <a:ea typeface="Yu Gothic" pitchFamily="34" charset="-122"/>
                 <a:cs typeface="Yu Gothic" pitchFamily="34" charset="-120"/>
               </a:rPr>
-              <a:t>入退室管理 ― カードリーダー・電気錠・ログ</a:t>
+              <a:t>入退室管理 ― カードリーダー、電気錠、ログ</a:t>
             </a:r>
             <a:endParaRPr lang="en-US" sz="1150" dirty="0"/>
           </a:p>
@@ -4306,7 +4402,7 @@
                 <a:ea typeface="Calibri" pitchFamily="34" charset="-122"/>
                 <a:cs typeface="Calibri" pitchFamily="34" charset="-120"/>
               </a:rPr>
-              <a:t>Access control — readers, electric locks, logs</a:t>
+              <a:t>Access control: readers, electric locks, logs</a:t>
             </a:r>
             <a:endParaRPr lang="en-US" sz="1150" dirty="0"/>
           </a:p>
@@ -4314,7 +4410,7 @@
       </p:sp>
       <p:sp>
         <p:nvSpPr>
-          <p:cNvPr id="16" name="Shape 14"/>
+          <p:cNvPr id="17" name="Shape 14"/>
           <p:cNvSpPr/>
           <p:nvPr/>
         </p:nvSpPr>
@@ -4336,7 +4432,7 @@
       </p:sp>
       <p:sp>
         <p:nvSpPr>
-          <p:cNvPr id="17" name="Shape 15"/>
+          <p:cNvPr id="18" name="Shape 15"/>
           <p:cNvSpPr/>
           <p:nvPr/>
         </p:nvSpPr>
@@ -4349,14 +4445,14 @@
             <a:avLst/>
           </a:prstGeom>
           <a:solidFill>
-            <a:srgbClr val="0F2D52"/>
+            <a:srgbClr val="093259"/>
           </a:solidFill>
           <a:ln/>
         </p:spPr>
       </p:sp>
       <p:sp>
         <p:nvSpPr>
-          <p:cNvPr id="18" name="Text 16"/>
+          <p:cNvPr id="19" name="Text 16"/>
           <p:cNvSpPr/>
           <p:nvPr/>
         </p:nvSpPr>
@@ -4395,7 +4491,7 @@
       </p:sp>
       <p:sp>
         <p:nvSpPr>
-          <p:cNvPr id="19" name="Text 17"/>
+          <p:cNvPr id="20" name="Text 17"/>
           <p:cNvSpPr/>
           <p:nvPr/>
         </p:nvSpPr>
@@ -4429,7 +4525,7 @@
                 <a:ea typeface="Yu Gothic" pitchFamily="34" charset="-122"/>
                 <a:cs typeface="Yu Gothic" pitchFamily="34" charset="-120"/>
               </a:rPr>
-              <a:t>防犯カメラ ― 監視・録画・検索</a:t>
+              <a:t>防犯カメラ ― 監視、録画、検索</a:t>
             </a:r>
             <a:endParaRPr lang="en-US" sz="1150" dirty="0"/>
           </a:p>
@@ -4449,7 +4545,7 @@
                 <a:ea typeface="Calibri" pitchFamily="34" charset="-122"/>
                 <a:cs typeface="Calibri" pitchFamily="34" charset="-120"/>
               </a:rPr>
-              <a:t>CCTV — monitoring, recording, retrieval</a:t>
+              <a:t>CCTV: monitoring, recording, retrieval</a:t>
             </a:r>
             <a:endParaRPr lang="en-US" sz="1150" dirty="0"/>
           </a:p>
@@ -4457,7 +4553,7 @@
       </p:sp>
       <p:sp>
         <p:nvSpPr>
-          <p:cNvPr id="20" name="Shape 18"/>
+          <p:cNvPr id="21" name="Shape 18"/>
           <p:cNvSpPr/>
           <p:nvPr/>
         </p:nvSpPr>
@@ -4479,7 +4575,7 @@
       </p:sp>
       <p:sp>
         <p:nvSpPr>
-          <p:cNvPr id="21" name="Shape 19"/>
+          <p:cNvPr id="22" name="Shape 19"/>
           <p:cNvSpPr/>
           <p:nvPr/>
         </p:nvSpPr>
@@ -4492,14 +4588,14 @@
             <a:avLst/>
           </a:prstGeom>
           <a:solidFill>
-            <a:srgbClr val="0F2D52"/>
+            <a:srgbClr val="093259"/>
           </a:solidFill>
           <a:ln/>
         </p:spPr>
       </p:sp>
       <p:sp>
         <p:nvSpPr>
-          <p:cNvPr id="22" name="Text 20"/>
+          <p:cNvPr id="23" name="Text 20"/>
           <p:cNvSpPr/>
           <p:nvPr/>
         </p:nvSpPr>
@@ -4538,7 +4634,7 @@
       </p:sp>
       <p:sp>
         <p:nvSpPr>
-          <p:cNvPr id="23" name="Text 21"/>
+          <p:cNvPr id="24" name="Text 21"/>
           <p:cNvSpPr/>
           <p:nvPr/>
         </p:nvSpPr>
@@ -4572,7 +4668,7 @@
                 <a:ea typeface="Yu Gothic" pitchFamily="34" charset="-122"/>
                 <a:cs typeface="Yu Gothic" pitchFamily="34" charset="-120"/>
               </a:rPr>
-              <a:t>非常通報・無線 ― 非常電話・携帯無線機</a:t>
+              <a:t>非常通報、無線 ― 非常電話、携帯無線機</a:t>
             </a:r>
             <a:endParaRPr lang="en-US" sz="1150" dirty="0"/>
           </a:p>
@@ -4592,7 +4688,7 @@
                 <a:ea typeface="Calibri" pitchFamily="34" charset="-122"/>
                 <a:cs typeface="Calibri" pitchFamily="34" charset="-120"/>
               </a:rPr>
-              <a:t>Emergency call and radio — emergency phones, handhelds</a:t>
+              <a:t>Emergency call and radio: emergency phones, handheld radios</a:t>
             </a:r>
             <a:endParaRPr lang="en-US" sz="1150" dirty="0"/>
           </a:p>
@@ -4600,7 +4696,7 @@
       </p:sp>
       <p:sp>
         <p:nvSpPr>
-          <p:cNvPr id="24" name="Shape 22"/>
+          <p:cNvPr id="25" name="Shape 22"/>
           <p:cNvSpPr/>
           <p:nvPr/>
         </p:nvSpPr>
@@ -4622,7 +4718,7 @@
       </p:sp>
       <p:sp>
         <p:nvSpPr>
-          <p:cNvPr id="25" name="Shape 23"/>
+          <p:cNvPr id="26" name="Shape 23"/>
           <p:cNvSpPr/>
           <p:nvPr/>
         </p:nvSpPr>
@@ -4635,14 +4731,14 @@
             <a:avLst/>
           </a:prstGeom>
           <a:solidFill>
-            <a:srgbClr val="0F2D52"/>
+            <a:srgbClr val="093259"/>
           </a:solidFill>
           <a:ln/>
         </p:spPr>
       </p:sp>
       <p:sp>
         <p:nvSpPr>
-          <p:cNvPr id="26" name="Text 24"/>
+          <p:cNvPr id="27" name="Text 24"/>
           <p:cNvSpPr/>
           <p:nvPr/>
         </p:nvSpPr>
@@ -4681,7 +4777,7 @@
       </p:sp>
       <p:sp>
         <p:nvSpPr>
-          <p:cNvPr id="27" name="Text 25"/>
+          <p:cNvPr id="28" name="Text 25"/>
           <p:cNvSpPr/>
           <p:nvPr/>
         </p:nvSpPr>
@@ -4715,7 +4811,7 @@
                 <a:ea typeface="Yu Gothic" pitchFamily="34" charset="-122"/>
                 <a:cs typeface="Yu Gothic" pitchFamily="34" charset="-120"/>
               </a:rPr>
-              <a:t>消火・防排煙 ― 消火器・屋内消火栓・防火戸</a:t>
+              <a:t>消火、防排煙 ― 消火器、屋内消火栓、防火戸</a:t>
             </a:r>
             <a:endParaRPr lang="en-US" sz="1150" dirty="0"/>
           </a:p>
@@ -4735,7 +4831,7 @@
                 <a:ea typeface="Calibri" pitchFamily="34" charset="-122"/>
                 <a:cs typeface="Calibri" pitchFamily="34" charset="-120"/>
               </a:rPr>
-              <a:t>Fire response — extinguishers, hydrants, fire doors</a:t>
+              <a:t>Fire response: extinguishers, hydrants, fire doors</a:t>
             </a:r>
             <a:endParaRPr lang="en-US" sz="1150" dirty="0"/>
           </a:p>
@@ -4743,7 +4839,7 @@
       </p:sp>
       <p:sp>
         <p:nvSpPr>
-          <p:cNvPr id="28" name="Text 26"/>
+          <p:cNvPr id="29" name="Text 26"/>
           <p:cNvSpPr/>
           <p:nvPr/>
         </p:nvSpPr>
@@ -4796,7 +4892,7 @@
       </p:sp>
       <p:sp>
         <p:nvSpPr>
-          <p:cNvPr id="29" name="Text 27"/>
+          <p:cNvPr id="30" name="Text 27"/>
           <p:cNvSpPr/>
           <p:nvPr/>
         </p:nvSpPr>
@@ -4865,9 +4961,33 @@
           <a:chExt cx="0" cy="0"/>
         </a:xfrm>
       </p:grpSpPr>
-      <p:sp>
-        <p:nvSpPr>
-          <p:cNvPr id="2" name="Text 0"/>
+      <p:pic>
+        <p:nvPicPr>
+          <p:cNvPr id="2" name="Image 0" descr="/home/user/Training-/assets/logo.png">    </p:cNvPr>
+          <p:cNvPicPr>
+            <a:picLocks noChangeAspect="1"/>
+          </p:cNvPicPr>
+          <p:nvPr/>
+        </p:nvPicPr>
+        <p:blipFill>
+          <a:blip r:embed="rId1"/>
+          <a:stretch>
+            <a:fillRect/>
+          </a:stretch>
+        </p:blipFill>
+        <p:spPr>
+          <a:xfrm>
+            <a:off x="10765231" y="332912"/>
+            <a:ext cx="786384" cy="742353"/>
+          </a:xfrm>
+          <a:prstGeom prst="rect">
+            <a:avLst/>
+          </a:prstGeom>
+        </p:spPr>
+      </p:pic>
+      <p:sp>
+        <p:nvSpPr>
+          <p:cNvPr id="3" name="Text 0"/>
           <p:cNvSpPr/>
           <p:nvPr/>
         </p:nvSpPr>
@@ -4895,13 +5015,13 @@
             <a:r>
               <a:rPr lang="en-US" sz="2700" b="1" dirty="0">
                 <a:solidFill>
-                  <a:srgbClr val="0F2D52"/>
+                  <a:srgbClr val="093259"/>
                 </a:solidFill>
                 <a:latin typeface="Yu Gothic" pitchFamily="34" charset="0"/>
                 <a:ea typeface="Yu Gothic" pitchFamily="34" charset="-122"/>
                 <a:cs typeface="Yu Gothic" pitchFamily="34" charset="-120"/>
               </a:rPr>
-              <a:t>受信機 ― まず見るのは「どこが鳴っているか」</a:t>
+              <a:t>受信機の確認手順</a:t>
             </a:r>
             <a:endParaRPr lang="en-US" sz="2700" dirty="0"/>
           </a:p>
@@ -4915,13 +5035,13 @@
             <a:r>
               <a:rPr lang="en-US" sz="1250" i="1" dirty="0">
                 <a:solidFill>
-                  <a:srgbClr val="17AF98"/>
-                </a:solidFill>
-                <a:latin typeface="Calibri" pitchFamily="34" charset="0"/>
-                <a:ea typeface="Calibri" pitchFamily="34" charset="-122"/>
-                <a:cs typeface="Calibri" pitchFamily="34" charset="-120"/>
-              </a:rPr>
-              <a:t>The Fire Panel — first look at where, not at the noise</a:t>
+                  <a:srgbClr val="12B198"/>
+                </a:solidFill>
+                <a:latin typeface="Calibri" pitchFamily="34" charset="0"/>
+                <a:ea typeface="Calibri" pitchFamily="34" charset="-122"/>
+                <a:cs typeface="Calibri" pitchFamily="34" charset="-120"/>
+              </a:rPr>
+              <a:t>Using the Fire Alarm Panel</a:t>
             </a:r>
             <a:endParaRPr lang="en-US" sz="2700" dirty="0"/>
           </a:p>
@@ -4929,7 +5049,7 @@
       </p:sp>
       <p:sp>
         <p:nvSpPr>
-          <p:cNvPr id="3" name="Text 1"/>
+          <p:cNvPr id="4" name="Text 1"/>
           <p:cNvSpPr/>
           <p:nvPr/>
         </p:nvSpPr>
@@ -4957,13 +5077,13 @@
             <a:r>
               <a:rPr lang="en-US" sz="1300" dirty="0">
                 <a:solidFill>
-                  <a:srgbClr val="0F2D52"/>
+                  <a:srgbClr val="093259"/>
                 </a:solidFill>
                 <a:latin typeface="Yu Gothic" pitchFamily="34" charset="0"/>
                 <a:ea typeface="Yu Gothic" pitchFamily="34" charset="-122"/>
                 <a:cs typeface="Yu Gothic" pitchFamily="34" charset="-120"/>
               </a:rPr>
-              <a:t>音を止めることは目的ではありません。地区表示を読むことが最初の仕事です。</a:t>
+              <a:t>最初に確認するのは地区表示です。音を止めることは目的ではありません。</a:t>
             </a:r>
             <a:endParaRPr lang="en-US" sz="1300" dirty="0"/>
           </a:p>
@@ -4983,7 +5103,7 @@
                 <a:ea typeface="Calibri" pitchFamily="34" charset="-122"/>
                 <a:cs typeface="Calibri" pitchFamily="34" charset="-120"/>
               </a:rPr>
-              <a:t>Silencing the panel is not the goal. Reading the zone display is the first job.</a:t>
+              <a:t>Check the zone display first. Silencing the panel is not the objective.</a:t>
             </a:r>
             <a:endParaRPr lang="en-US" sz="1300" dirty="0"/>
           </a:p>
@@ -4991,7 +5111,7 @@
       </p:sp>
       <p:sp>
         <p:nvSpPr>
-          <p:cNvPr id="4" name="Shape 2"/>
+          <p:cNvPr id="5" name="Shape 2"/>
           <p:cNvSpPr/>
           <p:nvPr/>
         </p:nvSpPr>
@@ -5013,7 +5133,7 @@
       </p:sp>
       <p:sp>
         <p:nvSpPr>
-          <p:cNvPr id="5" name="Shape 3"/>
+          <p:cNvPr id="6" name="Shape 3"/>
           <p:cNvSpPr/>
           <p:nvPr/>
         </p:nvSpPr>
@@ -5026,14 +5146,14 @@
             <a:avLst/>
           </a:prstGeom>
           <a:solidFill>
-            <a:srgbClr val="17AF98"/>
+            <a:srgbClr val="12B198"/>
           </a:solidFill>
           <a:ln/>
         </p:spPr>
       </p:sp>
       <p:sp>
         <p:nvSpPr>
-          <p:cNvPr id="6" name="Text 4"/>
+          <p:cNvPr id="7" name="Text 4"/>
           <p:cNvSpPr/>
           <p:nvPr/>
         </p:nvSpPr>
@@ -5072,7 +5192,7 @@
       </p:sp>
       <p:sp>
         <p:nvSpPr>
-          <p:cNvPr id="7" name="Text 5"/>
+          <p:cNvPr id="8" name="Text 5"/>
           <p:cNvSpPr/>
           <p:nvPr/>
         </p:nvSpPr>
@@ -5106,7 +5226,7 @@
                 <a:ea typeface="Yu Gothic" pitchFamily="34" charset="-122"/>
                 <a:cs typeface="Yu Gothic" pitchFamily="34" charset="-120"/>
               </a:rPr>
-              <a:t>地区表示を読む ― 何階、どの区画か。</a:t>
+              <a:t>地区表示を読みます。何階、どの区画か。</a:t>
             </a:r>
             <a:endParaRPr lang="en-US" sz="1450" dirty="0"/>
           </a:p>
@@ -5126,7 +5246,7 @@
                 <a:ea typeface="Calibri" pitchFamily="34" charset="-122"/>
                 <a:cs typeface="Calibri" pitchFamily="34" charset="-120"/>
               </a:rPr>
-              <a:t>Read the zone display — which floor, which zone.</a:t>
+              <a:t>Read the zone display: which floor, which zone.</a:t>
             </a:r>
             <a:endParaRPr lang="en-US" sz="1450" dirty="0"/>
           </a:p>
@@ -5134,7 +5254,7 @@
       </p:sp>
       <p:sp>
         <p:nvSpPr>
-          <p:cNvPr id="8" name="Shape 6"/>
+          <p:cNvPr id="9" name="Shape 6"/>
           <p:cNvSpPr/>
           <p:nvPr/>
         </p:nvSpPr>
@@ -5156,7 +5276,7 @@
       </p:sp>
       <p:sp>
         <p:nvSpPr>
-          <p:cNvPr id="9" name="Shape 7"/>
+          <p:cNvPr id="10" name="Shape 7"/>
           <p:cNvSpPr/>
           <p:nvPr/>
         </p:nvSpPr>
@@ -5169,14 +5289,14 @@
             <a:avLst/>
           </a:prstGeom>
           <a:solidFill>
-            <a:srgbClr val="17AF98"/>
+            <a:srgbClr val="12B198"/>
           </a:solidFill>
           <a:ln/>
         </p:spPr>
       </p:sp>
       <p:sp>
         <p:nvSpPr>
-          <p:cNvPr id="10" name="Text 8"/>
+          <p:cNvPr id="11" name="Text 8"/>
           <p:cNvSpPr/>
           <p:nvPr/>
         </p:nvSpPr>
@@ -5215,7 +5335,7 @@
       </p:sp>
       <p:sp>
         <p:nvSpPr>
-          <p:cNvPr id="11" name="Text 9"/>
+          <p:cNvPr id="12" name="Text 9"/>
           <p:cNvSpPr/>
           <p:nvPr/>
         </p:nvSpPr>
@@ -5249,7 +5369,7 @@
                 <a:ea typeface="Yu Gothic" pitchFamily="34" charset="-122"/>
                 <a:cs typeface="Yu Gothic" pitchFamily="34" charset="-120"/>
               </a:rPr>
-              <a:t>現場を確認する ― 目視するまで断定しない。</a:t>
+              <a:t>現場を確認します。目視するまで断定しません。</a:t>
             </a:r>
             <a:endParaRPr lang="en-US" sz="1450" dirty="0"/>
           </a:p>
@@ -5269,7 +5389,7 @@
                 <a:ea typeface="Calibri" pitchFamily="34" charset="-122"/>
                 <a:cs typeface="Calibri" pitchFamily="34" charset="-120"/>
               </a:rPr>
-              <a:t>Verify on site — never conclude before you have seen it.</a:t>
+              <a:t>Verify on site. Do not conclude before you have seen it.</a:t>
             </a:r>
             <a:endParaRPr lang="en-US" sz="1450" dirty="0"/>
           </a:p>
@@ -5277,7 +5397,7 @@
       </p:sp>
       <p:sp>
         <p:nvSpPr>
-          <p:cNvPr id="12" name="Shape 10"/>
+          <p:cNvPr id="13" name="Shape 10"/>
           <p:cNvSpPr/>
           <p:nvPr/>
         </p:nvSpPr>
@@ -5299,7 +5419,7 @@
       </p:sp>
       <p:sp>
         <p:nvSpPr>
-          <p:cNvPr id="13" name="Shape 11"/>
+          <p:cNvPr id="14" name="Shape 11"/>
           <p:cNvSpPr/>
           <p:nvPr/>
         </p:nvSpPr>
@@ -5312,14 +5432,14 @@
             <a:avLst/>
           </a:prstGeom>
           <a:solidFill>
-            <a:srgbClr val="17AF98"/>
+            <a:srgbClr val="12B198"/>
           </a:solidFill>
           <a:ln/>
         </p:spPr>
       </p:sp>
       <p:sp>
         <p:nvSpPr>
-          <p:cNvPr id="14" name="Text 12"/>
+          <p:cNvPr id="15" name="Text 12"/>
           <p:cNvSpPr/>
           <p:nvPr/>
         </p:nvSpPr>
@@ -5358,7 +5478,7 @@
       </p:sp>
       <p:sp>
         <p:nvSpPr>
-          <p:cNvPr id="15" name="Text 13"/>
+          <p:cNvPr id="16" name="Text 13"/>
           <p:cNvSpPr/>
           <p:nvPr/>
         </p:nvSpPr>
@@ -5392,7 +5512,7 @@
                 <a:ea typeface="Yu Gothic" pitchFamily="34" charset="-122"/>
                 <a:cs typeface="Yu Gothic" pitchFamily="34" charset="-120"/>
               </a:rPr>
-              <a:t>連動状況を確認する ― 何が既に作動したか。</a:t>
+              <a:t>連動の状況を確認します。何が既に作動したか。</a:t>
             </a:r>
             <a:endParaRPr lang="en-US" sz="1450" dirty="0"/>
           </a:p>
@@ -5412,7 +5532,7 @@
                 <a:ea typeface="Calibri" pitchFamily="34" charset="-122"/>
                 <a:cs typeface="Calibri" pitchFamily="34" charset="-120"/>
               </a:rPr>
-              <a:t>Check what has already actuated — which linked systems have operated.</a:t>
+              <a:t>Check what has already actuated.</a:t>
             </a:r>
             <a:endParaRPr lang="en-US" sz="1450" dirty="0"/>
           </a:p>
@@ -5420,7 +5540,7 @@
       </p:sp>
       <p:sp>
         <p:nvSpPr>
-          <p:cNvPr id="16" name="Shape 14"/>
+          <p:cNvPr id="17" name="Shape 14"/>
           <p:cNvSpPr/>
           <p:nvPr/>
         </p:nvSpPr>
@@ -5442,7 +5562,7 @@
       </p:sp>
       <p:sp>
         <p:nvSpPr>
-          <p:cNvPr id="17" name="Shape 15"/>
+          <p:cNvPr id="18" name="Shape 15"/>
           <p:cNvSpPr/>
           <p:nvPr/>
         </p:nvSpPr>
@@ -5455,14 +5575,14 @@
             <a:avLst/>
           </a:prstGeom>
           <a:solidFill>
-            <a:srgbClr val="17AF98"/>
+            <a:srgbClr val="12B198"/>
           </a:solidFill>
           <a:ln/>
         </p:spPr>
       </p:sp>
       <p:sp>
         <p:nvSpPr>
-          <p:cNvPr id="18" name="Text 16"/>
+          <p:cNvPr id="19" name="Text 16"/>
           <p:cNvSpPr/>
           <p:nvPr/>
         </p:nvSpPr>
@@ -5501,7 +5621,7 @@
       </p:sp>
       <p:sp>
         <p:nvSpPr>
-          <p:cNvPr id="19" name="Text 17"/>
+          <p:cNvPr id="20" name="Text 17"/>
           <p:cNvSpPr/>
           <p:nvPr/>
         </p:nvSpPr>
@@ -5535,7 +5655,7 @@
                 <a:ea typeface="Yu Gothic" pitchFamily="34" charset="-122"/>
                 <a:cs typeface="Yu Gothic" pitchFamily="34" charset="-120"/>
               </a:rPr>
-              <a:t>報告する ― 事実（地区表示）と評価（推測）を分けて。</a:t>
+              <a:t>報告します。事実（地区表示）と評価（推測）を分けます。</a:t>
             </a:r>
             <a:endParaRPr lang="en-US" sz="1450" dirty="0"/>
           </a:p>
@@ -5555,7 +5675,7 @@
                 <a:ea typeface="Calibri" pitchFamily="34" charset="-122"/>
                 <a:cs typeface="Calibri" pitchFamily="34" charset="-120"/>
               </a:rPr>
-              <a:t>Report — keeping the fact (the zone) separate from your assessment.</a:t>
+              <a:t>Report, keeping the fact (the zone) separate from your assessment.</a:t>
             </a:r>
             <a:endParaRPr lang="en-US" sz="1450" dirty="0"/>
           </a:p>
@@ -5563,7 +5683,7 @@
       </p:sp>
       <p:sp>
         <p:nvSpPr>
-          <p:cNvPr id="20" name="Text 18"/>
+          <p:cNvPr id="21" name="Text 18"/>
           <p:cNvSpPr/>
           <p:nvPr/>
         </p:nvSpPr>
@@ -5616,7 +5736,7 @@
       </p:sp>
       <p:sp>
         <p:nvSpPr>
-          <p:cNvPr id="21" name="Text 19"/>
+          <p:cNvPr id="22" name="Text 19"/>
           <p:cNvSpPr/>
           <p:nvPr/>
         </p:nvSpPr>
@@ -5685,9 +5805,33 @@
           <a:chExt cx="0" cy="0"/>
         </a:xfrm>
       </p:grpSpPr>
-      <p:sp>
-        <p:nvSpPr>
-          <p:cNvPr id="2" name="Text 0"/>
+      <p:pic>
+        <p:nvPicPr>
+          <p:cNvPr id="2" name="Image 0" descr="/home/user/Training-/assets/logo.png">    </p:cNvPr>
+          <p:cNvPicPr>
+            <a:picLocks noChangeAspect="1"/>
+          </p:cNvPicPr>
+          <p:nvPr/>
+        </p:nvPicPr>
+        <p:blipFill>
+          <a:blip r:embed="rId1"/>
+          <a:stretch>
+            <a:fillRect/>
+          </a:stretch>
+        </p:blipFill>
+        <p:spPr>
+          <a:xfrm>
+            <a:off x="10765231" y="332912"/>
+            <a:ext cx="786384" cy="742353"/>
+          </a:xfrm>
+          <a:prstGeom prst="rect">
+            <a:avLst/>
+          </a:prstGeom>
+        </p:spPr>
+      </p:pic>
+      <p:sp>
+        <p:nvSpPr>
+          <p:cNvPr id="3" name="Text 0"/>
           <p:cNvSpPr/>
           <p:nvPr/>
         </p:nvSpPr>
@@ -5715,13 +5859,13 @@
             <a:r>
               <a:rPr lang="en-US" sz="2700" b="1" dirty="0">
                 <a:solidFill>
-                  <a:srgbClr val="0F2D52"/>
+                  <a:srgbClr val="093259"/>
                 </a:solidFill>
                 <a:latin typeface="Yu Gothic" pitchFamily="34" charset="0"/>
                 <a:ea typeface="Yu Gothic" pitchFamily="34" charset="-122"/>
                 <a:cs typeface="Yu Gothic" pitchFamily="34" charset="-120"/>
               </a:rPr>
-              <a:t>発報 ＝ 火災ではない</a:t>
+              <a:t>発報は火災の確定ではありません</a:t>
             </a:r>
             <a:endParaRPr lang="en-US" sz="2700" dirty="0"/>
           </a:p>
@@ -5735,13 +5879,13 @@
             <a:r>
               <a:rPr lang="en-US" sz="1250" i="1" dirty="0">
                 <a:solidFill>
-                  <a:srgbClr val="17AF98"/>
-                </a:solidFill>
-                <a:latin typeface="Calibri" pitchFamily="34" charset="0"/>
-                <a:ea typeface="Calibri" pitchFamily="34" charset="-122"/>
-                <a:cs typeface="Calibri" pitchFamily="34" charset="-120"/>
-              </a:rPr>
-              <a:t>An Alarm Is Not a Fire</a:t>
+                  <a:srgbClr val="12B198"/>
+                </a:solidFill>
+                <a:latin typeface="Calibri" pitchFamily="34" charset="0"/>
+                <a:ea typeface="Calibri" pitchFamily="34" charset="-122"/>
+                <a:cs typeface="Calibri" pitchFamily="34" charset="-120"/>
+              </a:rPr>
+              <a:t>An Activation Is Not a Confirmed Fire</a:t>
             </a:r>
             <a:endParaRPr lang="en-US" sz="2700" dirty="0"/>
           </a:p>
@@ -5749,7 +5893,7 @@
       </p:sp>
       <p:sp>
         <p:nvSpPr>
-          <p:cNvPr id="3" name="Shape 1"/>
+          <p:cNvPr id="4" name="Shape 1"/>
           <p:cNvSpPr/>
           <p:nvPr/>
         </p:nvSpPr>
@@ -5764,14 +5908,14 @@
             </a:avLst>
           </a:prstGeom>
           <a:solidFill>
-            <a:srgbClr val="0F2D52"/>
+            <a:srgbClr val="093259"/>
           </a:solidFill>
           <a:ln/>
         </p:spPr>
       </p:sp>
       <p:sp>
         <p:nvSpPr>
-          <p:cNvPr id="4" name="Text 2"/>
+          <p:cNvPr id="5" name="Text 2"/>
           <p:cNvSpPr/>
           <p:nvPr/>
         </p:nvSpPr>
@@ -5805,7 +5949,7 @@
                 <a:ea typeface="Yu Gothic" pitchFamily="34" charset="-122"/>
                 <a:cs typeface="Yu Gothic" pitchFamily="34" charset="-120"/>
               </a:rPr>
-              <a:t>発報は「感知器が作動した」という事実にすぎません。</a:t>
+              <a:t>発報は、感知器が作動したという事実です。</a:t>
             </a:r>
             <a:endParaRPr lang="en-US" sz="1800" dirty="0"/>
           </a:p>
@@ -5825,7 +5969,7 @@
                 <a:ea typeface="Yu Gothic" pitchFamily="34" charset="-122"/>
                 <a:cs typeface="Yu Gothic" pitchFamily="34" charset="-120"/>
               </a:rPr>
-              <a:t>現場を見るまで、火災と断定しないでください。</a:t>
+              <a:t>現場を確認するまで、火災と断定しません。</a:t>
             </a:r>
             <a:endParaRPr lang="en-US" sz="1800" dirty="0"/>
           </a:p>
@@ -5833,7 +5977,7 @@
       </p:sp>
       <p:sp>
         <p:nvSpPr>
-          <p:cNvPr id="5" name="Text 3"/>
+          <p:cNvPr id="6" name="Text 3"/>
           <p:cNvSpPr/>
           <p:nvPr/>
         </p:nvSpPr>
@@ -5867,7 +6011,7 @@
                 <a:ea typeface="Calibri" pitchFamily="34" charset="-122"/>
                 <a:cs typeface="Calibri" pitchFamily="34" charset="-120"/>
               </a:rPr>
-              <a:t>An activation is only the fact that a detector operated.</a:t>
+              <a:t>An activation means a detector has operated.</a:t>
             </a:r>
             <a:endParaRPr lang="en-US" sz="1200" dirty="0"/>
           </a:p>
@@ -5887,7 +6031,7 @@
                 <a:ea typeface="Calibri" pitchFamily="34" charset="-122"/>
                 <a:cs typeface="Calibri" pitchFamily="34" charset="-120"/>
               </a:rPr>
-              <a:t>Until you have seen the scene, do not declare a fire.</a:t>
+              <a:t>Do not declare a fire until you have checked the site.</a:t>
             </a:r>
             <a:endParaRPr lang="en-US" sz="1200" dirty="0"/>
           </a:p>
@@ -5895,7 +6039,7 @@
       </p:sp>
       <p:sp>
         <p:nvSpPr>
-          <p:cNvPr id="6" name="Shape 4"/>
+          <p:cNvPr id="7" name="Shape 4"/>
           <p:cNvSpPr/>
           <p:nvPr/>
         </p:nvSpPr>
@@ -5917,7 +6061,7 @@
       </p:sp>
       <p:sp>
         <p:nvSpPr>
-          <p:cNvPr id="7" name="Shape 5"/>
+          <p:cNvPr id="8" name="Shape 5"/>
           <p:cNvSpPr/>
           <p:nvPr/>
         </p:nvSpPr>
@@ -5930,14 +6074,14 @@
             <a:avLst/>
           </a:prstGeom>
           <a:solidFill>
-            <a:srgbClr val="17AF98"/>
+            <a:srgbClr val="12B198"/>
           </a:solidFill>
           <a:ln/>
         </p:spPr>
       </p:sp>
       <p:sp>
         <p:nvSpPr>
-          <p:cNvPr id="8" name="Text 6"/>
+          <p:cNvPr id="9" name="Text 6"/>
           <p:cNvSpPr/>
           <p:nvPr/>
         </p:nvSpPr>
@@ -5976,7 +6120,7 @@
       </p:sp>
       <p:sp>
         <p:nvSpPr>
-          <p:cNvPr id="9" name="Text 7"/>
+          <p:cNvPr id="10" name="Text 7"/>
           <p:cNvSpPr/>
           <p:nvPr/>
         </p:nvSpPr>
@@ -6004,13 +6148,13 @@
             <a:r>
               <a:rPr lang="en-US" sz="1450" b="1" dirty="0">
                 <a:solidFill>
-                  <a:srgbClr val="0F2D52"/>
+                  <a:srgbClr val="093259"/>
                 </a:solidFill>
                 <a:latin typeface="Yu Gothic" pitchFamily="34" charset="0"/>
                 <a:ea typeface="Yu Gothic" pitchFamily="34" charset="-122"/>
                 <a:cs typeface="Yu Gothic" pitchFamily="34" charset="-120"/>
               </a:rPr>
-              <a:t>無線での言い方 ―「3階東区画、発報。現場確認に向かいます」。「火事です」とは言わない。蒸気・埃・調理・工事による非火災報は日常的に起きます。</a:t>
+              <a:t>無線では「3階東区画、発報。現場確認に向かいます」と伝えます。蒸気、埃、調理、工事による非火災報が生じます。</a:t>
             </a:r>
             <a:endParaRPr lang="en-US" sz="1450" dirty="0"/>
           </a:p>
@@ -6024,13 +6168,13 @@
             <a:r>
               <a:rPr lang="en-US" sz="1000" i="1" dirty="0">
                 <a:solidFill>
-                  <a:srgbClr val="0E8C79"/>
-                </a:solidFill>
-                <a:latin typeface="Calibri" pitchFamily="34" charset="0"/>
-                <a:ea typeface="Calibri" pitchFamily="34" charset="-122"/>
-                <a:cs typeface="Calibri" pitchFamily="34" charset="-120"/>
-              </a:rPr>
-              <a:t>On the radio: "Third floor east zone, alarm activation, proceeding to verify." Do not say "fire." Steam, dust, cooking and construction cause non-fire activations routinely.</a:t>
+                  <a:srgbClr val="0D8A76"/>
+                </a:solidFill>
+                <a:latin typeface="Calibri" pitchFamily="34" charset="0"/>
+                <a:ea typeface="Calibri" pitchFamily="34" charset="-122"/>
+                <a:cs typeface="Calibri" pitchFamily="34" charset="-120"/>
+              </a:rPr>
+              <a:t>On the radio: "Third floor east zone, activation, going to verify." Steam, dust, cooking and construction cause non-fire activations.</a:t>
             </a:r>
             <a:endParaRPr lang="en-US" sz="1450" dirty="0"/>
           </a:p>
@@ -6038,7 +6182,7 @@
       </p:sp>
       <p:sp>
         <p:nvSpPr>
-          <p:cNvPr id="10" name="Text 8"/>
+          <p:cNvPr id="11" name="Text 8"/>
           <p:cNvSpPr/>
           <p:nvPr/>
         </p:nvSpPr>
@@ -6091,7 +6235,7 @@
       </p:sp>
       <p:sp>
         <p:nvSpPr>
-          <p:cNvPr id="11" name="Text 9"/>
+          <p:cNvPr id="12" name="Text 9"/>
           <p:cNvSpPr/>
           <p:nvPr/>
         </p:nvSpPr>
@@ -6160,9 +6304,33 @@
           <a:chExt cx="0" cy="0"/>
         </a:xfrm>
       </p:grpSpPr>
-      <p:sp>
-        <p:nvSpPr>
-          <p:cNvPr id="2" name="Text 0"/>
+      <p:pic>
+        <p:nvPicPr>
+          <p:cNvPr id="2" name="Image 0" descr="/home/user/Training-/assets/logo.png">    </p:cNvPr>
+          <p:cNvPicPr>
+            <a:picLocks noChangeAspect="1"/>
+          </p:cNvPicPr>
+          <p:nvPr/>
+        </p:nvPicPr>
+        <p:blipFill>
+          <a:blip r:embed="rId1"/>
+          <a:stretch>
+            <a:fillRect/>
+          </a:stretch>
+        </p:blipFill>
+        <p:spPr>
+          <a:xfrm>
+            <a:off x="10765231" y="332912"/>
+            <a:ext cx="786384" cy="742353"/>
+          </a:xfrm>
+          <a:prstGeom prst="rect">
+            <a:avLst/>
+          </a:prstGeom>
+        </p:spPr>
+      </p:pic>
+      <p:sp>
+        <p:nvSpPr>
+          <p:cNvPr id="3" name="Text 0"/>
           <p:cNvSpPr/>
           <p:nvPr/>
         </p:nvSpPr>
@@ -6190,13 +6358,13 @@
             <a:r>
               <a:rPr lang="en-US" sz="2700" b="1" dirty="0">
                 <a:solidFill>
-                  <a:srgbClr val="0F2D52"/>
+                  <a:srgbClr val="093259"/>
                 </a:solidFill>
                 <a:latin typeface="Yu Gothic" pitchFamily="34" charset="0"/>
                 <a:ea typeface="Yu Gothic" pitchFamily="34" charset="-122"/>
                 <a:cs typeface="Yu Gothic" pitchFamily="34" charset="-120"/>
               </a:rPr>
-              <a:t>連動 ― 人の動線が変わる</a:t>
+              <a:t>連動 ― 通行経路が変わります</a:t>
             </a:r>
             <a:endParaRPr lang="en-US" sz="2700" dirty="0"/>
           </a:p>
@@ -6210,13 +6378,13 @@
             <a:r>
               <a:rPr lang="en-US" sz="1250" i="1" dirty="0">
                 <a:solidFill>
-                  <a:srgbClr val="17AF98"/>
-                </a:solidFill>
-                <a:latin typeface="Calibri" pitchFamily="34" charset="0"/>
-                <a:ea typeface="Calibri" pitchFamily="34" charset="-122"/>
-                <a:cs typeface="Calibri" pitchFamily="34" charset="-120"/>
-              </a:rPr>
-              <a:t>Linked Systems — the building changes shape</a:t>
+                  <a:srgbClr val="12B198"/>
+                </a:solidFill>
+                <a:latin typeface="Calibri" pitchFamily="34" charset="0"/>
+                <a:ea typeface="Calibri" pitchFamily="34" charset="-122"/>
+                <a:cs typeface="Calibri" pitchFamily="34" charset="-120"/>
+              </a:rPr>
+              <a:t>Linked Systems Change the Available Routes</a:t>
             </a:r>
             <a:endParaRPr lang="en-US" sz="2700" dirty="0"/>
           </a:p>
@@ -6224,7 +6392,7 @@
       </p:sp>
       <p:sp>
         <p:nvSpPr>
-          <p:cNvPr id="3" name="Text 1"/>
+          <p:cNvPr id="4" name="Text 1"/>
           <p:cNvSpPr/>
           <p:nvPr/>
         </p:nvSpPr>
@@ -6252,13 +6420,13 @@
             <a:r>
               <a:rPr lang="en-US" sz="1300" dirty="0">
                 <a:solidFill>
-                  <a:srgbClr val="0F2D52"/>
+                  <a:srgbClr val="093259"/>
                 </a:solidFill>
                 <a:latin typeface="Yu Gothic" pitchFamily="34" charset="0"/>
                 <a:ea typeface="Yu Gothic" pitchFamily="34" charset="-122"/>
                 <a:cs typeface="Yu Gothic" pitchFamily="34" charset="-120"/>
               </a:rPr>
-              <a:t>連動が作動すると、昨日まで通れた場所が通れなくなります。</a:t>
+              <a:t>連動が作動すると、通行できる経路が変わります。避難誘導はこれを前提に行います。</a:t>
             </a:r>
             <a:endParaRPr lang="en-US" sz="1300" dirty="0"/>
           </a:p>
@@ -6278,7 +6446,7 @@
                 <a:ea typeface="Calibri" pitchFamily="34" charset="-122"/>
                 <a:cs typeface="Calibri" pitchFamily="34" charset="-120"/>
               </a:rPr>
-              <a:t>When linked systems operate, routes that worked yesterday stop working.</a:t>
+              <a:t>When linked systems operate, the usable routes change. Plan evacuation guidance on that basis.</a:t>
             </a:r>
             <a:endParaRPr lang="en-US" sz="1300" dirty="0"/>
           </a:p>
@@ -6286,7 +6454,7 @@
       </p:sp>
       <p:sp>
         <p:nvSpPr>
-          <p:cNvPr id="4" name="Shape 2"/>
+          <p:cNvPr id="5" name="Shape 2"/>
           <p:cNvSpPr/>
           <p:nvPr/>
         </p:nvSpPr>
@@ -6308,7 +6476,7 @@
       </p:sp>
       <p:sp>
         <p:nvSpPr>
-          <p:cNvPr id="5" name="Shape 3"/>
+          <p:cNvPr id="6" name="Shape 3"/>
           <p:cNvSpPr/>
           <p:nvPr/>
         </p:nvSpPr>
@@ -6321,14 +6489,14 @@
             <a:avLst/>
           </a:prstGeom>
           <a:solidFill>
-            <a:srgbClr val="17AF98"/>
+            <a:srgbClr val="12B198"/>
           </a:solidFill>
           <a:ln/>
         </p:spPr>
       </p:sp>
       <p:sp>
         <p:nvSpPr>
-          <p:cNvPr id="6" name="Text 4"/>
+          <p:cNvPr id="7" name="Text 4"/>
           <p:cNvSpPr/>
           <p:nvPr/>
         </p:nvSpPr>
@@ -6367,7 +6535,7 @@
       </p:sp>
       <p:sp>
         <p:nvSpPr>
-          <p:cNvPr id="7" name="Text 5"/>
+          <p:cNvPr id="8" name="Text 5"/>
           <p:cNvSpPr/>
           <p:nvPr/>
         </p:nvSpPr>
@@ -6401,7 +6569,7 @@
                 <a:ea typeface="Yu Gothic" pitchFamily="34" charset="-122"/>
                 <a:cs typeface="Yu Gothic" pitchFamily="34" charset="-120"/>
               </a:rPr>
-              <a:t>防火戸・防排煙 ― 閉鎖すると経路が変わる。押して開くか確認。</a:t>
+              <a:t>防火戸、防排煙 ― 閉鎖により経路が変わります。押して開くか確認します。</a:t>
             </a:r>
             <a:endParaRPr lang="en-US" sz="1450" dirty="0"/>
           </a:p>
@@ -6421,7 +6589,7 @@
                 <a:ea typeface="Calibri" pitchFamily="34" charset="-122"/>
                 <a:cs typeface="Calibri" pitchFamily="34" charset="-120"/>
               </a:rPr>
-              <a:t>Fire doors and smoke control — closures reroute movement. Know which ones still open.</a:t>
+              <a:t>Fire doors and smoke control: closures change routes. Check which still open.</a:t>
             </a:r>
             <a:endParaRPr lang="en-US" sz="1450" dirty="0"/>
           </a:p>
@@ -6429,7 +6597,7 @@
       </p:sp>
       <p:sp>
         <p:nvSpPr>
-          <p:cNvPr id="8" name="Shape 6"/>
+          <p:cNvPr id="9" name="Shape 6"/>
           <p:cNvSpPr/>
           <p:nvPr/>
         </p:nvSpPr>
@@ -6451,7 +6619,7 @@
       </p:sp>
       <p:sp>
         <p:nvSpPr>
-          <p:cNvPr id="9" name="Shape 7"/>
+          <p:cNvPr id="10" name="Shape 7"/>
           <p:cNvSpPr/>
           <p:nvPr/>
         </p:nvSpPr>
@@ -6464,14 +6632,14 @@
             <a:avLst/>
           </a:prstGeom>
           <a:solidFill>
-            <a:srgbClr val="17AF98"/>
+            <a:srgbClr val="12B198"/>
           </a:solidFill>
           <a:ln/>
         </p:spPr>
       </p:sp>
       <p:sp>
         <p:nvSpPr>
-          <p:cNvPr id="10" name="Text 8"/>
+          <p:cNvPr id="11" name="Text 8"/>
           <p:cNvSpPr/>
           <p:nvPr/>
         </p:nvSpPr>
@@ -6510,7 +6678,7 @@
       </p:sp>
       <p:sp>
         <p:nvSpPr>
-          <p:cNvPr id="11" name="Text 9"/>
+          <p:cNvPr id="12" name="Text 9"/>
           <p:cNvSpPr/>
           <p:nvPr/>
         </p:nvSpPr>
@@ -6544,7 +6712,7 @@
                 <a:ea typeface="Yu Gothic" pitchFamily="34" charset="-122"/>
                 <a:cs typeface="Yu Gothic" pitchFamily="34" charset="-120"/>
               </a:rPr>
-              <a:t>非常放送 ― 自分の声より優先される。放送中は無線が通りにくい。</a:t>
+              <a:t>非常放送 ― 放送が優先されます。放送中は無線が通りにくくなります。</a:t>
             </a:r>
             <a:endParaRPr lang="en-US" sz="1450" dirty="0"/>
           </a:p>
@@ -6564,7 +6732,7 @@
                 <a:ea typeface="Calibri" pitchFamily="34" charset="-122"/>
                 <a:cs typeface="Calibri" pitchFamily="34" charset="-120"/>
               </a:rPr>
-              <a:t>Public address — it overrides you, and radio traffic suffers while it runs.</a:t>
+              <a:t>Public address takes priority. Radio traffic is harder while it runs.</a:t>
             </a:r>
             <a:endParaRPr lang="en-US" sz="1450" dirty="0"/>
           </a:p>
@@ -6572,7 +6740,7 @@
       </p:sp>
       <p:sp>
         <p:nvSpPr>
-          <p:cNvPr id="12" name="Shape 10"/>
+          <p:cNvPr id="13" name="Shape 10"/>
           <p:cNvSpPr/>
           <p:nvPr/>
         </p:nvSpPr>
@@ -6594,7 +6762,7 @@
       </p:sp>
       <p:sp>
         <p:nvSpPr>
-          <p:cNvPr id="13" name="Shape 11"/>
+          <p:cNvPr id="14" name="Shape 11"/>
           <p:cNvSpPr/>
           <p:nvPr/>
         </p:nvSpPr>
@@ -6607,14 +6775,14 @@
             <a:avLst/>
           </a:prstGeom>
           <a:solidFill>
-            <a:srgbClr val="17AF98"/>
+            <a:srgbClr val="12B198"/>
           </a:solidFill>
           <a:ln/>
         </p:spPr>
       </p:sp>
       <p:sp>
         <p:nvSpPr>
-          <p:cNvPr id="14" name="Text 12"/>
+          <p:cNvPr id="15" name="Text 12"/>
           <p:cNvSpPr/>
           <p:nvPr/>
         </p:nvSpPr>
@@ -6653,7 +6821,7 @@
       </p:sp>
       <p:sp>
         <p:nvSpPr>
-          <p:cNvPr id="15" name="Text 13"/>
+          <p:cNvPr id="16" name="Text 13"/>
           <p:cNvSpPr/>
           <p:nvPr/>
         </p:nvSpPr>
@@ -6687,7 +6855,7 @@
                 <a:ea typeface="Yu Gothic" pitchFamily="34" charset="-122"/>
                 <a:cs typeface="Yu Gothic" pitchFamily="34" charset="-120"/>
               </a:rPr>
-              <a:t>エレベーター管制 ― 避難階へ降りて停止。階段誘導が前提になる。</a:t>
+              <a:t>エレベーター管制 ― 避難階へ降りて停止します。階段誘導が前提になります。</a:t>
             </a:r>
             <a:endParaRPr lang="en-US" sz="1450" dirty="0"/>
           </a:p>
@@ -6707,7 +6875,7 @@
                 <a:ea typeface="Calibri" pitchFamily="34" charset="-122"/>
                 <a:cs typeface="Calibri" pitchFamily="34" charset="-120"/>
               </a:rPr>
-              <a:t>Lift homing — cars descend and park. Stair-based guidance becomes the assumption.</a:t>
+              <a:t>Lifts descend and stop. Guidance moves to the stairs.</a:t>
             </a:r>
             <a:endParaRPr lang="en-US" sz="1450" dirty="0"/>
           </a:p>
@@ -6715,7 +6883,7 @@
       </p:sp>
       <p:sp>
         <p:nvSpPr>
-          <p:cNvPr id="16" name="Shape 14"/>
+          <p:cNvPr id="17" name="Shape 14"/>
           <p:cNvSpPr/>
           <p:nvPr/>
         </p:nvSpPr>
@@ -6737,7 +6905,7 @@
       </p:sp>
       <p:sp>
         <p:nvSpPr>
-          <p:cNvPr id="17" name="Shape 15"/>
+          <p:cNvPr id="18" name="Shape 15"/>
           <p:cNvSpPr/>
           <p:nvPr/>
         </p:nvSpPr>
@@ -6750,14 +6918,14 @@
             <a:avLst/>
           </a:prstGeom>
           <a:solidFill>
-            <a:srgbClr val="17AF98"/>
+            <a:srgbClr val="12B198"/>
           </a:solidFill>
           <a:ln/>
         </p:spPr>
       </p:sp>
       <p:sp>
         <p:nvSpPr>
-          <p:cNvPr id="18" name="Text 16"/>
+          <p:cNvPr id="19" name="Text 16"/>
           <p:cNvSpPr/>
           <p:nvPr/>
         </p:nvSpPr>
@@ -6796,7 +6964,7 @@
       </p:sp>
       <p:sp>
         <p:nvSpPr>
-          <p:cNvPr id="19" name="Text 17"/>
+          <p:cNvPr id="20" name="Text 17"/>
           <p:cNvSpPr/>
           <p:nvPr/>
         </p:nvSpPr>
@@ -6830,7 +6998,7 @@
                 <a:ea typeface="Yu Gothic" pitchFamily="34" charset="-122"/>
                 <a:cs typeface="Yu Gothic" pitchFamily="34" charset="-120"/>
               </a:rPr>
-              <a:t>シャッター ― 降りた先に人が取り残されていないか確認する。</a:t>
+              <a:t>シャッター ― 降下した先に人が残っていないか確認します。</a:t>
             </a:r>
             <a:endParaRPr lang="en-US" sz="1450" dirty="0"/>
           </a:p>
@@ -6850,7 +7018,7 @@
                 <a:ea typeface="Calibri" pitchFamily="34" charset="-122"/>
                 <a:cs typeface="Calibri" pitchFamily="34" charset="-120"/>
               </a:rPr>
-              <a:t>Shutters — check nobody has been left on the far side.</a:t>
+              <a:t>Shutters: check nobody is left on the far side.</a:t>
             </a:r>
             <a:endParaRPr lang="en-US" sz="1450" dirty="0"/>
           </a:p>
@@ -6858,7 +7026,7 @@
       </p:sp>
       <p:sp>
         <p:nvSpPr>
-          <p:cNvPr id="20" name="Text 18"/>
+          <p:cNvPr id="21" name="Text 18"/>
           <p:cNvSpPr/>
           <p:nvPr/>
         </p:nvSpPr>
@@ -6911,7 +7079,7 @@
       </p:sp>
       <p:sp>
         <p:nvSpPr>
-          <p:cNvPr id="21" name="Text 19"/>
+          <p:cNvPr id="22" name="Text 19"/>
           <p:cNvSpPr/>
           <p:nvPr/>
         </p:nvSpPr>
@@ -6980,9 +7148,33 @@
           <a:chExt cx="0" cy="0"/>
         </a:xfrm>
       </p:grpSpPr>
-      <p:sp>
-        <p:nvSpPr>
-          <p:cNvPr id="2" name="Text 0"/>
+      <p:pic>
+        <p:nvPicPr>
+          <p:cNvPr id="2" name="Image 0" descr="/home/user/Training-/assets/logo.png">    </p:cNvPr>
+          <p:cNvPicPr>
+            <a:picLocks noChangeAspect="1"/>
+          </p:cNvPicPr>
+          <p:nvPr/>
+        </p:nvPicPr>
+        <p:blipFill>
+          <a:blip r:embed="rId1"/>
+          <a:stretch>
+            <a:fillRect/>
+          </a:stretch>
+        </p:blipFill>
+        <p:spPr>
+          <a:xfrm>
+            <a:off x="10765231" y="332912"/>
+            <a:ext cx="786384" cy="742353"/>
+          </a:xfrm>
+          <a:prstGeom prst="rect">
+            <a:avLst/>
+          </a:prstGeom>
+        </p:spPr>
+      </p:pic>
+      <p:sp>
+        <p:nvSpPr>
+          <p:cNvPr id="3" name="Text 0"/>
           <p:cNvSpPr/>
           <p:nvPr/>
         </p:nvSpPr>
@@ -7010,7 +7202,7 @@
             <a:r>
               <a:rPr lang="en-US" sz="2700" b="1" dirty="0">
                 <a:solidFill>
-                  <a:srgbClr val="0F2D52"/>
+                  <a:srgbClr val="093259"/>
                 </a:solidFill>
                 <a:latin typeface="Yu Gothic" pitchFamily="34" charset="0"/>
                 <a:ea typeface="Yu Gothic" pitchFamily="34" charset="-122"/>
@@ -7030,7 +7222,7 @@
             <a:r>
               <a:rPr lang="en-US" sz="1250" i="1" dirty="0">
                 <a:solidFill>
-                  <a:srgbClr val="17AF98"/>
+                  <a:srgbClr val="12B198"/>
                 </a:solidFill>
                 <a:latin typeface="Calibri" pitchFamily="34" charset="0"/>
                 <a:ea typeface="Calibri" pitchFamily="34" charset="-122"/>
@@ -7044,7 +7236,7 @@
       </p:sp>
       <p:sp>
         <p:nvSpPr>
-          <p:cNvPr id="3" name="Text 1"/>
+          <p:cNvPr id="4" name="Text 1"/>
           <p:cNvSpPr/>
           <p:nvPr/>
         </p:nvSpPr>
@@ -7072,13 +7264,13 @@
             <a:r>
               <a:rPr lang="en-US" sz="1300" dirty="0">
                 <a:solidFill>
-                  <a:srgbClr val="0F2D52"/>
+                  <a:srgbClr val="093259"/>
                 </a:solidFill>
                 <a:latin typeface="Yu Gothic" pitchFamily="34" charset="0"/>
                 <a:ea typeface="Yu Gothic" pitchFamily="34" charset="-122"/>
                 <a:cs typeface="Yu Gothic" pitchFamily="34" charset="-120"/>
               </a:rPr>
-              <a:t>構成は共通：呼出 → 応答 → 用件 → 復唱 → 終話</a:t>
+              <a:t>構成は共通です。呼出 → 応答 → 用件 → 復唱 → 終話</a:t>
             </a:r>
             <a:endParaRPr lang="en-US" sz="1300" dirty="0"/>
           </a:p>
@@ -7106,7 +7298,7 @@
       </p:sp>
       <p:sp>
         <p:nvSpPr>
-          <p:cNvPr id="4" name="Shape 2"/>
+          <p:cNvPr id="5" name="Shape 2"/>
           <p:cNvSpPr/>
           <p:nvPr/>
         </p:nvSpPr>
@@ -7128,7 +7320,7 @@
       </p:sp>
       <p:sp>
         <p:nvSpPr>
-          <p:cNvPr id="5" name="Text 3"/>
+          <p:cNvPr id="6" name="Text 3"/>
           <p:cNvSpPr/>
           <p:nvPr/>
         </p:nvSpPr>
@@ -7156,7 +7348,7 @@
             <a:r>
               <a:rPr lang="en-US" sz="1600" b="1" dirty="0">
                 <a:solidFill>
-                  <a:srgbClr val="0F2D52"/>
+                  <a:srgbClr val="093259"/>
                 </a:solidFill>
                 <a:latin typeface="Yu Gothic" pitchFamily="34" charset="0"/>
                 <a:ea typeface="Yu Gothic" pitchFamily="34" charset="-122"/>
@@ -7190,7 +7382,7 @@
       </p:sp>
       <p:sp>
         <p:nvSpPr>
-          <p:cNvPr id="6" name="Text 4"/>
+          <p:cNvPr id="7" name="Text 4"/>
           <p:cNvSpPr/>
           <p:nvPr/>
         </p:nvSpPr>
@@ -7250,7 +7442,7 @@
                 <a:ea typeface="Calibri" pitchFamily="34" charset="-122"/>
                 <a:cs typeface="Calibri" pitchFamily="34" charset="-120"/>
               </a:rPr>
-              <a:t>　 Open by naming them, then yourself</a:t>
+              <a:t>　 Name them, then yourself, then hand over</a:t>
             </a:r>
             <a:endParaRPr lang="en-US" sz="1250" dirty="0"/>
           </a:p>
@@ -7273,7 +7465,7 @@
                 <a:ea typeface="Yu Gothic" pitchFamily="34" charset="-122"/>
                 <a:cs typeface="Yu Gothic" pitchFamily="34" charset="-120"/>
               </a:rPr>
-              <a:t>・Over ― 送信終わり、応答を求む</a:t>
+              <a:t>・Over ― 送信終わり、応答を求める</a:t>
             </a:r>
             <a:endParaRPr lang="en-US" sz="1250" dirty="0"/>
           </a:p>
@@ -7296,7 +7488,7 @@
                 <a:ea typeface="Calibri" pitchFamily="34" charset="-122"/>
                 <a:cs typeface="Calibri" pitchFamily="34" charset="-120"/>
               </a:rPr>
-              <a:t>　 Over — I have finished, reply expected</a:t>
+              <a:t>　 Over: I have finished, reply expected</a:t>
             </a:r>
             <a:endParaRPr lang="en-US" sz="1250" dirty="0"/>
           </a:p>
@@ -7342,7 +7534,7 @@
                 <a:ea typeface="Calibri" pitchFamily="34" charset="-122"/>
                 <a:cs typeface="Calibri" pitchFamily="34" charset="-120"/>
               </a:rPr>
-              <a:t>　 Out — exchange complete. Never "over and out"</a:t>
+              <a:t>　 Out: exchange complete. Do not say "over and out"</a:t>
             </a:r>
             <a:endParaRPr lang="en-US" sz="1250" dirty="0"/>
           </a:p>
@@ -7388,7 +7580,7 @@
                 <a:ea typeface="Calibri" pitchFamily="34" charset="-122"/>
                 <a:cs typeface="Calibri" pitchFamily="34" charset="-120"/>
               </a:rPr>
-              <a:t>　 Say again — never "repeat"</a:t>
+              <a:t>　 Say again. Do not say "repeat"</a:t>
             </a:r>
             <a:endParaRPr lang="en-US" sz="1250" dirty="0"/>
           </a:p>
@@ -7434,7 +7626,7 @@
                 <a:ea typeface="Calibri" pitchFamily="34" charset="-122"/>
                 <a:cs typeface="Calibri" pitchFamily="34" charset="-120"/>
               </a:rPr>
-              <a:t>　 Roger, Copy — received. Stand by — wait</a:t>
+              <a:t>　 Roger and Copy: received. Stand by: wait</a:t>
             </a:r>
             <a:endParaRPr lang="en-US" sz="1250" dirty="0"/>
           </a:p>
@@ -7442,7 +7634,7 @@
       </p:sp>
       <p:sp>
         <p:nvSpPr>
-          <p:cNvPr id="7" name="Shape 5"/>
+          <p:cNvPr id="8" name="Shape 5"/>
           <p:cNvSpPr/>
           <p:nvPr/>
         </p:nvSpPr>
@@ -7464,7 +7656,7 @@
       </p:sp>
       <p:sp>
         <p:nvSpPr>
-          <p:cNvPr id="8" name="Text 6"/>
+          <p:cNvPr id="9" name="Text 6"/>
           <p:cNvSpPr/>
           <p:nvPr/>
         </p:nvSpPr>
@@ -7492,7 +7684,7 @@
             <a:r>
               <a:rPr lang="en-US" sz="1600" b="1" dirty="0">
                 <a:solidFill>
-                  <a:srgbClr val="0E8C79"/>
+                  <a:srgbClr val="0D8A76"/>
                 </a:solidFill>
                 <a:latin typeface="Yu Gothic" pitchFamily="34" charset="0"/>
                 <a:ea typeface="Yu Gothic" pitchFamily="34" charset="-122"/>
@@ -7526,7 +7718,7 @@
       </p:sp>
       <p:sp>
         <p:nvSpPr>
-          <p:cNvPr id="9" name="Text 7"/>
+          <p:cNvPr id="10" name="Text 7"/>
           <p:cNvSpPr/>
           <p:nvPr/>
         </p:nvSpPr>
@@ -7632,7 +7824,7 @@
                 <a:ea typeface="Calibri" pitchFamily="34" charset="-122"/>
                 <a:cs typeface="Calibri" pitchFamily="34" charset="-120"/>
               </a:rPr>
-              <a:t>　 Dōzo — over to you</a:t>
+              <a:t>　 Dōzo: over to you</a:t>
             </a:r>
             <a:endParaRPr lang="en-US" sz="1250" dirty="0"/>
           </a:p>
@@ -7678,7 +7870,7 @@
                 <a:ea typeface="Calibri" pitchFamily="34" charset="-122"/>
                 <a:cs typeface="Calibri" pitchFamily="34" charset="-120"/>
               </a:rPr>
-              <a:t>　 Ijō — out</a:t>
+              <a:t>　 Ijō: out</a:t>
             </a:r>
             <a:endParaRPr lang="en-US" sz="1250" dirty="0"/>
           </a:p>
@@ -7770,7 +7962,7 @@
                 <a:ea typeface="Calibri" pitchFamily="34" charset="-122"/>
                 <a:cs typeface="Calibri" pitchFamily="34" charset="-120"/>
               </a:rPr>
-              <a:t>　 Numbers digit by digit</a:t>
+              <a:t>　 Read numbers one digit at a time</a:t>
             </a:r>
             <a:endParaRPr lang="en-US" sz="1250" dirty="0"/>
           </a:p>
@@ -7778,7 +7970,7 @@
       </p:sp>
       <p:sp>
         <p:nvSpPr>
-          <p:cNvPr id="10" name="Text 8"/>
+          <p:cNvPr id="11" name="Text 8"/>
           <p:cNvSpPr/>
           <p:nvPr/>
         </p:nvSpPr>
@@ -7806,13 +7998,13 @@
             <a:r>
               <a:rPr lang="en-US" sz="1300" b="1" dirty="0">
                 <a:solidFill>
-                  <a:srgbClr val="0E8C79"/>
+                  <a:srgbClr val="0D8A76"/>
                 </a:solidFill>
                 <a:latin typeface="Yu Gothic" pitchFamily="34" charset="0"/>
                 <a:ea typeface="Yu Gothic" pitchFamily="34" charset="-122"/>
                 <a:cs typeface="Yu Gothic" pitchFamily="34" charset="-120"/>
               </a:rPr>
-              <a:t>原則：平文で話す。符丁（ten-codes）を使わない。個人名・個人情報を無線に乗せない。　＜参考＞NATO: Alpha, Bravo, Charlie… ／ 和文通話表: 朝日のア、いろはのイ…</a:t>
+              <a:t>平文で話します。符丁は使いません。個人名と個人情報は無線に乗せません。＜参考＞NATO：Alpha, Bravo, Charlie… ／ 和文通話表：朝日のア、いろはのイ…</a:t>
             </a:r>
             <a:endParaRPr lang="en-US" sz="1300" dirty="0"/>
           </a:p>
@@ -7832,7 +8024,7 @@
                 <a:ea typeface="Calibri" pitchFamily="34" charset="-122"/>
                 <a:cs typeface="Calibri" pitchFamily="34" charset="-120"/>
               </a:rPr>
-              <a:t>Rules: plain language, no ten-codes, no personal data over the air. (Reference only: NATO and Japanese phonetic alphabets.)</a:t>
+              <a:t>Use plain language. Do not use codes. Do not send personal data by radio. (Reference only: NATO and Japanese phonetic alphabets.)</a:t>
             </a:r>
             <a:endParaRPr lang="en-US" sz="1300" dirty="0"/>
           </a:p>
@@ -7840,7 +8032,7 @@
       </p:sp>
       <p:sp>
         <p:nvSpPr>
-          <p:cNvPr id="11" name="Text 9"/>
+          <p:cNvPr id="12" name="Text 9"/>
           <p:cNvSpPr/>
           <p:nvPr/>
         </p:nvSpPr>
@@ -7893,7 +8085,7 @@
       </p:sp>
       <p:sp>
         <p:nvSpPr>
-          <p:cNvPr id="12" name="Text 10"/>
+          <p:cNvPr id="13" name="Text 10"/>
           <p:cNvSpPr/>
           <p:nvPr/>
         </p:nvSpPr>
@@ -7962,9 +8154,33 @@
           <a:chExt cx="0" cy="0"/>
         </a:xfrm>
       </p:grpSpPr>
-      <p:sp>
-        <p:nvSpPr>
-          <p:cNvPr id="2" name="Text 0"/>
+      <p:pic>
+        <p:nvPicPr>
+          <p:cNvPr id="2" name="Image 0" descr="/home/user/Training-/assets/logo.png">    </p:cNvPr>
+          <p:cNvPicPr>
+            <a:picLocks noChangeAspect="1"/>
+          </p:cNvPicPr>
+          <p:nvPr/>
+        </p:nvPicPr>
+        <p:blipFill>
+          <a:blip r:embed="rId1"/>
+          <a:stretch>
+            <a:fillRect/>
+          </a:stretch>
+        </p:blipFill>
+        <p:spPr>
+          <a:xfrm>
+            <a:off x="10765231" y="332912"/>
+            <a:ext cx="786384" cy="742353"/>
+          </a:xfrm>
+          <a:prstGeom prst="rect">
+            <a:avLst/>
+          </a:prstGeom>
+        </p:spPr>
+      </p:pic>
+      <p:sp>
+        <p:nvSpPr>
+          <p:cNvPr id="3" name="Text 0"/>
           <p:cNvSpPr/>
           <p:nvPr/>
         </p:nvSpPr>
@@ -7992,13 +8208,13 @@
             <a:r>
               <a:rPr lang="en-US" sz="2700" b="1" dirty="0">
                 <a:solidFill>
-                  <a:srgbClr val="0F2D52"/>
+                  <a:srgbClr val="093259"/>
                 </a:solidFill>
                 <a:latin typeface="Yu Gothic" pitchFamily="34" charset="0"/>
                 <a:ea typeface="Yu Gothic" pitchFamily="34" charset="-122"/>
                 <a:cs typeface="Yu Gothic" pitchFamily="34" charset="-120"/>
               </a:rPr>
-              <a:t>ログとカメラ画像は「証拠」</a:t>
+              <a:t>ログとカメラ画像は証拠になります</a:t>
             </a:r>
             <a:endParaRPr lang="en-US" sz="2700" dirty="0"/>
           </a:p>
@@ -8012,13 +8228,13 @@
             <a:r>
               <a:rPr lang="en-US" sz="1250" i="1" dirty="0">
                 <a:solidFill>
-                  <a:srgbClr val="17AF98"/>
-                </a:solidFill>
-                <a:latin typeface="Calibri" pitchFamily="34" charset="0"/>
-                <a:ea typeface="Calibri" pitchFamily="34" charset="-122"/>
-                <a:cs typeface="Calibri" pitchFamily="34" charset="-120"/>
-              </a:rPr>
-              <a:t>Logs and Footage Are Evidence</a:t>
+                  <a:srgbClr val="12B198"/>
+                </a:solidFill>
+                <a:latin typeface="Calibri" pitchFamily="34" charset="0"/>
+                <a:ea typeface="Calibri" pitchFamily="34" charset="-122"/>
+                <a:cs typeface="Calibri" pitchFamily="34" charset="-120"/>
+              </a:rPr>
+              <a:t>Logs and Footage Become Evidence</a:t>
             </a:r>
             <a:endParaRPr lang="en-US" sz="2700" dirty="0"/>
           </a:p>
@@ -8026,7 +8242,7 @@
       </p:sp>
       <p:sp>
         <p:nvSpPr>
-          <p:cNvPr id="3" name="Shape 1"/>
+          <p:cNvPr id="4" name="Shape 1"/>
           <p:cNvSpPr/>
           <p:nvPr/>
         </p:nvSpPr>
@@ -8041,14 +8257,14 @@
             </a:avLst>
           </a:prstGeom>
           <a:solidFill>
-            <a:srgbClr val="0F2D52"/>
+            <a:srgbClr val="093259"/>
           </a:solidFill>
           <a:ln/>
         </p:spPr>
       </p:sp>
       <p:sp>
         <p:nvSpPr>
-          <p:cNvPr id="4" name="Text 2"/>
+          <p:cNvPr id="5" name="Text 2"/>
           <p:cNvSpPr/>
           <p:nvPr/>
         </p:nvSpPr>
@@ -8082,7 +8298,7 @@
                 <a:ea typeface="Yu Gothic" pitchFamily="34" charset="-122"/>
                 <a:cs typeface="Yu Gothic" pitchFamily="34" charset="-120"/>
               </a:rPr>
-              <a:t>入退室ログとカメラ画像は、後の調査・懲戒・訴訟で証拠になります。</a:t>
+              <a:t>入退室ログとカメラ画像は、後の調査、懲戒、訴訟で証拠になります。</a:t>
             </a:r>
             <a:endParaRPr lang="en-US" sz="1600" dirty="0"/>
           </a:p>
@@ -8102,7 +8318,7 @@
                 <a:ea typeface="Yu Gothic" pitchFamily="34" charset="-122"/>
                 <a:cs typeface="Yu Gothic" pitchFamily="34" charset="-120"/>
               </a:rPr>
-              <a:t>同時に、それは個人情報でもあります。</a:t>
+              <a:t>同時に、個人情報でもあります。</a:t>
             </a:r>
             <a:endParaRPr lang="en-US" sz="1600" dirty="0"/>
           </a:p>
@@ -8110,7 +8326,7 @@
       </p:sp>
       <p:sp>
         <p:nvSpPr>
-          <p:cNvPr id="5" name="Text 3"/>
+          <p:cNvPr id="6" name="Text 3"/>
           <p:cNvSpPr/>
           <p:nvPr/>
         </p:nvSpPr>
@@ -8172,7 +8388,7 @@
       </p:sp>
       <p:sp>
         <p:nvSpPr>
-          <p:cNvPr id="6" name="Shape 4"/>
+          <p:cNvPr id="7" name="Shape 4"/>
           <p:cNvSpPr/>
           <p:nvPr/>
         </p:nvSpPr>
@@ -8194,7 +8410,7 @@
       </p:sp>
       <p:sp>
         <p:nvSpPr>
-          <p:cNvPr id="7" name="Shape 5"/>
+          <p:cNvPr id="8" name="Shape 5"/>
           <p:cNvSpPr/>
           <p:nvPr/>
         </p:nvSpPr>
@@ -8207,14 +8423,14 @@
             <a:avLst/>
           </a:prstGeom>
           <a:solidFill>
-            <a:srgbClr val="17AF98"/>
+            <a:srgbClr val="12B198"/>
           </a:solidFill>
           <a:ln/>
         </p:spPr>
       </p:sp>
       <p:sp>
         <p:nvSpPr>
-          <p:cNvPr id="8" name="Text 6"/>
+          <p:cNvPr id="9" name="Text 6"/>
           <p:cNvSpPr/>
           <p:nvPr/>
         </p:nvSpPr>
@@ -8253,7 +8469,7 @@
       </p:sp>
       <p:sp>
         <p:nvSpPr>
-          <p:cNvPr id="9" name="Text 7"/>
+          <p:cNvPr id="10" name="Text 7"/>
           <p:cNvSpPr/>
           <p:nvPr/>
         </p:nvSpPr>
@@ -8281,13 +8497,13 @@
             <a:r>
               <a:rPr lang="en-US" sz="1450" b="1" dirty="0">
                 <a:solidFill>
-                  <a:srgbClr val="0F2D52"/>
+                  <a:srgbClr val="093259"/>
                 </a:solidFill>
                 <a:latin typeface="Yu Gothic" pitchFamily="34" charset="0"/>
                 <a:ea typeface="Yu Gothic" pitchFamily="34" charset="-122"/>
                 <a:cs typeface="Yu Gothic" pitchFamily="34" charset="-120"/>
               </a:rPr>
-              <a:t>目的外に見ない／持ち出さない／撮影しない／上書きされる前に「保全」を依頼する。保全依頼は、あなたが最初に気づく立場にあります。</a:t>
+              <a:t>目的外に見ません。持ち出しません。撮影しません。上書きされる前に保全を依頼します。</a:t>
             </a:r>
             <a:endParaRPr lang="en-US" sz="1450" dirty="0"/>
           </a:p>
@@ -8301,13 +8517,13 @@
             <a:r>
               <a:rPr lang="en-US" sz="1000" i="1" dirty="0">
                 <a:solidFill>
-                  <a:srgbClr val="0E8C79"/>
-                </a:solidFill>
-                <a:latin typeface="Calibri" pitchFamily="34" charset="0"/>
-                <a:ea typeface="Calibri" pitchFamily="34" charset="-122"/>
-                <a:cs typeface="Calibri" pitchFamily="34" charset="-120"/>
-              </a:rPr>
-              <a:t>Do not view outside purpose, remove, or photograph it — and request preservation before it is overwritten. You are usually the first person in a position to notice.</a:t>
+                  <a:srgbClr val="0D8A76"/>
+                </a:solidFill>
+                <a:latin typeface="Calibri" pitchFamily="34" charset="0"/>
+                <a:ea typeface="Calibri" pitchFamily="34" charset="-122"/>
+                <a:cs typeface="Calibri" pitchFamily="34" charset="-120"/>
+              </a:rPr>
+              <a:t>Do not view them outside their purpose, remove them, or photograph them. Request preservation before they are overwritten.</a:t>
             </a:r>
             <a:endParaRPr lang="en-US" sz="1450" dirty="0"/>
           </a:p>
@@ -8315,7 +8531,7 @@
       </p:sp>
       <p:sp>
         <p:nvSpPr>
-          <p:cNvPr id="10" name="Text 8"/>
+          <p:cNvPr id="11" name="Text 8"/>
           <p:cNvSpPr/>
           <p:nvPr/>
         </p:nvSpPr>
@@ -8368,7 +8584,7 @@
       </p:sp>
       <p:sp>
         <p:nvSpPr>
-          <p:cNvPr id="11" name="Text 9"/>
+          <p:cNvPr id="12" name="Text 9"/>
           <p:cNvSpPr/>
           <p:nvPr/>
         </p:nvSpPr>
@@ -8437,9 +8653,33 @@
           <a:chExt cx="0" cy="0"/>
         </a:xfrm>
       </p:grpSpPr>
-      <p:sp>
-        <p:nvSpPr>
-          <p:cNvPr id="2" name="Text 0"/>
+      <p:pic>
+        <p:nvPicPr>
+          <p:cNvPr id="2" name="Image 0" descr="/home/user/Training-/assets/logo.png">    </p:cNvPr>
+          <p:cNvPicPr>
+            <a:picLocks noChangeAspect="1"/>
+          </p:cNvPicPr>
+          <p:nvPr/>
+        </p:nvPicPr>
+        <p:blipFill>
+          <a:blip r:embed="rId1"/>
+          <a:stretch>
+            <a:fillRect/>
+          </a:stretch>
+        </p:blipFill>
+        <p:spPr>
+          <a:xfrm>
+            <a:off x="10765231" y="332912"/>
+            <a:ext cx="786384" cy="742353"/>
+          </a:xfrm>
+          <a:prstGeom prst="rect">
+            <a:avLst/>
+          </a:prstGeom>
+        </p:spPr>
+      </p:pic>
+      <p:sp>
+        <p:nvSpPr>
+          <p:cNvPr id="3" name="Text 0"/>
           <p:cNvSpPr/>
           <p:nvPr/>
         </p:nvSpPr>
@@ -8467,7 +8707,7 @@
             <a:r>
               <a:rPr lang="en-US" sz="2700" b="1" dirty="0">
                 <a:solidFill>
-                  <a:srgbClr val="0F2D52"/>
+                  <a:srgbClr val="093259"/>
                 </a:solidFill>
                 <a:latin typeface="Yu Gothic" pitchFamily="34" charset="0"/>
                 <a:ea typeface="Yu Gothic" pitchFamily="34" charset="-122"/>
@@ -8487,7 +8727,7 @@
             <a:r>
               <a:rPr lang="en-US" sz="1250" i="1" dirty="0">
                 <a:solidFill>
-                  <a:srgbClr val="17AF98"/>
+                  <a:srgbClr val="12B198"/>
                 </a:solidFill>
                 <a:latin typeface="Calibri" pitchFamily="34" charset="0"/>
                 <a:ea typeface="Calibri" pitchFamily="34" charset="-122"/>
@@ -8501,36 +8741,36 @@
       </p:sp>
       <p:sp>
         <p:nvSpPr>
-          <p:cNvPr id="3" name="Shape 1"/>
+          <p:cNvPr id="4" name="Shape 1"/>
           <p:cNvSpPr/>
           <p:nvPr/>
         </p:nvSpPr>
         <p:spPr>
           <a:xfrm>
             <a:off x="640080" y="1627632"/>
-            <a:ext cx="10911535" cy="1719072"/>
+            <a:ext cx="10911535" cy="1810512"/>
           </a:xfrm>
           <a:prstGeom prst="roundRect">
             <a:avLst>
-              <a:gd name="adj" fmla="val 2660"/>
+              <a:gd name="adj" fmla="val 2525"/>
             </a:avLst>
           </a:prstGeom>
           <a:solidFill>
-            <a:srgbClr val="0F2D52"/>
+            <a:srgbClr val="093259"/>
           </a:solidFill>
           <a:ln/>
         </p:spPr>
       </p:sp>
       <p:sp>
         <p:nvSpPr>
-          <p:cNvPr id="4" name="Text 2"/>
+          <p:cNvPr id="5" name="Text 2"/>
           <p:cNvSpPr/>
           <p:nvPr/>
         </p:nvSpPr>
         <p:spPr>
           <a:xfrm>
             <a:off x="1024128" y="1810512"/>
-            <a:ext cx="10143439" cy="1353312"/>
+            <a:ext cx="10143439" cy="1444752"/>
           </a:xfrm>
           <a:prstGeom prst="rect">
             <a:avLst/>
@@ -8551,7 +8791,7 @@
             <a:r>
               <a:rPr lang="en-US" sz="1050" b="1" dirty="0">
                 <a:solidFill>
-                  <a:srgbClr val="17AF98"/>
+                  <a:srgbClr val="12B198"/>
                 </a:solidFill>
                 <a:latin typeface="Yu Gothic" pitchFamily="34" charset="0"/>
                 <a:ea typeface="Yu Gothic" pitchFamily="34" charset="-122"/>
@@ -8568,7 +8808,7 @@
             <a:r>
               <a:rPr lang="en-US" sz="900" dirty="0">
                 <a:solidFill>
-                  <a:srgbClr val="17AF98"/>
+                  <a:srgbClr val="12B198"/>
                 </a:solidFill>
                 <a:latin typeface="Calibri" pitchFamily="34" charset="0"/>
                 <a:ea typeface="Calibri" pitchFamily="34" charset="-122"/>
@@ -8594,7 +8834,7 @@
                 <a:ea typeface="Yu Gothic" pitchFamily="34" charset="-122"/>
                 <a:cs typeface="Yu Gothic" pitchFamily="34" charset="-120"/>
               </a:rPr>
-              <a:t>18時40分、受信機が3階東区画で発報。ほぼ同時刻、入退室ログに「退職者に返却済みのはずのカード」による3階の解錠記録。防火戸が閉鎖した。</a:t>
+              <a:t>18時40分、受信機が3階東区画で発報。ほぼ同時刻、入退室ログに、退職者に返却済みのはずのカードによる3階の解錠記録。防火戸が閉鎖。管理権者は不在で電話がつながらない。勤務中の警備員は、あなたを含めて2名。</a:t>
             </a:r>
             <a:endParaRPr lang="en-US" sz="1050" dirty="0"/>
           </a:p>
@@ -8614,7 +8854,7 @@
                 <a:ea typeface="Calibri" pitchFamily="34" charset="-122"/>
                 <a:cs typeface="Calibri" pitchFamily="34" charset="-120"/>
               </a:rPr>
-              <a:t>18:40. The fire panel shows an activation in the third-floor east zone. At almost the same moment, the access log records a third-floor unlock by a card that should have been returned by a leaver. Fire doors have closed.</a:t>
+              <a:t>18:40. The fire panel shows an activation in the third-floor east zone. At almost the same time, the access log records a third-floor unlock by a card that a leaver should have returned. Fire doors have closed. The site authority is away and not answering. Two guards are on duty, including you.</a:t>
             </a:r>
             <a:endParaRPr lang="en-US" sz="1050" dirty="0"/>
           </a:p>
@@ -8622,18 +8862,18 @@
       </p:sp>
       <p:sp>
         <p:nvSpPr>
-          <p:cNvPr id="5" name="Shape 3"/>
-          <p:cNvSpPr/>
-          <p:nvPr/>
-        </p:nvSpPr>
-        <p:spPr>
-          <a:xfrm>
-            <a:off x="640080" y="3584448"/>
-            <a:ext cx="10911535" cy="370332"/>
+          <p:cNvPr id="6" name="Shape 3"/>
+          <p:cNvSpPr/>
+          <p:nvPr/>
+        </p:nvSpPr>
+        <p:spPr>
+          <a:xfrm>
+            <a:off x="640080" y="3675888"/>
+            <a:ext cx="10911535" cy="347472"/>
           </a:xfrm>
           <a:prstGeom prst="roundRect">
             <a:avLst>
-              <a:gd name="adj" fmla="val 9877"/>
+              <a:gd name="adj" fmla="val 10526"/>
             </a:avLst>
           </a:prstGeom>
           <a:solidFill>
@@ -8644,33 +8884,33 @@
       </p:sp>
       <p:sp>
         <p:nvSpPr>
-          <p:cNvPr id="6" name="Shape 4"/>
-          <p:cNvSpPr/>
-          <p:nvPr/>
-        </p:nvSpPr>
-        <p:spPr>
-          <a:xfrm>
-            <a:off x="859536" y="3605022"/>
+          <p:cNvPr id="7" name="Shape 4"/>
+          <p:cNvSpPr/>
+          <p:nvPr/>
+        </p:nvSpPr>
+        <p:spPr>
+          <a:xfrm>
+            <a:off x="859536" y="3685032"/>
             <a:ext cx="329184" cy="329184"/>
           </a:xfrm>
           <a:prstGeom prst="ellipse">
             <a:avLst/>
           </a:prstGeom>
           <a:solidFill>
-            <a:srgbClr val="17AF98"/>
+            <a:srgbClr val="12B198"/>
           </a:solidFill>
           <a:ln/>
         </p:spPr>
       </p:sp>
       <p:sp>
         <p:nvSpPr>
-          <p:cNvPr id="7" name="Text 5"/>
-          <p:cNvSpPr/>
-          <p:nvPr/>
-        </p:nvSpPr>
-        <p:spPr>
-          <a:xfrm>
-            <a:off x="859536" y="3605022"/>
+          <p:cNvPr id="8" name="Text 5"/>
+          <p:cNvSpPr/>
+          <p:nvPr/>
+        </p:nvSpPr>
+        <p:spPr>
+          <a:xfrm>
+            <a:off x="859536" y="3685032"/>
             <a:ext cx="329184" cy="329184"/>
           </a:xfrm>
           <a:prstGeom prst="rect">
@@ -8703,14 +8943,14 @@
       </p:sp>
       <p:sp>
         <p:nvSpPr>
-          <p:cNvPr id="8" name="Text 6"/>
-          <p:cNvSpPr/>
-          <p:nvPr/>
-        </p:nvSpPr>
-        <p:spPr>
-          <a:xfrm>
-            <a:off x="1335024" y="3639312"/>
-            <a:ext cx="9960559" cy="260604"/>
+          <p:cNvPr id="9" name="Text 6"/>
+          <p:cNvSpPr/>
+          <p:nvPr/>
+        </p:nvSpPr>
+        <p:spPr>
+          <a:xfrm>
+            <a:off x="1335024" y="3730752"/>
+            <a:ext cx="9960559" cy="237744"/>
           </a:xfrm>
           <a:prstGeom prst="rect">
             <a:avLst/>
@@ -8737,7 +8977,7 @@
                 <a:ea typeface="Yu Gothic" pitchFamily="34" charset="-122"/>
                 <a:cs typeface="Yu Gothic" pitchFamily="34" charset="-120"/>
               </a:rPr>
-              <a:t>最初の60秒 ― 何を、どの順序で行うか。</a:t>
+              <a:t>最初の60秒に何を行うか。2名をどう配置するか。</a:t>
             </a:r>
             <a:endParaRPr lang="en-US" sz="1300" dirty="0"/>
           </a:p>
@@ -8757,7 +8997,7 @@
                 <a:ea typeface="Calibri" pitchFamily="34" charset="-122"/>
                 <a:cs typeface="Calibri" pitchFamily="34" charset="-120"/>
               </a:rPr>
-              <a:t>The first sixty seconds — what, and in what order?</a:t>
+              <a:t>What do you do in the first sixty seconds? How do you deploy two people?</a:t>
             </a:r>
             <a:endParaRPr lang="en-US" sz="1300" dirty="0"/>
           </a:p>
@@ -8765,18 +9005,18 @@
       </p:sp>
       <p:sp>
         <p:nvSpPr>
-          <p:cNvPr id="9" name="Shape 7"/>
-          <p:cNvSpPr/>
-          <p:nvPr/>
-        </p:nvSpPr>
-        <p:spPr>
-          <a:xfrm>
-            <a:off x="640080" y="4046220"/>
-            <a:ext cx="10911535" cy="370332"/>
+          <p:cNvPr id="10" name="Shape 7"/>
+          <p:cNvSpPr/>
+          <p:nvPr/>
+        </p:nvSpPr>
+        <p:spPr>
+          <a:xfrm>
+            <a:off x="640080" y="4114800"/>
+            <a:ext cx="10911535" cy="347472"/>
           </a:xfrm>
           <a:prstGeom prst="roundRect">
             <a:avLst>
-              <a:gd name="adj" fmla="val 9877"/>
+              <a:gd name="adj" fmla="val 10526"/>
             </a:avLst>
           </a:prstGeom>
           <a:solidFill>
@@ -8787,33 +9027,33 @@
       </p:sp>
       <p:sp>
         <p:nvSpPr>
-          <p:cNvPr id="10" name="Shape 8"/>
-          <p:cNvSpPr/>
-          <p:nvPr/>
-        </p:nvSpPr>
-        <p:spPr>
-          <a:xfrm>
-            <a:off x="859536" y="4066794"/>
+          <p:cNvPr id="11" name="Shape 8"/>
+          <p:cNvSpPr/>
+          <p:nvPr/>
+        </p:nvSpPr>
+        <p:spPr>
+          <a:xfrm>
+            <a:off x="859536" y="4123944"/>
             <a:ext cx="329184" cy="329184"/>
           </a:xfrm>
           <a:prstGeom prst="ellipse">
             <a:avLst/>
           </a:prstGeom>
           <a:solidFill>
-            <a:srgbClr val="17AF98"/>
+            <a:srgbClr val="12B198"/>
           </a:solidFill>
           <a:ln/>
         </p:spPr>
       </p:sp>
       <p:sp>
         <p:nvSpPr>
-          <p:cNvPr id="11" name="Text 9"/>
-          <p:cNvSpPr/>
-          <p:nvPr/>
-        </p:nvSpPr>
-        <p:spPr>
-          <a:xfrm>
-            <a:off x="859536" y="4066794"/>
+          <p:cNvPr id="12" name="Text 9"/>
+          <p:cNvSpPr/>
+          <p:nvPr/>
+        </p:nvSpPr>
+        <p:spPr>
+          <a:xfrm>
+            <a:off x="859536" y="4123944"/>
             <a:ext cx="329184" cy="329184"/>
           </a:xfrm>
           <a:prstGeom prst="rect">
@@ -8846,14 +9086,14 @@
       </p:sp>
       <p:sp>
         <p:nvSpPr>
-          <p:cNvPr id="12" name="Text 10"/>
-          <p:cNvSpPr/>
-          <p:nvPr/>
-        </p:nvSpPr>
-        <p:spPr>
-          <a:xfrm>
-            <a:off x="1335024" y="4101084"/>
-            <a:ext cx="9960559" cy="260604"/>
+          <p:cNvPr id="13" name="Text 10"/>
+          <p:cNvSpPr/>
+          <p:nvPr/>
+        </p:nvSpPr>
+        <p:spPr>
+          <a:xfrm>
+            <a:off x="1335024" y="4169664"/>
+            <a:ext cx="9960559" cy="237744"/>
           </a:xfrm>
           <a:prstGeom prst="rect">
             <a:avLst/>
@@ -8908,18 +9148,18 @@
       </p:sp>
       <p:sp>
         <p:nvSpPr>
-          <p:cNvPr id="13" name="Shape 11"/>
-          <p:cNvSpPr/>
-          <p:nvPr/>
-        </p:nvSpPr>
-        <p:spPr>
-          <a:xfrm>
-            <a:off x="640080" y="4507992"/>
-            <a:ext cx="10911535" cy="370332"/>
+          <p:cNvPr id="14" name="Shape 11"/>
+          <p:cNvSpPr/>
+          <p:nvPr/>
+        </p:nvSpPr>
+        <p:spPr>
+          <a:xfrm>
+            <a:off x="640080" y="4553712"/>
+            <a:ext cx="10911535" cy="347472"/>
           </a:xfrm>
           <a:prstGeom prst="roundRect">
             <a:avLst>
-              <a:gd name="adj" fmla="val 9877"/>
+              <a:gd name="adj" fmla="val 10526"/>
             </a:avLst>
           </a:prstGeom>
           <a:solidFill>
@@ -8930,33 +9170,33 @@
       </p:sp>
       <p:sp>
         <p:nvSpPr>
-          <p:cNvPr id="14" name="Shape 12"/>
-          <p:cNvSpPr/>
-          <p:nvPr/>
-        </p:nvSpPr>
-        <p:spPr>
-          <a:xfrm>
-            <a:off x="859536" y="4528566"/>
+          <p:cNvPr id="15" name="Shape 12"/>
+          <p:cNvSpPr/>
+          <p:nvPr/>
+        </p:nvSpPr>
+        <p:spPr>
+          <a:xfrm>
+            <a:off x="859536" y="4562856"/>
             <a:ext cx="329184" cy="329184"/>
           </a:xfrm>
           <a:prstGeom prst="ellipse">
             <a:avLst/>
           </a:prstGeom>
           <a:solidFill>
-            <a:srgbClr val="17AF98"/>
+            <a:srgbClr val="12B198"/>
           </a:solidFill>
           <a:ln/>
         </p:spPr>
       </p:sp>
       <p:sp>
         <p:nvSpPr>
-          <p:cNvPr id="15" name="Text 13"/>
-          <p:cNvSpPr/>
-          <p:nvPr/>
-        </p:nvSpPr>
-        <p:spPr>
-          <a:xfrm>
-            <a:off x="859536" y="4528566"/>
+          <p:cNvPr id="16" name="Text 13"/>
+          <p:cNvSpPr/>
+          <p:nvPr/>
+        </p:nvSpPr>
+        <p:spPr>
+          <a:xfrm>
+            <a:off x="859536" y="4562856"/>
             <a:ext cx="329184" cy="329184"/>
           </a:xfrm>
           <a:prstGeom prst="rect">
@@ -8989,14 +9229,14 @@
       </p:sp>
       <p:sp>
         <p:nvSpPr>
-          <p:cNvPr id="16" name="Text 14"/>
-          <p:cNvSpPr/>
-          <p:nvPr/>
-        </p:nvSpPr>
-        <p:spPr>
-          <a:xfrm>
-            <a:off x="1335024" y="4562856"/>
-            <a:ext cx="9960559" cy="260604"/>
+          <p:cNvPr id="17" name="Text 14"/>
+          <p:cNvSpPr/>
+          <p:nvPr/>
+        </p:nvSpPr>
+        <p:spPr>
+          <a:xfrm>
+            <a:off x="1335024" y="4608576"/>
+            <a:ext cx="9960559" cy="237744"/>
           </a:xfrm>
           <a:prstGeom prst="rect">
             <a:avLst/>
@@ -9023,7 +9263,7 @@
                 <a:ea typeface="Yu Gothic" pitchFamily="34" charset="-122"/>
                 <a:cs typeface="Yu Gothic" pitchFamily="34" charset="-120"/>
               </a:rPr>
-              <a:t>保全すべきログ・画像は何か。誰に依頼するか。</a:t>
+              <a:t>保全すべきログと画像は何か。管理権者が不在のとき、誰に依頼するか。</a:t>
             </a:r>
             <a:endParaRPr lang="en-US" sz="1300" dirty="0"/>
           </a:p>
@@ -9043,7 +9283,7 @@
                 <a:ea typeface="Calibri" pitchFamily="34" charset="-122"/>
                 <a:cs typeface="Calibri" pitchFamily="34" charset="-120"/>
               </a:rPr>
-              <a:t>Which logs and footage must be preserved, and who do you ask?</a:t>
+              <a:t>Which logs and footage must be preserved? With the authority away, who do you ask?</a:t>
             </a:r>
             <a:endParaRPr lang="en-US" sz="1300" dirty="0"/>
           </a:p>
@@ -9051,18 +9291,18 @@
       </p:sp>
       <p:sp>
         <p:nvSpPr>
-          <p:cNvPr id="17" name="Shape 15"/>
-          <p:cNvSpPr/>
-          <p:nvPr/>
-        </p:nvSpPr>
-        <p:spPr>
-          <a:xfrm>
-            <a:off x="640080" y="4969764"/>
-            <a:ext cx="10911535" cy="370332"/>
+          <p:cNvPr id="18" name="Shape 15"/>
+          <p:cNvSpPr/>
+          <p:nvPr/>
+        </p:nvSpPr>
+        <p:spPr>
+          <a:xfrm>
+            <a:off x="640080" y="4992624"/>
+            <a:ext cx="10911535" cy="347472"/>
           </a:xfrm>
           <a:prstGeom prst="roundRect">
             <a:avLst>
-              <a:gd name="adj" fmla="val 9877"/>
+              <a:gd name="adj" fmla="val 10526"/>
             </a:avLst>
           </a:prstGeom>
           <a:solidFill>
@@ -9073,33 +9313,33 @@
       </p:sp>
       <p:sp>
         <p:nvSpPr>
-          <p:cNvPr id="18" name="Shape 16"/>
-          <p:cNvSpPr/>
-          <p:nvPr/>
-        </p:nvSpPr>
-        <p:spPr>
-          <a:xfrm>
-            <a:off x="859536" y="4990338"/>
+          <p:cNvPr id="19" name="Shape 16"/>
+          <p:cNvSpPr/>
+          <p:nvPr/>
+        </p:nvSpPr>
+        <p:spPr>
+          <a:xfrm>
+            <a:off x="859536" y="5001768"/>
             <a:ext cx="329184" cy="329184"/>
           </a:xfrm>
           <a:prstGeom prst="ellipse">
             <a:avLst/>
           </a:prstGeom>
           <a:solidFill>
-            <a:srgbClr val="17AF98"/>
+            <a:srgbClr val="12B198"/>
           </a:solidFill>
           <a:ln/>
         </p:spPr>
       </p:sp>
       <p:sp>
         <p:nvSpPr>
-          <p:cNvPr id="19" name="Text 17"/>
-          <p:cNvSpPr/>
-          <p:nvPr/>
-        </p:nvSpPr>
-        <p:spPr>
-          <a:xfrm>
-            <a:off x="859536" y="4990338"/>
+          <p:cNvPr id="20" name="Text 17"/>
+          <p:cNvSpPr/>
+          <p:nvPr/>
+        </p:nvSpPr>
+        <p:spPr>
+          <a:xfrm>
+            <a:off x="859536" y="5001768"/>
             <a:ext cx="329184" cy="329184"/>
           </a:xfrm>
           <a:prstGeom prst="rect">
@@ -9132,14 +9372,14 @@
       </p:sp>
       <p:sp>
         <p:nvSpPr>
-          <p:cNvPr id="20" name="Text 18"/>
-          <p:cNvSpPr/>
-          <p:nvPr/>
-        </p:nvSpPr>
-        <p:spPr>
-          <a:xfrm>
-            <a:off x="1335024" y="5024628"/>
-            <a:ext cx="9960559" cy="260604"/>
+          <p:cNvPr id="21" name="Text 18"/>
+          <p:cNvSpPr/>
+          <p:nvPr/>
+        </p:nvSpPr>
+        <p:spPr>
+          <a:xfrm>
+            <a:off x="1335024" y="5047488"/>
+            <a:ext cx="9960559" cy="237744"/>
           </a:xfrm>
           <a:prstGeom prst="rect">
             <a:avLst/>
@@ -9166,7 +9406,7 @@
                 <a:ea typeface="Yu Gothic" pitchFamily="34" charset="-122"/>
                 <a:cs typeface="Yu Gothic" pitchFamily="34" charset="-120"/>
               </a:rPr>
-              <a:t>社内には誰に何を上げるか。現場保存の範囲はどこまでか。</a:t>
+              <a:t>何を後回しにするか。その判断の根拠は何か。</a:t>
             </a:r>
             <a:endParaRPr lang="en-US" sz="1300" dirty="0"/>
           </a:p>
@@ -9186,7 +9426,7 @@
                 <a:ea typeface="Calibri" pitchFamily="34" charset="-122"/>
                 <a:cs typeface="Calibri" pitchFamily="34" charset="-120"/>
               </a:rPr>
-              <a:t>Who do you escalate to internally — and how far does the cordon go?</a:t>
+              <a:t>What do you leave until later, and on what basis?</a:t>
             </a:r>
             <a:endParaRPr lang="en-US" sz="1300" dirty="0"/>
           </a:p>
@@ -9194,7 +9434,7 @@
       </p:sp>
       <p:sp>
         <p:nvSpPr>
-          <p:cNvPr id="21" name="Shape 19"/>
+          <p:cNvPr id="22" name="Shape 19"/>
           <p:cNvSpPr/>
           <p:nvPr/>
         </p:nvSpPr>
@@ -9216,7 +9456,7 @@
       </p:sp>
       <p:sp>
         <p:nvSpPr>
-          <p:cNvPr id="22" name="Text 20"/>
+          <p:cNvPr id="23" name="Text 20"/>
           <p:cNvSpPr/>
           <p:nvPr/>
         </p:nvSpPr>
@@ -9244,7 +9484,7 @@
             <a:r>
               <a:rPr lang="en-US" sz="1000" b="1" dirty="0">
                 <a:solidFill>
-                  <a:srgbClr val="0E8C79"/>
+                  <a:srgbClr val="0D8A76"/>
                 </a:solidFill>
                 <a:latin typeface="Yu Gothic" pitchFamily="34" charset="0"/>
                 <a:ea typeface="Yu Gothic" pitchFamily="34" charset="-122"/>
@@ -9261,7 +9501,7 @@
             <a:r>
               <a:rPr lang="en-US" sz="850" dirty="0">
                 <a:solidFill>
-                  <a:srgbClr val="0E8C79"/>
+                  <a:srgbClr val="0D8A76"/>
                 </a:solidFill>
                 <a:latin typeface="Calibri" pitchFamily="34" charset="0"/>
                 <a:ea typeface="Calibri" pitchFamily="34" charset="-122"/>
@@ -9312,7 +9552,7 @@
       </p:sp>
       <p:sp>
         <p:nvSpPr>
-          <p:cNvPr id="23" name="Text 21"/>
+          <p:cNvPr id="24" name="Text 21"/>
           <p:cNvSpPr/>
           <p:nvPr/>
         </p:nvSpPr>
@@ -9365,7 +9605,7 @@
       </p:sp>
       <p:sp>
         <p:nvSpPr>
-          <p:cNvPr id="24" name="Text 22"/>
+          <p:cNvPr id="25" name="Text 22"/>
           <p:cNvSpPr/>
           <p:nvPr/>
         </p:nvSpPr>
@@ -9434,9 +9674,33 @@
           <a:chExt cx="0" cy="0"/>
         </a:xfrm>
       </p:grpSpPr>
-      <p:sp>
-        <p:nvSpPr>
-          <p:cNvPr id="2" name="Text 0"/>
+      <p:pic>
+        <p:nvPicPr>
+          <p:cNvPr id="2" name="Image 0" descr="/home/user/Training-/assets/logo.png">    </p:cNvPr>
+          <p:cNvPicPr>
+            <a:picLocks noChangeAspect="1"/>
+          </p:cNvPicPr>
+          <p:nvPr/>
+        </p:nvPicPr>
+        <p:blipFill>
+          <a:blip r:embed="rId1"/>
+          <a:stretch>
+            <a:fillRect/>
+          </a:stretch>
+        </p:blipFill>
+        <p:spPr>
+          <a:xfrm>
+            <a:off x="10765231" y="332912"/>
+            <a:ext cx="786384" cy="742353"/>
+          </a:xfrm>
+          <a:prstGeom prst="rect">
+            <a:avLst/>
+          </a:prstGeom>
+        </p:spPr>
+      </p:pic>
+      <p:sp>
+        <p:nvSpPr>
+          <p:cNvPr id="3" name="Text 0"/>
           <p:cNvSpPr/>
           <p:nvPr/>
         </p:nvSpPr>
@@ -9464,13 +9728,13 @@
             <a:r>
               <a:rPr lang="en-US" sz="2700" b="1" dirty="0">
                 <a:solidFill>
-                  <a:srgbClr val="0F2D52"/>
+                  <a:srgbClr val="093259"/>
                 </a:solidFill>
                 <a:latin typeface="Yu Gothic" pitchFamily="34" charset="0"/>
                 <a:ea typeface="Yu Gothic" pitchFamily="34" charset="-122"/>
                 <a:cs typeface="Yu Gothic" pitchFamily="34" charset="-120"/>
               </a:rPr>
-              <a:t>TTX⑤ 講評 ― 本日の要素はどこに出たか</a:t>
+              <a:t>TTX⑤ 講評 ― 本日の内容との対応</a:t>
             </a:r>
             <a:endParaRPr lang="en-US" sz="2700" dirty="0"/>
           </a:p>
@@ -9484,13 +9748,13 @@
             <a:r>
               <a:rPr lang="en-US" sz="1250" i="1" dirty="0">
                 <a:solidFill>
-                  <a:srgbClr val="17AF98"/>
-                </a:solidFill>
-                <a:latin typeface="Calibri" pitchFamily="34" charset="0"/>
-                <a:ea typeface="Calibri" pitchFamily="34" charset="-122"/>
-                <a:cs typeface="Calibri" pitchFamily="34" charset="-120"/>
-              </a:rPr>
-              <a:t>TTX ⑤ Debrief — where today's elements appeared</a:t>
+                  <a:srgbClr val="12B198"/>
+                </a:solidFill>
+                <a:latin typeface="Calibri" pitchFamily="34" charset="0"/>
+                <a:ea typeface="Calibri" pitchFamily="34" charset="-122"/>
+                <a:cs typeface="Calibri" pitchFamily="34" charset="-120"/>
+              </a:rPr>
+              <a:t>TTX ⑤ Debrief — Where Today's Content Applied</a:t>
             </a:r>
             <a:endParaRPr lang="en-US" sz="2700" dirty="0"/>
           </a:p>
@@ -9498,7 +9762,7 @@
       </p:sp>
       <p:sp>
         <p:nvSpPr>
-          <p:cNvPr id="3" name="Shape 1"/>
+          <p:cNvPr id="4" name="Shape 1"/>
           <p:cNvSpPr/>
           <p:nvPr/>
         </p:nvSpPr>
@@ -9520,7 +9784,7 @@
       </p:sp>
       <p:sp>
         <p:nvSpPr>
-          <p:cNvPr id="4" name="Shape 2"/>
+          <p:cNvPr id="5" name="Shape 2"/>
           <p:cNvSpPr/>
           <p:nvPr/>
         </p:nvSpPr>
@@ -9533,14 +9797,14 @@
             <a:avLst/>
           </a:prstGeom>
           <a:solidFill>
-            <a:srgbClr val="17AF98"/>
+            <a:srgbClr val="12B198"/>
           </a:solidFill>
           <a:ln/>
         </p:spPr>
       </p:sp>
       <p:sp>
         <p:nvSpPr>
-          <p:cNvPr id="5" name="Text 3"/>
+          <p:cNvPr id="6" name="Text 3"/>
           <p:cNvSpPr/>
           <p:nvPr/>
         </p:nvSpPr>
@@ -9579,7 +9843,7 @@
       </p:sp>
       <p:sp>
         <p:nvSpPr>
-          <p:cNvPr id="6" name="Text 4"/>
+          <p:cNvPr id="7" name="Text 4"/>
           <p:cNvSpPr/>
           <p:nvPr/>
         </p:nvSpPr>
@@ -9633,7 +9897,7 @@
                 <a:ea typeface="Calibri" pitchFamily="34" charset="-122"/>
                 <a:cs typeface="Calibri" pitchFamily="34" charset="-120"/>
               </a:rPr>
-              <a:t>Period 1 — which of People, Asset or Reputation did you put first?</a:t>
+              <a:t>Period 1: which of People, Asset or Reputation did you put first?</a:t>
             </a:r>
             <a:endParaRPr lang="en-US" sz="1450" dirty="0"/>
           </a:p>
@@ -9641,7 +9905,7 @@
       </p:sp>
       <p:sp>
         <p:nvSpPr>
-          <p:cNvPr id="7" name="Shape 5"/>
+          <p:cNvPr id="8" name="Shape 5"/>
           <p:cNvSpPr/>
           <p:nvPr/>
         </p:nvSpPr>
@@ -9663,7 +9927,7 @@
       </p:sp>
       <p:sp>
         <p:nvSpPr>
-          <p:cNvPr id="8" name="Shape 6"/>
+          <p:cNvPr id="9" name="Shape 6"/>
           <p:cNvSpPr/>
           <p:nvPr/>
         </p:nvSpPr>
@@ -9676,14 +9940,14 @@
             <a:avLst/>
           </a:prstGeom>
           <a:solidFill>
-            <a:srgbClr val="17AF98"/>
+            <a:srgbClr val="12B198"/>
           </a:solidFill>
           <a:ln/>
         </p:spPr>
       </p:sp>
       <p:sp>
         <p:nvSpPr>
-          <p:cNvPr id="9" name="Text 7"/>
+          <p:cNvPr id="10" name="Text 7"/>
           <p:cNvSpPr/>
           <p:nvPr/>
         </p:nvSpPr>
@@ -9722,7 +9986,7 @@
       </p:sp>
       <p:sp>
         <p:nvSpPr>
-          <p:cNvPr id="10" name="Text 8"/>
+          <p:cNvPr id="11" name="Text 8"/>
           <p:cNvSpPr/>
           <p:nvPr/>
         </p:nvSpPr>
@@ -9756,7 +10020,7 @@
                 <a:ea typeface="Yu Gothic" pitchFamily="34" charset="-122"/>
                 <a:cs typeface="Yu Gothic" pitchFamily="34" charset="-120"/>
               </a:rPr>
-              <a:t>第2限 ― カードの持ち主を追う権限が、あなたにあったか。</a:t>
+              <a:t>第2限 ― カードの使用者を追う権限が、あなたにあったか。</a:t>
             </a:r>
             <a:endParaRPr lang="en-US" sz="1450" dirty="0"/>
           </a:p>
@@ -9776,7 +10040,7 @@
                 <a:ea typeface="Calibri" pitchFamily="34" charset="-122"/>
                 <a:cs typeface="Calibri" pitchFamily="34" charset="-120"/>
               </a:rPr>
-              <a:t>Period 2 — did you actually have the authority to pursue the cardholder?</a:t>
+              <a:t>Period 2: did you have the authority to pursue the cardholder?</a:t>
             </a:r>
             <a:endParaRPr lang="en-US" sz="1450" dirty="0"/>
           </a:p>
@@ -9784,7 +10048,7 @@
       </p:sp>
       <p:sp>
         <p:nvSpPr>
-          <p:cNvPr id="11" name="Shape 9"/>
+          <p:cNvPr id="12" name="Shape 9"/>
           <p:cNvSpPr/>
           <p:nvPr/>
         </p:nvSpPr>
@@ -9806,7 +10070,7 @@
       </p:sp>
       <p:sp>
         <p:nvSpPr>
-          <p:cNvPr id="12" name="Shape 10"/>
+          <p:cNvPr id="13" name="Shape 10"/>
           <p:cNvSpPr/>
           <p:nvPr/>
         </p:nvSpPr>
@@ -9819,14 +10083,14 @@
             <a:avLst/>
           </a:prstGeom>
           <a:solidFill>
-            <a:srgbClr val="17AF98"/>
+            <a:srgbClr val="12B198"/>
           </a:solidFill>
           <a:ln/>
         </p:spPr>
       </p:sp>
       <p:sp>
         <p:nvSpPr>
-          <p:cNvPr id="13" name="Text 11"/>
+          <p:cNvPr id="14" name="Text 11"/>
           <p:cNvSpPr/>
           <p:nvPr/>
         </p:nvSpPr>
@@ -9865,7 +10129,7 @@
       </p:sp>
       <p:sp>
         <p:nvSpPr>
-          <p:cNvPr id="14" name="Text 12"/>
+          <p:cNvPr id="15" name="Text 12"/>
           <p:cNvSpPr/>
           <p:nvPr/>
         </p:nvSpPr>
@@ -9899,7 +10163,7 @@
                 <a:ea typeface="Yu Gothic" pitchFamily="34" charset="-122"/>
                 <a:cs typeface="Yu Gothic" pitchFamily="34" charset="-120"/>
               </a:rPr>
-              <a:t>第4限 ― 巡回の視点。3階のどこを、何のために見に行ったか。</a:t>
+              <a:t>第4限 ― 3階のどこを、何のために確認しに行ったか。</a:t>
             </a:r>
             <a:endParaRPr lang="en-US" sz="1450" dirty="0"/>
           </a:p>
@@ -9919,7 +10183,7 @@
                 <a:ea typeface="Calibri" pitchFamily="34" charset="-122"/>
                 <a:cs typeface="Calibri" pitchFamily="34" charset="-120"/>
               </a:rPr>
-              <a:t>Period 4 — the patrol lens: what on the third floor, and to what end?</a:t>
+              <a:t>Period 4: what did you go to check on the third floor, and why?</a:t>
             </a:r>
             <a:endParaRPr lang="en-US" sz="1450" dirty="0"/>
           </a:p>
@@ -9927,7 +10191,7 @@
       </p:sp>
       <p:sp>
         <p:nvSpPr>
-          <p:cNvPr id="15" name="Shape 13"/>
+          <p:cNvPr id="16" name="Shape 13"/>
           <p:cNvSpPr/>
           <p:nvPr/>
         </p:nvSpPr>
@@ -9949,7 +10213,7 @@
       </p:sp>
       <p:sp>
         <p:nvSpPr>
-          <p:cNvPr id="16" name="Shape 14"/>
+          <p:cNvPr id="17" name="Shape 14"/>
           <p:cNvSpPr/>
           <p:nvPr/>
         </p:nvSpPr>
@@ -9962,14 +10226,14 @@
             <a:avLst/>
           </a:prstGeom>
           <a:solidFill>
-            <a:srgbClr val="17AF98"/>
+            <a:srgbClr val="12B198"/>
           </a:solidFill>
           <a:ln/>
         </p:spPr>
       </p:sp>
       <p:sp>
         <p:nvSpPr>
-          <p:cNvPr id="17" name="Text 15"/>
+          <p:cNvPr id="18" name="Text 15"/>
           <p:cNvSpPr/>
           <p:nvPr/>
         </p:nvSpPr>
@@ -10008,7 +10272,7 @@
       </p:sp>
       <p:sp>
         <p:nvSpPr>
-          <p:cNvPr id="18" name="Text 16"/>
+          <p:cNvPr id="19" name="Text 16"/>
           <p:cNvSpPr/>
           <p:nvPr/>
         </p:nvSpPr>
@@ -10042,7 +10306,7 @@
                 <a:ea typeface="Yu Gothic" pitchFamily="34" charset="-122"/>
                 <a:cs typeface="Yu Gothic" pitchFamily="34" charset="-120"/>
               </a:rPr>
-              <a:t>第5限 ― 現場で人に会ったとき、最初の一言は何だったか。</a:t>
+              <a:t>第5限 ― 現場で人に会ったとき、最初に何と言ったか。</a:t>
             </a:r>
             <a:endParaRPr lang="en-US" sz="1450" dirty="0"/>
           </a:p>
@@ -10062,7 +10326,7 @@
                 <a:ea typeface="Calibri" pitchFamily="34" charset="-122"/>
                 <a:cs typeface="Calibri" pitchFamily="34" charset="-120"/>
               </a:rPr>
-              <a:t>Period 5 — meeting a person there, what were your first words?</a:t>
+              <a:t>Period 5: meeting a person there, what did you say first?</a:t>
             </a:r>
             <a:endParaRPr lang="en-US" sz="1450" dirty="0"/>
           </a:p>
@@ -10070,7 +10334,7 @@
       </p:sp>
       <p:sp>
         <p:nvSpPr>
-          <p:cNvPr id="19" name="Shape 17"/>
+          <p:cNvPr id="20" name="Shape 17"/>
           <p:cNvSpPr/>
           <p:nvPr/>
         </p:nvSpPr>
@@ -10092,7 +10356,7 @@
       </p:sp>
       <p:sp>
         <p:nvSpPr>
-          <p:cNvPr id="20" name="Shape 18"/>
+          <p:cNvPr id="21" name="Shape 18"/>
           <p:cNvSpPr/>
           <p:nvPr/>
         </p:nvSpPr>
@@ -10105,14 +10369,14 @@
             <a:avLst/>
           </a:prstGeom>
           <a:solidFill>
-            <a:srgbClr val="17AF98"/>
+            <a:srgbClr val="12B198"/>
           </a:solidFill>
           <a:ln/>
         </p:spPr>
       </p:sp>
       <p:sp>
         <p:nvSpPr>
-          <p:cNvPr id="21" name="Text 19"/>
+          <p:cNvPr id="22" name="Text 19"/>
           <p:cNvSpPr/>
           <p:nvPr/>
         </p:nvSpPr>
@@ -10151,7 +10415,7 @@
       </p:sp>
       <p:sp>
         <p:nvSpPr>
-          <p:cNvPr id="22" name="Text 20"/>
+          <p:cNvPr id="23" name="Text 20"/>
           <p:cNvSpPr/>
           <p:nvPr/>
         </p:nvSpPr>
@@ -10185,7 +10449,7 @@
                 <a:ea typeface="Yu Gothic" pitchFamily="34" charset="-122"/>
                 <a:cs typeface="Yu Gothic" pitchFamily="34" charset="-120"/>
               </a:rPr>
-              <a:t>第9限 ― 事実と評価を分けて報告できたか。保全を依頼したか。</a:t>
+              <a:t>第9限 ― 事実と評価を分けて報告したか。保全を依頼したか。</a:t>
             </a:r>
             <a:endParaRPr lang="en-US" sz="1300" dirty="0"/>
           </a:p>
@@ -10205,7 +10469,7 @@
                 <a:ea typeface="Calibri" pitchFamily="34" charset="-122"/>
                 <a:cs typeface="Calibri" pitchFamily="34" charset="-120"/>
               </a:rPr>
-              <a:t>Period 9 — fact and assessment kept apart? Preservation requested?</a:t>
+              <a:t>Period 9: did you separate fact from assessment? Did you request preservation?</a:t>
             </a:r>
             <a:endParaRPr lang="en-US" sz="1300" dirty="0"/>
           </a:p>
@@ -10213,7 +10477,7 @@
       </p:sp>
       <p:sp>
         <p:nvSpPr>
-          <p:cNvPr id="23" name="Text 21"/>
+          <p:cNvPr id="24" name="Text 21"/>
           <p:cNvSpPr/>
           <p:nvPr/>
         </p:nvSpPr>
@@ -10266,7 +10530,7 @@
       </p:sp>
       <p:sp>
         <p:nvSpPr>
-          <p:cNvPr id="24" name="Text 22"/>
+          <p:cNvPr id="25" name="Text 22"/>
           <p:cNvSpPr/>
           <p:nvPr/>
         </p:nvSpPr>

--- a/decks/06_10限_機器と総括.pptx
+++ b/decks/06_10限_機器と総括.pptx
@@ -14,9 +14,11 @@
     <p:sldId id="262" r:id="rId8"/>
     <p:sldId id="263" r:id="rId9"/>
     <p:sldId id="264" r:id="rId10"/>
+    <p:sldId id="265" r:id="rId11"/>
+    <p:sldId id="266" r:id="rId12"/>
   </p:sldIdLst>
   <p:notesMasterIdLst>
-    <p:notesMasterId r:id="rId11"/>
+    <p:notesMasterId r:id="rId13"/>
   </p:notesMasterIdLst>
   <p:sldSz cx="12192000" cy="6858000"/>
   <p:notesSz cx="6858000" cy="12192000"/>
@@ -534,6 +536,182 @@
             <a:fld id="{F7021451-1387-4CA6-816F-3879F97B5CBC}" type="slidenum">
               <a:rPr lang="en-US"/>
               <a:t>1</a:t>
+            </a:fld>
+            <a:endParaRPr lang="en-US"/>
+          </a:p>
+        </p:txBody>
+      </p:sp>
+    </p:spTree>
+    <p:extLst>
+      <p:ext uri="{BB962C8B-B14F-4D97-AF65-F5344CB8AC3E}">
+        <p14:creationId xmlns:p14="http://schemas.microsoft.com/office/powerpoint/2010/main" val="1024086991"/>
+      </p:ext>
+    </p:extLst>
+  </p:cSld>
+  <p:clrMapOvr>
+    <a:masterClrMapping/>
+  </p:clrMapOvr>
+</p:notes>
+</file>
+
+<file path=ppt/notesSlides/notesSlide10.xml><?xml version="1.0" encoding="utf-8"?>
+<p:notes xmlns:a="http://schemas.openxmlformats.org/drawingml/2006/main" xmlns:r="http://schemas.openxmlformats.org/officeDocument/2006/relationships" xmlns:p="http://schemas.openxmlformats.org/presentationml/2006/main">
+  <p:cSld>
+    <p:spTree>
+      <p:nvGrpSpPr>
+        <p:cNvPr id="1" name=""/>
+        <p:cNvGrpSpPr/>
+        <p:nvPr/>
+      </p:nvGrpSpPr>
+      <p:grpSpPr>
+        <a:xfrm>
+          <a:off x="0" y="0"/>
+          <a:ext cx="0" cy="0"/>
+          <a:chOff x="0" y="0"/>
+          <a:chExt cx="0" cy="0"/>
+        </a:xfrm>
+      </p:grpSpPr>
+      <p:sp>
+        <p:nvSpPr>
+          <p:cNvPr id="2" name="Slide Image Placeholder 1"/>
+          <p:cNvSpPr>
+            <a:spLocks noGrp="1" noRot="1" noChangeAspect="1"/>
+          </p:cNvSpPr>
+          <p:nvPr>
+            <p:ph type="sldImg"/>
+          </p:nvPr>
+        </p:nvSpPr>
+        <p:spPr/>
+      </p:sp>
+      <p:sp>
+        <p:nvSpPr>
+          <p:cNvPr id="3" name="Notes Placeholder 2"/>
+          <p:cNvSpPr>
+            <a:spLocks noGrp="1"/>
+          </p:cNvSpPr>
+          <p:nvPr>
+            <p:ph type="body" idx="1"/>
+          </p:nvPr>
+        </p:nvSpPr>
+        <p:spPr/>
+        <p:txBody>
+          <a:bodyPr/>
+          <a:lstStyle/>
+          <a:p>
+            <a:r>
+              <a:rPr lang="en-US" dirty="0"/>
+              <a:t/>
+            </a:r>
+            <a:endParaRPr lang="en-US" dirty="0"/>
+          </a:p>
+        </p:txBody>
+      </p:sp>
+      <p:sp>
+        <p:nvSpPr>
+          <p:cNvPr id="4" name="Slide Number Placeholder 3"/>
+          <p:cNvSpPr>
+            <a:spLocks noGrp="1"/>
+          </p:cNvSpPr>
+          <p:nvPr>
+            <p:ph type="sldNum" sz="quarter" idx="10"/>
+          </p:nvPr>
+        </p:nvSpPr>
+        <p:spPr/>
+        <p:txBody>
+          <a:bodyPr/>
+          <a:lstStyle/>
+          <a:p>
+            <a:fld id="{F7021451-1387-4CA6-816F-3879F97B5CBC}" type="slidenum">
+              <a:rPr lang="en-US"/>
+              <a:t>10</a:t>
+            </a:fld>
+            <a:endParaRPr lang="en-US"/>
+          </a:p>
+        </p:txBody>
+      </p:sp>
+    </p:spTree>
+    <p:extLst>
+      <p:ext uri="{BB962C8B-B14F-4D97-AF65-F5344CB8AC3E}">
+        <p14:creationId xmlns:p14="http://schemas.microsoft.com/office/powerpoint/2010/main" val="1024086991"/>
+      </p:ext>
+    </p:extLst>
+  </p:cSld>
+  <p:clrMapOvr>
+    <a:masterClrMapping/>
+  </p:clrMapOvr>
+</p:notes>
+</file>
+
+<file path=ppt/notesSlides/notesSlide11.xml><?xml version="1.0" encoding="utf-8"?>
+<p:notes xmlns:a="http://schemas.openxmlformats.org/drawingml/2006/main" xmlns:r="http://schemas.openxmlformats.org/officeDocument/2006/relationships" xmlns:p="http://schemas.openxmlformats.org/presentationml/2006/main">
+  <p:cSld>
+    <p:spTree>
+      <p:nvGrpSpPr>
+        <p:cNvPr id="1" name=""/>
+        <p:cNvGrpSpPr/>
+        <p:nvPr/>
+      </p:nvGrpSpPr>
+      <p:grpSpPr>
+        <a:xfrm>
+          <a:off x="0" y="0"/>
+          <a:ext cx="0" cy="0"/>
+          <a:chOff x="0" y="0"/>
+          <a:chExt cx="0" cy="0"/>
+        </a:xfrm>
+      </p:grpSpPr>
+      <p:sp>
+        <p:nvSpPr>
+          <p:cNvPr id="2" name="Slide Image Placeholder 1"/>
+          <p:cNvSpPr>
+            <a:spLocks noGrp="1" noRot="1" noChangeAspect="1"/>
+          </p:cNvSpPr>
+          <p:nvPr>
+            <p:ph type="sldImg"/>
+          </p:nvPr>
+        </p:nvSpPr>
+        <p:spPr/>
+      </p:sp>
+      <p:sp>
+        <p:nvSpPr>
+          <p:cNvPr id="3" name="Notes Placeholder 2"/>
+          <p:cNvSpPr>
+            <a:spLocks noGrp="1"/>
+          </p:cNvSpPr>
+          <p:nvPr>
+            <p:ph type="body" idx="1"/>
+          </p:nvPr>
+        </p:nvSpPr>
+        <p:spPr/>
+        <p:txBody>
+          <a:bodyPr/>
+          <a:lstStyle/>
+          <a:p>
+            <a:r>
+              <a:rPr lang="en-US" dirty="0"/>
+              <a:t/>
+            </a:r>
+            <a:endParaRPr lang="en-US" dirty="0"/>
+          </a:p>
+        </p:txBody>
+      </p:sp>
+      <p:sp>
+        <p:nvSpPr>
+          <p:cNvPr id="4" name="Slide Number Placeholder 3"/>
+          <p:cNvSpPr>
+            <a:spLocks noGrp="1"/>
+          </p:cNvSpPr>
+          <p:nvPr>
+            <p:ph type="sldNum" sz="quarter" idx="10"/>
+          </p:nvPr>
+        </p:nvSpPr>
+        <p:spPr/>
+        <p:txBody>
+          <a:bodyPr/>
+          <a:lstStyle/>
+          <a:p>
+            <a:fld id="{F7021451-1387-4CA6-816F-3879F97B5CBC}" type="slidenum">
+              <a:rPr lang="en-US"/>
+              <a:t>11</a:t>
             </a:fld>
             <a:endParaRPr lang="en-US"/>
           </a:p>
@@ -1874,6 +2052,1761 @@
 </p:sld>
 </file>
 
+<file path=ppt/slides/slide10.xml><?xml version="1.0" encoding="utf-8"?>
+<p:sld xmlns:a="http://schemas.openxmlformats.org/drawingml/2006/main" xmlns:r="http://schemas.openxmlformats.org/officeDocument/2006/relationships" xmlns:p="http://schemas.openxmlformats.org/presentationml/2006/main">
+  <p:cSld name="Slide 10">
+    <p:bg>
+      <p:bgPr>
+        <a:solidFill>
+          <a:srgbClr val="FFFFFF"/>
+        </a:solidFill>
+      </p:bgPr>
+    </p:bg>
+    <p:spTree>
+      <p:nvGrpSpPr>
+        <p:cNvPr id="1" name=""/>
+        <p:cNvGrpSpPr/>
+        <p:nvPr/>
+      </p:nvGrpSpPr>
+      <p:grpSpPr>
+        <a:xfrm>
+          <a:off x="0" y="0"/>
+          <a:ext cx="0" cy="0"/>
+          <a:chOff x="0" y="0"/>
+          <a:chExt cx="0" cy="0"/>
+        </a:xfrm>
+      </p:grpSpPr>
+      <p:pic>
+        <p:nvPicPr>
+          <p:cNvPr id="2" name="Image 0" descr="/home/user/Training-/assets/logo.png">    </p:cNvPr>
+          <p:cNvPicPr>
+            <a:picLocks noChangeAspect="1"/>
+          </p:cNvPicPr>
+          <p:nvPr/>
+        </p:nvPicPr>
+        <p:blipFill>
+          <a:blip r:embed="rId1"/>
+          <a:stretch>
+            <a:fillRect/>
+          </a:stretch>
+        </p:blipFill>
+        <p:spPr>
+          <a:xfrm>
+            <a:off x="10765231" y="332912"/>
+            <a:ext cx="786384" cy="742353"/>
+          </a:xfrm>
+          <a:prstGeom prst="rect">
+            <a:avLst/>
+          </a:prstGeom>
+        </p:spPr>
+      </p:pic>
+      <p:sp>
+        <p:nvSpPr>
+          <p:cNvPr id="3" name="Text 0"/>
+          <p:cNvSpPr/>
+          <p:nvPr/>
+        </p:nvSpPr>
+        <p:spPr>
+          <a:xfrm>
+            <a:off x="640080" y="475488"/>
+            <a:ext cx="9805111" cy="960120"/>
+          </a:xfrm>
+          <a:prstGeom prst="rect">
+            <a:avLst/>
+          </a:prstGeom>
+          <a:noFill/>
+          <a:ln/>
+        </p:spPr>
+        <p:txBody>
+          <a:bodyPr wrap="square" lIns="0" tIns="0" rIns="0" bIns="0" rtlCol="0" anchor="t"/>
+          <a:lstStyle/>
+          <a:p>
+            <a:pPr indent="0" marL="0">
+              <a:lnSpc>
+                <a:spcPct val="94000"/>
+              </a:lnSpc>
+              <a:buNone/>
+            </a:pPr>
+            <a:r>
+              <a:rPr lang="en-US" sz="2700" b="1" dirty="0">
+                <a:solidFill>
+                  <a:srgbClr val="093259"/>
+                </a:solidFill>
+                <a:latin typeface="Yu Gothic" pitchFamily="34" charset="0"/>
+                <a:ea typeface="Yu Gothic" pitchFamily="34" charset="-122"/>
+                <a:cs typeface="Yu Gothic" pitchFamily="34" charset="-120"/>
+              </a:rPr>
+              <a:t>AAR ― 振り返り（After Action Review）</a:t>
+            </a:r>
+            <a:endParaRPr lang="en-US" sz="2700" dirty="0"/>
+          </a:p>
+          <a:p>
+            <a:pPr indent="0" marL="0">
+              <a:lnSpc>
+                <a:spcPct val="94000"/>
+              </a:lnSpc>
+              <a:buNone/>
+            </a:pPr>
+            <a:r>
+              <a:rPr lang="en-US" sz="1250" i="1" dirty="0">
+                <a:solidFill>
+                  <a:srgbClr val="12B198"/>
+                </a:solidFill>
+                <a:latin typeface="Calibri" pitchFamily="34" charset="0"/>
+                <a:ea typeface="Calibri" pitchFamily="34" charset="-122"/>
+                <a:cs typeface="Calibri" pitchFamily="34" charset="-120"/>
+              </a:rPr>
+              <a:t>AAR — After Action Review</a:t>
+            </a:r>
+            <a:endParaRPr lang="en-US" sz="2700" dirty="0"/>
+          </a:p>
+        </p:txBody>
+      </p:sp>
+      <p:sp>
+        <p:nvSpPr>
+          <p:cNvPr id="4" name="Text 1"/>
+          <p:cNvSpPr/>
+          <p:nvPr/>
+        </p:nvSpPr>
+        <p:spPr>
+          <a:xfrm>
+            <a:off x="640080" y="1536192"/>
+            <a:ext cx="10911535" cy="566928"/>
+          </a:xfrm>
+          <a:prstGeom prst="rect">
+            <a:avLst/>
+          </a:prstGeom>
+          <a:noFill/>
+          <a:ln/>
+        </p:spPr>
+        <p:txBody>
+          <a:bodyPr wrap="square" lIns="0" tIns="0" rIns="0" bIns="0" rtlCol="0" anchor="t"/>
+          <a:lstStyle/>
+          <a:p>
+            <a:pPr algn="l" indent="0" marL="0">
+              <a:lnSpc>
+                <a:spcPct val="92000"/>
+              </a:lnSpc>
+              <a:buNone/>
+            </a:pPr>
+            <a:r>
+              <a:rPr lang="en-US" sz="1300" dirty="0">
+                <a:solidFill>
+                  <a:srgbClr val="093259"/>
+                </a:solidFill>
+                <a:latin typeface="Yu Gothic" pitchFamily="34" charset="0"/>
+                <a:ea typeface="Yu Gothic" pitchFamily="34" charset="-122"/>
+                <a:cs typeface="Yu Gothic" pitchFamily="34" charset="-120"/>
+              </a:rPr>
+              <a:t>AAR は事案や訓練の直後に行う振り返りです。原則は、犯人探しをしないことです。</a:t>
+            </a:r>
+            <a:endParaRPr lang="en-US" sz="1300" dirty="0"/>
+          </a:p>
+          <a:p>
+            <a:pPr algn="l" indent="0" marL="0">
+              <a:lnSpc>
+                <a:spcPct val="92000"/>
+              </a:lnSpc>
+              <a:buNone/>
+            </a:pPr>
+            <a:r>
+              <a:rPr lang="en-US" sz="1000" i="1" dirty="0">
+                <a:solidFill>
+                  <a:srgbClr val="5F7183"/>
+                </a:solidFill>
+                <a:latin typeface="Calibri" pitchFamily="34" charset="0"/>
+                <a:ea typeface="Calibri" pitchFamily="34" charset="-122"/>
+                <a:cs typeface="Calibri" pitchFamily="34" charset="-120"/>
+              </a:rPr>
+              <a:t>An AAR is a review held immediately after an incident or exercise. The rule is: no blame.</a:t>
+            </a:r>
+            <a:endParaRPr lang="en-US" sz="1300" dirty="0"/>
+          </a:p>
+        </p:txBody>
+      </p:sp>
+      <p:sp>
+        <p:nvSpPr>
+          <p:cNvPr id="5" name="Shape 2"/>
+          <p:cNvSpPr/>
+          <p:nvPr/>
+        </p:nvSpPr>
+        <p:spPr>
+          <a:xfrm>
+            <a:off x="640080" y="2286000"/>
+            <a:ext cx="10911535" cy="702259"/>
+          </a:xfrm>
+          <a:prstGeom prst="roundRect">
+            <a:avLst>
+              <a:gd name="adj" fmla="val 6510"/>
+            </a:avLst>
+          </a:prstGeom>
+          <a:solidFill>
+            <a:srgbClr val="EFF4F8"/>
+          </a:solidFill>
+          <a:ln/>
+        </p:spPr>
+      </p:sp>
+      <p:sp>
+        <p:nvSpPr>
+          <p:cNvPr id="6" name="Shape 3"/>
+          <p:cNvSpPr/>
+          <p:nvPr/>
+        </p:nvSpPr>
+        <p:spPr>
+          <a:xfrm>
+            <a:off x="896112" y="2445106"/>
+            <a:ext cx="384048" cy="384048"/>
+          </a:xfrm>
+          <a:prstGeom prst="ellipse">
+            <a:avLst/>
+          </a:prstGeom>
+          <a:solidFill>
+            <a:srgbClr val="12B198"/>
+          </a:solidFill>
+          <a:ln/>
+        </p:spPr>
+      </p:sp>
+      <p:sp>
+        <p:nvSpPr>
+          <p:cNvPr id="7" name="Text 4"/>
+          <p:cNvSpPr/>
+          <p:nvPr/>
+        </p:nvSpPr>
+        <p:spPr>
+          <a:xfrm>
+            <a:off x="896112" y="2445106"/>
+            <a:ext cx="384048" cy="384048"/>
+          </a:xfrm>
+          <a:prstGeom prst="rect">
+            <a:avLst/>
+          </a:prstGeom>
+          <a:noFill/>
+          <a:ln/>
+        </p:spPr>
+        <p:txBody>
+          <a:bodyPr wrap="square" lIns="0" tIns="0" rIns="0" bIns="0" rtlCol="0" anchor="ctr"/>
+          <a:lstStyle/>
+          <a:p>
+            <a:pPr algn="ctr" indent="0" marL="0">
+              <a:buNone/>
+            </a:pPr>
+            <a:r>
+              <a:rPr lang="en-US" sz="1400" b="1" dirty="0">
+                <a:solidFill>
+                  <a:srgbClr val="FFFFFF"/>
+                </a:solidFill>
+                <a:latin typeface="Calibri" pitchFamily="34" charset="0"/>
+                <a:ea typeface="Calibri" pitchFamily="34" charset="-122"/>
+                <a:cs typeface="Calibri" pitchFamily="34" charset="-120"/>
+              </a:rPr>
+              <a:t>1</a:t>
+            </a:r>
+            <a:endParaRPr lang="en-US" sz="1400" dirty="0"/>
+          </a:p>
+        </p:txBody>
+      </p:sp>
+      <p:sp>
+        <p:nvSpPr>
+          <p:cNvPr id="8" name="Text 5"/>
+          <p:cNvSpPr/>
+          <p:nvPr/>
+        </p:nvSpPr>
+        <p:spPr>
+          <a:xfrm>
+            <a:off x="1499616" y="2395728"/>
+            <a:ext cx="9777679" cy="519379"/>
+          </a:xfrm>
+          <a:prstGeom prst="rect">
+            <a:avLst/>
+          </a:prstGeom>
+          <a:noFill/>
+          <a:ln/>
+        </p:spPr>
+        <p:txBody>
+          <a:bodyPr wrap="square" lIns="0" tIns="0" rIns="0" bIns="0" rtlCol="0" anchor="ctr"/>
+          <a:lstStyle/>
+          <a:p>
+            <a:pPr indent="0" marL="0">
+              <a:lnSpc>
+                <a:spcPct val="92000"/>
+              </a:lnSpc>
+              <a:buNone/>
+            </a:pPr>
+            <a:r>
+              <a:rPr lang="en-US" sz="1450" b="1" dirty="0">
+                <a:solidFill>
+                  <a:srgbClr val="1B2733"/>
+                </a:solidFill>
+                <a:latin typeface="Yu Gothic" pitchFamily="34" charset="0"/>
+                <a:ea typeface="Yu Gothic" pitchFamily="34" charset="-122"/>
+                <a:cs typeface="Yu Gothic" pitchFamily="34" charset="-120"/>
+              </a:rPr>
+              <a:t>何が起きるはずだったか。</a:t>
+            </a:r>
+            <a:endParaRPr lang="en-US" sz="1450" dirty="0"/>
+          </a:p>
+          <a:p>
+            <a:pPr indent="0" marL="0">
+              <a:lnSpc>
+                <a:spcPct val="92000"/>
+              </a:lnSpc>
+              <a:buNone/>
+            </a:pPr>
+            <a:r>
+              <a:rPr lang="en-US" sz="1050" i="1" dirty="0">
+                <a:solidFill>
+                  <a:srgbClr val="5F7183"/>
+                </a:solidFill>
+                <a:latin typeface="Calibri" pitchFamily="34" charset="0"/>
+                <a:ea typeface="Calibri" pitchFamily="34" charset="-122"/>
+                <a:cs typeface="Calibri" pitchFamily="34" charset="-120"/>
+              </a:rPr>
+              <a:t>What was supposed to happen?</a:t>
+            </a:r>
+            <a:endParaRPr lang="en-US" sz="1450" dirty="0"/>
+          </a:p>
+        </p:txBody>
+      </p:sp>
+      <p:sp>
+        <p:nvSpPr>
+          <p:cNvPr id="9" name="Shape 6"/>
+          <p:cNvSpPr/>
+          <p:nvPr/>
+        </p:nvSpPr>
+        <p:spPr>
+          <a:xfrm>
+            <a:off x="640080" y="3097987"/>
+            <a:ext cx="10911535" cy="702259"/>
+          </a:xfrm>
+          <a:prstGeom prst="roundRect">
+            <a:avLst>
+              <a:gd name="adj" fmla="val 6510"/>
+            </a:avLst>
+          </a:prstGeom>
+          <a:solidFill>
+            <a:srgbClr val="F7FAFC"/>
+          </a:solidFill>
+          <a:ln/>
+        </p:spPr>
+      </p:sp>
+      <p:sp>
+        <p:nvSpPr>
+          <p:cNvPr id="10" name="Shape 7"/>
+          <p:cNvSpPr/>
+          <p:nvPr/>
+        </p:nvSpPr>
+        <p:spPr>
+          <a:xfrm>
+            <a:off x="896112" y="3257093"/>
+            <a:ext cx="384048" cy="384048"/>
+          </a:xfrm>
+          <a:prstGeom prst="ellipse">
+            <a:avLst/>
+          </a:prstGeom>
+          <a:solidFill>
+            <a:srgbClr val="12B198"/>
+          </a:solidFill>
+          <a:ln/>
+        </p:spPr>
+      </p:sp>
+      <p:sp>
+        <p:nvSpPr>
+          <p:cNvPr id="11" name="Text 8"/>
+          <p:cNvSpPr/>
+          <p:nvPr/>
+        </p:nvSpPr>
+        <p:spPr>
+          <a:xfrm>
+            <a:off x="896112" y="3257093"/>
+            <a:ext cx="384048" cy="384048"/>
+          </a:xfrm>
+          <a:prstGeom prst="rect">
+            <a:avLst/>
+          </a:prstGeom>
+          <a:noFill/>
+          <a:ln/>
+        </p:spPr>
+        <p:txBody>
+          <a:bodyPr wrap="square" lIns="0" tIns="0" rIns="0" bIns="0" rtlCol="0" anchor="ctr"/>
+          <a:lstStyle/>
+          <a:p>
+            <a:pPr algn="ctr" indent="0" marL="0">
+              <a:buNone/>
+            </a:pPr>
+            <a:r>
+              <a:rPr lang="en-US" sz="1400" b="1" dirty="0">
+                <a:solidFill>
+                  <a:srgbClr val="FFFFFF"/>
+                </a:solidFill>
+                <a:latin typeface="Calibri" pitchFamily="34" charset="0"/>
+                <a:ea typeface="Calibri" pitchFamily="34" charset="-122"/>
+                <a:cs typeface="Calibri" pitchFamily="34" charset="-120"/>
+              </a:rPr>
+              <a:t>2</a:t>
+            </a:r>
+            <a:endParaRPr lang="en-US" sz="1400" dirty="0"/>
+          </a:p>
+        </p:txBody>
+      </p:sp>
+      <p:sp>
+        <p:nvSpPr>
+          <p:cNvPr id="12" name="Text 9"/>
+          <p:cNvSpPr/>
+          <p:nvPr/>
+        </p:nvSpPr>
+        <p:spPr>
+          <a:xfrm>
+            <a:off x="1499616" y="3207715"/>
+            <a:ext cx="9777679" cy="519379"/>
+          </a:xfrm>
+          <a:prstGeom prst="rect">
+            <a:avLst/>
+          </a:prstGeom>
+          <a:noFill/>
+          <a:ln/>
+        </p:spPr>
+        <p:txBody>
+          <a:bodyPr wrap="square" lIns="0" tIns="0" rIns="0" bIns="0" rtlCol="0" anchor="ctr"/>
+          <a:lstStyle/>
+          <a:p>
+            <a:pPr indent="0" marL="0">
+              <a:lnSpc>
+                <a:spcPct val="92000"/>
+              </a:lnSpc>
+              <a:buNone/>
+            </a:pPr>
+            <a:r>
+              <a:rPr lang="en-US" sz="1450" b="1" dirty="0">
+                <a:solidFill>
+                  <a:srgbClr val="1B2733"/>
+                </a:solidFill>
+                <a:latin typeface="Yu Gothic" pitchFamily="34" charset="0"/>
+                <a:ea typeface="Yu Gothic" pitchFamily="34" charset="-122"/>
+                <a:cs typeface="Yu Gothic" pitchFamily="34" charset="-120"/>
+              </a:rPr>
+              <a:t>実際には何が起きたか。</a:t>
+            </a:r>
+            <a:endParaRPr lang="en-US" sz="1450" dirty="0"/>
+          </a:p>
+          <a:p>
+            <a:pPr indent="0" marL="0">
+              <a:lnSpc>
+                <a:spcPct val="92000"/>
+              </a:lnSpc>
+              <a:buNone/>
+            </a:pPr>
+            <a:r>
+              <a:rPr lang="en-US" sz="1050" i="1" dirty="0">
+                <a:solidFill>
+                  <a:srgbClr val="5F7183"/>
+                </a:solidFill>
+                <a:latin typeface="Calibri" pitchFamily="34" charset="0"/>
+                <a:ea typeface="Calibri" pitchFamily="34" charset="-122"/>
+                <a:cs typeface="Calibri" pitchFamily="34" charset="-120"/>
+              </a:rPr>
+              <a:t>What actually happened?</a:t>
+            </a:r>
+            <a:endParaRPr lang="en-US" sz="1450" dirty="0"/>
+          </a:p>
+        </p:txBody>
+      </p:sp>
+      <p:sp>
+        <p:nvSpPr>
+          <p:cNvPr id="13" name="Shape 10"/>
+          <p:cNvSpPr/>
+          <p:nvPr/>
+        </p:nvSpPr>
+        <p:spPr>
+          <a:xfrm>
+            <a:off x="640080" y="3909974"/>
+            <a:ext cx="10911535" cy="702259"/>
+          </a:xfrm>
+          <a:prstGeom prst="roundRect">
+            <a:avLst>
+              <a:gd name="adj" fmla="val 6510"/>
+            </a:avLst>
+          </a:prstGeom>
+          <a:solidFill>
+            <a:srgbClr val="EFF4F8"/>
+          </a:solidFill>
+          <a:ln/>
+        </p:spPr>
+      </p:sp>
+      <p:sp>
+        <p:nvSpPr>
+          <p:cNvPr id="14" name="Shape 11"/>
+          <p:cNvSpPr/>
+          <p:nvPr/>
+        </p:nvSpPr>
+        <p:spPr>
+          <a:xfrm>
+            <a:off x="896112" y="4069080"/>
+            <a:ext cx="384048" cy="384048"/>
+          </a:xfrm>
+          <a:prstGeom prst="ellipse">
+            <a:avLst/>
+          </a:prstGeom>
+          <a:solidFill>
+            <a:srgbClr val="12B198"/>
+          </a:solidFill>
+          <a:ln/>
+        </p:spPr>
+      </p:sp>
+      <p:sp>
+        <p:nvSpPr>
+          <p:cNvPr id="15" name="Text 12"/>
+          <p:cNvSpPr/>
+          <p:nvPr/>
+        </p:nvSpPr>
+        <p:spPr>
+          <a:xfrm>
+            <a:off x="896112" y="4069080"/>
+            <a:ext cx="384048" cy="384048"/>
+          </a:xfrm>
+          <a:prstGeom prst="rect">
+            <a:avLst/>
+          </a:prstGeom>
+          <a:noFill/>
+          <a:ln/>
+        </p:spPr>
+        <p:txBody>
+          <a:bodyPr wrap="square" lIns="0" tIns="0" rIns="0" bIns="0" rtlCol="0" anchor="ctr"/>
+          <a:lstStyle/>
+          <a:p>
+            <a:pPr algn="ctr" indent="0" marL="0">
+              <a:buNone/>
+            </a:pPr>
+            <a:r>
+              <a:rPr lang="en-US" sz="1400" b="1" dirty="0">
+                <a:solidFill>
+                  <a:srgbClr val="FFFFFF"/>
+                </a:solidFill>
+                <a:latin typeface="Calibri" pitchFamily="34" charset="0"/>
+                <a:ea typeface="Calibri" pitchFamily="34" charset="-122"/>
+                <a:cs typeface="Calibri" pitchFamily="34" charset="-120"/>
+              </a:rPr>
+              <a:t>3</a:t>
+            </a:r>
+            <a:endParaRPr lang="en-US" sz="1400" dirty="0"/>
+          </a:p>
+        </p:txBody>
+      </p:sp>
+      <p:sp>
+        <p:nvSpPr>
+          <p:cNvPr id="16" name="Text 13"/>
+          <p:cNvSpPr/>
+          <p:nvPr/>
+        </p:nvSpPr>
+        <p:spPr>
+          <a:xfrm>
+            <a:off x="1499616" y="4019702"/>
+            <a:ext cx="9777679" cy="519379"/>
+          </a:xfrm>
+          <a:prstGeom prst="rect">
+            <a:avLst/>
+          </a:prstGeom>
+          <a:noFill/>
+          <a:ln/>
+        </p:spPr>
+        <p:txBody>
+          <a:bodyPr wrap="square" lIns="0" tIns="0" rIns="0" bIns="0" rtlCol="0" anchor="ctr"/>
+          <a:lstStyle/>
+          <a:p>
+            <a:pPr indent="0" marL="0">
+              <a:lnSpc>
+                <a:spcPct val="92000"/>
+              </a:lnSpc>
+              <a:buNone/>
+            </a:pPr>
+            <a:r>
+              <a:rPr lang="en-US" sz="1450" b="1" dirty="0">
+                <a:solidFill>
+                  <a:srgbClr val="1B2733"/>
+                </a:solidFill>
+                <a:latin typeface="Yu Gothic" pitchFamily="34" charset="0"/>
+                <a:ea typeface="Yu Gothic" pitchFamily="34" charset="-122"/>
+                <a:cs typeface="Yu Gothic" pitchFamily="34" charset="-120"/>
+              </a:rPr>
+              <a:t>なぜ差が生じたか。</a:t>
+            </a:r>
+            <a:endParaRPr lang="en-US" sz="1450" dirty="0"/>
+          </a:p>
+          <a:p>
+            <a:pPr indent="0" marL="0">
+              <a:lnSpc>
+                <a:spcPct val="92000"/>
+              </a:lnSpc>
+              <a:buNone/>
+            </a:pPr>
+            <a:r>
+              <a:rPr lang="en-US" sz="1050" i="1" dirty="0">
+                <a:solidFill>
+                  <a:srgbClr val="5F7183"/>
+                </a:solidFill>
+                <a:latin typeface="Calibri" pitchFamily="34" charset="0"/>
+                <a:ea typeface="Calibri" pitchFamily="34" charset="-122"/>
+                <a:cs typeface="Calibri" pitchFamily="34" charset="-120"/>
+              </a:rPr>
+              <a:t>Why was there a difference?</a:t>
+            </a:r>
+            <a:endParaRPr lang="en-US" sz="1450" dirty="0"/>
+          </a:p>
+        </p:txBody>
+      </p:sp>
+      <p:sp>
+        <p:nvSpPr>
+          <p:cNvPr id="17" name="Shape 14"/>
+          <p:cNvSpPr/>
+          <p:nvPr/>
+        </p:nvSpPr>
+        <p:spPr>
+          <a:xfrm>
+            <a:off x="640080" y="4721962"/>
+            <a:ext cx="10911535" cy="702259"/>
+          </a:xfrm>
+          <a:prstGeom prst="roundRect">
+            <a:avLst>
+              <a:gd name="adj" fmla="val 6510"/>
+            </a:avLst>
+          </a:prstGeom>
+          <a:solidFill>
+            <a:srgbClr val="F7FAFC"/>
+          </a:solidFill>
+          <a:ln/>
+        </p:spPr>
+      </p:sp>
+      <p:sp>
+        <p:nvSpPr>
+          <p:cNvPr id="18" name="Shape 15"/>
+          <p:cNvSpPr/>
+          <p:nvPr/>
+        </p:nvSpPr>
+        <p:spPr>
+          <a:xfrm>
+            <a:off x="896112" y="4881067"/>
+            <a:ext cx="384048" cy="384048"/>
+          </a:xfrm>
+          <a:prstGeom prst="ellipse">
+            <a:avLst/>
+          </a:prstGeom>
+          <a:solidFill>
+            <a:srgbClr val="12B198"/>
+          </a:solidFill>
+          <a:ln/>
+        </p:spPr>
+      </p:sp>
+      <p:sp>
+        <p:nvSpPr>
+          <p:cNvPr id="19" name="Text 16"/>
+          <p:cNvSpPr/>
+          <p:nvPr/>
+        </p:nvSpPr>
+        <p:spPr>
+          <a:xfrm>
+            <a:off x="896112" y="4881067"/>
+            <a:ext cx="384048" cy="384048"/>
+          </a:xfrm>
+          <a:prstGeom prst="rect">
+            <a:avLst/>
+          </a:prstGeom>
+          <a:noFill/>
+          <a:ln/>
+        </p:spPr>
+        <p:txBody>
+          <a:bodyPr wrap="square" lIns="0" tIns="0" rIns="0" bIns="0" rtlCol="0" anchor="ctr"/>
+          <a:lstStyle/>
+          <a:p>
+            <a:pPr algn="ctr" indent="0" marL="0">
+              <a:buNone/>
+            </a:pPr>
+            <a:r>
+              <a:rPr lang="en-US" sz="1400" b="1" dirty="0">
+                <a:solidFill>
+                  <a:srgbClr val="FFFFFF"/>
+                </a:solidFill>
+                <a:latin typeface="Calibri" pitchFamily="34" charset="0"/>
+                <a:ea typeface="Calibri" pitchFamily="34" charset="-122"/>
+                <a:cs typeface="Calibri" pitchFamily="34" charset="-120"/>
+              </a:rPr>
+              <a:t>4</a:t>
+            </a:r>
+            <a:endParaRPr lang="en-US" sz="1400" dirty="0"/>
+          </a:p>
+        </p:txBody>
+      </p:sp>
+      <p:sp>
+        <p:nvSpPr>
+          <p:cNvPr id="20" name="Text 17"/>
+          <p:cNvSpPr/>
+          <p:nvPr/>
+        </p:nvSpPr>
+        <p:spPr>
+          <a:xfrm>
+            <a:off x="1499616" y="4831690"/>
+            <a:ext cx="9777679" cy="519379"/>
+          </a:xfrm>
+          <a:prstGeom prst="rect">
+            <a:avLst/>
+          </a:prstGeom>
+          <a:noFill/>
+          <a:ln/>
+        </p:spPr>
+        <p:txBody>
+          <a:bodyPr wrap="square" lIns="0" tIns="0" rIns="0" bIns="0" rtlCol="0" anchor="ctr"/>
+          <a:lstStyle/>
+          <a:p>
+            <a:pPr indent="0" marL="0">
+              <a:lnSpc>
+                <a:spcPct val="92000"/>
+              </a:lnSpc>
+              <a:buNone/>
+            </a:pPr>
+            <a:r>
+              <a:rPr lang="en-US" sz="1450" b="1" dirty="0">
+                <a:solidFill>
+                  <a:srgbClr val="1B2733"/>
+                </a:solidFill>
+                <a:latin typeface="Yu Gothic" pitchFamily="34" charset="0"/>
+                <a:ea typeface="Yu Gothic" pitchFamily="34" charset="-122"/>
+                <a:cs typeface="Yu Gothic" pitchFamily="34" charset="-120"/>
+              </a:rPr>
+              <a:t>次に何を変えるか。</a:t>
+            </a:r>
+            <a:endParaRPr lang="en-US" sz="1450" dirty="0"/>
+          </a:p>
+          <a:p>
+            <a:pPr indent="0" marL="0">
+              <a:lnSpc>
+                <a:spcPct val="92000"/>
+              </a:lnSpc>
+              <a:buNone/>
+            </a:pPr>
+            <a:r>
+              <a:rPr lang="en-US" sz="1050" i="1" dirty="0">
+                <a:solidFill>
+                  <a:srgbClr val="5F7183"/>
+                </a:solidFill>
+                <a:latin typeface="Calibri" pitchFamily="34" charset="0"/>
+                <a:ea typeface="Calibri" pitchFamily="34" charset="-122"/>
+                <a:cs typeface="Calibri" pitchFamily="34" charset="-120"/>
+              </a:rPr>
+              <a:t>What will we do differently?</a:t>
+            </a:r>
+            <a:endParaRPr lang="en-US" sz="1450" dirty="0"/>
+          </a:p>
+        </p:txBody>
+      </p:sp>
+      <p:sp>
+        <p:nvSpPr>
+          <p:cNvPr id="21" name="Shape 18"/>
+          <p:cNvSpPr/>
+          <p:nvPr/>
+        </p:nvSpPr>
+        <p:spPr>
+          <a:xfrm>
+            <a:off x="640080" y="5533949"/>
+            <a:ext cx="10911535" cy="702259"/>
+          </a:xfrm>
+          <a:prstGeom prst="roundRect">
+            <a:avLst>
+              <a:gd name="adj" fmla="val 6510"/>
+            </a:avLst>
+          </a:prstGeom>
+          <a:solidFill>
+            <a:srgbClr val="EFF4F8"/>
+          </a:solidFill>
+          <a:ln/>
+        </p:spPr>
+      </p:sp>
+      <p:sp>
+        <p:nvSpPr>
+          <p:cNvPr id="22" name="Shape 19"/>
+          <p:cNvSpPr/>
+          <p:nvPr/>
+        </p:nvSpPr>
+        <p:spPr>
+          <a:xfrm>
+            <a:off x="896112" y="5693054"/>
+            <a:ext cx="384048" cy="384048"/>
+          </a:xfrm>
+          <a:prstGeom prst="ellipse">
+            <a:avLst/>
+          </a:prstGeom>
+          <a:solidFill>
+            <a:srgbClr val="12B198"/>
+          </a:solidFill>
+          <a:ln/>
+        </p:spPr>
+      </p:sp>
+      <p:sp>
+        <p:nvSpPr>
+          <p:cNvPr id="23" name="Text 20"/>
+          <p:cNvSpPr/>
+          <p:nvPr/>
+        </p:nvSpPr>
+        <p:spPr>
+          <a:xfrm>
+            <a:off x="896112" y="5693054"/>
+            <a:ext cx="384048" cy="384048"/>
+          </a:xfrm>
+          <a:prstGeom prst="rect">
+            <a:avLst/>
+          </a:prstGeom>
+          <a:noFill/>
+          <a:ln/>
+        </p:spPr>
+        <p:txBody>
+          <a:bodyPr wrap="square" lIns="0" tIns="0" rIns="0" bIns="0" rtlCol="0" anchor="ctr"/>
+          <a:lstStyle/>
+          <a:p>
+            <a:pPr algn="ctr" indent="0" marL="0">
+              <a:buNone/>
+            </a:pPr>
+            <a:r>
+              <a:rPr lang="en-US" sz="1400" b="1" dirty="0">
+                <a:solidFill>
+                  <a:srgbClr val="FFFFFF"/>
+                </a:solidFill>
+                <a:latin typeface="Calibri" pitchFamily="34" charset="0"/>
+                <a:ea typeface="Calibri" pitchFamily="34" charset="-122"/>
+                <a:cs typeface="Calibri" pitchFamily="34" charset="-120"/>
+              </a:rPr>
+              <a:t>5</a:t>
+            </a:r>
+            <a:endParaRPr lang="en-US" sz="1400" dirty="0"/>
+          </a:p>
+        </p:txBody>
+      </p:sp>
+      <p:sp>
+        <p:nvSpPr>
+          <p:cNvPr id="24" name="Text 21"/>
+          <p:cNvSpPr/>
+          <p:nvPr/>
+        </p:nvSpPr>
+        <p:spPr>
+          <a:xfrm>
+            <a:off x="1499616" y="5643677"/>
+            <a:ext cx="9777679" cy="519379"/>
+          </a:xfrm>
+          <a:prstGeom prst="rect">
+            <a:avLst/>
+          </a:prstGeom>
+          <a:noFill/>
+          <a:ln/>
+        </p:spPr>
+        <p:txBody>
+          <a:bodyPr wrap="square" lIns="0" tIns="0" rIns="0" bIns="0" rtlCol="0" anchor="ctr"/>
+          <a:lstStyle/>
+          <a:p>
+            <a:pPr indent="0" marL="0">
+              <a:lnSpc>
+                <a:spcPct val="92000"/>
+              </a:lnSpc>
+              <a:buNone/>
+            </a:pPr>
+            <a:r>
+              <a:rPr lang="en-US" sz="1300" b="1" dirty="0">
+                <a:solidFill>
+                  <a:srgbClr val="1B2733"/>
+                </a:solidFill>
+                <a:latin typeface="Yu Gothic" pitchFamily="34" charset="0"/>
+                <a:ea typeface="Yu Gothic" pitchFamily="34" charset="-122"/>
+                <a:cs typeface="Yu Gothic" pitchFamily="34" charset="-120"/>
+              </a:rPr>
+              <a:t>最後に、各自が明日から変える行動を1つ、声に出して述べます。</a:t>
+            </a:r>
+            <a:endParaRPr lang="en-US" sz="1300" dirty="0"/>
+          </a:p>
+          <a:p>
+            <a:pPr indent="0" marL="0">
+              <a:lnSpc>
+                <a:spcPct val="92000"/>
+              </a:lnSpc>
+              <a:buNone/>
+            </a:pPr>
+            <a:r>
+              <a:rPr lang="en-US" sz="950" i="1" dirty="0">
+                <a:solidFill>
+                  <a:srgbClr val="5F7183"/>
+                </a:solidFill>
+                <a:latin typeface="Calibri" pitchFamily="34" charset="0"/>
+                <a:ea typeface="Calibri" pitchFamily="34" charset="-122"/>
+                <a:cs typeface="Calibri" pitchFamily="34" charset="-120"/>
+              </a:rPr>
+              <a:t>To close, each person states aloud one thing they will change from tomorrow.</a:t>
+            </a:r>
+            <a:endParaRPr lang="en-US" sz="1300" dirty="0"/>
+          </a:p>
+        </p:txBody>
+      </p:sp>
+      <p:sp>
+        <p:nvSpPr>
+          <p:cNvPr id="25" name="Text 22"/>
+          <p:cNvSpPr/>
+          <p:nvPr/>
+        </p:nvSpPr>
+        <p:spPr>
+          <a:xfrm>
+            <a:off x="640080" y="6382512"/>
+            <a:ext cx="8778240" cy="292608"/>
+          </a:xfrm>
+          <a:prstGeom prst="rect">
+            <a:avLst/>
+          </a:prstGeom>
+          <a:noFill/>
+          <a:ln/>
+        </p:spPr>
+        <p:txBody>
+          <a:bodyPr wrap="square" lIns="0" tIns="0" rIns="0" bIns="0" rtlCol="0" anchor="ctr"/>
+          <a:lstStyle/>
+          <a:p>
+            <a:pPr indent="0" marL="0">
+              <a:buNone/>
+            </a:pPr>
+            <a:r>
+              <a:rPr lang="en-US" sz="900" dirty="0">
+                <a:solidFill>
+                  <a:srgbClr val="5F7183"/>
+                </a:solidFill>
+                <a:latin typeface="Yu Gothic" pitchFamily="34" charset="0"/>
+                <a:ea typeface="Yu Gothic" pitchFamily="34" charset="-122"/>
+                <a:cs typeface="Yu Gothic" pitchFamily="34" charset="-120"/>
+              </a:rPr>
+              <a:t>第10時限｜業務別教育6 警報装置その他当該警備業務を実施するために使用する機器の使用方法  </a:t>
+            </a:r>
+            <a:pPr indent="0" marL="0">
+              <a:buNone/>
+            </a:pPr>
+            <a:r>
+              <a:rPr lang="en-US" sz="850" i="1" dirty="0">
+                <a:solidFill>
+                  <a:srgbClr val="D6E0E9"/>
+                </a:solidFill>
+                <a:latin typeface="Calibri" pitchFamily="34" charset="0"/>
+                <a:ea typeface="Calibri" pitchFamily="34" charset="-122"/>
+                <a:cs typeface="Calibri" pitchFamily="34" charset="-120"/>
+              </a:rPr>
+              <a:t>Period 10 | Task-Specific Training 6 — Security Equipment</a:t>
+            </a:r>
+            <a:endParaRPr lang="en-US" sz="900" dirty="0"/>
+          </a:p>
+        </p:txBody>
+      </p:sp>
+      <p:sp>
+        <p:nvSpPr>
+          <p:cNvPr id="26" name="Text 23"/>
+          <p:cNvSpPr/>
+          <p:nvPr/>
+        </p:nvSpPr>
+        <p:spPr>
+          <a:xfrm>
+            <a:off x="10637215" y="6382512"/>
+            <a:ext cx="914400" cy="292608"/>
+          </a:xfrm>
+          <a:prstGeom prst="rect">
+            <a:avLst/>
+          </a:prstGeom>
+          <a:noFill/>
+          <a:ln/>
+        </p:spPr>
+        <p:txBody>
+          <a:bodyPr wrap="square" lIns="0" tIns="0" rIns="0" bIns="0" rtlCol="0" anchor="ctr"/>
+          <a:lstStyle/>
+          <a:p>
+            <a:pPr algn="r" indent="0" marL="0">
+              <a:buNone/>
+            </a:pPr>
+            <a:r>
+              <a:rPr lang="en-US" sz="1000" dirty="0">
+                <a:solidFill>
+                  <a:srgbClr val="5F7183"/>
+                </a:solidFill>
+                <a:latin typeface="Calibri" pitchFamily="34" charset="0"/>
+                <a:ea typeface="Calibri" pitchFamily="34" charset="-122"/>
+                <a:cs typeface="Calibri" pitchFamily="34" charset="-120"/>
+              </a:rPr>
+              <a:t>10</a:t>
+            </a:r>
+            <a:endParaRPr lang="en-US" sz="1000" dirty="0"/>
+          </a:p>
+        </p:txBody>
+      </p:sp>
+    </p:spTree>
+  </p:cSld>
+  <p:clrMapOvr>
+    <a:masterClrMapping/>
+  </p:clrMapOvr>
+</p:sld>
+</file>
+
+<file path=ppt/slides/slide11.xml><?xml version="1.0" encoding="utf-8"?>
+<p:sld xmlns:a="http://schemas.openxmlformats.org/drawingml/2006/main" xmlns:r="http://schemas.openxmlformats.org/officeDocument/2006/relationships" xmlns:p="http://schemas.openxmlformats.org/presentationml/2006/main">
+  <p:cSld name="Slide 11">
+    <p:bg>
+      <p:bgPr>
+        <a:solidFill>
+          <a:srgbClr val="093259"/>
+        </a:solidFill>
+      </p:bgPr>
+    </p:bg>
+    <p:spTree>
+      <p:nvGrpSpPr>
+        <p:cNvPr id="1" name=""/>
+        <p:cNvGrpSpPr/>
+        <p:nvPr/>
+      </p:nvGrpSpPr>
+      <p:grpSpPr>
+        <a:xfrm>
+          <a:off x="0" y="0"/>
+          <a:ext cx="0" cy="0"/>
+          <a:chOff x="0" y="0"/>
+          <a:chExt cx="0" cy="0"/>
+        </a:xfrm>
+      </p:grpSpPr>
+      <p:sp>
+        <p:nvSpPr>
+          <p:cNvPr id="2" name="Shape 0"/>
+          <p:cNvSpPr/>
+          <p:nvPr/>
+        </p:nvSpPr>
+        <p:spPr>
+          <a:xfrm>
+            <a:off x="10637215" y="219456"/>
+            <a:ext cx="1042416" cy="969264"/>
+          </a:xfrm>
+          <a:prstGeom prst="roundRect">
+            <a:avLst>
+              <a:gd name="adj" fmla="val 5660"/>
+            </a:avLst>
+          </a:prstGeom>
+          <a:solidFill>
+            <a:srgbClr val="FFFFFF"/>
+          </a:solidFill>
+          <a:ln/>
+        </p:spPr>
+      </p:sp>
+      <p:pic>
+        <p:nvPicPr>
+          <p:cNvPr id="3" name="Image 0" descr="/home/user/Training-/assets/logo.png">    </p:cNvPr>
+          <p:cNvPicPr>
+            <a:picLocks noChangeAspect="1"/>
+          </p:cNvPicPr>
+          <p:nvPr/>
+        </p:nvPicPr>
+        <p:blipFill>
+          <a:blip r:embed="rId1"/>
+          <a:stretch>
+            <a:fillRect/>
+          </a:stretch>
+        </p:blipFill>
+        <p:spPr>
+          <a:xfrm>
+            <a:off x="10765231" y="332912"/>
+            <a:ext cx="786384" cy="742353"/>
+          </a:xfrm>
+          <a:prstGeom prst="rect">
+            <a:avLst/>
+          </a:prstGeom>
+        </p:spPr>
+      </p:pic>
+      <p:sp>
+        <p:nvSpPr>
+          <p:cNvPr id="4" name="Text 1"/>
+          <p:cNvSpPr/>
+          <p:nvPr/>
+        </p:nvSpPr>
+        <p:spPr>
+          <a:xfrm>
+            <a:off x="640080" y="658368"/>
+            <a:ext cx="9692640" cy="1188720"/>
+          </a:xfrm>
+          <a:prstGeom prst="rect">
+            <a:avLst/>
+          </a:prstGeom>
+          <a:noFill/>
+          <a:ln/>
+        </p:spPr>
+        <p:txBody>
+          <a:bodyPr wrap="square" lIns="0" tIns="0" rIns="0" bIns="0" rtlCol="0" anchor="t"/>
+          <a:lstStyle/>
+          <a:p>
+            <a:pPr indent="0" marL="0">
+              <a:lnSpc>
+                <a:spcPct val="96000"/>
+              </a:lnSpc>
+              <a:buNone/>
+            </a:pPr>
+            <a:r>
+              <a:rPr lang="en-US" sz="3000" b="1" dirty="0">
+                <a:solidFill>
+                  <a:srgbClr val="FFFFFF"/>
+                </a:solidFill>
+                <a:latin typeface="Yu Gothic" pitchFamily="34" charset="0"/>
+                <a:ea typeface="Yu Gothic" pitchFamily="34" charset="-122"/>
+                <a:cs typeface="Yu Gothic" pitchFamily="34" charset="-120"/>
+              </a:rPr>
+              <a:t>確認テストと修了</a:t>
+            </a:r>
+            <a:endParaRPr lang="en-US" sz="3000" dirty="0"/>
+          </a:p>
+          <a:p>
+            <a:pPr indent="0" marL="0">
+              <a:lnSpc>
+                <a:spcPct val="96000"/>
+              </a:lnSpc>
+              <a:buNone/>
+            </a:pPr>
+            <a:r>
+              <a:rPr lang="en-US" sz="1300" i="1" dirty="0">
+                <a:solidFill>
+                  <a:srgbClr val="9FD8CD"/>
+                </a:solidFill>
+                <a:latin typeface="Calibri" pitchFamily="34" charset="0"/>
+                <a:ea typeface="Calibri" pitchFamily="34" charset="-122"/>
+                <a:cs typeface="Calibri" pitchFamily="34" charset="-120"/>
+              </a:rPr>
+              <a:t>Assessment and Close</a:t>
+            </a:r>
+            <a:endParaRPr lang="en-US" sz="3000" dirty="0"/>
+          </a:p>
+        </p:txBody>
+      </p:sp>
+      <p:sp>
+        <p:nvSpPr>
+          <p:cNvPr id="5" name="Shape 2"/>
+          <p:cNvSpPr/>
+          <p:nvPr/>
+        </p:nvSpPr>
+        <p:spPr>
+          <a:xfrm>
+            <a:off x="640080" y="2084832"/>
+            <a:ext cx="10911535" cy="676656"/>
+          </a:xfrm>
+          <a:prstGeom prst="roundRect">
+            <a:avLst>
+              <a:gd name="adj" fmla="val 6757"/>
+            </a:avLst>
+          </a:prstGeom>
+          <a:solidFill>
+            <a:srgbClr val="06223D"/>
+          </a:solidFill>
+          <a:ln/>
+        </p:spPr>
+      </p:sp>
+      <p:sp>
+        <p:nvSpPr>
+          <p:cNvPr id="6" name="Shape 3"/>
+          <p:cNvSpPr/>
+          <p:nvPr/>
+        </p:nvSpPr>
+        <p:spPr>
+          <a:xfrm>
+            <a:off x="914400" y="2231136"/>
+            <a:ext cx="384048" cy="384048"/>
+          </a:xfrm>
+          <a:prstGeom prst="ellipse">
+            <a:avLst/>
+          </a:prstGeom>
+          <a:solidFill>
+            <a:srgbClr val="12B198"/>
+          </a:solidFill>
+          <a:ln/>
+        </p:spPr>
+      </p:sp>
+      <p:sp>
+        <p:nvSpPr>
+          <p:cNvPr id="7" name="Text 4"/>
+          <p:cNvSpPr/>
+          <p:nvPr/>
+        </p:nvSpPr>
+        <p:spPr>
+          <a:xfrm>
+            <a:off x="914400" y="2231136"/>
+            <a:ext cx="384048" cy="384048"/>
+          </a:xfrm>
+          <a:prstGeom prst="rect">
+            <a:avLst/>
+          </a:prstGeom>
+          <a:noFill/>
+          <a:ln/>
+        </p:spPr>
+        <p:txBody>
+          <a:bodyPr wrap="square" lIns="0" tIns="0" rIns="0" bIns="0" rtlCol="0" anchor="ctr"/>
+          <a:lstStyle/>
+          <a:p>
+            <a:pPr algn="ctr" indent="0" marL="0">
+              <a:buNone/>
+            </a:pPr>
+            <a:r>
+              <a:rPr lang="en-US" sz="1400" b="1" dirty="0">
+                <a:solidFill>
+                  <a:srgbClr val="FFFFFF"/>
+                </a:solidFill>
+                <a:latin typeface="Calibri" pitchFamily="34" charset="0"/>
+                <a:ea typeface="Calibri" pitchFamily="34" charset="-122"/>
+                <a:cs typeface="Calibri" pitchFamily="34" charset="-120"/>
+              </a:rPr>
+              <a:t>1</a:t>
+            </a:r>
+            <a:endParaRPr lang="en-US" sz="1400" dirty="0"/>
+          </a:p>
+        </p:txBody>
+      </p:sp>
+      <p:sp>
+        <p:nvSpPr>
+          <p:cNvPr id="8" name="Text 5"/>
+          <p:cNvSpPr/>
+          <p:nvPr/>
+        </p:nvSpPr>
+        <p:spPr>
+          <a:xfrm>
+            <a:off x="1517904" y="2176272"/>
+            <a:ext cx="9722815" cy="493776"/>
+          </a:xfrm>
+          <a:prstGeom prst="rect">
+            <a:avLst/>
+          </a:prstGeom>
+          <a:noFill/>
+          <a:ln/>
+        </p:spPr>
+        <p:txBody>
+          <a:bodyPr wrap="square" lIns="0" tIns="0" rIns="0" bIns="0" rtlCol="0" anchor="ctr"/>
+          <a:lstStyle/>
+          <a:p>
+            <a:pPr indent="0" marL="0">
+              <a:lnSpc>
+                <a:spcPct val="92000"/>
+              </a:lnSpc>
+              <a:buNone/>
+            </a:pPr>
+            <a:r>
+              <a:rPr lang="en-US" sz="1500" b="1" dirty="0">
+                <a:solidFill>
+                  <a:srgbClr val="FFFFFF"/>
+                </a:solidFill>
+                <a:latin typeface="Yu Gothic" pitchFamily="34" charset="0"/>
+                <a:ea typeface="Yu Gothic" pitchFamily="34" charset="-122"/>
+                <a:cs typeface="Yu Gothic" pitchFamily="34" charset="-120"/>
+              </a:rPr>
+              <a:t>確認テスト10問（15分）。解答と解説はその場で行います。回答は日本語・英語どちらでも可。</a:t>
+            </a:r>
+            <a:endParaRPr lang="en-US" sz="1500" dirty="0"/>
+          </a:p>
+          <a:p>
+            <a:pPr indent="0" marL="0">
+              <a:lnSpc>
+                <a:spcPct val="92000"/>
+              </a:lnSpc>
+              <a:buNone/>
+            </a:pPr>
+            <a:r>
+              <a:rPr lang="en-US" sz="1050" i="1" dirty="0">
+                <a:solidFill>
+                  <a:srgbClr val="9FB6CB"/>
+                </a:solidFill>
+                <a:latin typeface="Calibri" pitchFamily="34" charset="0"/>
+                <a:ea typeface="Calibri" pitchFamily="34" charset="-122"/>
+                <a:cs typeface="Calibri" pitchFamily="34" charset="-120"/>
+              </a:rPr>
+              <a:t>Ten questions, fifteen minutes. Answers follow immediately. Answer in Japanese or English.</a:t>
+            </a:r>
+            <a:endParaRPr lang="en-US" sz="1500" dirty="0"/>
+          </a:p>
+        </p:txBody>
+      </p:sp>
+      <p:sp>
+        <p:nvSpPr>
+          <p:cNvPr id="9" name="Shape 6"/>
+          <p:cNvSpPr/>
+          <p:nvPr/>
+        </p:nvSpPr>
+        <p:spPr>
+          <a:xfrm>
+            <a:off x="640080" y="2962656"/>
+            <a:ext cx="10911535" cy="676656"/>
+          </a:xfrm>
+          <a:prstGeom prst="roundRect">
+            <a:avLst>
+              <a:gd name="adj" fmla="val 6757"/>
+            </a:avLst>
+          </a:prstGeom>
+          <a:solidFill>
+            <a:srgbClr val="06223D"/>
+          </a:solidFill>
+          <a:ln/>
+        </p:spPr>
+      </p:sp>
+      <p:sp>
+        <p:nvSpPr>
+          <p:cNvPr id="10" name="Shape 7"/>
+          <p:cNvSpPr/>
+          <p:nvPr/>
+        </p:nvSpPr>
+        <p:spPr>
+          <a:xfrm>
+            <a:off x="914400" y="3108960"/>
+            <a:ext cx="384048" cy="384048"/>
+          </a:xfrm>
+          <a:prstGeom prst="ellipse">
+            <a:avLst/>
+          </a:prstGeom>
+          <a:solidFill>
+            <a:srgbClr val="12B198"/>
+          </a:solidFill>
+          <a:ln/>
+        </p:spPr>
+      </p:sp>
+      <p:sp>
+        <p:nvSpPr>
+          <p:cNvPr id="11" name="Text 8"/>
+          <p:cNvSpPr/>
+          <p:nvPr/>
+        </p:nvSpPr>
+        <p:spPr>
+          <a:xfrm>
+            <a:off x="914400" y="3108960"/>
+            <a:ext cx="384048" cy="384048"/>
+          </a:xfrm>
+          <a:prstGeom prst="rect">
+            <a:avLst/>
+          </a:prstGeom>
+          <a:noFill/>
+          <a:ln/>
+        </p:spPr>
+        <p:txBody>
+          <a:bodyPr wrap="square" lIns="0" tIns="0" rIns="0" bIns="0" rtlCol="0" anchor="ctr"/>
+          <a:lstStyle/>
+          <a:p>
+            <a:pPr algn="ctr" indent="0" marL="0">
+              <a:buNone/>
+            </a:pPr>
+            <a:r>
+              <a:rPr lang="en-US" sz="1400" b="1" dirty="0">
+                <a:solidFill>
+                  <a:srgbClr val="FFFFFF"/>
+                </a:solidFill>
+                <a:latin typeface="Calibri" pitchFamily="34" charset="0"/>
+                <a:ea typeface="Calibri" pitchFamily="34" charset="-122"/>
+                <a:cs typeface="Calibri" pitchFamily="34" charset="-120"/>
+              </a:rPr>
+              <a:t>2</a:t>
+            </a:r>
+            <a:endParaRPr lang="en-US" sz="1400" dirty="0"/>
+          </a:p>
+        </p:txBody>
+      </p:sp>
+      <p:sp>
+        <p:nvSpPr>
+          <p:cNvPr id="12" name="Text 9"/>
+          <p:cNvSpPr/>
+          <p:nvPr/>
+        </p:nvSpPr>
+        <p:spPr>
+          <a:xfrm>
+            <a:off x="1517904" y="3054096"/>
+            <a:ext cx="9722815" cy="493776"/>
+          </a:xfrm>
+          <a:prstGeom prst="rect">
+            <a:avLst/>
+          </a:prstGeom>
+          <a:noFill/>
+          <a:ln/>
+        </p:spPr>
+        <p:txBody>
+          <a:bodyPr wrap="square" lIns="0" tIns="0" rIns="0" bIns="0" rtlCol="0" anchor="ctr"/>
+          <a:lstStyle/>
+          <a:p>
+            <a:pPr indent="0" marL="0">
+              <a:lnSpc>
+                <a:spcPct val="92000"/>
+              </a:lnSpc>
+              <a:buNone/>
+            </a:pPr>
+            <a:r>
+              <a:rPr lang="en-US" sz="1500" b="1" dirty="0">
+                <a:solidFill>
+                  <a:srgbClr val="FFFFFF"/>
+                </a:solidFill>
+                <a:latin typeface="Yu Gothic" pitchFamily="34" charset="0"/>
+                <a:ea typeface="Yu Gothic" pitchFamily="34" charset="-122"/>
+                <a:cs typeface="Yu Gothic" pitchFamily="34" charset="-120"/>
+              </a:rPr>
+              <a:t>何を守っているのか ― People / Asset / Reputation。</a:t>
+            </a:r>
+            <a:endParaRPr lang="en-US" sz="1500" dirty="0"/>
+          </a:p>
+          <a:p>
+            <a:pPr indent="0" marL="0">
+              <a:lnSpc>
+                <a:spcPct val="92000"/>
+              </a:lnSpc>
+              <a:buNone/>
+            </a:pPr>
+            <a:r>
+              <a:rPr lang="en-US" sz="1050" i="1" dirty="0">
+                <a:solidFill>
+                  <a:srgbClr val="9FB6CB"/>
+                </a:solidFill>
+                <a:latin typeface="Calibri" pitchFamily="34" charset="0"/>
+                <a:ea typeface="Calibri" pitchFamily="34" charset="-122"/>
+                <a:cs typeface="Calibri" pitchFamily="34" charset="-120"/>
+              </a:rPr>
+              <a:t>What am I protecting? People, Asset, or Reputation.</a:t>
+            </a:r>
+            <a:endParaRPr lang="en-US" sz="1500" dirty="0"/>
+          </a:p>
+        </p:txBody>
+      </p:sp>
+      <p:sp>
+        <p:nvSpPr>
+          <p:cNvPr id="13" name="Shape 10"/>
+          <p:cNvSpPr/>
+          <p:nvPr/>
+        </p:nvSpPr>
+        <p:spPr>
+          <a:xfrm>
+            <a:off x="640080" y="3840480"/>
+            <a:ext cx="10911535" cy="676656"/>
+          </a:xfrm>
+          <a:prstGeom prst="roundRect">
+            <a:avLst>
+              <a:gd name="adj" fmla="val 6757"/>
+            </a:avLst>
+          </a:prstGeom>
+          <a:solidFill>
+            <a:srgbClr val="06223D"/>
+          </a:solidFill>
+          <a:ln/>
+        </p:spPr>
+      </p:sp>
+      <p:sp>
+        <p:nvSpPr>
+          <p:cNvPr id="14" name="Shape 11"/>
+          <p:cNvSpPr/>
+          <p:nvPr/>
+        </p:nvSpPr>
+        <p:spPr>
+          <a:xfrm>
+            <a:off x="914400" y="3986784"/>
+            <a:ext cx="384048" cy="384048"/>
+          </a:xfrm>
+          <a:prstGeom prst="ellipse">
+            <a:avLst/>
+          </a:prstGeom>
+          <a:solidFill>
+            <a:srgbClr val="12B198"/>
+          </a:solidFill>
+          <a:ln/>
+        </p:spPr>
+      </p:sp>
+      <p:sp>
+        <p:nvSpPr>
+          <p:cNvPr id="15" name="Text 12"/>
+          <p:cNvSpPr/>
+          <p:nvPr/>
+        </p:nvSpPr>
+        <p:spPr>
+          <a:xfrm>
+            <a:off x="914400" y="3986784"/>
+            <a:ext cx="384048" cy="384048"/>
+          </a:xfrm>
+          <a:prstGeom prst="rect">
+            <a:avLst/>
+          </a:prstGeom>
+          <a:noFill/>
+          <a:ln/>
+        </p:spPr>
+        <p:txBody>
+          <a:bodyPr wrap="square" lIns="0" tIns="0" rIns="0" bIns="0" rtlCol="0" anchor="ctr"/>
+          <a:lstStyle/>
+          <a:p>
+            <a:pPr algn="ctr" indent="0" marL="0">
+              <a:buNone/>
+            </a:pPr>
+            <a:r>
+              <a:rPr lang="en-US" sz="1400" b="1" dirty="0">
+                <a:solidFill>
+                  <a:srgbClr val="FFFFFF"/>
+                </a:solidFill>
+                <a:latin typeface="Calibri" pitchFamily="34" charset="0"/>
+                <a:ea typeface="Calibri" pitchFamily="34" charset="-122"/>
+                <a:cs typeface="Calibri" pitchFamily="34" charset="-120"/>
+              </a:rPr>
+              <a:t>3</a:t>
+            </a:r>
+            <a:endParaRPr lang="en-US" sz="1400" dirty="0"/>
+          </a:p>
+        </p:txBody>
+      </p:sp>
+      <p:sp>
+        <p:nvSpPr>
+          <p:cNvPr id="16" name="Text 13"/>
+          <p:cNvSpPr/>
+          <p:nvPr/>
+        </p:nvSpPr>
+        <p:spPr>
+          <a:xfrm>
+            <a:off x="1517904" y="3931920"/>
+            <a:ext cx="9722815" cy="493776"/>
+          </a:xfrm>
+          <a:prstGeom prst="rect">
+            <a:avLst/>
+          </a:prstGeom>
+          <a:noFill/>
+          <a:ln/>
+        </p:spPr>
+        <p:txBody>
+          <a:bodyPr wrap="square" lIns="0" tIns="0" rIns="0" bIns="0" rtlCol="0" anchor="ctr"/>
+          <a:lstStyle/>
+          <a:p>
+            <a:pPr indent="0" marL="0">
+              <a:lnSpc>
+                <a:spcPct val="92000"/>
+              </a:lnSpc>
+              <a:buNone/>
+            </a:pPr>
+            <a:r>
+              <a:rPr lang="en-US" sz="1500" b="1" dirty="0">
+                <a:solidFill>
+                  <a:srgbClr val="FFFFFF"/>
+                </a:solidFill>
+                <a:latin typeface="Yu Gothic" pitchFamily="34" charset="0"/>
+                <a:ea typeface="Yu Gothic" pitchFamily="34" charset="-122"/>
+                <a:cs typeface="Yu Gothic" pitchFamily="34" charset="-120"/>
+              </a:rPr>
+              <a:t>どの立場で動くのか ― 私人か、補助者か。</a:t>
+            </a:r>
+            <a:endParaRPr lang="en-US" sz="1500" dirty="0"/>
+          </a:p>
+          <a:p>
+            <a:pPr indent="0" marL="0">
+              <a:lnSpc>
+                <a:spcPct val="92000"/>
+              </a:lnSpc>
+              <a:buNone/>
+            </a:pPr>
+            <a:r>
+              <a:rPr lang="en-US" sz="1050" i="1" dirty="0">
+                <a:solidFill>
+                  <a:srgbClr val="9FB6CB"/>
+                </a:solidFill>
+                <a:latin typeface="Calibri" pitchFamily="34" charset="0"/>
+                <a:ea typeface="Calibri" pitchFamily="34" charset="-122"/>
+                <a:cs typeface="Calibri" pitchFamily="34" charset="-120"/>
+              </a:rPr>
+              <a:t>In what capacity am I acting? Citizen, or delegated agent.</a:t>
+            </a:r>
+            <a:endParaRPr lang="en-US" sz="1500" dirty="0"/>
+          </a:p>
+        </p:txBody>
+      </p:sp>
+      <p:sp>
+        <p:nvSpPr>
+          <p:cNvPr id="17" name="Shape 14"/>
+          <p:cNvSpPr/>
+          <p:nvPr/>
+        </p:nvSpPr>
+        <p:spPr>
+          <a:xfrm>
+            <a:off x="640080" y="4718304"/>
+            <a:ext cx="10911535" cy="676656"/>
+          </a:xfrm>
+          <a:prstGeom prst="roundRect">
+            <a:avLst>
+              <a:gd name="adj" fmla="val 6757"/>
+            </a:avLst>
+          </a:prstGeom>
+          <a:solidFill>
+            <a:srgbClr val="06223D"/>
+          </a:solidFill>
+          <a:ln/>
+        </p:spPr>
+      </p:sp>
+      <p:sp>
+        <p:nvSpPr>
+          <p:cNvPr id="18" name="Shape 15"/>
+          <p:cNvSpPr/>
+          <p:nvPr/>
+        </p:nvSpPr>
+        <p:spPr>
+          <a:xfrm>
+            <a:off x="914400" y="4864608"/>
+            <a:ext cx="384048" cy="384048"/>
+          </a:xfrm>
+          <a:prstGeom prst="ellipse">
+            <a:avLst/>
+          </a:prstGeom>
+          <a:solidFill>
+            <a:srgbClr val="12B198"/>
+          </a:solidFill>
+          <a:ln/>
+        </p:spPr>
+      </p:sp>
+      <p:sp>
+        <p:nvSpPr>
+          <p:cNvPr id="19" name="Text 16"/>
+          <p:cNvSpPr/>
+          <p:nvPr/>
+        </p:nvSpPr>
+        <p:spPr>
+          <a:xfrm>
+            <a:off x="914400" y="4864608"/>
+            <a:ext cx="384048" cy="384048"/>
+          </a:xfrm>
+          <a:prstGeom prst="rect">
+            <a:avLst/>
+          </a:prstGeom>
+          <a:noFill/>
+          <a:ln/>
+        </p:spPr>
+        <p:txBody>
+          <a:bodyPr wrap="square" lIns="0" tIns="0" rIns="0" bIns="0" rtlCol="0" anchor="ctr"/>
+          <a:lstStyle/>
+          <a:p>
+            <a:pPr algn="ctr" indent="0" marL="0">
+              <a:buNone/>
+            </a:pPr>
+            <a:r>
+              <a:rPr lang="en-US" sz="1400" b="1" dirty="0">
+                <a:solidFill>
+                  <a:srgbClr val="FFFFFF"/>
+                </a:solidFill>
+                <a:latin typeface="Calibri" pitchFamily="34" charset="0"/>
+                <a:ea typeface="Calibri" pitchFamily="34" charset="-122"/>
+                <a:cs typeface="Calibri" pitchFamily="34" charset="-120"/>
+              </a:rPr>
+              <a:t>4</a:t>
+            </a:r>
+            <a:endParaRPr lang="en-US" sz="1400" dirty="0"/>
+          </a:p>
+        </p:txBody>
+      </p:sp>
+      <p:sp>
+        <p:nvSpPr>
+          <p:cNvPr id="20" name="Text 17"/>
+          <p:cNvSpPr/>
+          <p:nvPr/>
+        </p:nvSpPr>
+        <p:spPr>
+          <a:xfrm>
+            <a:off x="1517904" y="4809744"/>
+            <a:ext cx="9722815" cy="493776"/>
+          </a:xfrm>
+          <a:prstGeom prst="rect">
+            <a:avLst/>
+          </a:prstGeom>
+          <a:noFill/>
+          <a:ln/>
+        </p:spPr>
+        <p:txBody>
+          <a:bodyPr wrap="square" lIns="0" tIns="0" rIns="0" bIns="0" rtlCol="0" anchor="ctr"/>
+          <a:lstStyle/>
+          <a:p>
+            <a:pPr indent="0" marL="0">
+              <a:lnSpc>
+                <a:spcPct val="92000"/>
+              </a:lnSpc>
+              <a:buNone/>
+            </a:pPr>
+            <a:r>
+              <a:rPr lang="en-US" sz="1500" b="1" dirty="0">
+                <a:solidFill>
+                  <a:srgbClr val="FFFFFF"/>
+                </a:solidFill>
+                <a:latin typeface="Yu Gothic" pitchFamily="34" charset="0"/>
+                <a:ea typeface="Yu Gothic" pitchFamily="34" charset="-122"/>
+                <a:cs typeface="Yu Gothic" pitchFamily="34" charset="-120"/>
+              </a:rPr>
+              <a:t>その手段は最小限か ― 越えた場合、何の罪に当たるか。</a:t>
+            </a:r>
+            <a:endParaRPr lang="en-US" sz="1500" dirty="0"/>
+          </a:p>
+          <a:p>
+            <a:pPr indent="0" marL="0">
+              <a:lnSpc>
+                <a:spcPct val="92000"/>
+              </a:lnSpc>
+              <a:buNone/>
+            </a:pPr>
+            <a:r>
+              <a:rPr lang="en-US" sz="1050" i="1" dirty="0">
+                <a:solidFill>
+                  <a:srgbClr val="9FB6CB"/>
+                </a:solidFill>
+                <a:latin typeface="Calibri" pitchFamily="34" charset="0"/>
+                <a:ea typeface="Calibri" pitchFamily="34" charset="-122"/>
+                <a:cs typeface="Calibri" pitchFamily="34" charset="-120"/>
+              </a:rPr>
+              <a:t>Is this the minimum action? If I exceed it, what offence does it become?</a:t>
+            </a:r>
+            <a:endParaRPr lang="en-US" sz="1500" dirty="0"/>
+          </a:p>
+        </p:txBody>
+      </p:sp>
+      <p:sp>
+        <p:nvSpPr>
+          <p:cNvPr id="21" name="Text 18"/>
+          <p:cNvSpPr/>
+          <p:nvPr/>
+        </p:nvSpPr>
+        <p:spPr>
+          <a:xfrm>
+            <a:off x="640080" y="5596128"/>
+            <a:ext cx="10911535" cy="603504"/>
+          </a:xfrm>
+          <a:prstGeom prst="rect">
+            <a:avLst/>
+          </a:prstGeom>
+          <a:noFill/>
+          <a:ln/>
+        </p:spPr>
+        <p:txBody>
+          <a:bodyPr wrap="square" lIns="0" tIns="0" rIns="0" bIns="0" rtlCol="0" anchor="t"/>
+          <a:lstStyle/>
+          <a:p>
+            <a:pPr indent="0" marL="0">
+              <a:buNone/>
+            </a:pPr>
+            <a:r>
+              <a:rPr lang="en-US" sz="1200" b="1" dirty="0">
+                <a:solidFill>
+                  <a:srgbClr val="12B198"/>
+                </a:solidFill>
+                <a:latin typeface="Yu Gothic" pitchFamily="34" charset="0"/>
+                <a:ea typeface="Yu Gothic" pitchFamily="34" charset="-122"/>
+                <a:cs typeface="Yu Gothic" pitchFamily="34" charset="-120"/>
+              </a:rPr>
+              <a:t>本日の教育記録は、警備員指導教育責任者が作成し、所定の期間保存します。</a:t>
+            </a:r>
+            <a:endParaRPr lang="en-US" sz="1200" dirty="0"/>
+          </a:p>
+          <a:p>
+            <a:pPr indent="0" marL="0">
+              <a:buNone/>
+            </a:pPr>
+            <a:r>
+              <a:rPr lang="en-US" sz="950" i="1" dirty="0">
+                <a:solidFill>
+                  <a:srgbClr val="8EA3B7"/>
+                </a:solidFill>
+                <a:latin typeface="Calibri" pitchFamily="34" charset="0"/>
+                <a:ea typeface="Calibri" pitchFamily="34" charset="-122"/>
+                <a:cs typeface="Calibri" pitchFamily="34" charset="-120"/>
+              </a:rPr>
+              <a:t>Today's training record is prepared by the Instruction Supervisor and retained for the prescribed period.</a:t>
+            </a:r>
+            <a:endParaRPr lang="en-US" sz="1200" dirty="0"/>
+          </a:p>
+        </p:txBody>
+      </p:sp>
+    </p:spTree>
+  </p:cSld>
+  <p:clrMapOvr>
+    <a:masterClrMapping/>
+  </p:clrMapOvr>
+</p:sld>
+</file>
+
 <file path=ppt/slides/slide2.xml><?xml version="1.0" encoding="utf-8"?>
 <p:sld xmlns:a="http://schemas.openxmlformats.org/drawingml/2006/main" xmlns:r="http://schemas.openxmlformats.org/officeDocument/2006/relationships" xmlns:p="http://schemas.openxmlformats.org/presentationml/2006/main">
   <p:cSld name="Slide 2">
@@ -2368,7 +4301,7 @@
                 <a:ea typeface="Calibri" pitchFamily="34" charset="-122"/>
                 <a:cs typeface="Calibri" pitchFamily="34" charset="-120"/>
               </a:rPr>
-              <a:t>　Fire alarm system: panel, detectors, call points</a:t>
+              <a:t>  Fire alarm system: panel, detectors, call points</a:t>
             </a:r>
             <a:endParaRPr lang="en-US" sz="950" dirty="0"/>
           </a:p>
@@ -2414,7 +4347,7 @@
                 <a:ea typeface="Calibri" pitchFamily="34" charset="-122"/>
                 <a:cs typeface="Calibri" pitchFamily="34" charset="-120"/>
               </a:rPr>
-              <a:t>　Firefighting: extinguishers, hydrants, sprinklers</a:t>
+              <a:t>  Firefighting: extinguishers, hydrants, sprinklers</a:t>
             </a:r>
             <a:endParaRPr lang="en-US" sz="950" dirty="0"/>
           </a:p>
@@ -2460,7 +4393,7 @@
                 <a:ea typeface="Calibri" pitchFamily="34" charset="-122"/>
                 <a:cs typeface="Calibri" pitchFamily="34" charset="-120"/>
               </a:rPr>
-              <a:t>　Smoke control: fire doors, smoke barriers, vents</a:t>
+              <a:t>  Smoke control: fire doors, smoke barriers, vents</a:t>
             </a:r>
             <a:endParaRPr lang="en-US" sz="950" dirty="0"/>
           </a:p>
@@ -2506,7 +4439,7 @@
                 <a:ea typeface="Calibri" pitchFamily="34" charset="-122"/>
                 <a:cs typeface="Calibri" pitchFamily="34" charset="-120"/>
               </a:rPr>
-              <a:t>　Public address, exit signs, emergency lighting</a:t>
+              <a:t>  Public address, exit signs, emergency lighting</a:t>
             </a:r>
             <a:endParaRPr lang="en-US" sz="950" dirty="0"/>
           </a:p>
@@ -2717,7 +4650,7 @@
                 <a:ea typeface="Calibri" pitchFamily="34" charset="-122"/>
                 <a:cs typeface="Calibri" pitchFamily="34" charset="-120"/>
               </a:rPr>
-              <a:t>　Intrusion alarm: door, window and space sensors</a:t>
+              <a:t>  Intrusion alarm: door, window and space sensors</a:t>
             </a:r>
             <a:endParaRPr lang="en-US" sz="950" dirty="0"/>
           </a:p>
@@ -2763,7 +4696,7 @@
                 <a:ea typeface="Calibri" pitchFamily="34" charset="-122"/>
                 <a:cs typeface="Calibri" pitchFamily="34" charset="-120"/>
               </a:rPr>
-              <a:t>　Access control: readers, electric locks, logs</a:t>
+              <a:t>  Access control: readers, electric locks, logs</a:t>
             </a:r>
             <a:endParaRPr lang="en-US" sz="950" dirty="0"/>
           </a:p>
@@ -2809,7 +4742,7 @@
                 <a:ea typeface="Calibri" pitchFamily="34" charset="-122"/>
                 <a:cs typeface="Calibri" pitchFamily="34" charset="-120"/>
               </a:rPr>
-              <a:t>　CCTV: monitoring, recording, retrieval</a:t>
+              <a:t>  CCTV: monitoring, recording, retrieval</a:t>
             </a:r>
             <a:endParaRPr lang="en-US" sz="950" dirty="0"/>
           </a:p>
@@ -2855,7 +4788,7 @@
                 <a:ea typeface="Calibri" pitchFamily="34" charset="-122"/>
                 <a:cs typeface="Calibri" pitchFamily="34" charset="-120"/>
               </a:rPr>
-              <a:t>　Emergency call points and intercoms</a:t>
+              <a:t>  Emergency call points and intercoms</a:t>
             </a:r>
             <a:endParaRPr lang="en-US" sz="950" dirty="0"/>
           </a:p>
@@ -3066,7 +4999,7 @@
                 <a:ea typeface="Calibri" pitchFamily="34" charset="-122"/>
                 <a:cs typeface="Calibri" pitchFamily="34" charset="-120"/>
               </a:rPr>
-              <a:t>　Handheld radios. Procedure is covered in this session</a:t>
+              <a:t>  Handheld radios. Procedure is covered in this session</a:t>
             </a:r>
             <a:endParaRPr lang="en-US" sz="950" dirty="0"/>
           </a:p>
@@ -3112,7 +5045,7 @@
                 <a:ea typeface="Calibri" pitchFamily="34" charset="-122"/>
                 <a:cs typeface="Calibri" pitchFamily="34" charset="-120"/>
               </a:rPr>
-              <a:t>　Fixed lines and emergency phones</a:t>
+              <a:t>  Fixed lines and emergency phones</a:t>
             </a:r>
             <a:endParaRPr lang="en-US" sz="950" dirty="0"/>
           </a:p>
@@ -3158,7 +5091,7 @@
                 <a:ea typeface="Calibri" pitchFamily="34" charset="-122"/>
                 <a:cs typeface="Calibri" pitchFamily="34" charset="-120"/>
               </a:rPr>
-              <a:t>　Work devices. Keep them clearly separate from personal ones</a:t>
+              <a:t>  Work devices. Keep them clearly separate from personal ones</a:t>
             </a:r>
             <a:endParaRPr lang="en-US" sz="950" dirty="0"/>
           </a:p>
@@ -3204,7 +5137,7 @@
                 <a:ea typeface="Calibri" pitchFamily="34" charset="-122"/>
                 <a:cs typeface="Calibri" pitchFamily="34" charset="-120"/>
               </a:rPr>
-              <a:t>　Decide the fallback before communications fail</a:t>
+              <a:t>  Decide the fallback before communications fail</a:t>
             </a:r>
             <a:endParaRPr lang="en-US" sz="950" dirty="0"/>
           </a:p>
@@ -3415,7 +5348,7 @@
                 <a:ea typeface="Calibri" pitchFamily="34" charset="-122"/>
                 <a:cs typeface="Calibri" pitchFamily="34" charset="-120"/>
               </a:rPr>
-              <a:t>　Equipment reports a condition. People make the decision</a:t>
+              <a:t>  Equipment reports a condition. People make the decision</a:t>
             </a:r>
             <a:endParaRPr lang="en-US" sz="950" dirty="0"/>
           </a:p>
@@ -3461,7 +5394,7 @@
                 <a:ea typeface="Calibri" pitchFamily="34" charset="-122"/>
                 <a:cs typeface="Calibri" pitchFamily="34" charset="-120"/>
               </a:rPr>
-              <a:t>　Do not touch equipment you have not been trained on</a:t>
+              <a:t>  Do not touch equipment you have not been trained on</a:t>
             </a:r>
             <a:endParaRPr lang="en-US" sz="950" dirty="0"/>
           </a:p>
@@ -3507,7 +5440,7 @@
                 <a:ea typeface="Calibri" pitchFamily="34" charset="-122"/>
                 <a:cs typeface="Calibri" pitchFamily="34" charset="-120"/>
               </a:rPr>
-              <a:t>　Silencing an alarm is not the objective</a:t>
+              <a:t>  Silencing an alarm is not the objective</a:t>
             </a:r>
             <a:endParaRPr lang="en-US" sz="950" dirty="0"/>
           </a:p>
@@ -3553,7 +5486,7 @@
                 <a:ea typeface="Calibri" pitchFamily="34" charset="-122"/>
                 <a:cs typeface="Calibri" pitchFamily="34" charset="-120"/>
               </a:rPr>
-              <a:t>　Activations are logged. Record your operations too</a:t>
+              <a:t>  Activations are logged. Record your operations too</a:t>
             </a:r>
             <a:endParaRPr lang="en-US" sz="950" dirty="0"/>
           </a:p>
@@ -4285,7 +6218,7 @@
                 <a:ea typeface="Calibri" pitchFamily="34" charset="-122"/>
                 <a:cs typeface="Calibri" pitchFamily="34" charset="-120"/>
               </a:rPr>
-              <a:t>　Read the zone display: which floor, which zone</a:t>
+              <a:t>  Read the zone display: which floor, which zone</a:t>
             </a:r>
             <a:endParaRPr lang="en-US" sz="950" dirty="0"/>
           </a:p>
@@ -4331,7 +6264,7 @@
                 <a:ea typeface="Calibri" pitchFamily="34" charset="-122"/>
                 <a:cs typeface="Calibri" pitchFamily="34" charset="-120"/>
               </a:rPr>
-              <a:t>　Report before you move, not after</a:t>
+              <a:t>  Report before you move, not after</a:t>
             </a:r>
             <a:endParaRPr lang="en-US" sz="950" dirty="0"/>
           </a:p>
@@ -4377,7 +6310,7 @@
                 <a:ea typeface="Calibri" pitchFamily="34" charset="-122"/>
                 <a:cs typeface="Calibri" pitchFamily="34" charset="-120"/>
               </a:rPr>
-              <a:t>　Verify on site. Do not conclude before you have seen it</a:t>
+              <a:t>  Verify on site. Do not conclude before you have seen it</a:t>
             </a:r>
             <a:endParaRPr lang="en-US" sz="950" dirty="0"/>
           </a:p>
@@ -4423,7 +6356,7 @@
                 <a:ea typeface="Calibri" pitchFamily="34" charset="-122"/>
                 <a:cs typeface="Calibri" pitchFamily="34" charset="-120"/>
               </a:rPr>
-              <a:t>　Check which linked systems have operated</a:t>
+              <a:t>  Check which linked systems have operated</a:t>
             </a:r>
             <a:endParaRPr lang="en-US" sz="950" dirty="0"/>
           </a:p>
@@ -4634,7 +6567,7 @@
                 <a:ea typeface="Calibri" pitchFamily="34" charset="-122"/>
                 <a:cs typeface="Calibri" pitchFamily="34" charset="-120"/>
               </a:rPr>
-              <a:t>　An activation only means a detector operated</a:t>
+              <a:t>  An activation only means a detector operated</a:t>
             </a:r>
             <a:endParaRPr lang="en-US" sz="950" dirty="0"/>
           </a:p>
@@ -4680,7 +6613,7 @@
                 <a:ea typeface="Calibri" pitchFamily="34" charset="-122"/>
                 <a:cs typeface="Calibri" pitchFamily="34" charset="-120"/>
               </a:rPr>
-              <a:t>　Non-fire causes: steam, dust, cooking, construction, insecticide</a:t>
+              <a:t>  Non-fire causes: steam, dust, cooking, construction, insecticide</a:t>
             </a:r>
             <a:endParaRPr lang="en-US" sz="950" dirty="0"/>
           </a:p>
@@ -4726,7 +6659,7 @@
                 <a:ea typeface="Calibri" pitchFamily="34" charset="-122"/>
                 <a:cs typeface="Calibri" pitchFamily="34" charset="-120"/>
               </a:rPr>
-              <a:t>　On the radio: "Third floor east zone, activation, going to verify"</a:t>
+              <a:t>  On the radio: "Third floor east zone, activation, going to verify"</a:t>
             </a:r>
             <a:endParaRPr lang="en-US" sz="950" dirty="0"/>
           </a:p>
@@ -4772,7 +6705,7 @@
                 <a:ea typeface="Calibri" pitchFamily="34" charset="-122"/>
                 <a:cs typeface="Calibri" pitchFamily="34" charset="-120"/>
               </a:rPr>
-              <a:t>　Do not say "fire" before verifying. It locks in a conclusion</a:t>
+              <a:t>  Do not say "fire" before verifying. It locks in a conclusion</a:t>
             </a:r>
             <a:endParaRPr lang="en-US" sz="950" dirty="0"/>
           </a:p>
@@ -4983,7 +6916,7 @@
                 <a:ea typeface="Calibri" pitchFamily="34" charset="-122"/>
                 <a:cs typeface="Calibri" pitchFamily="34" charset="-120"/>
               </a:rPr>
-              <a:t>　Touch the door to check for heat. If it is hot, do not open it</a:t>
+              <a:t>  Touch the door to check for heat. If it is hot, do not open it</a:t>
             </a:r>
             <a:endParaRPr lang="en-US" sz="950" dirty="0"/>
           </a:p>
@@ -5029,7 +6962,7 @@
                 <a:ea typeface="Calibri" pitchFamily="34" charset="-122"/>
                 <a:cs typeface="Calibri" pitchFamily="34" charset="-120"/>
               </a:rPr>
-              <a:t>　Check for smoke, smell and sound</a:t>
+              <a:t>  Check for smoke, smell and sound</a:t>
             </a:r>
             <a:endParaRPr lang="en-US" sz="950" dirty="0"/>
           </a:p>
@@ -5075,7 +7008,7 @@
                 <a:ea typeface="Calibri" pitchFamily="34" charset="-122"/>
                 <a:cs typeface="Calibri" pitchFamily="34" charset="-120"/>
               </a:rPr>
-              <a:t>　Do not verify alone. If you must, tell someone where you are</a:t>
+              <a:t>  Do not verify alone. If you must, tell someone where you are</a:t>
             </a:r>
             <a:endParaRPr lang="en-US" sz="950" dirty="0"/>
           </a:p>
@@ -5121,7 +7054,7 @@
                 <a:ea typeface="Calibri" pitchFamily="34" charset="-122"/>
                 <a:cs typeface="Calibri" pitchFamily="34" charset="-120"/>
               </a:rPr>
-              <a:t>　Activations in several zones make a non-fire cause less likely</a:t>
+              <a:t>  Activations in several zones make a non-fire cause less likely</a:t>
             </a:r>
             <a:endParaRPr lang="en-US" sz="950" dirty="0"/>
           </a:p>
@@ -5332,7 +7265,7 @@
                 <a:ea typeface="Calibri" pitchFamily="34" charset="-122"/>
                 <a:cs typeface="Calibri" pitchFamily="34" charset="-120"/>
               </a:rPr>
-              <a:t>　"No smoke visible" does not rule out a fire</a:t>
+              <a:t>  "No smoke visible" does not rule out a fire</a:t>
             </a:r>
             <a:endParaRPr lang="en-US" sz="950" dirty="0"/>
           </a:p>
@@ -5378,7 +7311,7 @@
                 <a:ea typeface="Calibri" pitchFamily="34" charset="-122"/>
                 <a:cs typeface="Calibri" pitchFamily="34" charset="-120"/>
               </a:rPr>
-              <a:t>　The detector is not where the people are</a:t>
+              <a:t>  The detector is not where the people are</a:t>
             </a:r>
             <a:endParaRPr lang="en-US" sz="950" dirty="0"/>
           </a:p>
@@ -5424,7 +7357,7 @@
                 <a:ea typeface="Calibri" pitchFamily="34" charset="-122"/>
                 <a:cs typeface="Calibri" pitchFamily="34" charset="-120"/>
               </a:rPr>
-              <a:t>　If a second zone activates, change your assessment</a:t>
+              <a:t>  If a second zone activates, change your assessment</a:t>
             </a:r>
             <a:endParaRPr lang="en-US" sz="950" dirty="0"/>
           </a:p>
@@ -5470,7 +7403,7 @@
                 <a:ea typeface="Calibri" pitchFamily="34" charset="-122"/>
                 <a:cs typeface="Calibri" pitchFamily="34" charset="-120"/>
               </a:rPr>
-              <a:t>　When in doubt, act as though it is a fire</a:t>
+              <a:t>  When in doubt, act as though it is a fire</a:t>
             </a:r>
             <a:endParaRPr lang="en-US" sz="950" dirty="0"/>
           </a:p>
@@ -6202,7 +8135,7 @@
                 <a:ea typeface="Calibri" pitchFamily="34" charset="-122"/>
                 <a:cs typeface="Calibri" pitchFamily="34" charset="-120"/>
               </a:rPr>
-              <a:t>　Fire doors and smoke control: closures change the usable routes</a:t>
+              <a:t>  Fire doors and smoke control: closures change the usable routes</a:t>
             </a:r>
             <a:endParaRPr lang="en-US" sz="950" dirty="0"/>
           </a:p>
@@ -6248,7 +8181,7 @@
                 <a:ea typeface="Calibri" pitchFamily="34" charset="-122"/>
                 <a:cs typeface="Calibri" pitchFamily="34" charset="-120"/>
               </a:rPr>
-              <a:t>　Public address takes priority. Radio traffic suffers while it runs</a:t>
+              <a:t>  Public address takes priority. Radio traffic suffers while it runs</a:t>
             </a:r>
             <a:endParaRPr lang="en-US" sz="950" dirty="0"/>
           </a:p>
@@ -6294,7 +8227,7 @@
                 <a:ea typeface="Calibri" pitchFamily="34" charset="-122"/>
                 <a:cs typeface="Calibri" pitchFamily="34" charset="-120"/>
               </a:rPr>
-              <a:t>　Lifts descend to the evacuation floor and stop</a:t>
+              <a:t>  Lifts descend to the evacuation floor and stop</a:t>
             </a:r>
             <a:endParaRPr lang="en-US" sz="950" dirty="0"/>
           </a:p>
@@ -6340,7 +8273,7 @@
                 <a:ea typeface="Calibri" pitchFamily="34" charset="-122"/>
                 <a:cs typeface="Calibri" pitchFamily="34" charset="-120"/>
               </a:rPr>
-              <a:t>　Shutters: check nobody is left on the far side</a:t>
+              <a:t>  Shutters: check nobody is left on the far side</a:t>
             </a:r>
             <a:endParaRPr lang="en-US" sz="950" dirty="0"/>
           </a:p>
@@ -6551,7 +8484,7 @@
                 <a:ea typeface="Calibri" pitchFamily="34" charset="-122"/>
                 <a:cs typeface="Calibri" pitchFamily="34" charset="-120"/>
               </a:rPr>
-              <a:t>　Assume stairs. Do not let people use the lifts</a:t>
+              <a:t>  Assume stairs. Do not let people use the lifts</a:t>
             </a:r>
             <a:endParaRPr lang="en-US" sz="950" dirty="0"/>
           </a:p>
@@ -6597,7 +8530,7 @@
                 <a:ea typeface="Calibri" pitchFamily="34" charset="-122"/>
                 <a:cs typeface="Calibri" pitchFamily="34" charset="-120"/>
               </a:rPr>
-              <a:t>　Loud voice, short words. Point the direction with your hand</a:t>
+              <a:t>  Loud voice, short words. Point the direction with your hand</a:t>
             </a:r>
             <a:endParaRPr lang="en-US" sz="950" dirty="0"/>
           </a:p>
@@ -6643,7 +8576,7 @@
                 <a:ea typeface="Calibri" pitchFamily="34" charset="-122"/>
                 <a:cs typeface="Calibri" pitchFamily="34" charset="-120"/>
               </a:rPr>
-              <a:t>　For non-Japanese visitors, "this way, please" plus a gesture is enough</a:t>
+              <a:t>  For non-Japanese visitors, "this way, please" plus a gesture is enough</a:t>
             </a:r>
             <a:endParaRPr lang="en-US" sz="950" dirty="0"/>
           </a:p>
@@ -6689,7 +8622,7 @@
                 <a:ea typeface="Calibri" pitchFamily="34" charset="-122"/>
                 <a:cs typeface="Calibri" pitchFamily="34" charset="-120"/>
               </a:rPr>
-              <a:t>　Sweep for anyone left behind, according to your assigned area</a:t>
+              <a:t>  Sweep for anyone left behind, according to your assigned area</a:t>
             </a:r>
             <a:endParaRPr lang="en-US" sz="950" dirty="0"/>
           </a:p>
@@ -6900,7 +8833,7 @@
                 <a:ea typeface="Calibri" pitchFamily="34" charset="-122"/>
                 <a:cs typeface="Calibri" pitchFamily="34" charset="-120"/>
               </a:rPr>
-              <a:t>　Structure: call, answer, message, read-back, close</a:t>
+              <a:t>  Structure: call, answer, message, read-back, close</a:t>
             </a:r>
             <a:endParaRPr lang="en-US" sz="950" dirty="0"/>
           </a:p>
@@ -6946,7 +8879,7 @@
                 <a:ea typeface="Calibri" pitchFamily="34" charset="-122"/>
                 <a:cs typeface="Calibri" pitchFamily="34" charset="-120"/>
               </a:rPr>
-              <a:t>　Name them, then yourself, then hand over</a:t>
+              <a:t>  Name them, then yourself, then hand over</a:t>
             </a:r>
             <a:endParaRPr lang="en-US" sz="950" dirty="0"/>
           </a:p>
@@ -6992,7 +8925,7 @@
                 <a:ea typeface="Calibri" pitchFamily="34" charset="-122"/>
                 <a:cs typeface="Calibri" pitchFamily="34" charset="-120"/>
               </a:rPr>
-              <a:t>　Over, Out, Say again, Stand by</a:t>
+              <a:t>  Over, Out, Say again, Stand by</a:t>
             </a:r>
             <a:endParaRPr lang="en-US" sz="950" dirty="0"/>
           </a:p>
@@ -7038,7 +8971,7 @@
                 <a:ea typeface="Calibri" pitchFamily="34" charset="-122"/>
                 <a:cs typeface="Calibri" pitchFamily="34" charset="-120"/>
               </a:rPr>
-              <a:t>　Roger and Copy mean received. Never say "over and out"</a:t>
+              <a:t>  Roger and Copy mean received. Never say "over and out"</a:t>
             </a:r>
             <a:endParaRPr lang="en-US" sz="950" dirty="0"/>
           </a:p>
@@ -7249,7 +9182,7 @@
                 <a:ea typeface="Calibri" pitchFamily="34" charset="-122"/>
                 <a:cs typeface="Calibri" pitchFamily="34" charset="-120"/>
               </a:rPr>
-              <a:t>　Name them, name yourself, hand over; then out, say again, roger</a:t>
+              <a:t>  Name them, name yourself, hand over; then out, say again, roger</a:t>
             </a:r>
             <a:endParaRPr lang="en-US" sz="950" dirty="0"/>
           </a:p>
@@ -7295,7 +9228,7 @@
                 <a:ea typeface="Calibri" pitchFamily="34" charset="-122"/>
                 <a:cs typeface="Calibri" pitchFamily="34" charset="-120"/>
               </a:rPr>
-              <a:t>　Read numbers one digit at a time</a:t>
+              <a:t>  Read numbers one digit at a time</a:t>
             </a:r>
             <a:endParaRPr lang="en-US" sz="950" dirty="0"/>
           </a:p>
@@ -7341,7 +9274,7 @@
                 <a:ea typeface="Calibri" pitchFamily="34" charset="-122"/>
                 <a:cs typeface="Calibri" pitchFamily="34" charset="-120"/>
               </a:rPr>
-              <a:t>　Plain language. No codes. No personal data by radio</a:t>
+              <a:t>  Plain language. No codes. No personal data by radio</a:t>
             </a:r>
             <a:endParaRPr lang="en-US" sz="950" dirty="0"/>
           </a:p>
@@ -7387,7 +9320,7 @@
                 <a:ea typeface="Calibri" pitchFamily="34" charset="-122"/>
                 <a:cs typeface="Calibri" pitchFamily="34" charset="-120"/>
               </a:rPr>
-              <a:t>　Reference only: NATO and Japanese phonetic alphabets</a:t>
+              <a:t>  Reference only: NATO and Japanese phonetic alphabets</a:t>
             </a:r>
             <a:endParaRPr lang="en-US" sz="950" dirty="0"/>
           </a:p>
@@ -8119,7 +10052,7 @@
                 <a:ea typeface="Calibri" pitchFamily="34" charset="-122"/>
                 <a:cs typeface="Calibri" pitchFamily="34" charset="-120"/>
               </a:rPr>
-              <a:t>　They become evidence in later investigation, discipline and litigation</a:t>
+              <a:t>  They become evidence in later investigation, discipline and litigation</a:t>
             </a:r>
             <a:endParaRPr lang="en-US" sz="950" dirty="0"/>
           </a:p>
@@ -8165,7 +10098,7 @@
                 <a:ea typeface="Calibri" pitchFamily="34" charset="-122"/>
                 <a:cs typeface="Calibri" pitchFamily="34" charset="-120"/>
               </a:rPr>
-              <a:t>　They are also personal data</a:t>
+              <a:t>  They are also personal data</a:t>
             </a:r>
             <a:endParaRPr lang="en-US" sz="950" dirty="0"/>
           </a:p>
@@ -8211,7 +10144,7 @@
                 <a:ea typeface="Calibri" pitchFamily="34" charset="-122"/>
                 <a:cs typeface="Calibri" pitchFamily="34" charset="-120"/>
               </a:rPr>
-              <a:t>　Once overwritten they cannot be recovered. There is a time limit</a:t>
+              <a:t>  Once overwritten they cannot be recovered. There is a time limit</a:t>
             </a:r>
             <a:endParaRPr lang="en-US" sz="950" dirty="0"/>
           </a:p>
@@ -8257,7 +10190,7 @@
                 <a:ea typeface="Calibri" pitchFamily="34" charset="-122"/>
                 <a:cs typeface="Calibri" pitchFamily="34" charset="-120"/>
               </a:rPr>
-              <a:t>　The guard on the spot is usually the first to notice they matter</a:t>
+              <a:t>  The guard on the spot is usually the first to notice they matter</a:t>
             </a:r>
             <a:endParaRPr lang="en-US" sz="950" dirty="0"/>
           </a:p>
@@ -8468,7 +10401,7 @@
                 <a:ea typeface="Calibri" pitchFamily="34" charset="-122"/>
                 <a:cs typeface="Calibri" pitchFamily="34" charset="-120"/>
               </a:rPr>
-              <a:t>　On becoming aware of an incident, request preservation before overwrite</a:t>
+              <a:t>  On becoming aware of an incident, request preservation before overwrite</a:t>
             </a:r>
             <a:endParaRPr lang="en-US" sz="950" dirty="0"/>
           </a:p>
@@ -8514,7 +10447,7 @@
                 <a:ea typeface="Calibri" pitchFamily="34" charset="-122"/>
                 <a:cs typeface="Calibri" pitchFamily="34" charset="-120"/>
               </a:rPr>
-              <a:t>　Specify the target: date and time, zone, camera number</a:t>
+              <a:t>  Specify the target: date and time, zone, camera number</a:t>
             </a:r>
             <a:endParaRPr lang="en-US" sz="950" dirty="0"/>
           </a:p>
@@ -8560,7 +10493,7 @@
                 <a:ea typeface="Calibri" pitchFamily="34" charset="-122"/>
                 <a:cs typeface="Calibri" pitchFamily="34" charset="-120"/>
               </a:rPr>
-              <a:t>　Record that you asked, and when</a:t>
+              <a:t>  Record that you asked, and when</a:t>
             </a:r>
             <a:endParaRPr lang="en-US" sz="950" dirty="0"/>
           </a:p>
@@ -8606,7 +10539,7 @@
                 <a:ea typeface="Calibri" pitchFamily="34" charset="-122"/>
                 <a:cs typeface="Calibri" pitchFamily="34" charset="-120"/>
               </a:rPr>
-              <a:t>　If the contact is away, go to the next person in the call-out list</a:t>
+              <a:t>  If the contact is away, go to the next person in the call-out list</a:t>
             </a:r>
             <a:endParaRPr lang="en-US" sz="950" dirty="0"/>
           </a:p>
@@ -8817,7 +10750,7 @@
                 <a:ea typeface="Calibri" pitchFamily="34" charset="-122"/>
                 <a:cs typeface="Calibri" pitchFamily="34" charset="-120"/>
               </a:rPr>
-              <a:t>　Do not view outside the purpose. Curiosity is not a reason</a:t>
+              <a:t>  Do not view outside the purpose. Curiosity is not a reason</a:t>
             </a:r>
             <a:endParaRPr lang="en-US" sz="950" dirty="0"/>
           </a:p>
@@ -8863,7 +10796,7 @@
                 <a:ea typeface="Calibri" pitchFamily="34" charset="-122"/>
                 <a:cs typeface="Calibri" pitchFamily="34" charset="-120"/>
               </a:rPr>
-              <a:t>　Do not remove, photograph or post</a:t>
+              <a:t>  Do not remove, photograph or post</a:t>
             </a:r>
             <a:endParaRPr lang="en-US" sz="950" dirty="0"/>
           </a:p>
@@ -8909,7 +10842,7 @@
                 <a:ea typeface="Calibri" pitchFamily="34" charset="-122"/>
                 <a:cs typeface="Calibri" pitchFamily="34" charset="-120"/>
               </a:rPr>
-              <a:t>　A guard does not decide on disclosure. Refer to the supervisor and client</a:t>
+              <a:t>  A guard does not decide on disclosure. Refer to the supervisor and client</a:t>
             </a:r>
             <a:endParaRPr lang="en-US" sz="950" dirty="0"/>
           </a:p>
@@ -8955,7 +10888,7 @@
                 <a:ea typeface="Calibri" pitchFamily="34" charset="-122"/>
                 <a:cs typeface="Calibri" pitchFamily="34" charset="-120"/>
               </a:rPr>
-              <a:t>　Record the fact that a viewing took place</a:t>
+              <a:t>  Record the fact that a viewing took place</a:t>
             </a:r>
             <a:endParaRPr lang="en-US" sz="950" dirty="0"/>
           </a:p>
@@ -9166,7 +11099,7 @@
                 <a:ea typeface="Calibri" pitchFamily="34" charset="-122"/>
                 <a:cs typeface="Calibri" pitchFamily="34" charset="-120"/>
               </a:rPr>
-              <a:t>　"I am not able to decide on that. Let me connect you with the right person"</a:t>
+              <a:t>  "I am not able to decide on that. Let me connect you with the right person"</a:t>
             </a:r>
             <a:endParaRPr lang="en-US" sz="950" dirty="0"/>
           </a:p>
@@ -9212,7 +11145,7 @@
                 <a:ea typeface="Calibri" pitchFamily="34" charset="-122"/>
                 <a:cs typeface="Calibri" pitchFamily="34" charset="-120"/>
               </a:rPr>
-              <a:t>　Do not show it on the spot, even to an employee</a:t>
+              <a:t>  Do not show it on the spot, even to an employee</a:t>
             </a:r>
             <a:endParaRPr lang="en-US" sz="950" dirty="0"/>
           </a:p>
@@ -9258,7 +11191,7 @@
                 <a:ea typeface="Calibri" pitchFamily="34" charset="-122"/>
                 <a:cs typeface="Calibri" pitchFamily="34" charset="-120"/>
               </a:rPr>
-              <a:t>　Asking to see identification is not rude</a:t>
+              <a:t>  Asking to see identification is not rude</a:t>
             </a:r>
             <a:endParaRPr lang="en-US" sz="950" dirty="0"/>
           </a:p>
@@ -9304,7 +11237,7 @@
                 <a:ea typeface="Calibri" pitchFamily="34" charset="-122"/>
                 <a:cs typeface="Calibri" pitchFamily="34" charset="-120"/>
               </a:rPr>
-              <a:t>　Record that you declined, why, and when</a:t>
+              <a:t>  Record that you declined, why, and when</a:t>
             </a:r>
             <a:endParaRPr lang="en-US" sz="950" dirty="0"/>
           </a:p>
@@ -10902,7 +12835,7 @@
                 <a:ea typeface="Yu Gothic" pitchFamily="34" charset="-122"/>
                 <a:cs typeface="Yu Gothic" pitchFamily="34" charset="-120"/>
               </a:rPr>
-              <a:t>TTX 10-B　上司が入退室ログの提供を求める</a:t>
+              <a:t>TTX 10-A 講評 ― 模範解答</a:t>
             </a:r>
             <a:endParaRPr lang="en-US" sz="2300" dirty="0"/>
           </a:p>
@@ -10922,7 +12855,7 @@
                 <a:ea typeface="Calibri" pitchFamily="34" charset="-122"/>
                 <a:cs typeface="Calibri" pitchFamily="34" charset="-120"/>
               </a:rPr>
-              <a:t>TTX 10-B — A Manager Asks You for the Access Log</a:t>
+              <a:t>TTX 10-A Debrief — Model Answer</a:t>
             </a:r>
             <a:endParaRPr lang="en-US" sz="2300" dirty="0"/>
           </a:p>
@@ -10983,7 +12916,7 @@
                 <a:ea typeface="Calibri" pitchFamily="34" charset="-122"/>
                 <a:cs typeface="Calibri" pitchFamily="34" charset="-120"/>
               </a:rPr>
-              <a:t>CASE 10-B</a:t>
+              <a:t>DEBRIEF</a:t>
             </a:r>
             <a:endParaRPr lang="en-US" sz="1100" dirty="0"/>
           </a:p>
@@ -10991,18 +12924,721 @@
       </p:sp>
       <p:sp>
         <p:nvSpPr>
-          <p:cNvPr id="6" name="Shape 3"/>
+          <p:cNvPr id="6" name="Text 3"/>
           <p:cNvSpPr/>
           <p:nvPr/>
         </p:nvSpPr>
         <p:spPr>
           <a:xfrm>
             <a:off x="640080" y="1188720"/>
-            <a:ext cx="10911535" cy="1124712"/>
+            <a:ext cx="10911535" cy="530352"/>
+          </a:xfrm>
+          <a:prstGeom prst="rect">
+            <a:avLst/>
+          </a:prstGeom>
+          <a:noFill/>
+          <a:ln/>
+        </p:spPr>
+        <p:txBody>
+          <a:bodyPr wrap="square" lIns="0" tIns="0" rIns="0" bIns="0" rtlCol="0" anchor="t"/>
+          <a:lstStyle/>
+          <a:p>
+            <a:pPr indent="0" marL="0">
+              <a:lnSpc>
+                <a:spcPct val="90000"/>
+              </a:lnSpc>
+              <a:buNone/>
+            </a:pPr>
+            <a:r>
+              <a:rPr lang="en-US" sz="1000" b="1" dirty="0">
+                <a:solidFill>
+                  <a:srgbClr val="0D8A76"/>
+                </a:solidFill>
+                <a:latin typeface="Yu Gothic" pitchFamily="34" charset="0"/>
+                <a:ea typeface="Yu Gothic" pitchFamily="34" charset="-122"/>
+                <a:cs typeface="Yu Gothic" pitchFamily="34" charset="-120"/>
+              </a:rPr>
+              <a:t>狙い　</a:t>
+            </a:r>
+            <a:pPr indent="0" marL="0">
+              <a:lnSpc>
+                <a:spcPct val="90000"/>
+              </a:lnSpc>
+              <a:buNone/>
+            </a:pPr>
+            <a:r>
+              <a:rPr lang="en-US" sz="1150" b="1" dirty="0">
+                <a:solidFill>
+                  <a:srgbClr val="093259"/>
+                </a:solidFill>
+                <a:latin typeface="Yu Gothic" pitchFamily="34" charset="0"/>
+                <a:ea typeface="Yu Gothic" pitchFamily="34" charset="-122"/>
+                <a:cs typeface="Yu Gothic" pitchFamily="34" charset="-120"/>
+              </a:rPr>
+              <a:t>2つの事象が重なり、人員が足りない。全部はできない。</a:t>
+            </a:r>
+            <a:endParaRPr lang="en-US" sz="1000" dirty="0"/>
+          </a:p>
+          <a:p>
+            <a:pPr indent="0" marL="0">
+              <a:lnSpc>
+                <a:spcPct val="90000"/>
+              </a:lnSpc>
+              <a:buNone/>
+            </a:pPr>
+            <a:r>
+              <a:rPr lang="en-US" sz="850" i="1" dirty="0">
+                <a:solidFill>
+                  <a:srgbClr val="5F7183"/>
+                </a:solidFill>
+                <a:latin typeface="Calibri" pitchFamily="34" charset="0"/>
+                <a:ea typeface="Calibri" pitchFamily="34" charset="-122"/>
+                <a:cs typeface="Calibri" pitchFamily="34" charset="-120"/>
+              </a:rPr>
+              <a:t>Two events overlap and you are short-staffed. You cannot do everything.</a:t>
+            </a:r>
+            <a:endParaRPr lang="en-US" sz="1000" dirty="0"/>
+          </a:p>
+        </p:txBody>
+      </p:sp>
+      <p:sp>
+        <p:nvSpPr>
+          <p:cNvPr id="7" name="Shape 4"/>
+          <p:cNvSpPr/>
+          <p:nvPr/>
+        </p:nvSpPr>
+        <p:spPr>
+          <a:xfrm>
+            <a:off x="640080" y="1773936"/>
+            <a:ext cx="5327752" cy="1091184"/>
           </a:xfrm>
           <a:prstGeom prst="roundRect">
             <a:avLst>
-              <a:gd name="adj" fmla="val 3252"/>
+              <a:gd name="adj" fmla="val 3352"/>
+            </a:avLst>
+          </a:prstGeom>
+          <a:solidFill>
+            <a:srgbClr val="E4F4F0"/>
+          </a:solidFill>
+          <a:ln/>
+        </p:spPr>
+      </p:sp>
+      <p:sp>
+        <p:nvSpPr>
+          <p:cNvPr id="8" name="Text 5"/>
+          <p:cNvSpPr/>
+          <p:nvPr/>
+        </p:nvSpPr>
+        <p:spPr>
+          <a:xfrm>
+            <a:off x="877824" y="1865376"/>
+            <a:ext cx="4852264" cy="908304"/>
+          </a:xfrm>
+          <a:prstGeom prst="rect">
+            <a:avLst/>
+          </a:prstGeom>
+          <a:noFill/>
+          <a:ln/>
+        </p:spPr>
+        <p:txBody>
+          <a:bodyPr wrap="square" lIns="0" tIns="0" rIns="0" bIns="0" rtlCol="0" anchor="t"/>
+          <a:lstStyle/>
+          <a:p>
+            <a:pPr indent="0" marL="0">
+              <a:lnSpc>
+                <a:spcPct val="90000"/>
+              </a:lnSpc>
+              <a:buNone/>
+            </a:pPr>
+            <a:r>
+              <a:rPr lang="en-US" sz="1050" b="1" dirty="0">
+                <a:solidFill>
+                  <a:srgbClr val="0D8A76"/>
+                </a:solidFill>
+                <a:latin typeface="Yu Gothic" pitchFamily="34" charset="0"/>
+                <a:ea typeface="Yu Gothic" pitchFamily="34" charset="-122"/>
+                <a:cs typeface="Yu Gothic" pitchFamily="34" charset="-120"/>
+              </a:rPr>
+              <a:t>最初の60秒</a:t>
+            </a:r>
+            <a:endParaRPr lang="en-US" sz="1050" dirty="0"/>
+          </a:p>
+          <a:p>
+            <a:pPr indent="0" marL="0">
+              <a:lnSpc>
+                <a:spcPct val="90000"/>
+              </a:lnSpc>
+              <a:buNone/>
+            </a:pPr>
+            <a:r>
+              <a:rPr lang="en-US" sz="1050" b="1" dirty="0">
+                <a:solidFill>
+                  <a:srgbClr val="1B2733"/>
+                </a:solidFill>
+                <a:latin typeface="Yu Gothic" pitchFamily="34" charset="0"/>
+                <a:ea typeface="Yu Gothic" pitchFamily="34" charset="-122"/>
+                <a:cs typeface="Yu Gothic" pitchFamily="34" charset="-120"/>
+              </a:rPr>
+              <a:t>地区表示を読む → 一報を入れる → 現場確認。動く前に一報。</a:t>
+            </a:r>
+            <a:endParaRPr lang="en-US" sz="1050" dirty="0"/>
+          </a:p>
+          <a:p>
+            <a:pPr indent="0" marL="0">
+              <a:lnSpc>
+                <a:spcPct val="90000"/>
+              </a:lnSpc>
+              <a:buNone/>
+            </a:pPr>
+            <a:r>
+              <a:rPr lang="en-US" sz="800" i="1" dirty="0">
+                <a:solidFill>
+                  <a:srgbClr val="5F7183"/>
+                </a:solidFill>
+                <a:latin typeface="Calibri" pitchFamily="34" charset="0"/>
+                <a:ea typeface="Calibri" pitchFamily="34" charset="-122"/>
+                <a:cs typeface="Calibri" pitchFamily="34" charset="-120"/>
+              </a:rPr>
+              <a:t>Read the zone, send the first report, then verify. Report before you move.</a:t>
+            </a:r>
+            <a:endParaRPr lang="en-US" sz="1050" dirty="0"/>
+          </a:p>
+        </p:txBody>
+      </p:sp>
+      <p:sp>
+        <p:nvSpPr>
+          <p:cNvPr id="9" name="Shape 6"/>
+          <p:cNvSpPr/>
+          <p:nvPr/>
+        </p:nvSpPr>
+        <p:spPr>
+          <a:xfrm>
+            <a:off x="6223864" y="1773936"/>
+            <a:ext cx="5327752" cy="1091184"/>
+          </a:xfrm>
+          <a:prstGeom prst="roundRect">
+            <a:avLst>
+              <a:gd name="adj" fmla="val 3352"/>
+            </a:avLst>
+          </a:prstGeom>
+          <a:solidFill>
+            <a:srgbClr val="E4F4F0"/>
+          </a:solidFill>
+          <a:ln/>
+        </p:spPr>
+      </p:sp>
+      <p:sp>
+        <p:nvSpPr>
+          <p:cNvPr id="10" name="Text 7"/>
+          <p:cNvSpPr/>
+          <p:nvPr/>
+        </p:nvSpPr>
+        <p:spPr>
+          <a:xfrm>
+            <a:off x="6461608" y="1865376"/>
+            <a:ext cx="4852264" cy="908304"/>
+          </a:xfrm>
+          <a:prstGeom prst="rect">
+            <a:avLst/>
+          </a:prstGeom>
+          <a:noFill/>
+          <a:ln/>
+        </p:spPr>
+        <p:txBody>
+          <a:bodyPr wrap="square" lIns="0" tIns="0" rIns="0" bIns="0" rtlCol="0" anchor="t"/>
+          <a:lstStyle/>
+          <a:p>
+            <a:pPr indent="0" marL="0">
+              <a:lnSpc>
+                <a:spcPct val="90000"/>
+              </a:lnSpc>
+              <a:buNone/>
+            </a:pPr>
+            <a:r>
+              <a:rPr lang="en-US" sz="1050" b="1" dirty="0">
+                <a:solidFill>
+                  <a:srgbClr val="0D8A76"/>
+                </a:solidFill>
+                <a:latin typeface="Yu Gothic" pitchFamily="34" charset="0"/>
+                <a:ea typeface="Yu Gothic" pitchFamily="34" charset="-122"/>
+                <a:cs typeface="Yu Gothic" pitchFamily="34" charset="-120"/>
+              </a:rPr>
+              <a:t>2名の配置</a:t>
+            </a:r>
+            <a:endParaRPr lang="en-US" sz="1050" dirty="0"/>
+          </a:p>
+          <a:p>
+            <a:pPr indent="0" marL="0">
+              <a:lnSpc>
+                <a:spcPct val="90000"/>
+              </a:lnSpc>
+              <a:buNone/>
+            </a:pPr>
+            <a:r>
+              <a:rPr lang="en-US" sz="1050" b="1" dirty="0">
+                <a:solidFill>
+                  <a:srgbClr val="1B2733"/>
+                </a:solidFill>
+                <a:latin typeface="Yu Gothic" pitchFamily="34" charset="0"/>
+                <a:ea typeface="Yu Gothic" pitchFamily="34" charset="-122"/>
+                <a:cs typeface="Yu Gothic" pitchFamily="34" charset="-120"/>
+              </a:rPr>
+              <a:t>単独で行かないことと受信機を無人にしないことは両立しない。</a:t>
+            </a:r>
+            <a:endParaRPr lang="en-US" sz="1050" dirty="0"/>
+          </a:p>
+          <a:p>
+            <a:pPr indent="0" marL="0">
+              <a:lnSpc>
+                <a:spcPct val="90000"/>
+              </a:lnSpc>
+              <a:buNone/>
+            </a:pPr>
+            <a:r>
+              <a:rPr lang="en-US" sz="800" i="1" dirty="0">
+                <a:solidFill>
+                  <a:srgbClr val="5F7183"/>
+                </a:solidFill>
+                <a:latin typeface="Calibri" pitchFamily="34" charset="0"/>
+                <a:ea typeface="Calibri" pitchFamily="34" charset="-122"/>
+                <a:cs typeface="Calibri" pitchFamily="34" charset="-120"/>
+              </a:rPr>
+              <a:t>Not going alone and not leaving the panel unmanned cannot both hold.</a:t>
+            </a:r>
+            <a:endParaRPr lang="en-US" sz="1050" dirty="0"/>
+          </a:p>
+        </p:txBody>
+      </p:sp>
+      <p:sp>
+        <p:nvSpPr>
+          <p:cNvPr id="11" name="Shape 8"/>
+          <p:cNvSpPr/>
+          <p:nvPr/>
+        </p:nvSpPr>
+        <p:spPr>
+          <a:xfrm>
+            <a:off x="640080" y="2993136"/>
+            <a:ext cx="5327752" cy="1091184"/>
+          </a:xfrm>
+          <a:prstGeom prst="roundRect">
+            <a:avLst>
+              <a:gd name="adj" fmla="val 3352"/>
+            </a:avLst>
+          </a:prstGeom>
+          <a:solidFill>
+            <a:srgbClr val="EFF4F8"/>
+          </a:solidFill>
+          <a:ln/>
+        </p:spPr>
+      </p:sp>
+      <p:sp>
+        <p:nvSpPr>
+          <p:cNvPr id="12" name="Text 9"/>
+          <p:cNvSpPr/>
+          <p:nvPr/>
+        </p:nvSpPr>
+        <p:spPr>
+          <a:xfrm>
+            <a:off x="877824" y="3084576"/>
+            <a:ext cx="4852264" cy="908304"/>
+          </a:xfrm>
+          <a:prstGeom prst="rect">
+            <a:avLst/>
+          </a:prstGeom>
+          <a:noFill/>
+          <a:ln/>
+        </p:spPr>
+        <p:txBody>
+          <a:bodyPr wrap="square" lIns="0" tIns="0" rIns="0" bIns="0" rtlCol="0" anchor="t"/>
+          <a:lstStyle/>
+          <a:p>
+            <a:pPr indent="0" marL="0">
+              <a:lnSpc>
+                <a:spcPct val="90000"/>
+              </a:lnSpc>
+              <a:buNone/>
+            </a:pPr>
+            <a:r>
+              <a:rPr lang="en-US" sz="1050" b="1" dirty="0">
+                <a:solidFill>
+                  <a:srgbClr val="093259"/>
+                </a:solidFill>
+                <a:latin typeface="Yu Gothic" pitchFamily="34" charset="0"/>
+                <a:ea typeface="Yu Gothic" pitchFamily="34" charset="-122"/>
+                <a:cs typeface="Yu Gothic" pitchFamily="34" charset="-120"/>
+              </a:rPr>
+              <a:t>「煙は見えない」</a:t>
+            </a:r>
+            <a:endParaRPr lang="en-US" sz="1050" dirty="0"/>
+          </a:p>
+          <a:p>
+            <a:pPr indent="0" marL="0">
+              <a:lnSpc>
+                <a:spcPct val="90000"/>
+              </a:lnSpc>
+              <a:buNone/>
+            </a:pPr>
+            <a:r>
+              <a:rPr lang="en-US" sz="1050" b="1" dirty="0">
+                <a:solidFill>
+                  <a:srgbClr val="1B2733"/>
+                </a:solidFill>
+                <a:latin typeface="Yu Gothic" pitchFamily="34" charset="0"/>
+                <a:ea typeface="Yu Gothic" pitchFamily="34" charset="-122"/>
+                <a:cs typeface="Yu Gothic" pitchFamily="34" charset="-120"/>
+              </a:rPr>
+              <a:t>火災を否定する根拠にならない。感知器と人の位置は違う。判断を変えない。</a:t>
+            </a:r>
+            <a:endParaRPr lang="en-US" sz="1050" dirty="0"/>
+          </a:p>
+          <a:p>
+            <a:pPr indent="0" marL="0">
+              <a:lnSpc>
+                <a:spcPct val="90000"/>
+              </a:lnSpc>
+              <a:buNone/>
+            </a:pPr>
+            <a:r>
+              <a:rPr lang="en-US" sz="800" i="1" dirty="0">
+                <a:solidFill>
+                  <a:srgbClr val="5F7183"/>
+                </a:solidFill>
+                <a:latin typeface="Calibri" pitchFamily="34" charset="0"/>
+                <a:ea typeface="Calibri" pitchFamily="34" charset="-122"/>
+                <a:cs typeface="Calibri" pitchFamily="34" charset="-120"/>
+              </a:rPr>
+              <a:t>It does not rule out a fire. The detector is not where the people are.</a:t>
+            </a:r>
+            <a:endParaRPr lang="en-US" sz="1050" dirty="0"/>
+          </a:p>
+        </p:txBody>
+      </p:sp>
+      <p:sp>
+        <p:nvSpPr>
+          <p:cNvPr id="13" name="Shape 10"/>
+          <p:cNvSpPr/>
+          <p:nvPr/>
+        </p:nvSpPr>
+        <p:spPr>
+          <a:xfrm>
+            <a:off x="6223864" y="2993136"/>
+            <a:ext cx="5327752" cy="1091184"/>
+          </a:xfrm>
+          <a:prstGeom prst="roundRect">
+            <a:avLst>
+              <a:gd name="adj" fmla="val 3352"/>
+            </a:avLst>
+          </a:prstGeom>
+          <a:solidFill>
+            <a:srgbClr val="EFF4F8"/>
+          </a:solidFill>
+          <a:ln/>
+        </p:spPr>
+      </p:sp>
+      <p:sp>
+        <p:nvSpPr>
+          <p:cNvPr id="14" name="Text 11"/>
+          <p:cNvSpPr/>
+          <p:nvPr/>
+        </p:nvSpPr>
+        <p:spPr>
+          <a:xfrm>
+            <a:off x="6461608" y="3084576"/>
+            <a:ext cx="4852264" cy="908304"/>
+          </a:xfrm>
+          <a:prstGeom prst="rect">
+            <a:avLst/>
+          </a:prstGeom>
+          <a:noFill/>
+          <a:ln/>
+        </p:spPr>
+        <p:txBody>
+          <a:bodyPr wrap="square" lIns="0" tIns="0" rIns="0" bIns="0" rtlCol="0" anchor="t"/>
+          <a:lstStyle/>
+          <a:p>
+            <a:pPr indent="0" marL="0">
+              <a:lnSpc>
+                <a:spcPct val="90000"/>
+              </a:lnSpc>
+              <a:buNone/>
+            </a:pPr>
+            <a:r>
+              <a:rPr lang="en-US" sz="1050" b="1" dirty="0">
+                <a:solidFill>
+                  <a:srgbClr val="093259"/>
+                </a:solidFill>
+                <a:latin typeface="Yu Gothic" pitchFamily="34" charset="0"/>
+                <a:ea typeface="Yu Gothic" pitchFamily="34" charset="-122"/>
+                <a:cs typeface="Yu Gothic" pitchFamily="34" charset="-120"/>
+              </a:rPr>
+              <a:t>第2報（4階西）</a:t>
+            </a:r>
+            <a:endParaRPr lang="en-US" sz="1050" dirty="0"/>
+          </a:p>
+          <a:p>
+            <a:pPr indent="0" marL="0">
+              <a:lnSpc>
+                <a:spcPct val="90000"/>
+              </a:lnSpc>
+              <a:buNone/>
+            </a:pPr>
+            <a:r>
+              <a:rPr lang="en-US" sz="1050" b="1" dirty="0">
+                <a:solidFill>
+                  <a:srgbClr val="1B2733"/>
+                </a:solidFill>
+                <a:latin typeface="Yu Gothic" pitchFamily="34" charset="0"/>
+                <a:ea typeface="Yu Gothic" pitchFamily="34" charset="-122"/>
+                <a:cs typeface="Yu Gothic" pitchFamily="34" charset="-120"/>
+              </a:rPr>
+              <a:t>2区画同時発報。非火災報の可能性が下がる。通報判断を切り替える。</a:t>
+            </a:r>
+            <a:endParaRPr lang="en-US" sz="1050" dirty="0"/>
+          </a:p>
+          <a:p>
+            <a:pPr indent="0" marL="0">
+              <a:lnSpc>
+                <a:spcPct val="90000"/>
+              </a:lnSpc>
+              <a:buNone/>
+            </a:pPr>
+            <a:r>
+              <a:rPr lang="en-US" sz="800" i="1" dirty="0">
+                <a:solidFill>
+                  <a:srgbClr val="5F7183"/>
+                </a:solidFill>
+                <a:latin typeface="Calibri" pitchFamily="34" charset="0"/>
+                <a:ea typeface="Calibri" pitchFamily="34" charset="-122"/>
+                <a:cs typeface="Calibri" pitchFamily="34" charset="-120"/>
+              </a:rPr>
+              <a:t>Two zones at once. A false alarm is less likely. Change your call decision.</a:t>
+            </a:r>
+            <a:endParaRPr lang="en-US" sz="1050" dirty="0"/>
+          </a:p>
+        </p:txBody>
+      </p:sp>
+      <p:sp>
+        <p:nvSpPr>
+          <p:cNvPr id="15" name="Shape 12"/>
+          <p:cNvSpPr/>
+          <p:nvPr/>
+        </p:nvSpPr>
+        <p:spPr>
+          <a:xfrm>
+            <a:off x="640080" y="4212336"/>
+            <a:ext cx="5327752" cy="1091184"/>
+          </a:xfrm>
+          <a:prstGeom prst="roundRect">
+            <a:avLst>
+              <a:gd name="adj" fmla="val 3352"/>
+            </a:avLst>
+          </a:prstGeom>
+          <a:solidFill>
+            <a:srgbClr val="E4F4F0"/>
+          </a:solidFill>
+          <a:ln/>
+        </p:spPr>
+      </p:sp>
+      <p:sp>
+        <p:nvSpPr>
+          <p:cNvPr id="16" name="Text 13"/>
+          <p:cNvSpPr/>
+          <p:nvPr/>
+        </p:nvSpPr>
+        <p:spPr>
+          <a:xfrm>
+            <a:off x="877824" y="4303776"/>
+            <a:ext cx="4852264" cy="908304"/>
+          </a:xfrm>
+          <a:prstGeom prst="rect">
+            <a:avLst/>
+          </a:prstGeom>
+          <a:noFill/>
+          <a:ln/>
+        </p:spPr>
+        <p:txBody>
+          <a:bodyPr wrap="square" lIns="0" tIns="0" rIns="0" bIns="0" rtlCol="0" anchor="t"/>
+          <a:lstStyle/>
+          <a:p>
+            <a:pPr indent="0" marL="0">
+              <a:lnSpc>
+                <a:spcPct val="90000"/>
+              </a:lnSpc>
+              <a:buNone/>
+            </a:pPr>
+            <a:r>
+              <a:rPr lang="en-US" sz="1050" b="1" dirty="0">
+                <a:solidFill>
+                  <a:srgbClr val="0D8A76"/>
+                </a:solidFill>
+                <a:latin typeface="Yu Gothic" pitchFamily="34" charset="0"/>
+                <a:ea typeface="Yu Gothic" pitchFamily="34" charset="-122"/>
+                <a:cs typeface="Yu Gothic" pitchFamily="34" charset="-120"/>
+              </a:rPr>
+              <a:t>ログと画像</a:t>
+            </a:r>
+            <a:endParaRPr lang="en-US" sz="1050" dirty="0"/>
+          </a:p>
+          <a:p>
+            <a:pPr indent="0" marL="0">
+              <a:lnSpc>
+                <a:spcPct val="90000"/>
+              </a:lnSpc>
+              <a:buNone/>
+            </a:pPr>
+            <a:r>
+              <a:rPr lang="en-US" sz="1050" b="1" dirty="0">
+                <a:solidFill>
+                  <a:srgbClr val="1B2733"/>
+                </a:solidFill>
+                <a:latin typeface="Yu Gothic" pitchFamily="34" charset="0"/>
+                <a:ea typeface="Yu Gothic" pitchFamily="34" charset="-122"/>
+                <a:cs typeface="Yu Gothic" pitchFamily="34" charset="-120"/>
+              </a:rPr>
+              <a:t>退職者カードの解錠記録は保全対象。上書き前に依頼する。</a:t>
+            </a:r>
+            <a:endParaRPr lang="en-US" sz="1050" dirty="0"/>
+          </a:p>
+          <a:p>
+            <a:pPr indent="0" marL="0">
+              <a:lnSpc>
+                <a:spcPct val="90000"/>
+              </a:lnSpc>
+              <a:buNone/>
+            </a:pPr>
+            <a:r>
+              <a:rPr lang="en-US" sz="800" i="1" dirty="0">
+                <a:solidFill>
+                  <a:srgbClr val="5F7183"/>
+                </a:solidFill>
+                <a:latin typeface="Calibri" pitchFamily="34" charset="0"/>
+                <a:ea typeface="Calibri" pitchFamily="34" charset="-122"/>
+                <a:cs typeface="Calibri" pitchFamily="34" charset="-120"/>
+              </a:rPr>
+              <a:t>The leaver-card unlock must be preserved. Request it before it is overwritten.</a:t>
+            </a:r>
+            <a:endParaRPr lang="en-US" sz="1050" dirty="0"/>
+          </a:p>
+        </p:txBody>
+      </p:sp>
+      <p:sp>
+        <p:nvSpPr>
+          <p:cNvPr id="17" name="Shape 14"/>
+          <p:cNvSpPr/>
+          <p:nvPr/>
+        </p:nvSpPr>
+        <p:spPr>
+          <a:xfrm>
+            <a:off x="6223864" y="4212336"/>
+            <a:ext cx="5327752" cy="1091184"/>
+          </a:xfrm>
+          <a:prstGeom prst="roundRect">
+            <a:avLst>
+              <a:gd name="adj" fmla="val 3352"/>
+            </a:avLst>
+          </a:prstGeom>
+          <a:solidFill>
+            <a:srgbClr val="EFF4F8"/>
+          </a:solidFill>
+          <a:ln/>
+        </p:spPr>
+      </p:sp>
+      <p:sp>
+        <p:nvSpPr>
+          <p:cNvPr id="18" name="Text 15"/>
+          <p:cNvSpPr/>
+          <p:nvPr/>
+        </p:nvSpPr>
+        <p:spPr>
+          <a:xfrm>
+            <a:off x="6461608" y="4303776"/>
+            <a:ext cx="4852264" cy="908304"/>
+          </a:xfrm>
+          <a:prstGeom prst="rect">
+            <a:avLst/>
+          </a:prstGeom>
+          <a:noFill/>
+          <a:ln/>
+        </p:spPr>
+        <p:txBody>
+          <a:bodyPr wrap="square" lIns="0" tIns="0" rIns="0" bIns="0" rtlCol="0" anchor="t"/>
+          <a:lstStyle/>
+          <a:p>
+            <a:pPr indent="0" marL="0">
+              <a:lnSpc>
+                <a:spcPct val="90000"/>
+              </a:lnSpc>
+              <a:buNone/>
+            </a:pPr>
+            <a:r>
+              <a:rPr lang="en-US" sz="1050" b="1" dirty="0">
+                <a:solidFill>
+                  <a:srgbClr val="093259"/>
+                </a:solidFill>
+                <a:latin typeface="Yu Gothic" pitchFamily="34" charset="0"/>
+                <a:ea typeface="Yu Gothic" pitchFamily="34" charset="-122"/>
+                <a:cs typeface="Yu Gothic" pitchFamily="34" charset="-120"/>
+              </a:rPr>
+              <a:t>管理権者不在</a:t>
+            </a:r>
+            <a:endParaRPr lang="en-US" sz="1050" dirty="0"/>
+          </a:p>
+          <a:p>
+            <a:pPr indent="0" marL="0">
+              <a:lnSpc>
+                <a:spcPct val="90000"/>
+              </a:lnSpc>
+              <a:buNone/>
+            </a:pPr>
+            <a:r>
+              <a:rPr lang="en-US" sz="1050" b="1" dirty="0">
+                <a:solidFill>
+                  <a:srgbClr val="1B2733"/>
+                </a:solidFill>
+                <a:latin typeface="Yu Gothic" pitchFamily="34" charset="0"/>
+                <a:ea typeface="Yu Gothic" pitchFamily="34" charset="-122"/>
+                <a:cs typeface="Yu Gothic" pitchFamily="34" charset="-120"/>
+              </a:rPr>
+              <a:t>緊急連絡体制の次順位者へ。不在を理由に何もしないのが最も悪い。</a:t>
+            </a:r>
+            <a:endParaRPr lang="en-US" sz="1050" dirty="0"/>
+          </a:p>
+          <a:p>
+            <a:pPr indent="0" marL="0">
+              <a:lnSpc>
+                <a:spcPct val="90000"/>
+              </a:lnSpc>
+              <a:buNone/>
+            </a:pPr>
+            <a:r>
+              <a:rPr lang="en-US" sz="800" i="1" dirty="0">
+                <a:solidFill>
+                  <a:srgbClr val="5F7183"/>
+                </a:solidFill>
+                <a:latin typeface="Calibri" pitchFamily="34" charset="0"/>
+                <a:ea typeface="Calibri" pitchFamily="34" charset="-122"/>
+                <a:cs typeface="Calibri" pitchFamily="34" charset="-120"/>
+              </a:rPr>
+              <a:t>Go to the next contact. Doing nothing because they are away is the worst outcome.</a:t>
+            </a:r>
+            <a:endParaRPr lang="en-US" sz="1050" dirty="0"/>
+          </a:p>
+        </p:txBody>
+      </p:sp>
+      <p:sp>
+        <p:nvSpPr>
+          <p:cNvPr id="19" name="Shape 16"/>
+          <p:cNvSpPr/>
+          <p:nvPr/>
+        </p:nvSpPr>
+        <p:spPr>
+          <a:xfrm>
+            <a:off x="640080" y="5358384"/>
+            <a:ext cx="10911535" cy="493776"/>
+          </a:xfrm>
+          <a:prstGeom prst="roundRect">
+            <a:avLst>
+              <a:gd name="adj" fmla="val 7407"/>
             </a:avLst>
           </a:prstGeom>
           <a:solidFill>
@@ -11013,14 +13649,14 @@
       </p:sp>
       <p:sp>
         <p:nvSpPr>
-          <p:cNvPr id="7" name="Text 4"/>
-          <p:cNvSpPr/>
-          <p:nvPr/>
-        </p:nvSpPr>
-        <p:spPr>
-          <a:xfrm>
-            <a:off x="950976" y="1316736"/>
-            <a:ext cx="10289743" cy="868680"/>
+          <p:cNvPr id="20" name="Text 17"/>
+          <p:cNvSpPr/>
+          <p:nvPr/>
+        </p:nvSpPr>
+        <p:spPr>
+          <a:xfrm>
+            <a:off x="877824" y="5404104"/>
+            <a:ext cx="10436047" cy="402336"/>
           </a:xfrm>
           <a:prstGeom prst="rect">
             <a:avLst/>
@@ -11029,12 +13665,12 @@
           <a:ln/>
         </p:spPr>
         <p:txBody>
-          <a:bodyPr wrap="square" lIns="0" tIns="0" rIns="0" bIns="0" rtlCol="0" anchor="t"/>
-          <a:lstStyle/>
-          <a:p>
-            <a:pPr indent="0" marL="0">
-              <a:lnSpc>
-                <a:spcPct val="92000"/>
+          <a:bodyPr wrap="square" lIns="0" tIns="0" rIns="0" bIns="0" rtlCol="0" anchor="ctr"/>
+          <a:lstStyle/>
+          <a:p>
+            <a:pPr indent="0" marL="0">
+              <a:lnSpc>
+                <a:spcPct val="86000"/>
               </a:lnSpc>
               <a:buNone/>
             </a:pPr>
@@ -11047,824 +13683,52 @@
                 <a:ea typeface="Yu Gothic" pitchFamily="34" charset="-122"/>
                 <a:cs typeface="Yu Gothic" pitchFamily="34" charset="-120"/>
               </a:rPr>
-              <a:t>シナリオ　</a:t>
-            </a:r>
-            <a:pPr indent="0" marL="0">
-              <a:lnSpc>
-                <a:spcPct val="92000"/>
-              </a:lnSpc>
-              <a:buNone/>
-            </a:pPr>
-            <a:r>
-              <a:rPr lang="en-US" sz="800" dirty="0">
-                <a:solidFill>
-                  <a:srgbClr val="12B198"/>
-                </a:solidFill>
-                <a:latin typeface="Calibri" pitchFamily="34" charset="0"/>
-                <a:ea typeface="Calibri" pitchFamily="34" charset="-122"/>
-                <a:cs typeface="Calibri" pitchFamily="34" charset="-120"/>
-              </a:rPr>
-              <a:t>SCENARIO</a:t>
+              <a:t>割れる論点　</a:t>
+            </a:r>
+            <a:pPr indent="0" marL="0">
+              <a:lnSpc>
+                <a:spcPct val="86000"/>
+              </a:lnSpc>
+              <a:buNone/>
+            </a:pPr>
+            <a:r>
+              <a:rPr lang="en-US" sz="1100" b="1" dirty="0">
+                <a:solidFill>
+                  <a:srgbClr val="FFFFFF"/>
+                </a:solidFill>
+                <a:latin typeface="Yu Gothic" pitchFamily="34" charset="0"/>
+                <a:ea typeface="Yu Gothic" pitchFamily="34" charset="-122"/>
+                <a:cs typeface="Yu Gothic" pitchFamily="34" charset="-120"/>
+              </a:rPr>
+              <a:t>何を後回しにするか。不正解錠の追跡は後回しになる。捨てる判断とその根拠を言えるか。</a:t>
             </a:r>
             <a:endParaRPr lang="en-US" sz="950" dirty="0"/>
           </a:p>
           <a:p>
             <a:pPr indent="0" marL="0">
               <a:lnSpc>
-                <a:spcPct val="92000"/>
-              </a:lnSpc>
-              <a:buNone/>
-            </a:pPr>
-            <a:r>
-              <a:rPr lang="en-US" sz="1150" b="1" dirty="0">
-                <a:solidFill>
-                  <a:srgbClr val="FFFFFF"/>
-                </a:solidFill>
-                <a:latin typeface="Yu Gothic" pitchFamily="34" charset="0"/>
-                <a:ea typeface="Yu Gothic" pitchFamily="34" charset="-122"/>
-                <a:cs typeface="Yu Gothic" pitchFamily="34" charset="-120"/>
-              </a:rPr>
-              <a:t>21時、クライアント企業の部長が防災センターに来る。「うちの部員が備品を持ち出した疑いがある。今日の入退室ログとエレベーターホールのカメラ画像を、いま見せてほしい」と述べる。相手はクライアント側の管理職で、日頃から警備に協力的である。上長は不在。</a:t>
+                <a:spcPct val="86000"/>
+              </a:lnSpc>
+              <a:buNone/>
+            </a:pPr>
+            <a:r>
+              <a:rPr lang="en-US" sz="800" i="1" dirty="0">
+                <a:solidFill>
+                  <a:srgbClr val="9FD8CD"/>
+                </a:solidFill>
+                <a:latin typeface="Calibri" pitchFamily="34" charset="0"/>
+                <a:ea typeface="Calibri" pitchFamily="34" charset="-122"/>
+                <a:cs typeface="Calibri" pitchFamily="34" charset="-120"/>
+              </a:rPr>
+              <a:t>What waits? Pursuing the unauthorised entry does. Can they state what they dropped, and why?</a:t>
             </a:r>
             <a:endParaRPr lang="en-US" sz="950" dirty="0"/>
           </a:p>
-          <a:p>
-            <a:pPr indent="0" marL="0">
-              <a:lnSpc>
-                <a:spcPct val="92000"/>
-              </a:lnSpc>
-              <a:buNone/>
-            </a:pPr>
-            <a:r>
-              <a:rPr lang="en-US" sz="800" i="1" dirty="0">
-                <a:solidFill>
-                  <a:srgbClr val="9FD8CD"/>
-                </a:solidFill>
-                <a:latin typeface="Calibri" pitchFamily="34" charset="0"/>
-                <a:ea typeface="Calibri" pitchFamily="34" charset="-122"/>
-                <a:cs typeface="Calibri" pitchFamily="34" charset="-120"/>
-              </a:rPr>
-              <a:t>21:00. A department head from the client company comes to the security office. "One of my staff may have taken equipment. I want to see today's access log and the lift-lobby footage now." They are a client manager who has always been cooperative. Your supervisor is away.</a:t>
-            </a:r>
-            <a:endParaRPr lang="en-US" sz="950" dirty="0"/>
-          </a:p>
-        </p:txBody>
-      </p:sp>
-      <p:sp>
-        <p:nvSpPr>
-          <p:cNvPr id="8" name="Text 5"/>
-          <p:cNvSpPr/>
-          <p:nvPr/>
-        </p:nvSpPr>
-        <p:spPr>
-          <a:xfrm>
-            <a:off x="640080" y="2459736"/>
-            <a:ext cx="10911535" cy="566928"/>
-          </a:xfrm>
-          <a:prstGeom prst="rect">
-            <a:avLst/>
-          </a:prstGeom>
-          <a:noFill/>
-          <a:ln/>
-        </p:spPr>
-        <p:txBody>
-          <a:bodyPr wrap="square" lIns="0" tIns="0" rIns="0" bIns="0" rtlCol="0" anchor="t"/>
-          <a:lstStyle/>
-          <a:p>
-            <a:pPr indent="0" marL="0">
-              <a:lnSpc>
-                <a:spcPct val="90000"/>
-              </a:lnSpc>
-              <a:buNone/>
-            </a:pPr>
-            <a:r>
-              <a:rPr lang="en-US" sz="1000" b="1" dirty="0">
-                <a:solidFill>
-                  <a:srgbClr val="0D8A76"/>
-                </a:solidFill>
-                <a:latin typeface="Yu Gothic" pitchFamily="34" charset="0"/>
-                <a:ea typeface="Yu Gothic" pitchFamily="34" charset="-122"/>
-                <a:cs typeface="Yu Gothic" pitchFamily="34" charset="-120"/>
-              </a:rPr>
-              <a:t>問い　</a:t>
-            </a:r>
-            <a:pPr indent="0" marL="0">
-              <a:lnSpc>
-                <a:spcPct val="90000"/>
-              </a:lnSpc>
-              <a:buNone/>
-            </a:pPr>
-            <a:r>
-              <a:rPr lang="en-US" sz="1250" b="1" dirty="0">
-                <a:solidFill>
-                  <a:srgbClr val="093259"/>
-                </a:solidFill>
-                <a:latin typeface="Yu Gothic" pitchFamily="34" charset="0"/>
-                <a:ea typeface="Yu Gothic" pitchFamily="34" charset="-122"/>
-                <a:cs typeface="Yu Gothic" pitchFamily="34" charset="-120"/>
-              </a:rPr>
-              <a:t>あなたなら次の60秒、何をどう動きますか。</a:t>
-            </a:r>
-            <a:endParaRPr lang="en-US" sz="1000" dirty="0"/>
-          </a:p>
-          <a:p>
-            <a:pPr indent="0" marL="0">
-              <a:lnSpc>
-                <a:spcPct val="90000"/>
-              </a:lnSpc>
-              <a:buNone/>
-            </a:pPr>
-            <a:r>
-              <a:rPr lang="en-US" sz="850" i="1" dirty="0">
-                <a:solidFill>
-                  <a:srgbClr val="5F7183"/>
-                </a:solidFill>
-                <a:latin typeface="Calibri" pitchFamily="34" charset="0"/>
-                <a:ea typeface="Calibri" pitchFamily="34" charset="-122"/>
-                <a:cs typeface="Calibri" pitchFamily="34" charset="-120"/>
-              </a:rPr>
-              <a:t>What do you do in the next sixty seconds?</a:t>
-            </a:r>
-            <a:endParaRPr lang="en-US" sz="1000" dirty="0"/>
-          </a:p>
-        </p:txBody>
-      </p:sp>
-      <p:sp>
-        <p:nvSpPr>
-          <p:cNvPr id="9" name="Shape 6"/>
-          <p:cNvSpPr/>
-          <p:nvPr/>
-        </p:nvSpPr>
-        <p:spPr>
-          <a:xfrm>
-            <a:off x="640080" y="3081528"/>
-            <a:ext cx="5327752" cy="1074420"/>
-          </a:xfrm>
-          <a:prstGeom prst="roundRect">
-            <a:avLst>
-              <a:gd name="adj" fmla="val 3404"/>
-            </a:avLst>
-          </a:prstGeom>
-          <a:solidFill>
-            <a:srgbClr val="EFF4F8"/>
-          </a:solidFill>
-          <a:ln/>
-        </p:spPr>
-      </p:sp>
-      <p:sp>
-        <p:nvSpPr>
-          <p:cNvPr id="10" name="Shape 7"/>
-          <p:cNvSpPr/>
-          <p:nvPr/>
-        </p:nvSpPr>
-        <p:spPr>
-          <a:xfrm>
-            <a:off x="804672" y="3472434"/>
-            <a:ext cx="292608" cy="292608"/>
-          </a:xfrm>
-          <a:prstGeom prst="ellipse">
-            <a:avLst/>
-          </a:prstGeom>
-          <a:solidFill>
-            <a:srgbClr val="12B198"/>
-          </a:solidFill>
-          <a:ln/>
-        </p:spPr>
-      </p:sp>
-      <p:sp>
-        <p:nvSpPr>
-          <p:cNvPr id="11" name="Text 8"/>
-          <p:cNvSpPr/>
-          <p:nvPr/>
-        </p:nvSpPr>
-        <p:spPr>
-          <a:xfrm>
-            <a:off x="804672" y="3472434"/>
-            <a:ext cx="292608" cy="292608"/>
-          </a:xfrm>
-          <a:prstGeom prst="rect">
-            <a:avLst/>
-          </a:prstGeom>
-          <a:noFill/>
-          <a:ln/>
-        </p:spPr>
-        <p:txBody>
-          <a:bodyPr wrap="square" lIns="0" tIns="0" rIns="0" bIns="0" rtlCol="0" anchor="ctr"/>
-          <a:lstStyle/>
-          <a:p>
-            <a:pPr algn="ctr" indent="0" marL="0">
-              <a:buNone/>
-            </a:pPr>
-            <a:r>
-              <a:rPr lang="en-US" sz="1100" b="1" dirty="0">
-                <a:solidFill>
-                  <a:srgbClr val="FFFFFF"/>
-                </a:solidFill>
-                <a:latin typeface="Calibri" pitchFamily="34" charset="0"/>
-                <a:ea typeface="Calibri" pitchFamily="34" charset="-122"/>
-                <a:cs typeface="Calibri" pitchFamily="34" charset="-120"/>
-              </a:rPr>
-              <a:t>1</a:t>
-            </a:r>
-            <a:endParaRPr lang="en-US" sz="1100" dirty="0"/>
-          </a:p>
-        </p:txBody>
-      </p:sp>
-      <p:sp>
-        <p:nvSpPr>
-          <p:cNvPr id="12" name="Text 9"/>
-          <p:cNvSpPr/>
-          <p:nvPr/>
-        </p:nvSpPr>
-        <p:spPr>
-          <a:xfrm>
-            <a:off x="1188720" y="3136392"/>
-            <a:ext cx="4596232" cy="964692"/>
-          </a:xfrm>
-          <a:prstGeom prst="rect">
-            <a:avLst/>
-          </a:prstGeom>
-          <a:noFill/>
-          <a:ln/>
-        </p:spPr>
-        <p:txBody>
-          <a:bodyPr wrap="square" lIns="0" tIns="0" rIns="0" bIns="0" rtlCol="0" anchor="ctr"/>
-          <a:lstStyle/>
-          <a:p>
-            <a:pPr indent="0" marL="0">
-              <a:lnSpc>
-                <a:spcPct val="88000"/>
-              </a:lnSpc>
-              <a:buNone/>
-            </a:pPr>
-            <a:r>
-              <a:rPr lang="en-US" sz="1050" b="1" dirty="0">
-                <a:solidFill>
-                  <a:srgbClr val="1B2733"/>
-                </a:solidFill>
-                <a:latin typeface="Yu Gothic" pitchFamily="34" charset="0"/>
-                <a:ea typeface="Yu Gothic" pitchFamily="34" charset="-122"/>
-                <a:cs typeface="Yu Gothic" pitchFamily="34" charset="-120"/>
-              </a:rPr>
-              <a:t>クライアントの管理職であることは、開示の根拠になるか。</a:t>
-            </a:r>
-            <a:endParaRPr lang="en-US" sz="1050" dirty="0"/>
-          </a:p>
-          <a:p>
-            <a:pPr indent="0" marL="0">
-              <a:lnSpc>
-                <a:spcPct val="88000"/>
-              </a:lnSpc>
-              <a:buNone/>
-            </a:pPr>
-            <a:r>
-              <a:rPr lang="en-US" sz="800" i="1" dirty="0">
-                <a:solidFill>
-                  <a:srgbClr val="5F7183"/>
-                </a:solidFill>
-                <a:latin typeface="Calibri" pitchFamily="34" charset="0"/>
-                <a:ea typeface="Calibri" pitchFamily="34" charset="-122"/>
-                <a:cs typeface="Calibri" pitchFamily="34" charset="-120"/>
-              </a:rPr>
-              <a:t>Does being a client manager justify disclosure?</a:t>
-            </a:r>
-            <a:endParaRPr lang="en-US" sz="1050" dirty="0"/>
-          </a:p>
-        </p:txBody>
-      </p:sp>
-      <p:sp>
-        <p:nvSpPr>
-          <p:cNvPr id="13" name="Shape 10"/>
-          <p:cNvSpPr/>
-          <p:nvPr/>
-        </p:nvSpPr>
-        <p:spPr>
-          <a:xfrm>
-            <a:off x="6223864" y="3081528"/>
-            <a:ext cx="5327752" cy="1074420"/>
-          </a:xfrm>
-          <a:prstGeom prst="roundRect">
-            <a:avLst>
-              <a:gd name="adj" fmla="val 3404"/>
-            </a:avLst>
-          </a:prstGeom>
-          <a:solidFill>
-            <a:srgbClr val="EFF4F8"/>
-          </a:solidFill>
-          <a:ln/>
-        </p:spPr>
-      </p:sp>
-      <p:sp>
-        <p:nvSpPr>
-          <p:cNvPr id="14" name="Shape 11"/>
-          <p:cNvSpPr/>
-          <p:nvPr/>
-        </p:nvSpPr>
-        <p:spPr>
-          <a:xfrm>
-            <a:off x="6388456" y="3472434"/>
-            <a:ext cx="292608" cy="292608"/>
-          </a:xfrm>
-          <a:prstGeom prst="ellipse">
-            <a:avLst/>
-          </a:prstGeom>
-          <a:solidFill>
-            <a:srgbClr val="12B198"/>
-          </a:solidFill>
-          <a:ln/>
-        </p:spPr>
-      </p:sp>
-      <p:sp>
-        <p:nvSpPr>
-          <p:cNvPr id="15" name="Text 12"/>
-          <p:cNvSpPr/>
-          <p:nvPr/>
-        </p:nvSpPr>
-        <p:spPr>
-          <a:xfrm>
-            <a:off x="6388456" y="3472434"/>
-            <a:ext cx="292608" cy="292608"/>
-          </a:xfrm>
-          <a:prstGeom prst="rect">
-            <a:avLst/>
-          </a:prstGeom>
-          <a:noFill/>
-          <a:ln/>
-        </p:spPr>
-        <p:txBody>
-          <a:bodyPr wrap="square" lIns="0" tIns="0" rIns="0" bIns="0" rtlCol="0" anchor="ctr"/>
-          <a:lstStyle/>
-          <a:p>
-            <a:pPr algn="ctr" indent="0" marL="0">
-              <a:buNone/>
-            </a:pPr>
-            <a:r>
-              <a:rPr lang="en-US" sz="1100" b="1" dirty="0">
-                <a:solidFill>
-                  <a:srgbClr val="FFFFFF"/>
-                </a:solidFill>
-                <a:latin typeface="Calibri" pitchFamily="34" charset="0"/>
-                <a:ea typeface="Calibri" pitchFamily="34" charset="-122"/>
-                <a:cs typeface="Calibri" pitchFamily="34" charset="-120"/>
-              </a:rPr>
-              <a:t>2</a:t>
-            </a:r>
-            <a:endParaRPr lang="en-US" sz="1100" dirty="0"/>
-          </a:p>
-        </p:txBody>
-      </p:sp>
-      <p:sp>
-        <p:nvSpPr>
-          <p:cNvPr id="16" name="Text 13"/>
-          <p:cNvSpPr/>
-          <p:nvPr/>
-        </p:nvSpPr>
-        <p:spPr>
-          <a:xfrm>
-            <a:off x="6772504" y="3136392"/>
-            <a:ext cx="4596232" cy="964692"/>
-          </a:xfrm>
-          <a:prstGeom prst="rect">
-            <a:avLst/>
-          </a:prstGeom>
-          <a:noFill/>
-          <a:ln/>
-        </p:spPr>
-        <p:txBody>
-          <a:bodyPr wrap="square" lIns="0" tIns="0" rIns="0" bIns="0" rtlCol="0" anchor="ctr"/>
-          <a:lstStyle/>
-          <a:p>
-            <a:pPr indent="0" marL="0">
-              <a:lnSpc>
-                <a:spcPct val="88000"/>
-              </a:lnSpc>
-              <a:buNone/>
-            </a:pPr>
-            <a:r>
-              <a:rPr lang="en-US" sz="1050" b="1" dirty="0">
-                <a:solidFill>
-                  <a:srgbClr val="1B2733"/>
-                </a:solidFill>
-                <a:latin typeface="Yu Gothic" pitchFamily="34" charset="0"/>
-                <a:ea typeface="Yu Gothic" pitchFamily="34" charset="-122"/>
-                <a:cs typeface="Yu Gothic" pitchFamily="34" charset="-120"/>
-              </a:rPr>
-              <a:t>警備員に開示の可否を判断する権限はあるか。</a:t>
-            </a:r>
-            <a:endParaRPr lang="en-US" sz="1050" dirty="0"/>
-          </a:p>
-          <a:p>
-            <a:pPr indent="0" marL="0">
-              <a:lnSpc>
-                <a:spcPct val="88000"/>
-              </a:lnSpc>
-              <a:buNone/>
-            </a:pPr>
-            <a:r>
-              <a:rPr lang="en-US" sz="800" i="1" dirty="0">
-                <a:solidFill>
-                  <a:srgbClr val="5F7183"/>
-                </a:solidFill>
-                <a:latin typeface="Calibri" pitchFamily="34" charset="0"/>
-                <a:ea typeface="Calibri" pitchFamily="34" charset="-122"/>
-                <a:cs typeface="Calibri" pitchFamily="34" charset="-120"/>
-              </a:rPr>
-              <a:t>Does a guard have authority to decide on disclosure?</a:t>
-            </a:r>
-            <a:endParaRPr lang="en-US" sz="1050" dirty="0"/>
-          </a:p>
-        </p:txBody>
-      </p:sp>
-      <p:sp>
-        <p:nvSpPr>
-          <p:cNvPr id="17" name="Shape 14"/>
-          <p:cNvSpPr/>
-          <p:nvPr/>
-        </p:nvSpPr>
-        <p:spPr>
-          <a:xfrm>
-            <a:off x="640080" y="4265676"/>
-            <a:ext cx="5327752" cy="1074420"/>
-          </a:xfrm>
-          <a:prstGeom prst="roundRect">
-            <a:avLst>
-              <a:gd name="adj" fmla="val 3404"/>
-            </a:avLst>
-          </a:prstGeom>
-          <a:solidFill>
-            <a:srgbClr val="EFF4F8"/>
-          </a:solidFill>
-          <a:ln/>
-        </p:spPr>
-      </p:sp>
-      <p:sp>
-        <p:nvSpPr>
-          <p:cNvPr id="18" name="Shape 15"/>
-          <p:cNvSpPr/>
-          <p:nvPr/>
-        </p:nvSpPr>
-        <p:spPr>
-          <a:xfrm>
-            <a:off x="804672" y="4656582"/>
-            <a:ext cx="292608" cy="292608"/>
-          </a:xfrm>
-          <a:prstGeom prst="ellipse">
-            <a:avLst/>
-          </a:prstGeom>
-          <a:solidFill>
-            <a:srgbClr val="12B198"/>
-          </a:solidFill>
-          <a:ln/>
-        </p:spPr>
-      </p:sp>
-      <p:sp>
-        <p:nvSpPr>
-          <p:cNvPr id="19" name="Text 16"/>
-          <p:cNvSpPr/>
-          <p:nvPr/>
-        </p:nvSpPr>
-        <p:spPr>
-          <a:xfrm>
-            <a:off x="804672" y="4656582"/>
-            <a:ext cx="292608" cy="292608"/>
-          </a:xfrm>
-          <a:prstGeom prst="rect">
-            <a:avLst/>
-          </a:prstGeom>
-          <a:noFill/>
-          <a:ln/>
-        </p:spPr>
-        <p:txBody>
-          <a:bodyPr wrap="square" lIns="0" tIns="0" rIns="0" bIns="0" rtlCol="0" anchor="ctr"/>
-          <a:lstStyle/>
-          <a:p>
-            <a:pPr algn="ctr" indent="0" marL="0">
-              <a:buNone/>
-            </a:pPr>
-            <a:r>
-              <a:rPr lang="en-US" sz="1100" b="1" dirty="0">
-                <a:solidFill>
-                  <a:srgbClr val="FFFFFF"/>
-                </a:solidFill>
-                <a:latin typeface="Calibri" pitchFamily="34" charset="0"/>
-                <a:ea typeface="Calibri" pitchFamily="34" charset="-122"/>
-                <a:cs typeface="Calibri" pitchFamily="34" charset="-120"/>
-              </a:rPr>
-              <a:t>3</a:t>
-            </a:r>
-            <a:endParaRPr lang="en-US" sz="1100" dirty="0"/>
-          </a:p>
-        </p:txBody>
-      </p:sp>
-      <p:sp>
-        <p:nvSpPr>
-          <p:cNvPr id="20" name="Text 17"/>
-          <p:cNvSpPr/>
-          <p:nvPr/>
-        </p:nvSpPr>
-        <p:spPr>
-          <a:xfrm>
-            <a:off x="1188720" y="4320540"/>
-            <a:ext cx="4596232" cy="964692"/>
-          </a:xfrm>
-          <a:prstGeom prst="rect">
-            <a:avLst/>
-          </a:prstGeom>
-          <a:noFill/>
-          <a:ln/>
-        </p:spPr>
-        <p:txBody>
-          <a:bodyPr wrap="square" lIns="0" tIns="0" rIns="0" bIns="0" rtlCol="0" anchor="ctr"/>
-          <a:lstStyle/>
-          <a:p>
-            <a:pPr indent="0" marL="0">
-              <a:lnSpc>
-                <a:spcPct val="88000"/>
-              </a:lnSpc>
-              <a:buNone/>
-            </a:pPr>
-            <a:r>
-              <a:rPr lang="en-US" sz="1050" b="1" dirty="0">
-                <a:solidFill>
-                  <a:srgbClr val="1B2733"/>
-                </a:solidFill>
-                <a:latin typeface="Yu Gothic" pitchFamily="34" charset="0"/>
-                <a:ea typeface="Yu Gothic" pitchFamily="34" charset="-122"/>
-                <a:cs typeface="Yu Gothic" pitchFamily="34" charset="-120"/>
-              </a:rPr>
-              <a:t>断る場合、何と言うか。関係を壊さずに断れるか。</a:t>
-            </a:r>
-            <a:endParaRPr lang="en-US" sz="1050" dirty="0"/>
-          </a:p>
-          <a:p>
-            <a:pPr indent="0" marL="0">
-              <a:lnSpc>
-                <a:spcPct val="88000"/>
-              </a:lnSpc>
-              <a:buNone/>
-            </a:pPr>
-            <a:r>
-              <a:rPr lang="en-US" sz="800" i="1" dirty="0">
-                <a:solidFill>
-                  <a:srgbClr val="5F7183"/>
-                </a:solidFill>
-                <a:latin typeface="Calibri" pitchFamily="34" charset="0"/>
-                <a:ea typeface="Calibri" pitchFamily="34" charset="-122"/>
-                <a:cs typeface="Calibri" pitchFamily="34" charset="-120"/>
-              </a:rPr>
-              <a:t>If you decline, what do you say? Can you decline without damaging the relationship?</a:t>
-            </a:r>
-            <a:endParaRPr lang="en-US" sz="1050" dirty="0"/>
-          </a:p>
-        </p:txBody>
-      </p:sp>
-      <p:sp>
-        <p:nvSpPr>
-          <p:cNvPr id="21" name="Shape 18"/>
-          <p:cNvSpPr/>
-          <p:nvPr/>
-        </p:nvSpPr>
-        <p:spPr>
-          <a:xfrm>
-            <a:off x="6223864" y="4265676"/>
-            <a:ext cx="5327752" cy="1074420"/>
-          </a:xfrm>
-          <a:prstGeom prst="roundRect">
-            <a:avLst>
-              <a:gd name="adj" fmla="val 3404"/>
-            </a:avLst>
-          </a:prstGeom>
-          <a:solidFill>
-            <a:srgbClr val="EFF4F8"/>
-          </a:solidFill>
-          <a:ln/>
-        </p:spPr>
-      </p:sp>
-      <p:sp>
-        <p:nvSpPr>
-          <p:cNvPr id="22" name="Shape 19"/>
-          <p:cNvSpPr/>
-          <p:nvPr/>
-        </p:nvSpPr>
-        <p:spPr>
-          <a:xfrm>
-            <a:off x="6388456" y="4656582"/>
-            <a:ext cx="292608" cy="292608"/>
-          </a:xfrm>
-          <a:prstGeom prst="ellipse">
-            <a:avLst/>
-          </a:prstGeom>
-          <a:solidFill>
-            <a:srgbClr val="12B198"/>
-          </a:solidFill>
-          <a:ln/>
-        </p:spPr>
-      </p:sp>
-      <p:sp>
-        <p:nvSpPr>
-          <p:cNvPr id="23" name="Text 20"/>
-          <p:cNvSpPr/>
-          <p:nvPr/>
-        </p:nvSpPr>
-        <p:spPr>
-          <a:xfrm>
-            <a:off x="6388456" y="4656582"/>
-            <a:ext cx="292608" cy="292608"/>
-          </a:xfrm>
-          <a:prstGeom prst="rect">
-            <a:avLst/>
-          </a:prstGeom>
-          <a:noFill/>
-          <a:ln/>
-        </p:spPr>
-        <p:txBody>
-          <a:bodyPr wrap="square" lIns="0" tIns="0" rIns="0" bIns="0" rtlCol="0" anchor="ctr"/>
-          <a:lstStyle/>
-          <a:p>
-            <a:pPr algn="ctr" indent="0" marL="0">
-              <a:buNone/>
-            </a:pPr>
-            <a:r>
-              <a:rPr lang="en-US" sz="1100" b="1" dirty="0">
-                <a:solidFill>
-                  <a:srgbClr val="FFFFFF"/>
-                </a:solidFill>
-                <a:latin typeface="Calibri" pitchFamily="34" charset="0"/>
-                <a:ea typeface="Calibri" pitchFamily="34" charset="-122"/>
-                <a:cs typeface="Calibri" pitchFamily="34" charset="-120"/>
-              </a:rPr>
-              <a:t>4</a:t>
-            </a:r>
-            <a:endParaRPr lang="en-US" sz="1100" dirty="0"/>
-          </a:p>
-        </p:txBody>
-      </p:sp>
-      <p:sp>
-        <p:nvSpPr>
-          <p:cNvPr id="24" name="Text 21"/>
-          <p:cNvSpPr/>
-          <p:nvPr/>
-        </p:nvSpPr>
-        <p:spPr>
-          <a:xfrm>
-            <a:off x="6772504" y="4320540"/>
-            <a:ext cx="4596232" cy="964692"/>
-          </a:xfrm>
-          <a:prstGeom prst="rect">
-            <a:avLst/>
-          </a:prstGeom>
-          <a:noFill/>
-          <a:ln/>
-        </p:spPr>
-        <p:txBody>
-          <a:bodyPr wrap="square" lIns="0" tIns="0" rIns="0" bIns="0" rtlCol="0" anchor="ctr"/>
-          <a:lstStyle/>
-          <a:p>
-            <a:pPr indent="0" marL="0">
-              <a:lnSpc>
-                <a:spcPct val="88000"/>
-              </a:lnSpc>
-              <a:buNone/>
-            </a:pPr>
-            <a:r>
-              <a:rPr lang="en-US" sz="1050" b="1" dirty="0">
-                <a:solidFill>
-                  <a:srgbClr val="1B2733"/>
-                </a:solidFill>
-                <a:latin typeface="Yu Gothic" pitchFamily="34" charset="0"/>
-                <a:ea typeface="Yu Gothic" pitchFamily="34" charset="-122"/>
-                <a:cs typeface="Yu Gothic" pitchFamily="34" charset="-120"/>
-              </a:rPr>
-              <a:t>保全の依頼は受けてよいか。開示との違いは何か。</a:t>
-            </a:r>
-            <a:endParaRPr lang="en-US" sz="1050" dirty="0"/>
-          </a:p>
-          <a:p>
-            <a:pPr indent="0" marL="0">
-              <a:lnSpc>
-                <a:spcPct val="88000"/>
-              </a:lnSpc>
-              <a:buNone/>
-            </a:pPr>
-            <a:r>
-              <a:rPr lang="en-US" sz="800" i="1" dirty="0">
-                <a:solidFill>
-                  <a:srgbClr val="5F7183"/>
-                </a:solidFill>
-                <a:latin typeface="Calibri" pitchFamily="34" charset="0"/>
-                <a:ea typeface="Calibri" pitchFamily="34" charset="-122"/>
-                <a:cs typeface="Calibri" pitchFamily="34" charset="-120"/>
-              </a:rPr>
-              <a:t>May you accept a request to preserve? How does that differ from disclosure?</a:t>
-            </a:r>
-            <a:endParaRPr lang="en-US" sz="1050" dirty="0"/>
-          </a:p>
-        </p:txBody>
-      </p:sp>
-      <p:sp>
-        <p:nvSpPr>
-          <p:cNvPr id="25" name="Shape 22"/>
-          <p:cNvSpPr/>
-          <p:nvPr/>
-        </p:nvSpPr>
-        <p:spPr>
-          <a:xfrm>
-            <a:off x="640080" y="5394960"/>
-            <a:ext cx="10911535" cy="457200"/>
-          </a:xfrm>
-          <a:prstGeom prst="roundRect">
-            <a:avLst>
-              <a:gd name="adj" fmla="val 8000"/>
-            </a:avLst>
-          </a:prstGeom>
-          <a:solidFill>
-            <a:srgbClr val="E4F4F0"/>
-          </a:solidFill>
-          <a:ln/>
-        </p:spPr>
-      </p:sp>
-      <p:sp>
-        <p:nvSpPr>
-          <p:cNvPr id="26" name="Text 23"/>
-          <p:cNvSpPr/>
-          <p:nvPr/>
-        </p:nvSpPr>
-        <p:spPr>
-          <a:xfrm>
-            <a:off x="877824" y="5431536"/>
-            <a:ext cx="10436047" cy="384048"/>
-          </a:xfrm>
-          <a:prstGeom prst="rect">
-            <a:avLst/>
-          </a:prstGeom>
-          <a:noFill/>
-          <a:ln/>
-        </p:spPr>
-        <p:txBody>
-          <a:bodyPr wrap="square" lIns="0" tIns="0" rIns="0" bIns="0" rtlCol="0" anchor="ctr"/>
-          <a:lstStyle/>
-          <a:p>
-            <a:pPr indent="0" marL="0">
-              <a:lnSpc>
-                <a:spcPct val="86000"/>
-              </a:lnSpc>
-              <a:buNone/>
-            </a:pPr>
-            <a:r>
-              <a:rPr lang="en-US" sz="850" b="1" dirty="0">
-                <a:solidFill>
-                  <a:srgbClr val="0D8A76"/>
-                </a:solidFill>
-                <a:latin typeface="Yu Gothic" pitchFamily="34" charset="0"/>
-                <a:ea typeface="Yu Gothic" pitchFamily="34" charset="-122"/>
-                <a:cs typeface="Yu Gothic" pitchFamily="34" charset="-120"/>
-              </a:rPr>
-              <a:t>追加付与　</a:t>
-            </a:r>
-            <a:pPr indent="0" marL="0">
-              <a:lnSpc>
-                <a:spcPct val="86000"/>
-              </a:lnSpc>
-              <a:buNone/>
-            </a:pPr>
-            <a:r>
-              <a:rPr lang="en-US" sz="1050" b="1" dirty="0">
-                <a:solidFill>
-                  <a:srgbClr val="1B2733"/>
-                </a:solidFill>
-                <a:latin typeface="Yu Gothic" pitchFamily="34" charset="0"/>
-                <a:ea typeface="Yu Gothic" pitchFamily="34" charset="-122"/>
-                <a:cs typeface="Yu Gothic" pitchFamily="34" charset="-120"/>
-              </a:rPr>
-              <a:t>相手が「では、私が見るのではなく、あなたが見て教えてほしい」と述べた。</a:t>
-            </a:r>
-            <a:endParaRPr lang="en-US" sz="850" dirty="0"/>
-          </a:p>
-          <a:p>
-            <a:pPr indent="0" marL="0">
-              <a:lnSpc>
-                <a:spcPct val="86000"/>
-              </a:lnSpc>
-              <a:buNone/>
-            </a:pPr>
-            <a:r>
-              <a:rPr lang="en-US" sz="750" i="1" dirty="0">
-                <a:solidFill>
-                  <a:srgbClr val="5F7183"/>
-                </a:solidFill>
-                <a:latin typeface="Calibri" pitchFamily="34" charset="0"/>
-                <a:ea typeface="Calibri" pitchFamily="34" charset="-122"/>
-                <a:cs typeface="Calibri" pitchFamily="34" charset="-120"/>
-              </a:rPr>
-              <a:t>They say: "Then do not show me. You look, and tell me what you see."</a:t>
-            </a:r>
-            <a:endParaRPr lang="en-US" sz="850" dirty="0"/>
-          </a:p>
-        </p:txBody>
-      </p:sp>
-      <p:sp>
-        <p:nvSpPr>
-          <p:cNvPr id="27" name="Text 24"/>
+        </p:txBody>
+      </p:sp>
+      <p:sp>
+        <p:nvSpPr>
+          <p:cNvPr id="21" name="Text 18"/>
           <p:cNvSpPr/>
           <p:nvPr/>
         </p:nvSpPr>
@@ -11915,7 +13779,7 @@
                 <a:ea typeface="Yu Gothic" pitchFamily="34" charset="-122"/>
                 <a:cs typeface="Yu Gothic" pitchFamily="34" charset="-120"/>
               </a:rPr>
-              <a:t>開示の判断者、保全依頼の受付方法、記録の様式は現場ごとに異なる。Site SOPと契約による。</a:t>
+              <a:t>人員配置、通報の判断者、保全依頼の宛先は現場ごとに異なる。緊急連絡体制表による。</a:t>
             </a:r>
             <a:endParaRPr lang="en-US" sz="900" dirty="0"/>
           </a:p>
@@ -11935,7 +13799,7 @@
                 <a:ea typeface="Calibri" pitchFamily="34" charset="-122"/>
                 <a:cs typeface="Calibri" pitchFamily="34" charset="-120"/>
               </a:rPr>
-              <a:t>Who decides on disclosure, how preservation requests are accepted, and the record format differ by site.</a:t>
+              <a:t>Deployment, who calls, and who to ask for preservation differ by site.</a:t>
             </a:r>
             <a:endParaRPr lang="en-US" sz="900" dirty="0"/>
           </a:p>
@@ -11943,7 +13807,7 @@
       </p:sp>
       <p:sp>
         <p:nvSpPr>
-          <p:cNvPr id="28" name="Text 25"/>
+          <p:cNvPr id="22" name="Text 19"/>
           <p:cNvSpPr/>
           <p:nvPr/>
         </p:nvSpPr>
@@ -11988,7 +13852,7 @@
                 <a:ea typeface="Yu Gothic" pitchFamily="34" charset="-122"/>
                 <a:cs typeface="Yu Gothic" pitchFamily="34" charset="-120"/>
               </a:rPr>
-              <a:t>個人情報保護法、不正競争防止法、経済産業省「営業秘密管理指針」</a:t>
+              <a:t>消防法、警備業法、個人情報保護法</a:t>
             </a:r>
             <a:endParaRPr lang="en-US" sz="750" dirty="0"/>
           </a:p>
@@ -11996,7 +13860,7 @@
       </p:sp>
       <p:sp>
         <p:nvSpPr>
-          <p:cNvPr id="29" name="Text 26"/>
+          <p:cNvPr id="23" name="Text 20"/>
           <p:cNvSpPr/>
           <p:nvPr/>
         </p:nvSpPr>
@@ -12049,7 +13913,7 @@
       </p:sp>
       <p:sp>
         <p:nvSpPr>
-          <p:cNvPr id="30" name="Text 27"/>
+          <p:cNvPr id="24" name="Text 21"/>
           <p:cNvSpPr/>
           <p:nvPr/>
         </p:nvSpPr>
@@ -12150,8 +14014,8 @@
         </p:nvSpPr>
         <p:spPr>
           <a:xfrm>
-            <a:off x="640080" y="475488"/>
-            <a:ext cx="9805111" cy="960120"/>
+            <a:off x="640080" y="384048"/>
+            <a:ext cx="8982151" cy="768096"/>
           </a:xfrm>
           <a:prstGeom prst="rect">
             <a:avLst/>
@@ -12170,7 +14034,7 @@
               <a:buNone/>
             </a:pPr>
             <a:r>
-              <a:rPr lang="en-US" sz="2700" b="1" dirty="0">
+              <a:rPr lang="en-US" sz="2300" b="1" dirty="0">
                 <a:solidFill>
                   <a:srgbClr val="093259"/>
                 </a:solidFill>
@@ -12178,9 +14042,9 @@
                 <a:ea typeface="Yu Gothic" pitchFamily="34" charset="-122"/>
                 <a:cs typeface="Yu Gothic" pitchFamily="34" charset="-120"/>
               </a:rPr>
-              <a:t>AAR ― 振り返り（After Action Review）</a:t>
-            </a:r>
-            <a:endParaRPr lang="en-US" sz="2700" dirty="0"/>
+              <a:t>TTX 10-B　上司が入退室ログの提供を求める</a:t>
+            </a:r>
+            <a:endParaRPr lang="en-US" sz="2300" dirty="0"/>
           </a:p>
           <a:p>
             <a:pPr indent="0" marL="0">
@@ -12190,7 +14054,7 @@
               <a:buNone/>
             </a:pPr>
             <a:r>
-              <a:rPr lang="en-US" sz="1250" i="1" dirty="0">
+              <a:rPr lang="en-US" sz="1100" i="1" dirty="0">
                 <a:solidFill>
                   <a:srgbClr val="12B198"/>
                 </a:solidFill>
@@ -12198,88 +14062,287 @@
                 <a:ea typeface="Calibri" pitchFamily="34" charset="-122"/>
                 <a:cs typeface="Calibri" pitchFamily="34" charset="-120"/>
               </a:rPr>
-              <a:t>AAR — After Action Review</a:t>
-            </a:r>
-            <a:endParaRPr lang="en-US" sz="2700" dirty="0"/>
-          </a:p>
-        </p:txBody>
-      </p:sp>
-      <p:sp>
-        <p:nvSpPr>
-          <p:cNvPr id="4" name="Text 1"/>
-          <p:cNvSpPr/>
-          <p:nvPr/>
-        </p:nvSpPr>
-        <p:spPr>
-          <a:xfrm>
-            <a:off x="640080" y="1536192"/>
-            <a:ext cx="10911535" cy="566928"/>
-          </a:xfrm>
-          <a:prstGeom prst="rect">
-            <a:avLst/>
-          </a:prstGeom>
-          <a:noFill/>
-          <a:ln/>
-        </p:spPr>
-        <p:txBody>
-          <a:bodyPr wrap="square" lIns="0" tIns="0" rIns="0" bIns="0" rtlCol="0" anchor="t"/>
-          <a:lstStyle/>
-          <a:p>
-            <a:pPr algn="l" indent="0" marL="0">
-              <a:lnSpc>
-                <a:spcPct val="92000"/>
-              </a:lnSpc>
-              <a:buNone/>
-            </a:pPr>
-            <a:r>
-              <a:rPr lang="en-US" sz="1300" dirty="0">
-                <a:solidFill>
-                  <a:srgbClr val="093259"/>
-                </a:solidFill>
-                <a:latin typeface="Yu Gothic" pitchFamily="34" charset="0"/>
-                <a:ea typeface="Yu Gothic" pitchFamily="34" charset="-122"/>
-                <a:cs typeface="Yu Gothic" pitchFamily="34" charset="-120"/>
-              </a:rPr>
-              <a:t>AAR は事案や訓練の直後に行う振り返りです。原則は、犯人探しをしないことです。</a:t>
-            </a:r>
-            <a:endParaRPr lang="en-US" sz="1300" dirty="0"/>
-          </a:p>
-          <a:p>
-            <a:pPr algn="l" indent="0" marL="0">
-              <a:lnSpc>
-                <a:spcPct val="92000"/>
-              </a:lnSpc>
-              <a:buNone/>
-            </a:pPr>
-            <a:r>
-              <a:rPr lang="en-US" sz="1000" i="1" dirty="0">
-                <a:solidFill>
-                  <a:srgbClr val="5F7183"/>
-                </a:solidFill>
-                <a:latin typeface="Calibri" pitchFamily="34" charset="0"/>
-                <a:ea typeface="Calibri" pitchFamily="34" charset="-122"/>
-                <a:cs typeface="Calibri" pitchFamily="34" charset="-120"/>
-              </a:rPr>
-              <a:t>An AAR is a review held immediately after an incident or exercise. The rule is: no blame.</a:t>
-            </a:r>
-            <a:endParaRPr lang="en-US" sz="1300" dirty="0"/>
-          </a:p>
-        </p:txBody>
-      </p:sp>
-      <p:sp>
-        <p:nvSpPr>
-          <p:cNvPr id="5" name="Shape 2"/>
-          <p:cNvSpPr/>
-          <p:nvPr/>
-        </p:nvSpPr>
-        <p:spPr>
-          <a:xfrm>
-            <a:off x="640080" y="2286000"/>
-            <a:ext cx="10911535" cy="702259"/>
+              <a:t>TTX 10-B — A Manager Asks You for the Access Log</a:t>
+            </a:r>
+            <a:endParaRPr lang="en-US" sz="2300" dirty="0"/>
+          </a:p>
+        </p:txBody>
+      </p:sp>
+      <p:sp>
+        <p:nvSpPr>
+          <p:cNvPr id="4" name="Shape 1"/>
+          <p:cNvSpPr/>
+          <p:nvPr/>
+        </p:nvSpPr>
+        <p:spPr>
+          <a:xfrm>
+            <a:off x="9686239" y="438912"/>
+            <a:ext cx="932688" cy="310896"/>
           </a:xfrm>
           <a:prstGeom prst="roundRect">
             <a:avLst>
-              <a:gd name="adj" fmla="val 6510"/>
+              <a:gd name="adj" fmla="val 14706"/>
+            </a:avLst>
+          </a:prstGeom>
+          <a:solidFill>
+            <a:srgbClr val="093259"/>
+          </a:solidFill>
+          <a:ln/>
+        </p:spPr>
+      </p:sp>
+      <p:sp>
+        <p:nvSpPr>
+          <p:cNvPr id="5" name="Text 2"/>
+          <p:cNvSpPr/>
+          <p:nvPr/>
+        </p:nvSpPr>
+        <p:spPr>
+          <a:xfrm>
+            <a:off x="9686239" y="438912"/>
+            <a:ext cx="932688" cy="310896"/>
+          </a:xfrm>
+          <a:prstGeom prst="rect">
+            <a:avLst/>
+          </a:prstGeom>
+          <a:noFill/>
+          <a:ln/>
+        </p:spPr>
+        <p:txBody>
+          <a:bodyPr wrap="square" lIns="0" tIns="0" rIns="0" bIns="0" rtlCol="0" anchor="ctr"/>
+          <a:lstStyle/>
+          <a:p>
+            <a:pPr algn="ctr" indent="0" marL="0">
+              <a:buNone/>
+            </a:pPr>
+            <a:r>
+              <a:rPr lang="en-US" sz="1100" b="1" dirty="0">
+                <a:solidFill>
+                  <a:srgbClr val="FFFFFF"/>
+                </a:solidFill>
+                <a:latin typeface="Calibri" pitchFamily="34" charset="0"/>
+                <a:ea typeface="Calibri" pitchFamily="34" charset="-122"/>
+                <a:cs typeface="Calibri" pitchFamily="34" charset="-120"/>
+              </a:rPr>
+              <a:t>CASE 10-B</a:t>
+            </a:r>
+            <a:endParaRPr lang="en-US" sz="1100" dirty="0"/>
+          </a:p>
+        </p:txBody>
+      </p:sp>
+      <p:sp>
+        <p:nvSpPr>
+          <p:cNvPr id="6" name="Shape 3"/>
+          <p:cNvSpPr/>
+          <p:nvPr/>
+        </p:nvSpPr>
+        <p:spPr>
+          <a:xfrm>
+            <a:off x="640080" y="1188720"/>
+            <a:ext cx="10911535" cy="1124712"/>
+          </a:xfrm>
+          <a:prstGeom prst="roundRect">
+            <a:avLst>
+              <a:gd name="adj" fmla="val 3252"/>
+            </a:avLst>
+          </a:prstGeom>
+          <a:solidFill>
+            <a:srgbClr val="093259"/>
+          </a:solidFill>
+          <a:ln/>
+        </p:spPr>
+      </p:sp>
+      <p:sp>
+        <p:nvSpPr>
+          <p:cNvPr id="7" name="Text 4"/>
+          <p:cNvSpPr/>
+          <p:nvPr/>
+        </p:nvSpPr>
+        <p:spPr>
+          <a:xfrm>
+            <a:off x="950976" y="1316736"/>
+            <a:ext cx="10289743" cy="868680"/>
+          </a:xfrm>
+          <a:prstGeom prst="rect">
+            <a:avLst/>
+          </a:prstGeom>
+          <a:noFill/>
+          <a:ln/>
+        </p:spPr>
+        <p:txBody>
+          <a:bodyPr wrap="square" lIns="0" tIns="0" rIns="0" bIns="0" rtlCol="0" anchor="t"/>
+          <a:lstStyle/>
+          <a:p>
+            <a:pPr indent="0" marL="0">
+              <a:lnSpc>
+                <a:spcPct val="92000"/>
+              </a:lnSpc>
+              <a:buNone/>
+            </a:pPr>
+            <a:r>
+              <a:rPr lang="en-US" sz="950" b="1" dirty="0">
+                <a:solidFill>
+                  <a:srgbClr val="12B198"/>
+                </a:solidFill>
+                <a:latin typeface="Yu Gothic" pitchFamily="34" charset="0"/>
+                <a:ea typeface="Yu Gothic" pitchFamily="34" charset="-122"/>
+                <a:cs typeface="Yu Gothic" pitchFamily="34" charset="-120"/>
+              </a:rPr>
+              <a:t>シナリオ　</a:t>
+            </a:r>
+            <a:pPr indent="0" marL="0">
+              <a:lnSpc>
+                <a:spcPct val="92000"/>
+              </a:lnSpc>
+              <a:buNone/>
+            </a:pPr>
+            <a:r>
+              <a:rPr lang="en-US" sz="800" dirty="0">
+                <a:solidFill>
+                  <a:srgbClr val="12B198"/>
+                </a:solidFill>
+                <a:latin typeface="Calibri" pitchFamily="34" charset="0"/>
+                <a:ea typeface="Calibri" pitchFamily="34" charset="-122"/>
+                <a:cs typeface="Calibri" pitchFamily="34" charset="-120"/>
+              </a:rPr>
+              <a:t>SCENARIO</a:t>
+            </a:r>
+            <a:endParaRPr lang="en-US" sz="950" dirty="0"/>
+          </a:p>
+          <a:p>
+            <a:pPr indent="0" marL="0">
+              <a:lnSpc>
+                <a:spcPct val="92000"/>
+              </a:lnSpc>
+              <a:buNone/>
+            </a:pPr>
+            <a:r>
+              <a:rPr lang="en-US" sz="1150" b="1" dirty="0">
+                <a:solidFill>
+                  <a:srgbClr val="FFFFFF"/>
+                </a:solidFill>
+                <a:latin typeface="Yu Gothic" pitchFamily="34" charset="0"/>
+                <a:ea typeface="Yu Gothic" pitchFamily="34" charset="-122"/>
+                <a:cs typeface="Yu Gothic" pitchFamily="34" charset="-120"/>
+              </a:rPr>
+              <a:t>21時、クライアント企業の部長が防災センターに来る。「うちの部員が備品を持ち出した疑いがある。今日の入退室ログとエレベーターホールのカメラ画像を、いま見せてほしい」と述べる。相手はクライアント側の管理職で、日頃から警備に協力的である。上長は不在。</a:t>
+            </a:r>
+            <a:endParaRPr lang="en-US" sz="950" dirty="0"/>
+          </a:p>
+          <a:p>
+            <a:pPr indent="0" marL="0">
+              <a:lnSpc>
+                <a:spcPct val="92000"/>
+              </a:lnSpc>
+              <a:buNone/>
+            </a:pPr>
+            <a:r>
+              <a:rPr lang="en-US" sz="800" i="1" dirty="0">
+                <a:solidFill>
+                  <a:srgbClr val="9FD8CD"/>
+                </a:solidFill>
+                <a:latin typeface="Calibri" pitchFamily="34" charset="0"/>
+                <a:ea typeface="Calibri" pitchFamily="34" charset="-122"/>
+                <a:cs typeface="Calibri" pitchFamily="34" charset="-120"/>
+              </a:rPr>
+              <a:t>21:00. A department head from the client company comes to the security office. "One of my staff may have taken equipment. I want to see today's access log and the lift-lobby footage now." They are a client manager who has always been cooperative. Your supervisor is away.</a:t>
+            </a:r>
+            <a:endParaRPr lang="en-US" sz="950" dirty="0"/>
+          </a:p>
+        </p:txBody>
+      </p:sp>
+      <p:sp>
+        <p:nvSpPr>
+          <p:cNvPr id="8" name="Text 5"/>
+          <p:cNvSpPr/>
+          <p:nvPr/>
+        </p:nvSpPr>
+        <p:spPr>
+          <a:xfrm>
+            <a:off x="640080" y="2459736"/>
+            <a:ext cx="10911535" cy="566928"/>
+          </a:xfrm>
+          <a:prstGeom prst="rect">
+            <a:avLst/>
+          </a:prstGeom>
+          <a:noFill/>
+          <a:ln/>
+        </p:spPr>
+        <p:txBody>
+          <a:bodyPr wrap="square" lIns="0" tIns="0" rIns="0" bIns="0" rtlCol="0" anchor="t"/>
+          <a:lstStyle/>
+          <a:p>
+            <a:pPr indent="0" marL="0">
+              <a:lnSpc>
+                <a:spcPct val="90000"/>
+              </a:lnSpc>
+              <a:buNone/>
+            </a:pPr>
+            <a:r>
+              <a:rPr lang="en-US" sz="1000" b="1" dirty="0">
+                <a:solidFill>
+                  <a:srgbClr val="0D8A76"/>
+                </a:solidFill>
+                <a:latin typeface="Yu Gothic" pitchFamily="34" charset="0"/>
+                <a:ea typeface="Yu Gothic" pitchFamily="34" charset="-122"/>
+                <a:cs typeface="Yu Gothic" pitchFamily="34" charset="-120"/>
+              </a:rPr>
+              <a:t>問い　</a:t>
+            </a:r>
+            <a:pPr indent="0" marL="0">
+              <a:lnSpc>
+                <a:spcPct val="90000"/>
+              </a:lnSpc>
+              <a:buNone/>
+            </a:pPr>
+            <a:r>
+              <a:rPr lang="en-US" sz="1250" b="1" dirty="0">
+                <a:solidFill>
+                  <a:srgbClr val="093259"/>
+                </a:solidFill>
+                <a:latin typeface="Yu Gothic" pitchFamily="34" charset="0"/>
+                <a:ea typeface="Yu Gothic" pitchFamily="34" charset="-122"/>
+                <a:cs typeface="Yu Gothic" pitchFamily="34" charset="-120"/>
+              </a:rPr>
+              <a:t>あなたなら次の60秒、何をどう動きますか。</a:t>
+            </a:r>
+            <a:endParaRPr lang="en-US" sz="1000" dirty="0"/>
+          </a:p>
+          <a:p>
+            <a:pPr indent="0" marL="0">
+              <a:lnSpc>
+                <a:spcPct val="90000"/>
+              </a:lnSpc>
+              <a:buNone/>
+            </a:pPr>
+            <a:r>
+              <a:rPr lang="en-US" sz="850" i="1" dirty="0">
+                <a:solidFill>
+                  <a:srgbClr val="5F7183"/>
+                </a:solidFill>
+                <a:latin typeface="Calibri" pitchFamily="34" charset="0"/>
+                <a:ea typeface="Calibri" pitchFamily="34" charset="-122"/>
+                <a:cs typeface="Calibri" pitchFamily="34" charset="-120"/>
+              </a:rPr>
+              <a:t>What do you do in the next sixty seconds?</a:t>
+            </a:r>
+            <a:endParaRPr lang="en-US" sz="1000" dirty="0"/>
+          </a:p>
+        </p:txBody>
+      </p:sp>
+      <p:sp>
+        <p:nvSpPr>
+          <p:cNvPr id="9" name="Shape 6"/>
+          <p:cNvSpPr/>
+          <p:nvPr/>
+        </p:nvSpPr>
+        <p:spPr>
+          <a:xfrm>
+            <a:off x="640080" y="3081528"/>
+            <a:ext cx="5327752" cy="1074420"/>
+          </a:xfrm>
+          <a:prstGeom prst="roundRect">
+            <a:avLst>
+              <a:gd name="adj" fmla="val 3404"/>
             </a:avLst>
           </a:prstGeom>
           <a:solidFill>
@@ -12290,14 +14353,14 @@
       </p:sp>
       <p:sp>
         <p:nvSpPr>
-          <p:cNvPr id="6" name="Shape 3"/>
-          <p:cNvSpPr/>
-          <p:nvPr/>
-        </p:nvSpPr>
-        <p:spPr>
-          <a:xfrm>
-            <a:off x="896112" y="2445106"/>
-            <a:ext cx="384048" cy="384048"/>
+          <p:cNvPr id="10" name="Shape 7"/>
+          <p:cNvSpPr/>
+          <p:nvPr/>
+        </p:nvSpPr>
+        <p:spPr>
+          <a:xfrm>
+            <a:off x="804672" y="3472434"/>
+            <a:ext cx="292608" cy="292608"/>
           </a:xfrm>
           <a:prstGeom prst="ellipse">
             <a:avLst/>
@@ -12310,14 +14373,14 @@
       </p:sp>
       <p:sp>
         <p:nvSpPr>
-          <p:cNvPr id="7" name="Text 4"/>
-          <p:cNvSpPr/>
-          <p:nvPr/>
-        </p:nvSpPr>
-        <p:spPr>
-          <a:xfrm>
-            <a:off x="896112" y="2445106"/>
-            <a:ext cx="384048" cy="384048"/>
+          <p:cNvPr id="11" name="Text 8"/>
+          <p:cNvSpPr/>
+          <p:nvPr/>
+        </p:nvSpPr>
+        <p:spPr>
+          <a:xfrm>
+            <a:off x="804672" y="3472434"/>
+            <a:ext cx="292608" cy="292608"/>
           </a:xfrm>
           <a:prstGeom prst="rect">
             <a:avLst/>
@@ -12333,7 +14396,7 @@
               <a:buNone/>
             </a:pPr>
             <a:r>
-              <a:rPr lang="en-US" sz="1400" b="1" dirty="0">
+              <a:rPr lang="en-US" sz="1100" b="1" dirty="0">
                 <a:solidFill>
                   <a:srgbClr val="FFFFFF"/>
                 </a:solidFill>
@@ -12343,20 +14406,20 @@
               </a:rPr>
               <a:t>1</a:t>
             </a:r>
-            <a:endParaRPr lang="en-US" sz="1400" dirty="0"/>
-          </a:p>
-        </p:txBody>
-      </p:sp>
-      <p:sp>
-        <p:nvSpPr>
-          <p:cNvPr id="8" name="Text 5"/>
-          <p:cNvSpPr/>
-          <p:nvPr/>
-        </p:nvSpPr>
-        <p:spPr>
-          <a:xfrm>
-            <a:off x="1499616" y="2395728"/>
-            <a:ext cx="9777679" cy="519379"/>
+            <a:endParaRPr lang="en-US" sz="1100" dirty="0"/>
+          </a:p>
+        </p:txBody>
+      </p:sp>
+      <p:sp>
+        <p:nvSpPr>
+          <p:cNvPr id="12" name="Text 9"/>
+          <p:cNvSpPr/>
+          <p:nvPr/>
+        </p:nvSpPr>
+        <p:spPr>
+          <a:xfrm>
+            <a:off x="1188720" y="3136392"/>
+            <a:ext cx="4596232" cy="964692"/>
           </a:xfrm>
           <a:prstGeom prst="rect">
             <a:avLst/>
@@ -12370,12 +14433,12 @@
           <a:p>
             <a:pPr indent="0" marL="0">
               <a:lnSpc>
-                <a:spcPct val="92000"/>
-              </a:lnSpc>
-              <a:buNone/>
-            </a:pPr>
-            <a:r>
-              <a:rPr lang="en-US" sz="1450" b="1" dirty="0">
+                <a:spcPct val="88000"/>
+              </a:lnSpc>
+              <a:buNone/>
+            </a:pPr>
+            <a:r>
+              <a:rPr lang="en-US" sz="1050" b="1" dirty="0">
                 <a:solidFill>
                   <a:srgbClr val="1B2733"/>
                 </a:solidFill>
@@ -12383,19 +14446,19 @@
                 <a:ea typeface="Yu Gothic" pitchFamily="34" charset="-122"/>
                 <a:cs typeface="Yu Gothic" pitchFamily="34" charset="-120"/>
               </a:rPr>
-              <a:t>何が起きるはずだったか。</a:t>
-            </a:r>
-            <a:endParaRPr lang="en-US" sz="1450" dirty="0"/>
-          </a:p>
-          <a:p>
-            <a:pPr indent="0" marL="0">
-              <a:lnSpc>
-                <a:spcPct val="92000"/>
-              </a:lnSpc>
-              <a:buNone/>
-            </a:pPr>
-            <a:r>
-              <a:rPr lang="en-US" sz="1050" i="1" dirty="0">
+              <a:t>クライアントの管理職であることは、開示の根拠になるか。</a:t>
+            </a:r>
+            <a:endParaRPr lang="en-US" sz="1050" dirty="0"/>
+          </a:p>
+          <a:p>
+            <a:pPr indent="0" marL="0">
+              <a:lnSpc>
+                <a:spcPct val="88000"/>
+              </a:lnSpc>
+              <a:buNone/>
+            </a:pPr>
+            <a:r>
+              <a:rPr lang="en-US" sz="800" i="1" dirty="0">
                 <a:solidFill>
                   <a:srgbClr val="5F7183"/>
                 </a:solidFill>
@@ -12403,44 +14466,44 @@
                 <a:ea typeface="Calibri" pitchFamily="34" charset="-122"/>
                 <a:cs typeface="Calibri" pitchFamily="34" charset="-120"/>
               </a:rPr>
-              <a:t>What was supposed to happen?</a:t>
-            </a:r>
-            <a:endParaRPr lang="en-US" sz="1450" dirty="0"/>
-          </a:p>
-        </p:txBody>
-      </p:sp>
-      <p:sp>
-        <p:nvSpPr>
-          <p:cNvPr id="9" name="Shape 6"/>
-          <p:cNvSpPr/>
-          <p:nvPr/>
-        </p:nvSpPr>
-        <p:spPr>
-          <a:xfrm>
-            <a:off x="640080" y="3097987"/>
-            <a:ext cx="10911535" cy="702259"/>
+              <a:t>Does being a client manager justify disclosure?</a:t>
+            </a:r>
+            <a:endParaRPr lang="en-US" sz="1050" dirty="0"/>
+          </a:p>
+        </p:txBody>
+      </p:sp>
+      <p:sp>
+        <p:nvSpPr>
+          <p:cNvPr id="13" name="Shape 10"/>
+          <p:cNvSpPr/>
+          <p:nvPr/>
+        </p:nvSpPr>
+        <p:spPr>
+          <a:xfrm>
+            <a:off x="6223864" y="3081528"/>
+            <a:ext cx="5327752" cy="1074420"/>
           </a:xfrm>
           <a:prstGeom prst="roundRect">
             <a:avLst>
-              <a:gd name="adj" fmla="val 6510"/>
+              <a:gd name="adj" fmla="val 3404"/>
             </a:avLst>
           </a:prstGeom>
           <a:solidFill>
-            <a:srgbClr val="F7FAFC"/>
+            <a:srgbClr val="EFF4F8"/>
           </a:solidFill>
           <a:ln/>
         </p:spPr>
       </p:sp>
       <p:sp>
         <p:nvSpPr>
-          <p:cNvPr id="10" name="Shape 7"/>
-          <p:cNvSpPr/>
-          <p:nvPr/>
-        </p:nvSpPr>
-        <p:spPr>
-          <a:xfrm>
-            <a:off x="896112" y="3257093"/>
-            <a:ext cx="384048" cy="384048"/>
+          <p:cNvPr id="14" name="Shape 11"/>
+          <p:cNvSpPr/>
+          <p:nvPr/>
+        </p:nvSpPr>
+        <p:spPr>
+          <a:xfrm>
+            <a:off x="6388456" y="3472434"/>
+            <a:ext cx="292608" cy="292608"/>
           </a:xfrm>
           <a:prstGeom prst="ellipse">
             <a:avLst/>
@@ -12453,14 +14516,14 @@
       </p:sp>
       <p:sp>
         <p:nvSpPr>
-          <p:cNvPr id="11" name="Text 8"/>
-          <p:cNvSpPr/>
-          <p:nvPr/>
-        </p:nvSpPr>
-        <p:spPr>
-          <a:xfrm>
-            <a:off x="896112" y="3257093"/>
-            <a:ext cx="384048" cy="384048"/>
+          <p:cNvPr id="15" name="Text 12"/>
+          <p:cNvSpPr/>
+          <p:nvPr/>
+        </p:nvSpPr>
+        <p:spPr>
+          <a:xfrm>
+            <a:off x="6388456" y="3472434"/>
+            <a:ext cx="292608" cy="292608"/>
           </a:xfrm>
           <a:prstGeom prst="rect">
             <a:avLst/>
@@ -12476,7 +14539,7 @@
               <a:buNone/>
             </a:pPr>
             <a:r>
-              <a:rPr lang="en-US" sz="1400" b="1" dirty="0">
+              <a:rPr lang="en-US" sz="1100" b="1" dirty="0">
                 <a:solidFill>
                   <a:srgbClr val="FFFFFF"/>
                 </a:solidFill>
@@ -12486,20 +14549,20 @@
               </a:rPr>
               <a:t>2</a:t>
             </a:r>
-            <a:endParaRPr lang="en-US" sz="1400" dirty="0"/>
-          </a:p>
-        </p:txBody>
-      </p:sp>
-      <p:sp>
-        <p:nvSpPr>
-          <p:cNvPr id="12" name="Text 9"/>
-          <p:cNvSpPr/>
-          <p:nvPr/>
-        </p:nvSpPr>
-        <p:spPr>
-          <a:xfrm>
-            <a:off x="1499616" y="3207715"/>
-            <a:ext cx="9777679" cy="519379"/>
+            <a:endParaRPr lang="en-US" sz="1100" dirty="0"/>
+          </a:p>
+        </p:txBody>
+      </p:sp>
+      <p:sp>
+        <p:nvSpPr>
+          <p:cNvPr id="16" name="Text 13"/>
+          <p:cNvSpPr/>
+          <p:nvPr/>
+        </p:nvSpPr>
+        <p:spPr>
+          <a:xfrm>
+            <a:off x="6772504" y="3136392"/>
+            <a:ext cx="4596232" cy="964692"/>
           </a:xfrm>
           <a:prstGeom prst="rect">
             <a:avLst/>
@@ -12513,12 +14576,12 @@
           <a:p>
             <a:pPr indent="0" marL="0">
               <a:lnSpc>
-                <a:spcPct val="92000"/>
-              </a:lnSpc>
-              <a:buNone/>
-            </a:pPr>
-            <a:r>
-              <a:rPr lang="en-US" sz="1450" b="1" dirty="0">
+                <a:spcPct val="88000"/>
+              </a:lnSpc>
+              <a:buNone/>
+            </a:pPr>
+            <a:r>
+              <a:rPr lang="en-US" sz="1050" b="1" dirty="0">
                 <a:solidFill>
                   <a:srgbClr val="1B2733"/>
                 </a:solidFill>
@@ -12526,19 +14589,19 @@
                 <a:ea typeface="Yu Gothic" pitchFamily="34" charset="-122"/>
                 <a:cs typeface="Yu Gothic" pitchFamily="34" charset="-120"/>
               </a:rPr>
-              <a:t>実際には何が起きたか。</a:t>
-            </a:r>
-            <a:endParaRPr lang="en-US" sz="1450" dirty="0"/>
-          </a:p>
-          <a:p>
-            <a:pPr indent="0" marL="0">
-              <a:lnSpc>
-                <a:spcPct val="92000"/>
-              </a:lnSpc>
-              <a:buNone/>
-            </a:pPr>
-            <a:r>
-              <a:rPr lang="en-US" sz="1050" i="1" dirty="0">
+              <a:t>警備員に開示の可否を判断する権限はあるか。</a:t>
+            </a:r>
+            <a:endParaRPr lang="en-US" sz="1050" dirty="0"/>
+          </a:p>
+          <a:p>
+            <a:pPr indent="0" marL="0">
+              <a:lnSpc>
+                <a:spcPct val="88000"/>
+              </a:lnSpc>
+              <a:buNone/>
+            </a:pPr>
+            <a:r>
+              <a:rPr lang="en-US" sz="800" i="1" dirty="0">
                 <a:solidFill>
                   <a:srgbClr val="5F7183"/>
                 </a:solidFill>
@@ -12546,26 +14609,26 @@
                 <a:ea typeface="Calibri" pitchFamily="34" charset="-122"/>
                 <a:cs typeface="Calibri" pitchFamily="34" charset="-120"/>
               </a:rPr>
-              <a:t>What actually happened?</a:t>
-            </a:r>
-            <a:endParaRPr lang="en-US" sz="1450" dirty="0"/>
-          </a:p>
-        </p:txBody>
-      </p:sp>
-      <p:sp>
-        <p:nvSpPr>
-          <p:cNvPr id="13" name="Shape 10"/>
-          <p:cNvSpPr/>
-          <p:nvPr/>
-        </p:nvSpPr>
-        <p:spPr>
-          <a:xfrm>
-            <a:off x="640080" y="3909974"/>
-            <a:ext cx="10911535" cy="702259"/>
+              <a:t>Does a guard have authority to decide on disclosure?</a:t>
+            </a:r>
+            <a:endParaRPr lang="en-US" sz="1050" dirty="0"/>
+          </a:p>
+        </p:txBody>
+      </p:sp>
+      <p:sp>
+        <p:nvSpPr>
+          <p:cNvPr id="17" name="Shape 14"/>
+          <p:cNvSpPr/>
+          <p:nvPr/>
+        </p:nvSpPr>
+        <p:spPr>
+          <a:xfrm>
+            <a:off x="640080" y="4265676"/>
+            <a:ext cx="5327752" cy="1074420"/>
           </a:xfrm>
           <a:prstGeom prst="roundRect">
             <a:avLst>
-              <a:gd name="adj" fmla="val 6510"/>
+              <a:gd name="adj" fmla="val 3404"/>
             </a:avLst>
           </a:prstGeom>
           <a:solidFill>
@@ -12576,14 +14639,14 @@
       </p:sp>
       <p:sp>
         <p:nvSpPr>
-          <p:cNvPr id="14" name="Shape 11"/>
-          <p:cNvSpPr/>
-          <p:nvPr/>
-        </p:nvSpPr>
-        <p:spPr>
-          <a:xfrm>
-            <a:off x="896112" y="4069080"/>
-            <a:ext cx="384048" cy="384048"/>
+          <p:cNvPr id="18" name="Shape 15"/>
+          <p:cNvSpPr/>
+          <p:nvPr/>
+        </p:nvSpPr>
+        <p:spPr>
+          <a:xfrm>
+            <a:off x="804672" y="4656582"/>
+            <a:ext cx="292608" cy="292608"/>
           </a:xfrm>
           <a:prstGeom prst="ellipse">
             <a:avLst/>
@@ -12596,14 +14659,14 @@
       </p:sp>
       <p:sp>
         <p:nvSpPr>
-          <p:cNvPr id="15" name="Text 12"/>
-          <p:cNvSpPr/>
-          <p:nvPr/>
-        </p:nvSpPr>
-        <p:spPr>
-          <a:xfrm>
-            <a:off x="896112" y="4069080"/>
-            <a:ext cx="384048" cy="384048"/>
+          <p:cNvPr id="19" name="Text 16"/>
+          <p:cNvSpPr/>
+          <p:nvPr/>
+        </p:nvSpPr>
+        <p:spPr>
+          <a:xfrm>
+            <a:off x="804672" y="4656582"/>
+            <a:ext cx="292608" cy="292608"/>
           </a:xfrm>
           <a:prstGeom prst="rect">
             <a:avLst/>
@@ -12619,7 +14682,7 @@
               <a:buNone/>
             </a:pPr>
             <a:r>
-              <a:rPr lang="en-US" sz="1400" b="1" dirty="0">
+              <a:rPr lang="en-US" sz="1100" b="1" dirty="0">
                 <a:solidFill>
                   <a:srgbClr val="FFFFFF"/>
                 </a:solidFill>
@@ -12629,20 +14692,20 @@
               </a:rPr>
               <a:t>3</a:t>
             </a:r>
-            <a:endParaRPr lang="en-US" sz="1400" dirty="0"/>
-          </a:p>
-        </p:txBody>
-      </p:sp>
-      <p:sp>
-        <p:nvSpPr>
-          <p:cNvPr id="16" name="Text 13"/>
-          <p:cNvSpPr/>
-          <p:nvPr/>
-        </p:nvSpPr>
-        <p:spPr>
-          <a:xfrm>
-            <a:off x="1499616" y="4019702"/>
-            <a:ext cx="9777679" cy="519379"/>
+            <a:endParaRPr lang="en-US" sz="1100" dirty="0"/>
+          </a:p>
+        </p:txBody>
+      </p:sp>
+      <p:sp>
+        <p:nvSpPr>
+          <p:cNvPr id="20" name="Text 17"/>
+          <p:cNvSpPr/>
+          <p:nvPr/>
+        </p:nvSpPr>
+        <p:spPr>
+          <a:xfrm>
+            <a:off x="1188720" y="4320540"/>
+            <a:ext cx="4596232" cy="964692"/>
           </a:xfrm>
           <a:prstGeom prst="rect">
             <a:avLst/>
@@ -12656,12 +14719,12 @@
           <a:p>
             <a:pPr indent="0" marL="0">
               <a:lnSpc>
-                <a:spcPct val="92000"/>
-              </a:lnSpc>
-              <a:buNone/>
-            </a:pPr>
-            <a:r>
-              <a:rPr lang="en-US" sz="1450" b="1" dirty="0">
+                <a:spcPct val="88000"/>
+              </a:lnSpc>
+              <a:buNone/>
+            </a:pPr>
+            <a:r>
+              <a:rPr lang="en-US" sz="1050" b="1" dirty="0">
                 <a:solidFill>
                   <a:srgbClr val="1B2733"/>
                 </a:solidFill>
@@ -12669,19 +14732,19 @@
                 <a:ea typeface="Yu Gothic" pitchFamily="34" charset="-122"/>
                 <a:cs typeface="Yu Gothic" pitchFamily="34" charset="-120"/>
               </a:rPr>
-              <a:t>なぜ差が生じたか。</a:t>
-            </a:r>
-            <a:endParaRPr lang="en-US" sz="1450" dirty="0"/>
-          </a:p>
-          <a:p>
-            <a:pPr indent="0" marL="0">
-              <a:lnSpc>
-                <a:spcPct val="92000"/>
-              </a:lnSpc>
-              <a:buNone/>
-            </a:pPr>
-            <a:r>
-              <a:rPr lang="en-US" sz="1050" i="1" dirty="0">
+              <a:t>断る場合、何と言うか。関係を壊さずに断れるか。</a:t>
+            </a:r>
+            <a:endParaRPr lang="en-US" sz="1050" dirty="0"/>
+          </a:p>
+          <a:p>
+            <a:pPr indent="0" marL="0">
+              <a:lnSpc>
+                <a:spcPct val="88000"/>
+              </a:lnSpc>
+              <a:buNone/>
+            </a:pPr>
+            <a:r>
+              <a:rPr lang="en-US" sz="800" i="1" dirty="0">
                 <a:solidFill>
                   <a:srgbClr val="5F7183"/>
                 </a:solidFill>
@@ -12689,44 +14752,44 @@
                 <a:ea typeface="Calibri" pitchFamily="34" charset="-122"/>
                 <a:cs typeface="Calibri" pitchFamily="34" charset="-120"/>
               </a:rPr>
-              <a:t>Why was there a difference?</a:t>
-            </a:r>
-            <a:endParaRPr lang="en-US" sz="1450" dirty="0"/>
-          </a:p>
-        </p:txBody>
-      </p:sp>
-      <p:sp>
-        <p:nvSpPr>
-          <p:cNvPr id="17" name="Shape 14"/>
-          <p:cNvSpPr/>
-          <p:nvPr/>
-        </p:nvSpPr>
-        <p:spPr>
-          <a:xfrm>
-            <a:off x="640080" y="4721962"/>
-            <a:ext cx="10911535" cy="702259"/>
+              <a:t>If you decline, what do you say? Can you decline without damaging the relationship?</a:t>
+            </a:r>
+            <a:endParaRPr lang="en-US" sz="1050" dirty="0"/>
+          </a:p>
+        </p:txBody>
+      </p:sp>
+      <p:sp>
+        <p:nvSpPr>
+          <p:cNvPr id="21" name="Shape 18"/>
+          <p:cNvSpPr/>
+          <p:nvPr/>
+        </p:nvSpPr>
+        <p:spPr>
+          <a:xfrm>
+            <a:off x="6223864" y="4265676"/>
+            <a:ext cx="5327752" cy="1074420"/>
           </a:xfrm>
           <a:prstGeom prst="roundRect">
             <a:avLst>
-              <a:gd name="adj" fmla="val 6510"/>
+              <a:gd name="adj" fmla="val 3404"/>
             </a:avLst>
           </a:prstGeom>
           <a:solidFill>
-            <a:srgbClr val="F7FAFC"/>
+            <a:srgbClr val="EFF4F8"/>
           </a:solidFill>
           <a:ln/>
         </p:spPr>
       </p:sp>
       <p:sp>
         <p:nvSpPr>
-          <p:cNvPr id="18" name="Shape 15"/>
-          <p:cNvSpPr/>
-          <p:nvPr/>
-        </p:nvSpPr>
-        <p:spPr>
-          <a:xfrm>
-            <a:off x="896112" y="4881067"/>
-            <a:ext cx="384048" cy="384048"/>
+          <p:cNvPr id="22" name="Shape 19"/>
+          <p:cNvSpPr/>
+          <p:nvPr/>
+        </p:nvSpPr>
+        <p:spPr>
+          <a:xfrm>
+            <a:off x="6388456" y="4656582"/>
+            <a:ext cx="292608" cy="292608"/>
           </a:xfrm>
           <a:prstGeom prst="ellipse">
             <a:avLst/>
@@ -12739,14 +14802,14 @@
       </p:sp>
       <p:sp>
         <p:nvSpPr>
-          <p:cNvPr id="19" name="Text 16"/>
-          <p:cNvSpPr/>
-          <p:nvPr/>
-        </p:nvSpPr>
-        <p:spPr>
-          <a:xfrm>
-            <a:off x="896112" y="4881067"/>
-            <a:ext cx="384048" cy="384048"/>
+          <p:cNvPr id="23" name="Text 20"/>
+          <p:cNvSpPr/>
+          <p:nvPr/>
+        </p:nvSpPr>
+        <p:spPr>
+          <a:xfrm>
+            <a:off x="6388456" y="4656582"/>
+            <a:ext cx="292608" cy="292608"/>
           </a:xfrm>
           <a:prstGeom prst="rect">
             <a:avLst/>
@@ -12762,7 +14825,7 @@
               <a:buNone/>
             </a:pPr>
             <a:r>
-              <a:rPr lang="en-US" sz="1400" b="1" dirty="0">
+              <a:rPr lang="en-US" sz="1100" b="1" dirty="0">
                 <a:solidFill>
                   <a:srgbClr val="FFFFFF"/>
                 </a:solidFill>
@@ -12772,20 +14835,20 @@
               </a:rPr>
               <a:t>4</a:t>
             </a:r>
-            <a:endParaRPr lang="en-US" sz="1400" dirty="0"/>
-          </a:p>
-        </p:txBody>
-      </p:sp>
-      <p:sp>
-        <p:nvSpPr>
-          <p:cNvPr id="20" name="Text 17"/>
-          <p:cNvSpPr/>
-          <p:nvPr/>
-        </p:nvSpPr>
-        <p:spPr>
-          <a:xfrm>
-            <a:off x="1499616" y="4831690"/>
-            <a:ext cx="9777679" cy="519379"/>
+            <a:endParaRPr lang="en-US" sz="1100" dirty="0"/>
+          </a:p>
+        </p:txBody>
+      </p:sp>
+      <p:sp>
+        <p:nvSpPr>
+          <p:cNvPr id="24" name="Text 21"/>
+          <p:cNvSpPr/>
+          <p:nvPr/>
+        </p:nvSpPr>
+        <p:spPr>
+          <a:xfrm>
+            <a:off x="6772504" y="4320540"/>
+            <a:ext cx="4596232" cy="964692"/>
           </a:xfrm>
           <a:prstGeom prst="rect">
             <a:avLst/>
@@ -12799,12 +14862,12 @@
           <a:p>
             <a:pPr indent="0" marL="0">
               <a:lnSpc>
-                <a:spcPct val="92000"/>
-              </a:lnSpc>
-              <a:buNone/>
-            </a:pPr>
-            <a:r>
-              <a:rPr lang="en-US" sz="1450" b="1" dirty="0">
+                <a:spcPct val="88000"/>
+              </a:lnSpc>
+              <a:buNone/>
+            </a:pPr>
+            <a:r>
+              <a:rPr lang="en-US" sz="1050" b="1" dirty="0">
                 <a:solidFill>
                   <a:srgbClr val="1B2733"/>
                 </a:solidFill>
@@ -12812,19 +14875,19 @@
                 <a:ea typeface="Yu Gothic" pitchFamily="34" charset="-122"/>
                 <a:cs typeface="Yu Gothic" pitchFamily="34" charset="-120"/>
               </a:rPr>
-              <a:t>次に何を変えるか。</a:t>
-            </a:r>
-            <a:endParaRPr lang="en-US" sz="1450" dirty="0"/>
-          </a:p>
-          <a:p>
-            <a:pPr indent="0" marL="0">
-              <a:lnSpc>
-                <a:spcPct val="92000"/>
-              </a:lnSpc>
-              <a:buNone/>
-            </a:pPr>
-            <a:r>
-              <a:rPr lang="en-US" sz="1050" i="1" dirty="0">
+              <a:t>保全の依頼は受けてよいか。開示との違いは何か。</a:t>
+            </a:r>
+            <a:endParaRPr lang="en-US" sz="1050" dirty="0"/>
+          </a:p>
+          <a:p>
+            <a:pPr indent="0" marL="0">
+              <a:lnSpc>
+                <a:spcPct val="88000"/>
+              </a:lnSpc>
+              <a:buNone/>
+            </a:pPr>
+            <a:r>
+              <a:rPr lang="en-US" sz="800" i="1" dirty="0">
                 <a:solidFill>
                   <a:srgbClr val="5F7183"/>
                 </a:solidFill>
@@ -12832,64 +14895,44 @@
                 <a:ea typeface="Calibri" pitchFamily="34" charset="-122"/>
                 <a:cs typeface="Calibri" pitchFamily="34" charset="-120"/>
               </a:rPr>
-              <a:t>What will we do differently?</a:t>
-            </a:r>
-            <a:endParaRPr lang="en-US" sz="1450" dirty="0"/>
-          </a:p>
-        </p:txBody>
-      </p:sp>
-      <p:sp>
-        <p:nvSpPr>
-          <p:cNvPr id="21" name="Shape 18"/>
-          <p:cNvSpPr/>
-          <p:nvPr/>
-        </p:nvSpPr>
-        <p:spPr>
-          <a:xfrm>
-            <a:off x="640080" y="5533949"/>
-            <a:ext cx="10911535" cy="702259"/>
+              <a:t>May you accept a request to preserve? How does that differ from disclosure?</a:t>
+            </a:r>
+            <a:endParaRPr lang="en-US" sz="1050" dirty="0"/>
+          </a:p>
+        </p:txBody>
+      </p:sp>
+      <p:sp>
+        <p:nvSpPr>
+          <p:cNvPr id="25" name="Shape 22"/>
+          <p:cNvSpPr/>
+          <p:nvPr/>
+        </p:nvSpPr>
+        <p:spPr>
+          <a:xfrm>
+            <a:off x="640080" y="5394960"/>
+            <a:ext cx="10911535" cy="457200"/>
           </a:xfrm>
           <a:prstGeom prst="roundRect">
             <a:avLst>
-              <a:gd name="adj" fmla="val 6510"/>
+              <a:gd name="adj" fmla="val 8000"/>
             </a:avLst>
           </a:prstGeom>
           <a:solidFill>
-            <a:srgbClr val="EFF4F8"/>
+            <a:srgbClr val="E4F4F0"/>
           </a:solidFill>
           <a:ln/>
         </p:spPr>
       </p:sp>
       <p:sp>
         <p:nvSpPr>
-          <p:cNvPr id="22" name="Shape 19"/>
-          <p:cNvSpPr/>
-          <p:nvPr/>
-        </p:nvSpPr>
-        <p:spPr>
-          <a:xfrm>
-            <a:off x="896112" y="5693054"/>
-            <a:ext cx="384048" cy="384048"/>
-          </a:xfrm>
-          <a:prstGeom prst="ellipse">
-            <a:avLst/>
-          </a:prstGeom>
-          <a:solidFill>
-            <a:srgbClr val="12B198"/>
-          </a:solidFill>
-          <a:ln/>
-        </p:spPr>
-      </p:sp>
-      <p:sp>
-        <p:nvSpPr>
-          <p:cNvPr id="23" name="Text 20"/>
-          <p:cNvSpPr/>
-          <p:nvPr/>
-        </p:nvSpPr>
-        <p:spPr>
-          <a:xfrm>
-            <a:off x="896112" y="5693054"/>
-            <a:ext cx="384048" cy="384048"/>
+          <p:cNvPr id="26" name="Text 23"/>
+          <p:cNvSpPr/>
+          <p:nvPr/>
+        </p:nvSpPr>
+        <p:spPr>
+          <a:xfrm>
+            <a:off x="877824" y="5431536"/>
+            <a:ext cx="10436047" cy="384048"/>
           </a:xfrm>
           <a:prstGeom prst="rect">
             <a:avLst/>
@@ -12901,34 +14944,74 @@
           <a:bodyPr wrap="square" lIns="0" tIns="0" rIns="0" bIns="0" rtlCol="0" anchor="ctr"/>
           <a:lstStyle/>
           <a:p>
-            <a:pPr algn="ctr" indent="0" marL="0">
-              <a:buNone/>
-            </a:pPr>
-            <a:r>
-              <a:rPr lang="en-US" sz="1400" b="1" dirty="0">
-                <a:solidFill>
-                  <a:srgbClr val="FFFFFF"/>
-                </a:solidFill>
-                <a:latin typeface="Calibri" pitchFamily="34" charset="0"/>
-                <a:ea typeface="Calibri" pitchFamily="34" charset="-122"/>
-                <a:cs typeface="Calibri" pitchFamily="34" charset="-120"/>
-              </a:rPr>
-              <a:t>5</a:t>
-            </a:r>
-            <a:endParaRPr lang="en-US" sz="1400" dirty="0"/>
-          </a:p>
-        </p:txBody>
-      </p:sp>
-      <p:sp>
-        <p:nvSpPr>
-          <p:cNvPr id="24" name="Text 21"/>
-          <p:cNvSpPr/>
-          <p:nvPr/>
-        </p:nvSpPr>
-        <p:spPr>
-          <a:xfrm>
-            <a:off x="1499616" y="5643677"/>
-            <a:ext cx="9777679" cy="519379"/>
+            <a:pPr indent="0" marL="0">
+              <a:lnSpc>
+                <a:spcPct val="86000"/>
+              </a:lnSpc>
+              <a:buNone/>
+            </a:pPr>
+            <a:r>
+              <a:rPr lang="en-US" sz="850" b="1" dirty="0">
+                <a:solidFill>
+                  <a:srgbClr val="0D8A76"/>
+                </a:solidFill>
+                <a:latin typeface="Yu Gothic" pitchFamily="34" charset="0"/>
+                <a:ea typeface="Yu Gothic" pitchFamily="34" charset="-122"/>
+                <a:cs typeface="Yu Gothic" pitchFamily="34" charset="-120"/>
+              </a:rPr>
+              <a:t>追加付与　</a:t>
+            </a:r>
+            <a:pPr indent="0" marL="0">
+              <a:lnSpc>
+                <a:spcPct val="86000"/>
+              </a:lnSpc>
+              <a:buNone/>
+            </a:pPr>
+            <a:r>
+              <a:rPr lang="en-US" sz="1050" b="1" dirty="0">
+                <a:solidFill>
+                  <a:srgbClr val="1B2733"/>
+                </a:solidFill>
+                <a:latin typeface="Yu Gothic" pitchFamily="34" charset="0"/>
+                <a:ea typeface="Yu Gothic" pitchFamily="34" charset="-122"/>
+                <a:cs typeface="Yu Gothic" pitchFamily="34" charset="-120"/>
+              </a:rPr>
+              <a:t>相手が「では、私が見るのではなく、あなたが見て教えてほしい」と述べた。</a:t>
+            </a:r>
+            <a:endParaRPr lang="en-US" sz="850" dirty="0"/>
+          </a:p>
+          <a:p>
+            <a:pPr indent="0" marL="0">
+              <a:lnSpc>
+                <a:spcPct val="86000"/>
+              </a:lnSpc>
+              <a:buNone/>
+            </a:pPr>
+            <a:r>
+              <a:rPr lang="en-US" sz="750" i="1" dirty="0">
+                <a:solidFill>
+                  <a:srgbClr val="5F7183"/>
+                </a:solidFill>
+                <a:latin typeface="Calibri" pitchFamily="34" charset="0"/>
+                <a:ea typeface="Calibri" pitchFamily="34" charset="-122"/>
+                <a:cs typeface="Calibri" pitchFamily="34" charset="-120"/>
+              </a:rPr>
+              <a:t>They say: "Then do not show me. You look, and tell me what you see."</a:t>
+            </a:r>
+            <a:endParaRPr lang="en-US" sz="850" dirty="0"/>
+          </a:p>
+        </p:txBody>
+      </p:sp>
+      <p:sp>
+        <p:nvSpPr>
+          <p:cNvPr id="27" name="Text 24"/>
+          <p:cNvSpPr/>
+          <p:nvPr/>
+        </p:nvSpPr>
+        <p:spPr>
+          <a:xfrm>
+            <a:off x="640080" y="5907024"/>
+            <a:ext cx="10911535" cy="310896"/>
           </a:xfrm>
           <a:prstGeom prst="rect">
             <a:avLst/>
@@ -12937,17 +15020,34 @@
           <a:ln/>
         </p:spPr>
         <p:txBody>
-          <a:bodyPr wrap="square" lIns="0" tIns="0" rIns="0" bIns="0" rtlCol="0" anchor="ctr"/>
-          <a:lstStyle/>
-          <a:p>
-            <a:pPr indent="0" marL="0">
-              <a:lnSpc>
-                <a:spcPct val="92000"/>
-              </a:lnSpc>
-              <a:buNone/>
-            </a:pPr>
-            <a:r>
-              <a:rPr lang="en-US" sz="1300" b="1" dirty="0">
+          <a:bodyPr wrap="square" lIns="0" tIns="0" rIns="0" bIns="0" rtlCol="0" anchor="t"/>
+          <a:lstStyle/>
+          <a:p>
+            <a:pPr indent="0" marL="0">
+              <a:lnSpc>
+                <a:spcPct val="88000"/>
+              </a:lnSpc>
+              <a:buNone/>
+            </a:pPr>
+            <a:r>
+              <a:rPr lang="en-US" sz="900" b="1" dirty="0">
+                <a:solidFill>
+                  <a:srgbClr val="0D8A76"/>
+                </a:solidFill>
+                <a:latin typeface="Yu Gothic" pitchFamily="34" charset="0"/>
+                <a:ea typeface="Yu Gothic" pitchFamily="34" charset="-122"/>
+                <a:cs typeface="Yu Gothic" pitchFamily="34" charset="-120"/>
+              </a:rPr>
+              <a:t>Site SOP優先　</a:t>
+            </a:r>
+            <a:pPr indent="0" marL="0">
+              <a:lnSpc>
+                <a:spcPct val="88000"/>
+              </a:lnSpc>
+              <a:buNone/>
+            </a:pPr>
+            <a:r>
+              <a:rPr lang="en-US" sz="900" dirty="0">
                 <a:solidFill>
                   <a:srgbClr val="1B2733"/>
                 </a:solidFill>
@@ -12955,19 +15055,19 @@
                 <a:ea typeface="Yu Gothic" pitchFamily="34" charset="-122"/>
                 <a:cs typeface="Yu Gothic" pitchFamily="34" charset="-120"/>
               </a:rPr>
-              <a:t>最後に、各自が明日から変える行動を1つ、声に出して述べます。</a:t>
-            </a:r>
-            <a:endParaRPr lang="en-US" sz="1300" dirty="0"/>
-          </a:p>
-          <a:p>
-            <a:pPr indent="0" marL="0">
-              <a:lnSpc>
-                <a:spcPct val="92000"/>
-              </a:lnSpc>
-              <a:buNone/>
-            </a:pPr>
-            <a:r>
-              <a:rPr lang="en-US" sz="950" i="1" dirty="0">
+              <a:t>開示の判断者、保全依頼の受付方法、記録の様式は現場ごとに異なる。Site SOPと契約による。</a:t>
+            </a:r>
+            <a:endParaRPr lang="en-US" sz="900" dirty="0"/>
+          </a:p>
+          <a:p>
+            <a:pPr indent="0" marL="0">
+              <a:lnSpc>
+                <a:spcPct val="88000"/>
+              </a:lnSpc>
+              <a:buNone/>
+            </a:pPr>
+            <a:r>
+              <a:rPr lang="en-US" sz="750" i="1" dirty="0">
                 <a:solidFill>
                   <a:srgbClr val="5F7183"/>
                 </a:solidFill>
@@ -12975,15 +15075,68 @@
                 <a:ea typeface="Calibri" pitchFamily="34" charset="-122"/>
                 <a:cs typeface="Calibri" pitchFamily="34" charset="-120"/>
               </a:rPr>
-              <a:t>To close, each person states aloud one thing they will change from tomorrow.</a:t>
-            </a:r>
-            <a:endParaRPr lang="en-US" sz="1300" dirty="0"/>
-          </a:p>
-        </p:txBody>
-      </p:sp>
-      <p:sp>
-        <p:nvSpPr>
-          <p:cNvPr id="25" name="Text 22"/>
+              <a:t>Who decides on disclosure, how preservation requests are accepted, and the record format differ by site.</a:t>
+            </a:r>
+            <a:endParaRPr lang="en-US" sz="900" dirty="0"/>
+          </a:p>
+        </p:txBody>
+      </p:sp>
+      <p:sp>
+        <p:nvSpPr>
+          <p:cNvPr id="28" name="Text 25"/>
+          <p:cNvSpPr/>
+          <p:nvPr/>
+        </p:nvSpPr>
+        <p:spPr>
+          <a:xfrm>
+            <a:off x="640080" y="6272784"/>
+            <a:ext cx="9905695" cy="237744"/>
+          </a:xfrm>
+          <a:prstGeom prst="rect">
+            <a:avLst/>
+          </a:prstGeom>
+          <a:noFill/>
+          <a:ln/>
+        </p:spPr>
+        <p:txBody>
+          <a:bodyPr wrap="square" lIns="0" tIns="0" rIns="0" bIns="0" rtlCol="0" anchor="t"/>
+          <a:lstStyle/>
+          <a:p>
+            <a:pPr indent="0" marL="0">
+              <a:buNone/>
+            </a:pPr>
+            <a:r>
+              <a:rPr lang="en-US" sz="750" b="1" dirty="0">
+                <a:solidFill>
+                  <a:srgbClr val="D6E0E9"/>
+                </a:solidFill>
+                <a:latin typeface="Yu Gothic" pitchFamily="34" charset="0"/>
+                <a:ea typeface="Yu Gothic" pitchFamily="34" charset="-122"/>
+                <a:cs typeface="Yu Gothic" pitchFamily="34" charset="-120"/>
+              </a:rPr>
+              <a:t>ソース　</a:t>
+            </a:r>
+            <a:pPr indent="0" marL="0">
+              <a:buNone/>
+            </a:pPr>
+            <a:r>
+              <a:rPr lang="en-US" sz="750" dirty="0">
+                <a:solidFill>
+                  <a:srgbClr val="5F7183"/>
+                </a:solidFill>
+                <a:latin typeface="Yu Gothic" pitchFamily="34" charset="0"/>
+                <a:ea typeface="Yu Gothic" pitchFamily="34" charset="-122"/>
+                <a:cs typeface="Yu Gothic" pitchFamily="34" charset="-120"/>
+              </a:rPr>
+              <a:t>個人情報保護法、不正競争防止法、経済産業省「営業秘密管理指針」</a:t>
+            </a:r>
+            <a:endParaRPr lang="en-US" sz="750" dirty="0"/>
+          </a:p>
+        </p:txBody>
+      </p:sp>
+      <p:sp>
+        <p:nvSpPr>
+          <p:cNvPr id="29" name="Text 26"/>
           <p:cNvSpPr/>
           <p:nvPr/>
         </p:nvSpPr>
@@ -13036,7 +15189,7 @@
       </p:sp>
       <p:sp>
         <p:nvSpPr>
-          <p:cNvPr id="26" name="Text 23"/>
+          <p:cNvPr id="30" name="Text 27"/>
           <p:cNvSpPr/>
           <p:nvPr/>
         </p:nvSpPr>
@@ -13087,7 +15240,7 @@
     <p:bg>
       <p:bgPr>
         <a:solidFill>
-          <a:srgbClr val="093259"/>
+          <a:srgbClr val="FFFFFF"/>
         </a:solidFill>
       </p:bgPr>
     </p:bg>
@@ -13105,31 +15258,9 @@
           <a:chExt cx="0" cy="0"/>
         </a:xfrm>
       </p:grpSpPr>
-      <p:sp>
-        <p:nvSpPr>
-          <p:cNvPr id="2" name="Shape 0"/>
-          <p:cNvSpPr/>
-          <p:nvPr/>
-        </p:nvSpPr>
-        <p:spPr>
-          <a:xfrm>
-            <a:off x="10637215" y="219456"/>
-            <a:ext cx="1042416" cy="969264"/>
-          </a:xfrm>
-          <a:prstGeom prst="roundRect">
-            <a:avLst>
-              <a:gd name="adj" fmla="val 5660"/>
-            </a:avLst>
-          </a:prstGeom>
-          <a:solidFill>
-            <a:srgbClr val="FFFFFF"/>
-          </a:solidFill>
-          <a:ln/>
-        </p:spPr>
-      </p:sp>
       <p:pic>
         <p:nvPicPr>
-          <p:cNvPr id="3" name="Image 0" descr="/home/user/Training-/assets/logo.png">    </p:cNvPr>
+          <p:cNvPr id="2" name="Image 0" descr="/home/user/Training-/assets/logo.png">    </p:cNvPr>
           <p:cNvPicPr>
             <a:picLocks noChangeAspect="1"/>
           </p:cNvPicPr>
@@ -13153,14 +15284,14 @@
       </p:pic>
       <p:sp>
         <p:nvSpPr>
-          <p:cNvPr id="4" name="Text 1"/>
-          <p:cNvSpPr/>
-          <p:nvPr/>
-        </p:nvSpPr>
-        <p:spPr>
-          <a:xfrm>
-            <a:off x="640080" y="658368"/>
-            <a:ext cx="9692640" cy="1188720"/>
+          <p:cNvPr id="3" name="Text 0"/>
+          <p:cNvSpPr/>
+          <p:nvPr/>
+        </p:nvSpPr>
+        <p:spPr>
+          <a:xfrm>
+            <a:off x="640080" y="384048"/>
+            <a:ext cx="8982151" cy="768096"/>
           </a:xfrm>
           <a:prstGeom prst="rect">
             <a:avLst/>
@@ -13174,97 +15305,77 @@
           <a:p>
             <a:pPr indent="0" marL="0">
               <a:lnSpc>
-                <a:spcPct val="96000"/>
-              </a:lnSpc>
-              <a:buNone/>
-            </a:pPr>
-            <a:r>
-              <a:rPr lang="en-US" sz="3000" b="1" dirty="0">
-                <a:solidFill>
-                  <a:srgbClr val="FFFFFF"/>
-                </a:solidFill>
-                <a:latin typeface="Yu Gothic" pitchFamily="34" charset="0"/>
-                <a:ea typeface="Yu Gothic" pitchFamily="34" charset="-122"/>
-                <a:cs typeface="Yu Gothic" pitchFamily="34" charset="-120"/>
-              </a:rPr>
-              <a:t>確認テストと修了</a:t>
-            </a:r>
-            <a:endParaRPr lang="en-US" sz="3000" dirty="0"/>
-          </a:p>
-          <a:p>
-            <a:pPr indent="0" marL="0">
-              <a:lnSpc>
-                <a:spcPct val="96000"/>
-              </a:lnSpc>
-              <a:buNone/>
-            </a:pPr>
-            <a:r>
-              <a:rPr lang="en-US" sz="1300" i="1" dirty="0">
-                <a:solidFill>
-                  <a:srgbClr val="9FD8CD"/>
-                </a:solidFill>
-                <a:latin typeface="Calibri" pitchFamily="34" charset="0"/>
-                <a:ea typeface="Calibri" pitchFamily="34" charset="-122"/>
-                <a:cs typeface="Calibri" pitchFamily="34" charset="-120"/>
-              </a:rPr>
-              <a:t>Assessment and Close</a:t>
-            </a:r>
-            <a:endParaRPr lang="en-US" sz="3000" dirty="0"/>
-          </a:p>
-        </p:txBody>
-      </p:sp>
-      <p:sp>
-        <p:nvSpPr>
-          <p:cNvPr id="5" name="Shape 2"/>
-          <p:cNvSpPr/>
-          <p:nvPr/>
-        </p:nvSpPr>
-        <p:spPr>
-          <a:xfrm>
-            <a:off x="640080" y="2084832"/>
-            <a:ext cx="10911535" cy="676656"/>
+                <a:spcPct val="94000"/>
+              </a:lnSpc>
+              <a:buNone/>
+            </a:pPr>
+            <a:r>
+              <a:rPr lang="en-US" sz="2300" b="1" dirty="0">
+                <a:solidFill>
+                  <a:srgbClr val="093259"/>
+                </a:solidFill>
+                <a:latin typeface="Yu Gothic" pitchFamily="34" charset="0"/>
+                <a:ea typeface="Yu Gothic" pitchFamily="34" charset="-122"/>
+                <a:cs typeface="Yu Gothic" pitchFamily="34" charset="-120"/>
+              </a:rPr>
+              <a:t>TTX 10-B 講評 ― 模範解答</a:t>
+            </a:r>
+            <a:endParaRPr lang="en-US" sz="2300" dirty="0"/>
+          </a:p>
+          <a:p>
+            <a:pPr indent="0" marL="0">
+              <a:lnSpc>
+                <a:spcPct val="94000"/>
+              </a:lnSpc>
+              <a:buNone/>
+            </a:pPr>
+            <a:r>
+              <a:rPr lang="en-US" sz="1100" i="1" dirty="0">
+                <a:solidFill>
+                  <a:srgbClr val="12B198"/>
+                </a:solidFill>
+                <a:latin typeface="Calibri" pitchFamily="34" charset="0"/>
+                <a:ea typeface="Calibri" pitchFamily="34" charset="-122"/>
+                <a:cs typeface="Calibri" pitchFamily="34" charset="-120"/>
+              </a:rPr>
+              <a:t>TTX 10-B Debrief — Model Answer</a:t>
+            </a:r>
+            <a:endParaRPr lang="en-US" sz="2300" dirty="0"/>
+          </a:p>
+        </p:txBody>
+      </p:sp>
+      <p:sp>
+        <p:nvSpPr>
+          <p:cNvPr id="4" name="Shape 1"/>
+          <p:cNvSpPr/>
+          <p:nvPr/>
+        </p:nvSpPr>
+        <p:spPr>
+          <a:xfrm>
+            <a:off x="9686239" y="438912"/>
+            <a:ext cx="932688" cy="310896"/>
           </a:xfrm>
           <a:prstGeom prst="roundRect">
             <a:avLst>
-              <a:gd name="adj" fmla="val 6757"/>
+              <a:gd name="adj" fmla="val 14706"/>
             </a:avLst>
           </a:prstGeom>
           <a:solidFill>
-            <a:srgbClr val="06223D"/>
+            <a:srgbClr val="093259"/>
           </a:solidFill>
           <a:ln/>
         </p:spPr>
       </p:sp>
       <p:sp>
         <p:nvSpPr>
-          <p:cNvPr id="6" name="Shape 3"/>
-          <p:cNvSpPr/>
-          <p:nvPr/>
-        </p:nvSpPr>
-        <p:spPr>
-          <a:xfrm>
-            <a:off x="914400" y="2231136"/>
-            <a:ext cx="384048" cy="384048"/>
-          </a:xfrm>
-          <a:prstGeom prst="ellipse">
-            <a:avLst/>
-          </a:prstGeom>
-          <a:solidFill>
-            <a:srgbClr val="12B198"/>
-          </a:solidFill>
-          <a:ln/>
-        </p:spPr>
-      </p:sp>
-      <p:sp>
-        <p:nvSpPr>
-          <p:cNvPr id="7" name="Text 4"/>
-          <p:cNvSpPr/>
-          <p:nvPr/>
-        </p:nvSpPr>
-        <p:spPr>
-          <a:xfrm>
-            <a:off x="914400" y="2231136"/>
-            <a:ext cx="384048" cy="384048"/>
+          <p:cNvPr id="5" name="Text 2"/>
+          <p:cNvSpPr/>
+          <p:nvPr/>
+        </p:nvSpPr>
+        <p:spPr>
+          <a:xfrm>
+            <a:off x="9686239" y="438912"/>
+            <a:ext cx="932688" cy="310896"/>
           </a:xfrm>
           <a:prstGeom prst="rect">
             <a:avLst/>
@@ -13280,7 +15391,7 @@
               <a:buNone/>
             </a:pPr>
             <a:r>
-              <a:rPr lang="en-US" sz="1400" b="1" dirty="0">
+              <a:rPr lang="en-US" sz="1100" b="1" dirty="0">
                 <a:solidFill>
                   <a:srgbClr val="FFFFFF"/>
                 </a:solidFill>
@@ -13288,22 +15399,22 @@
                 <a:ea typeface="Calibri" pitchFamily="34" charset="-122"/>
                 <a:cs typeface="Calibri" pitchFamily="34" charset="-120"/>
               </a:rPr>
-              <a:t>1</a:t>
-            </a:r>
-            <a:endParaRPr lang="en-US" sz="1400" dirty="0"/>
-          </a:p>
-        </p:txBody>
-      </p:sp>
-      <p:sp>
-        <p:nvSpPr>
-          <p:cNvPr id="8" name="Text 5"/>
-          <p:cNvSpPr/>
-          <p:nvPr/>
-        </p:nvSpPr>
-        <p:spPr>
-          <a:xfrm>
-            <a:off x="1517904" y="2176272"/>
-            <a:ext cx="9722815" cy="493776"/>
+              <a:t>DEBRIEF</a:t>
+            </a:r>
+            <a:endParaRPr lang="en-US" sz="1100" dirty="0"/>
+          </a:p>
+        </p:txBody>
+      </p:sp>
+      <p:sp>
+        <p:nvSpPr>
+          <p:cNvPr id="6" name="Text 3"/>
+          <p:cNvSpPr/>
+          <p:nvPr/>
+        </p:nvSpPr>
+        <p:spPr>
+          <a:xfrm>
+            <a:off x="640080" y="1188720"/>
+            <a:ext cx="10911535" cy="530352"/>
           </a:xfrm>
           <a:prstGeom prst="rect">
             <a:avLst/>
@@ -13312,102 +15423,99 @@
           <a:ln/>
         </p:spPr>
         <p:txBody>
-          <a:bodyPr wrap="square" lIns="0" tIns="0" rIns="0" bIns="0" rtlCol="0" anchor="ctr"/>
-          <a:lstStyle/>
-          <a:p>
-            <a:pPr indent="0" marL="0">
-              <a:lnSpc>
-                <a:spcPct val="92000"/>
-              </a:lnSpc>
-              <a:buNone/>
-            </a:pPr>
-            <a:r>
-              <a:rPr lang="en-US" sz="1500" b="1" dirty="0">
-                <a:solidFill>
-                  <a:srgbClr val="FFFFFF"/>
-                </a:solidFill>
-                <a:latin typeface="Yu Gothic" pitchFamily="34" charset="0"/>
-                <a:ea typeface="Yu Gothic" pitchFamily="34" charset="-122"/>
-                <a:cs typeface="Yu Gothic" pitchFamily="34" charset="-120"/>
-              </a:rPr>
-              <a:t>確認テスト10問（15分）。解答と解説はその場で行います。回答は日本語・英語どちらでも可。</a:t>
-            </a:r>
-            <a:endParaRPr lang="en-US" sz="1500" dirty="0"/>
-          </a:p>
-          <a:p>
-            <a:pPr indent="0" marL="0">
-              <a:lnSpc>
-                <a:spcPct val="92000"/>
-              </a:lnSpc>
-              <a:buNone/>
-            </a:pPr>
-            <a:r>
-              <a:rPr lang="en-US" sz="1050" i="1" dirty="0">
-                <a:solidFill>
-                  <a:srgbClr val="9FB6CB"/>
-                </a:solidFill>
-                <a:latin typeface="Calibri" pitchFamily="34" charset="0"/>
-                <a:ea typeface="Calibri" pitchFamily="34" charset="-122"/>
-                <a:cs typeface="Calibri" pitchFamily="34" charset="-120"/>
-              </a:rPr>
-              <a:t>Ten questions, fifteen minutes. Answers follow immediately. Answer in Japanese or English.</a:t>
-            </a:r>
-            <a:endParaRPr lang="en-US" sz="1500" dirty="0"/>
-          </a:p>
-        </p:txBody>
-      </p:sp>
-      <p:sp>
-        <p:nvSpPr>
-          <p:cNvPr id="9" name="Shape 6"/>
-          <p:cNvSpPr/>
-          <p:nvPr/>
-        </p:nvSpPr>
-        <p:spPr>
-          <a:xfrm>
-            <a:off x="640080" y="2962656"/>
-            <a:ext cx="10911535" cy="676656"/>
+          <a:bodyPr wrap="square" lIns="0" tIns="0" rIns="0" bIns="0" rtlCol="0" anchor="t"/>
+          <a:lstStyle/>
+          <a:p>
+            <a:pPr indent="0" marL="0">
+              <a:lnSpc>
+                <a:spcPct val="90000"/>
+              </a:lnSpc>
+              <a:buNone/>
+            </a:pPr>
+            <a:r>
+              <a:rPr lang="en-US" sz="1000" b="1" dirty="0">
+                <a:solidFill>
+                  <a:srgbClr val="0D8A76"/>
+                </a:solidFill>
+                <a:latin typeface="Yu Gothic" pitchFamily="34" charset="0"/>
+                <a:ea typeface="Yu Gothic" pitchFamily="34" charset="-122"/>
+                <a:cs typeface="Yu Gothic" pitchFamily="34" charset="-120"/>
+              </a:rPr>
+              <a:t>狙い　</a:t>
+            </a:r>
+            <a:pPr indent="0" marL="0">
+              <a:lnSpc>
+                <a:spcPct val="90000"/>
+              </a:lnSpc>
+              <a:buNone/>
+            </a:pPr>
+            <a:r>
+              <a:rPr lang="en-US" sz="1150" b="1" dirty="0">
+                <a:solidFill>
+                  <a:srgbClr val="093259"/>
+                </a:solidFill>
+                <a:latin typeface="Yu Gothic" pitchFamily="34" charset="0"/>
+                <a:ea typeface="Yu Gothic" pitchFamily="34" charset="-122"/>
+                <a:cs typeface="Yu Gothic" pitchFamily="34" charset="-120"/>
+              </a:rPr>
+              <a:t>保全と開示は別の行為。保全は受けてよく、開示は受けられない。</a:t>
+            </a:r>
+            <a:endParaRPr lang="en-US" sz="1000" dirty="0"/>
+          </a:p>
+          <a:p>
+            <a:pPr indent="0" marL="0">
+              <a:lnSpc>
+                <a:spcPct val="90000"/>
+              </a:lnSpc>
+              <a:buNone/>
+            </a:pPr>
+            <a:r>
+              <a:rPr lang="en-US" sz="850" i="1" dirty="0">
+                <a:solidFill>
+                  <a:srgbClr val="5F7183"/>
+                </a:solidFill>
+                <a:latin typeface="Calibri" pitchFamily="34" charset="0"/>
+                <a:ea typeface="Calibri" pitchFamily="34" charset="-122"/>
+                <a:cs typeface="Calibri" pitchFamily="34" charset="-120"/>
+              </a:rPr>
+              <a:t>Preservation and disclosure are different acts. You may accept the first, never the second.</a:t>
+            </a:r>
+            <a:endParaRPr lang="en-US" sz="1000" dirty="0"/>
+          </a:p>
+        </p:txBody>
+      </p:sp>
+      <p:sp>
+        <p:nvSpPr>
+          <p:cNvPr id="7" name="Shape 4"/>
+          <p:cNvSpPr/>
+          <p:nvPr/>
+        </p:nvSpPr>
+        <p:spPr>
+          <a:xfrm>
+            <a:off x="640080" y="1773936"/>
+            <a:ext cx="5327752" cy="1091184"/>
           </a:xfrm>
           <a:prstGeom prst="roundRect">
             <a:avLst>
-              <a:gd name="adj" fmla="val 6757"/>
+              <a:gd name="adj" fmla="val 3352"/>
             </a:avLst>
           </a:prstGeom>
           <a:solidFill>
-            <a:srgbClr val="06223D"/>
+            <a:srgbClr val="EFF4F8"/>
           </a:solidFill>
           <a:ln/>
         </p:spPr>
       </p:sp>
       <p:sp>
         <p:nvSpPr>
-          <p:cNvPr id="10" name="Shape 7"/>
-          <p:cNvSpPr/>
-          <p:nvPr/>
-        </p:nvSpPr>
-        <p:spPr>
-          <a:xfrm>
-            <a:off x="914400" y="3108960"/>
-            <a:ext cx="384048" cy="384048"/>
-          </a:xfrm>
-          <a:prstGeom prst="ellipse">
-            <a:avLst/>
-          </a:prstGeom>
-          <a:solidFill>
-            <a:srgbClr val="12B198"/>
-          </a:solidFill>
-          <a:ln/>
-        </p:spPr>
-      </p:sp>
-      <p:sp>
-        <p:nvSpPr>
-          <p:cNvPr id="11" name="Text 8"/>
-          <p:cNvSpPr/>
-          <p:nvPr/>
-        </p:nvSpPr>
-        <p:spPr>
-          <a:xfrm>
-            <a:off x="914400" y="3108960"/>
-            <a:ext cx="384048" cy="384048"/>
+          <p:cNvPr id="8" name="Text 5"/>
+          <p:cNvSpPr/>
+          <p:nvPr/>
+        </p:nvSpPr>
+        <p:spPr>
+          <a:xfrm>
+            <a:off x="877824" y="1865376"/>
+            <a:ext cx="4852264" cy="908304"/>
           </a:xfrm>
           <a:prstGeom prst="rect">
             <a:avLst/>
@@ -13416,141 +15524,102 @@
           <a:ln/>
         </p:spPr>
         <p:txBody>
-          <a:bodyPr wrap="square" lIns="0" tIns="0" rIns="0" bIns="0" rtlCol="0" anchor="ctr"/>
-          <a:lstStyle/>
-          <a:p>
-            <a:pPr algn="ctr" indent="0" marL="0">
-              <a:buNone/>
-            </a:pPr>
-            <a:r>
-              <a:rPr lang="en-US" sz="1400" b="1" dirty="0">
-                <a:solidFill>
-                  <a:srgbClr val="FFFFFF"/>
-                </a:solidFill>
-                <a:latin typeface="Calibri" pitchFamily="34" charset="0"/>
-                <a:ea typeface="Calibri" pitchFamily="34" charset="-122"/>
-                <a:cs typeface="Calibri" pitchFamily="34" charset="-120"/>
-              </a:rPr>
-              <a:t>2</a:t>
-            </a:r>
-            <a:endParaRPr lang="en-US" sz="1400" dirty="0"/>
-          </a:p>
-        </p:txBody>
-      </p:sp>
-      <p:sp>
-        <p:nvSpPr>
-          <p:cNvPr id="12" name="Text 9"/>
-          <p:cNvSpPr/>
-          <p:nvPr/>
-        </p:nvSpPr>
-        <p:spPr>
-          <a:xfrm>
-            <a:off x="1517904" y="3054096"/>
-            <a:ext cx="9722815" cy="493776"/>
-          </a:xfrm>
-          <a:prstGeom prst="rect">
-            <a:avLst/>
-          </a:prstGeom>
-          <a:noFill/>
-          <a:ln/>
-        </p:spPr>
-        <p:txBody>
-          <a:bodyPr wrap="square" lIns="0" tIns="0" rIns="0" bIns="0" rtlCol="0" anchor="ctr"/>
-          <a:lstStyle/>
-          <a:p>
-            <a:pPr indent="0" marL="0">
-              <a:lnSpc>
-                <a:spcPct val="92000"/>
-              </a:lnSpc>
-              <a:buNone/>
-            </a:pPr>
-            <a:r>
-              <a:rPr lang="en-US" sz="1500" b="1" dirty="0">
-                <a:solidFill>
-                  <a:srgbClr val="FFFFFF"/>
-                </a:solidFill>
-                <a:latin typeface="Yu Gothic" pitchFamily="34" charset="0"/>
-                <a:ea typeface="Yu Gothic" pitchFamily="34" charset="-122"/>
-                <a:cs typeface="Yu Gothic" pitchFamily="34" charset="-120"/>
-              </a:rPr>
-              <a:t>何を守っているのか ― People / Asset / Reputation。</a:t>
-            </a:r>
-            <a:endParaRPr lang="en-US" sz="1500" dirty="0"/>
-          </a:p>
-          <a:p>
-            <a:pPr indent="0" marL="0">
-              <a:lnSpc>
-                <a:spcPct val="92000"/>
-              </a:lnSpc>
-              <a:buNone/>
-            </a:pPr>
-            <a:r>
-              <a:rPr lang="en-US" sz="1050" i="1" dirty="0">
-                <a:solidFill>
-                  <a:srgbClr val="9FB6CB"/>
-                </a:solidFill>
-                <a:latin typeface="Calibri" pitchFamily="34" charset="0"/>
-                <a:ea typeface="Calibri" pitchFamily="34" charset="-122"/>
-                <a:cs typeface="Calibri" pitchFamily="34" charset="-120"/>
-              </a:rPr>
-              <a:t>What am I protecting? People, Asset, or Reputation.</a:t>
-            </a:r>
-            <a:endParaRPr lang="en-US" sz="1500" dirty="0"/>
-          </a:p>
-        </p:txBody>
-      </p:sp>
-      <p:sp>
-        <p:nvSpPr>
-          <p:cNvPr id="13" name="Shape 10"/>
-          <p:cNvSpPr/>
-          <p:nvPr/>
-        </p:nvSpPr>
-        <p:spPr>
-          <a:xfrm>
-            <a:off x="640080" y="3840480"/>
-            <a:ext cx="10911535" cy="676656"/>
+          <a:bodyPr wrap="square" lIns="0" tIns="0" rIns="0" bIns="0" rtlCol="0" anchor="t"/>
+          <a:lstStyle/>
+          <a:p>
+            <a:pPr indent="0" marL="0">
+              <a:lnSpc>
+                <a:spcPct val="90000"/>
+              </a:lnSpc>
+              <a:buNone/>
+            </a:pPr>
+            <a:r>
+              <a:rPr lang="en-US" sz="1050" b="1" dirty="0">
+                <a:solidFill>
+                  <a:srgbClr val="093259"/>
+                </a:solidFill>
+                <a:latin typeface="Yu Gothic" pitchFamily="34" charset="0"/>
+                <a:ea typeface="Yu Gothic" pitchFamily="34" charset="-122"/>
+                <a:cs typeface="Yu Gothic" pitchFamily="34" charset="-120"/>
+              </a:rPr>
+              <a:t>管理職であること</a:t>
+            </a:r>
+            <a:endParaRPr lang="en-US" sz="1050" dirty="0"/>
+          </a:p>
+          <a:p>
+            <a:pPr indent="0" marL="0">
+              <a:lnSpc>
+                <a:spcPct val="90000"/>
+              </a:lnSpc>
+              <a:buNone/>
+            </a:pPr>
+            <a:r>
+              <a:rPr lang="en-US" sz="1050" b="1" dirty="0">
+                <a:solidFill>
+                  <a:srgbClr val="1B2733"/>
+                </a:solidFill>
+                <a:latin typeface="Yu Gothic" pitchFamily="34" charset="0"/>
+                <a:ea typeface="Yu Gothic" pitchFamily="34" charset="-122"/>
+                <a:cs typeface="Yu Gothic" pitchFamily="34" charset="-120"/>
+              </a:rPr>
+              <a:t>開示の根拠にならない。可否は契約とクライアントの規程で決まる。</a:t>
+            </a:r>
+            <a:endParaRPr lang="en-US" sz="1050" dirty="0"/>
+          </a:p>
+          <a:p>
+            <a:pPr indent="0" marL="0">
+              <a:lnSpc>
+                <a:spcPct val="90000"/>
+              </a:lnSpc>
+              <a:buNone/>
+            </a:pPr>
+            <a:r>
+              <a:rPr lang="en-US" sz="800" i="1" dirty="0">
+                <a:solidFill>
+                  <a:srgbClr val="5F7183"/>
+                </a:solidFill>
+                <a:latin typeface="Calibri" pitchFamily="34" charset="0"/>
+                <a:ea typeface="Calibri" pitchFamily="34" charset="-122"/>
+                <a:cs typeface="Calibri" pitchFamily="34" charset="-120"/>
+              </a:rPr>
+              <a:t>Not a basis. The contract and the client's rules decide.</a:t>
+            </a:r>
+            <a:endParaRPr lang="en-US" sz="1050" dirty="0"/>
+          </a:p>
+        </p:txBody>
+      </p:sp>
+      <p:sp>
+        <p:nvSpPr>
+          <p:cNvPr id="9" name="Shape 6"/>
+          <p:cNvSpPr/>
+          <p:nvPr/>
+        </p:nvSpPr>
+        <p:spPr>
+          <a:xfrm>
+            <a:off x="6223864" y="1773936"/>
+            <a:ext cx="5327752" cy="1091184"/>
           </a:xfrm>
           <a:prstGeom prst="roundRect">
             <a:avLst>
-              <a:gd name="adj" fmla="val 6757"/>
+              <a:gd name="adj" fmla="val 3352"/>
             </a:avLst>
           </a:prstGeom>
           <a:solidFill>
-            <a:srgbClr val="06223D"/>
+            <a:srgbClr val="EFF4F8"/>
           </a:solidFill>
           <a:ln/>
         </p:spPr>
       </p:sp>
       <p:sp>
         <p:nvSpPr>
-          <p:cNvPr id="14" name="Shape 11"/>
-          <p:cNvSpPr/>
-          <p:nvPr/>
-        </p:nvSpPr>
-        <p:spPr>
-          <a:xfrm>
-            <a:off x="914400" y="3986784"/>
-            <a:ext cx="384048" cy="384048"/>
-          </a:xfrm>
-          <a:prstGeom prst="ellipse">
-            <a:avLst/>
-          </a:prstGeom>
-          <a:solidFill>
-            <a:srgbClr val="12B198"/>
-          </a:solidFill>
-          <a:ln/>
-        </p:spPr>
-      </p:sp>
-      <p:sp>
-        <p:nvSpPr>
-          <p:cNvPr id="15" name="Text 12"/>
-          <p:cNvSpPr/>
-          <p:nvPr/>
-        </p:nvSpPr>
-        <p:spPr>
-          <a:xfrm>
-            <a:off x="914400" y="3986784"/>
-            <a:ext cx="384048" cy="384048"/>
+          <p:cNvPr id="10" name="Text 7"/>
+          <p:cNvSpPr/>
+          <p:nvPr/>
+        </p:nvSpPr>
+        <p:spPr>
+          <a:xfrm>
+            <a:off x="6461608" y="1865376"/>
+            <a:ext cx="4852264" cy="908304"/>
           </a:xfrm>
           <a:prstGeom prst="rect">
             <a:avLst/>
@@ -13559,141 +15628,206 @@
           <a:ln/>
         </p:spPr>
         <p:txBody>
-          <a:bodyPr wrap="square" lIns="0" tIns="0" rIns="0" bIns="0" rtlCol="0" anchor="ctr"/>
-          <a:lstStyle/>
-          <a:p>
-            <a:pPr algn="ctr" indent="0" marL="0">
-              <a:buNone/>
-            </a:pPr>
-            <a:r>
-              <a:rPr lang="en-US" sz="1400" b="1" dirty="0">
-                <a:solidFill>
-                  <a:srgbClr val="FFFFFF"/>
-                </a:solidFill>
-                <a:latin typeface="Calibri" pitchFamily="34" charset="0"/>
-                <a:ea typeface="Calibri" pitchFamily="34" charset="-122"/>
-                <a:cs typeface="Calibri" pitchFamily="34" charset="-120"/>
-              </a:rPr>
-              <a:t>3</a:t>
-            </a:r>
-            <a:endParaRPr lang="en-US" sz="1400" dirty="0"/>
-          </a:p>
-        </p:txBody>
-      </p:sp>
-      <p:sp>
-        <p:nvSpPr>
-          <p:cNvPr id="16" name="Text 13"/>
-          <p:cNvSpPr/>
-          <p:nvPr/>
-        </p:nvSpPr>
-        <p:spPr>
-          <a:xfrm>
-            <a:off x="1517904" y="3931920"/>
-            <a:ext cx="9722815" cy="493776"/>
-          </a:xfrm>
-          <a:prstGeom prst="rect">
-            <a:avLst/>
-          </a:prstGeom>
-          <a:noFill/>
-          <a:ln/>
-        </p:spPr>
-        <p:txBody>
-          <a:bodyPr wrap="square" lIns="0" tIns="0" rIns="0" bIns="0" rtlCol="0" anchor="ctr"/>
-          <a:lstStyle/>
-          <a:p>
-            <a:pPr indent="0" marL="0">
-              <a:lnSpc>
-                <a:spcPct val="92000"/>
-              </a:lnSpc>
-              <a:buNone/>
-            </a:pPr>
-            <a:r>
-              <a:rPr lang="en-US" sz="1500" b="1" dirty="0">
-                <a:solidFill>
-                  <a:srgbClr val="FFFFFF"/>
-                </a:solidFill>
-                <a:latin typeface="Yu Gothic" pitchFamily="34" charset="0"/>
-                <a:ea typeface="Yu Gothic" pitchFamily="34" charset="-122"/>
-                <a:cs typeface="Yu Gothic" pitchFamily="34" charset="-120"/>
-              </a:rPr>
-              <a:t>どの立場で動くのか ― 私人か、補助者か。</a:t>
-            </a:r>
-            <a:endParaRPr lang="en-US" sz="1500" dirty="0"/>
-          </a:p>
-          <a:p>
-            <a:pPr indent="0" marL="0">
-              <a:lnSpc>
-                <a:spcPct val="92000"/>
-              </a:lnSpc>
-              <a:buNone/>
-            </a:pPr>
-            <a:r>
-              <a:rPr lang="en-US" sz="1050" i="1" dirty="0">
-                <a:solidFill>
-                  <a:srgbClr val="9FB6CB"/>
-                </a:solidFill>
-                <a:latin typeface="Calibri" pitchFamily="34" charset="0"/>
-                <a:ea typeface="Calibri" pitchFamily="34" charset="-122"/>
-                <a:cs typeface="Calibri" pitchFamily="34" charset="-120"/>
-              </a:rPr>
-              <a:t>In what capacity am I acting? Citizen, or delegated agent.</a:t>
-            </a:r>
-            <a:endParaRPr lang="en-US" sz="1500" dirty="0"/>
-          </a:p>
-        </p:txBody>
-      </p:sp>
-      <p:sp>
-        <p:nvSpPr>
-          <p:cNvPr id="17" name="Shape 14"/>
-          <p:cNvSpPr/>
-          <p:nvPr/>
-        </p:nvSpPr>
-        <p:spPr>
-          <a:xfrm>
-            <a:off x="640080" y="4718304"/>
-            <a:ext cx="10911535" cy="676656"/>
+          <a:bodyPr wrap="square" lIns="0" tIns="0" rIns="0" bIns="0" rtlCol="0" anchor="t"/>
+          <a:lstStyle/>
+          <a:p>
+            <a:pPr indent="0" marL="0">
+              <a:lnSpc>
+                <a:spcPct val="90000"/>
+              </a:lnSpc>
+              <a:buNone/>
+            </a:pPr>
+            <a:r>
+              <a:rPr lang="en-US" sz="1050" b="1" dirty="0">
+                <a:solidFill>
+                  <a:srgbClr val="093259"/>
+                </a:solidFill>
+                <a:latin typeface="Yu Gothic" pitchFamily="34" charset="0"/>
+                <a:ea typeface="Yu Gothic" pitchFamily="34" charset="-122"/>
+                <a:cs typeface="Yu Gothic" pitchFamily="34" charset="-120"/>
+              </a:rPr>
+              <a:t>警備員の権限</a:t>
+            </a:r>
+            <a:endParaRPr lang="en-US" sz="1050" dirty="0"/>
+          </a:p>
+          <a:p>
+            <a:pPr indent="0" marL="0">
+              <a:lnSpc>
+                <a:spcPct val="90000"/>
+              </a:lnSpc>
+              <a:buNone/>
+            </a:pPr>
+            <a:r>
+              <a:rPr lang="en-US" sz="1050" b="1" dirty="0">
+                <a:solidFill>
+                  <a:srgbClr val="1B2733"/>
+                </a:solidFill>
+                <a:latin typeface="Yu Gothic" pitchFamily="34" charset="0"/>
+                <a:ea typeface="Yu Gothic" pitchFamily="34" charset="-122"/>
+                <a:cs typeface="Yu Gothic" pitchFamily="34" charset="-120"/>
+              </a:rPr>
+              <a:t>判断する立場にない。取り次ぐところまで。</a:t>
+            </a:r>
+            <a:endParaRPr lang="en-US" sz="1050" dirty="0"/>
+          </a:p>
+          <a:p>
+            <a:pPr indent="0" marL="0">
+              <a:lnSpc>
+                <a:spcPct val="90000"/>
+              </a:lnSpc>
+              <a:buNone/>
+            </a:pPr>
+            <a:r>
+              <a:rPr lang="en-US" sz="800" i="1" dirty="0">
+                <a:solidFill>
+                  <a:srgbClr val="5F7183"/>
+                </a:solidFill>
+                <a:latin typeface="Calibri" pitchFamily="34" charset="0"/>
+                <a:ea typeface="Calibri" pitchFamily="34" charset="-122"/>
+                <a:cs typeface="Calibri" pitchFamily="34" charset="-120"/>
+              </a:rPr>
+              <a:t>You are not the decision-maker. Your role ends at referral.</a:t>
+            </a:r>
+            <a:endParaRPr lang="en-US" sz="1050" dirty="0"/>
+          </a:p>
+        </p:txBody>
+      </p:sp>
+      <p:sp>
+        <p:nvSpPr>
+          <p:cNvPr id="11" name="Shape 8"/>
+          <p:cNvSpPr/>
+          <p:nvPr/>
+        </p:nvSpPr>
+        <p:spPr>
+          <a:xfrm>
+            <a:off x="640080" y="2993136"/>
+            <a:ext cx="5327752" cy="1091184"/>
           </a:xfrm>
           <a:prstGeom prst="roundRect">
             <a:avLst>
-              <a:gd name="adj" fmla="val 6757"/>
+              <a:gd name="adj" fmla="val 3352"/>
             </a:avLst>
           </a:prstGeom>
           <a:solidFill>
-            <a:srgbClr val="06223D"/>
+            <a:srgbClr val="EFF4F8"/>
           </a:solidFill>
           <a:ln/>
         </p:spPr>
       </p:sp>
       <p:sp>
         <p:nvSpPr>
-          <p:cNvPr id="18" name="Shape 15"/>
-          <p:cNvSpPr/>
-          <p:nvPr/>
-        </p:nvSpPr>
-        <p:spPr>
-          <a:xfrm>
-            <a:off x="914400" y="4864608"/>
-            <a:ext cx="384048" cy="384048"/>
-          </a:xfrm>
-          <a:prstGeom prst="ellipse">
-            <a:avLst/>
+          <p:cNvPr id="12" name="Text 9"/>
+          <p:cNvSpPr/>
+          <p:nvPr/>
+        </p:nvSpPr>
+        <p:spPr>
+          <a:xfrm>
+            <a:off x="877824" y="3084576"/>
+            <a:ext cx="4852264" cy="908304"/>
+          </a:xfrm>
+          <a:prstGeom prst="rect">
+            <a:avLst/>
+          </a:prstGeom>
+          <a:noFill/>
+          <a:ln/>
+        </p:spPr>
+        <p:txBody>
+          <a:bodyPr wrap="square" lIns="0" tIns="0" rIns="0" bIns="0" rtlCol="0" anchor="t"/>
+          <a:lstStyle/>
+          <a:p>
+            <a:pPr indent="0" marL="0">
+              <a:lnSpc>
+                <a:spcPct val="90000"/>
+              </a:lnSpc>
+              <a:buNone/>
+            </a:pPr>
+            <a:r>
+              <a:rPr lang="en-US" sz="1050" b="1" dirty="0">
+                <a:solidFill>
+                  <a:srgbClr val="093259"/>
+                </a:solidFill>
+                <a:latin typeface="Yu Gothic" pitchFamily="34" charset="0"/>
+                <a:ea typeface="Yu Gothic" pitchFamily="34" charset="-122"/>
+                <a:cs typeface="Yu Gothic" pitchFamily="34" charset="-120"/>
+              </a:rPr>
+              <a:t>断り方</a:t>
+            </a:r>
+            <a:endParaRPr lang="en-US" sz="1050" dirty="0"/>
+          </a:p>
+          <a:p>
+            <a:pPr indent="0" marL="0">
+              <a:lnSpc>
+                <a:spcPct val="90000"/>
+              </a:lnSpc>
+              <a:buNone/>
+            </a:pPr>
+            <a:r>
+              <a:rPr lang="en-US" sz="1050" b="1" dirty="0">
+                <a:solidFill>
+                  <a:srgbClr val="1B2733"/>
+                </a:solidFill>
+                <a:latin typeface="Yu Gothic" pitchFamily="34" charset="0"/>
+                <a:ea typeface="Yu Gothic" pitchFamily="34" charset="-122"/>
+                <a:cs typeface="Yu Gothic" pitchFamily="34" charset="-120"/>
+              </a:rPr>
+              <a:t>「私には開示の判断ができません。担当へお繋ぎします」。</a:t>
+            </a:r>
+            <a:endParaRPr lang="en-US" sz="1050" dirty="0"/>
+          </a:p>
+          <a:p>
+            <a:pPr indent="0" marL="0">
+              <a:lnSpc>
+                <a:spcPct val="90000"/>
+              </a:lnSpc>
+              <a:buNone/>
+            </a:pPr>
+            <a:r>
+              <a:rPr lang="en-US" sz="800" i="1" dirty="0">
+                <a:solidFill>
+                  <a:srgbClr val="5F7183"/>
+                </a:solidFill>
+                <a:latin typeface="Calibri" pitchFamily="34" charset="0"/>
+                <a:ea typeface="Calibri" pitchFamily="34" charset="-122"/>
+                <a:cs typeface="Calibri" pitchFamily="34" charset="-120"/>
+              </a:rPr>
+              <a:t>"I am not able to decide that. Let me connect you with the right person."</a:t>
+            </a:r>
+            <a:endParaRPr lang="en-US" sz="1050" dirty="0"/>
+          </a:p>
+        </p:txBody>
+      </p:sp>
+      <p:sp>
+        <p:nvSpPr>
+          <p:cNvPr id="13" name="Shape 10"/>
+          <p:cNvSpPr/>
+          <p:nvPr/>
+        </p:nvSpPr>
+        <p:spPr>
+          <a:xfrm>
+            <a:off x="6223864" y="2993136"/>
+            <a:ext cx="5327752" cy="1091184"/>
+          </a:xfrm>
+          <a:prstGeom prst="roundRect">
+            <a:avLst>
+              <a:gd name="adj" fmla="val 3352"/>
+            </a:avLst>
           </a:prstGeom>
           <a:solidFill>
-            <a:srgbClr val="12B198"/>
+            <a:srgbClr val="E4F4F0"/>
           </a:solidFill>
           <a:ln/>
         </p:spPr>
       </p:sp>
       <p:sp>
         <p:nvSpPr>
-          <p:cNvPr id="19" name="Text 16"/>
-          <p:cNvSpPr/>
-          <p:nvPr/>
-        </p:nvSpPr>
-        <p:spPr>
-          <a:xfrm>
-            <a:off x="914400" y="4864608"/>
-            <a:ext cx="384048" cy="384048"/>
+          <p:cNvPr id="14" name="Text 11"/>
+          <p:cNvSpPr/>
+          <p:nvPr/>
+        </p:nvSpPr>
+        <p:spPr>
+          <a:xfrm>
+            <a:off x="6461608" y="3084576"/>
+            <a:ext cx="4852264" cy="908304"/>
           </a:xfrm>
           <a:prstGeom prst="rect">
             <a:avLst/>
@@ -13702,37 +15836,389 @@
           <a:ln/>
         </p:spPr>
         <p:txBody>
+          <a:bodyPr wrap="square" lIns="0" tIns="0" rIns="0" bIns="0" rtlCol="0" anchor="t"/>
+          <a:lstStyle/>
+          <a:p>
+            <a:pPr indent="0" marL="0">
+              <a:lnSpc>
+                <a:spcPct val="90000"/>
+              </a:lnSpc>
+              <a:buNone/>
+            </a:pPr>
+            <a:r>
+              <a:rPr lang="en-US" sz="1050" b="1" dirty="0">
+                <a:solidFill>
+                  <a:srgbClr val="0D8A76"/>
+                </a:solidFill>
+                <a:latin typeface="Yu Gothic" pitchFamily="34" charset="0"/>
+                <a:ea typeface="Yu Gothic" pitchFamily="34" charset="-122"/>
+                <a:cs typeface="Yu Gothic" pitchFamily="34" charset="-120"/>
+              </a:rPr>
+              <a:t>「あなたが見て教えて」</a:t>
+            </a:r>
+            <a:endParaRPr lang="en-US" sz="1050" dirty="0"/>
+          </a:p>
+          <a:p>
+            <a:pPr indent="0" marL="0">
+              <a:lnSpc>
+                <a:spcPct val="90000"/>
+              </a:lnSpc>
+              <a:buNone/>
+            </a:pPr>
+            <a:r>
+              <a:rPr lang="en-US" sz="1050" b="1" dirty="0">
+                <a:solidFill>
+                  <a:srgbClr val="1B2733"/>
+                </a:solidFill>
+                <a:latin typeface="Yu Gothic" pitchFamily="34" charset="0"/>
+                <a:ea typeface="Yu Gothic" pitchFamily="34" charset="-122"/>
+                <a:cs typeface="Yu Gothic" pitchFamily="34" charset="-120"/>
+              </a:rPr>
+              <a:t>同じこと。自分が見て伝えるのは開示と同じ結果になる。応じられない。</a:t>
+            </a:r>
+            <a:endParaRPr lang="en-US" sz="1050" dirty="0"/>
+          </a:p>
+          <a:p>
+            <a:pPr indent="0" marL="0">
+              <a:lnSpc>
+                <a:spcPct val="90000"/>
+              </a:lnSpc>
+              <a:buNone/>
+            </a:pPr>
+            <a:r>
+              <a:rPr lang="en-US" sz="800" i="1" dirty="0">
+                <a:solidFill>
+                  <a:srgbClr val="5F7183"/>
+                </a:solidFill>
+                <a:latin typeface="Calibri" pitchFamily="34" charset="0"/>
+                <a:ea typeface="Calibri" pitchFamily="34" charset="-122"/>
+                <a:cs typeface="Calibri" pitchFamily="34" charset="-120"/>
+              </a:rPr>
+              <a:t>The same thing. Looking and telling produces the same result as showing. Decline.</a:t>
+            </a:r>
+            <a:endParaRPr lang="en-US" sz="1050" dirty="0"/>
+          </a:p>
+        </p:txBody>
+      </p:sp>
+      <p:sp>
+        <p:nvSpPr>
+          <p:cNvPr id="15" name="Shape 12"/>
+          <p:cNvSpPr/>
+          <p:nvPr/>
+        </p:nvSpPr>
+        <p:spPr>
+          <a:xfrm>
+            <a:off x="640080" y="4212336"/>
+            <a:ext cx="5327752" cy="1091184"/>
+          </a:xfrm>
+          <a:prstGeom prst="roundRect">
+            <a:avLst>
+              <a:gd name="adj" fmla="val 3352"/>
+            </a:avLst>
+          </a:prstGeom>
+          <a:solidFill>
+            <a:srgbClr val="E4F4F0"/>
+          </a:solidFill>
+          <a:ln/>
+        </p:spPr>
+      </p:sp>
+      <p:sp>
+        <p:nvSpPr>
+          <p:cNvPr id="16" name="Text 13"/>
+          <p:cNvSpPr/>
+          <p:nvPr/>
+        </p:nvSpPr>
+        <p:spPr>
+          <a:xfrm>
+            <a:off x="877824" y="4303776"/>
+            <a:ext cx="4852264" cy="908304"/>
+          </a:xfrm>
+          <a:prstGeom prst="rect">
+            <a:avLst/>
+          </a:prstGeom>
+          <a:noFill/>
+          <a:ln/>
+        </p:spPr>
+        <p:txBody>
+          <a:bodyPr wrap="square" lIns="0" tIns="0" rIns="0" bIns="0" rtlCol="0" anchor="t"/>
+          <a:lstStyle/>
+          <a:p>
+            <a:pPr indent="0" marL="0">
+              <a:lnSpc>
+                <a:spcPct val="90000"/>
+              </a:lnSpc>
+              <a:buNone/>
+            </a:pPr>
+            <a:r>
+              <a:rPr lang="en-US" sz="1050" b="1" dirty="0">
+                <a:solidFill>
+                  <a:srgbClr val="0D8A76"/>
+                </a:solidFill>
+                <a:latin typeface="Yu Gothic" pitchFamily="34" charset="0"/>
+                <a:ea typeface="Yu Gothic" pitchFamily="34" charset="-122"/>
+                <a:cs typeface="Yu Gothic" pitchFamily="34" charset="-120"/>
+              </a:rPr>
+              <a:t>「消さないでくれ」</a:t>
+            </a:r>
+            <a:endParaRPr lang="en-US" sz="1050" dirty="0"/>
+          </a:p>
+          <a:p>
+            <a:pPr indent="0" marL="0">
+              <a:lnSpc>
+                <a:spcPct val="90000"/>
+              </a:lnSpc>
+              <a:buNone/>
+            </a:pPr>
+            <a:r>
+              <a:rPr lang="en-US" sz="1050" b="1" dirty="0">
+                <a:solidFill>
+                  <a:srgbClr val="1B2733"/>
+                </a:solidFill>
+                <a:latin typeface="Yu Gothic" pitchFamily="34" charset="0"/>
+                <a:ea typeface="Yu Gothic" pitchFamily="34" charset="-122"/>
+                <a:cs typeface="Yu Gothic" pitchFamily="34" charset="-120"/>
+              </a:rPr>
+              <a:t>これは受けてよい。保全は上書きを防ぐ行為で、内容を渡す行為ではない。</a:t>
+            </a:r>
+            <a:endParaRPr lang="en-US" sz="1050" dirty="0"/>
+          </a:p>
+          <a:p>
+            <a:pPr indent="0" marL="0">
+              <a:lnSpc>
+                <a:spcPct val="90000"/>
+              </a:lnSpc>
+              <a:buNone/>
+            </a:pPr>
+            <a:r>
+              <a:rPr lang="en-US" sz="800" i="1" dirty="0">
+                <a:solidFill>
+                  <a:srgbClr val="5F7183"/>
+                </a:solidFill>
+                <a:latin typeface="Calibri" pitchFamily="34" charset="0"/>
+                <a:ea typeface="Calibri" pitchFamily="34" charset="-122"/>
+                <a:cs typeface="Calibri" pitchFamily="34" charset="-120"/>
+              </a:rPr>
+              <a:t>This you may accept. Preserving prevents overwrite; it does not hand over content.</a:t>
+            </a:r>
+            <a:endParaRPr lang="en-US" sz="1050" dirty="0"/>
+          </a:p>
+        </p:txBody>
+      </p:sp>
+      <p:sp>
+        <p:nvSpPr>
+          <p:cNvPr id="17" name="Shape 14"/>
+          <p:cNvSpPr/>
+          <p:nvPr/>
+        </p:nvSpPr>
+        <p:spPr>
+          <a:xfrm>
+            <a:off x="6223864" y="4212336"/>
+            <a:ext cx="5327752" cy="1091184"/>
+          </a:xfrm>
+          <a:prstGeom prst="roundRect">
+            <a:avLst>
+              <a:gd name="adj" fmla="val 3352"/>
+            </a:avLst>
+          </a:prstGeom>
+          <a:solidFill>
+            <a:srgbClr val="EFF4F8"/>
+          </a:solidFill>
+          <a:ln/>
+        </p:spPr>
+      </p:sp>
+      <p:sp>
+        <p:nvSpPr>
+          <p:cNvPr id="18" name="Text 15"/>
+          <p:cNvSpPr/>
+          <p:nvPr/>
+        </p:nvSpPr>
+        <p:spPr>
+          <a:xfrm>
+            <a:off x="6461608" y="4303776"/>
+            <a:ext cx="4852264" cy="908304"/>
+          </a:xfrm>
+          <a:prstGeom prst="rect">
+            <a:avLst/>
+          </a:prstGeom>
+          <a:noFill/>
+          <a:ln/>
+        </p:spPr>
+        <p:txBody>
+          <a:bodyPr wrap="square" lIns="0" tIns="0" rIns="0" bIns="0" rtlCol="0" anchor="t"/>
+          <a:lstStyle/>
+          <a:p>
+            <a:pPr indent="0" marL="0">
+              <a:lnSpc>
+                <a:spcPct val="90000"/>
+              </a:lnSpc>
+              <a:buNone/>
+            </a:pPr>
+            <a:r>
+              <a:rPr lang="en-US" sz="1050" b="1" dirty="0">
+                <a:solidFill>
+                  <a:srgbClr val="093259"/>
+                </a:solidFill>
+                <a:latin typeface="Yu Gothic" pitchFamily="34" charset="0"/>
+                <a:ea typeface="Yu Gothic" pitchFamily="34" charset="-122"/>
+                <a:cs typeface="Yu Gothic" pitchFamily="34" charset="-120"/>
+              </a:rPr>
+              <a:t>記録</a:t>
+            </a:r>
+            <a:endParaRPr lang="en-US" sz="1050" dirty="0"/>
+          </a:p>
+          <a:p>
+            <a:pPr indent="0" marL="0">
+              <a:lnSpc>
+                <a:spcPct val="90000"/>
+              </a:lnSpc>
+              <a:buNone/>
+            </a:pPr>
+            <a:r>
+              <a:rPr lang="en-US" sz="1050" b="1" dirty="0">
+                <a:solidFill>
+                  <a:srgbClr val="1B2733"/>
+                </a:solidFill>
+                <a:latin typeface="Yu Gothic" pitchFamily="34" charset="0"/>
+                <a:ea typeface="Yu Gothic" pitchFamily="34" charset="-122"/>
+                <a:cs typeface="Yu Gothic" pitchFamily="34" charset="-120"/>
+              </a:rPr>
+              <a:t>求められた内容、断ったこと、その理由、保全依頼の事実、時刻。</a:t>
+            </a:r>
+            <a:endParaRPr lang="en-US" sz="1050" dirty="0"/>
+          </a:p>
+          <a:p>
+            <a:pPr indent="0" marL="0">
+              <a:lnSpc>
+                <a:spcPct val="90000"/>
+              </a:lnSpc>
+              <a:buNone/>
+            </a:pPr>
+            <a:r>
+              <a:rPr lang="en-US" sz="800" i="1" dirty="0">
+                <a:solidFill>
+                  <a:srgbClr val="5F7183"/>
+                </a:solidFill>
+                <a:latin typeface="Calibri" pitchFamily="34" charset="0"/>
+                <a:ea typeface="Calibri" pitchFamily="34" charset="-122"/>
+                <a:cs typeface="Calibri" pitchFamily="34" charset="-120"/>
+              </a:rPr>
+              <a:t>What was asked, that you declined, why, the preservation request, and the time.</a:t>
+            </a:r>
+            <a:endParaRPr lang="en-US" sz="1050" dirty="0"/>
+          </a:p>
+        </p:txBody>
+      </p:sp>
+      <p:sp>
+        <p:nvSpPr>
+          <p:cNvPr id="19" name="Shape 16"/>
+          <p:cNvSpPr/>
+          <p:nvPr/>
+        </p:nvSpPr>
+        <p:spPr>
+          <a:xfrm>
+            <a:off x="640080" y="5358384"/>
+            <a:ext cx="10911535" cy="493776"/>
+          </a:xfrm>
+          <a:prstGeom prst="roundRect">
+            <a:avLst>
+              <a:gd name="adj" fmla="val 7407"/>
+            </a:avLst>
+          </a:prstGeom>
+          <a:solidFill>
+            <a:srgbClr val="093259"/>
+          </a:solidFill>
+          <a:ln/>
+        </p:spPr>
+      </p:sp>
+      <p:sp>
+        <p:nvSpPr>
+          <p:cNvPr id="20" name="Text 17"/>
+          <p:cNvSpPr/>
+          <p:nvPr/>
+        </p:nvSpPr>
+        <p:spPr>
+          <a:xfrm>
+            <a:off x="877824" y="5404104"/>
+            <a:ext cx="10436047" cy="402336"/>
+          </a:xfrm>
+          <a:prstGeom prst="rect">
+            <a:avLst/>
+          </a:prstGeom>
+          <a:noFill/>
+          <a:ln/>
+        </p:spPr>
+        <p:txBody>
           <a:bodyPr wrap="square" lIns="0" tIns="0" rIns="0" bIns="0" rtlCol="0" anchor="ctr"/>
           <a:lstStyle/>
           <a:p>
-            <a:pPr algn="ctr" indent="0" marL="0">
-              <a:buNone/>
-            </a:pPr>
-            <a:r>
-              <a:rPr lang="en-US" sz="1400" b="1" dirty="0">
+            <a:pPr indent="0" marL="0">
+              <a:lnSpc>
+                <a:spcPct val="86000"/>
+              </a:lnSpc>
+              <a:buNone/>
+            </a:pPr>
+            <a:r>
+              <a:rPr lang="en-US" sz="950" b="1" dirty="0">
+                <a:solidFill>
+                  <a:srgbClr val="12B198"/>
+                </a:solidFill>
+                <a:latin typeface="Yu Gothic" pitchFamily="34" charset="0"/>
+                <a:ea typeface="Yu Gothic" pitchFamily="34" charset="-122"/>
+                <a:cs typeface="Yu Gothic" pitchFamily="34" charset="-120"/>
+              </a:rPr>
+              <a:t>割れる論点　</a:t>
+            </a:r>
+            <a:pPr indent="0" marL="0">
+              <a:lnSpc>
+                <a:spcPct val="86000"/>
+              </a:lnSpc>
+              <a:buNone/>
+            </a:pPr>
+            <a:r>
+              <a:rPr lang="en-US" sz="1100" b="1" dirty="0">
                 <a:solidFill>
                   <a:srgbClr val="FFFFFF"/>
                 </a:solidFill>
-                <a:latin typeface="Calibri" pitchFamily="34" charset="0"/>
-                <a:ea typeface="Calibri" pitchFamily="34" charset="-122"/>
-                <a:cs typeface="Calibri" pitchFamily="34" charset="-120"/>
-              </a:rPr>
-              <a:t>4</a:t>
-            </a:r>
-            <a:endParaRPr lang="en-US" sz="1400" dirty="0"/>
-          </a:p>
-        </p:txBody>
-      </p:sp>
-      <p:sp>
-        <p:nvSpPr>
-          <p:cNvPr id="20" name="Text 17"/>
-          <p:cNvSpPr/>
-          <p:nvPr/>
-        </p:nvSpPr>
-        <p:spPr>
-          <a:xfrm>
-            <a:off x="1517904" y="4809744"/>
-            <a:ext cx="9722815" cy="493776"/>
+                <a:latin typeface="Yu Gothic" pitchFamily="34" charset="0"/>
+                <a:ea typeface="Yu Gothic" pitchFamily="34" charset="-122"/>
+                <a:cs typeface="Yu Gothic" pitchFamily="34" charset="-120"/>
+              </a:rPr>
+              <a:t>保全＝残す／開示＝渡す。警備員が受けられるのは前者だけ。言い換えを見抜けるかが要点。</a:t>
+            </a:r>
+            <a:endParaRPr lang="en-US" sz="950" dirty="0"/>
+          </a:p>
+          <a:p>
+            <a:pPr indent="0" marL="0">
+              <a:lnSpc>
+                <a:spcPct val="86000"/>
+              </a:lnSpc>
+              <a:buNone/>
+            </a:pPr>
+            <a:r>
+              <a:rPr lang="en-US" sz="800" i="1" dirty="0">
+                <a:solidFill>
+                  <a:srgbClr val="9FD8CD"/>
+                </a:solidFill>
+                <a:latin typeface="Calibri" pitchFamily="34" charset="0"/>
+                <a:ea typeface="Calibri" pitchFamily="34" charset="-122"/>
+                <a:cs typeface="Calibri" pitchFamily="34" charset="-120"/>
+              </a:rPr>
+              <a:t>Preserve means keep; disclose means hand over. Only the first is yours to accept. The test is spotting the rephrasing.</a:t>
+            </a:r>
+            <a:endParaRPr lang="en-US" sz="950" dirty="0"/>
+          </a:p>
+        </p:txBody>
+      </p:sp>
+      <p:sp>
+        <p:nvSpPr>
+          <p:cNvPr id="21" name="Text 18"/>
+          <p:cNvSpPr/>
+          <p:nvPr/>
+        </p:nvSpPr>
+        <p:spPr>
+          <a:xfrm>
+            <a:off x="640080" y="5907024"/>
+            <a:ext cx="10911535" cy="310896"/>
           </a:xfrm>
           <a:prstGeom prst="rect">
             <a:avLst/>
@@ -13741,60 +16227,183 @@
           <a:ln/>
         </p:spPr>
         <p:txBody>
+          <a:bodyPr wrap="square" lIns="0" tIns="0" rIns="0" bIns="0" rtlCol="0" anchor="t"/>
+          <a:lstStyle/>
+          <a:p>
+            <a:pPr indent="0" marL="0">
+              <a:lnSpc>
+                <a:spcPct val="88000"/>
+              </a:lnSpc>
+              <a:buNone/>
+            </a:pPr>
+            <a:r>
+              <a:rPr lang="en-US" sz="900" b="1" dirty="0">
+                <a:solidFill>
+                  <a:srgbClr val="0D8A76"/>
+                </a:solidFill>
+                <a:latin typeface="Yu Gothic" pitchFamily="34" charset="0"/>
+                <a:ea typeface="Yu Gothic" pitchFamily="34" charset="-122"/>
+                <a:cs typeface="Yu Gothic" pitchFamily="34" charset="-120"/>
+              </a:rPr>
+              <a:t>Site SOP優先　</a:t>
+            </a:r>
+            <a:pPr indent="0" marL="0">
+              <a:lnSpc>
+                <a:spcPct val="88000"/>
+              </a:lnSpc>
+              <a:buNone/>
+            </a:pPr>
+            <a:r>
+              <a:rPr lang="en-US" sz="900" dirty="0">
+                <a:solidFill>
+                  <a:srgbClr val="1B2733"/>
+                </a:solidFill>
+                <a:latin typeface="Yu Gothic" pitchFamily="34" charset="0"/>
+                <a:ea typeface="Yu Gothic" pitchFamily="34" charset="-122"/>
+                <a:cs typeface="Yu Gothic" pitchFamily="34" charset="-120"/>
+              </a:rPr>
+              <a:t>開示の判断者、保全依頼の受付方法、記録の様式は現場ごとに異なる。Site SOPと契約による。</a:t>
+            </a:r>
+            <a:endParaRPr lang="en-US" sz="900" dirty="0"/>
+          </a:p>
+          <a:p>
+            <a:pPr indent="0" marL="0">
+              <a:lnSpc>
+                <a:spcPct val="88000"/>
+              </a:lnSpc>
+              <a:buNone/>
+            </a:pPr>
+            <a:r>
+              <a:rPr lang="en-US" sz="750" i="1" dirty="0">
+                <a:solidFill>
+                  <a:srgbClr val="5F7183"/>
+                </a:solidFill>
+                <a:latin typeface="Calibri" pitchFamily="34" charset="0"/>
+                <a:ea typeface="Calibri" pitchFamily="34" charset="-122"/>
+                <a:cs typeface="Calibri" pitchFamily="34" charset="-120"/>
+              </a:rPr>
+              <a:t>Who decides on disclosure, how preservation requests are taken, and the record format differ by site.</a:t>
+            </a:r>
+            <a:endParaRPr lang="en-US" sz="900" dirty="0"/>
+          </a:p>
+        </p:txBody>
+      </p:sp>
+      <p:sp>
+        <p:nvSpPr>
+          <p:cNvPr id="22" name="Text 19"/>
+          <p:cNvSpPr/>
+          <p:nvPr/>
+        </p:nvSpPr>
+        <p:spPr>
+          <a:xfrm>
+            <a:off x="640080" y="6272784"/>
+            <a:ext cx="9905695" cy="237744"/>
+          </a:xfrm>
+          <a:prstGeom prst="rect">
+            <a:avLst/>
+          </a:prstGeom>
+          <a:noFill/>
+          <a:ln/>
+        </p:spPr>
+        <p:txBody>
+          <a:bodyPr wrap="square" lIns="0" tIns="0" rIns="0" bIns="0" rtlCol="0" anchor="t"/>
+          <a:lstStyle/>
+          <a:p>
+            <a:pPr indent="0" marL="0">
+              <a:buNone/>
+            </a:pPr>
+            <a:r>
+              <a:rPr lang="en-US" sz="750" b="1" dirty="0">
+                <a:solidFill>
+                  <a:srgbClr val="D6E0E9"/>
+                </a:solidFill>
+                <a:latin typeface="Yu Gothic" pitchFamily="34" charset="0"/>
+                <a:ea typeface="Yu Gothic" pitchFamily="34" charset="-122"/>
+                <a:cs typeface="Yu Gothic" pitchFamily="34" charset="-120"/>
+              </a:rPr>
+              <a:t>ソース　</a:t>
+            </a:r>
+            <a:pPr indent="0" marL="0">
+              <a:buNone/>
+            </a:pPr>
+            <a:r>
+              <a:rPr lang="en-US" sz="750" dirty="0">
+                <a:solidFill>
+                  <a:srgbClr val="5F7183"/>
+                </a:solidFill>
+                <a:latin typeface="Yu Gothic" pitchFamily="34" charset="0"/>
+                <a:ea typeface="Yu Gothic" pitchFamily="34" charset="-122"/>
+                <a:cs typeface="Yu Gothic" pitchFamily="34" charset="-120"/>
+              </a:rPr>
+              <a:t>個人情報保護法、不正競争防止法、経済産業省「営業秘密管理指針」</a:t>
+            </a:r>
+            <a:endParaRPr lang="en-US" sz="750" dirty="0"/>
+          </a:p>
+        </p:txBody>
+      </p:sp>
+      <p:sp>
+        <p:nvSpPr>
+          <p:cNvPr id="23" name="Text 20"/>
+          <p:cNvSpPr/>
+          <p:nvPr/>
+        </p:nvSpPr>
+        <p:spPr>
+          <a:xfrm>
+            <a:off x="640080" y="6382512"/>
+            <a:ext cx="8778240" cy="292608"/>
+          </a:xfrm>
+          <a:prstGeom prst="rect">
+            <a:avLst/>
+          </a:prstGeom>
+          <a:noFill/>
+          <a:ln/>
+        </p:spPr>
+        <p:txBody>
           <a:bodyPr wrap="square" lIns="0" tIns="0" rIns="0" bIns="0" rtlCol="0" anchor="ctr"/>
           <a:lstStyle/>
           <a:p>
             <a:pPr indent="0" marL="0">
-              <a:lnSpc>
-                <a:spcPct val="92000"/>
-              </a:lnSpc>
-              <a:buNone/>
-            </a:pPr>
-            <a:r>
-              <a:rPr lang="en-US" sz="1500" b="1" dirty="0">
-                <a:solidFill>
-                  <a:srgbClr val="FFFFFF"/>
-                </a:solidFill>
-                <a:latin typeface="Yu Gothic" pitchFamily="34" charset="0"/>
-                <a:ea typeface="Yu Gothic" pitchFamily="34" charset="-122"/>
-                <a:cs typeface="Yu Gothic" pitchFamily="34" charset="-120"/>
-              </a:rPr>
-              <a:t>その手段は最小限か ― 越えた場合、何の罪に当たるか。</a:t>
-            </a:r>
-            <a:endParaRPr lang="en-US" sz="1500" dirty="0"/>
-          </a:p>
-          <a:p>
-            <a:pPr indent="0" marL="0">
-              <a:lnSpc>
-                <a:spcPct val="92000"/>
-              </a:lnSpc>
-              <a:buNone/>
-            </a:pPr>
-            <a:r>
-              <a:rPr lang="en-US" sz="1050" i="1" dirty="0">
-                <a:solidFill>
-                  <a:srgbClr val="9FB6CB"/>
-                </a:solidFill>
-                <a:latin typeface="Calibri" pitchFamily="34" charset="0"/>
-                <a:ea typeface="Calibri" pitchFamily="34" charset="-122"/>
-                <a:cs typeface="Calibri" pitchFamily="34" charset="-120"/>
-              </a:rPr>
-              <a:t>Is this the minimum action? If I exceed it, what offence does it become?</a:t>
-            </a:r>
-            <a:endParaRPr lang="en-US" sz="1500" dirty="0"/>
-          </a:p>
-        </p:txBody>
-      </p:sp>
-      <p:sp>
-        <p:nvSpPr>
-          <p:cNvPr id="21" name="Text 18"/>
-          <p:cNvSpPr/>
-          <p:nvPr/>
-        </p:nvSpPr>
-        <p:spPr>
-          <a:xfrm>
-            <a:off x="640080" y="5596128"/>
-            <a:ext cx="10911535" cy="603504"/>
+              <a:buNone/>
+            </a:pPr>
+            <a:r>
+              <a:rPr lang="en-US" sz="900" dirty="0">
+                <a:solidFill>
+                  <a:srgbClr val="5F7183"/>
+                </a:solidFill>
+                <a:latin typeface="Yu Gothic" pitchFamily="34" charset="0"/>
+                <a:ea typeface="Yu Gothic" pitchFamily="34" charset="-122"/>
+                <a:cs typeface="Yu Gothic" pitchFamily="34" charset="-120"/>
+              </a:rPr>
+              <a:t>第10時限｜業務別教育6 警報装置その他当該警備業務を実施するために使用する機器の使用方法  </a:t>
+            </a:r>
+            <a:pPr indent="0" marL="0">
+              <a:buNone/>
+            </a:pPr>
+            <a:r>
+              <a:rPr lang="en-US" sz="850" i="1" dirty="0">
+                <a:solidFill>
+                  <a:srgbClr val="D6E0E9"/>
+                </a:solidFill>
+                <a:latin typeface="Calibri" pitchFamily="34" charset="0"/>
+                <a:ea typeface="Calibri" pitchFamily="34" charset="-122"/>
+                <a:cs typeface="Calibri" pitchFamily="34" charset="-120"/>
+              </a:rPr>
+              <a:t>Period 10 | Task-Specific Training 6 — Security Equipment</a:t>
+            </a:r>
+            <a:endParaRPr lang="en-US" sz="900" dirty="0"/>
+          </a:p>
+        </p:txBody>
+      </p:sp>
+      <p:sp>
+        <p:nvSpPr>
+          <p:cNvPr id="24" name="Text 21"/>
+          <p:cNvSpPr/>
+          <p:nvPr/>
+        </p:nvSpPr>
+        <p:spPr>
+          <a:xfrm>
+            <a:off x="10637215" y="6382512"/>
+            <a:ext cx="914400" cy="292608"/>
           </a:xfrm>
           <a:prstGeom prst="rect">
             <a:avLst/>
@@ -13803,41 +16412,24 @@
           <a:ln/>
         </p:spPr>
         <p:txBody>
-          <a:bodyPr wrap="square" lIns="0" tIns="0" rIns="0" bIns="0" rtlCol="0" anchor="t"/>
-          <a:lstStyle/>
-          <a:p>
-            <a:pPr indent="0" marL="0">
-              <a:buNone/>
-            </a:pPr>
-            <a:r>
-              <a:rPr lang="en-US" sz="1200" b="1" dirty="0">
-                <a:solidFill>
-                  <a:srgbClr val="12B198"/>
-                </a:solidFill>
-                <a:latin typeface="Yu Gothic" pitchFamily="34" charset="0"/>
-                <a:ea typeface="Yu Gothic" pitchFamily="34" charset="-122"/>
-                <a:cs typeface="Yu Gothic" pitchFamily="34" charset="-120"/>
-              </a:rPr>
-              <a:t>本日の教育記録は、警備員指導教育責任者が作成し、所定の期間保存します。</a:t>
-            </a:r>
-            <a:endParaRPr lang="en-US" sz="1200" dirty="0"/>
-          </a:p>
-          <a:p>
-            <a:pPr indent="0" marL="0">
-              <a:buNone/>
-            </a:pPr>
-            <a:r>
-              <a:rPr lang="en-US" sz="950" i="1" dirty="0">
-                <a:solidFill>
-                  <a:srgbClr val="8EA3B7"/>
-                </a:solidFill>
-                <a:latin typeface="Calibri" pitchFamily="34" charset="0"/>
-                <a:ea typeface="Calibri" pitchFamily="34" charset="-122"/>
-                <a:cs typeface="Calibri" pitchFamily="34" charset="-120"/>
-              </a:rPr>
-              <a:t>Today's training record is prepared by the Instruction Supervisor and retained for the prescribed period.</a:t>
-            </a:r>
-            <a:endParaRPr lang="en-US" sz="1200" dirty="0"/>
+          <a:bodyPr wrap="square" lIns="0" tIns="0" rIns="0" bIns="0" rtlCol="0" anchor="ctr"/>
+          <a:lstStyle/>
+          <a:p>
+            <a:pPr algn="r" indent="0" marL="0">
+              <a:buNone/>
+            </a:pPr>
+            <a:r>
+              <a:rPr lang="en-US" sz="1000" dirty="0">
+                <a:solidFill>
+                  <a:srgbClr val="5F7183"/>
+                </a:solidFill>
+                <a:latin typeface="Calibri" pitchFamily="34" charset="0"/>
+                <a:ea typeface="Calibri" pitchFamily="34" charset="-122"/>
+                <a:cs typeface="Calibri" pitchFamily="34" charset="-120"/>
+              </a:rPr>
+              <a:t>9</a:t>
+            </a:r>
+            <a:endParaRPr lang="en-US" sz="1000" dirty="0"/>
           </a:p>
         </p:txBody>
       </p:sp>

--- a/decks/06_10限_機器と総括.pptx
+++ b/decks/06_10限_機器と総括.pptx
@@ -12835,7 +12835,7 @@
                 <a:ea typeface="Yu Gothic" pitchFamily="34" charset="-122"/>
                 <a:cs typeface="Yu Gothic" pitchFamily="34" charset="-120"/>
               </a:rPr>
-              <a:t>TTX 10-A 講評 ― 模範解答</a:t>
+              <a:t>TTX 10-A 模範解答</a:t>
             </a:r>
             <a:endParaRPr lang="en-US" sz="2300" dirty="0"/>
           </a:p>
@@ -12855,7 +12855,7 @@
                 <a:ea typeface="Calibri" pitchFamily="34" charset="-122"/>
                 <a:cs typeface="Calibri" pitchFamily="34" charset="-120"/>
               </a:rPr>
-              <a:t>TTX 10-A Debrief — Model Answer</a:t>
+              <a:t>TTX 10-A — Model Answers</a:t>
             </a:r>
             <a:endParaRPr lang="en-US" sz="2300" dirty="0"/>
           </a:p>
@@ -12924,97 +12924,18 @@
       </p:sp>
       <p:sp>
         <p:nvSpPr>
-          <p:cNvPr id="6" name="Text 3"/>
+          <p:cNvPr id="6" name="Shape 3"/>
           <p:cNvSpPr/>
           <p:nvPr/>
         </p:nvSpPr>
         <p:spPr>
           <a:xfrm>
             <a:off x="640080" y="1188720"/>
-            <a:ext cx="10911535" cy="530352"/>
-          </a:xfrm>
-          <a:prstGeom prst="rect">
-            <a:avLst/>
-          </a:prstGeom>
-          <a:noFill/>
-          <a:ln/>
-        </p:spPr>
-        <p:txBody>
-          <a:bodyPr wrap="square" lIns="0" tIns="0" rIns="0" bIns="0" rtlCol="0" anchor="t"/>
-          <a:lstStyle/>
-          <a:p>
-            <a:pPr indent="0" marL="0">
-              <a:lnSpc>
-                <a:spcPct val="90000"/>
-              </a:lnSpc>
-              <a:buNone/>
-            </a:pPr>
-            <a:r>
-              <a:rPr lang="en-US" sz="1000" b="1" dirty="0">
-                <a:solidFill>
-                  <a:srgbClr val="0D8A76"/>
-                </a:solidFill>
-                <a:latin typeface="Yu Gothic" pitchFamily="34" charset="0"/>
-                <a:ea typeface="Yu Gothic" pitchFamily="34" charset="-122"/>
-                <a:cs typeface="Yu Gothic" pitchFamily="34" charset="-120"/>
-              </a:rPr>
-              <a:t>狙い　</a:t>
-            </a:r>
-            <a:pPr indent="0" marL="0">
-              <a:lnSpc>
-                <a:spcPct val="90000"/>
-              </a:lnSpc>
-              <a:buNone/>
-            </a:pPr>
-            <a:r>
-              <a:rPr lang="en-US" sz="1150" b="1" dirty="0">
-                <a:solidFill>
-                  <a:srgbClr val="093259"/>
-                </a:solidFill>
-                <a:latin typeface="Yu Gothic" pitchFamily="34" charset="0"/>
-                <a:ea typeface="Yu Gothic" pitchFamily="34" charset="-122"/>
-                <a:cs typeface="Yu Gothic" pitchFamily="34" charset="-120"/>
-              </a:rPr>
-              <a:t>2つの事象が重なり、人員が足りない。全部はできない。</a:t>
-            </a:r>
-            <a:endParaRPr lang="en-US" sz="1000" dirty="0"/>
-          </a:p>
-          <a:p>
-            <a:pPr indent="0" marL="0">
-              <a:lnSpc>
-                <a:spcPct val="90000"/>
-              </a:lnSpc>
-              <a:buNone/>
-            </a:pPr>
-            <a:r>
-              <a:rPr lang="en-US" sz="850" i="1" dirty="0">
-                <a:solidFill>
-                  <a:srgbClr val="5F7183"/>
-                </a:solidFill>
-                <a:latin typeface="Calibri" pitchFamily="34" charset="0"/>
-                <a:ea typeface="Calibri" pitchFamily="34" charset="-122"/>
-                <a:cs typeface="Calibri" pitchFamily="34" charset="-120"/>
-              </a:rPr>
-              <a:t>Two events overlap and you are short-staffed. You cannot do everything.</a:t>
-            </a:r>
-            <a:endParaRPr lang="en-US" sz="1000" dirty="0"/>
-          </a:p>
-        </p:txBody>
-      </p:sp>
-      <p:sp>
-        <p:nvSpPr>
-          <p:cNvPr id="7" name="Shape 4"/>
-          <p:cNvSpPr/>
-          <p:nvPr/>
-        </p:nvSpPr>
-        <p:spPr>
-          <a:xfrm>
-            <a:off x="640080" y="1773936"/>
-            <a:ext cx="5327752" cy="1091184"/>
+            <a:ext cx="10911535" cy="683514"/>
           </a:xfrm>
           <a:prstGeom prst="roundRect">
             <a:avLst>
-              <a:gd name="adj" fmla="val 3352"/>
+              <a:gd name="adj" fmla="val 5351"/>
             </a:avLst>
           </a:prstGeom>
           <a:solidFill>
@@ -13025,53 +12946,112 @@
       </p:sp>
       <p:sp>
         <p:nvSpPr>
+          <p:cNvPr id="7" name="Shape 4"/>
+          <p:cNvSpPr/>
+          <p:nvPr/>
+        </p:nvSpPr>
+        <p:spPr>
+          <a:xfrm>
+            <a:off x="841248" y="1356741"/>
+            <a:ext cx="347472" cy="347472"/>
+          </a:xfrm>
+          <a:prstGeom prst="ellipse">
+            <a:avLst/>
+          </a:prstGeom>
+          <a:solidFill>
+            <a:srgbClr val="12B198"/>
+          </a:solidFill>
+          <a:ln/>
+        </p:spPr>
+      </p:sp>
+      <p:sp>
+        <p:nvSpPr>
           <p:cNvPr id="8" name="Text 5"/>
           <p:cNvSpPr/>
           <p:nvPr/>
         </p:nvSpPr>
         <p:spPr>
           <a:xfrm>
-            <a:off x="877824" y="1865376"/>
-            <a:ext cx="4852264" cy="908304"/>
-          </a:xfrm>
-          <a:prstGeom prst="rect">
-            <a:avLst/>
-          </a:prstGeom>
-          <a:noFill/>
-          <a:ln/>
-        </p:spPr>
-        <p:txBody>
-          <a:bodyPr wrap="square" lIns="0" tIns="0" rIns="0" bIns="0" rtlCol="0" anchor="t"/>
-          <a:lstStyle/>
-          <a:p>
-            <a:pPr indent="0" marL="0">
-              <a:lnSpc>
-                <a:spcPct val="90000"/>
-              </a:lnSpc>
-              <a:buNone/>
-            </a:pPr>
-            <a:r>
-              <a:rPr lang="en-US" sz="1050" b="1" dirty="0">
-                <a:solidFill>
-                  <a:srgbClr val="0D8A76"/>
-                </a:solidFill>
-                <a:latin typeface="Yu Gothic" pitchFamily="34" charset="0"/>
-                <a:ea typeface="Yu Gothic" pitchFamily="34" charset="-122"/>
-                <a:cs typeface="Yu Gothic" pitchFamily="34" charset="-120"/>
-              </a:rPr>
-              <a:t>最初の60秒</a:t>
-            </a:r>
-            <a:endParaRPr lang="en-US" sz="1050" dirty="0"/>
-          </a:p>
-          <a:p>
-            <a:pPr indent="0" marL="0">
-              <a:lnSpc>
-                <a:spcPct val="90000"/>
-              </a:lnSpc>
-              <a:buNone/>
-            </a:pPr>
-            <a:r>
-              <a:rPr lang="en-US" sz="1050" b="1" dirty="0">
+            <a:off x="841248" y="1356741"/>
+            <a:ext cx="347472" cy="347472"/>
+          </a:xfrm>
+          <a:prstGeom prst="rect">
+            <a:avLst/>
+          </a:prstGeom>
+          <a:noFill/>
+          <a:ln/>
+        </p:spPr>
+        <p:txBody>
+          <a:bodyPr wrap="square" lIns="0" tIns="0" rIns="0" bIns="0" rtlCol="0" anchor="ctr"/>
+          <a:lstStyle/>
+          <a:p>
+            <a:pPr algn="ctr" indent="0" marL="0">
+              <a:buNone/>
+            </a:pPr>
+            <a:r>
+              <a:rPr lang="en-US" sz="1100" b="1" dirty="0">
+                <a:solidFill>
+                  <a:srgbClr val="FFFFFF"/>
+                </a:solidFill>
+                <a:latin typeface="Calibri" pitchFamily="34" charset="0"/>
+                <a:ea typeface="Calibri" pitchFamily="34" charset="-122"/>
+                <a:cs typeface="Calibri" pitchFamily="34" charset="-120"/>
+              </a:rPr>
+              <a:t>1</a:t>
+            </a:r>
+            <a:endParaRPr lang="en-US" sz="1100" dirty="0"/>
+          </a:p>
+        </p:txBody>
+      </p:sp>
+      <p:sp>
+        <p:nvSpPr>
+          <p:cNvPr id="9" name="Text 6"/>
+          <p:cNvSpPr/>
+          <p:nvPr/>
+        </p:nvSpPr>
+        <p:spPr>
+          <a:xfrm>
+            <a:off x="1280160" y="1252728"/>
+            <a:ext cx="10033711" cy="555498"/>
+          </a:xfrm>
+          <a:prstGeom prst="rect">
+            <a:avLst/>
+          </a:prstGeom>
+          <a:noFill/>
+          <a:ln/>
+        </p:spPr>
+        <p:txBody>
+          <a:bodyPr wrap="square" lIns="0" tIns="0" rIns="0" bIns="0" rtlCol="0" anchor="ctr"/>
+          <a:lstStyle/>
+          <a:p>
+            <a:pPr indent="0" marL="0">
+              <a:lnSpc>
+                <a:spcPct val="88000"/>
+              </a:lnSpc>
+              <a:buNone/>
+            </a:pPr>
+            <a:r>
+              <a:rPr lang="en-US" sz="900" dirty="0">
+                <a:solidFill>
+                  <a:srgbClr val="5F7183"/>
+                </a:solidFill>
+                <a:latin typeface="Yu Gothic" pitchFamily="34" charset="0"/>
+                <a:ea typeface="Yu Gothic" pitchFamily="34" charset="-122"/>
+                <a:cs typeface="Yu Gothic" pitchFamily="34" charset="-120"/>
+              </a:rPr>
+              <a:t>問1　最初の60秒。2名の配置</a:t>
+            </a:r>
+            <a:endParaRPr lang="en-US" sz="900" dirty="0"/>
+          </a:p>
+          <a:p>
+            <a:pPr indent="0" marL="0">
+              <a:lnSpc>
+                <a:spcPct val="88000"/>
+              </a:lnSpc>
+              <a:buNone/>
+            </a:pPr>
+            <a:r>
+              <a:rPr lang="en-US" sz="1200" b="1" dirty="0">
                 <a:solidFill>
                   <a:srgbClr val="1B2733"/>
                 </a:solidFill>
@@ -13079,14 +13059,14 @@
                 <a:ea typeface="Yu Gothic" pitchFamily="34" charset="-122"/>
                 <a:cs typeface="Yu Gothic" pitchFamily="34" charset="-120"/>
               </a:rPr>
-              <a:t>地区表示を読む → 一報を入れる → 現場確認。動く前に一報。</a:t>
-            </a:r>
-            <a:endParaRPr lang="en-US" sz="1050" dirty="0"/>
-          </a:p>
-          <a:p>
-            <a:pPr indent="0" marL="0">
-              <a:lnSpc>
-                <a:spcPct val="90000"/>
+              <a:t>地区表示を読む→一報→現場確認。単独行動の回避と受信機の常駐は両立しない。選んだ方を説明する。</a:t>
+            </a:r>
+            <a:endParaRPr lang="en-US" sz="900" dirty="0"/>
+          </a:p>
+          <a:p>
+            <a:pPr indent="0" marL="0">
+              <a:lnSpc>
+                <a:spcPct val="88000"/>
               </a:lnSpc>
               <a:buNone/>
             </a:pPr>
@@ -13099,26 +13079,189 @@
                 <a:ea typeface="Calibri" pitchFamily="34" charset="-122"/>
                 <a:cs typeface="Calibri" pitchFamily="34" charset="-120"/>
               </a:rPr>
-              <a:t>Read the zone, send the first report, then verify. Report before you move.</a:t>
-            </a:r>
-            <a:endParaRPr lang="en-US" sz="1050" dirty="0"/>
-          </a:p>
-        </p:txBody>
-      </p:sp>
-      <p:sp>
-        <p:nvSpPr>
-          <p:cNvPr id="9" name="Shape 6"/>
-          <p:cNvSpPr/>
-          <p:nvPr/>
-        </p:nvSpPr>
-        <p:spPr>
-          <a:xfrm>
-            <a:off x="6223864" y="1773936"/>
-            <a:ext cx="5327752" cy="1091184"/>
+              <a:t>Read the zone, report, then verify. Not going alone and manning the panel cannot both hold — justify which you chose.</a:t>
+            </a:r>
+            <a:endParaRPr lang="en-US" sz="900" dirty="0"/>
+          </a:p>
+        </p:txBody>
+      </p:sp>
+      <p:sp>
+        <p:nvSpPr>
+          <p:cNvPr id="10" name="Shape 7"/>
+          <p:cNvSpPr/>
+          <p:nvPr/>
+        </p:nvSpPr>
+        <p:spPr>
+          <a:xfrm>
+            <a:off x="640080" y="1972818"/>
+            <a:ext cx="10911535" cy="683514"/>
           </a:xfrm>
           <a:prstGeom prst="roundRect">
             <a:avLst>
-              <a:gd name="adj" fmla="val 3352"/>
+              <a:gd name="adj" fmla="val 5351"/>
+            </a:avLst>
+          </a:prstGeom>
+          <a:solidFill>
+            <a:srgbClr val="EFF4F8"/>
+          </a:solidFill>
+          <a:ln/>
+        </p:spPr>
+      </p:sp>
+      <p:sp>
+        <p:nvSpPr>
+          <p:cNvPr id="11" name="Shape 8"/>
+          <p:cNvSpPr/>
+          <p:nvPr/>
+        </p:nvSpPr>
+        <p:spPr>
+          <a:xfrm>
+            <a:off x="841248" y="2140839"/>
+            <a:ext cx="347472" cy="347472"/>
+          </a:xfrm>
+          <a:prstGeom prst="ellipse">
+            <a:avLst/>
+          </a:prstGeom>
+          <a:solidFill>
+            <a:srgbClr val="12B198"/>
+          </a:solidFill>
+          <a:ln/>
+        </p:spPr>
+      </p:sp>
+      <p:sp>
+        <p:nvSpPr>
+          <p:cNvPr id="12" name="Text 9"/>
+          <p:cNvSpPr/>
+          <p:nvPr/>
+        </p:nvSpPr>
+        <p:spPr>
+          <a:xfrm>
+            <a:off x="841248" y="2140839"/>
+            <a:ext cx="347472" cy="347472"/>
+          </a:xfrm>
+          <a:prstGeom prst="rect">
+            <a:avLst/>
+          </a:prstGeom>
+          <a:noFill/>
+          <a:ln/>
+        </p:spPr>
+        <p:txBody>
+          <a:bodyPr wrap="square" lIns="0" tIns="0" rIns="0" bIns="0" rtlCol="0" anchor="ctr"/>
+          <a:lstStyle/>
+          <a:p>
+            <a:pPr algn="ctr" indent="0" marL="0">
+              <a:buNone/>
+            </a:pPr>
+            <a:r>
+              <a:rPr lang="en-US" sz="1100" b="1" dirty="0">
+                <a:solidFill>
+                  <a:srgbClr val="FFFFFF"/>
+                </a:solidFill>
+                <a:latin typeface="Calibri" pitchFamily="34" charset="0"/>
+                <a:ea typeface="Calibri" pitchFamily="34" charset="-122"/>
+                <a:cs typeface="Calibri" pitchFamily="34" charset="-120"/>
+              </a:rPr>
+              <a:t>2</a:t>
+            </a:r>
+            <a:endParaRPr lang="en-US" sz="1100" dirty="0"/>
+          </a:p>
+        </p:txBody>
+      </p:sp>
+      <p:sp>
+        <p:nvSpPr>
+          <p:cNvPr id="13" name="Text 10"/>
+          <p:cNvSpPr/>
+          <p:nvPr/>
+        </p:nvSpPr>
+        <p:spPr>
+          <a:xfrm>
+            <a:off x="1280160" y="2036826"/>
+            <a:ext cx="10033711" cy="555498"/>
+          </a:xfrm>
+          <a:prstGeom prst="rect">
+            <a:avLst/>
+          </a:prstGeom>
+          <a:noFill/>
+          <a:ln/>
+        </p:spPr>
+        <p:txBody>
+          <a:bodyPr wrap="square" lIns="0" tIns="0" rIns="0" bIns="0" rtlCol="0" anchor="ctr"/>
+          <a:lstStyle/>
+          <a:p>
+            <a:pPr indent="0" marL="0">
+              <a:lnSpc>
+                <a:spcPct val="88000"/>
+              </a:lnSpc>
+              <a:buNone/>
+            </a:pPr>
+            <a:r>
+              <a:rPr lang="en-US" sz="900" dirty="0">
+                <a:solidFill>
+                  <a:srgbClr val="5F7183"/>
+                </a:solidFill>
+                <a:latin typeface="Yu Gothic" pitchFamily="34" charset="0"/>
+                <a:ea typeface="Yu Gothic" pitchFamily="34" charset="-122"/>
+                <a:cs typeface="Yu Gothic" pitchFamily="34" charset="-120"/>
+              </a:rPr>
+              <a:t>問2　通報するか。110か119か</a:t>
+            </a:r>
+            <a:endParaRPr lang="en-US" sz="900" dirty="0"/>
+          </a:p>
+          <a:p>
+            <a:pPr indent="0" marL="0">
+              <a:lnSpc>
+                <a:spcPct val="88000"/>
+              </a:lnSpc>
+              <a:buNone/>
+            </a:pPr>
+            <a:r>
+              <a:rPr lang="en-US" sz="1200" b="1" dirty="0">
+                <a:solidFill>
+                  <a:srgbClr val="1B2733"/>
+                </a:solidFill>
+                <a:latin typeface="Yu Gothic" pitchFamily="34" charset="0"/>
+                <a:ea typeface="Yu Gothic" pitchFamily="34" charset="-122"/>
+                <a:cs typeface="Yu Gothic" pitchFamily="34" charset="-120"/>
+              </a:rPr>
+              <a:t>119番。発報は火災の確定ではないが、防火戸閉鎖まで進んでいる。不正解錠は後から110番。</a:t>
+            </a:r>
+            <a:endParaRPr lang="en-US" sz="900" dirty="0"/>
+          </a:p>
+          <a:p>
+            <a:pPr indent="0" marL="0">
+              <a:lnSpc>
+                <a:spcPct val="88000"/>
+              </a:lnSpc>
+              <a:buNone/>
+            </a:pPr>
+            <a:r>
+              <a:rPr lang="en-US" sz="800" i="1" dirty="0">
+                <a:solidFill>
+                  <a:srgbClr val="5F7183"/>
+                </a:solidFill>
+                <a:latin typeface="Calibri" pitchFamily="34" charset="0"/>
+                <a:ea typeface="Calibri" pitchFamily="34" charset="-122"/>
+                <a:cs typeface="Calibri" pitchFamily="34" charset="-120"/>
+              </a:rPr>
+              <a:t>Call the fire service. The alarm is not proof of fire, but the doors have closed. The unauthorised entry goes to police later.</a:t>
+            </a:r>
+            <a:endParaRPr lang="en-US" sz="900" dirty="0"/>
+          </a:p>
+        </p:txBody>
+      </p:sp>
+      <p:sp>
+        <p:nvSpPr>
+          <p:cNvPr id="14" name="Shape 11"/>
+          <p:cNvSpPr/>
+          <p:nvPr/>
+        </p:nvSpPr>
+        <p:spPr>
+          <a:xfrm>
+            <a:off x="640080" y="2756916"/>
+            <a:ext cx="10911535" cy="683514"/>
+          </a:xfrm>
+          <a:prstGeom prst="roundRect">
+            <a:avLst>
+              <a:gd name="adj" fmla="val 5351"/>
             </a:avLst>
           </a:prstGeom>
           <a:solidFill>
@@ -13129,53 +13272,112 @@
       </p:sp>
       <p:sp>
         <p:nvSpPr>
-          <p:cNvPr id="10" name="Text 7"/>
-          <p:cNvSpPr/>
-          <p:nvPr/>
-        </p:nvSpPr>
-        <p:spPr>
-          <a:xfrm>
-            <a:off x="6461608" y="1865376"/>
-            <a:ext cx="4852264" cy="908304"/>
-          </a:xfrm>
-          <a:prstGeom prst="rect">
-            <a:avLst/>
-          </a:prstGeom>
-          <a:noFill/>
-          <a:ln/>
-        </p:spPr>
-        <p:txBody>
-          <a:bodyPr wrap="square" lIns="0" tIns="0" rIns="0" bIns="0" rtlCol="0" anchor="t"/>
-          <a:lstStyle/>
-          <a:p>
-            <a:pPr indent="0" marL="0">
-              <a:lnSpc>
-                <a:spcPct val="90000"/>
-              </a:lnSpc>
-              <a:buNone/>
-            </a:pPr>
-            <a:r>
-              <a:rPr lang="en-US" sz="1050" b="1" dirty="0">
-                <a:solidFill>
-                  <a:srgbClr val="0D8A76"/>
-                </a:solidFill>
-                <a:latin typeface="Yu Gothic" pitchFamily="34" charset="0"/>
-                <a:ea typeface="Yu Gothic" pitchFamily="34" charset="-122"/>
-                <a:cs typeface="Yu Gothic" pitchFamily="34" charset="-120"/>
-              </a:rPr>
-              <a:t>2名の配置</a:t>
-            </a:r>
-            <a:endParaRPr lang="en-US" sz="1050" dirty="0"/>
-          </a:p>
-          <a:p>
-            <a:pPr indent="0" marL="0">
-              <a:lnSpc>
-                <a:spcPct val="90000"/>
-              </a:lnSpc>
-              <a:buNone/>
-            </a:pPr>
-            <a:r>
-              <a:rPr lang="en-US" sz="1050" b="1" dirty="0">
+          <p:cNvPr id="15" name="Shape 12"/>
+          <p:cNvSpPr/>
+          <p:nvPr/>
+        </p:nvSpPr>
+        <p:spPr>
+          <a:xfrm>
+            <a:off x="841248" y="2924937"/>
+            <a:ext cx="347472" cy="347472"/>
+          </a:xfrm>
+          <a:prstGeom prst="ellipse">
+            <a:avLst/>
+          </a:prstGeom>
+          <a:solidFill>
+            <a:srgbClr val="12B198"/>
+          </a:solidFill>
+          <a:ln/>
+        </p:spPr>
+      </p:sp>
+      <p:sp>
+        <p:nvSpPr>
+          <p:cNvPr id="16" name="Text 13"/>
+          <p:cNvSpPr/>
+          <p:nvPr/>
+        </p:nvSpPr>
+        <p:spPr>
+          <a:xfrm>
+            <a:off x="841248" y="2924937"/>
+            <a:ext cx="347472" cy="347472"/>
+          </a:xfrm>
+          <a:prstGeom prst="rect">
+            <a:avLst/>
+          </a:prstGeom>
+          <a:noFill/>
+          <a:ln/>
+        </p:spPr>
+        <p:txBody>
+          <a:bodyPr wrap="square" lIns="0" tIns="0" rIns="0" bIns="0" rtlCol="0" anchor="ctr"/>
+          <a:lstStyle/>
+          <a:p>
+            <a:pPr algn="ctr" indent="0" marL="0">
+              <a:buNone/>
+            </a:pPr>
+            <a:r>
+              <a:rPr lang="en-US" sz="1100" b="1" dirty="0">
+                <a:solidFill>
+                  <a:srgbClr val="FFFFFF"/>
+                </a:solidFill>
+                <a:latin typeface="Calibri" pitchFamily="34" charset="0"/>
+                <a:ea typeface="Calibri" pitchFamily="34" charset="-122"/>
+                <a:cs typeface="Calibri" pitchFamily="34" charset="-120"/>
+              </a:rPr>
+              <a:t>3</a:t>
+            </a:r>
+            <a:endParaRPr lang="en-US" sz="1100" dirty="0"/>
+          </a:p>
+        </p:txBody>
+      </p:sp>
+      <p:sp>
+        <p:nvSpPr>
+          <p:cNvPr id="17" name="Text 14"/>
+          <p:cNvSpPr/>
+          <p:nvPr/>
+        </p:nvSpPr>
+        <p:spPr>
+          <a:xfrm>
+            <a:off x="1280160" y="2820924"/>
+            <a:ext cx="10033711" cy="555498"/>
+          </a:xfrm>
+          <a:prstGeom prst="rect">
+            <a:avLst/>
+          </a:prstGeom>
+          <a:noFill/>
+          <a:ln/>
+        </p:spPr>
+        <p:txBody>
+          <a:bodyPr wrap="square" lIns="0" tIns="0" rIns="0" bIns="0" rtlCol="0" anchor="ctr"/>
+          <a:lstStyle/>
+          <a:p>
+            <a:pPr indent="0" marL="0">
+              <a:lnSpc>
+                <a:spcPct val="88000"/>
+              </a:lnSpc>
+              <a:buNone/>
+            </a:pPr>
+            <a:r>
+              <a:rPr lang="en-US" sz="900" dirty="0">
+                <a:solidFill>
+                  <a:srgbClr val="5F7183"/>
+                </a:solidFill>
+                <a:latin typeface="Yu Gothic" pitchFamily="34" charset="0"/>
+                <a:ea typeface="Yu Gothic" pitchFamily="34" charset="-122"/>
+                <a:cs typeface="Yu Gothic" pitchFamily="34" charset="-120"/>
+              </a:rPr>
+              <a:t>問3　保全すべきもの。誰に依頼するか</a:t>
+            </a:r>
+            <a:endParaRPr lang="en-US" sz="900" dirty="0"/>
+          </a:p>
+          <a:p>
+            <a:pPr indent="0" marL="0">
+              <a:lnSpc>
+                <a:spcPct val="88000"/>
+              </a:lnSpc>
+              <a:buNone/>
+            </a:pPr>
+            <a:r>
+              <a:rPr lang="en-US" sz="1200" b="1" dirty="0">
                 <a:solidFill>
                   <a:srgbClr val="1B2733"/>
                 </a:solidFill>
@@ -13183,14 +13385,14 @@
                 <a:ea typeface="Yu Gothic" pitchFamily="34" charset="-122"/>
                 <a:cs typeface="Yu Gothic" pitchFamily="34" charset="-120"/>
               </a:rPr>
-              <a:t>単独で行かないことと受信機を無人にしないことは両立しない。</a:t>
-            </a:r>
-            <a:endParaRPr lang="en-US" sz="1050" dirty="0"/>
-          </a:p>
-          <a:p>
-            <a:pPr indent="0" marL="0">
-              <a:lnSpc>
-                <a:spcPct val="90000"/>
+              <a:t>退職者カードの解錠ログと3階カメラ画像。管理権者不在なら緊急連絡体制の次順位者へ。</a:t>
+            </a:r>
+            <a:endParaRPr lang="en-US" sz="900" dirty="0"/>
+          </a:p>
+          <a:p>
+            <a:pPr indent="0" marL="0">
+              <a:lnSpc>
+                <a:spcPct val="88000"/>
               </a:lnSpc>
               <a:buNone/>
             </a:pPr>
@@ -13203,26 +13405,26 @@
                 <a:ea typeface="Calibri" pitchFamily="34" charset="-122"/>
                 <a:cs typeface="Calibri" pitchFamily="34" charset="-120"/>
               </a:rPr>
-              <a:t>Not going alone and not leaving the panel unmanned cannot both hold.</a:t>
-            </a:r>
-            <a:endParaRPr lang="en-US" sz="1050" dirty="0"/>
-          </a:p>
-        </p:txBody>
-      </p:sp>
-      <p:sp>
-        <p:nvSpPr>
-          <p:cNvPr id="11" name="Shape 8"/>
-          <p:cNvSpPr/>
-          <p:nvPr/>
-        </p:nvSpPr>
-        <p:spPr>
-          <a:xfrm>
-            <a:off x="640080" y="2993136"/>
-            <a:ext cx="5327752" cy="1091184"/>
+              <a:t>The leaver-card unlock log and the third-floor footage. With the authority away, go to the next contact.</a:t>
+            </a:r>
+            <a:endParaRPr lang="en-US" sz="900" dirty="0"/>
+          </a:p>
+        </p:txBody>
+      </p:sp>
+      <p:sp>
+        <p:nvSpPr>
+          <p:cNvPr id="18" name="Shape 15"/>
+          <p:cNvSpPr/>
+          <p:nvPr/>
+        </p:nvSpPr>
+        <p:spPr>
+          <a:xfrm>
+            <a:off x="640080" y="3541014"/>
+            <a:ext cx="10911535" cy="683514"/>
           </a:xfrm>
           <a:prstGeom prst="roundRect">
             <a:avLst>
-              <a:gd name="adj" fmla="val 3352"/>
+              <a:gd name="adj" fmla="val 5351"/>
             </a:avLst>
           </a:prstGeom>
           <a:solidFill>
@@ -13233,53 +13435,112 @@
       </p:sp>
       <p:sp>
         <p:nvSpPr>
-          <p:cNvPr id="12" name="Text 9"/>
-          <p:cNvSpPr/>
-          <p:nvPr/>
-        </p:nvSpPr>
-        <p:spPr>
-          <a:xfrm>
-            <a:off x="877824" y="3084576"/>
-            <a:ext cx="4852264" cy="908304"/>
-          </a:xfrm>
-          <a:prstGeom prst="rect">
-            <a:avLst/>
-          </a:prstGeom>
-          <a:noFill/>
-          <a:ln/>
-        </p:spPr>
-        <p:txBody>
-          <a:bodyPr wrap="square" lIns="0" tIns="0" rIns="0" bIns="0" rtlCol="0" anchor="t"/>
-          <a:lstStyle/>
-          <a:p>
-            <a:pPr indent="0" marL="0">
-              <a:lnSpc>
-                <a:spcPct val="90000"/>
-              </a:lnSpc>
-              <a:buNone/>
-            </a:pPr>
-            <a:r>
-              <a:rPr lang="en-US" sz="1050" b="1" dirty="0">
-                <a:solidFill>
-                  <a:srgbClr val="093259"/>
-                </a:solidFill>
-                <a:latin typeface="Yu Gothic" pitchFamily="34" charset="0"/>
-                <a:ea typeface="Yu Gothic" pitchFamily="34" charset="-122"/>
-                <a:cs typeface="Yu Gothic" pitchFamily="34" charset="-120"/>
-              </a:rPr>
-              <a:t>「煙は見えない」</a:t>
-            </a:r>
-            <a:endParaRPr lang="en-US" sz="1050" dirty="0"/>
-          </a:p>
-          <a:p>
-            <a:pPr indent="0" marL="0">
-              <a:lnSpc>
-                <a:spcPct val="90000"/>
-              </a:lnSpc>
-              <a:buNone/>
-            </a:pPr>
-            <a:r>
-              <a:rPr lang="en-US" sz="1050" b="1" dirty="0">
+          <p:cNvPr id="19" name="Shape 16"/>
+          <p:cNvSpPr/>
+          <p:nvPr/>
+        </p:nvSpPr>
+        <p:spPr>
+          <a:xfrm>
+            <a:off x="841248" y="3709035"/>
+            <a:ext cx="347472" cy="347472"/>
+          </a:xfrm>
+          <a:prstGeom prst="ellipse">
+            <a:avLst/>
+          </a:prstGeom>
+          <a:solidFill>
+            <a:srgbClr val="12B198"/>
+          </a:solidFill>
+          <a:ln/>
+        </p:spPr>
+      </p:sp>
+      <p:sp>
+        <p:nvSpPr>
+          <p:cNvPr id="20" name="Text 17"/>
+          <p:cNvSpPr/>
+          <p:nvPr/>
+        </p:nvSpPr>
+        <p:spPr>
+          <a:xfrm>
+            <a:off x="841248" y="3709035"/>
+            <a:ext cx="347472" cy="347472"/>
+          </a:xfrm>
+          <a:prstGeom prst="rect">
+            <a:avLst/>
+          </a:prstGeom>
+          <a:noFill/>
+          <a:ln/>
+        </p:spPr>
+        <p:txBody>
+          <a:bodyPr wrap="square" lIns="0" tIns="0" rIns="0" bIns="0" rtlCol="0" anchor="ctr"/>
+          <a:lstStyle/>
+          <a:p>
+            <a:pPr algn="ctr" indent="0" marL="0">
+              <a:buNone/>
+            </a:pPr>
+            <a:r>
+              <a:rPr lang="en-US" sz="1100" b="1" dirty="0">
+                <a:solidFill>
+                  <a:srgbClr val="FFFFFF"/>
+                </a:solidFill>
+                <a:latin typeface="Calibri" pitchFamily="34" charset="0"/>
+                <a:ea typeface="Calibri" pitchFamily="34" charset="-122"/>
+                <a:cs typeface="Calibri" pitchFamily="34" charset="-120"/>
+              </a:rPr>
+              <a:t>4</a:t>
+            </a:r>
+            <a:endParaRPr lang="en-US" sz="1100" dirty="0"/>
+          </a:p>
+        </p:txBody>
+      </p:sp>
+      <p:sp>
+        <p:nvSpPr>
+          <p:cNvPr id="21" name="Text 18"/>
+          <p:cNvSpPr/>
+          <p:nvPr/>
+        </p:nvSpPr>
+        <p:spPr>
+          <a:xfrm>
+            <a:off x="1280160" y="3605022"/>
+            <a:ext cx="10033711" cy="555498"/>
+          </a:xfrm>
+          <a:prstGeom prst="rect">
+            <a:avLst/>
+          </a:prstGeom>
+          <a:noFill/>
+          <a:ln/>
+        </p:spPr>
+        <p:txBody>
+          <a:bodyPr wrap="square" lIns="0" tIns="0" rIns="0" bIns="0" rtlCol="0" anchor="ctr"/>
+          <a:lstStyle/>
+          <a:p>
+            <a:pPr indent="0" marL="0">
+              <a:lnSpc>
+                <a:spcPct val="88000"/>
+              </a:lnSpc>
+              <a:buNone/>
+            </a:pPr>
+            <a:r>
+              <a:rPr lang="en-US" sz="900" dirty="0">
+                <a:solidFill>
+                  <a:srgbClr val="5F7183"/>
+                </a:solidFill>
+                <a:latin typeface="Yu Gothic" pitchFamily="34" charset="0"/>
+                <a:ea typeface="Yu Gothic" pitchFamily="34" charset="-122"/>
+                <a:cs typeface="Yu Gothic" pitchFamily="34" charset="-120"/>
+              </a:rPr>
+              <a:t>問4　何を後回しにするか</a:t>
+            </a:r>
+            <a:endParaRPr lang="en-US" sz="900" dirty="0"/>
+          </a:p>
+          <a:p>
+            <a:pPr indent="0" marL="0">
+              <a:lnSpc>
+                <a:spcPct val="88000"/>
+              </a:lnSpc>
+              <a:buNone/>
+            </a:pPr>
+            <a:r>
+              <a:rPr lang="en-US" sz="1200" b="1" dirty="0">
                 <a:solidFill>
                   <a:srgbClr val="1B2733"/>
                 </a:solidFill>
@@ -13287,14 +13548,14 @@
                 <a:ea typeface="Yu Gothic" pitchFamily="34" charset="-122"/>
                 <a:cs typeface="Yu Gothic" pitchFamily="34" charset="-120"/>
               </a:rPr>
-              <a:t>火災を否定する根拠にならない。感知器と人の位置は違う。判断を変えない。</a:t>
-            </a:r>
-            <a:endParaRPr lang="en-US" sz="1050" dirty="0"/>
-          </a:p>
-          <a:p>
-            <a:pPr indent="0" marL="0">
-              <a:lnSpc>
-                <a:spcPct val="90000"/>
+              <a:t>不正解錠の追跡。人命と火災対応が先。捨てた判断と理由を記録に残す。</a:t>
+            </a:r>
+            <a:endParaRPr lang="en-US" sz="900" dirty="0"/>
+          </a:p>
+          <a:p>
+            <a:pPr indent="0" marL="0">
+              <a:lnSpc>
+                <a:spcPct val="88000"/>
               </a:lnSpc>
               <a:buNone/>
             </a:pPr>
@@ -13307,83 +13568,97 @@
                 <a:ea typeface="Calibri" pitchFamily="34" charset="-122"/>
                 <a:cs typeface="Calibri" pitchFamily="34" charset="-120"/>
               </a:rPr>
-              <a:t>It does not rule out a fire. The detector is not where the people are.</a:t>
-            </a:r>
-            <a:endParaRPr lang="en-US" sz="1050" dirty="0"/>
-          </a:p>
-        </p:txBody>
-      </p:sp>
-      <p:sp>
-        <p:nvSpPr>
-          <p:cNvPr id="13" name="Shape 10"/>
-          <p:cNvSpPr/>
-          <p:nvPr/>
-        </p:nvSpPr>
-        <p:spPr>
-          <a:xfrm>
-            <a:off x="6223864" y="2993136"/>
-            <a:ext cx="5327752" cy="1091184"/>
+              <a:t>Pursuing the unauthorised entry. Life and fire come first — and record what you dropped, and why.</a:t>
+            </a:r>
+            <a:endParaRPr lang="en-US" sz="900" dirty="0"/>
+          </a:p>
+        </p:txBody>
+      </p:sp>
+      <p:sp>
+        <p:nvSpPr>
+          <p:cNvPr id="22" name="Shape 19"/>
+          <p:cNvSpPr/>
+          <p:nvPr/>
+        </p:nvSpPr>
+        <p:spPr>
+          <a:xfrm>
+            <a:off x="640080" y="4334256"/>
+            <a:ext cx="10911535" cy="420624"/>
           </a:xfrm>
           <a:prstGeom prst="roundRect">
             <a:avLst>
-              <a:gd name="adj" fmla="val 3352"/>
+              <a:gd name="adj" fmla="val 8696"/>
             </a:avLst>
           </a:prstGeom>
           <a:solidFill>
-            <a:srgbClr val="EFF4F8"/>
+            <a:srgbClr val="EEF6FA"/>
           </a:solidFill>
           <a:ln/>
         </p:spPr>
       </p:sp>
       <p:sp>
         <p:nvSpPr>
-          <p:cNvPr id="14" name="Text 11"/>
-          <p:cNvSpPr/>
-          <p:nvPr/>
-        </p:nvSpPr>
-        <p:spPr>
-          <a:xfrm>
-            <a:off x="6461608" y="3084576"/>
-            <a:ext cx="4852264" cy="908304"/>
-          </a:xfrm>
-          <a:prstGeom prst="rect">
-            <a:avLst/>
-          </a:prstGeom>
-          <a:noFill/>
-          <a:ln/>
-        </p:spPr>
-        <p:txBody>
-          <a:bodyPr wrap="square" lIns="0" tIns="0" rIns="0" bIns="0" rtlCol="0" anchor="t"/>
-          <a:lstStyle/>
-          <a:p>
-            <a:pPr indent="0" marL="0">
-              <a:lnSpc>
-                <a:spcPct val="90000"/>
-              </a:lnSpc>
-              <a:buNone/>
-            </a:pPr>
-            <a:r>
-              <a:rPr lang="en-US" sz="1050" b="1" dirty="0">
-                <a:solidFill>
-                  <a:srgbClr val="093259"/>
-                </a:solidFill>
-                <a:latin typeface="Yu Gothic" pitchFamily="34" charset="0"/>
-                <a:ea typeface="Yu Gothic" pitchFamily="34" charset="-122"/>
-                <a:cs typeface="Yu Gothic" pitchFamily="34" charset="-120"/>
-              </a:rPr>
-              <a:t>第2報（4階西）</a:t>
-            </a:r>
-            <a:endParaRPr lang="en-US" sz="1050" dirty="0"/>
-          </a:p>
-          <a:p>
-            <a:pPr indent="0" marL="0">
-              <a:lnSpc>
-                <a:spcPct val="90000"/>
-              </a:lnSpc>
-              <a:buNone/>
-            </a:pPr>
-            <a:r>
-              <a:rPr lang="en-US" sz="1050" b="1" dirty="0">
+          <p:cNvPr id="23" name="Text 20"/>
+          <p:cNvSpPr/>
+          <p:nvPr/>
+        </p:nvSpPr>
+        <p:spPr>
+          <a:xfrm>
+            <a:off x="859536" y="4361688"/>
+            <a:ext cx="10472623" cy="365760"/>
+          </a:xfrm>
+          <a:prstGeom prst="rect">
+            <a:avLst/>
+          </a:prstGeom>
+          <a:noFill/>
+          <a:ln/>
+        </p:spPr>
+        <p:txBody>
+          <a:bodyPr wrap="square" lIns="0" tIns="0" rIns="0" bIns="0" rtlCol="0" anchor="ctr"/>
+          <a:lstStyle/>
+          <a:p>
+            <a:pPr indent="0" marL="0">
+              <a:lnSpc>
+                <a:spcPct val="86000"/>
+              </a:lnSpc>
+              <a:buNone/>
+            </a:pPr>
+            <a:r>
+              <a:rPr lang="en-US" sz="850" b="1" dirty="0">
+                <a:solidFill>
+                  <a:srgbClr val="0D8A76"/>
+                </a:solidFill>
+                <a:latin typeface="Yu Gothic" pitchFamily="34" charset="0"/>
+                <a:ea typeface="Yu Gothic" pitchFamily="34" charset="-122"/>
+                <a:cs typeface="Yu Gothic" pitchFamily="34" charset="-120"/>
+              </a:rPr>
+              <a:t>追加付与①　</a:t>
+            </a:r>
+            <a:pPr indent="0" marL="0">
+              <a:lnSpc>
+                <a:spcPct val="86000"/>
+              </a:lnSpc>
+              <a:buNone/>
+            </a:pPr>
+            <a:r>
+              <a:rPr lang="en-US" sz="850" dirty="0">
+                <a:solidFill>
+                  <a:srgbClr val="5F7183"/>
+                </a:solidFill>
+                <a:latin typeface="Yu Gothic" pitchFamily="34" charset="0"/>
+                <a:ea typeface="Yu Gothic" pitchFamily="34" charset="-122"/>
+                <a:cs typeface="Yu Gothic" pitchFamily="34" charset="-120"/>
+              </a:rPr>
+              <a:t>「煙は見えない」と無線　→　</a:t>
+            </a:r>
+            <a:pPr indent="0" marL="0">
+              <a:lnSpc>
+                <a:spcPct val="86000"/>
+              </a:lnSpc>
+              <a:buNone/>
+            </a:pPr>
+            <a:r>
+              <a:rPr lang="en-US" sz="1100" b="1" dirty="0">
                 <a:solidFill>
                   <a:srgbClr val="1B2733"/>
                 </a:solidFill>
@@ -13391,19 +13666,19 @@
                 <a:ea typeface="Yu Gothic" pitchFamily="34" charset="-122"/>
                 <a:cs typeface="Yu Gothic" pitchFamily="34" charset="-120"/>
               </a:rPr>
-              <a:t>2区画同時発報。非火災報の可能性が下がる。通報判断を切り替える。</a:t>
-            </a:r>
-            <a:endParaRPr lang="en-US" sz="1050" dirty="0"/>
-          </a:p>
-          <a:p>
-            <a:pPr indent="0" marL="0">
-              <a:lnSpc>
-                <a:spcPct val="90000"/>
-              </a:lnSpc>
-              <a:buNone/>
-            </a:pPr>
-            <a:r>
-              <a:rPr lang="en-US" sz="800" i="1" dirty="0">
+              <a:t>判断を変えない。感知器の位置と人がいる位置は違う。火災を否定する根拠にならない。</a:t>
+            </a:r>
+            <a:endParaRPr lang="en-US" sz="850" dirty="0"/>
+          </a:p>
+          <a:p>
+            <a:pPr indent="0" marL="0">
+              <a:lnSpc>
+                <a:spcPct val="86000"/>
+              </a:lnSpc>
+              <a:buNone/>
+            </a:pPr>
+            <a:r>
+              <a:rPr lang="en-US" sz="750" i="1" dirty="0">
                 <a:solidFill>
                   <a:srgbClr val="5F7183"/>
                 </a:solidFill>
@@ -13411,63 +13686,63 @@
                 <a:ea typeface="Calibri" pitchFamily="34" charset="-122"/>
                 <a:cs typeface="Calibri" pitchFamily="34" charset="-120"/>
               </a:rPr>
-              <a:t>Two zones at once. A false alarm is less likely. Change your call decision.</a:t>
-            </a:r>
-            <a:endParaRPr lang="en-US" sz="1050" dirty="0"/>
-          </a:p>
-        </p:txBody>
-      </p:sp>
-      <p:sp>
-        <p:nvSpPr>
-          <p:cNvPr id="15" name="Shape 12"/>
-          <p:cNvSpPr/>
-          <p:nvPr/>
-        </p:nvSpPr>
-        <p:spPr>
-          <a:xfrm>
-            <a:off x="640080" y="4212336"/>
-            <a:ext cx="5327752" cy="1091184"/>
+              <a:t>Do not change your assessment. The detector is not where the people are, and this does not rule out a fire.</a:t>
+            </a:r>
+            <a:endParaRPr lang="en-US" sz="850" dirty="0"/>
+          </a:p>
+        </p:txBody>
+      </p:sp>
+      <p:sp>
+        <p:nvSpPr>
+          <p:cNvPr id="24" name="Shape 21"/>
+          <p:cNvSpPr/>
+          <p:nvPr/>
+        </p:nvSpPr>
+        <p:spPr>
+          <a:xfrm>
+            <a:off x="640080" y="4828032"/>
+            <a:ext cx="10911535" cy="420624"/>
           </a:xfrm>
           <a:prstGeom prst="roundRect">
             <a:avLst>
-              <a:gd name="adj" fmla="val 3352"/>
+              <a:gd name="adj" fmla="val 8696"/>
             </a:avLst>
           </a:prstGeom>
           <a:solidFill>
-            <a:srgbClr val="E4F4F0"/>
+            <a:srgbClr val="EEF6FA"/>
           </a:solidFill>
           <a:ln/>
         </p:spPr>
       </p:sp>
       <p:sp>
         <p:nvSpPr>
-          <p:cNvPr id="16" name="Text 13"/>
-          <p:cNvSpPr/>
-          <p:nvPr/>
-        </p:nvSpPr>
-        <p:spPr>
-          <a:xfrm>
-            <a:off x="877824" y="4303776"/>
-            <a:ext cx="4852264" cy="908304"/>
-          </a:xfrm>
-          <a:prstGeom prst="rect">
-            <a:avLst/>
-          </a:prstGeom>
-          <a:noFill/>
-          <a:ln/>
-        </p:spPr>
-        <p:txBody>
-          <a:bodyPr wrap="square" lIns="0" tIns="0" rIns="0" bIns="0" rtlCol="0" anchor="t"/>
-          <a:lstStyle/>
-          <a:p>
-            <a:pPr indent="0" marL="0">
-              <a:lnSpc>
-                <a:spcPct val="90000"/>
-              </a:lnSpc>
-              <a:buNone/>
-            </a:pPr>
-            <a:r>
-              <a:rPr lang="en-US" sz="1050" b="1" dirty="0">
+          <p:cNvPr id="25" name="Text 22"/>
+          <p:cNvSpPr/>
+          <p:nvPr/>
+        </p:nvSpPr>
+        <p:spPr>
+          <a:xfrm>
+            <a:off x="859536" y="4855464"/>
+            <a:ext cx="10472623" cy="365760"/>
+          </a:xfrm>
+          <a:prstGeom prst="rect">
+            <a:avLst/>
+          </a:prstGeom>
+          <a:noFill/>
+          <a:ln/>
+        </p:spPr>
+        <p:txBody>
+          <a:bodyPr wrap="square" lIns="0" tIns="0" rIns="0" bIns="0" rtlCol="0" anchor="ctr"/>
+          <a:lstStyle/>
+          <a:p>
+            <a:pPr indent="0" marL="0">
+              <a:lnSpc>
+                <a:spcPct val="86000"/>
+              </a:lnSpc>
+              <a:buNone/>
+            </a:pPr>
+            <a:r>
+              <a:rPr lang="en-US" sz="850" b="1" dirty="0">
                 <a:solidFill>
                   <a:srgbClr val="0D8A76"/>
                 </a:solidFill>
@@ -13475,19 +13750,33 @@
                 <a:ea typeface="Yu Gothic" pitchFamily="34" charset="-122"/>
                 <a:cs typeface="Yu Gothic" pitchFamily="34" charset="-120"/>
               </a:rPr>
-              <a:t>ログと画像</a:t>
-            </a:r>
-            <a:endParaRPr lang="en-US" sz="1050" dirty="0"/>
-          </a:p>
-          <a:p>
-            <a:pPr indent="0" marL="0">
-              <a:lnSpc>
-                <a:spcPct val="90000"/>
-              </a:lnSpc>
-              <a:buNone/>
-            </a:pPr>
-            <a:r>
-              <a:rPr lang="en-US" sz="1050" b="1" dirty="0">
+              <a:t>追加付与②　</a:t>
+            </a:r>
+            <a:pPr indent="0" marL="0">
+              <a:lnSpc>
+                <a:spcPct val="86000"/>
+              </a:lnSpc>
+              <a:buNone/>
+            </a:pPr>
+            <a:r>
+              <a:rPr lang="en-US" sz="850" dirty="0">
+                <a:solidFill>
+                  <a:srgbClr val="5F7183"/>
+                </a:solidFill>
+                <a:latin typeface="Yu Gothic" pitchFamily="34" charset="0"/>
+                <a:ea typeface="Yu Gothic" pitchFamily="34" charset="-122"/>
+                <a:cs typeface="Yu Gothic" pitchFamily="34" charset="-120"/>
+              </a:rPr>
+              <a:t>4階西区画で第2報　→　</a:t>
+            </a:r>
+            <a:pPr indent="0" marL="0">
+              <a:lnSpc>
+                <a:spcPct val="86000"/>
+              </a:lnSpc>
+              <a:buNone/>
+            </a:pPr>
+            <a:r>
+              <a:rPr lang="en-US" sz="1100" b="1" dirty="0">
                 <a:solidFill>
                   <a:srgbClr val="1B2733"/>
                 </a:solidFill>
@@ -13495,19 +13784,19 @@
                 <a:ea typeface="Yu Gothic" pitchFamily="34" charset="-122"/>
                 <a:cs typeface="Yu Gothic" pitchFamily="34" charset="-120"/>
               </a:rPr>
-              <a:t>退職者カードの解錠記録は保全対象。上書き前に依頼する。</a:t>
-            </a:r>
-            <a:endParaRPr lang="en-US" sz="1050" dirty="0"/>
-          </a:p>
-          <a:p>
-            <a:pPr indent="0" marL="0">
-              <a:lnSpc>
-                <a:spcPct val="90000"/>
-              </a:lnSpc>
-              <a:buNone/>
-            </a:pPr>
-            <a:r>
-              <a:rPr lang="en-US" sz="800" i="1" dirty="0">
+              <a:t>2区画同時発報。非火災報の可能性が下がる。全館避難と通報の判断へ切り替える。</a:t>
+            </a:r>
+            <a:endParaRPr lang="en-US" sz="850" dirty="0"/>
+          </a:p>
+          <a:p>
+            <a:pPr indent="0" marL="0">
+              <a:lnSpc>
+                <a:spcPct val="86000"/>
+              </a:lnSpc>
+              <a:buNone/>
+            </a:pPr>
+            <a:r>
+              <a:rPr lang="en-US" sz="750" i="1" dirty="0">
                 <a:solidFill>
                   <a:srgbClr val="5F7183"/>
                 </a:solidFill>
@@ -13515,130 +13804,26 @@
                 <a:ea typeface="Calibri" pitchFamily="34" charset="-122"/>
                 <a:cs typeface="Calibri" pitchFamily="34" charset="-120"/>
               </a:rPr>
-              <a:t>The leaver-card unlock must be preserved. Request it before it is overwritten.</a:t>
-            </a:r>
-            <a:endParaRPr lang="en-US" sz="1050" dirty="0"/>
-          </a:p>
-        </p:txBody>
-      </p:sp>
-      <p:sp>
-        <p:nvSpPr>
-          <p:cNvPr id="17" name="Shape 14"/>
-          <p:cNvSpPr/>
-          <p:nvPr/>
-        </p:nvSpPr>
-        <p:spPr>
-          <a:xfrm>
-            <a:off x="6223864" y="4212336"/>
-            <a:ext cx="5327752" cy="1091184"/>
+              <a:t>Two zones at once makes a false alarm unlikely. Switch to full evacuation and call.</a:t>
+            </a:r>
+            <a:endParaRPr lang="en-US" sz="850" dirty="0"/>
+          </a:p>
+        </p:txBody>
+      </p:sp>
+      <p:sp>
+        <p:nvSpPr>
+          <p:cNvPr id="26" name="Shape 23"/>
+          <p:cNvSpPr/>
+          <p:nvPr/>
+        </p:nvSpPr>
+        <p:spPr>
+          <a:xfrm>
+            <a:off x="640080" y="5358384"/>
+            <a:ext cx="10911535" cy="457200"/>
           </a:xfrm>
           <a:prstGeom prst="roundRect">
             <a:avLst>
-              <a:gd name="adj" fmla="val 3352"/>
-            </a:avLst>
-          </a:prstGeom>
-          <a:solidFill>
-            <a:srgbClr val="EFF4F8"/>
-          </a:solidFill>
-          <a:ln/>
-        </p:spPr>
-      </p:sp>
-      <p:sp>
-        <p:nvSpPr>
-          <p:cNvPr id="18" name="Text 15"/>
-          <p:cNvSpPr/>
-          <p:nvPr/>
-        </p:nvSpPr>
-        <p:spPr>
-          <a:xfrm>
-            <a:off x="6461608" y="4303776"/>
-            <a:ext cx="4852264" cy="908304"/>
-          </a:xfrm>
-          <a:prstGeom prst="rect">
-            <a:avLst/>
-          </a:prstGeom>
-          <a:noFill/>
-          <a:ln/>
-        </p:spPr>
-        <p:txBody>
-          <a:bodyPr wrap="square" lIns="0" tIns="0" rIns="0" bIns="0" rtlCol="0" anchor="t"/>
-          <a:lstStyle/>
-          <a:p>
-            <a:pPr indent="0" marL="0">
-              <a:lnSpc>
-                <a:spcPct val="90000"/>
-              </a:lnSpc>
-              <a:buNone/>
-            </a:pPr>
-            <a:r>
-              <a:rPr lang="en-US" sz="1050" b="1" dirty="0">
-                <a:solidFill>
-                  <a:srgbClr val="093259"/>
-                </a:solidFill>
-                <a:latin typeface="Yu Gothic" pitchFamily="34" charset="0"/>
-                <a:ea typeface="Yu Gothic" pitchFamily="34" charset="-122"/>
-                <a:cs typeface="Yu Gothic" pitchFamily="34" charset="-120"/>
-              </a:rPr>
-              <a:t>管理権者不在</a:t>
-            </a:r>
-            <a:endParaRPr lang="en-US" sz="1050" dirty="0"/>
-          </a:p>
-          <a:p>
-            <a:pPr indent="0" marL="0">
-              <a:lnSpc>
-                <a:spcPct val="90000"/>
-              </a:lnSpc>
-              <a:buNone/>
-            </a:pPr>
-            <a:r>
-              <a:rPr lang="en-US" sz="1050" b="1" dirty="0">
-                <a:solidFill>
-                  <a:srgbClr val="1B2733"/>
-                </a:solidFill>
-                <a:latin typeface="Yu Gothic" pitchFamily="34" charset="0"/>
-                <a:ea typeface="Yu Gothic" pitchFamily="34" charset="-122"/>
-                <a:cs typeface="Yu Gothic" pitchFamily="34" charset="-120"/>
-              </a:rPr>
-              <a:t>緊急連絡体制の次順位者へ。不在を理由に何もしないのが最も悪い。</a:t>
-            </a:r>
-            <a:endParaRPr lang="en-US" sz="1050" dirty="0"/>
-          </a:p>
-          <a:p>
-            <a:pPr indent="0" marL="0">
-              <a:lnSpc>
-                <a:spcPct val="90000"/>
-              </a:lnSpc>
-              <a:buNone/>
-            </a:pPr>
-            <a:r>
-              <a:rPr lang="en-US" sz="800" i="1" dirty="0">
-                <a:solidFill>
-                  <a:srgbClr val="5F7183"/>
-                </a:solidFill>
-                <a:latin typeface="Calibri" pitchFamily="34" charset="0"/>
-                <a:ea typeface="Calibri" pitchFamily="34" charset="-122"/>
-                <a:cs typeface="Calibri" pitchFamily="34" charset="-120"/>
-              </a:rPr>
-              <a:t>Go to the next contact. Doing nothing because they are away is the worst outcome.</a:t>
-            </a:r>
-            <a:endParaRPr lang="en-US" sz="1050" dirty="0"/>
-          </a:p>
-        </p:txBody>
-      </p:sp>
-      <p:sp>
-        <p:nvSpPr>
-          <p:cNvPr id="19" name="Shape 16"/>
-          <p:cNvSpPr/>
-          <p:nvPr/>
-        </p:nvSpPr>
-        <p:spPr>
-          <a:xfrm>
-            <a:off x="640080" y="5358384"/>
-            <a:ext cx="10911535" cy="493776"/>
-          </a:xfrm>
-          <a:prstGeom prst="roundRect">
-            <a:avLst>
-              <a:gd name="adj" fmla="val 7407"/>
+              <a:gd name="adj" fmla="val 8000"/>
             </a:avLst>
           </a:prstGeom>
           <a:solidFill>
@@ -13649,14 +13834,14 @@
       </p:sp>
       <p:sp>
         <p:nvSpPr>
-          <p:cNvPr id="20" name="Text 17"/>
-          <p:cNvSpPr/>
-          <p:nvPr/>
-        </p:nvSpPr>
-        <p:spPr>
-          <a:xfrm>
-            <a:off x="877824" y="5404104"/>
-            <a:ext cx="10436047" cy="402336"/>
+          <p:cNvPr id="27" name="Text 24"/>
+          <p:cNvSpPr/>
+          <p:nvPr/>
+        </p:nvSpPr>
+        <p:spPr>
+          <a:xfrm>
+            <a:off x="859536" y="5385816"/>
+            <a:ext cx="10472623" cy="402336"/>
           </a:xfrm>
           <a:prstGeom prst="rect">
             <a:avLst/>
@@ -13675,7 +13860,7 @@
               <a:buNone/>
             </a:pPr>
             <a:r>
-              <a:rPr lang="en-US" sz="950" b="1" dirty="0">
+              <a:rPr lang="en-US" sz="900" b="1" dirty="0">
                 <a:solidFill>
                   <a:srgbClr val="12B198"/>
                 </a:solidFill>
@@ -13692,7 +13877,7 @@
               <a:buNone/>
             </a:pPr>
             <a:r>
-              <a:rPr lang="en-US" sz="1100" b="1" dirty="0">
+              <a:rPr lang="en-US" sz="1050" b="1" dirty="0">
                 <a:solidFill>
                   <a:srgbClr val="FFFFFF"/>
                 </a:solidFill>
@@ -13700,9 +13885,9 @@
                 <a:ea typeface="Yu Gothic" pitchFamily="34" charset="-122"/>
                 <a:cs typeface="Yu Gothic" pitchFamily="34" charset="-120"/>
               </a:rPr>
-              <a:t>何を後回しにするか。不正解錠の追跡は後回しになる。捨てる判断とその根拠を言えるか。</a:t>
-            </a:r>
-            <a:endParaRPr lang="en-US" sz="950" dirty="0"/>
+              <a:t>全部はできない。何を捨てたかを言えるか。捨てる判断ができない班が必ず出る。</a:t>
+            </a:r>
+            <a:endParaRPr lang="en-US" sz="900" dirty="0"/>
           </a:p>
           <a:p>
             <a:pPr indent="0" marL="0">
@@ -13712,7 +13897,7 @@
               <a:buNone/>
             </a:pPr>
             <a:r>
-              <a:rPr lang="en-US" sz="800" i="1" dirty="0">
+              <a:rPr lang="en-US" sz="750" i="1" dirty="0">
                 <a:solidFill>
                   <a:srgbClr val="9FD8CD"/>
                 </a:solidFill>
@@ -13720,15 +13905,15 @@
                 <a:ea typeface="Calibri" pitchFamily="34" charset="-122"/>
                 <a:cs typeface="Calibri" pitchFamily="34" charset="-120"/>
               </a:rPr>
-              <a:t>What waits? Pursuing the unauthorised entry does. Can they state what they dropped, and why?</a:t>
-            </a:r>
-            <a:endParaRPr lang="en-US" sz="950" dirty="0"/>
-          </a:p>
-        </p:txBody>
-      </p:sp>
-      <p:sp>
-        <p:nvSpPr>
-          <p:cNvPr id="21" name="Text 18"/>
+              <a:t>You cannot do everything. Can they say what they dropped? Some groups will not be able to drop anything.</a:t>
+            </a:r>
+            <a:endParaRPr lang="en-US" sz="900" dirty="0"/>
+          </a:p>
+        </p:txBody>
+      </p:sp>
+      <p:sp>
+        <p:nvSpPr>
+          <p:cNvPr id="28" name="Text 25"/>
           <p:cNvSpPr/>
           <p:nvPr/>
         </p:nvSpPr>
@@ -13807,7 +13992,7 @@
       </p:sp>
       <p:sp>
         <p:nvSpPr>
-          <p:cNvPr id="22" name="Text 19"/>
+          <p:cNvPr id="29" name="Text 26"/>
           <p:cNvSpPr/>
           <p:nvPr/>
         </p:nvSpPr>
@@ -13860,7 +14045,7 @@
       </p:sp>
       <p:sp>
         <p:nvSpPr>
-          <p:cNvPr id="23" name="Text 20"/>
+          <p:cNvPr id="30" name="Text 27"/>
           <p:cNvSpPr/>
           <p:nvPr/>
         </p:nvSpPr>
@@ -13913,7 +14098,7 @@
       </p:sp>
       <p:sp>
         <p:nvSpPr>
-          <p:cNvPr id="24" name="Text 21"/>
+          <p:cNvPr id="31" name="Text 28"/>
           <p:cNvSpPr/>
           <p:nvPr/>
         </p:nvSpPr>
@@ -15318,7 +15503,7 @@
                 <a:ea typeface="Yu Gothic" pitchFamily="34" charset="-122"/>
                 <a:cs typeface="Yu Gothic" pitchFamily="34" charset="-120"/>
               </a:rPr>
-              <a:t>TTX 10-B 講評 ― 模範解答</a:t>
+              <a:t>TTX 10-B 模範解答</a:t>
             </a:r>
             <a:endParaRPr lang="en-US" sz="2300" dirty="0"/>
           </a:p>
@@ -15338,7 +15523,7 @@
                 <a:ea typeface="Calibri" pitchFamily="34" charset="-122"/>
                 <a:cs typeface="Calibri" pitchFamily="34" charset="-120"/>
               </a:rPr>
-              <a:t>TTX 10-B Debrief — Model Answer</a:t>
+              <a:t>TTX 10-B — Model Answers</a:t>
             </a:r>
             <a:endParaRPr lang="en-US" sz="2300" dirty="0"/>
           </a:p>
@@ -15407,97 +15592,18 @@
       </p:sp>
       <p:sp>
         <p:nvSpPr>
-          <p:cNvPr id="6" name="Text 3"/>
+          <p:cNvPr id="6" name="Shape 3"/>
           <p:cNvSpPr/>
           <p:nvPr/>
         </p:nvSpPr>
         <p:spPr>
           <a:xfrm>
             <a:off x="640080" y="1188720"/>
-            <a:ext cx="10911535" cy="530352"/>
-          </a:xfrm>
-          <a:prstGeom prst="rect">
-            <a:avLst/>
-          </a:prstGeom>
-          <a:noFill/>
-          <a:ln/>
-        </p:spPr>
-        <p:txBody>
-          <a:bodyPr wrap="square" lIns="0" tIns="0" rIns="0" bIns="0" rtlCol="0" anchor="t"/>
-          <a:lstStyle/>
-          <a:p>
-            <a:pPr indent="0" marL="0">
-              <a:lnSpc>
-                <a:spcPct val="90000"/>
-              </a:lnSpc>
-              <a:buNone/>
-            </a:pPr>
-            <a:r>
-              <a:rPr lang="en-US" sz="1000" b="1" dirty="0">
-                <a:solidFill>
-                  <a:srgbClr val="0D8A76"/>
-                </a:solidFill>
-                <a:latin typeface="Yu Gothic" pitchFamily="34" charset="0"/>
-                <a:ea typeface="Yu Gothic" pitchFamily="34" charset="-122"/>
-                <a:cs typeface="Yu Gothic" pitchFamily="34" charset="-120"/>
-              </a:rPr>
-              <a:t>狙い　</a:t>
-            </a:r>
-            <a:pPr indent="0" marL="0">
-              <a:lnSpc>
-                <a:spcPct val="90000"/>
-              </a:lnSpc>
-              <a:buNone/>
-            </a:pPr>
-            <a:r>
-              <a:rPr lang="en-US" sz="1150" b="1" dirty="0">
-                <a:solidFill>
-                  <a:srgbClr val="093259"/>
-                </a:solidFill>
-                <a:latin typeface="Yu Gothic" pitchFamily="34" charset="0"/>
-                <a:ea typeface="Yu Gothic" pitchFamily="34" charset="-122"/>
-                <a:cs typeface="Yu Gothic" pitchFamily="34" charset="-120"/>
-              </a:rPr>
-              <a:t>保全と開示は別の行為。保全は受けてよく、開示は受けられない。</a:t>
-            </a:r>
-            <a:endParaRPr lang="en-US" sz="1000" dirty="0"/>
-          </a:p>
-          <a:p>
-            <a:pPr indent="0" marL="0">
-              <a:lnSpc>
-                <a:spcPct val="90000"/>
-              </a:lnSpc>
-              <a:buNone/>
-            </a:pPr>
-            <a:r>
-              <a:rPr lang="en-US" sz="850" i="1" dirty="0">
-                <a:solidFill>
-                  <a:srgbClr val="5F7183"/>
-                </a:solidFill>
-                <a:latin typeface="Calibri" pitchFamily="34" charset="0"/>
-                <a:ea typeface="Calibri" pitchFamily="34" charset="-122"/>
-                <a:cs typeface="Calibri" pitchFamily="34" charset="-120"/>
-              </a:rPr>
-              <a:t>Preservation and disclosure are different acts. You may accept the first, never the second.</a:t>
-            </a:r>
-            <a:endParaRPr lang="en-US" sz="1000" dirty="0"/>
-          </a:p>
-        </p:txBody>
-      </p:sp>
-      <p:sp>
-        <p:nvSpPr>
-          <p:cNvPr id="7" name="Shape 4"/>
-          <p:cNvSpPr/>
-          <p:nvPr/>
-        </p:nvSpPr>
-        <p:spPr>
-          <a:xfrm>
-            <a:off x="640080" y="1773936"/>
-            <a:ext cx="5327752" cy="1091184"/>
+            <a:ext cx="10911535" cy="683514"/>
           </a:xfrm>
           <a:prstGeom prst="roundRect">
             <a:avLst>
-              <a:gd name="adj" fmla="val 3352"/>
+              <a:gd name="adj" fmla="val 5351"/>
             </a:avLst>
           </a:prstGeom>
           <a:solidFill>
@@ -15508,53 +15614,112 @@
       </p:sp>
       <p:sp>
         <p:nvSpPr>
+          <p:cNvPr id="7" name="Shape 4"/>
+          <p:cNvSpPr/>
+          <p:nvPr/>
+        </p:nvSpPr>
+        <p:spPr>
+          <a:xfrm>
+            <a:off x="841248" y="1356741"/>
+            <a:ext cx="347472" cy="347472"/>
+          </a:xfrm>
+          <a:prstGeom prst="ellipse">
+            <a:avLst/>
+          </a:prstGeom>
+          <a:solidFill>
+            <a:srgbClr val="12B198"/>
+          </a:solidFill>
+          <a:ln/>
+        </p:spPr>
+      </p:sp>
+      <p:sp>
+        <p:nvSpPr>
           <p:cNvPr id="8" name="Text 5"/>
           <p:cNvSpPr/>
           <p:nvPr/>
         </p:nvSpPr>
         <p:spPr>
           <a:xfrm>
-            <a:off x="877824" y="1865376"/>
-            <a:ext cx="4852264" cy="908304"/>
-          </a:xfrm>
-          <a:prstGeom prst="rect">
-            <a:avLst/>
-          </a:prstGeom>
-          <a:noFill/>
-          <a:ln/>
-        </p:spPr>
-        <p:txBody>
-          <a:bodyPr wrap="square" lIns="0" tIns="0" rIns="0" bIns="0" rtlCol="0" anchor="t"/>
-          <a:lstStyle/>
-          <a:p>
-            <a:pPr indent="0" marL="0">
-              <a:lnSpc>
-                <a:spcPct val="90000"/>
-              </a:lnSpc>
-              <a:buNone/>
-            </a:pPr>
-            <a:r>
-              <a:rPr lang="en-US" sz="1050" b="1" dirty="0">
-                <a:solidFill>
-                  <a:srgbClr val="093259"/>
-                </a:solidFill>
-                <a:latin typeface="Yu Gothic" pitchFamily="34" charset="0"/>
-                <a:ea typeface="Yu Gothic" pitchFamily="34" charset="-122"/>
-                <a:cs typeface="Yu Gothic" pitchFamily="34" charset="-120"/>
-              </a:rPr>
-              <a:t>管理職であること</a:t>
-            </a:r>
-            <a:endParaRPr lang="en-US" sz="1050" dirty="0"/>
-          </a:p>
-          <a:p>
-            <a:pPr indent="0" marL="0">
-              <a:lnSpc>
-                <a:spcPct val="90000"/>
-              </a:lnSpc>
-              <a:buNone/>
-            </a:pPr>
-            <a:r>
-              <a:rPr lang="en-US" sz="1050" b="1" dirty="0">
+            <a:off x="841248" y="1356741"/>
+            <a:ext cx="347472" cy="347472"/>
+          </a:xfrm>
+          <a:prstGeom prst="rect">
+            <a:avLst/>
+          </a:prstGeom>
+          <a:noFill/>
+          <a:ln/>
+        </p:spPr>
+        <p:txBody>
+          <a:bodyPr wrap="square" lIns="0" tIns="0" rIns="0" bIns="0" rtlCol="0" anchor="ctr"/>
+          <a:lstStyle/>
+          <a:p>
+            <a:pPr algn="ctr" indent="0" marL="0">
+              <a:buNone/>
+            </a:pPr>
+            <a:r>
+              <a:rPr lang="en-US" sz="1100" b="1" dirty="0">
+                <a:solidFill>
+                  <a:srgbClr val="FFFFFF"/>
+                </a:solidFill>
+                <a:latin typeface="Calibri" pitchFamily="34" charset="0"/>
+                <a:ea typeface="Calibri" pitchFamily="34" charset="-122"/>
+                <a:cs typeface="Calibri" pitchFamily="34" charset="-120"/>
+              </a:rPr>
+              <a:t>1</a:t>
+            </a:r>
+            <a:endParaRPr lang="en-US" sz="1100" dirty="0"/>
+          </a:p>
+        </p:txBody>
+      </p:sp>
+      <p:sp>
+        <p:nvSpPr>
+          <p:cNvPr id="9" name="Text 6"/>
+          <p:cNvSpPr/>
+          <p:nvPr/>
+        </p:nvSpPr>
+        <p:spPr>
+          <a:xfrm>
+            <a:off x="1280160" y="1252728"/>
+            <a:ext cx="10033711" cy="555498"/>
+          </a:xfrm>
+          <a:prstGeom prst="rect">
+            <a:avLst/>
+          </a:prstGeom>
+          <a:noFill/>
+          <a:ln/>
+        </p:spPr>
+        <p:txBody>
+          <a:bodyPr wrap="square" lIns="0" tIns="0" rIns="0" bIns="0" rtlCol="0" anchor="ctr"/>
+          <a:lstStyle/>
+          <a:p>
+            <a:pPr indent="0" marL="0">
+              <a:lnSpc>
+                <a:spcPct val="88000"/>
+              </a:lnSpc>
+              <a:buNone/>
+            </a:pPr>
+            <a:r>
+              <a:rPr lang="en-US" sz="900" dirty="0">
+                <a:solidFill>
+                  <a:srgbClr val="5F7183"/>
+                </a:solidFill>
+                <a:latin typeface="Yu Gothic" pitchFamily="34" charset="0"/>
+                <a:ea typeface="Yu Gothic" pitchFamily="34" charset="-122"/>
+                <a:cs typeface="Yu Gothic" pitchFamily="34" charset="-120"/>
+              </a:rPr>
+              <a:t>問1　管理職であることは根拠になるか</a:t>
+            </a:r>
+            <a:endParaRPr lang="en-US" sz="900" dirty="0"/>
+          </a:p>
+          <a:p>
+            <a:pPr indent="0" marL="0">
+              <a:lnSpc>
+                <a:spcPct val="88000"/>
+              </a:lnSpc>
+              <a:buNone/>
+            </a:pPr>
+            <a:r>
+              <a:rPr lang="en-US" sz="1200" b="1" dirty="0">
                 <a:solidFill>
                   <a:srgbClr val="1B2733"/>
                 </a:solidFill>
@@ -15562,14 +15727,14 @@
                 <a:ea typeface="Yu Gothic" pitchFamily="34" charset="-122"/>
                 <a:cs typeface="Yu Gothic" pitchFamily="34" charset="-120"/>
               </a:rPr>
-              <a:t>開示の根拠にならない。可否は契約とクライアントの規程で決まる。</a:t>
-            </a:r>
-            <a:endParaRPr lang="en-US" sz="1050" dirty="0"/>
-          </a:p>
-          <a:p>
-            <a:pPr indent="0" marL="0">
-              <a:lnSpc>
-                <a:spcPct val="90000"/>
+              <a:t>ならない。開示の可否は契約とクライアントの規程で決まる。役職では決まらない。</a:t>
+            </a:r>
+            <a:endParaRPr lang="en-US" sz="900" dirty="0"/>
+          </a:p>
+          <a:p>
+            <a:pPr indent="0" marL="0">
+              <a:lnSpc>
+                <a:spcPct val="88000"/>
               </a:lnSpc>
               <a:buNone/>
             </a:pPr>
@@ -15582,26 +15747,26 @@
                 <a:ea typeface="Calibri" pitchFamily="34" charset="-122"/>
                 <a:cs typeface="Calibri" pitchFamily="34" charset="-120"/>
               </a:rPr>
-              <a:t>Not a basis. The contract and the client's rules decide.</a:t>
-            </a:r>
-            <a:endParaRPr lang="en-US" sz="1050" dirty="0"/>
-          </a:p>
-        </p:txBody>
-      </p:sp>
-      <p:sp>
-        <p:nvSpPr>
-          <p:cNvPr id="9" name="Shape 6"/>
-          <p:cNvSpPr/>
-          <p:nvPr/>
-        </p:nvSpPr>
-        <p:spPr>
-          <a:xfrm>
-            <a:off x="6223864" y="1773936"/>
-            <a:ext cx="5327752" cy="1091184"/>
+              <a:t>No. The contract and the client's rules decide, not the person's rank.</a:t>
+            </a:r>
+            <a:endParaRPr lang="en-US" sz="900" dirty="0"/>
+          </a:p>
+        </p:txBody>
+      </p:sp>
+      <p:sp>
+        <p:nvSpPr>
+          <p:cNvPr id="10" name="Shape 7"/>
+          <p:cNvSpPr/>
+          <p:nvPr/>
+        </p:nvSpPr>
+        <p:spPr>
+          <a:xfrm>
+            <a:off x="640080" y="1972818"/>
+            <a:ext cx="10911535" cy="683514"/>
           </a:xfrm>
           <a:prstGeom prst="roundRect">
             <a:avLst>
-              <a:gd name="adj" fmla="val 3352"/>
+              <a:gd name="adj" fmla="val 5351"/>
             </a:avLst>
           </a:prstGeom>
           <a:solidFill>
@@ -15612,53 +15777,112 @@
       </p:sp>
       <p:sp>
         <p:nvSpPr>
-          <p:cNvPr id="10" name="Text 7"/>
-          <p:cNvSpPr/>
-          <p:nvPr/>
-        </p:nvSpPr>
-        <p:spPr>
-          <a:xfrm>
-            <a:off x="6461608" y="1865376"/>
-            <a:ext cx="4852264" cy="908304"/>
-          </a:xfrm>
-          <a:prstGeom prst="rect">
-            <a:avLst/>
-          </a:prstGeom>
-          <a:noFill/>
-          <a:ln/>
-        </p:spPr>
-        <p:txBody>
-          <a:bodyPr wrap="square" lIns="0" tIns="0" rIns="0" bIns="0" rtlCol="0" anchor="t"/>
-          <a:lstStyle/>
-          <a:p>
-            <a:pPr indent="0" marL="0">
-              <a:lnSpc>
-                <a:spcPct val="90000"/>
-              </a:lnSpc>
-              <a:buNone/>
-            </a:pPr>
-            <a:r>
-              <a:rPr lang="en-US" sz="1050" b="1" dirty="0">
-                <a:solidFill>
-                  <a:srgbClr val="093259"/>
-                </a:solidFill>
-                <a:latin typeface="Yu Gothic" pitchFamily="34" charset="0"/>
-                <a:ea typeface="Yu Gothic" pitchFamily="34" charset="-122"/>
-                <a:cs typeface="Yu Gothic" pitchFamily="34" charset="-120"/>
-              </a:rPr>
-              <a:t>警備員の権限</a:t>
-            </a:r>
-            <a:endParaRPr lang="en-US" sz="1050" dirty="0"/>
-          </a:p>
-          <a:p>
-            <a:pPr indent="0" marL="0">
-              <a:lnSpc>
-                <a:spcPct val="90000"/>
-              </a:lnSpc>
-              <a:buNone/>
-            </a:pPr>
-            <a:r>
-              <a:rPr lang="en-US" sz="1050" b="1" dirty="0">
+          <p:cNvPr id="11" name="Shape 8"/>
+          <p:cNvSpPr/>
+          <p:nvPr/>
+        </p:nvSpPr>
+        <p:spPr>
+          <a:xfrm>
+            <a:off x="841248" y="2140839"/>
+            <a:ext cx="347472" cy="347472"/>
+          </a:xfrm>
+          <a:prstGeom prst="ellipse">
+            <a:avLst/>
+          </a:prstGeom>
+          <a:solidFill>
+            <a:srgbClr val="12B198"/>
+          </a:solidFill>
+          <a:ln/>
+        </p:spPr>
+      </p:sp>
+      <p:sp>
+        <p:nvSpPr>
+          <p:cNvPr id="12" name="Text 9"/>
+          <p:cNvSpPr/>
+          <p:nvPr/>
+        </p:nvSpPr>
+        <p:spPr>
+          <a:xfrm>
+            <a:off x="841248" y="2140839"/>
+            <a:ext cx="347472" cy="347472"/>
+          </a:xfrm>
+          <a:prstGeom prst="rect">
+            <a:avLst/>
+          </a:prstGeom>
+          <a:noFill/>
+          <a:ln/>
+        </p:spPr>
+        <p:txBody>
+          <a:bodyPr wrap="square" lIns="0" tIns="0" rIns="0" bIns="0" rtlCol="0" anchor="ctr"/>
+          <a:lstStyle/>
+          <a:p>
+            <a:pPr algn="ctr" indent="0" marL="0">
+              <a:buNone/>
+            </a:pPr>
+            <a:r>
+              <a:rPr lang="en-US" sz="1100" b="1" dirty="0">
+                <a:solidFill>
+                  <a:srgbClr val="FFFFFF"/>
+                </a:solidFill>
+                <a:latin typeface="Calibri" pitchFamily="34" charset="0"/>
+                <a:ea typeface="Calibri" pitchFamily="34" charset="-122"/>
+                <a:cs typeface="Calibri" pitchFamily="34" charset="-120"/>
+              </a:rPr>
+              <a:t>2</a:t>
+            </a:r>
+            <a:endParaRPr lang="en-US" sz="1100" dirty="0"/>
+          </a:p>
+        </p:txBody>
+      </p:sp>
+      <p:sp>
+        <p:nvSpPr>
+          <p:cNvPr id="13" name="Text 10"/>
+          <p:cNvSpPr/>
+          <p:nvPr/>
+        </p:nvSpPr>
+        <p:spPr>
+          <a:xfrm>
+            <a:off x="1280160" y="2036826"/>
+            <a:ext cx="10033711" cy="555498"/>
+          </a:xfrm>
+          <a:prstGeom prst="rect">
+            <a:avLst/>
+          </a:prstGeom>
+          <a:noFill/>
+          <a:ln/>
+        </p:spPr>
+        <p:txBody>
+          <a:bodyPr wrap="square" lIns="0" tIns="0" rIns="0" bIns="0" rtlCol="0" anchor="ctr"/>
+          <a:lstStyle/>
+          <a:p>
+            <a:pPr indent="0" marL="0">
+              <a:lnSpc>
+                <a:spcPct val="88000"/>
+              </a:lnSpc>
+              <a:buNone/>
+            </a:pPr>
+            <a:r>
+              <a:rPr lang="en-US" sz="900" dirty="0">
+                <a:solidFill>
+                  <a:srgbClr val="5F7183"/>
+                </a:solidFill>
+                <a:latin typeface="Yu Gothic" pitchFamily="34" charset="0"/>
+                <a:ea typeface="Yu Gothic" pitchFamily="34" charset="-122"/>
+                <a:cs typeface="Yu Gothic" pitchFamily="34" charset="-120"/>
+              </a:rPr>
+              <a:t>問2　警備員に判断する権限はあるか</a:t>
+            </a:r>
+            <a:endParaRPr lang="en-US" sz="900" dirty="0"/>
+          </a:p>
+          <a:p>
+            <a:pPr indent="0" marL="0">
+              <a:lnSpc>
+                <a:spcPct val="88000"/>
+              </a:lnSpc>
+              <a:buNone/>
+            </a:pPr>
+            <a:r>
+              <a:rPr lang="en-US" sz="1200" b="1" dirty="0">
                 <a:solidFill>
                   <a:srgbClr val="1B2733"/>
                 </a:solidFill>
@@ -15666,14 +15890,14 @@
                 <a:ea typeface="Yu Gothic" pitchFamily="34" charset="-122"/>
                 <a:cs typeface="Yu Gothic" pitchFamily="34" charset="-120"/>
               </a:rPr>
-              <a:t>判断する立場にない。取り次ぐところまで。</a:t>
-            </a:r>
-            <a:endParaRPr lang="en-US" sz="1050" dirty="0"/>
-          </a:p>
-          <a:p>
-            <a:pPr indent="0" marL="0">
-              <a:lnSpc>
-                <a:spcPct val="90000"/>
+              <a:t>ない。取り次ぐところまで。日頃の協力関係は判断を変える理由にならない。</a:t>
+            </a:r>
+            <a:endParaRPr lang="en-US" sz="900" dirty="0"/>
+          </a:p>
+          <a:p>
+            <a:pPr indent="0" marL="0">
+              <a:lnSpc>
+                <a:spcPct val="88000"/>
               </a:lnSpc>
               <a:buNone/>
             </a:pPr>
@@ -15686,130 +15910,26 @@
                 <a:ea typeface="Calibri" pitchFamily="34" charset="-122"/>
                 <a:cs typeface="Calibri" pitchFamily="34" charset="-120"/>
               </a:rPr>
-              <a:t>You are not the decision-maker. Your role ends at referral.</a:t>
-            </a:r>
-            <a:endParaRPr lang="en-US" sz="1050" dirty="0"/>
-          </a:p>
-        </p:txBody>
-      </p:sp>
-      <p:sp>
-        <p:nvSpPr>
-          <p:cNvPr id="11" name="Shape 8"/>
-          <p:cNvSpPr/>
-          <p:nvPr/>
-        </p:nvSpPr>
-        <p:spPr>
-          <a:xfrm>
-            <a:off x="640080" y="2993136"/>
-            <a:ext cx="5327752" cy="1091184"/>
+              <a:t>No. Your role ends at referral. A good working relationship does not change that.</a:t>
+            </a:r>
+            <a:endParaRPr lang="en-US" sz="900" dirty="0"/>
+          </a:p>
+        </p:txBody>
+      </p:sp>
+      <p:sp>
+        <p:nvSpPr>
+          <p:cNvPr id="14" name="Shape 11"/>
+          <p:cNvSpPr/>
+          <p:nvPr/>
+        </p:nvSpPr>
+        <p:spPr>
+          <a:xfrm>
+            <a:off x="640080" y="2756916"/>
+            <a:ext cx="10911535" cy="683514"/>
           </a:xfrm>
           <a:prstGeom prst="roundRect">
             <a:avLst>
-              <a:gd name="adj" fmla="val 3352"/>
-            </a:avLst>
-          </a:prstGeom>
-          <a:solidFill>
-            <a:srgbClr val="EFF4F8"/>
-          </a:solidFill>
-          <a:ln/>
-        </p:spPr>
-      </p:sp>
-      <p:sp>
-        <p:nvSpPr>
-          <p:cNvPr id="12" name="Text 9"/>
-          <p:cNvSpPr/>
-          <p:nvPr/>
-        </p:nvSpPr>
-        <p:spPr>
-          <a:xfrm>
-            <a:off x="877824" y="3084576"/>
-            <a:ext cx="4852264" cy="908304"/>
-          </a:xfrm>
-          <a:prstGeom prst="rect">
-            <a:avLst/>
-          </a:prstGeom>
-          <a:noFill/>
-          <a:ln/>
-        </p:spPr>
-        <p:txBody>
-          <a:bodyPr wrap="square" lIns="0" tIns="0" rIns="0" bIns="0" rtlCol="0" anchor="t"/>
-          <a:lstStyle/>
-          <a:p>
-            <a:pPr indent="0" marL="0">
-              <a:lnSpc>
-                <a:spcPct val="90000"/>
-              </a:lnSpc>
-              <a:buNone/>
-            </a:pPr>
-            <a:r>
-              <a:rPr lang="en-US" sz="1050" b="1" dirty="0">
-                <a:solidFill>
-                  <a:srgbClr val="093259"/>
-                </a:solidFill>
-                <a:latin typeface="Yu Gothic" pitchFamily="34" charset="0"/>
-                <a:ea typeface="Yu Gothic" pitchFamily="34" charset="-122"/>
-                <a:cs typeface="Yu Gothic" pitchFamily="34" charset="-120"/>
-              </a:rPr>
-              <a:t>断り方</a:t>
-            </a:r>
-            <a:endParaRPr lang="en-US" sz="1050" dirty="0"/>
-          </a:p>
-          <a:p>
-            <a:pPr indent="0" marL="0">
-              <a:lnSpc>
-                <a:spcPct val="90000"/>
-              </a:lnSpc>
-              <a:buNone/>
-            </a:pPr>
-            <a:r>
-              <a:rPr lang="en-US" sz="1050" b="1" dirty="0">
-                <a:solidFill>
-                  <a:srgbClr val="1B2733"/>
-                </a:solidFill>
-                <a:latin typeface="Yu Gothic" pitchFamily="34" charset="0"/>
-                <a:ea typeface="Yu Gothic" pitchFamily="34" charset="-122"/>
-                <a:cs typeface="Yu Gothic" pitchFamily="34" charset="-120"/>
-              </a:rPr>
-              <a:t>「私には開示の判断ができません。担当へお繋ぎします」。</a:t>
-            </a:r>
-            <a:endParaRPr lang="en-US" sz="1050" dirty="0"/>
-          </a:p>
-          <a:p>
-            <a:pPr indent="0" marL="0">
-              <a:lnSpc>
-                <a:spcPct val="90000"/>
-              </a:lnSpc>
-              <a:buNone/>
-            </a:pPr>
-            <a:r>
-              <a:rPr lang="en-US" sz="800" i="1" dirty="0">
-                <a:solidFill>
-                  <a:srgbClr val="5F7183"/>
-                </a:solidFill>
-                <a:latin typeface="Calibri" pitchFamily="34" charset="0"/>
-                <a:ea typeface="Calibri" pitchFamily="34" charset="-122"/>
-                <a:cs typeface="Calibri" pitchFamily="34" charset="-120"/>
-              </a:rPr>
-              <a:t>"I am not able to decide that. Let me connect you with the right person."</a:t>
-            </a:r>
-            <a:endParaRPr lang="en-US" sz="1050" dirty="0"/>
-          </a:p>
-        </p:txBody>
-      </p:sp>
-      <p:sp>
-        <p:nvSpPr>
-          <p:cNvPr id="13" name="Shape 10"/>
-          <p:cNvSpPr/>
-          <p:nvPr/>
-        </p:nvSpPr>
-        <p:spPr>
-          <a:xfrm>
-            <a:off x="6223864" y="2993136"/>
-            <a:ext cx="5327752" cy="1091184"/>
-          </a:xfrm>
-          <a:prstGeom prst="roundRect">
-            <a:avLst>
-              <a:gd name="adj" fmla="val 3352"/>
+              <a:gd name="adj" fmla="val 5351"/>
             </a:avLst>
           </a:prstGeom>
           <a:solidFill>
@@ -15820,53 +15940,112 @@
       </p:sp>
       <p:sp>
         <p:nvSpPr>
-          <p:cNvPr id="14" name="Text 11"/>
-          <p:cNvSpPr/>
-          <p:nvPr/>
-        </p:nvSpPr>
-        <p:spPr>
-          <a:xfrm>
-            <a:off x="6461608" y="3084576"/>
-            <a:ext cx="4852264" cy="908304"/>
-          </a:xfrm>
-          <a:prstGeom prst="rect">
-            <a:avLst/>
-          </a:prstGeom>
-          <a:noFill/>
-          <a:ln/>
-        </p:spPr>
-        <p:txBody>
-          <a:bodyPr wrap="square" lIns="0" tIns="0" rIns="0" bIns="0" rtlCol="0" anchor="t"/>
-          <a:lstStyle/>
-          <a:p>
-            <a:pPr indent="0" marL="0">
-              <a:lnSpc>
-                <a:spcPct val="90000"/>
-              </a:lnSpc>
-              <a:buNone/>
-            </a:pPr>
-            <a:r>
-              <a:rPr lang="en-US" sz="1050" b="1" dirty="0">
-                <a:solidFill>
-                  <a:srgbClr val="0D8A76"/>
-                </a:solidFill>
-                <a:latin typeface="Yu Gothic" pitchFamily="34" charset="0"/>
-                <a:ea typeface="Yu Gothic" pitchFamily="34" charset="-122"/>
-                <a:cs typeface="Yu Gothic" pitchFamily="34" charset="-120"/>
-              </a:rPr>
-              <a:t>「あなたが見て教えて」</a:t>
-            </a:r>
-            <a:endParaRPr lang="en-US" sz="1050" dirty="0"/>
-          </a:p>
-          <a:p>
-            <a:pPr indent="0" marL="0">
-              <a:lnSpc>
-                <a:spcPct val="90000"/>
-              </a:lnSpc>
-              <a:buNone/>
-            </a:pPr>
-            <a:r>
-              <a:rPr lang="en-US" sz="1050" b="1" dirty="0">
+          <p:cNvPr id="15" name="Shape 12"/>
+          <p:cNvSpPr/>
+          <p:nvPr/>
+        </p:nvSpPr>
+        <p:spPr>
+          <a:xfrm>
+            <a:off x="841248" y="2924937"/>
+            <a:ext cx="347472" cy="347472"/>
+          </a:xfrm>
+          <a:prstGeom prst="ellipse">
+            <a:avLst/>
+          </a:prstGeom>
+          <a:solidFill>
+            <a:srgbClr val="12B198"/>
+          </a:solidFill>
+          <a:ln/>
+        </p:spPr>
+      </p:sp>
+      <p:sp>
+        <p:nvSpPr>
+          <p:cNvPr id="16" name="Text 13"/>
+          <p:cNvSpPr/>
+          <p:nvPr/>
+        </p:nvSpPr>
+        <p:spPr>
+          <a:xfrm>
+            <a:off x="841248" y="2924937"/>
+            <a:ext cx="347472" cy="347472"/>
+          </a:xfrm>
+          <a:prstGeom prst="rect">
+            <a:avLst/>
+          </a:prstGeom>
+          <a:noFill/>
+          <a:ln/>
+        </p:spPr>
+        <p:txBody>
+          <a:bodyPr wrap="square" lIns="0" tIns="0" rIns="0" bIns="0" rtlCol="0" anchor="ctr"/>
+          <a:lstStyle/>
+          <a:p>
+            <a:pPr algn="ctr" indent="0" marL="0">
+              <a:buNone/>
+            </a:pPr>
+            <a:r>
+              <a:rPr lang="en-US" sz="1100" b="1" dirty="0">
+                <a:solidFill>
+                  <a:srgbClr val="FFFFFF"/>
+                </a:solidFill>
+                <a:latin typeface="Calibri" pitchFamily="34" charset="0"/>
+                <a:ea typeface="Calibri" pitchFamily="34" charset="-122"/>
+                <a:cs typeface="Calibri" pitchFamily="34" charset="-120"/>
+              </a:rPr>
+              <a:t>3</a:t>
+            </a:r>
+            <a:endParaRPr lang="en-US" sz="1100" dirty="0"/>
+          </a:p>
+        </p:txBody>
+      </p:sp>
+      <p:sp>
+        <p:nvSpPr>
+          <p:cNvPr id="17" name="Text 14"/>
+          <p:cNvSpPr/>
+          <p:nvPr/>
+        </p:nvSpPr>
+        <p:spPr>
+          <a:xfrm>
+            <a:off x="1280160" y="2820924"/>
+            <a:ext cx="10033711" cy="555498"/>
+          </a:xfrm>
+          <a:prstGeom prst="rect">
+            <a:avLst/>
+          </a:prstGeom>
+          <a:noFill/>
+          <a:ln/>
+        </p:spPr>
+        <p:txBody>
+          <a:bodyPr wrap="square" lIns="0" tIns="0" rIns="0" bIns="0" rtlCol="0" anchor="ctr"/>
+          <a:lstStyle/>
+          <a:p>
+            <a:pPr indent="0" marL="0">
+              <a:lnSpc>
+                <a:spcPct val="88000"/>
+              </a:lnSpc>
+              <a:buNone/>
+            </a:pPr>
+            <a:r>
+              <a:rPr lang="en-US" sz="900" dirty="0">
+                <a:solidFill>
+                  <a:srgbClr val="5F7183"/>
+                </a:solidFill>
+                <a:latin typeface="Yu Gothic" pitchFamily="34" charset="0"/>
+                <a:ea typeface="Yu Gothic" pitchFamily="34" charset="-122"/>
+                <a:cs typeface="Yu Gothic" pitchFamily="34" charset="-120"/>
+              </a:rPr>
+              <a:t>問3　断り方。関係を壊さずに断れるか</a:t>
+            </a:r>
+            <a:endParaRPr lang="en-US" sz="900" dirty="0"/>
+          </a:p>
+          <a:p>
+            <a:pPr indent="0" marL="0">
+              <a:lnSpc>
+                <a:spcPct val="88000"/>
+              </a:lnSpc>
+              <a:buNone/>
+            </a:pPr>
+            <a:r>
+              <a:rPr lang="en-US" sz="1200" b="1" dirty="0">
                 <a:solidFill>
                   <a:srgbClr val="1B2733"/>
                 </a:solidFill>
@@ -15874,14 +16053,14 @@
                 <a:ea typeface="Yu Gothic" pitchFamily="34" charset="-122"/>
                 <a:cs typeface="Yu Gothic" pitchFamily="34" charset="-120"/>
               </a:rPr>
-              <a:t>同じこと。自分が見て伝えるのは開示と同じ結果になる。応じられない。</a:t>
-            </a:r>
-            <a:endParaRPr lang="en-US" sz="1050" dirty="0"/>
-          </a:p>
-          <a:p>
-            <a:pPr indent="0" marL="0">
-              <a:lnSpc>
-                <a:spcPct val="90000"/>
+              <a:t>「私には開示の判断ができません。担当へお繋ぎします」。断るのではなく、繋ぐと伝える。</a:t>
+            </a:r>
+            <a:endParaRPr lang="en-US" sz="900" dirty="0"/>
+          </a:p>
+          <a:p>
+            <a:pPr indent="0" marL="0">
+              <a:lnSpc>
+                <a:spcPct val="88000"/>
               </a:lnSpc>
               <a:buNone/>
             </a:pPr>
@@ -15894,26 +16073,26 @@
                 <a:ea typeface="Calibri" pitchFamily="34" charset="-122"/>
                 <a:cs typeface="Calibri" pitchFamily="34" charset="-120"/>
               </a:rPr>
-              <a:t>The same thing. Looking and telling produces the same result as showing. Decline.</a:t>
-            </a:r>
-            <a:endParaRPr lang="en-US" sz="1050" dirty="0"/>
-          </a:p>
-        </p:txBody>
-      </p:sp>
-      <p:sp>
-        <p:nvSpPr>
-          <p:cNvPr id="15" name="Shape 12"/>
-          <p:cNvSpPr/>
-          <p:nvPr/>
-        </p:nvSpPr>
-        <p:spPr>
-          <a:xfrm>
-            <a:off x="640080" y="4212336"/>
-            <a:ext cx="5327752" cy="1091184"/>
+              <a:t>"I am not able to decide that. Let me connect you with the right person." You are not refusing — you are routing.</a:t>
+            </a:r>
+            <a:endParaRPr lang="en-US" sz="900" dirty="0"/>
+          </a:p>
+        </p:txBody>
+      </p:sp>
+      <p:sp>
+        <p:nvSpPr>
+          <p:cNvPr id="18" name="Shape 15"/>
+          <p:cNvSpPr/>
+          <p:nvPr/>
+        </p:nvSpPr>
+        <p:spPr>
+          <a:xfrm>
+            <a:off x="640080" y="3541014"/>
+            <a:ext cx="10911535" cy="683514"/>
           </a:xfrm>
           <a:prstGeom prst="roundRect">
             <a:avLst>
-              <a:gd name="adj" fmla="val 3352"/>
+              <a:gd name="adj" fmla="val 5351"/>
             </a:avLst>
           </a:prstGeom>
           <a:solidFill>
@@ -15924,53 +16103,112 @@
       </p:sp>
       <p:sp>
         <p:nvSpPr>
-          <p:cNvPr id="16" name="Text 13"/>
-          <p:cNvSpPr/>
-          <p:nvPr/>
-        </p:nvSpPr>
-        <p:spPr>
-          <a:xfrm>
-            <a:off x="877824" y="4303776"/>
-            <a:ext cx="4852264" cy="908304"/>
-          </a:xfrm>
-          <a:prstGeom prst="rect">
-            <a:avLst/>
-          </a:prstGeom>
-          <a:noFill/>
-          <a:ln/>
-        </p:spPr>
-        <p:txBody>
-          <a:bodyPr wrap="square" lIns="0" tIns="0" rIns="0" bIns="0" rtlCol="0" anchor="t"/>
-          <a:lstStyle/>
-          <a:p>
-            <a:pPr indent="0" marL="0">
-              <a:lnSpc>
-                <a:spcPct val="90000"/>
-              </a:lnSpc>
-              <a:buNone/>
-            </a:pPr>
-            <a:r>
-              <a:rPr lang="en-US" sz="1050" b="1" dirty="0">
-                <a:solidFill>
-                  <a:srgbClr val="0D8A76"/>
-                </a:solidFill>
-                <a:latin typeface="Yu Gothic" pitchFamily="34" charset="0"/>
-                <a:ea typeface="Yu Gothic" pitchFamily="34" charset="-122"/>
-                <a:cs typeface="Yu Gothic" pitchFamily="34" charset="-120"/>
-              </a:rPr>
-              <a:t>「消さないでくれ」</a:t>
-            </a:r>
-            <a:endParaRPr lang="en-US" sz="1050" dirty="0"/>
-          </a:p>
-          <a:p>
-            <a:pPr indent="0" marL="0">
-              <a:lnSpc>
-                <a:spcPct val="90000"/>
-              </a:lnSpc>
-              <a:buNone/>
-            </a:pPr>
-            <a:r>
-              <a:rPr lang="en-US" sz="1050" b="1" dirty="0">
+          <p:cNvPr id="19" name="Shape 16"/>
+          <p:cNvSpPr/>
+          <p:nvPr/>
+        </p:nvSpPr>
+        <p:spPr>
+          <a:xfrm>
+            <a:off x="841248" y="3709035"/>
+            <a:ext cx="347472" cy="347472"/>
+          </a:xfrm>
+          <a:prstGeom prst="ellipse">
+            <a:avLst/>
+          </a:prstGeom>
+          <a:solidFill>
+            <a:srgbClr val="12B198"/>
+          </a:solidFill>
+          <a:ln/>
+        </p:spPr>
+      </p:sp>
+      <p:sp>
+        <p:nvSpPr>
+          <p:cNvPr id="20" name="Text 17"/>
+          <p:cNvSpPr/>
+          <p:nvPr/>
+        </p:nvSpPr>
+        <p:spPr>
+          <a:xfrm>
+            <a:off x="841248" y="3709035"/>
+            <a:ext cx="347472" cy="347472"/>
+          </a:xfrm>
+          <a:prstGeom prst="rect">
+            <a:avLst/>
+          </a:prstGeom>
+          <a:noFill/>
+          <a:ln/>
+        </p:spPr>
+        <p:txBody>
+          <a:bodyPr wrap="square" lIns="0" tIns="0" rIns="0" bIns="0" rtlCol="0" anchor="ctr"/>
+          <a:lstStyle/>
+          <a:p>
+            <a:pPr algn="ctr" indent="0" marL="0">
+              <a:buNone/>
+            </a:pPr>
+            <a:r>
+              <a:rPr lang="en-US" sz="1100" b="1" dirty="0">
+                <a:solidFill>
+                  <a:srgbClr val="FFFFFF"/>
+                </a:solidFill>
+                <a:latin typeface="Calibri" pitchFamily="34" charset="0"/>
+                <a:ea typeface="Calibri" pitchFamily="34" charset="-122"/>
+                <a:cs typeface="Calibri" pitchFamily="34" charset="-120"/>
+              </a:rPr>
+              <a:t>4</a:t>
+            </a:r>
+            <a:endParaRPr lang="en-US" sz="1100" dirty="0"/>
+          </a:p>
+        </p:txBody>
+      </p:sp>
+      <p:sp>
+        <p:nvSpPr>
+          <p:cNvPr id="21" name="Text 18"/>
+          <p:cNvSpPr/>
+          <p:nvPr/>
+        </p:nvSpPr>
+        <p:spPr>
+          <a:xfrm>
+            <a:off x="1280160" y="3605022"/>
+            <a:ext cx="10033711" cy="555498"/>
+          </a:xfrm>
+          <a:prstGeom prst="rect">
+            <a:avLst/>
+          </a:prstGeom>
+          <a:noFill/>
+          <a:ln/>
+        </p:spPr>
+        <p:txBody>
+          <a:bodyPr wrap="square" lIns="0" tIns="0" rIns="0" bIns="0" rtlCol="0" anchor="ctr"/>
+          <a:lstStyle/>
+          <a:p>
+            <a:pPr indent="0" marL="0">
+              <a:lnSpc>
+                <a:spcPct val="88000"/>
+              </a:lnSpc>
+              <a:buNone/>
+            </a:pPr>
+            <a:r>
+              <a:rPr lang="en-US" sz="900" dirty="0">
+                <a:solidFill>
+                  <a:srgbClr val="5F7183"/>
+                </a:solidFill>
+                <a:latin typeface="Yu Gothic" pitchFamily="34" charset="0"/>
+                <a:ea typeface="Yu Gothic" pitchFamily="34" charset="-122"/>
+                <a:cs typeface="Yu Gothic" pitchFamily="34" charset="-120"/>
+              </a:rPr>
+              <a:t>問4　保全の依頼は受けてよいか</a:t>
+            </a:r>
+            <a:endParaRPr lang="en-US" sz="900" dirty="0"/>
+          </a:p>
+          <a:p>
+            <a:pPr indent="0" marL="0">
+              <a:lnSpc>
+                <a:spcPct val="88000"/>
+              </a:lnSpc>
+              <a:buNone/>
+            </a:pPr>
+            <a:r>
+              <a:rPr lang="en-US" sz="1200" b="1" dirty="0">
                 <a:solidFill>
                   <a:srgbClr val="1B2733"/>
                 </a:solidFill>
@@ -15978,14 +16216,14 @@
                 <a:ea typeface="Yu Gothic" pitchFamily="34" charset="-122"/>
                 <a:cs typeface="Yu Gothic" pitchFamily="34" charset="-120"/>
               </a:rPr>
-              <a:t>これは受けてよい。保全は上書きを防ぐ行為で、内容を渡す行為ではない。</a:t>
-            </a:r>
-            <a:endParaRPr lang="en-US" sz="1050" dirty="0"/>
-          </a:p>
-          <a:p>
-            <a:pPr indent="0" marL="0">
-              <a:lnSpc>
-                <a:spcPct val="90000"/>
+              <a:t>受けてよい。保全＝残す、開示＝渡す。警備員が受けられるのは前者だけ。</a:t>
+            </a:r>
+            <a:endParaRPr lang="en-US" sz="900" dirty="0"/>
+          </a:p>
+          <a:p>
+            <a:pPr indent="0" marL="0">
+              <a:lnSpc>
+                <a:spcPct val="88000"/>
               </a:lnSpc>
               <a:buNone/>
             </a:pPr>
@@ -15998,83 +16236,97 @@
                 <a:ea typeface="Calibri" pitchFamily="34" charset="-122"/>
                 <a:cs typeface="Calibri" pitchFamily="34" charset="-120"/>
               </a:rPr>
-              <a:t>This you may accept. Preserving prevents overwrite; it does not hand over content.</a:t>
-            </a:r>
-            <a:endParaRPr lang="en-US" sz="1050" dirty="0"/>
-          </a:p>
-        </p:txBody>
-      </p:sp>
-      <p:sp>
-        <p:nvSpPr>
-          <p:cNvPr id="17" name="Shape 14"/>
-          <p:cNvSpPr/>
-          <p:nvPr/>
-        </p:nvSpPr>
-        <p:spPr>
-          <a:xfrm>
-            <a:off x="6223864" y="4212336"/>
-            <a:ext cx="5327752" cy="1091184"/>
+              <a:t>Yes. Preserving means keeping; disclosing means handing over. Only the first is yours to accept.</a:t>
+            </a:r>
+            <a:endParaRPr lang="en-US" sz="900" dirty="0"/>
+          </a:p>
+        </p:txBody>
+      </p:sp>
+      <p:sp>
+        <p:nvSpPr>
+          <p:cNvPr id="22" name="Shape 19"/>
+          <p:cNvSpPr/>
+          <p:nvPr/>
+        </p:nvSpPr>
+        <p:spPr>
+          <a:xfrm>
+            <a:off x="640080" y="4334256"/>
+            <a:ext cx="10911535" cy="420624"/>
           </a:xfrm>
           <a:prstGeom prst="roundRect">
             <a:avLst>
-              <a:gd name="adj" fmla="val 3352"/>
+              <a:gd name="adj" fmla="val 8696"/>
             </a:avLst>
           </a:prstGeom>
           <a:solidFill>
-            <a:srgbClr val="EFF4F8"/>
+            <a:srgbClr val="EEF6FA"/>
           </a:solidFill>
           <a:ln/>
         </p:spPr>
       </p:sp>
       <p:sp>
         <p:nvSpPr>
-          <p:cNvPr id="18" name="Text 15"/>
-          <p:cNvSpPr/>
-          <p:nvPr/>
-        </p:nvSpPr>
-        <p:spPr>
-          <a:xfrm>
-            <a:off x="6461608" y="4303776"/>
-            <a:ext cx="4852264" cy="908304"/>
-          </a:xfrm>
-          <a:prstGeom prst="rect">
-            <a:avLst/>
-          </a:prstGeom>
-          <a:noFill/>
-          <a:ln/>
-        </p:spPr>
-        <p:txBody>
-          <a:bodyPr wrap="square" lIns="0" tIns="0" rIns="0" bIns="0" rtlCol="0" anchor="t"/>
-          <a:lstStyle/>
-          <a:p>
-            <a:pPr indent="0" marL="0">
-              <a:lnSpc>
-                <a:spcPct val="90000"/>
-              </a:lnSpc>
-              <a:buNone/>
-            </a:pPr>
-            <a:r>
-              <a:rPr lang="en-US" sz="1050" b="1" dirty="0">
-                <a:solidFill>
-                  <a:srgbClr val="093259"/>
-                </a:solidFill>
-                <a:latin typeface="Yu Gothic" pitchFamily="34" charset="0"/>
-                <a:ea typeface="Yu Gothic" pitchFamily="34" charset="-122"/>
-                <a:cs typeface="Yu Gothic" pitchFamily="34" charset="-120"/>
-              </a:rPr>
-              <a:t>記録</a:t>
-            </a:r>
-            <a:endParaRPr lang="en-US" sz="1050" dirty="0"/>
-          </a:p>
-          <a:p>
-            <a:pPr indent="0" marL="0">
-              <a:lnSpc>
-                <a:spcPct val="90000"/>
-              </a:lnSpc>
-              <a:buNone/>
-            </a:pPr>
-            <a:r>
-              <a:rPr lang="en-US" sz="1050" b="1" dirty="0">
+          <p:cNvPr id="23" name="Text 20"/>
+          <p:cNvSpPr/>
+          <p:nvPr/>
+        </p:nvSpPr>
+        <p:spPr>
+          <a:xfrm>
+            <a:off x="859536" y="4361688"/>
+            <a:ext cx="10472623" cy="365760"/>
+          </a:xfrm>
+          <a:prstGeom prst="rect">
+            <a:avLst/>
+          </a:prstGeom>
+          <a:noFill/>
+          <a:ln/>
+        </p:spPr>
+        <p:txBody>
+          <a:bodyPr wrap="square" lIns="0" tIns="0" rIns="0" bIns="0" rtlCol="0" anchor="ctr"/>
+          <a:lstStyle/>
+          <a:p>
+            <a:pPr indent="0" marL="0">
+              <a:lnSpc>
+                <a:spcPct val="86000"/>
+              </a:lnSpc>
+              <a:buNone/>
+            </a:pPr>
+            <a:r>
+              <a:rPr lang="en-US" sz="850" b="1" dirty="0">
+                <a:solidFill>
+                  <a:srgbClr val="0D8A76"/>
+                </a:solidFill>
+                <a:latin typeface="Yu Gothic" pitchFamily="34" charset="0"/>
+                <a:ea typeface="Yu Gothic" pitchFamily="34" charset="-122"/>
+                <a:cs typeface="Yu Gothic" pitchFamily="34" charset="-120"/>
+              </a:rPr>
+              <a:t>追加付与①　</a:t>
+            </a:r>
+            <a:pPr indent="0" marL="0">
+              <a:lnSpc>
+                <a:spcPct val="86000"/>
+              </a:lnSpc>
+              <a:buNone/>
+            </a:pPr>
+            <a:r>
+              <a:rPr lang="en-US" sz="850" dirty="0">
+                <a:solidFill>
+                  <a:srgbClr val="5F7183"/>
+                </a:solidFill>
+                <a:latin typeface="Yu Gothic" pitchFamily="34" charset="0"/>
+                <a:ea typeface="Yu Gothic" pitchFamily="34" charset="-122"/>
+                <a:cs typeface="Yu Gothic" pitchFamily="34" charset="-120"/>
+              </a:rPr>
+              <a:t>「あなたが見て教えて」　→　</a:t>
+            </a:r>
+            <a:pPr indent="0" marL="0">
+              <a:lnSpc>
+                <a:spcPct val="86000"/>
+              </a:lnSpc>
+              <a:buNone/>
+            </a:pPr>
+            <a:r>
+              <a:rPr lang="en-US" sz="1100" b="1" dirty="0">
                 <a:solidFill>
                   <a:srgbClr val="1B2733"/>
                 </a:solidFill>
@@ -16082,19 +16334,19 @@
                 <a:ea typeface="Yu Gothic" pitchFamily="34" charset="-122"/>
                 <a:cs typeface="Yu Gothic" pitchFamily="34" charset="-120"/>
               </a:rPr>
-              <a:t>求められた内容、断ったこと、その理由、保全依頼の事実、時刻。</a:t>
-            </a:r>
-            <a:endParaRPr lang="en-US" sz="1050" dirty="0"/>
-          </a:p>
-          <a:p>
-            <a:pPr indent="0" marL="0">
-              <a:lnSpc>
-                <a:spcPct val="90000"/>
-              </a:lnSpc>
-              <a:buNone/>
-            </a:pPr>
-            <a:r>
-              <a:rPr lang="en-US" sz="800" i="1" dirty="0">
+              <a:t>応じられない。自分が見て伝えるのは開示と同じ結果になる。言い換えを見抜く。</a:t>
+            </a:r>
+            <a:endParaRPr lang="en-US" sz="850" dirty="0"/>
+          </a:p>
+          <a:p>
+            <a:pPr indent="0" marL="0">
+              <a:lnSpc>
+                <a:spcPct val="86000"/>
+              </a:lnSpc>
+              <a:buNone/>
+            </a:pPr>
+            <a:r>
+              <a:rPr lang="en-US" sz="750" i="1" dirty="0">
                 <a:solidFill>
                   <a:srgbClr val="5F7183"/>
                 </a:solidFill>
@@ -16102,26 +16354,144 @@
                 <a:ea typeface="Calibri" pitchFamily="34" charset="-122"/>
                 <a:cs typeface="Calibri" pitchFamily="34" charset="-120"/>
               </a:rPr>
-              <a:t>What was asked, that you declined, why, the preservation request, and the time.</a:t>
-            </a:r>
-            <a:endParaRPr lang="en-US" sz="1050" dirty="0"/>
-          </a:p>
-        </p:txBody>
-      </p:sp>
-      <p:sp>
-        <p:nvSpPr>
-          <p:cNvPr id="19" name="Shape 16"/>
-          <p:cNvSpPr/>
-          <p:nvPr/>
-        </p:nvSpPr>
-        <p:spPr>
-          <a:xfrm>
-            <a:off x="640080" y="5358384"/>
-            <a:ext cx="10911535" cy="493776"/>
+              <a:t>Decline. Looking and telling produces the same result as showing. Spot the rephrasing.</a:t>
+            </a:r>
+            <a:endParaRPr lang="en-US" sz="850" dirty="0"/>
+          </a:p>
+        </p:txBody>
+      </p:sp>
+      <p:sp>
+        <p:nvSpPr>
+          <p:cNvPr id="24" name="Shape 21"/>
+          <p:cNvSpPr/>
+          <p:nvPr/>
+        </p:nvSpPr>
+        <p:spPr>
+          <a:xfrm>
+            <a:off x="640080" y="4828032"/>
+            <a:ext cx="10911535" cy="420624"/>
           </a:xfrm>
           <a:prstGeom prst="roundRect">
             <a:avLst>
-              <a:gd name="adj" fmla="val 7407"/>
+              <a:gd name="adj" fmla="val 8696"/>
+            </a:avLst>
+          </a:prstGeom>
+          <a:solidFill>
+            <a:srgbClr val="EEF6FA"/>
+          </a:solidFill>
+          <a:ln/>
+        </p:spPr>
+      </p:sp>
+      <p:sp>
+        <p:nvSpPr>
+          <p:cNvPr id="25" name="Text 22"/>
+          <p:cNvSpPr/>
+          <p:nvPr/>
+        </p:nvSpPr>
+        <p:spPr>
+          <a:xfrm>
+            <a:off x="859536" y="4855464"/>
+            <a:ext cx="10472623" cy="365760"/>
+          </a:xfrm>
+          <a:prstGeom prst="rect">
+            <a:avLst/>
+          </a:prstGeom>
+          <a:noFill/>
+          <a:ln/>
+        </p:spPr>
+        <p:txBody>
+          <a:bodyPr wrap="square" lIns="0" tIns="0" rIns="0" bIns="0" rtlCol="0" anchor="ctr"/>
+          <a:lstStyle/>
+          <a:p>
+            <a:pPr indent="0" marL="0">
+              <a:lnSpc>
+                <a:spcPct val="86000"/>
+              </a:lnSpc>
+              <a:buNone/>
+            </a:pPr>
+            <a:r>
+              <a:rPr lang="en-US" sz="850" b="1" dirty="0">
+                <a:solidFill>
+                  <a:srgbClr val="0D8A76"/>
+                </a:solidFill>
+                <a:latin typeface="Yu Gothic" pitchFamily="34" charset="0"/>
+                <a:ea typeface="Yu Gothic" pitchFamily="34" charset="-122"/>
+                <a:cs typeface="Yu Gothic" pitchFamily="34" charset="-120"/>
+              </a:rPr>
+              <a:t>追加付与②　</a:t>
+            </a:r>
+            <a:pPr indent="0" marL="0">
+              <a:lnSpc>
+                <a:spcPct val="86000"/>
+              </a:lnSpc>
+              <a:buNone/>
+            </a:pPr>
+            <a:r>
+              <a:rPr lang="en-US" sz="850" dirty="0">
+                <a:solidFill>
+                  <a:srgbClr val="5F7183"/>
+                </a:solidFill>
+                <a:latin typeface="Yu Gothic" pitchFamily="34" charset="0"/>
+                <a:ea typeface="Yu Gothic" pitchFamily="34" charset="-122"/>
+                <a:cs typeface="Yu Gothic" pitchFamily="34" charset="-120"/>
+              </a:rPr>
+              <a:t>「依頼書を出す。消さないで」　→　</a:t>
+            </a:r>
+            <a:pPr indent="0" marL="0">
+              <a:lnSpc>
+                <a:spcPct val="86000"/>
+              </a:lnSpc>
+              <a:buNone/>
+            </a:pPr>
+            <a:r>
+              <a:rPr lang="en-US" sz="1100" b="1" dirty="0">
+                <a:solidFill>
+                  <a:srgbClr val="1B2733"/>
+                </a:solidFill>
+                <a:latin typeface="Yu Gothic" pitchFamily="34" charset="0"/>
+                <a:ea typeface="Yu Gothic" pitchFamily="34" charset="-122"/>
+                <a:cs typeface="Yu Gothic" pitchFamily="34" charset="-120"/>
+              </a:rPr>
+              <a:t>これは受けてよい。上書きを防ぐ依頼であり、内容を渡す依頼ではない。時刻とともに記録する。</a:t>
+            </a:r>
+            <a:endParaRPr lang="en-US" sz="850" dirty="0"/>
+          </a:p>
+          <a:p>
+            <a:pPr indent="0" marL="0">
+              <a:lnSpc>
+                <a:spcPct val="86000"/>
+              </a:lnSpc>
+              <a:buNone/>
+            </a:pPr>
+            <a:r>
+              <a:rPr lang="en-US" sz="750" i="1" dirty="0">
+                <a:solidFill>
+                  <a:srgbClr val="5F7183"/>
+                </a:solidFill>
+                <a:latin typeface="Calibri" pitchFamily="34" charset="0"/>
+                <a:ea typeface="Calibri" pitchFamily="34" charset="-122"/>
+                <a:cs typeface="Calibri" pitchFamily="34" charset="-120"/>
+              </a:rPr>
+              <a:t>This you may accept. It prevents overwrite; it does not hand over content. Record it with the time.</a:t>
+            </a:r>
+            <a:endParaRPr lang="en-US" sz="850" dirty="0"/>
+          </a:p>
+        </p:txBody>
+      </p:sp>
+      <p:sp>
+        <p:nvSpPr>
+          <p:cNvPr id="26" name="Shape 23"/>
+          <p:cNvSpPr/>
+          <p:nvPr/>
+        </p:nvSpPr>
+        <p:spPr>
+          <a:xfrm>
+            <a:off x="640080" y="5358384"/>
+            <a:ext cx="10911535" cy="457200"/>
+          </a:xfrm>
+          <a:prstGeom prst="roundRect">
+            <a:avLst>
+              <a:gd name="adj" fmla="val 8000"/>
             </a:avLst>
           </a:prstGeom>
           <a:solidFill>
@@ -16132,14 +16502,14 @@
       </p:sp>
       <p:sp>
         <p:nvSpPr>
-          <p:cNvPr id="20" name="Text 17"/>
-          <p:cNvSpPr/>
-          <p:nvPr/>
-        </p:nvSpPr>
-        <p:spPr>
-          <a:xfrm>
-            <a:off x="877824" y="5404104"/>
-            <a:ext cx="10436047" cy="402336"/>
+          <p:cNvPr id="27" name="Text 24"/>
+          <p:cNvSpPr/>
+          <p:nvPr/>
+        </p:nvSpPr>
+        <p:spPr>
+          <a:xfrm>
+            <a:off x="859536" y="5385816"/>
+            <a:ext cx="10472623" cy="402336"/>
           </a:xfrm>
           <a:prstGeom prst="rect">
             <a:avLst/>
@@ -16158,7 +16528,7 @@
               <a:buNone/>
             </a:pPr>
             <a:r>
-              <a:rPr lang="en-US" sz="950" b="1" dirty="0">
+              <a:rPr lang="en-US" sz="900" b="1" dirty="0">
                 <a:solidFill>
                   <a:srgbClr val="12B198"/>
                 </a:solidFill>
@@ -16175,7 +16545,7 @@
               <a:buNone/>
             </a:pPr>
             <a:r>
-              <a:rPr lang="en-US" sz="1100" b="1" dirty="0">
+              <a:rPr lang="en-US" sz="1050" b="1" dirty="0">
                 <a:solidFill>
                   <a:srgbClr val="FFFFFF"/>
                 </a:solidFill>
@@ -16183,9 +16553,9 @@
                 <a:ea typeface="Yu Gothic" pitchFamily="34" charset="-122"/>
                 <a:cs typeface="Yu Gothic" pitchFamily="34" charset="-120"/>
               </a:rPr>
-              <a:t>保全＝残す／開示＝渡す。警備員が受けられるのは前者だけ。言い換えを見抜けるかが要点。</a:t>
-            </a:r>
-            <a:endParaRPr lang="en-US" sz="950" dirty="0"/>
+              <a:t>インジェクト①に気づけるか。「見せない」から「見て教える」への言い換えが本問の核。</a:t>
+            </a:r>
+            <a:endParaRPr lang="en-US" sz="900" dirty="0"/>
           </a:p>
           <a:p>
             <a:pPr indent="0" marL="0">
@@ -16195,7 +16565,7 @@
               <a:buNone/>
             </a:pPr>
             <a:r>
-              <a:rPr lang="en-US" sz="800" i="1" dirty="0">
+              <a:rPr lang="en-US" sz="750" i="1" dirty="0">
                 <a:solidFill>
                   <a:srgbClr val="9FD8CD"/>
                 </a:solidFill>
@@ -16203,15 +16573,15 @@
                 <a:ea typeface="Calibri" pitchFamily="34" charset="-122"/>
                 <a:cs typeface="Calibri" pitchFamily="34" charset="-120"/>
               </a:rPr>
-              <a:t>Preserve means keep; disclose means hand over. Only the first is yours to accept. The test is spotting the rephrasing.</a:t>
-            </a:r>
-            <a:endParaRPr lang="en-US" sz="950" dirty="0"/>
-          </a:p>
-        </p:txBody>
-      </p:sp>
-      <p:sp>
-        <p:nvSpPr>
-          <p:cNvPr id="21" name="Text 18"/>
+              <a:t>Can they spot inject 1? The shift from "show me" to "look and tell me" is the heart of this case.</a:t>
+            </a:r>
+            <a:endParaRPr lang="en-US" sz="900" dirty="0"/>
+          </a:p>
+        </p:txBody>
+      </p:sp>
+      <p:sp>
+        <p:nvSpPr>
+          <p:cNvPr id="28" name="Text 25"/>
           <p:cNvSpPr/>
           <p:nvPr/>
         </p:nvSpPr>
@@ -16290,7 +16660,7 @@
       </p:sp>
       <p:sp>
         <p:nvSpPr>
-          <p:cNvPr id="22" name="Text 19"/>
+          <p:cNvPr id="29" name="Text 26"/>
           <p:cNvSpPr/>
           <p:nvPr/>
         </p:nvSpPr>
@@ -16343,7 +16713,7 @@
       </p:sp>
       <p:sp>
         <p:nvSpPr>
-          <p:cNvPr id="23" name="Text 20"/>
+          <p:cNvPr id="30" name="Text 27"/>
           <p:cNvSpPr/>
           <p:nvPr/>
         </p:nvSpPr>
@@ -16396,7 +16766,7 @@
       </p:sp>
       <p:sp>
         <p:nvSpPr>
-          <p:cNvPr id="24" name="Text 21"/>
+          <p:cNvPr id="31" name="Text 28"/>
           <p:cNvSpPr/>
           <p:nvPr/>
         </p:nvSpPr>

--- a/decks/06_10限_機器と総括.pptx
+++ b/decks/06_10限_機器と総括.pptx
@@ -16,9 +16,13 @@
     <p:sldId id="264" r:id="rId10"/>
     <p:sldId id="265" r:id="rId11"/>
     <p:sldId id="266" r:id="rId12"/>
+    <p:sldId id="267" r:id="rId13"/>
+    <p:sldId id="268" r:id="rId14"/>
+    <p:sldId id="269" r:id="rId15"/>
+    <p:sldId id="270" r:id="rId16"/>
   </p:sldIdLst>
   <p:notesMasterIdLst>
-    <p:notesMasterId r:id="rId13"/>
+    <p:notesMasterId r:id="rId17"/>
   </p:notesMasterIdLst>
   <p:sldSz cx="12192000" cy="6858000"/>
   <p:notesSz cx="6858000" cy="12192000"/>
@@ -712,6 +716,358 @@
             <a:fld id="{F7021451-1387-4CA6-816F-3879F97B5CBC}" type="slidenum">
               <a:rPr lang="en-US"/>
               <a:t>11</a:t>
+            </a:fld>
+            <a:endParaRPr lang="en-US"/>
+          </a:p>
+        </p:txBody>
+      </p:sp>
+    </p:spTree>
+    <p:extLst>
+      <p:ext uri="{BB962C8B-B14F-4D97-AF65-F5344CB8AC3E}">
+        <p14:creationId xmlns:p14="http://schemas.microsoft.com/office/powerpoint/2010/main" val="1024086991"/>
+      </p:ext>
+    </p:extLst>
+  </p:cSld>
+  <p:clrMapOvr>
+    <a:masterClrMapping/>
+  </p:clrMapOvr>
+</p:notes>
+</file>
+
+<file path=ppt/notesSlides/notesSlide12.xml><?xml version="1.0" encoding="utf-8"?>
+<p:notes xmlns:a="http://schemas.openxmlformats.org/drawingml/2006/main" xmlns:r="http://schemas.openxmlformats.org/officeDocument/2006/relationships" xmlns:p="http://schemas.openxmlformats.org/presentationml/2006/main">
+  <p:cSld>
+    <p:spTree>
+      <p:nvGrpSpPr>
+        <p:cNvPr id="1" name=""/>
+        <p:cNvGrpSpPr/>
+        <p:nvPr/>
+      </p:nvGrpSpPr>
+      <p:grpSpPr>
+        <a:xfrm>
+          <a:off x="0" y="0"/>
+          <a:ext cx="0" cy="0"/>
+          <a:chOff x="0" y="0"/>
+          <a:chExt cx="0" cy="0"/>
+        </a:xfrm>
+      </p:grpSpPr>
+      <p:sp>
+        <p:nvSpPr>
+          <p:cNvPr id="2" name="Slide Image Placeholder 1"/>
+          <p:cNvSpPr>
+            <a:spLocks noGrp="1" noRot="1" noChangeAspect="1"/>
+          </p:cNvSpPr>
+          <p:nvPr>
+            <p:ph type="sldImg"/>
+          </p:nvPr>
+        </p:nvSpPr>
+        <p:spPr/>
+      </p:sp>
+      <p:sp>
+        <p:nvSpPr>
+          <p:cNvPr id="3" name="Notes Placeholder 2"/>
+          <p:cNvSpPr>
+            <a:spLocks noGrp="1"/>
+          </p:cNvSpPr>
+          <p:nvPr>
+            <p:ph type="body" idx="1"/>
+          </p:nvPr>
+        </p:nvSpPr>
+        <p:spPr/>
+        <p:txBody>
+          <a:bodyPr/>
+          <a:lstStyle/>
+          <a:p>
+            <a:r>
+              <a:rPr lang="en-US" dirty="0"/>
+              <a:t/>
+            </a:r>
+            <a:endParaRPr lang="en-US" dirty="0"/>
+          </a:p>
+        </p:txBody>
+      </p:sp>
+      <p:sp>
+        <p:nvSpPr>
+          <p:cNvPr id="4" name="Slide Number Placeholder 3"/>
+          <p:cNvSpPr>
+            <a:spLocks noGrp="1"/>
+          </p:cNvSpPr>
+          <p:nvPr>
+            <p:ph type="sldNum" sz="quarter" idx="10"/>
+          </p:nvPr>
+        </p:nvSpPr>
+        <p:spPr/>
+        <p:txBody>
+          <a:bodyPr/>
+          <a:lstStyle/>
+          <a:p>
+            <a:fld id="{F7021451-1387-4CA6-816F-3879F97B5CBC}" type="slidenum">
+              <a:rPr lang="en-US"/>
+              <a:t>12</a:t>
+            </a:fld>
+            <a:endParaRPr lang="en-US"/>
+          </a:p>
+        </p:txBody>
+      </p:sp>
+    </p:spTree>
+    <p:extLst>
+      <p:ext uri="{BB962C8B-B14F-4D97-AF65-F5344CB8AC3E}">
+        <p14:creationId xmlns:p14="http://schemas.microsoft.com/office/powerpoint/2010/main" val="1024086991"/>
+      </p:ext>
+    </p:extLst>
+  </p:cSld>
+  <p:clrMapOvr>
+    <a:masterClrMapping/>
+  </p:clrMapOvr>
+</p:notes>
+</file>
+
+<file path=ppt/notesSlides/notesSlide13.xml><?xml version="1.0" encoding="utf-8"?>
+<p:notes xmlns:a="http://schemas.openxmlformats.org/drawingml/2006/main" xmlns:r="http://schemas.openxmlformats.org/officeDocument/2006/relationships" xmlns:p="http://schemas.openxmlformats.org/presentationml/2006/main">
+  <p:cSld>
+    <p:spTree>
+      <p:nvGrpSpPr>
+        <p:cNvPr id="1" name=""/>
+        <p:cNvGrpSpPr/>
+        <p:nvPr/>
+      </p:nvGrpSpPr>
+      <p:grpSpPr>
+        <a:xfrm>
+          <a:off x="0" y="0"/>
+          <a:ext cx="0" cy="0"/>
+          <a:chOff x="0" y="0"/>
+          <a:chExt cx="0" cy="0"/>
+        </a:xfrm>
+      </p:grpSpPr>
+      <p:sp>
+        <p:nvSpPr>
+          <p:cNvPr id="2" name="Slide Image Placeholder 1"/>
+          <p:cNvSpPr>
+            <a:spLocks noGrp="1" noRot="1" noChangeAspect="1"/>
+          </p:cNvSpPr>
+          <p:nvPr>
+            <p:ph type="sldImg"/>
+          </p:nvPr>
+        </p:nvSpPr>
+        <p:spPr/>
+      </p:sp>
+      <p:sp>
+        <p:nvSpPr>
+          <p:cNvPr id="3" name="Notes Placeholder 2"/>
+          <p:cNvSpPr>
+            <a:spLocks noGrp="1"/>
+          </p:cNvSpPr>
+          <p:nvPr>
+            <p:ph type="body" idx="1"/>
+          </p:nvPr>
+        </p:nvSpPr>
+        <p:spPr/>
+        <p:txBody>
+          <a:bodyPr/>
+          <a:lstStyle/>
+          <a:p>
+            <a:r>
+              <a:rPr lang="en-US" dirty="0"/>
+              <a:t/>
+            </a:r>
+            <a:endParaRPr lang="en-US" dirty="0"/>
+          </a:p>
+        </p:txBody>
+      </p:sp>
+      <p:sp>
+        <p:nvSpPr>
+          <p:cNvPr id="4" name="Slide Number Placeholder 3"/>
+          <p:cNvSpPr>
+            <a:spLocks noGrp="1"/>
+          </p:cNvSpPr>
+          <p:nvPr>
+            <p:ph type="sldNum" sz="quarter" idx="10"/>
+          </p:nvPr>
+        </p:nvSpPr>
+        <p:spPr/>
+        <p:txBody>
+          <a:bodyPr/>
+          <a:lstStyle/>
+          <a:p>
+            <a:fld id="{F7021451-1387-4CA6-816F-3879F97B5CBC}" type="slidenum">
+              <a:rPr lang="en-US"/>
+              <a:t>13</a:t>
+            </a:fld>
+            <a:endParaRPr lang="en-US"/>
+          </a:p>
+        </p:txBody>
+      </p:sp>
+    </p:spTree>
+    <p:extLst>
+      <p:ext uri="{BB962C8B-B14F-4D97-AF65-F5344CB8AC3E}">
+        <p14:creationId xmlns:p14="http://schemas.microsoft.com/office/powerpoint/2010/main" val="1024086991"/>
+      </p:ext>
+    </p:extLst>
+  </p:cSld>
+  <p:clrMapOvr>
+    <a:masterClrMapping/>
+  </p:clrMapOvr>
+</p:notes>
+</file>
+
+<file path=ppt/notesSlides/notesSlide14.xml><?xml version="1.0" encoding="utf-8"?>
+<p:notes xmlns:a="http://schemas.openxmlformats.org/drawingml/2006/main" xmlns:r="http://schemas.openxmlformats.org/officeDocument/2006/relationships" xmlns:p="http://schemas.openxmlformats.org/presentationml/2006/main">
+  <p:cSld>
+    <p:spTree>
+      <p:nvGrpSpPr>
+        <p:cNvPr id="1" name=""/>
+        <p:cNvGrpSpPr/>
+        <p:nvPr/>
+      </p:nvGrpSpPr>
+      <p:grpSpPr>
+        <a:xfrm>
+          <a:off x="0" y="0"/>
+          <a:ext cx="0" cy="0"/>
+          <a:chOff x="0" y="0"/>
+          <a:chExt cx="0" cy="0"/>
+        </a:xfrm>
+      </p:grpSpPr>
+      <p:sp>
+        <p:nvSpPr>
+          <p:cNvPr id="2" name="Slide Image Placeholder 1"/>
+          <p:cNvSpPr>
+            <a:spLocks noGrp="1" noRot="1" noChangeAspect="1"/>
+          </p:cNvSpPr>
+          <p:nvPr>
+            <p:ph type="sldImg"/>
+          </p:nvPr>
+        </p:nvSpPr>
+        <p:spPr/>
+      </p:sp>
+      <p:sp>
+        <p:nvSpPr>
+          <p:cNvPr id="3" name="Notes Placeholder 2"/>
+          <p:cNvSpPr>
+            <a:spLocks noGrp="1"/>
+          </p:cNvSpPr>
+          <p:nvPr>
+            <p:ph type="body" idx="1"/>
+          </p:nvPr>
+        </p:nvSpPr>
+        <p:spPr/>
+        <p:txBody>
+          <a:bodyPr/>
+          <a:lstStyle/>
+          <a:p>
+            <a:r>
+              <a:rPr lang="en-US" dirty="0"/>
+              <a:t/>
+            </a:r>
+            <a:endParaRPr lang="en-US" dirty="0"/>
+          </a:p>
+        </p:txBody>
+      </p:sp>
+      <p:sp>
+        <p:nvSpPr>
+          <p:cNvPr id="4" name="Slide Number Placeholder 3"/>
+          <p:cNvSpPr>
+            <a:spLocks noGrp="1"/>
+          </p:cNvSpPr>
+          <p:nvPr>
+            <p:ph type="sldNum" sz="quarter" idx="10"/>
+          </p:nvPr>
+        </p:nvSpPr>
+        <p:spPr/>
+        <p:txBody>
+          <a:bodyPr/>
+          <a:lstStyle/>
+          <a:p>
+            <a:fld id="{F7021451-1387-4CA6-816F-3879F97B5CBC}" type="slidenum">
+              <a:rPr lang="en-US"/>
+              <a:t>14</a:t>
+            </a:fld>
+            <a:endParaRPr lang="en-US"/>
+          </a:p>
+        </p:txBody>
+      </p:sp>
+    </p:spTree>
+    <p:extLst>
+      <p:ext uri="{BB962C8B-B14F-4D97-AF65-F5344CB8AC3E}">
+        <p14:creationId xmlns:p14="http://schemas.microsoft.com/office/powerpoint/2010/main" val="1024086991"/>
+      </p:ext>
+    </p:extLst>
+  </p:cSld>
+  <p:clrMapOvr>
+    <a:masterClrMapping/>
+  </p:clrMapOvr>
+</p:notes>
+</file>
+
+<file path=ppt/notesSlides/notesSlide15.xml><?xml version="1.0" encoding="utf-8"?>
+<p:notes xmlns:a="http://schemas.openxmlformats.org/drawingml/2006/main" xmlns:r="http://schemas.openxmlformats.org/officeDocument/2006/relationships" xmlns:p="http://schemas.openxmlformats.org/presentationml/2006/main">
+  <p:cSld>
+    <p:spTree>
+      <p:nvGrpSpPr>
+        <p:cNvPr id="1" name=""/>
+        <p:cNvGrpSpPr/>
+        <p:nvPr/>
+      </p:nvGrpSpPr>
+      <p:grpSpPr>
+        <a:xfrm>
+          <a:off x="0" y="0"/>
+          <a:ext cx="0" cy="0"/>
+          <a:chOff x="0" y="0"/>
+          <a:chExt cx="0" cy="0"/>
+        </a:xfrm>
+      </p:grpSpPr>
+      <p:sp>
+        <p:nvSpPr>
+          <p:cNvPr id="2" name="Slide Image Placeholder 1"/>
+          <p:cNvSpPr>
+            <a:spLocks noGrp="1" noRot="1" noChangeAspect="1"/>
+          </p:cNvSpPr>
+          <p:nvPr>
+            <p:ph type="sldImg"/>
+          </p:nvPr>
+        </p:nvSpPr>
+        <p:spPr/>
+      </p:sp>
+      <p:sp>
+        <p:nvSpPr>
+          <p:cNvPr id="3" name="Notes Placeholder 2"/>
+          <p:cNvSpPr>
+            <a:spLocks noGrp="1"/>
+          </p:cNvSpPr>
+          <p:nvPr>
+            <p:ph type="body" idx="1"/>
+          </p:nvPr>
+        </p:nvSpPr>
+        <p:spPr/>
+        <p:txBody>
+          <a:bodyPr/>
+          <a:lstStyle/>
+          <a:p>
+            <a:r>
+              <a:rPr lang="en-US" dirty="0"/>
+              <a:t/>
+            </a:r>
+            <a:endParaRPr lang="en-US" dirty="0"/>
+          </a:p>
+        </p:txBody>
+      </p:sp>
+      <p:sp>
+        <p:nvSpPr>
+          <p:cNvPr id="4" name="Slide Number Placeholder 3"/>
+          <p:cNvSpPr>
+            <a:spLocks noGrp="1"/>
+          </p:cNvSpPr>
+          <p:nvPr>
+            <p:ph type="sldNum" sz="quarter" idx="10"/>
+          </p:nvPr>
+        </p:nvSpPr>
+        <p:spPr/>
+        <p:txBody>
+          <a:bodyPr/>
+          <a:lstStyle/>
+          <a:p>
+            <a:fld id="{F7021451-1387-4CA6-816F-3879F97B5CBC}" type="slidenum">
+              <a:rPr lang="en-US"/>
+              <a:t>15</a:t>
             </a:fld>
             <a:endParaRPr lang="en-US"/>
           </a:p>
@@ -2136,7 +2492,7 @@
                 <a:ea typeface="Yu Gothic" pitchFamily="34" charset="-122"/>
                 <a:cs typeface="Yu Gothic" pitchFamily="34" charset="-120"/>
               </a:rPr>
-              <a:t>AAR ― 振り返り（After Action Review）</a:t>
+              <a:t>確認テスト　問1〜問5</a:t>
             </a:r>
             <a:endParaRPr lang="en-US" sz="2700" dirty="0"/>
           </a:p>
@@ -2156,7 +2512,7 @@
                 <a:ea typeface="Calibri" pitchFamily="34" charset="-122"/>
                 <a:cs typeface="Calibri" pitchFamily="34" charset="-120"/>
               </a:rPr>
-              <a:t>AAR — After Action Review</a:t>
+              <a:t>Assessment — Questions 1 to 5</a:t>
             </a:r>
             <a:endParaRPr lang="en-US" sz="2700" dirty="0"/>
           </a:p>
@@ -2170,8 +2526,8 @@
         </p:nvSpPr>
         <p:spPr>
           <a:xfrm>
-            <a:off x="640080" y="1536192"/>
-            <a:ext cx="10911535" cy="566928"/>
+            <a:off x="640080" y="1499616"/>
+            <a:ext cx="10911535" cy="512064"/>
           </a:xfrm>
           <a:prstGeom prst="rect">
             <a:avLst/>
@@ -2198,7 +2554,7 @@
                 <a:ea typeface="Yu Gothic" pitchFamily="34" charset="-122"/>
                 <a:cs typeface="Yu Gothic" pitchFamily="34" charset="-120"/>
               </a:rPr>
-              <a:t>AAR は事案や訓練の直後に行う振り返りです。原則は、犯人探しをしないことです。</a:t>
+              <a:t>15分。回答は日本語・英語どちらでも構いません。記述は一言で結構です。</a:t>
             </a:r>
             <a:endParaRPr lang="en-US" sz="1300" dirty="0"/>
           </a:p>
@@ -2218,7 +2574,7 @@
                 <a:ea typeface="Calibri" pitchFamily="34" charset="-122"/>
                 <a:cs typeface="Calibri" pitchFamily="34" charset="-120"/>
               </a:rPr>
-              <a:t>An AAR is a review held immediately after an incident or exercise. The rule is: no blame.</a:t>
+              <a:t>15 minutes. Answer in Japanese or English. Short answers are fine.</a:t>
             </a:r>
             <a:endParaRPr lang="en-US" sz="1300" dirty="0"/>
           </a:p>
@@ -2232,12 +2588,12 @@
         </p:nvSpPr>
         <p:spPr>
           <a:xfrm>
-            <a:off x="640080" y="2286000"/>
-            <a:ext cx="10911535" cy="702259"/>
+            <a:off x="640080" y="2194560"/>
+            <a:ext cx="10911535" cy="691286"/>
           </a:xfrm>
           <a:prstGeom prst="roundRect">
             <a:avLst>
-              <a:gd name="adj" fmla="val 6510"/>
+              <a:gd name="adj" fmla="val 5291"/>
             </a:avLst>
           </a:prstGeom>
           <a:solidFill>
@@ -2254,14 +2610,14 @@
         </p:nvSpPr>
         <p:spPr>
           <a:xfrm>
-            <a:off x="896112" y="2445106"/>
-            <a:ext cx="384048" cy="384048"/>
+            <a:off x="822960" y="2375611"/>
+            <a:ext cx="329184" cy="329184"/>
           </a:xfrm>
           <a:prstGeom prst="ellipse">
             <a:avLst/>
           </a:prstGeom>
           <a:solidFill>
-            <a:srgbClr val="12B198"/>
+            <a:srgbClr val="093259"/>
           </a:solidFill>
           <a:ln/>
         </p:spPr>
@@ -2274,8 +2630,8 @@
         </p:nvSpPr>
         <p:spPr>
           <a:xfrm>
-            <a:off x="896112" y="2445106"/>
-            <a:ext cx="384048" cy="384048"/>
+            <a:off x="822960" y="2375611"/>
+            <a:ext cx="329184" cy="329184"/>
           </a:xfrm>
           <a:prstGeom prst="rect">
             <a:avLst/>
@@ -2291,7 +2647,7 @@
               <a:buNone/>
             </a:pPr>
             <a:r>
-              <a:rPr lang="en-US" sz="1400" b="1" dirty="0">
+              <a:rPr lang="en-US" sz="1100" b="1" dirty="0">
                 <a:solidFill>
                   <a:srgbClr val="FFFFFF"/>
                 </a:solidFill>
@@ -2301,7 +2657,7 @@
               </a:rPr>
               <a:t>1</a:t>
             </a:r>
-            <a:endParaRPr lang="en-US" sz="1400" dirty="0"/>
+            <a:endParaRPr lang="en-US" sz="1100" dirty="0"/>
           </a:p>
         </p:txBody>
       </p:sp>
@@ -2313,8 +2669,8 @@
         </p:nvSpPr>
         <p:spPr>
           <a:xfrm>
-            <a:off x="1499616" y="2395728"/>
-            <a:ext cx="9777679" cy="519379"/>
+            <a:off x="1243584" y="2267712"/>
+            <a:ext cx="10070287" cy="544982"/>
           </a:xfrm>
           <a:prstGeom prst="rect">
             <a:avLst/>
@@ -2328,12 +2684,12 @@
           <a:p>
             <a:pPr indent="0" marL="0">
               <a:lnSpc>
-                <a:spcPct val="92000"/>
-              </a:lnSpc>
-              <a:buNone/>
-            </a:pPr>
-            <a:r>
-              <a:rPr lang="en-US" sz="1450" b="1" dirty="0">
+                <a:spcPct val="90000"/>
+              </a:lnSpc>
+              <a:buNone/>
+            </a:pPr>
+            <a:r>
+              <a:rPr lang="en-US" sz="1150" b="1" dirty="0">
                 <a:solidFill>
                   <a:srgbClr val="1B2733"/>
                 </a:solidFill>
@@ -2341,19 +2697,19 @@
                 <a:ea typeface="Yu Gothic" pitchFamily="34" charset="-122"/>
                 <a:cs typeface="Yu Gothic" pitchFamily="34" charset="-120"/>
               </a:rPr>
-              <a:t>何が起きるはずだったか。</a:t>
-            </a:r>
-            <a:endParaRPr lang="en-US" sz="1450" dirty="0"/>
-          </a:p>
-          <a:p>
-            <a:pPr indent="0" marL="0">
-              <a:lnSpc>
-                <a:spcPct val="92000"/>
-              </a:lnSpc>
-              <a:buNone/>
-            </a:pPr>
-            <a:r>
-              <a:rPr lang="en-US" sz="1050" i="1" dirty="0">
+              <a:t>警備員の法的な立場は何か。また、警察官にあって警備員にない権限を1つ挙げよ。</a:t>
+            </a:r>
+            <a:endParaRPr lang="en-US" sz="1150" dirty="0"/>
+          </a:p>
+          <a:p>
+            <a:pPr indent="0" marL="0">
+              <a:lnSpc>
+                <a:spcPct val="90000"/>
+              </a:lnSpc>
+              <a:buNone/>
+            </a:pPr>
+            <a:r>
+              <a:rPr lang="en-US" sz="900" i="1" dirty="0">
                 <a:solidFill>
                   <a:srgbClr val="5F7183"/>
                 </a:solidFill>
@@ -2361,9 +2717,9 @@
                 <a:ea typeface="Calibri" pitchFamily="34" charset="-122"/>
                 <a:cs typeface="Calibri" pitchFamily="34" charset="-120"/>
               </a:rPr>
-              <a:t>What was supposed to happen?</a:t>
-            </a:r>
-            <a:endParaRPr lang="en-US" sz="1450" dirty="0"/>
+              <a:t>What is a guard's legal status? Name one power the police have and you do not.</a:t>
+            </a:r>
+            <a:endParaRPr lang="en-US" sz="1150" dirty="0"/>
           </a:p>
         </p:txBody>
       </p:sp>
@@ -2375,155 +2731,12 @@
         </p:nvSpPr>
         <p:spPr>
           <a:xfrm>
-            <a:off x="640080" y="3097987"/>
-            <a:ext cx="10911535" cy="702259"/>
+            <a:off x="640080" y="3032150"/>
+            <a:ext cx="10911535" cy="691286"/>
           </a:xfrm>
           <a:prstGeom prst="roundRect">
             <a:avLst>
-              <a:gd name="adj" fmla="val 6510"/>
-            </a:avLst>
-          </a:prstGeom>
-          <a:solidFill>
-            <a:srgbClr val="F7FAFC"/>
-          </a:solidFill>
-          <a:ln/>
-        </p:spPr>
-      </p:sp>
-      <p:sp>
-        <p:nvSpPr>
-          <p:cNvPr id="10" name="Shape 7"/>
-          <p:cNvSpPr/>
-          <p:nvPr/>
-        </p:nvSpPr>
-        <p:spPr>
-          <a:xfrm>
-            <a:off x="896112" y="3257093"/>
-            <a:ext cx="384048" cy="384048"/>
-          </a:xfrm>
-          <a:prstGeom prst="ellipse">
-            <a:avLst/>
-          </a:prstGeom>
-          <a:solidFill>
-            <a:srgbClr val="12B198"/>
-          </a:solidFill>
-          <a:ln/>
-        </p:spPr>
-      </p:sp>
-      <p:sp>
-        <p:nvSpPr>
-          <p:cNvPr id="11" name="Text 8"/>
-          <p:cNvSpPr/>
-          <p:nvPr/>
-        </p:nvSpPr>
-        <p:spPr>
-          <a:xfrm>
-            <a:off x="896112" y="3257093"/>
-            <a:ext cx="384048" cy="384048"/>
-          </a:xfrm>
-          <a:prstGeom prst="rect">
-            <a:avLst/>
-          </a:prstGeom>
-          <a:noFill/>
-          <a:ln/>
-        </p:spPr>
-        <p:txBody>
-          <a:bodyPr wrap="square" lIns="0" tIns="0" rIns="0" bIns="0" rtlCol="0" anchor="ctr"/>
-          <a:lstStyle/>
-          <a:p>
-            <a:pPr algn="ctr" indent="0" marL="0">
-              <a:buNone/>
-            </a:pPr>
-            <a:r>
-              <a:rPr lang="en-US" sz="1400" b="1" dirty="0">
-                <a:solidFill>
-                  <a:srgbClr val="FFFFFF"/>
-                </a:solidFill>
-                <a:latin typeface="Calibri" pitchFamily="34" charset="0"/>
-                <a:ea typeface="Calibri" pitchFamily="34" charset="-122"/>
-                <a:cs typeface="Calibri" pitchFamily="34" charset="-120"/>
-              </a:rPr>
-              <a:t>2</a:t>
-            </a:r>
-            <a:endParaRPr lang="en-US" sz="1400" dirty="0"/>
-          </a:p>
-        </p:txBody>
-      </p:sp>
-      <p:sp>
-        <p:nvSpPr>
-          <p:cNvPr id="12" name="Text 9"/>
-          <p:cNvSpPr/>
-          <p:nvPr/>
-        </p:nvSpPr>
-        <p:spPr>
-          <a:xfrm>
-            <a:off x="1499616" y="3207715"/>
-            <a:ext cx="9777679" cy="519379"/>
-          </a:xfrm>
-          <a:prstGeom prst="rect">
-            <a:avLst/>
-          </a:prstGeom>
-          <a:noFill/>
-          <a:ln/>
-        </p:spPr>
-        <p:txBody>
-          <a:bodyPr wrap="square" lIns="0" tIns="0" rIns="0" bIns="0" rtlCol="0" anchor="ctr"/>
-          <a:lstStyle/>
-          <a:p>
-            <a:pPr indent="0" marL="0">
-              <a:lnSpc>
-                <a:spcPct val="92000"/>
-              </a:lnSpc>
-              <a:buNone/>
-            </a:pPr>
-            <a:r>
-              <a:rPr lang="en-US" sz="1450" b="1" dirty="0">
-                <a:solidFill>
-                  <a:srgbClr val="1B2733"/>
-                </a:solidFill>
-                <a:latin typeface="Yu Gothic" pitchFamily="34" charset="0"/>
-                <a:ea typeface="Yu Gothic" pitchFamily="34" charset="-122"/>
-                <a:cs typeface="Yu Gothic" pitchFamily="34" charset="-120"/>
-              </a:rPr>
-              <a:t>実際には何が起きたか。</a:t>
-            </a:r>
-            <a:endParaRPr lang="en-US" sz="1450" dirty="0"/>
-          </a:p>
-          <a:p>
-            <a:pPr indent="0" marL="0">
-              <a:lnSpc>
-                <a:spcPct val="92000"/>
-              </a:lnSpc>
-              <a:buNone/>
-            </a:pPr>
-            <a:r>
-              <a:rPr lang="en-US" sz="1050" i="1" dirty="0">
-                <a:solidFill>
-                  <a:srgbClr val="5F7183"/>
-                </a:solidFill>
-                <a:latin typeface="Calibri" pitchFamily="34" charset="0"/>
-                <a:ea typeface="Calibri" pitchFamily="34" charset="-122"/>
-                <a:cs typeface="Calibri" pitchFamily="34" charset="-120"/>
-              </a:rPr>
-              <a:t>What actually happened?</a:t>
-            </a:r>
-            <a:endParaRPr lang="en-US" sz="1450" dirty="0"/>
-          </a:p>
-        </p:txBody>
-      </p:sp>
-      <p:sp>
-        <p:nvSpPr>
-          <p:cNvPr id="13" name="Shape 10"/>
-          <p:cNvSpPr/>
-          <p:nvPr/>
-        </p:nvSpPr>
-        <p:spPr>
-          <a:xfrm>
-            <a:off x="640080" y="3909974"/>
-            <a:ext cx="10911535" cy="702259"/>
-          </a:xfrm>
-          <a:prstGeom prst="roundRect">
-            <a:avLst>
-              <a:gd name="adj" fmla="val 6510"/>
+              <a:gd name="adj" fmla="val 5291"/>
             </a:avLst>
           </a:prstGeom>
           <a:solidFill>
@@ -2534,34 +2747,34 @@
       </p:sp>
       <p:sp>
         <p:nvSpPr>
-          <p:cNvPr id="14" name="Shape 11"/>
-          <p:cNvSpPr/>
-          <p:nvPr/>
-        </p:nvSpPr>
-        <p:spPr>
-          <a:xfrm>
-            <a:off x="896112" y="4069080"/>
-            <a:ext cx="384048" cy="384048"/>
+          <p:cNvPr id="10" name="Shape 7"/>
+          <p:cNvSpPr/>
+          <p:nvPr/>
+        </p:nvSpPr>
+        <p:spPr>
+          <a:xfrm>
+            <a:off x="822960" y="3213202"/>
+            <a:ext cx="329184" cy="329184"/>
           </a:xfrm>
           <a:prstGeom prst="ellipse">
             <a:avLst/>
           </a:prstGeom>
           <a:solidFill>
-            <a:srgbClr val="12B198"/>
+            <a:srgbClr val="093259"/>
           </a:solidFill>
           <a:ln/>
         </p:spPr>
       </p:sp>
       <p:sp>
         <p:nvSpPr>
-          <p:cNvPr id="15" name="Text 12"/>
-          <p:cNvSpPr/>
-          <p:nvPr/>
-        </p:nvSpPr>
-        <p:spPr>
-          <a:xfrm>
-            <a:off x="896112" y="4069080"/>
-            <a:ext cx="384048" cy="384048"/>
+          <p:cNvPr id="11" name="Text 8"/>
+          <p:cNvSpPr/>
+          <p:nvPr/>
+        </p:nvSpPr>
+        <p:spPr>
+          <a:xfrm>
+            <a:off x="822960" y="3213202"/>
+            <a:ext cx="329184" cy="329184"/>
           </a:xfrm>
           <a:prstGeom prst="rect">
             <a:avLst/>
@@ -2577,7 +2790,7 @@
               <a:buNone/>
             </a:pPr>
             <a:r>
-              <a:rPr lang="en-US" sz="1400" b="1" dirty="0">
+              <a:rPr lang="en-US" sz="1100" b="1" dirty="0">
                 <a:solidFill>
                   <a:srgbClr val="FFFFFF"/>
                 </a:solidFill>
@@ -2585,22 +2798,22 @@
                 <a:ea typeface="Calibri" pitchFamily="34" charset="-122"/>
                 <a:cs typeface="Calibri" pitchFamily="34" charset="-120"/>
               </a:rPr>
-              <a:t>3</a:t>
-            </a:r>
-            <a:endParaRPr lang="en-US" sz="1400" dirty="0"/>
-          </a:p>
-        </p:txBody>
-      </p:sp>
-      <p:sp>
-        <p:nvSpPr>
-          <p:cNvPr id="16" name="Text 13"/>
-          <p:cNvSpPr/>
-          <p:nvPr/>
-        </p:nvSpPr>
-        <p:spPr>
-          <a:xfrm>
-            <a:off x="1499616" y="4019702"/>
-            <a:ext cx="9777679" cy="519379"/>
+              <a:t>2</a:t>
+            </a:r>
+            <a:endParaRPr lang="en-US" sz="1100" dirty="0"/>
+          </a:p>
+        </p:txBody>
+      </p:sp>
+      <p:sp>
+        <p:nvSpPr>
+          <p:cNvPr id="12" name="Text 9"/>
+          <p:cNvSpPr/>
+          <p:nvPr/>
+        </p:nvSpPr>
+        <p:spPr>
+          <a:xfrm>
+            <a:off x="1243584" y="3105302"/>
+            <a:ext cx="10070287" cy="544982"/>
           </a:xfrm>
           <a:prstGeom prst="rect">
             <a:avLst/>
@@ -2614,12 +2827,12 @@
           <a:p>
             <a:pPr indent="0" marL="0">
               <a:lnSpc>
-                <a:spcPct val="92000"/>
-              </a:lnSpc>
-              <a:buNone/>
-            </a:pPr>
-            <a:r>
-              <a:rPr lang="en-US" sz="1450" b="1" dirty="0">
+                <a:spcPct val="90000"/>
+              </a:lnSpc>
+              <a:buNone/>
+            </a:pPr>
+            <a:r>
+              <a:rPr lang="en-US" sz="1150" b="1" dirty="0">
                 <a:solidFill>
                   <a:srgbClr val="1B2733"/>
                 </a:solidFill>
@@ -2627,19 +2840,19 @@
                 <a:ea typeface="Yu Gothic" pitchFamily="34" charset="-122"/>
                 <a:cs typeface="Yu Gothic" pitchFamily="34" charset="-120"/>
               </a:rPr>
-              <a:t>なぜ差が生じたか。</a:t>
-            </a:r>
-            <a:endParaRPr lang="en-US" sz="1450" dirty="0"/>
-          </a:p>
-          <a:p>
-            <a:pPr indent="0" marL="0">
-              <a:lnSpc>
-                <a:spcPct val="92000"/>
-              </a:lnSpc>
-              <a:buNone/>
-            </a:pPr>
-            <a:r>
-              <a:rPr lang="en-US" sz="1050" i="1" dirty="0">
+              <a:t>De-escalation の目的は何か。一言で述べよ。</a:t>
+            </a:r>
+            <a:endParaRPr lang="en-US" sz="1150" dirty="0"/>
+          </a:p>
+          <a:p>
+            <a:pPr indent="0" marL="0">
+              <a:lnSpc>
+                <a:spcPct val="90000"/>
+              </a:lnSpc>
+              <a:buNone/>
+            </a:pPr>
+            <a:r>
+              <a:rPr lang="en-US" sz="900" i="1" dirty="0">
                 <a:solidFill>
                   <a:srgbClr val="5F7183"/>
                 </a:solidFill>
@@ -2647,169 +2860,26 @@
                 <a:ea typeface="Calibri" pitchFamily="34" charset="-122"/>
                 <a:cs typeface="Calibri" pitchFamily="34" charset="-120"/>
               </a:rPr>
-              <a:t>Why was there a difference?</a:t>
-            </a:r>
-            <a:endParaRPr lang="en-US" sz="1450" dirty="0"/>
-          </a:p>
-        </p:txBody>
-      </p:sp>
-      <p:sp>
-        <p:nvSpPr>
-          <p:cNvPr id="17" name="Shape 14"/>
-          <p:cNvSpPr/>
-          <p:nvPr/>
-        </p:nvSpPr>
-        <p:spPr>
-          <a:xfrm>
-            <a:off x="640080" y="4721962"/>
-            <a:ext cx="10911535" cy="702259"/>
+              <a:t>In one line: what is the aim of de-escalation?</a:t>
+            </a:r>
+            <a:endParaRPr lang="en-US" sz="1150" dirty="0"/>
+          </a:p>
+        </p:txBody>
+      </p:sp>
+      <p:sp>
+        <p:nvSpPr>
+          <p:cNvPr id="13" name="Shape 10"/>
+          <p:cNvSpPr/>
+          <p:nvPr/>
+        </p:nvSpPr>
+        <p:spPr>
+          <a:xfrm>
+            <a:off x="640080" y="3869741"/>
+            <a:ext cx="10911535" cy="691286"/>
           </a:xfrm>
           <a:prstGeom prst="roundRect">
             <a:avLst>
-              <a:gd name="adj" fmla="val 6510"/>
-            </a:avLst>
-          </a:prstGeom>
-          <a:solidFill>
-            <a:srgbClr val="F7FAFC"/>
-          </a:solidFill>
-          <a:ln/>
-        </p:spPr>
-      </p:sp>
-      <p:sp>
-        <p:nvSpPr>
-          <p:cNvPr id="18" name="Shape 15"/>
-          <p:cNvSpPr/>
-          <p:nvPr/>
-        </p:nvSpPr>
-        <p:spPr>
-          <a:xfrm>
-            <a:off x="896112" y="4881067"/>
-            <a:ext cx="384048" cy="384048"/>
-          </a:xfrm>
-          <a:prstGeom prst="ellipse">
-            <a:avLst/>
-          </a:prstGeom>
-          <a:solidFill>
-            <a:srgbClr val="12B198"/>
-          </a:solidFill>
-          <a:ln/>
-        </p:spPr>
-      </p:sp>
-      <p:sp>
-        <p:nvSpPr>
-          <p:cNvPr id="19" name="Text 16"/>
-          <p:cNvSpPr/>
-          <p:nvPr/>
-        </p:nvSpPr>
-        <p:spPr>
-          <a:xfrm>
-            <a:off x="896112" y="4881067"/>
-            <a:ext cx="384048" cy="384048"/>
-          </a:xfrm>
-          <a:prstGeom prst="rect">
-            <a:avLst/>
-          </a:prstGeom>
-          <a:noFill/>
-          <a:ln/>
-        </p:spPr>
-        <p:txBody>
-          <a:bodyPr wrap="square" lIns="0" tIns="0" rIns="0" bIns="0" rtlCol="0" anchor="ctr"/>
-          <a:lstStyle/>
-          <a:p>
-            <a:pPr algn="ctr" indent="0" marL="0">
-              <a:buNone/>
-            </a:pPr>
-            <a:r>
-              <a:rPr lang="en-US" sz="1400" b="1" dirty="0">
-                <a:solidFill>
-                  <a:srgbClr val="FFFFFF"/>
-                </a:solidFill>
-                <a:latin typeface="Calibri" pitchFamily="34" charset="0"/>
-                <a:ea typeface="Calibri" pitchFamily="34" charset="-122"/>
-                <a:cs typeface="Calibri" pitchFamily="34" charset="-120"/>
-              </a:rPr>
-              <a:t>4</a:t>
-            </a:r>
-            <a:endParaRPr lang="en-US" sz="1400" dirty="0"/>
-          </a:p>
-        </p:txBody>
-      </p:sp>
-      <p:sp>
-        <p:nvSpPr>
-          <p:cNvPr id="20" name="Text 17"/>
-          <p:cNvSpPr/>
-          <p:nvPr/>
-        </p:nvSpPr>
-        <p:spPr>
-          <a:xfrm>
-            <a:off x="1499616" y="4831690"/>
-            <a:ext cx="9777679" cy="519379"/>
-          </a:xfrm>
-          <a:prstGeom prst="rect">
-            <a:avLst/>
-          </a:prstGeom>
-          <a:noFill/>
-          <a:ln/>
-        </p:spPr>
-        <p:txBody>
-          <a:bodyPr wrap="square" lIns="0" tIns="0" rIns="0" bIns="0" rtlCol="0" anchor="ctr"/>
-          <a:lstStyle/>
-          <a:p>
-            <a:pPr indent="0" marL="0">
-              <a:lnSpc>
-                <a:spcPct val="92000"/>
-              </a:lnSpc>
-              <a:buNone/>
-            </a:pPr>
-            <a:r>
-              <a:rPr lang="en-US" sz="1450" b="1" dirty="0">
-                <a:solidFill>
-                  <a:srgbClr val="1B2733"/>
-                </a:solidFill>
-                <a:latin typeface="Yu Gothic" pitchFamily="34" charset="0"/>
-                <a:ea typeface="Yu Gothic" pitchFamily="34" charset="-122"/>
-                <a:cs typeface="Yu Gothic" pitchFamily="34" charset="-120"/>
-              </a:rPr>
-              <a:t>次に何を変えるか。</a:t>
-            </a:r>
-            <a:endParaRPr lang="en-US" sz="1450" dirty="0"/>
-          </a:p>
-          <a:p>
-            <a:pPr indent="0" marL="0">
-              <a:lnSpc>
-                <a:spcPct val="92000"/>
-              </a:lnSpc>
-              <a:buNone/>
-            </a:pPr>
-            <a:r>
-              <a:rPr lang="en-US" sz="1050" i="1" dirty="0">
-                <a:solidFill>
-                  <a:srgbClr val="5F7183"/>
-                </a:solidFill>
-                <a:latin typeface="Calibri" pitchFamily="34" charset="0"/>
-                <a:ea typeface="Calibri" pitchFamily="34" charset="-122"/>
-                <a:cs typeface="Calibri" pitchFamily="34" charset="-120"/>
-              </a:rPr>
-              <a:t>What will we do differently?</a:t>
-            </a:r>
-            <a:endParaRPr lang="en-US" sz="1450" dirty="0"/>
-          </a:p>
-        </p:txBody>
-      </p:sp>
-      <p:sp>
-        <p:nvSpPr>
-          <p:cNvPr id="21" name="Shape 18"/>
-          <p:cNvSpPr/>
-          <p:nvPr/>
-        </p:nvSpPr>
-        <p:spPr>
-          <a:xfrm>
-            <a:off x="640080" y="5533949"/>
-            <a:ext cx="10911535" cy="702259"/>
-          </a:xfrm>
-          <a:prstGeom prst="roundRect">
-            <a:avLst>
-              <a:gd name="adj" fmla="val 6510"/>
+              <a:gd name="adj" fmla="val 5291"/>
             </a:avLst>
           </a:prstGeom>
           <a:solidFill>
@@ -2820,20 +2890,306 @@
       </p:sp>
       <p:sp>
         <p:nvSpPr>
+          <p:cNvPr id="14" name="Shape 11"/>
+          <p:cNvSpPr/>
+          <p:nvPr/>
+        </p:nvSpPr>
+        <p:spPr>
+          <a:xfrm>
+            <a:off x="822960" y="4050792"/>
+            <a:ext cx="329184" cy="329184"/>
+          </a:xfrm>
+          <a:prstGeom prst="ellipse">
+            <a:avLst/>
+          </a:prstGeom>
+          <a:solidFill>
+            <a:srgbClr val="093259"/>
+          </a:solidFill>
+          <a:ln/>
+        </p:spPr>
+      </p:sp>
+      <p:sp>
+        <p:nvSpPr>
+          <p:cNvPr id="15" name="Text 12"/>
+          <p:cNvSpPr/>
+          <p:nvPr/>
+        </p:nvSpPr>
+        <p:spPr>
+          <a:xfrm>
+            <a:off x="822960" y="4050792"/>
+            <a:ext cx="329184" cy="329184"/>
+          </a:xfrm>
+          <a:prstGeom prst="rect">
+            <a:avLst/>
+          </a:prstGeom>
+          <a:noFill/>
+          <a:ln/>
+        </p:spPr>
+        <p:txBody>
+          <a:bodyPr wrap="square" lIns="0" tIns="0" rIns="0" bIns="0" rtlCol="0" anchor="ctr"/>
+          <a:lstStyle/>
+          <a:p>
+            <a:pPr algn="ctr" indent="0" marL="0">
+              <a:buNone/>
+            </a:pPr>
+            <a:r>
+              <a:rPr lang="en-US" sz="1100" b="1" dirty="0">
+                <a:solidFill>
+                  <a:srgbClr val="FFFFFF"/>
+                </a:solidFill>
+                <a:latin typeface="Calibri" pitchFamily="34" charset="0"/>
+                <a:ea typeface="Calibri" pitchFamily="34" charset="-122"/>
+                <a:cs typeface="Calibri" pitchFamily="34" charset="-120"/>
+              </a:rPr>
+              <a:t>3</a:t>
+            </a:r>
+            <a:endParaRPr lang="en-US" sz="1100" dirty="0"/>
+          </a:p>
+        </p:txBody>
+      </p:sp>
+      <p:sp>
+        <p:nvSpPr>
+          <p:cNvPr id="16" name="Text 13"/>
+          <p:cNvSpPr/>
+          <p:nvPr/>
+        </p:nvSpPr>
+        <p:spPr>
+          <a:xfrm>
+            <a:off x="1243584" y="3942893"/>
+            <a:ext cx="10070287" cy="544982"/>
+          </a:xfrm>
+          <a:prstGeom prst="rect">
+            <a:avLst/>
+          </a:prstGeom>
+          <a:noFill/>
+          <a:ln/>
+        </p:spPr>
+        <p:txBody>
+          <a:bodyPr wrap="square" lIns="0" tIns="0" rIns="0" bIns="0" rtlCol="0" anchor="ctr"/>
+          <a:lstStyle/>
+          <a:p>
+            <a:pPr indent="0" marL="0">
+              <a:lnSpc>
+                <a:spcPct val="90000"/>
+              </a:lnSpc>
+              <a:buNone/>
+            </a:pPr>
+            <a:r>
+              <a:rPr lang="en-US" sz="1150" b="1" dirty="0">
+                <a:solidFill>
+                  <a:srgbClr val="1B2733"/>
+                </a:solidFill>
+                <a:latin typeface="Yu Gothic" pitchFamily="34" charset="0"/>
+                <a:ea typeface="Yu Gothic" pitchFamily="34" charset="-122"/>
+                <a:cs typeface="Yu Gothic" pitchFamily="34" charset="-120"/>
+              </a:rPr>
+              <a:t>相手が引き下がれる形を残すのは、なぜか。</a:t>
+            </a:r>
+            <a:endParaRPr lang="en-US" sz="1150" dirty="0"/>
+          </a:p>
+          <a:p>
+            <a:pPr indent="0" marL="0">
+              <a:lnSpc>
+                <a:spcPct val="90000"/>
+              </a:lnSpc>
+              <a:buNone/>
+            </a:pPr>
+            <a:r>
+              <a:rPr lang="en-US" sz="900" i="1" dirty="0">
+                <a:solidFill>
+                  <a:srgbClr val="5F7183"/>
+                </a:solidFill>
+                <a:latin typeface="Calibri" pitchFamily="34" charset="0"/>
+                <a:ea typeface="Calibri" pitchFamily="34" charset="-122"/>
+                <a:cs typeface="Calibri" pitchFamily="34" charset="-120"/>
+              </a:rPr>
+              <a:t>Why do you leave the other person a way to step back?</a:t>
+            </a:r>
+            <a:endParaRPr lang="en-US" sz="1150" dirty="0"/>
+          </a:p>
+        </p:txBody>
+      </p:sp>
+      <p:sp>
+        <p:nvSpPr>
+          <p:cNvPr id="17" name="Shape 14"/>
+          <p:cNvSpPr/>
+          <p:nvPr/>
+        </p:nvSpPr>
+        <p:spPr>
+          <a:xfrm>
+            <a:off x="640080" y="4707331"/>
+            <a:ext cx="10911535" cy="691286"/>
+          </a:xfrm>
+          <a:prstGeom prst="roundRect">
+            <a:avLst>
+              <a:gd name="adj" fmla="val 5291"/>
+            </a:avLst>
+          </a:prstGeom>
+          <a:solidFill>
+            <a:srgbClr val="EFF4F8"/>
+          </a:solidFill>
+          <a:ln/>
+        </p:spPr>
+      </p:sp>
+      <p:sp>
+        <p:nvSpPr>
+          <p:cNvPr id="18" name="Shape 15"/>
+          <p:cNvSpPr/>
+          <p:nvPr/>
+        </p:nvSpPr>
+        <p:spPr>
+          <a:xfrm>
+            <a:off x="822960" y="4888382"/>
+            <a:ext cx="329184" cy="329184"/>
+          </a:xfrm>
+          <a:prstGeom prst="ellipse">
+            <a:avLst/>
+          </a:prstGeom>
+          <a:solidFill>
+            <a:srgbClr val="093259"/>
+          </a:solidFill>
+          <a:ln/>
+        </p:spPr>
+      </p:sp>
+      <p:sp>
+        <p:nvSpPr>
+          <p:cNvPr id="19" name="Text 16"/>
+          <p:cNvSpPr/>
+          <p:nvPr/>
+        </p:nvSpPr>
+        <p:spPr>
+          <a:xfrm>
+            <a:off x="822960" y="4888382"/>
+            <a:ext cx="329184" cy="329184"/>
+          </a:xfrm>
+          <a:prstGeom prst="rect">
+            <a:avLst/>
+          </a:prstGeom>
+          <a:noFill/>
+          <a:ln/>
+        </p:spPr>
+        <p:txBody>
+          <a:bodyPr wrap="square" lIns="0" tIns="0" rIns="0" bIns="0" rtlCol="0" anchor="ctr"/>
+          <a:lstStyle/>
+          <a:p>
+            <a:pPr algn="ctr" indent="0" marL="0">
+              <a:buNone/>
+            </a:pPr>
+            <a:r>
+              <a:rPr lang="en-US" sz="1100" b="1" dirty="0">
+                <a:solidFill>
+                  <a:srgbClr val="FFFFFF"/>
+                </a:solidFill>
+                <a:latin typeface="Calibri" pitchFamily="34" charset="0"/>
+                <a:ea typeface="Calibri" pitchFamily="34" charset="-122"/>
+                <a:cs typeface="Calibri" pitchFamily="34" charset="-120"/>
+              </a:rPr>
+              <a:t>4</a:t>
+            </a:r>
+            <a:endParaRPr lang="en-US" sz="1100" dirty="0"/>
+          </a:p>
+        </p:txBody>
+      </p:sp>
+      <p:sp>
+        <p:nvSpPr>
+          <p:cNvPr id="20" name="Text 17"/>
+          <p:cNvSpPr/>
+          <p:nvPr/>
+        </p:nvSpPr>
+        <p:spPr>
+          <a:xfrm>
+            <a:off x="1243584" y="4780483"/>
+            <a:ext cx="10070287" cy="544982"/>
+          </a:xfrm>
+          <a:prstGeom prst="rect">
+            <a:avLst/>
+          </a:prstGeom>
+          <a:noFill/>
+          <a:ln/>
+        </p:spPr>
+        <p:txBody>
+          <a:bodyPr wrap="square" lIns="0" tIns="0" rIns="0" bIns="0" rtlCol="0" anchor="ctr"/>
+          <a:lstStyle/>
+          <a:p>
+            <a:pPr indent="0" marL="0">
+              <a:lnSpc>
+                <a:spcPct val="90000"/>
+              </a:lnSpc>
+              <a:buNone/>
+            </a:pPr>
+            <a:r>
+              <a:rPr lang="en-US" sz="1150" b="1" dirty="0">
+                <a:solidFill>
+                  <a:srgbClr val="1B2733"/>
+                </a:solidFill>
+                <a:latin typeface="Yu Gothic" pitchFamily="34" charset="0"/>
+                <a:ea typeface="Yu Gothic" pitchFamily="34" charset="-122"/>
+                <a:cs typeface="Yu Gothic" pitchFamily="34" charset="-120"/>
+              </a:rPr>
+              <a:t>対話をやめて離脱すべき兆候を、2つ挙げよ。</a:t>
+            </a:r>
+            <a:endParaRPr lang="en-US" sz="1150" dirty="0"/>
+          </a:p>
+          <a:p>
+            <a:pPr indent="0" marL="0">
+              <a:lnSpc>
+                <a:spcPct val="90000"/>
+              </a:lnSpc>
+              <a:buNone/>
+            </a:pPr>
+            <a:r>
+              <a:rPr lang="en-US" sz="900" i="1" dirty="0">
+                <a:solidFill>
+                  <a:srgbClr val="5F7183"/>
+                </a:solidFill>
+                <a:latin typeface="Calibri" pitchFamily="34" charset="0"/>
+                <a:ea typeface="Calibri" pitchFamily="34" charset="-122"/>
+                <a:cs typeface="Calibri" pitchFamily="34" charset="-120"/>
+              </a:rPr>
+              <a:t>Name two signs that you should stop talking and disengage.</a:t>
+            </a:r>
+            <a:endParaRPr lang="en-US" sz="1150" dirty="0"/>
+          </a:p>
+        </p:txBody>
+      </p:sp>
+      <p:sp>
+        <p:nvSpPr>
+          <p:cNvPr id="21" name="Shape 18"/>
+          <p:cNvSpPr/>
+          <p:nvPr/>
+        </p:nvSpPr>
+        <p:spPr>
+          <a:xfrm>
+            <a:off x="640080" y="5544922"/>
+            <a:ext cx="10911535" cy="691286"/>
+          </a:xfrm>
+          <a:prstGeom prst="roundRect">
+            <a:avLst>
+              <a:gd name="adj" fmla="val 5291"/>
+            </a:avLst>
+          </a:prstGeom>
+          <a:solidFill>
+            <a:srgbClr val="EFF4F8"/>
+          </a:solidFill>
+          <a:ln/>
+        </p:spPr>
+      </p:sp>
+      <p:sp>
+        <p:nvSpPr>
           <p:cNvPr id="22" name="Shape 19"/>
           <p:cNvSpPr/>
           <p:nvPr/>
         </p:nvSpPr>
         <p:spPr>
           <a:xfrm>
-            <a:off x="896112" y="5693054"/>
-            <a:ext cx="384048" cy="384048"/>
+            <a:off x="822960" y="5725973"/>
+            <a:ext cx="329184" cy="329184"/>
           </a:xfrm>
           <a:prstGeom prst="ellipse">
             <a:avLst/>
           </a:prstGeom>
           <a:solidFill>
-            <a:srgbClr val="12B198"/>
+            <a:srgbClr val="093259"/>
           </a:solidFill>
           <a:ln/>
         </p:spPr>
@@ -2846,8 +3202,8 @@
         </p:nvSpPr>
         <p:spPr>
           <a:xfrm>
-            <a:off x="896112" y="5693054"/>
-            <a:ext cx="384048" cy="384048"/>
+            <a:off x="822960" y="5725973"/>
+            <a:ext cx="329184" cy="329184"/>
           </a:xfrm>
           <a:prstGeom prst="rect">
             <a:avLst/>
@@ -2863,7 +3219,7 @@
               <a:buNone/>
             </a:pPr>
             <a:r>
-              <a:rPr lang="en-US" sz="1400" b="1" dirty="0">
+              <a:rPr lang="en-US" sz="1100" b="1" dirty="0">
                 <a:solidFill>
                   <a:srgbClr val="FFFFFF"/>
                 </a:solidFill>
@@ -2873,7 +3229,7 @@
               </a:rPr>
               <a:t>5</a:t>
             </a:r>
-            <a:endParaRPr lang="en-US" sz="1400" dirty="0"/>
+            <a:endParaRPr lang="en-US" sz="1100" dirty="0"/>
           </a:p>
         </p:txBody>
       </p:sp>
@@ -2885,8 +3241,8 @@
         </p:nvSpPr>
         <p:spPr>
           <a:xfrm>
-            <a:off x="1499616" y="5643677"/>
-            <a:ext cx="9777679" cy="519379"/>
+            <a:off x="1243584" y="5618074"/>
+            <a:ext cx="10070287" cy="544982"/>
           </a:xfrm>
           <a:prstGeom prst="rect">
             <a:avLst/>
@@ -2900,12 +3256,12 @@
           <a:p>
             <a:pPr indent="0" marL="0">
               <a:lnSpc>
-                <a:spcPct val="92000"/>
-              </a:lnSpc>
-              <a:buNone/>
-            </a:pPr>
-            <a:r>
-              <a:rPr lang="en-US" sz="1300" b="1" dirty="0">
+                <a:spcPct val="90000"/>
+              </a:lnSpc>
+              <a:buNone/>
+            </a:pPr>
+            <a:r>
+              <a:rPr lang="en-US" sz="1150" b="1" dirty="0">
                 <a:solidFill>
                   <a:srgbClr val="1B2733"/>
                 </a:solidFill>
@@ -2913,19 +3269,19 @@
                 <a:ea typeface="Yu Gothic" pitchFamily="34" charset="-122"/>
                 <a:cs typeface="Yu Gothic" pitchFamily="34" charset="-120"/>
               </a:rPr>
-              <a:t>最後に、各自が明日から変える行動を1つ、声に出して述べます。</a:t>
-            </a:r>
-            <a:endParaRPr lang="en-US" sz="1300" dirty="0"/>
-          </a:p>
-          <a:p>
-            <a:pPr indent="0" marL="0">
-              <a:lnSpc>
-                <a:spcPct val="92000"/>
-              </a:lnSpc>
-              <a:buNone/>
-            </a:pPr>
-            <a:r>
-              <a:rPr lang="en-US" sz="950" i="1" dirty="0">
+              <a:t>退去を求める根拠は、誰の意思に基づくか。</a:t>
+            </a:r>
+            <a:endParaRPr lang="en-US" sz="1150" dirty="0"/>
+          </a:p>
+          <a:p>
+            <a:pPr indent="0" marL="0">
+              <a:lnSpc>
+                <a:spcPct val="90000"/>
+              </a:lnSpc>
+              <a:buNone/>
+            </a:pPr>
+            <a:r>
+              <a:rPr lang="en-US" sz="900" i="1" dirty="0">
                 <a:solidFill>
                   <a:srgbClr val="5F7183"/>
                 </a:solidFill>
@@ -2933,9 +3289,9 @@
                 <a:ea typeface="Calibri" pitchFamily="34" charset="-122"/>
                 <a:cs typeface="Calibri" pitchFamily="34" charset="-120"/>
               </a:rPr>
-              <a:t>To close, each person states aloud one thing they will change from tomorrow.</a:t>
-            </a:r>
-            <a:endParaRPr lang="en-US" sz="1300" dirty="0"/>
+              <a:t>A request to leave rests on whose intent?</a:t>
+            </a:r>
+            <a:endParaRPr lang="en-US" sz="1150" dirty="0"/>
           </a:p>
         </p:txBody>
       </p:sp>
@@ -3042,6 +3398,4354 @@
 <file path=ppt/slides/slide11.xml><?xml version="1.0" encoding="utf-8"?>
 <p:sld xmlns:a="http://schemas.openxmlformats.org/drawingml/2006/main" xmlns:r="http://schemas.openxmlformats.org/officeDocument/2006/relationships" xmlns:p="http://schemas.openxmlformats.org/presentationml/2006/main">
   <p:cSld name="Slide 11">
+    <p:bg>
+      <p:bgPr>
+        <a:solidFill>
+          <a:srgbClr val="FFFFFF"/>
+        </a:solidFill>
+      </p:bgPr>
+    </p:bg>
+    <p:spTree>
+      <p:nvGrpSpPr>
+        <p:cNvPr id="1" name=""/>
+        <p:cNvGrpSpPr/>
+        <p:nvPr/>
+      </p:nvGrpSpPr>
+      <p:grpSpPr>
+        <a:xfrm>
+          <a:off x="0" y="0"/>
+          <a:ext cx="0" cy="0"/>
+          <a:chOff x="0" y="0"/>
+          <a:chExt cx="0" cy="0"/>
+        </a:xfrm>
+      </p:grpSpPr>
+      <p:pic>
+        <p:nvPicPr>
+          <p:cNvPr id="2" name="Image 0" descr="/home/user/Training-/assets/logo.png">    </p:cNvPr>
+          <p:cNvPicPr>
+            <a:picLocks noChangeAspect="1"/>
+          </p:cNvPicPr>
+          <p:nvPr/>
+        </p:nvPicPr>
+        <p:blipFill>
+          <a:blip r:embed="rId1"/>
+          <a:stretch>
+            <a:fillRect/>
+          </a:stretch>
+        </p:blipFill>
+        <p:spPr>
+          <a:xfrm>
+            <a:off x="10765231" y="332912"/>
+            <a:ext cx="786384" cy="742353"/>
+          </a:xfrm>
+          <a:prstGeom prst="rect">
+            <a:avLst/>
+          </a:prstGeom>
+        </p:spPr>
+      </p:pic>
+      <p:sp>
+        <p:nvSpPr>
+          <p:cNvPr id="3" name="Text 0"/>
+          <p:cNvSpPr/>
+          <p:nvPr/>
+        </p:nvSpPr>
+        <p:spPr>
+          <a:xfrm>
+            <a:off x="640080" y="475488"/>
+            <a:ext cx="9805111" cy="960120"/>
+          </a:xfrm>
+          <a:prstGeom prst="rect">
+            <a:avLst/>
+          </a:prstGeom>
+          <a:noFill/>
+          <a:ln/>
+        </p:spPr>
+        <p:txBody>
+          <a:bodyPr wrap="square" lIns="0" tIns="0" rIns="0" bIns="0" rtlCol="0" anchor="t"/>
+          <a:lstStyle/>
+          <a:p>
+            <a:pPr indent="0" marL="0">
+              <a:lnSpc>
+                <a:spcPct val="94000"/>
+              </a:lnSpc>
+              <a:buNone/>
+            </a:pPr>
+            <a:r>
+              <a:rPr lang="en-US" sz="2700" b="1" dirty="0">
+                <a:solidFill>
+                  <a:srgbClr val="093259"/>
+                </a:solidFill>
+                <a:latin typeface="Yu Gothic" pitchFamily="34" charset="0"/>
+                <a:ea typeface="Yu Gothic" pitchFamily="34" charset="-122"/>
+                <a:cs typeface="Yu Gothic" pitchFamily="34" charset="-120"/>
+              </a:rPr>
+              <a:t>確認テスト　問6〜問10</a:t>
+            </a:r>
+            <a:endParaRPr lang="en-US" sz="2700" dirty="0"/>
+          </a:p>
+          <a:p>
+            <a:pPr indent="0" marL="0">
+              <a:lnSpc>
+                <a:spcPct val="94000"/>
+              </a:lnSpc>
+              <a:buNone/>
+            </a:pPr>
+            <a:r>
+              <a:rPr lang="en-US" sz="1250" i="1" dirty="0">
+                <a:solidFill>
+                  <a:srgbClr val="12B198"/>
+                </a:solidFill>
+                <a:latin typeface="Calibri" pitchFamily="34" charset="0"/>
+                <a:ea typeface="Calibri" pitchFamily="34" charset="-122"/>
+                <a:cs typeface="Calibri" pitchFamily="34" charset="-120"/>
+              </a:rPr>
+              <a:t>Assessment — Questions 6 to 10</a:t>
+            </a:r>
+            <a:endParaRPr lang="en-US" sz="2700" dirty="0"/>
+          </a:p>
+        </p:txBody>
+      </p:sp>
+      <p:sp>
+        <p:nvSpPr>
+          <p:cNvPr id="4" name="Shape 1"/>
+          <p:cNvSpPr/>
+          <p:nvPr/>
+        </p:nvSpPr>
+        <p:spPr>
+          <a:xfrm>
+            <a:off x="640080" y="1627632"/>
+            <a:ext cx="10911535" cy="804672"/>
+          </a:xfrm>
+          <a:prstGeom prst="roundRect">
+            <a:avLst>
+              <a:gd name="adj" fmla="val 4545"/>
+            </a:avLst>
+          </a:prstGeom>
+          <a:solidFill>
+            <a:srgbClr val="EFF4F8"/>
+          </a:solidFill>
+          <a:ln/>
+        </p:spPr>
+      </p:sp>
+      <p:sp>
+        <p:nvSpPr>
+          <p:cNvPr id="5" name="Shape 2"/>
+          <p:cNvSpPr/>
+          <p:nvPr/>
+        </p:nvSpPr>
+        <p:spPr>
+          <a:xfrm>
+            <a:off x="822960" y="1865376"/>
+            <a:ext cx="329184" cy="329184"/>
+          </a:xfrm>
+          <a:prstGeom prst="ellipse">
+            <a:avLst/>
+          </a:prstGeom>
+          <a:solidFill>
+            <a:srgbClr val="093259"/>
+          </a:solidFill>
+          <a:ln/>
+        </p:spPr>
+      </p:sp>
+      <p:sp>
+        <p:nvSpPr>
+          <p:cNvPr id="6" name="Text 3"/>
+          <p:cNvSpPr/>
+          <p:nvPr/>
+        </p:nvSpPr>
+        <p:spPr>
+          <a:xfrm>
+            <a:off x="822960" y="1865376"/>
+            <a:ext cx="329184" cy="329184"/>
+          </a:xfrm>
+          <a:prstGeom prst="rect">
+            <a:avLst/>
+          </a:prstGeom>
+          <a:noFill/>
+          <a:ln/>
+        </p:spPr>
+        <p:txBody>
+          <a:bodyPr wrap="square" lIns="0" tIns="0" rIns="0" bIns="0" rtlCol="0" anchor="ctr"/>
+          <a:lstStyle/>
+          <a:p>
+            <a:pPr algn="ctr" indent="0" marL="0">
+              <a:buNone/>
+            </a:pPr>
+            <a:r>
+              <a:rPr lang="en-US" sz="1100" b="1" dirty="0">
+                <a:solidFill>
+                  <a:srgbClr val="FFFFFF"/>
+                </a:solidFill>
+                <a:latin typeface="Calibri" pitchFamily="34" charset="0"/>
+                <a:ea typeface="Calibri" pitchFamily="34" charset="-122"/>
+                <a:cs typeface="Calibri" pitchFamily="34" charset="-120"/>
+              </a:rPr>
+              <a:t>6</a:t>
+            </a:r>
+            <a:endParaRPr lang="en-US" sz="1100" dirty="0"/>
+          </a:p>
+        </p:txBody>
+      </p:sp>
+      <p:sp>
+        <p:nvSpPr>
+          <p:cNvPr id="7" name="Text 4"/>
+          <p:cNvSpPr/>
+          <p:nvPr/>
+        </p:nvSpPr>
+        <p:spPr>
+          <a:xfrm>
+            <a:off x="1243584" y="1700784"/>
+            <a:ext cx="10070287" cy="658368"/>
+          </a:xfrm>
+          <a:prstGeom prst="rect">
+            <a:avLst/>
+          </a:prstGeom>
+          <a:noFill/>
+          <a:ln/>
+        </p:spPr>
+        <p:txBody>
+          <a:bodyPr wrap="square" lIns="0" tIns="0" rIns="0" bIns="0" rtlCol="0" anchor="ctr"/>
+          <a:lstStyle/>
+          <a:p>
+            <a:pPr indent="0" marL="0">
+              <a:lnSpc>
+                <a:spcPct val="90000"/>
+              </a:lnSpc>
+              <a:buNone/>
+            </a:pPr>
+            <a:r>
+              <a:rPr lang="en-US" sz="1150" b="1" dirty="0">
+                <a:solidFill>
+                  <a:srgbClr val="1B2733"/>
+                </a:solidFill>
+                <a:latin typeface="Yu Gothic" pitchFamily="34" charset="0"/>
+                <a:ea typeface="Yu Gothic" pitchFamily="34" charset="-122"/>
+                <a:cs typeface="Yu Gothic" pitchFamily="34" charset="-120"/>
+              </a:rPr>
+              <a:t>次の報告文の問題点を指摘し、書き直せ。「不審者が非常口から入りました」</a:t>
+            </a:r>
+            <a:endParaRPr lang="en-US" sz="1150" dirty="0"/>
+          </a:p>
+          <a:p>
+            <a:pPr indent="0" marL="0">
+              <a:lnSpc>
+                <a:spcPct val="90000"/>
+              </a:lnSpc>
+              <a:buNone/>
+            </a:pPr>
+            <a:r>
+              <a:rPr lang="en-US" sz="900" i="1" dirty="0">
+                <a:solidFill>
+                  <a:srgbClr val="5F7183"/>
+                </a:solidFill>
+                <a:latin typeface="Calibri" pitchFamily="34" charset="0"/>
+                <a:ea typeface="Calibri" pitchFamily="34" charset="-122"/>
+                <a:cs typeface="Calibri" pitchFamily="34" charset="-120"/>
+              </a:rPr>
+              <a:t>What is wrong with this report, and how would you rewrite it? "An intruder came in through the emergency exit."</a:t>
+            </a:r>
+            <a:endParaRPr lang="en-US" sz="1150" dirty="0"/>
+          </a:p>
+        </p:txBody>
+      </p:sp>
+      <p:sp>
+        <p:nvSpPr>
+          <p:cNvPr id="8" name="Shape 5"/>
+          <p:cNvSpPr/>
+          <p:nvPr/>
+        </p:nvSpPr>
+        <p:spPr>
+          <a:xfrm>
+            <a:off x="640080" y="2578608"/>
+            <a:ext cx="10911535" cy="804672"/>
+          </a:xfrm>
+          <a:prstGeom prst="roundRect">
+            <a:avLst>
+              <a:gd name="adj" fmla="val 4545"/>
+            </a:avLst>
+          </a:prstGeom>
+          <a:solidFill>
+            <a:srgbClr val="EFF4F8"/>
+          </a:solidFill>
+          <a:ln/>
+        </p:spPr>
+      </p:sp>
+      <p:sp>
+        <p:nvSpPr>
+          <p:cNvPr id="9" name="Shape 6"/>
+          <p:cNvSpPr/>
+          <p:nvPr/>
+        </p:nvSpPr>
+        <p:spPr>
+          <a:xfrm>
+            <a:off x="822960" y="2816352"/>
+            <a:ext cx="329184" cy="329184"/>
+          </a:xfrm>
+          <a:prstGeom prst="ellipse">
+            <a:avLst/>
+          </a:prstGeom>
+          <a:solidFill>
+            <a:srgbClr val="093259"/>
+          </a:solidFill>
+          <a:ln/>
+        </p:spPr>
+      </p:sp>
+      <p:sp>
+        <p:nvSpPr>
+          <p:cNvPr id="10" name="Text 7"/>
+          <p:cNvSpPr/>
+          <p:nvPr/>
+        </p:nvSpPr>
+        <p:spPr>
+          <a:xfrm>
+            <a:off x="822960" y="2816352"/>
+            <a:ext cx="329184" cy="329184"/>
+          </a:xfrm>
+          <a:prstGeom prst="rect">
+            <a:avLst/>
+          </a:prstGeom>
+          <a:noFill/>
+          <a:ln/>
+        </p:spPr>
+        <p:txBody>
+          <a:bodyPr wrap="square" lIns="0" tIns="0" rIns="0" bIns="0" rtlCol="0" anchor="ctr"/>
+          <a:lstStyle/>
+          <a:p>
+            <a:pPr algn="ctr" indent="0" marL="0">
+              <a:buNone/>
+            </a:pPr>
+            <a:r>
+              <a:rPr lang="en-US" sz="1100" b="1" dirty="0">
+                <a:solidFill>
+                  <a:srgbClr val="FFFFFF"/>
+                </a:solidFill>
+                <a:latin typeface="Calibri" pitchFamily="34" charset="0"/>
+                <a:ea typeface="Calibri" pitchFamily="34" charset="-122"/>
+                <a:cs typeface="Calibri" pitchFamily="34" charset="-120"/>
+              </a:rPr>
+              <a:t>7</a:t>
+            </a:r>
+            <a:endParaRPr lang="en-US" sz="1100" dirty="0"/>
+          </a:p>
+        </p:txBody>
+      </p:sp>
+      <p:sp>
+        <p:nvSpPr>
+          <p:cNvPr id="11" name="Text 8"/>
+          <p:cNvSpPr/>
+          <p:nvPr/>
+        </p:nvSpPr>
+        <p:spPr>
+          <a:xfrm>
+            <a:off x="1243584" y="2651760"/>
+            <a:ext cx="10070287" cy="658368"/>
+          </a:xfrm>
+          <a:prstGeom prst="rect">
+            <a:avLst/>
+          </a:prstGeom>
+          <a:noFill/>
+          <a:ln/>
+        </p:spPr>
+        <p:txBody>
+          <a:bodyPr wrap="square" lIns="0" tIns="0" rIns="0" bIns="0" rtlCol="0" anchor="ctr"/>
+          <a:lstStyle/>
+          <a:p>
+            <a:pPr indent="0" marL="0">
+              <a:lnSpc>
+                <a:spcPct val="90000"/>
+              </a:lnSpc>
+              <a:buNone/>
+            </a:pPr>
+            <a:r>
+              <a:rPr lang="en-US" sz="1150" b="1" dirty="0">
+                <a:solidFill>
+                  <a:srgbClr val="1B2733"/>
+                </a:solidFill>
+                <a:latin typeface="Yu Gothic" pitchFamily="34" charset="0"/>
+                <a:ea typeface="Yu Gothic" pitchFamily="34" charset="-122"/>
+                <a:cs typeface="Yu Gothic" pitchFamily="34" charset="-120"/>
+              </a:rPr>
+              <a:t>119番通報で、最初に伝えることは何か。</a:t>
+            </a:r>
+            <a:endParaRPr lang="en-US" sz="1150" dirty="0"/>
+          </a:p>
+          <a:p>
+            <a:pPr indent="0" marL="0">
+              <a:lnSpc>
+                <a:spcPct val="90000"/>
+              </a:lnSpc>
+              <a:buNone/>
+            </a:pPr>
+            <a:r>
+              <a:rPr lang="en-US" sz="900" i="1" dirty="0">
+                <a:solidFill>
+                  <a:srgbClr val="5F7183"/>
+                </a:solidFill>
+                <a:latin typeface="Calibri" pitchFamily="34" charset="0"/>
+                <a:ea typeface="Calibri" pitchFamily="34" charset="-122"/>
+                <a:cs typeface="Calibri" pitchFamily="34" charset="-120"/>
+              </a:rPr>
+              <a:t>What must you say first when you call the fire service?</a:t>
+            </a:r>
+            <a:endParaRPr lang="en-US" sz="1150" dirty="0"/>
+          </a:p>
+        </p:txBody>
+      </p:sp>
+      <p:sp>
+        <p:nvSpPr>
+          <p:cNvPr id="12" name="Shape 9"/>
+          <p:cNvSpPr/>
+          <p:nvPr/>
+        </p:nvSpPr>
+        <p:spPr>
+          <a:xfrm>
+            <a:off x="640080" y="3529584"/>
+            <a:ext cx="10911535" cy="804672"/>
+          </a:xfrm>
+          <a:prstGeom prst="roundRect">
+            <a:avLst>
+              <a:gd name="adj" fmla="val 4545"/>
+            </a:avLst>
+          </a:prstGeom>
+          <a:solidFill>
+            <a:srgbClr val="EFF4F8"/>
+          </a:solidFill>
+          <a:ln/>
+        </p:spPr>
+      </p:sp>
+      <p:sp>
+        <p:nvSpPr>
+          <p:cNvPr id="13" name="Shape 10"/>
+          <p:cNvSpPr/>
+          <p:nvPr/>
+        </p:nvSpPr>
+        <p:spPr>
+          <a:xfrm>
+            <a:off x="822960" y="3767328"/>
+            <a:ext cx="329184" cy="329184"/>
+          </a:xfrm>
+          <a:prstGeom prst="ellipse">
+            <a:avLst/>
+          </a:prstGeom>
+          <a:solidFill>
+            <a:srgbClr val="093259"/>
+          </a:solidFill>
+          <a:ln/>
+        </p:spPr>
+      </p:sp>
+      <p:sp>
+        <p:nvSpPr>
+          <p:cNvPr id="14" name="Text 11"/>
+          <p:cNvSpPr/>
+          <p:nvPr/>
+        </p:nvSpPr>
+        <p:spPr>
+          <a:xfrm>
+            <a:off x="822960" y="3767328"/>
+            <a:ext cx="329184" cy="329184"/>
+          </a:xfrm>
+          <a:prstGeom prst="rect">
+            <a:avLst/>
+          </a:prstGeom>
+          <a:noFill/>
+          <a:ln/>
+        </p:spPr>
+        <p:txBody>
+          <a:bodyPr wrap="square" lIns="0" tIns="0" rIns="0" bIns="0" rtlCol="0" anchor="ctr"/>
+          <a:lstStyle/>
+          <a:p>
+            <a:pPr algn="ctr" indent="0" marL="0">
+              <a:buNone/>
+            </a:pPr>
+            <a:r>
+              <a:rPr lang="en-US" sz="1100" b="1" dirty="0">
+                <a:solidFill>
+                  <a:srgbClr val="FFFFFF"/>
+                </a:solidFill>
+                <a:latin typeface="Calibri" pitchFamily="34" charset="0"/>
+                <a:ea typeface="Calibri" pitchFamily="34" charset="-122"/>
+                <a:cs typeface="Calibri" pitchFamily="34" charset="-120"/>
+              </a:rPr>
+              <a:t>8</a:t>
+            </a:r>
+            <a:endParaRPr lang="en-US" sz="1100" dirty="0"/>
+          </a:p>
+        </p:txBody>
+      </p:sp>
+      <p:sp>
+        <p:nvSpPr>
+          <p:cNvPr id="15" name="Text 12"/>
+          <p:cNvSpPr/>
+          <p:nvPr/>
+        </p:nvSpPr>
+        <p:spPr>
+          <a:xfrm>
+            <a:off x="1243584" y="3602736"/>
+            <a:ext cx="10070287" cy="658368"/>
+          </a:xfrm>
+          <a:prstGeom prst="rect">
+            <a:avLst/>
+          </a:prstGeom>
+          <a:noFill/>
+          <a:ln/>
+        </p:spPr>
+        <p:txBody>
+          <a:bodyPr wrap="square" lIns="0" tIns="0" rIns="0" bIns="0" rtlCol="0" anchor="ctr"/>
+          <a:lstStyle/>
+          <a:p>
+            <a:pPr indent="0" marL="0">
+              <a:lnSpc>
+                <a:spcPct val="90000"/>
+              </a:lnSpc>
+              <a:buNone/>
+            </a:pPr>
+            <a:r>
+              <a:rPr lang="en-US" sz="1150" b="1" dirty="0">
+                <a:solidFill>
+                  <a:srgbClr val="1B2733"/>
+                </a:solidFill>
+                <a:latin typeface="Yu Gothic" pitchFamily="34" charset="0"/>
+                <a:ea typeface="Yu Gothic" pitchFamily="34" charset="-122"/>
+                <a:cs typeface="Yu Gothic" pitchFamily="34" charset="-120"/>
+              </a:rPr>
+              <a:t>現場を変えてよい理由は何か。それ以外の場合はどうするか。</a:t>
+            </a:r>
+            <a:endParaRPr lang="en-US" sz="1150" dirty="0"/>
+          </a:p>
+          <a:p>
+            <a:pPr indent="0" marL="0">
+              <a:lnSpc>
+                <a:spcPct val="90000"/>
+              </a:lnSpc>
+              <a:buNone/>
+            </a:pPr>
+            <a:r>
+              <a:rPr lang="en-US" sz="900" i="1" dirty="0">
+                <a:solidFill>
+                  <a:srgbClr val="5F7183"/>
+                </a:solidFill>
+                <a:latin typeface="Calibri" pitchFamily="34" charset="0"/>
+                <a:ea typeface="Calibri" pitchFamily="34" charset="-122"/>
+                <a:cs typeface="Calibri" pitchFamily="34" charset="-120"/>
+              </a:rPr>
+              <a:t>For what reason may you alter the scene? And otherwise?</a:t>
+            </a:r>
+            <a:endParaRPr lang="en-US" sz="1150" dirty="0"/>
+          </a:p>
+        </p:txBody>
+      </p:sp>
+      <p:sp>
+        <p:nvSpPr>
+          <p:cNvPr id="16" name="Shape 13"/>
+          <p:cNvSpPr/>
+          <p:nvPr/>
+        </p:nvSpPr>
+        <p:spPr>
+          <a:xfrm>
+            <a:off x="640080" y="4480560"/>
+            <a:ext cx="10911535" cy="804672"/>
+          </a:xfrm>
+          <a:prstGeom prst="roundRect">
+            <a:avLst>
+              <a:gd name="adj" fmla="val 4545"/>
+            </a:avLst>
+          </a:prstGeom>
+          <a:solidFill>
+            <a:srgbClr val="EFF4F8"/>
+          </a:solidFill>
+          <a:ln/>
+        </p:spPr>
+      </p:sp>
+      <p:sp>
+        <p:nvSpPr>
+          <p:cNvPr id="17" name="Shape 14"/>
+          <p:cNvSpPr/>
+          <p:nvPr/>
+        </p:nvSpPr>
+        <p:spPr>
+          <a:xfrm>
+            <a:off x="822960" y="4718304"/>
+            <a:ext cx="329184" cy="329184"/>
+          </a:xfrm>
+          <a:prstGeom prst="ellipse">
+            <a:avLst/>
+          </a:prstGeom>
+          <a:solidFill>
+            <a:srgbClr val="093259"/>
+          </a:solidFill>
+          <a:ln/>
+        </p:spPr>
+      </p:sp>
+      <p:sp>
+        <p:nvSpPr>
+          <p:cNvPr id="18" name="Text 15"/>
+          <p:cNvSpPr/>
+          <p:nvPr/>
+        </p:nvSpPr>
+        <p:spPr>
+          <a:xfrm>
+            <a:off x="822960" y="4718304"/>
+            <a:ext cx="329184" cy="329184"/>
+          </a:xfrm>
+          <a:prstGeom prst="rect">
+            <a:avLst/>
+          </a:prstGeom>
+          <a:noFill/>
+          <a:ln/>
+        </p:spPr>
+        <p:txBody>
+          <a:bodyPr wrap="square" lIns="0" tIns="0" rIns="0" bIns="0" rtlCol="0" anchor="ctr"/>
+          <a:lstStyle/>
+          <a:p>
+            <a:pPr algn="ctr" indent="0" marL="0">
+              <a:buNone/>
+            </a:pPr>
+            <a:r>
+              <a:rPr lang="en-US" sz="1100" b="1" dirty="0">
+                <a:solidFill>
+                  <a:srgbClr val="FFFFFF"/>
+                </a:solidFill>
+                <a:latin typeface="Calibri" pitchFamily="34" charset="0"/>
+                <a:ea typeface="Calibri" pitchFamily="34" charset="-122"/>
+                <a:cs typeface="Calibri" pitchFamily="34" charset="-120"/>
+              </a:rPr>
+              <a:t>9</a:t>
+            </a:r>
+            <a:endParaRPr lang="en-US" sz="1100" dirty="0"/>
+          </a:p>
+        </p:txBody>
+      </p:sp>
+      <p:sp>
+        <p:nvSpPr>
+          <p:cNvPr id="19" name="Text 16"/>
+          <p:cNvSpPr/>
+          <p:nvPr/>
+        </p:nvSpPr>
+        <p:spPr>
+          <a:xfrm>
+            <a:off x="1243584" y="4553712"/>
+            <a:ext cx="10070287" cy="658368"/>
+          </a:xfrm>
+          <a:prstGeom prst="rect">
+            <a:avLst/>
+          </a:prstGeom>
+          <a:noFill/>
+          <a:ln/>
+        </p:spPr>
+        <p:txBody>
+          <a:bodyPr wrap="square" lIns="0" tIns="0" rIns="0" bIns="0" rtlCol="0" anchor="ctr"/>
+          <a:lstStyle/>
+          <a:p>
+            <a:pPr indent="0" marL="0">
+              <a:lnSpc>
+                <a:spcPct val="90000"/>
+              </a:lnSpc>
+              <a:buNone/>
+            </a:pPr>
+            <a:r>
+              <a:rPr lang="en-US" sz="1150" b="1" dirty="0">
+                <a:solidFill>
+                  <a:srgbClr val="1B2733"/>
+                </a:solidFill>
+                <a:latin typeface="Yu Gothic" pitchFamily="34" charset="0"/>
+                <a:ea typeface="Yu Gothic" pitchFamily="34" charset="-122"/>
+                <a:cs typeface="Yu Gothic" pitchFamily="34" charset="-120"/>
+              </a:rPr>
+              <a:t>受信機が発報した。最初に確認するものは何か。無線で「火事です」と言ってよいか。</a:t>
+            </a:r>
+            <a:endParaRPr lang="en-US" sz="1150" dirty="0"/>
+          </a:p>
+          <a:p>
+            <a:pPr indent="0" marL="0">
+              <a:lnSpc>
+                <a:spcPct val="90000"/>
+              </a:lnSpc>
+              <a:buNone/>
+            </a:pPr>
+            <a:r>
+              <a:rPr lang="en-US" sz="900" i="1" dirty="0">
+                <a:solidFill>
+                  <a:srgbClr val="5F7183"/>
+                </a:solidFill>
+                <a:latin typeface="Calibri" pitchFamily="34" charset="0"/>
+                <a:ea typeface="Calibri" pitchFamily="34" charset="-122"/>
+                <a:cs typeface="Calibri" pitchFamily="34" charset="-120"/>
+              </a:rPr>
+              <a:t>The panel activates. What do you check first? May you say "fire" on the radio?</a:t>
+            </a:r>
+            <a:endParaRPr lang="en-US" sz="1150" dirty="0"/>
+          </a:p>
+        </p:txBody>
+      </p:sp>
+      <p:sp>
+        <p:nvSpPr>
+          <p:cNvPr id="20" name="Shape 17"/>
+          <p:cNvSpPr/>
+          <p:nvPr/>
+        </p:nvSpPr>
+        <p:spPr>
+          <a:xfrm>
+            <a:off x="640080" y="5431536"/>
+            <a:ext cx="10911535" cy="804672"/>
+          </a:xfrm>
+          <a:prstGeom prst="roundRect">
+            <a:avLst>
+              <a:gd name="adj" fmla="val 4545"/>
+            </a:avLst>
+          </a:prstGeom>
+          <a:solidFill>
+            <a:srgbClr val="EFF4F8"/>
+          </a:solidFill>
+          <a:ln/>
+        </p:spPr>
+      </p:sp>
+      <p:sp>
+        <p:nvSpPr>
+          <p:cNvPr id="21" name="Shape 18"/>
+          <p:cNvSpPr/>
+          <p:nvPr/>
+        </p:nvSpPr>
+        <p:spPr>
+          <a:xfrm>
+            <a:off x="822960" y="5669280"/>
+            <a:ext cx="329184" cy="329184"/>
+          </a:xfrm>
+          <a:prstGeom prst="ellipse">
+            <a:avLst/>
+          </a:prstGeom>
+          <a:solidFill>
+            <a:srgbClr val="093259"/>
+          </a:solidFill>
+          <a:ln/>
+        </p:spPr>
+      </p:sp>
+      <p:sp>
+        <p:nvSpPr>
+          <p:cNvPr id="22" name="Text 19"/>
+          <p:cNvSpPr/>
+          <p:nvPr/>
+        </p:nvSpPr>
+        <p:spPr>
+          <a:xfrm>
+            <a:off x="822960" y="5669280"/>
+            <a:ext cx="329184" cy="329184"/>
+          </a:xfrm>
+          <a:prstGeom prst="rect">
+            <a:avLst/>
+          </a:prstGeom>
+          <a:noFill/>
+          <a:ln/>
+        </p:spPr>
+        <p:txBody>
+          <a:bodyPr wrap="square" lIns="0" tIns="0" rIns="0" bIns="0" rtlCol="0" anchor="ctr"/>
+          <a:lstStyle/>
+          <a:p>
+            <a:pPr algn="ctr" indent="0" marL="0">
+              <a:buNone/>
+            </a:pPr>
+            <a:r>
+              <a:rPr lang="en-US" sz="1100" b="1" dirty="0">
+                <a:solidFill>
+                  <a:srgbClr val="FFFFFF"/>
+                </a:solidFill>
+                <a:latin typeface="Calibri" pitchFamily="34" charset="0"/>
+                <a:ea typeface="Calibri" pitchFamily="34" charset="-122"/>
+                <a:cs typeface="Calibri" pitchFamily="34" charset="-120"/>
+              </a:rPr>
+              <a:t>10</a:t>
+            </a:r>
+            <a:endParaRPr lang="en-US" sz="1100" dirty="0"/>
+          </a:p>
+        </p:txBody>
+      </p:sp>
+      <p:sp>
+        <p:nvSpPr>
+          <p:cNvPr id="23" name="Text 20"/>
+          <p:cNvSpPr/>
+          <p:nvPr/>
+        </p:nvSpPr>
+        <p:spPr>
+          <a:xfrm>
+            <a:off x="1243584" y="5504688"/>
+            <a:ext cx="10070287" cy="658368"/>
+          </a:xfrm>
+          <a:prstGeom prst="rect">
+            <a:avLst/>
+          </a:prstGeom>
+          <a:noFill/>
+          <a:ln/>
+        </p:spPr>
+        <p:txBody>
+          <a:bodyPr wrap="square" lIns="0" tIns="0" rIns="0" bIns="0" rtlCol="0" anchor="ctr"/>
+          <a:lstStyle/>
+          <a:p>
+            <a:pPr indent="0" marL="0">
+              <a:lnSpc>
+                <a:spcPct val="90000"/>
+              </a:lnSpc>
+              <a:buNone/>
+            </a:pPr>
+            <a:r>
+              <a:rPr lang="en-US" sz="1150" b="1" dirty="0">
+                <a:solidFill>
+                  <a:srgbClr val="1B2733"/>
+                </a:solidFill>
+                <a:latin typeface="Yu Gothic" pitchFamily="34" charset="0"/>
+                <a:ea typeface="Yu Gothic" pitchFamily="34" charset="-122"/>
+                <a:cs typeface="Yu Gothic" pitchFamily="34" charset="-120"/>
+              </a:rPr>
+              <a:t>入退室ログの「保全」と「開示」の違いは何か。警備員が受けられるのはどちらか。</a:t>
+            </a:r>
+            <a:endParaRPr lang="en-US" sz="1150" dirty="0"/>
+          </a:p>
+          <a:p>
+            <a:pPr indent="0" marL="0">
+              <a:lnSpc>
+                <a:spcPct val="90000"/>
+              </a:lnSpc>
+              <a:buNone/>
+            </a:pPr>
+            <a:r>
+              <a:rPr lang="en-US" sz="900" i="1" dirty="0">
+                <a:solidFill>
+                  <a:srgbClr val="5F7183"/>
+                </a:solidFill>
+                <a:latin typeface="Calibri" pitchFamily="34" charset="0"/>
+                <a:ea typeface="Calibri" pitchFamily="34" charset="-122"/>
+                <a:cs typeface="Calibri" pitchFamily="34" charset="-120"/>
+              </a:rPr>
+              <a:t>What is the difference between preserving and disclosing an access log? Which may a guard accept?</a:t>
+            </a:r>
+            <a:endParaRPr lang="en-US" sz="1150" dirty="0"/>
+          </a:p>
+        </p:txBody>
+      </p:sp>
+      <p:sp>
+        <p:nvSpPr>
+          <p:cNvPr id="24" name="Text 21"/>
+          <p:cNvSpPr/>
+          <p:nvPr/>
+        </p:nvSpPr>
+        <p:spPr>
+          <a:xfrm>
+            <a:off x="640080" y="6382512"/>
+            <a:ext cx="8778240" cy="292608"/>
+          </a:xfrm>
+          <a:prstGeom prst="rect">
+            <a:avLst/>
+          </a:prstGeom>
+          <a:noFill/>
+          <a:ln/>
+        </p:spPr>
+        <p:txBody>
+          <a:bodyPr wrap="square" lIns="0" tIns="0" rIns="0" bIns="0" rtlCol="0" anchor="ctr"/>
+          <a:lstStyle/>
+          <a:p>
+            <a:pPr indent="0" marL="0">
+              <a:buNone/>
+            </a:pPr>
+            <a:r>
+              <a:rPr lang="en-US" sz="900" dirty="0">
+                <a:solidFill>
+                  <a:srgbClr val="5F7183"/>
+                </a:solidFill>
+                <a:latin typeface="Yu Gothic" pitchFamily="34" charset="0"/>
+                <a:ea typeface="Yu Gothic" pitchFamily="34" charset="-122"/>
+                <a:cs typeface="Yu Gothic" pitchFamily="34" charset="-120"/>
+              </a:rPr>
+              <a:t>第10時限｜業務別教育6 警報装置その他当該警備業務を実施するために使用する機器の使用方法  </a:t>
+            </a:r>
+            <a:pPr indent="0" marL="0">
+              <a:buNone/>
+            </a:pPr>
+            <a:r>
+              <a:rPr lang="en-US" sz="850" i="1" dirty="0">
+                <a:solidFill>
+                  <a:srgbClr val="D6E0E9"/>
+                </a:solidFill>
+                <a:latin typeface="Calibri" pitchFamily="34" charset="0"/>
+                <a:ea typeface="Calibri" pitchFamily="34" charset="-122"/>
+                <a:cs typeface="Calibri" pitchFamily="34" charset="-120"/>
+              </a:rPr>
+              <a:t>Period 10 | Task-Specific Training 6 — Security Equipment</a:t>
+            </a:r>
+            <a:endParaRPr lang="en-US" sz="900" dirty="0"/>
+          </a:p>
+        </p:txBody>
+      </p:sp>
+      <p:sp>
+        <p:nvSpPr>
+          <p:cNvPr id="25" name="Text 22"/>
+          <p:cNvSpPr/>
+          <p:nvPr/>
+        </p:nvSpPr>
+        <p:spPr>
+          <a:xfrm>
+            <a:off x="10637215" y="6382512"/>
+            <a:ext cx="914400" cy="292608"/>
+          </a:xfrm>
+          <a:prstGeom prst="rect">
+            <a:avLst/>
+          </a:prstGeom>
+          <a:noFill/>
+          <a:ln/>
+        </p:spPr>
+        <p:txBody>
+          <a:bodyPr wrap="square" lIns="0" tIns="0" rIns="0" bIns="0" rtlCol="0" anchor="ctr"/>
+          <a:lstStyle/>
+          <a:p>
+            <a:pPr algn="r" indent="0" marL="0">
+              <a:buNone/>
+            </a:pPr>
+            <a:r>
+              <a:rPr lang="en-US" sz="1000" dirty="0">
+                <a:solidFill>
+                  <a:srgbClr val="5F7183"/>
+                </a:solidFill>
+                <a:latin typeface="Calibri" pitchFamily="34" charset="0"/>
+                <a:ea typeface="Calibri" pitchFamily="34" charset="-122"/>
+                <a:cs typeface="Calibri" pitchFamily="34" charset="-120"/>
+              </a:rPr>
+              <a:t>11</a:t>
+            </a:r>
+            <a:endParaRPr lang="en-US" sz="1000" dirty="0"/>
+          </a:p>
+        </p:txBody>
+      </p:sp>
+    </p:spTree>
+  </p:cSld>
+  <p:clrMapOvr>
+    <a:masterClrMapping/>
+  </p:clrMapOvr>
+</p:sld>
+</file>
+
+<file path=ppt/slides/slide12.xml><?xml version="1.0" encoding="utf-8"?>
+<p:sld xmlns:a="http://schemas.openxmlformats.org/drawingml/2006/main" xmlns:r="http://schemas.openxmlformats.org/officeDocument/2006/relationships" xmlns:p="http://schemas.openxmlformats.org/presentationml/2006/main">
+  <p:cSld name="Slide 12">
+    <p:bg>
+      <p:bgPr>
+        <a:solidFill>
+          <a:srgbClr val="FFFFFF"/>
+        </a:solidFill>
+      </p:bgPr>
+    </p:bg>
+    <p:spTree>
+      <p:nvGrpSpPr>
+        <p:cNvPr id="1" name=""/>
+        <p:cNvGrpSpPr/>
+        <p:nvPr/>
+      </p:nvGrpSpPr>
+      <p:grpSpPr>
+        <a:xfrm>
+          <a:off x="0" y="0"/>
+          <a:ext cx="0" cy="0"/>
+          <a:chOff x="0" y="0"/>
+          <a:chExt cx="0" cy="0"/>
+        </a:xfrm>
+      </p:grpSpPr>
+      <p:pic>
+        <p:nvPicPr>
+          <p:cNvPr id="2" name="Image 0" descr="/home/user/Training-/assets/logo.png">    </p:cNvPr>
+          <p:cNvPicPr>
+            <a:picLocks noChangeAspect="1"/>
+          </p:cNvPicPr>
+          <p:nvPr/>
+        </p:nvPicPr>
+        <p:blipFill>
+          <a:blip r:embed="rId1"/>
+          <a:stretch>
+            <a:fillRect/>
+          </a:stretch>
+        </p:blipFill>
+        <p:spPr>
+          <a:xfrm>
+            <a:off x="10765231" y="332912"/>
+            <a:ext cx="786384" cy="742353"/>
+          </a:xfrm>
+          <a:prstGeom prst="rect">
+            <a:avLst/>
+          </a:prstGeom>
+        </p:spPr>
+      </p:pic>
+      <p:sp>
+        <p:nvSpPr>
+          <p:cNvPr id="3" name="Text 0"/>
+          <p:cNvSpPr/>
+          <p:nvPr/>
+        </p:nvSpPr>
+        <p:spPr>
+          <a:xfrm>
+            <a:off x="640080" y="384048"/>
+            <a:ext cx="8982151" cy="768096"/>
+          </a:xfrm>
+          <a:prstGeom prst="rect">
+            <a:avLst/>
+          </a:prstGeom>
+          <a:noFill/>
+          <a:ln/>
+        </p:spPr>
+        <p:txBody>
+          <a:bodyPr wrap="square" lIns="0" tIns="0" rIns="0" bIns="0" rtlCol="0" anchor="t"/>
+          <a:lstStyle/>
+          <a:p>
+            <a:pPr indent="0" marL="0">
+              <a:lnSpc>
+                <a:spcPct val="94000"/>
+              </a:lnSpc>
+              <a:buNone/>
+            </a:pPr>
+            <a:r>
+              <a:rPr lang="en-US" sz="2300" b="1" dirty="0">
+                <a:solidFill>
+                  <a:srgbClr val="093259"/>
+                </a:solidFill>
+                <a:latin typeface="Yu Gothic" pitchFamily="34" charset="0"/>
+                <a:ea typeface="Yu Gothic" pitchFamily="34" charset="-122"/>
+                <a:cs typeface="Yu Gothic" pitchFamily="34" charset="-120"/>
+              </a:rPr>
+              <a:t>確認テスト　解答と解説　問1〜問5</a:t>
+            </a:r>
+            <a:endParaRPr lang="en-US" sz="2300" dirty="0"/>
+          </a:p>
+          <a:p>
+            <a:pPr indent="0" marL="0">
+              <a:lnSpc>
+                <a:spcPct val="94000"/>
+              </a:lnSpc>
+              <a:buNone/>
+            </a:pPr>
+            <a:r>
+              <a:rPr lang="en-US" sz="1100" i="1" dirty="0">
+                <a:solidFill>
+                  <a:srgbClr val="12B198"/>
+                </a:solidFill>
+                <a:latin typeface="Calibri" pitchFamily="34" charset="0"/>
+                <a:ea typeface="Calibri" pitchFamily="34" charset="-122"/>
+                <a:cs typeface="Calibri" pitchFamily="34" charset="-120"/>
+              </a:rPr>
+              <a:t>Assessment — Answers 1 to 5</a:t>
+            </a:r>
+            <a:endParaRPr lang="en-US" sz="2300" dirty="0"/>
+          </a:p>
+        </p:txBody>
+      </p:sp>
+      <p:sp>
+        <p:nvSpPr>
+          <p:cNvPr id="4" name="Shape 1"/>
+          <p:cNvSpPr/>
+          <p:nvPr/>
+        </p:nvSpPr>
+        <p:spPr>
+          <a:xfrm>
+            <a:off x="9686239" y="438912"/>
+            <a:ext cx="932688" cy="310896"/>
+          </a:xfrm>
+          <a:prstGeom prst="roundRect">
+            <a:avLst>
+              <a:gd name="adj" fmla="val 14706"/>
+            </a:avLst>
+          </a:prstGeom>
+          <a:solidFill>
+            <a:srgbClr val="093259"/>
+          </a:solidFill>
+          <a:ln/>
+        </p:spPr>
+      </p:sp>
+      <p:sp>
+        <p:nvSpPr>
+          <p:cNvPr id="5" name="Text 2"/>
+          <p:cNvSpPr/>
+          <p:nvPr/>
+        </p:nvSpPr>
+        <p:spPr>
+          <a:xfrm>
+            <a:off x="9686239" y="438912"/>
+            <a:ext cx="932688" cy="310896"/>
+          </a:xfrm>
+          <a:prstGeom prst="rect">
+            <a:avLst/>
+          </a:prstGeom>
+          <a:noFill/>
+          <a:ln/>
+        </p:spPr>
+        <p:txBody>
+          <a:bodyPr wrap="square" lIns="0" tIns="0" rIns="0" bIns="0" rtlCol="0" anchor="ctr"/>
+          <a:lstStyle/>
+          <a:p>
+            <a:pPr algn="ctr" indent="0" marL="0">
+              <a:buNone/>
+            </a:pPr>
+            <a:r>
+              <a:rPr lang="en-US" sz="1100" b="1" dirty="0">
+                <a:solidFill>
+                  <a:srgbClr val="FFFFFF"/>
+                </a:solidFill>
+                <a:latin typeface="Calibri" pitchFamily="34" charset="0"/>
+                <a:ea typeface="Calibri" pitchFamily="34" charset="-122"/>
+                <a:cs typeface="Calibri" pitchFamily="34" charset="-120"/>
+              </a:rPr>
+              <a:t>ANSWERS</a:t>
+            </a:r>
+            <a:endParaRPr lang="en-US" sz="1100" dirty="0"/>
+          </a:p>
+        </p:txBody>
+      </p:sp>
+      <p:sp>
+        <p:nvSpPr>
+          <p:cNvPr id="6" name="Shape 3"/>
+          <p:cNvSpPr/>
+          <p:nvPr/>
+        </p:nvSpPr>
+        <p:spPr>
+          <a:xfrm>
+            <a:off x="640080" y="1188720"/>
+            <a:ext cx="10911535" cy="844906"/>
+          </a:xfrm>
+          <a:prstGeom prst="roundRect">
+            <a:avLst>
+              <a:gd name="adj" fmla="val 4329"/>
+            </a:avLst>
+          </a:prstGeom>
+          <a:solidFill>
+            <a:srgbClr val="E4F4F0"/>
+          </a:solidFill>
+          <a:ln/>
+        </p:spPr>
+      </p:sp>
+      <p:sp>
+        <p:nvSpPr>
+          <p:cNvPr id="7" name="Shape 4"/>
+          <p:cNvSpPr/>
+          <p:nvPr/>
+        </p:nvSpPr>
+        <p:spPr>
+          <a:xfrm>
+            <a:off x="841248" y="1437437"/>
+            <a:ext cx="347472" cy="347472"/>
+          </a:xfrm>
+          <a:prstGeom prst="ellipse">
+            <a:avLst/>
+          </a:prstGeom>
+          <a:solidFill>
+            <a:srgbClr val="12B198"/>
+          </a:solidFill>
+          <a:ln/>
+        </p:spPr>
+      </p:sp>
+      <p:sp>
+        <p:nvSpPr>
+          <p:cNvPr id="8" name="Text 5"/>
+          <p:cNvSpPr/>
+          <p:nvPr/>
+        </p:nvSpPr>
+        <p:spPr>
+          <a:xfrm>
+            <a:off x="841248" y="1437437"/>
+            <a:ext cx="347472" cy="347472"/>
+          </a:xfrm>
+          <a:prstGeom prst="rect">
+            <a:avLst/>
+          </a:prstGeom>
+          <a:noFill/>
+          <a:ln/>
+        </p:spPr>
+        <p:txBody>
+          <a:bodyPr wrap="square" lIns="0" tIns="0" rIns="0" bIns="0" rtlCol="0" anchor="ctr"/>
+          <a:lstStyle/>
+          <a:p>
+            <a:pPr algn="ctr" indent="0" marL="0">
+              <a:buNone/>
+            </a:pPr>
+            <a:r>
+              <a:rPr lang="en-US" sz="1100" b="1" dirty="0">
+                <a:solidFill>
+                  <a:srgbClr val="FFFFFF"/>
+                </a:solidFill>
+                <a:latin typeface="Calibri" pitchFamily="34" charset="0"/>
+                <a:ea typeface="Calibri" pitchFamily="34" charset="-122"/>
+                <a:cs typeface="Calibri" pitchFamily="34" charset="-120"/>
+              </a:rPr>
+              <a:t>1</a:t>
+            </a:r>
+            <a:endParaRPr lang="en-US" sz="1100" dirty="0"/>
+          </a:p>
+        </p:txBody>
+      </p:sp>
+      <p:sp>
+        <p:nvSpPr>
+          <p:cNvPr id="9" name="Text 6"/>
+          <p:cNvSpPr/>
+          <p:nvPr/>
+        </p:nvSpPr>
+        <p:spPr>
+          <a:xfrm>
+            <a:off x="1280160" y="1252728"/>
+            <a:ext cx="10033711" cy="716890"/>
+          </a:xfrm>
+          <a:prstGeom prst="rect">
+            <a:avLst/>
+          </a:prstGeom>
+          <a:noFill/>
+          <a:ln/>
+        </p:spPr>
+        <p:txBody>
+          <a:bodyPr wrap="square" lIns="0" tIns="0" rIns="0" bIns="0" rtlCol="0" anchor="ctr"/>
+          <a:lstStyle/>
+          <a:p>
+            <a:pPr indent="0" marL="0">
+              <a:lnSpc>
+                <a:spcPct val="88000"/>
+              </a:lnSpc>
+              <a:buNone/>
+            </a:pPr>
+            <a:r>
+              <a:rPr lang="en-US" sz="900" dirty="0">
+                <a:solidFill>
+                  <a:srgbClr val="5F7183"/>
+                </a:solidFill>
+                <a:latin typeface="Yu Gothic" pitchFamily="34" charset="0"/>
+                <a:ea typeface="Yu Gothic" pitchFamily="34" charset="-122"/>
+                <a:cs typeface="Yu Gothic" pitchFamily="34" charset="-120"/>
+              </a:rPr>
+              <a:t>問1　法的な立場と、警察にあって警備員にない権限</a:t>
+            </a:r>
+            <a:endParaRPr lang="en-US" sz="900" dirty="0"/>
+          </a:p>
+          <a:p>
+            <a:pPr indent="0" marL="0">
+              <a:lnSpc>
+                <a:spcPct val="88000"/>
+              </a:lnSpc>
+              <a:buNone/>
+            </a:pPr>
+            <a:r>
+              <a:rPr lang="en-US" sz="1200" b="1" dirty="0">
+                <a:solidFill>
+                  <a:srgbClr val="1B2733"/>
+                </a:solidFill>
+                <a:latin typeface="Yu Gothic" pitchFamily="34" charset="0"/>
+                <a:ea typeface="Yu Gothic" pitchFamily="34" charset="-122"/>
+                <a:cs typeface="Yu Gothic" pitchFamily="34" charset="-120"/>
+              </a:rPr>
+              <a:t>私人。制服により権限は加わらない。／ 職務質問、保護、避難等の措置、制止、立入、武器の使用、逮捕状による逮捕のいずれか1つ。</a:t>
+            </a:r>
+            <a:endParaRPr lang="en-US" sz="900" dirty="0"/>
+          </a:p>
+          <a:p>
+            <a:pPr indent="0" marL="0">
+              <a:lnSpc>
+                <a:spcPct val="88000"/>
+              </a:lnSpc>
+              <a:buNone/>
+            </a:pPr>
+            <a:r>
+              <a:rPr lang="en-US" sz="800" i="1" dirty="0">
+                <a:solidFill>
+                  <a:srgbClr val="5F7183"/>
+                </a:solidFill>
+                <a:latin typeface="Calibri" pitchFamily="34" charset="0"/>
+                <a:ea typeface="Calibri" pitchFamily="34" charset="-122"/>
+                <a:cs typeface="Calibri" pitchFamily="34" charset="-120"/>
+              </a:rPr>
+              <a:t>A private citizen; the uniform adds nothing. Any one of: stop and question, protective custody, evacuation orders, stopping a crime, entry, weapons, arrest by warrant.</a:t>
+            </a:r>
+            <a:endParaRPr lang="en-US" sz="900" dirty="0"/>
+          </a:p>
+        </p:txBody>
+      </p:sp>
+      <p:sp>
+        <p:nvSpPr>
+          <p:cNvPr id="10" name="Shape 7"/>
+          <p:cNvSpPr/>
+          <p:nvPr/>
+        </p:nvSpPr>
+        <p:spPr>
+          <a:xfrm>
+            <a:off x="640080" y="2134210"/>
+            <a:ext cx="10911535" cy="844906"/>
+          </a:xfrm>
+          <a:prstGeom prst="roundRect">
+            <a:avLst>
+              <a:gd name="adj" fmla="val 4329"/>
+            </a:avLst>
+          </a:prstGeom>
+          <a:solidFill>
+            <a:srgbClr val="EFF4F8"/>
+          </a:solidFill>
+          <a:ln/>
+        </p:spPr>
+      </p:sp>
+      <p:sp>
+        <p:nvSpPr>
+          <p:cNvPr id="11" name="Shape 8"/>
+          <p:cNvSpPr/>
+          <p:nvPr/>
+        </p:nvSpPr>
+        <p:spPr>
+          <a:xfrm>
+            <a:off x="841248" y="2382926"/>
+            <a:ext cx="347472" cy="347472"/>
+          </a:xfrm>
+          <a:prstGeom prst="ellipse">
+            <a:avLst/>
+          </a:prstGeom>
+          <a:solidFill>
+            <a:srgbClr val="12B198"/>
+          </a:solidFill>
+          <a:ln/>
+        </p:spPr>
+      </p:sp>
+      <p:sp>
+        <p:nvSpPr>
+          <p:cNvPr id="12" name="Text 9"/>
+          <p:cNvSpPr/>
+          <p:nvPr/>
+        </p:nvSpPr>
+        <p:spPr>
+          <a:xfrm>
+            <a:off x="841248" y="2382926"/>
+            <a:ext cx="347472" cy="347472"/>
+          </a:xfrm>
+          <a:prstGeom prst="rect">
+            <a:avLst/>
+          </a:prstGeom>
+          <a:noFill/>
+          <a:ln/>
+        </p:spPr>
+        <p:txBody>
+          <a:bodyPr wrap="square" lIns="0" tIns="0" rIns="0" bIns="0" rtlCol="0" anchor="ctr"/>
+          <a:lstStyle/>
+          <a:p>
+            <a:pPr algn="ctr" indent="0" marL="0">
+              <a:buNone/>
+            </a:pPr>
+            <a:r>
+              <a:rPr lang="en-US" sz="1100" b="1" dirty="0">
+                <a:solidFill>
+                  <a:srgbClr val="FFFFFF"/>
+                </a:solidFill>
+                <a:latin typeface="Calibri" pitchFamily="34" charset="0"/>
+                <a:ea typeface="Calibri" pitchFamily="34" charset="-122"/>
+                <a:cs typeface="Calibri" pitchFamily="34" charset="-120"/>
+              </a:rPr>
+              <a:t>2</a:t>
+            </a:r>
+            <a:endParaRPr lang="en-US" sz="1100" dirty="0"/>
+          </a:p>
+        </p:txBody>
+      </p:sp>
+      <p:sp>
+        <p:nvSpPr>
+          <p:cNvPr id="13" name="Text 10"/>
+          <p:cNvSpPr/>
+          <p:nvPr/>
+        </p:nvSpPr>
+        <p:spPr>
+          <a:xfrm>
+            <a:off x="1280160" y="2198218"/>
+            <a:ext cx="10033711" cy="716890"/>
+          </a:xfrm>
+          <a:prstGeom prst="rect">
+            <a:avLst/>
+          </a:prstGeom>
+          <a:noFill/>
+          <a:ln/>
+        </p:spPr>
+        <p:txBody>
+          <a:bodyPr wrap="square" lIns="0" tIns="0" rIns="0" bIns="0" rtlCol="0" anchor="ctr"/>
+          <a:lstStyle/>
+          <a:p>
+            <a:pPr indent="0" marL="0">
+              <a:lnSpc>
+                <a:spcPct val="88000"/>
+              </a:lnSpc>
+              <a:buNone/>
+            </a:pPr>
+            <a:r>
+              <a:rPr lang="en-US" sz="900" dirty="0">
+                <a:solidFill>
+                  <a:srgbClr val="5F7183"/>
+                </a:solidFill>
+                <a:latin typeface="Yu Gothic" pitchFamily="34" charset="0"/>
+                <a:ea typeface="Yu Gothic" pitchFamily="34" charset="-122"/>
+                <a:cs typeface="Yu Gothic" pitchFamily="34" charset="-120"/>
+              </a:rPr>
+              <a:t>問2　De-escalation の目的</a:t>
+            </a:r>
+            <a:endParaRPr lang="en-US" sz="900" dirty="0"/>
+          </a:p>
+          <a:p>
+            <a:pPr indent="0" marL="0">
+              <a:lnSpc>
+                <a:spcPct val="88000"/>
+              </a:lnSpc>
+              <a:buNone/>
+            </a:pPr>
+            <a:r>
+              <a:rPr lang="en-US" sz="1200" b="1" dirty="0">
+                <a:solidFill>
+                  <a:srgbClr val="1B2733"/>
+                </a:solidFill>
+                <a:latin typeface="Yu Gothic" pitchFamily="34" charset="0"/>
+                <a:ea typeface="Yu Gothic" pitchFamily="34" charset="-122"/>
+                <a:cs typeface="Yu Gothic" pitchFamily="34" charset="-120"/>
+              </a:rPr>
+              <a:t>有形力を使わずに緊張を下げ、その場を安全に終えること。勝つことではない。</a:t>
+            </a:r>
+            <a:endParaRPr lang="en-US" sz="900" dirty="0"/>
+          </a:p>
+          <a:p>
+            <a:pPr indent="0" marL="0">
+              <a:lnSpc>
+                <a:spcPct val="88000"/>
+              </a:lnSpc>
+              <a:buNone/>
+            </a:pPr>
+            <a:r>
+              <a:rPr lang="en-US" sz="800" i="1" dirty="0">
+                <a:solidFill>
+                  <a:srgbClr val="5F7183"/>
+                </a:solidFill>
+                <a:latin typeface="Calibri" pitchFamily="34" charset="0"/>
+                <a:ea typeface="Calibri" pitchFamily="34" charset="-122"/>
+                <a:cs typeface="Calibri" pitchFamily="34" charset="-120"/>
+              </a:rPr>
+              <a:t>To lower tension without force and end the situation safely. Not to win.</a:t>
+            </a:r>
+            <a:endParaRPr lang="en-US" sz="900" dirty="0"/>
+          </a:p>
+        </p:txBody>
+      </p:sp>
+      <p:sp>
+        <p:nvSpPr>
+          <p:cNvPr id="14" name="Shape 11"/>
+          <p:cNvSpPr/>
+          <p:nvPr/>
+        </p:nvSpPr>
+        <p:spPr>
+          <a:xfrm>
+            <a:off x="640080" y="3079699"/>
+            <a:ext cx="10911535" cy="844906"/>
+          </a:xfrm>
+          <a:prstGeom prst="roundRect">
+            <a:avLst>
+              <a:gd name="adj" fmla="val 4329"/>
+            </a:avLst>
+          </a:prstGeom>
+          <a:solidFill>
+            <a:srgbClr val="EFF4F8"/>
+          </a:solidFill>
+          <a:ln/>
+        </p:spPr>
+      </p:sp>
+      <p:sp>
+        <p:nvSpPr>
+          <p:cNvPr id="15" name="Shape 12"/>
+          <p:cNvSpPr/>
+          <p:nvPr/>
+        </p:nvSpPr>
+        <p:spPr>
+          <a:xfrm>
+            <a:off x="841248" y="3328416"/>
+            <a:ext cx="347472" cy="347472"/>
+          </a:xfrm>
+          <a:prstGeom prst="ellipse">
+            <a:avLst/>
+          </a:prstGeom>
+          <a:solidFill>
+            <a:srgbClr val="12B198"/>
+          </a:solidFill>
+          <a:ln/>
+        </p:spPr>
+      </p:sp>
+      <p:sp>
+        <p:nvSpPr>
+          <p:cNvPr id="16" name="Text 13"/>
+          <p:cNvSpPr/>
+          <p:nvPr/>
+        </p:nvSpPr>
+        <p:spPr>
+          <a:xfrm>
+            <a:off x="841248" y="3328416"/>
+            <a:ext cx="347472" cy="347472"/>
+          </a:xfrm>
+          <a:prstGeom prst="rect">
+            <a:avLst/>
+          </a:prstGeom>
+          <a:noFill/>
+          <a:ln/>
+        </p:spPr>
+        <p:txBody>
+          <a:bodyPr wrap="square" lIns="0" tIns="0" rIns="0" bIns="0" rtlCol="0" anchor="ctr"/>
+          <a:lstStyle/>
+          <a:p>
+            <a:pPr algn="ctr" indent="0" marL="0">
+              <a:buNone/>
+            </a:pPr>
+            <a:r>
+              <a:rPr lang="en-US" sz="1100" b="1" dirty="0">
+                <a:solidFill>
+                  <a:srgbClr val="FFFFFF"/>
+                </a:solidFill>
+                <a:latin typeface="Calibri" pitchFamily="34" charset="0"/>
+                <a:ea typeface="Calibri" pitchFamily="34" charset="-122"/>
+                <a:cs typeface="Calibri" pitchFamily="34" charset="-120"/>
+              </a:rPr>
+              <a:t>3</a:t>
+            </a:r>
+            <a:endParaRPr lang="en-US" sz="1100" dirty="0"/>
+          </a:p>
+        </p:txBody>
+      </p:sp>
+      <p:sp>
+        <p:nvSpPr>
+          <p:cNvPr id="17" name="Text 14"/>
+          <p:cNvSpPr/>
+          <p:nvPr/>
+        </p:nvSpPr>
+        <p:spPr>
+          <a:xfrm>
+            <a:off x="1280160" y="3143707"/>
+            <a:ext cx="10033711" cy="716890"/>
+          </a:xfrm>
+          <a:prstGeom prst="rect">
+            <a:avLst/>
+          </a:prstGeom>
+          <a:noFill/>
+          <a:ln/>
+        </p:spPr>
+        <p:txBody>
+          <a:bodyPr wrap="square" lIns="0" tIns="0" rIns="0" bIns="0" rtlCol="0" anchor="ctr"/>
+          <a:lstStyle/>
+          <a:p>
+            <a:pPr indent="0" marL="0">
+              <a:lnSpc>
+                <a:spcPct val="88000"/>
+              </a:lnSpc>
+              <a:buNone/>
+            </a:pPr>
+            <a:r>
+              <a:rPr lang="en-US" sz="900" dirty="0">
+                <a:solidFill>
+                  <a:srgbClr val="5F7183"/>
+                </a:solidFill>
+                <a:latin typeface="Yu Gothic" pitchFamily="34" charset="0"/>
+                <a:ea typeface="Yu Gothic" pitchFamily="34" charset="-122"/>
+                <a:cs typeface="Yu Gothic" pitchFamily="34" charset="-120"/>
+              </a:rPr>
+              <a:t>問3　引き下がれる形を残す理由</a:t>
+            </a:r>
+            <a:endParaRPr lang="en-US" sz="900" dirty="0"/>
+          </a:p>
+          <a:p>
+            <a:pPr indent="0" marL="0">
+              <a:lnSpc>
+                <a:spcPct val="88000"/>
+              </a:lnSpc>
+              <a:buNone/>
+            </a:pPr>
+            <a:r>
+              <a:rPr lang="en-US" sz="1200" b="1" dirty="0">
+                <a:solidFill>
+                  <a:srgbClr val="1B2733"/>
+                </a:solidFill>
+                <a:latin typeface="Yu Gothic" pitchFamily="34" charset="0"/>
+                <a:ea typeface="Yu Gothic" pitchFamily="34" charset="-122"/>
+                <a:cs typeface="Yu Gothic" pitchFamily="34" charset="-120"/>
+              </a:rPr>
+              <a:t>逃げ道がないと、相手は引き下がれず対立を続けるほかなくなるため。</a:t>
+            </a:r>
+            <a:endParaRPr lang="en-US" sz="900" dirty="0"/>
+          </a:p>
+          <a:p>
+            <a:pPr indent="0" marL="0">
+              <a:lnSpc>
+                <a:spcPct val="88000"/>
+              </a:lnSpc>
+              <a:buNone/>
+            </a:pPr>
+            <a:r>
+              <a:rPr lang="en-US" sz="800" i="1" dirty="0">
+                <a:solidFill>
+                  <a:srgbClr val="5F7183"/>
+                </a:solidFill>
+                <a:latin typeface="Calibri" pitchFamily="34" charset="0"/>
+                <a:ea typeface="Calibri" pitchFamily="34" charset="-122"/>
+                <a:cs typeface="Calibri" pitchFamily="34" charset="-120"/>
+              </a:rPr>
+              <a:t>Without a way out, the person has no option but to keep fighting.</a:t>
+            </a:r>
+            <a:endParaRPr lang="en-US" sz="900" dirty="0"/>
+          </a:p>
+        </p:txBody>
+      </p:sp>
+      <p:sp>
+        <p:nvSpPr>
+          <p:cNvPr id="18" name="Shape 15"/>
+          <p:cNvSpPr/>
+          <p:nvPr/>
+        </p:nvSpPr>
+        <p:spPr>
+          <a:xfrm>
+            <a:off x="640080" y="4025189"/>
+            <a:ext cx="10911535" cy="844906"/>
+          </a:xfrm>
+          <a:prstGeom prst="roundRect">
+            <a:avLst>
+              <a:gd name="adj" fmla="val 4329"/>
+            </a:avLst>
+          </a:prstGeom>
+          <a:solidFill>
+            <a:srgbClr val="EFF4F8"/>
+          </a:solidFill>
+          <a:ln/>
+        </p:spPr>
+      </p:sp>
+      <p:sp>
+        <p:nvSpPr>
+          <p:cNvPr id="19" name="Shape 16"/>
+          <p:cNvSpPr/>
+          <p:nvPr/>
+        </p:nvSpPr>
+        <p:spPr>
+          <a:xfrm>
+            <a:off x="841248" y="4273906"/>
+            <a:ext cx="347472" cy="347472"/>
+          </a:xfrm>
+          <a:prstGeom prst="ellipse">
+            <a:avLst/>
+          </a:prstGeom>
+          <a:solidFill>
+            <a:srgbClr val="12B198"/>
+          </a:solidFill>
+          <a:ln/>
+        </p:spPr>
+      </p:sp>
+      <p:sp>
+        <p:nvSpPr>
+          <p:cNvPr id="20" name="Text 17"/>
+          <p:cNvSpPr/>
+          <p:nvPr/>
+        </p:nvSpPr>
+        <p:spPr>
+          <a:xfrm>
+            <a:off x="841248" y="4273906"/>
+            <a:ext cx="347472" cy="347472"/>
+          </a:xfrm>
+          <a:prstGeom prst="rect">
+            <a:avLst/>
+          </a:prstGeom>
+          <a:noFill/>
+          <a:ln/>
+        </p:spPr>
+        <p:txBody>
+          <a:bodyPr wrap="square" lIns="0" tIns="0" rIns="0" bIns="0" rtlCol="0" anchor="ctr"/>
+          <a:lstStyle/>
+          <a:p>
+            <a:pPr algn="ctr" indent="0" marL="0">
+              <a:buNone/>
+            </a:pPr>
+            <a:r>
+              <a:rPr lang="en-US" sz="1100" b="1" dirty="0">
+                <a:solidFill>
+                  <a:srgbClr val="FFFFFF"/>
+                </a:solidFill>
+                <a:latin typeface="Calibri" pitchFamily="34" charset="0"/>
+                <a:ea typeface="Calibri" pitchFamily="34" charset="-122"/>
+                <a:cs typeface="Calibri" pitchFamily="34" charset="-120"/>
+              </a:rPr>
+              <a:t>4</a:t>
+            </a:r>
+            <a:endParaRPr lang="en-US" sz="1100" dirty="0"/>
+          </a:p>
+        </p:txBody>
+      </p:sp>
+      <p:sp>
+        <p:nvSpPr>
+          <p:cNvPr id="21" name="Text 18"/>
+          <p:cNvSpPr/>
+          <p:nvPr/>
+        </p:nvSpPr>
+        <p:spPr>
+          <a:xfrm>
+            <a:off x="1280160" y="4089197"/>
+            <a:ext cx="10033711" cy="716890"/>
+          </a:xfrm>
+          <a:prstGeom prst="rect">
+            <a:avLst/>
+          </a:prstGeom>
+          <a:noFill/>
+          <a:ln/>
+        </p:spPr>
+        <p:txBody>
+          <a:bodyPr wrap="square" lIns="0" tIns="0" rIns="0" bIns="0" rtlCol="0" anchor="ctr"/>
+          <a:lstStyle/>
+          <a:p>
+            <a:pPr indent="0" marL="0">
+              <a:lnSpc>
+                <a:spcPct val="88000"/>
+              </a:lnSpc>
+              <a:buNone/>
+            </a:pPr>
+            <a:r>
+              <a:rPr lang="en-US" sz="900" dirty="0">
+                <a:solidFill>
+                  <a:srgbClr val="5F7183"/>
+                </a:solidFill>
+                <a:latin typeface="Yu Gothic" pitchFamily="34" charset="0"/>
+                <a:ea typeface="Yu Gothic" pitchFamily="34" charset="-122"/>
+                <a:cs typeface="Yu Gothic" pitchFamily="34" charset="-120"/>
+              </a:rPr>
+              <a:t>問4　離脱すべき兆候（2つ）</a:t>
+            </a:r>
+            <a:endParaRPr lang="en-US" sz="900" dirty="0"/>
+          </a:p>
+          <a:p>
+            <a:pPr indent="0" marL="0">
+              <a:lnSpc>
+                <a:spcPct val="88000"/>
+              </a:lnSpc>
+              <a:buNone/>
+            </a:pPr>
+            <a:r>
+              <a:rPr lang="en-US" sz="1200" b="1" dirty="0">
+                <a:solidFill>
+                  <a:srgbClr val="1B2733"/>
+                </a:solidFill>
+                <a:latin typeface="Yu Gothic" pitchFamily="34" charset="0"/>
+                <a:ea typeface="Yu Gothic" pitchFamily="34" charset="-122"/>
+                <a:cs typeface="Yu Gothic" pitchFamily="34" charset="-120"/>
+              </a:rPr>
+              <a:t>声が大きくなり続ける／同じ言葉を繰り返す／距離を詰めてくる／持ち物を握りしめる／視線を外さない。</a:t>
+            </a:r>
+            <a:endParaRPr lang="en-US" sz="900" dirty="0"/>
+          </a:p>
+          <a:p>
+            <a:pPr indent="0" marL="0">
+              <a:lnSpc>
+                <a:spcPct val="88000"/>
+              </a:lnSpc>
+              <a:buNone/>
+            </a:pPr>
+            <a:r>
+              <a:rPr lang="en-US" sz="800" i="1" dirty="0">
+                <a:solidFill>
+                  <a:srgbClr val="5F7183"/>
+                </a:solidFill>
+                <a:latin typeface="Calibri" pitchFamily="34" charset="0"/>
+                <a:ea typeface="Calibri" pitchFamily="34" charset="-122"/>
+                <a:cs typeface="Calibri" pitchFamily="34" charset="-120"/>
+              </a:rPr>
+              <a:t>Rising volume; repeating the same phrase; closing distance; gripping an object; a fixed stare.</a:t>
+            </a:r>
+            <a:endParaRPr lang="en-US" sz="900" dirty="0"/>
+          </a:p>
+        </p:txBody>
+      </p:sp>
+      <p:sp>
+        <p:nvSpPr>
+          <p:cNvPr id="22" name="Shape 19"/>
+          <p:cNvSpPr/>
+          <p:nvPr/>
+        </p:nvSpPr>
+        <p:spPr>
+          <a:xfrm>
+            <a:off x="640080" y="4970678"/>
+            <a:ext cx="10911535" cy="844906"/>
+          </a:xfrm>
+          <a:prstGeom prst="roundRect">
+            <a:avLst>
+              <a:gd name="adj" fmla="val 4329"/>
+            </a:avLst>
+          </a:prstGeom>
+          <a:solidFill>
+            <a:srgbClr val="EFF4F8"/>
+          </a:solidFill>
+          <a:ln/>
+        </p:spPr>
+      </p:sp>
+      <p:sp>
+        <p:nvSpPr>
+          <p:cNvPr id="23" name="Shape 20"/>
+          <p:cNvSpPr/>
+          <p:nvPr/>
+        </p:nvSpPr>
+        <p:spPr>
+          <a:xfrm>
+            <a:off x="841248" y="5219395"/>
+            <a:ext cx="347472" cy="347472"/>
+          </a:xfrm>
+          <a:prstGeom prst="ellipse">
+            <a:avLst/>
+          </a:prstGeom>
+          <a:solidFill>
+            <a:srgbClr val="12B198"/>
+          </a:solidFill>
+          <a:ln/>
+        </p:spPr>
+      </p:sp>
+      <p:sp>
+        <p:nvSpPr>
+          <p:cNvPr id="24" name="Text 21"/>
+          <p:cNvSpPr/>
+          <p:nvPr/>
+        </p:nvSpPr>
+        <p:spPr>
+          <a:xfrm>
+            <a:off x="841248" y="5219395"/>
+            <a:ext cx="347472" cy="347472"/>
+          </a:xfrm>
+          <a:prstGeom prst="rect">
+            <a:avLst/>
+          </a:prstGeom>
+          <a:noFill/>
+          <a:ln/>
+        </p:spPr>
+        <p:txBody>
+          <a:bodyPr wrap="square" lIns="0" tIns="0" rIns="0" bIns="0" rtlCol="0" anchor="ctr"/>
+          <a:lstStyle/>
+          <a:p>
+            <a:pPr algn="ctr" indent="0" marL="0">
+              <a:buNone/>
+            </a:pPr>
+            <a:r>
+              <a:rPr lang="en-US" sz="1100" b="1" dirty="0">
+                <a:solidFill>
+                  <a:srgbClr val="FFFFFF"/>
+                </a:solidFill>
+                <a:latin typeface="Calibri" pitchFamily="34" charset="0"/>
+                <a:ea typeface="Calibri" pitchFamily="34" charset="-122"/>
+                <a:cs typeface="Calibri" pitchFamily="34" charset="-120"/>
+              </a:rPr>
+              <a:t>5</a:t>
+            </a:r>
+            <a:endParaRPr lang="en-US" sz="1100" dirty="0"/>
+          </a:p>
+        </p:txBody>
+      </p:sp>
+      <p:sp>
+        <p:nvSpPr>
+          <p:cNvPr id="25" name="Text 22"/>
+          <p:cNvSpPr/>
+          <p:nvPr/>
+        </p:nvSpPr>
+        <p:spPr>
+          <a:xfrm>
+            <a:off x="1280160" y="5034686"/>
+            <a:ext cx="10033711" cy="716890"/>
+          </a:xfrm>
+          <a:prstGeom prst="rect">
+            <a:avLst/>
+          </a:prstGeom>
+          <a:noFill/>
+          <a:ln/>
+        </p:spPr>
+        <p:txBody>
+          <a:bodyPr wrap="square" lIns="0" tIns="0" rIns="0" bIns="0" rtlCol="0" anchor="ctr"/>
+          <a:lstStyle/>
+          <a:p>
+            <a:pPr indent="0" marL="0">
+              <a:lnSpc>
+                <a:spcPct val="88000"/>
+              </a:lnSpc>
+              <a:buNone/>
+            </a:pPr>
+            <a:r>
+              <a:rPr lang="en-US" sz="900" dirty="0">
+                <a:solidFill>
+                  <a:srgbClr val="5F7183"/>
+                </a:solidFill>
+                <a:latin typeface="Yu Gothic" pitchFamily="34" charset="0"/>
+                <a:ea typeface="Yu Gothic" pitchFamily="34" charset="-122"/>
+                <a:cs typeface="Yu Gothic" pitchFamily="34" charset="-120"/>
+              </a:rPr>
+              <a:t>問5　退去要請の根拠</a:t>
+            </a:r>
+            <a:endParaRPr lang="en-US" sz="900" dirty="0"/>
+          </a:p>
+          <a:p>
+            <a:pPr indent="0" marL="0">
+              <a:lnSpc>
+                <a:spcPct val="88000"/>
+              </a:lnSpc>
+              <a:buNone/>
+            </a:pPr>
+            <a:r>
+              <a:rPr lang="en-US" sz="1200" b="1" dirty="0">
+                <a:solidFill>
+                  <a:srgbClr val="1B2733"/>
+                </a:solidFill>
+                <a:latin typeface="Yu Gothic" pitchFamily="34" charset="0"/>
+                <a:ea typeface="Yu Gothic" pitchFamily="34" charset="-122"/>
+                <a:cs typeface="Yu Gothic" pitchFamily="34" charset="-120"/>
+              </a:rPr>
+              <a:t>管理権者の意思。警備員が自分の判断で命じるものではない。</a:t>
+            </a:r>
+            <a:endParaRPr lang="en-US" sz="900" dirty="0"/>
+          </a:p>
+          <a:p>
+            <a:pPr indent="0" marL="0">
+              <a:lnSpc>
+                <a:spcPct val="88000"/>
+              </a:lnSpc>
+              <a:buNone/>
+            </a:pPr>
+            <a:r>
+              <a:rPr lang="en-US" sz="800" i="1" dirty="0">
+                <a:solidFill>
+                  <a:srgbClr val="5F7183"/>
+                </a:solidFill>
+                <a:latin typeface="Calibri" pitchFamily="34" charset="0"/>
+                <a:ea typeface="Calibri" pitchFamily="34" charset="-122"/>
+                <a:cs typeface="Calibri" pitchFamily="34" charset="-120"/>
+              </a:rPr>
+              <a:t>The site authority's intent. A guard does not order it on their own judgement.</a:t>
+            </a:r>
+            <a:endParaRPr lang="en-US" sz="900" dirty="0"/>
+          </a:p>
+        </p:txBody>
+      </p:sp>
+      <p:sp>
+        <p:nvSpPr>
+          <p:cNvPr id="26" name="Text 23"/>
+          <p:cNvSpPr/>
+          <p:nvPr/>
+        </p:nvSpPr>
+        <p:spPr>
+          <a:xfrm>
+            <a:off x="640080" y="5907024"/>
+            <a:ext cx="10911535" cy="310896"/>
+          </a:xfrm>
+          <a:prstGeom prst="rect">
+            <a:avLst/>
+          </a:prstGeom>
+          <a:noFill/>
+          <a:ln/>
+        </p:spPr>
+        <p:txBody>
+          <a:bodyPr wrap="square" lIns="0" tIns="0" rIns="0" bIns="0" rtlCol="0" anchor="t"/>
+          <a:lstStyle/>
+          <a:p>
+            <a:pPr indent="0" marL="0">
+              <a:lnSpc>
+                <a:spcPct val="88000"/>
+              </a:lnSpc>
+              <a:buNone/>
+            </a:pPr>
+            <a:r>
+              <a:rPr lang="en-US" sz="900" b="1" dirty="0">
+                <a:solidFill>
+                  <a:srgbClr val="0D8A76"/>
+                </a:solidFill>
+                <a:latin typeface="Yu Gothic" pitchFamily="34" charset="0"/>
+                <a:ea typeface="Yu Gothic" pitchFamily="34" charset="-122"/>
+                <a:cs typeface="Yu Gothic" pitchFamily="34" charset="-120"/>
+              </a:rPr>
+              <a:t>採点の目安　</a:t>
+            </a:r>
+            <a:pPr indent="0" marL="0">
+              <a:lnSpc>
+                <a:spcPct val="88000"/>
+              </a:lnSpc>
+              <a:buNone/>
+            </a:pPr>
+            <a:r>
+              <a:rPr lang="en-US" sz="900" dirty="0">
+                <a:solidFill>
+                  <a:srgbClr val="1B2733"/>
+                </a:solidFill>
+                <a:latin typeface="Yu Gothic" pitchFamily="34" charset="0"/>
+                <a:ea typeface="Yu Gothic" pitchFamily="34" charset="-122"/>
+                <a:cs typeface="Yu Gothic" pitchFamily="34" charset="-120"/>
+              </a:rPr>
+              <a:t>表現が異なっても要点が含まれていれば正解とします。英語での回答も同じ基準で採点します。</a:t>
+            </a:r>
+            <a:endParaRPr lang="en-US" sz="900" dirty="0"/>
+          </a:p>
+          <a:p>
+            <a:pPr indent="0" marL="0">
+              <a:lnSpc>
+                <a:spcPct val="88000"/>
+              </a:lnSpc>
+              <a:buNone/>
+            </a:pPr>
+            <a:r>
+              <a:rPr lang="en-US" sz="750" i="1" dirty="0">
+                <a:solidFill>
+                  <a:srgbClr val="5F7183"/>
+                </a:solidFill>
+                <a:latin typeface="Calibri" pitchFamily="34" charset="0"/>
+                <a:ea typeface="Calibri" pitchFamily="34" charset="-122"/>
+                <a:cs typeface="Calibri" pitchFamily="34" charset="-120"/>
+              </a:rPr>
+              <a:t>Different wording is fine if the point is there. Answers in English are marked to the same standard.</a:t>
+            </a:r>
+            <a:endParaRPr lang="en-US" sz="900" dirty="0"/>
+          </a:p>
+        </p:txBody>
+      </p:sp>
+      <p:sp>
+        <p:nvSpPr>
+          <p:cNvPr id="27" name="Text 24"/>
+          <p:cNvSpPr/>
+          <p:nvPr/>
+        </p:nvSpPr>
+        <p:spPr>
+          <a:xfrm>
+            <a:off x="640080" y="6272784"/>
+            <a:ext cx="9905695" cy="237744"/>
+          </a:xfrm>
+          <a:prstGeom prst="rect">
+            <a:avLst/>
+          </a:prstGeom>
+          <a:noFill/>
+          <a:ln/>
+        </p:spPr>
+        <p:txBody>
+          <a:bodyPr wrap="square" lIns="0" tIns="0" rIns="0" bIns="0" rtlCol="0" anchor="t"/>
+          <a:lstStyle/>
+          <a:p>
+            <a:pPr indent="0" marL="0">
+              <a:buNone/>
+            </a:pPr>
+            <a:r>
+              <a:rPr lang="en-US" sz="750" b="1" dirty="0">
+                <a:solidFill>
+                  <a:srgbClr val="D6E0E9"/>
+                </a:solidFill>
+                <a:latin typeface="Yu Gothic" pitchFamily="34" charset="0"/>
+                <a:ea typeface="Yu Gothic" pitchFamily="34" charset="-122"/>
+                <a:cs typeface="Yu Gothic" pitchFamily="34" charset="-120"/>
+              </a:rPr>
+              <a:t>ソース　</a:t>
+            </a:r>
+            <a:pPr indent="0" marL="0">
+              <a:buNone/>
+            </a:pPr>
+            <a:r>
+              <a:rPr lang="en-US" sz="750" dirty="0">
+                <a:solidFill>
+                  <a:srgbClr val="5F7183"/>
+                </a:solidFill>
+                <a:latin typeface="Yu Gothic" pitchFamily="34" charset="0"/>
+                <a:ea typeface="Yu Gothic" pitchFamily="34" charset="-122"/>
+                <a:cs typeface="Yu Gothic" pitchFamily="34" charset="-120"/>
+              </a:rPr>
+              <a:t>警備業法、刑法、刑事訴訟法、警察官職務執行法</a:t>
+            </a:r>
+            <a:endParaRPr lang="en-US" sz="750" dirty="0"/>
+          </a:p>
+        </p:txBody>
+      </p:sp>
+      <p:sp>
+        <p:nvSpPr>
+          <p:cNvPr id="28" name="Text 25"/>
+          <p:cNvSpPr/>
+          <p:nvPr/>
+        </p:nvSpPr>
+        <p:spPr>
+          <a:xfrm>
+            <a:off x="640080" y="6382512"/>
+            <a:ext cx="8778240" cy="292608"/>
+          </a:xfrm>
+          <a:prstGeom prst="rect">
+            <a:avLst/>
+          </a:prstGeom>
+          <a:noFill/>
+          <a:ln/>
+        </p:spPr>
+        <p:txBody>
+          <a:bodyPr wrap="square" lIns="0" tIns="0" rIns="0" bIns="0" rtlCol="0" anchor="ctr"/>
+          <a:lstStyle/>
+          <a:p>
+            <a:pPr indent="0" marL="0">
+              <a:buNone/>
+            </a:pPr>
+            <a:r>
+              <a:rPr lang="en-US" sz="900" dirty="0">
+                <a:solidFill>
+                  <a:srgbClr val="5F7183"/>
+                </a:solidFill>
+                <a:latin typeface="Yu Gothic" pitchFamily="34" charset="0"/>
+                <a:ea typeface="Yu Gothic" pitchFamily="34" charset="-122"/>
+                <a:cs typeface="Yu Gothic" pitchFamily="34" charset="-120"/>
+              </a:rPr>
+              <a:t>第10時限｜業務別教育6 警報装置その他当該警備業務を実施するために使用する機器の使用方法  </a:t>
+            </a:r>
+            <a:pPr indent="0" marL="0">
+              <a:buNone/>
+            </a:pPr>
+            <a:r>
+              <a:rPr lang="en-US" sz="850" i="1" dirty="0">
+                <a:solidFill>
+                  <a:srgbClr val="D6E0E9"/>
+                </a:solidFill>
+                <a:latin typeface="Calibri" pitchFamily="34" charset="0"/>
+                <a:ea typeface="Calibri" pitchFamily="34" charset="-122"/>
+                <a:cs typeface="Calibri" pitchFamily="34" charset="-120"/>
+              </a:rPr>
+              <a:t>Period 10 | Task-Specific Training 6 — Security Equipment</a:t>
+            </a:r>
+            <a:endParaRPr lang="en-US" sz="900" dirty="0"/>
+          </a:p>
+        </p:txBody>
+      </p:sp>
+      <p:sp>
+        <p:nvSpPr>
+          <p:cNvPr id="29" name="Text 26"/>
+          <p:cNvSpPr/>
+          <p:nvPr/>
+        </p:nvSpPr>
+        <p:spPr>
+          <a:xfrm>
+            <a:off x="10637215" y="6382512"/>
+            <a:ext cx="914400" cy="292608"/>
+          </a:xfrm>
+          <a:prstGeom prst="rect">
+            <a:avLst/>
+          </a:prstGeom>
+          <a:noFill/>
+          <a:ln/>
+        </p:spPr>
+        <p:txBody>
+          <a:bodyPr wrap="square" lIns="0" tIns="0" rIns="0" bIns="0" rtlCol="0" anchor="ctr"/>
+          <a:lstStyle/>
+          <a:p>
+            <a:pPr algn="r" indent="0" marL="0">
+              <a:buNone/>
+            </a:pPr>
+            <a:r>
+              <a:rPr lang="en-US" sz="1000" dirty="0">
+                <a:solidFill>
+                  <a:srgbClr val="5F7183"/>
+                </a:solidFill>
+                <a:latin typeface="Calibri" pitchFamily="34" charset="0"/>
+                <a:ea typeface="Calibri" pitchFamily="34" charset="-122"/>
+                <a:cs typeface="Calibri" pitchFamily="34" charset="-120"/>
+              </a:rPr>
+              <a:t>12</a:t>
+            </a:r>
+            <a:endParaRPr lang="en-US" sz="1000" dirty="0"/>
+          </a:p>
+        </p:txBody>
+      </p:sp>
+    </p:spTree>
+  </p:cSld>
+  <p:clrMapOvr>
+    <a:masterClrMapping/>
+  </p:clrMapOvr>
+</p:sld>
+</file>
+
+<file path=ppt/slides/slide13.xml><?xml version="1.0" encoding="utf-8"?>
+<p:sld xmlns:a="http://schemas.openxmlformats.org/drawingml/2006/main" xmlns:r="http://schemas.openxmlformats.org/officeDocument/2006/relationships" xmlns:p="http://schemas.openxmlformats.org/presentationml/2006/main">
+  <p:cSld name="Slide 13">
+    <p:bg>
+      <p:bgPr>
+        <a:solidFill>
+          <a:srgbClr val="FFFFFF"/>
+        </a:solidFill>
+      </p:bgPr>
+    </p:bg>
+    <p:spTree>
+      <p:nvGrpSpPr>
+        <p:cNvPr id="1" name=""/>
+        <p:cNvGrpSpPr/>
+        <p:nvPr/>
+      </p:nvGrpSpPr>
+      <p:grpSpPr>
+        <a:xfrm>
+          <a:off x="0" y="0"/>
+          <a:ext cx="0" cy="0"/>
+          <a:chOff x="0" y="0"/>
+          <a:chExt cx="0" cy="0"/>
+        </a:xfrm>
+      </p:grpSpPr>
+      <p:pic>
+        <p:nvPicPr>
+          <p:cNvPr id="2" name="Image 0" descr="/home/user/Training-/assets/logo.png">    </p:cNvPr>
+          <p:cNvPicPr>
+            <a:picLocks noChangeAspect="1"/>
+          </p:cNvPicPr>
+          <p:nvPr/>
+        </p:nvPicPr>
+        <p:blipFill>
+          <a:blip r:embed="rId1"/>
+          <a:stretch>
+            <a:fillRect/>
+          </a:stretch>
+        </p:blipFill>
+        <p:spPr>
+          <a:xfrm>
+            <a:off x="10765231" y="332912"/>
+            <a:ext cx="786384" cy="742353"/>
+          </a:xfrm>
+          <a:prstGeom prst="rect">
+            <a:avLst/>
+          </a:prstGeom>
+        </p:spPr>
+      </p:pic>
+      <p:sp>
+        <p:nvSpPr>
+          <p:cNvPr id="3" name="Text 0"/>
+          <p:cNvSpPr/>
+          <p:nvPr/>
+        </p:nvSpPr>
+        <p:spPr>
+          <a:xfrm>
+            <a:off x="640080" y="384048"/>
+            <a:ext cx="8982151" cy="768096"/>
+          </a:xfrm>
+          <a:prstGeom prst="rect">
+            <a:avLst/>
+          </a:prstGeom>
+          <a:noFill/>
+          <a:ln/>
+        </p:spPr>
+        <p:txBody>
+          <a:bodyPr wrap="square" lIns="0" tIns="0" rIns="0" bIns="0" rtlCol="0" anchor="t"/>
+          <a:lstStyle/>
+          <a:p>
+            <a:pPr indent="0" marL="0">
+              <a:lnSpc>
+                <a:spcPct val="94000"/>
+              </a:lnSpc>
+              <a:buNone/>
+            </a:pPr>
+            <a:r>
+              <a:rPr lang="en-US" sz="2300" b="1" dirty="0">
+                <a:solidFill>
+                  <a:srgbClr val="093259"/>
+                </a:solidFill>
+                <a:latin typeface="Yu Gothic" pitchFamily="34" charset="0"/>
+                <a:ea typeface="Yu Gothic" pitchFamily="34" charset="-122"/>
+                <a:cs typeface="Yu Gothic" pitchFamily="34" charset="-120"/>
+              </a:rPr>
+              <a:t>確認テスト　解答と解説　問6〜問10</a:t>
+            </a:r>
+            <a:endParaRPr lang="en-US" sz="2300" dirty="0"/>
+          </a:p>
+          <a:p>
+            <a:pPr indent="0" marL="0">
+              <a:lnSpc>
+                <a:spcPct val="94000"/>
+              </a:lnSpc>
+              <a:buNone/>
+            </a:pPr>
+            <a:r>
+              <a:rPr lang="en-US" sz="1100" i="1" dirty="0">
+                <a:solidFill>
+                  <a:srgbClr val="12B198"/>
+                </a:solidFill>
+                <a:latin typeface="Calibri" pitchFamily="34" charset="0"/>
+                <a:ea typeface="Calibri" pitchFamily="34" charset="-122"/>
+                <a:cs typeface="Calibri" pitchFamily="34" charset="-120"/>
+              </a:rPr>
+              <a:t>Assessment — Answers 6 to 10</a:t>
+            </a:r>
+            <a:endParaRPr lang="en-US" sz="2300" dirty="0"/>
+          </a:p>
+        </p:txBody>
+      </p:sp>
+      <p:sp>
+        <p:nvSpPr>
+          <p:cNvPr id="4" name="Shape 1"/>
+          <p:cNvSpPr/>
+          <p:nvPr/>
+        </p:nvSpPr>
+        <p:spPr>
+          <a:xfrm>
+            <a:off x="9686239" y="438912"/>
+            <a:ext cx="932688" cy="310896"/>
+          </a:xfrm>
+          <a:prstGeom prst="roundRect">
+            <a:avLst>
+              <a:gd name="adj" fmla="val 14706"/>
+            </a:avLst>
+          </a:prstGeom>
+          <a:solidFill>
+            <a:srgbClr val="093259"/>
+          </a:solidFill>
+          <a:ln/>
+        </p:spPr>
+      </p:sp>
+      <p:sp>
+        <p:nvSpPr>
+          <p:cNvPr id="5" name="Text 2"/>
+          <p:cNvSpPr/>
+          <p:nvPr/>
+        </p:nvSpPr>
+        <p:spPr>
+          <a:xfrm>
+            <a:off x="9686239" y="438912"/>
+            <a:ext cx="932688" cy="310896"/>
+          </a:xfrm>
+          <a:prstGeom prst="rect">
+            <a:avLst/>
+          </a:prstGeom>
+          <a:noFill/>
+          <a:ln/>
+        </p:spPr>
+        <p:txBody>
+          <a:bodyPr wrap="square" lIns="0" tIns="0" rIns="0" bIns="0" rtlCol="0" anchor="ctr"/>
+          <a:lstStyle/>
+          <a:p>
+            <a:pPr algn="ctr" indent="0" marL="0">
+              <a:buNone/>
+            </a:pPr>
+            <a:r>
+              <a:rPr lang="en-US" sz="1100" b="1" dirty="0">
+                <a:solidFill>
+                  <a:srgbClr val="FFFFFF"/>
+                </a:solidFill>
+                <a:latin typeface="Calibri" pitchFamily="34" charset="0"/>
+                <a:ea typeface="Calibri" pitchFamily="34" charset="-122"/>
+                <a:cs typeface="Calibri" pitchFamily="34" charset="-120"/>
+              </a:rPr>
+              <a:t>ANSWERS</a:t>
+            </a:r>
+            <a:endParaRPr lang="en-US" sz="1100" dirty="0"/>
+          </a:p>
+        </p:txBody>
+      </p:sp>
+      <p:sp>
+        <p:nvSpPr>
+          <p:cNvPr id="6" name="Shape 3"/>
+          <p:cNvSpPr/>
+          <p:nvPr/>
+        </p:nvSpPr>
+        <p:spPr>
+          <a:xfrm>
+            <a:off x="640080" y="1188720"/>
+            <a:ext cx="10911535" cy="844906"/>
+          </a:xfrm>
+          <a:prstGeom prst="roundRect">
+            <a:avLst>
+              <a:gd name="adj" fmla="val 4329"/>
+            </a:avLst>
+          </a:prstGeom>
+          <a:solidFill>
+            <a:srgbClr val="E4F4F0"/>
+          </a:solidFill>
+          <a:ln/>
+        </p:spPr>
+      </p:sp>
+      <p:sp>
+        <p:nvSpPr>
+          <p:cNvPr id="7" name="Shape 4"/>
+          <p:cNvSpPr/>
+          <p:nvPr/>
+        </p:nvSpPr>
+        <p:spPr>
+          <a:xfrm>
+            <a:off x="841248" y="1437437"/>
+            <a:ext cx="347472" cy="347472"/>
+          </a:xfrm>
+          <a:prstGeom prst="ellipse">
+            <a:avLst/>
+          </a:prstGeom>
+          <a:solidFill>
+            <a:srgbClr val="12B198"/>
+          </a:solidFill>
+          <a:ln/>
+        </p:spPr>
+      </p:sp>
+      <p:sp>
+        <p:nvSpPr>
+          <p:cNvPr id="8" name="Text 5"/>
+          <p:cNvSpPr/>
+          <p:nvPr/>
+        </p:nvSpPr>
+        <p:spPr>
+          <a:xfrm>
+            <a:off x="841248" y="1437437"/>
+            <a:ext cx="347472" cy="347472"/>
+          </a:xfrm>
+          <a:prstGeom prst="rect">
+            <a:avLst/>
+          </a:prstGeom>
+          <a:noFill/>
+          <a:ln/>
+        </p:spPr>
+        <p:txBody>
+          <a:bodyPr wrap="square" lIns="0" tIns="0" rIns="0" bIns="0" rtlCol="0" anchor="ctr"/>
+          <a:lstStyle/>
+          <a:p>
+            <a:pPr algn="ctr" indent="0" marL="0">
+              <a:buNone/>
+            </a:pPr>
+            <a:r>
+              <a:rPr lang="en-US" sz="1100" b="1" dirty="0">
+                <a:solidFill>
+                  <a:srgbClr val="FFFFFF"/>
+                </a:solidFill>
+                <a:latin typeface="Calibri" pitchFamily="34" charset="0"/>
+                <a:ea typeface="Calibri" pitchFamily="34" charset="-122"/>
+                <a:cs typeface="Calibri" pitchFamily="34" charset="-120"/>
+              </a:rPr>
+              <a:t>6</a:t>
+            </a:r>
+            <a:endParaRPr lang="en-US" sz="1100" dirty="0"/>
+          </a:p>
+        </p:txBody>
+      </p:sp>
+      <p:sp>
+        <p:nvSpPr>
+          <p:cNvPr id="9" name="Text 6"/>
+          <p:cNvSpPr/>
+          <p:nvPr/>
+        </p:nvSpPr>
+        <p:spPr>
+          <a:xfrm>
+            <a:off x="1280160" y="1252728"/>
+            <a:ext cx="10033711" cy="716890"/>
+          </a:xfrm>
+          <a:prstGeom prst="rect">
+            <a:avLst/>
+          </a:prstGeom>
+          <a:noFill/>
+          <a:ln/>
+        </p:spPr>
+        <p:txBody>
+          <a:bodyPr wrap="square" lIns="0" tIns="0" rIns="0" bIns="0" rtlCol="0" anchor="ctr"/>
+          <a:lstStyle/>
+          <a:p>
+            <a:pPr indent="0" marL="0">
+              <a:lnSpc>
+                <a:spcPct val="88000"/>
+              </a:lnSpc>
+              <a:buNone/>
+            </a:pPr>
+            <a:r>
+              <a:rPr lang="en-US" sz="900" dirty="0">
+                <a:solidFill>
+                  <a:srgbClr val="5F7183"/>
+                </a:solidFill>
+                <a:latin typeface="Yu Gothic" pitchFamily="34" charset="0"/>
+                <a:ea typeface="Yu Gothic" pitchFamily="34" charset="-122"/>
+                <a:cs typeface="Yu Gothic" pitchFamily="34" charset="-120"/>
+              </a:rPr>
+              <a:t>問6　報告文の問題点と書き直し</a:t>
+            </a:r>
+            <a:endParaRPr lang="en-US" sz="900" dirty="0"/>
+          </a:p>
+          <a:p>
+            <a:pPr indent="0" marL="0">
+              <a:lnSpc>
+                <a:spcPct val="88000"/>
+              </a:lnSpc>
+              <a:buNone/>
+            </a:pPr>
+            <a:r>
+              <a:rPr lang="en-US" sz="1200" b="1" dirty="0">
+                <a:solidFill>
+                  <a:srgbClr val="1B2733"/>
+                </a:solidFill>
+                <a:latin typeface="Yu Gothic" pitchFamily="34" charset="0"/>
+                <a:ea typeface="Yu Gothic" pitchFamily="34" charset="-122"/>
+                <a:cs typeface="Yu Gothic" pitchFamily="34" charset="-120"/>
+              </a:rPr>
+              <a:t>見ていないことを断定している（事実と評価の混同）。「20時15分、非常口が15cmほど開いていた。侵入の可能性があると思われる」。</a:t>
+            </a:r>
+            <a:endParaRPr lang="en-US" sz="900" dirty="0"/>
+          </a:p>
+          <a:p>
+            <a:pPr indent="0" marL="0">
+              <a:lnSpc>
+                <a:spcPct val="88000"/>
+              </a:lnSpc>
+              <a:buNone/>
+            </a:pPr>
+            <a:r>
+              <a:rPr lang="en-US" sz="800" i="1" dirty="0">
+                <a:solidFill>
+                  <a:srgbClr val="5F7183"/>
+                </a:solidFill>
+                <a:latin typeface="Calibri" pitchFamily="34" charset="0"/>
+                <a:ea typeface="Calibri" pitchFamily="34" charset="-122"/>
+                <a:cs typeface="Calibri" pitchFamily="34" charset="-120"/>
+              </a:rPr>
+              <a:t>It asserts what you did not see. Rewrite: "At 20:15 the exit stood about 15 cm open. In my judgement there may have been an intrusion."</a:t>
+            </a:r>
+            <a:endParaRPr lang="en-US" sz="900" dirty="0"/>
+          </a:p>
+        </p:txBody>
+      </p:sp>
+      <p:sp>
+        <p:nvSpPr>
+          <p:cNvPr id="10" name="Shape 7"/>
+          <p:cNvSpPr/>
+          <p:nvPr/>
+        </p:nvSpPr>
+        <p:spPr>
+          <a:xfrm>
+            <a:off x="640080" y="2134210"/>
+            <a:ext cx="10911535" cy="844906"/>
+          </a:xfrm>
+          <a:prstGeom prst="roundRect">
+            <a:avLst>
+              <a:gd name="adj" fmla="val 4329"/>
+            </a:avLst>
+          </a:prstGeom>
+          <a:solidFill>
+            <a:srgbClr val="EFF4F8"/>
+          </a:solidFill>
+          <a:ln/>
+        </p:spPr>
+      </p:sp>
+      <p:sp>
+        <p:nvSpPr>
+          <p:cNvPr id="11" name="Shape 8"/>
+          <p:cNvSpPr/>
+          <p:nvPr/>
+        </p:nvSpPr>
+        <p:spPr>
+          <a:xfrm>
+            <a:off x="841248" y="2382926"/>
+            <a:ext cx="347472" cy="347472"/>
+          </a:xfrm>
+          <a:prstGeom prst="ellipse">
+            <a:avLst/>
+          </a:prstGeom>
+          <a:solidFill>
+            <a:srgbClr val="12B198"/>
+          </a:solidFill>
+          <a:ln/>
+        </p:spPr>
+      </p:sp>
+      <p:sp>
+        <p:nvSpPr>
+          <p:cNvPr id="12" name="Text 9"/>
+          <p:cNvSpPr/>
+          <p:nvPr/>
+        </p:nvSpPr>
+        <p:spPr>
+          <a:xfrm>
+            <a:off x="841248" y="2382926"/>
+            <a:ext cx="347472" cy="347472"/>
+          </a:xfrm>
+          <a:prstGeom prst="rect">
+            <a:avLst/>
+          </a:prstGeom>
+          <a:noFill/>
+          <a:ln/>
+        </p:spPr>
+        <p:txBody>
+          <a:bodyPr wrap="square" lIns="0" tIns="0" rIns="0" bIns="0" rtlCol="0" anchor="ctr"/>
+          <a:lstStyle/>
+          <a:p>
+            <a:pPr algn="ctr" indent="0" marL="0">
+              <a:buNone/>
+            </a:pPr>
+            <a:r>
+              <a:rPr lang="en-US" sz="1100" b="1" dirty="0">
+                <a:solidFill>
+                  <a:srgbClr val="FFFFFF"/>
+                </a:solidFill>
+                <a:latin typeface="Calibri" pitchFamily="34" charset="0"/>
+                <a:ea typeface="Calibri" pitchFamily="34" charset="-122"/>
+                <a:cs typeface="Calibri" pitchFamily="34" charset="-120"/>
+              </a:rPr>
+              <a:t>7</a:t>
+            </a:r>
+            <a:endParaRPr lang="en-US" sz="1100" dirty="0"/>
+          </a:p>
+        </p:txBody>
+      </p:sp>
+      <p:sp>
+        <p:nvSpPr>
+          <p:cNvPr id="13" name="Text 10"/>
+          <p:cNvSpPr/>
+          <p:nvPr/>
+        </p:nvSpPr>
+        <p:spPr>
+          <a:xfrm>
+            <a:off x="1280160" y="2198218"/>
+            <a:ext cx="10033711" cy="716890"/>
+          </a:xfrm>
+          <a:prstGeom prst="rect">
+            <a:avLst/>
+          </a:prstGeom>
+          <a:noFill/>
+          <a:ln/>
+        </p:spPr>
+        <p:txBody>
+          <a:bodyPr wrap="square" lIns="0" tIns="0" rIns="0" bIns="0" rtlCol="0" anchor="ctr"/>
+          <a:lstStyle/>
+          <a:p>
+            <a:pPr indent="0" marL="0">
+              <a:lnSpc>
+                <a:spcPct val="88000"/>
+              </a:lnSpc>
+              <a:buNone/>
+            </a:pPr>
+            <a:r>
+              <a:rPr lang="en-US" sz="900" dirty="0">
+                <a:solidFill>
+                  <a:srgbClr val="5F7183"/>
+                </a:solidFill>
+                <a:latin typeface="Yu Gothic" pitchFamily="34" charset="0"/>
+                <a:ea typeface="Yu Gothic" pitchFamily="34" charset="-122"/>
+                <a:cs typeface="Yu Gothic" pitchFamily="34" charset="-120"/>
+              </a:rPr>
+              <a:t>問7　119番で最初に伝えること</a:t>
+            </a:r>
+            <a:endParaRPr lang="en-US" sz="900" dirty="0"/>
+          </a:p>
+          <a:p>
+            <a:pPr indent="0" marL="0">
+              <a:lnSpc>
+                <a:spcPct val="88000"/>
+              </a:lnSpc>
+              <a:buNone/>
+            </a:pPr>
+            <a:r>
+              <a:rPr lang="en-US" sz="1200" b="1" dirty="0">
+                <a:solidFill>
+                  <a:srgbClr val="1B2733"/>
+                </a:solidFill>
+                <a:latin typeface="Yu Gothic" pitchFamily="34" charset="0"/>
+                <a:ea typeface="Yu Gothic" pitchFamily="34" charset="-122"/>
+                <a:cs typeface="Yu Gothic" pitchFamily="34" charset="-120"/>
+              </a:rPr>
+              <a:t>種別。「火事です」か「救急です」。場所より先に言う。</a:t>
+            </a:r>
+            <a:endParaRPr lang="en-US" sz="900" dirty="0"/>
+          </a:p>
+          <a:p>
+            <a:pPr indent="0" marL="0">
+              <a:lnSpc>
+                <a:spcPct val="88000"/>
+              </a:lnSpc>
+              <a:buNone/>
+            </a:pPr>
+            <a:r>
+              <a:rPr lang="en-US" sz="800" i="1" dirty="0">
+                <a:solidFill>
+                  <a:srgbClr val="5F7183"/>
+                </a:solidFill>
+                <a:latin typeface="Calibri" pitchFamily="34" charset="0"/>
+                <a:ea typeface="Calibri" pitchFamily="34" charset="-122"/>
+                <a:cs typeface="Calibri" pitchFamily="34" charset="-120"/>
+              </a:rPr>
+              <a:t>The type — fire, or ambulance. Before the location.</a:t>
+            </a:r>
+            <a:endParaRPr lang="en-US" sz="900" dirty="0"/>
+          </a:p>
+        </p:txBody>
+      </p:sp>
+      <p:sp>
+        <p:nvSpPr>
+          <p:cNvPr id="14" name="Shape 11"/>
+          <p:cNvSpPr/>
+          <p:nvPr/>
+        </p:nvSpPr>
+        <p:spPr>
+          <a:xfrm>
+            <a:off x="640080" y="3079699"/>
+            <a:ext cx="10911535" cy="844906"/>
+          </a:xfrm>
+          <a:prstGeom prst="roundRect">
+            <a:avLst>
+              <a:gd name="adj" fmla="val 4329"/>
+            </a:avLst>
+          </a:prstGeom>
+          <a:solidFill>
+            <a:srgbClr val="EFF4F8"/>
+          </a:solidFill>
+          <a:ln/>
+        </p:spPr>
+      </p:sp>
+      <p:sp>
+        <p:nvSpPr>
+          <p:cNvPr id="15" name="Shape 12"/>
+          <p:cNvSpPr/>
+          <p:nvPr/>
+        </p:nvSpPr>
+        <p:spPr>
+          <a:xfrm>
+            <a:off x="841248" y="3328416"/>
+            <a:ext cx="347472" cy="347472"/>
+          </a:xfrm>
+          <a:prstGeom prst="ellipse">
+            <a:avLst/>
+          </a:prstGeom>
+          <a:solidFill>
+            <a:srgbClr val="12B198"/>
+          </a:solidFill>
+          <a:ln/>
+        </p:spPr>
+      </p:sp>
+      <p:sp>
+        <p:nvSpPr>
+          <p:cNvPr id="16" name="Text 13"/>
+          <p:cNvSpPr/>
+          <p:nvPr/>
+        </p:nvSpPr>
+        <p:spPr>
+          <a:xfrm>
+            <a:off x="841248" y="3328416"/>
+            <a:ext cx="347472" cy="347472"/>
+          </a:xfrm>
+          <a:prstGeom prst="rect">
+            <a:avLst/>
+          </a:prstGeom>
+          <a:noFill/>
+          <a:ln/>
+        </p:spPr>
+        <p:txBody>
+          <a:bodyPr wrap="square" lIns="0" tIns="0" rIns="0" bIns="0" rtlCol="0" anchor="ctr"/>
+          <a:lstStyle/>
+          <a:p>
+            <a:pPr algn="ctr" indent="0" marL="0">
+              <a:buNone/>
+            </a:pPr>
+            <a:r>
+              <a:rPr lang="en-US" sz="1100" b="1" dirty="0">
+                <a:solidFill>
+                  <a:srgbClr val="FFFFFF"/>
+                </a:solidFill>
+                <a:latin typeface="Calibri" pitchFamily="34" charset="0"/>
+                <a:ea typeface="Calibri" pitchFamily="34" charset="-122"/>
+                <a:cs typeface="Calibri" pitchFamily="34" charset="-120"/>
+              </a:rPr>
+              <a:t>8</a:t>
+            </a:r>
+            <a:endParaRPr lang="en-US" sz="1100" dirty="0"/>
+          </a:p>
+        </p:txBody>
+      </p:sp>
+      <p:sp>
+        <p:nvSpPr>
+          <p:cNvPr id="17" name="Text 14"/>
+          <p:cNvSpPr/>
+          <p:nvPr/>
+        </p:nvSpPr>
+        <p:spPr>
+          <a:xfrm>
+            <a:off x="1280160" y="3143707"/>
+            <a:ext cx="10033711" cy="716890"/>
+          </a:xfrm>
+          <a:prstGeom prst="rect">
+            <a:avLst/>
+          </a:prstGeom>
+          <a:noFill/>
+          <a:ln/>
+        </p:spPr>
+        <p:txBody>
+          <a:bodyPr wrap="square" lIns="0" tIns="0" rIns="0" bIns="0" rtlCol="0" anchor="ctr"/>
+          <a:lstStyle/>
+          <a:p>
+            <a:pPr indent="0" marL="0">
+              <a:lnSpc>
+                <a:spcPct val="88000"/>
+              </a:lnSpc>
+              <a:buNone/>
+            </a:pPr>
+            <a:r>
+              <a:rPr lang="en-US" sz="900" dirty="0">
+                <a:solidFill>
+                  <a:srgbClr val="5F7183"/>
+                </a:solidFill>
+                <a:latin typeface="Yu Gothic" pitchFamily="34" charset="0"/>
+                <a:ea typeface="Yu Gothic" pitchFamily="34" charset="-122"/>
+                <a:cs typeface="Yu Gothic" pitchFamily="34" charset="-120"/>
+              </a:rPr>
+              <a:t>問8　現場を変えてよい理由</a:t>
+            </a:r>
+            <a:endParaRPr lang="en-US" sz="900" dirty="0"/>
+          </a:p>
+          <a:p>
+            <a:pPr indent="0" marL="0">
+              <a:lnSpc>
+                <a:spcPct val="88000"/>
+              </a:lnSpc>
+              <a:buNone/>
+            </a:pPr>
+            <a:r>
+              <a:rPr lang="en-US" sz="1200" b="1" dirty="0">
+                <a:solidFill>
+                  <a:srgbClr val="1B2733"/>
+                </a:solidFill>
+                <a:latin typeface="Yu Gothic" pitchFamily="34" charset="0"/>
+                <a:ea typeface="Yu Gothic" pitchFamily="34" charset="-122"/>
+                <a:cs typeface="Yu Gothic" pitchFamily="34" charset="-120"/>
+              </a:rPr>
+              <a:t>人命（救助・救護）のため。それ以外では動かさない。動かした場合は何を・どこから・どこへ・誰が・何時にを記録。</a:t>
+            </a:r>
+            <a:endParaRPr lang="en-US" sz="900" dirty="0"/>
+          </a:p>
+          <a:p>
+            <a:pPr indent="0" marL="0">
+              <a:lnSpc>
+                <a:spcPct val="88000"/>
+              </a:lnSpc>
+              <a:buNone/>
+            </a:pPr>
+            <a:r>
+              <a:rPr lang="en-US" sz="800" i="1" dirty="0">
+                <a:solidFill>
+                  <a:srgbClr val="5F7183"/>
+                </a:solidFill>
+                <a:latin typeface="Calibri" pitchFamily="34" charset="0"/>
+                <a:ea typeface="Calibri" pitchFamily="34" charset="-122"/>
+                <a:cs typeface="Calibri" pitchFamily="34" charset="-120"/>
+              </a:rPr>
+              <a:t>To save life. Otherwise change nothing; if you did, record what, from where, to where, by whom and when.</a:t>
+            </a:r>
+            <a:endParaRPr lang="en-US" sz="900" dirty="0"/>
+          </a:p>
+        </p:txBody>
+      </p:sp>
+      <p:sp>
+        <p:nvSpPr>
+          <p:cNvPr id="18" name="Shape 15"/>
+          <p:cNvSpPr/>
+          <p:nvPr/>
+        </p:nvSpPr>
+        <p:spPr>
+          <a:xfrm>
+            <a:off x="640080" y="4025189"/>
+            <a:ext cx="10911535" cy="844906"/>
+          </a:xfrm>
+          <a:prstGeom prst="roundRect">
+            <a:avLst>
+              <a:gd name="adj" fmla="val 4329"/>
+            </a:avLst>
+          </a:prstGeom>
+          <a:solidFill>
+            <a:srgbClr val="E4F4F0"/>
+          </a:solidFill>
+          <a:ln/>
+        </p:spPr>
+      </p:sp>
+      <p:sp>
+        <p:nvSpPr>
+          <p:cNvPr id="19" name="Shape 16"/>
+          <p:cNvSpPr/>
+          <p:nvPr/>
+        </p:nvSpPr>
+        <p:spPr>
+          <a:xfrm>
+            <a:off x="841248" y="4273906"/>
+            <a:ext cx="347472" cy="347472"/>
+          </a:xfrm>
+          <a:prstGeom prst="ellipse">
+            <a:avLst/>
+          </a:prstGeom>
+          <a:solidFill>
+            <a:srgbClr val="12B198"/>
+          </a:solidFill>
+          <a:ln/>
+        </p:spPr>
+      </p:sp>
+      <p:sp>
+        <p:nvSpPr>
+          <p:cNvPr id="20" name="Text 17"/>
+          <p:cNvSpPr/>
+          <p:nvPr/>
+        </p:nvSpPr>
+        <p:spPr>
+          <a:xfrm>
+            <a:off x="841248" y="4273906"/>
+            <a:ext cx="347472" cy="347472"/>
+          </a:xfrm>
+          <a:prstGeom prst="rect">
+            <a:avLst/>
+          </a:prstGeom>
+          <a:noFill/>
+          <a:ln/>
+        </p:spPr>
+        <p:txBody>
+          <a:bodyPr wrap="square" lIns="0" tIns="0" rIns="0" bIns="0" rtlCol="0" anchor="ctr"/>
+          <a:lstStyle/>
+          <a:p>
+            <a:pPr algn="ctr" indent="0" marL="0">
+              <a:buNone/>
+            </a:pPr>
+            <a:r>
+              <a:rPr lang="en-US" sz="1100" b="1" dirty="0">
+                <a:solidFill>
+                  <a:srgbClr val="FFFFFF"/>
+                </a:solidFill>
+                <a:latin typeface="Calibri" pitchFamily="34" charset="0"/>
+                <a:ea typeface="Calibri" pitchFamily="34" charset="-122"/>
+                <a:cs typeface="Calibri" pitchFamily="34" charset="-120"/>
+              </a:rPr>
+              <a:t>9</a:t>
+            </a:r>
+            <a:endParaRPr lang="en-US" sz="1100" dirty="0"/>
+          </a:p>
+        </p:txBody>
+      </p:sp>
+      <p:sp>
+        <p:nvSpPr>
+          <p:cNvPr id="21" name="Text 18"/>
+          <p:cNvSpPr/>
+          <p:nvPr/>
+        </p:nvSpPr>
+        <p:spPr>
+          <a:xfrm>
+            <a:off x="1280160" y="4089197"/>
+            <a:ext cx="10033711" cy="716890"/>
+          </a:xfrm>
+          <a:prstGeom prst="rect">
+            <a:avLst/>
+          </a:prstGeom>
+          <a:noFill/>
+          <a:ln/>
+        </p:spPr>
+        <p:txBody>
+          <a:bodyPr wrap="square" lIns="0" tIns="0" rIns="0" bIns="0" rtlCol="0" anchor="ctr"/>
+          <a:lstStyle/>
+          <a:p>
+            <a:pPr indent="0" marL="0">
+              <a:lnSpc>
+                <a:spcPct val="88000"/>
+              </a:lnSpc>
+              <a:buNone/>
+            </a:pPr>
+            <a:r>
+              <a:rPr lang="en-US" sz="900" dirty="0">
+                <a:solidFill>
+                  <a:srgbClr val="5F7183"/>
+                </a:solidFill>
+                <a:latin typeface="Yu Gothic" pitchFamily="34" charset="0"/>
+                <a:ea typeface="Yu Gothic" pitchFamily="34" charset="-122"/>
+                <a:cs typeface="Yu Gothic" pitchFamily="34" charset="-120"/>
+              </a:rPr>
+              <a:t>問9　受信機の発報時</a:t>
+            </a:r>
+            <a:endParaRPr lang="en-US" sz="900" dirty="0"/>
+          </a:p>
+          <a:p>
+            <a:pPr indent="0" marL="0">
+              <a:lnSpc>
+                <a:spcPct val="88000"/>
+              </a:lnSpc>
+              <a:buNone/>
+            </a:pPr>
+            <a:r>
+              <a:rPr lang="en-US" sz="1200" b="1" dirty="0">
+                <a:solidFill>
+                  <a:srgbClr val="1B2733"/>
+                </a:solidFill>
+                <a:latin typeface="Yu Gothic" pitchFamily="34" charset="0"/>
+                <a:ea typeface="Yu Gothic" pitchFamily="34" charset="-122"/>
+                <a:cs typeface="Yu Gothic" pitchFamily="34" charset="-120"/>
+              </a:rPr>
+              <a:t>地区表示（どこが鳴っているか）。「火事です」とは言わない。発報は火災の確定ではない。</a:t>
+            </a:r>
+            <a:endParaRPr lang="en-US" sz="900" dirty="0"/>
+          </a:p>
+          <a:p>
+            <a:pPr indent="0" marL="0">
+              <a:lnSpc>
+                <a:spcPct val="88000"/>
+              </a:lnSpc>
+              <a:buNone/>
+            </a:pPr>
+            <a:r>
+              <a:rPr lang="en-US" sz="800" i="1" dirty="0">
+                <a:solidFill>
+                  <a:srgbClr val="5F7183"/>
+                </a:solidFill>
+                <a:latin typeface="Calibri" pitchFamily="34" charset="0"/>
+                <a:ea typeface="Calibri" pitchFamily="34" charset="-122"/>
+                <a:cs typeface="Calibri" pitchFamily="34" charset="-120"/>
+              </a:rPr>
+              <a:t>The zone display. Do not say "fire" — an activation is not a confirmed fire.</a:t>
+            </a:r>
+            <a:endParaRPr lang="en-US" sz="900" dirty="0"/>
+          </a:p>
+        </p:txBody>
+      </p:sp>
+      <p:sp>
+        <p:nvSpPr>
+          <p:cNvPr id="22" name="Shape 19"/>
+          <p:cNvSpPr/>
+          <p:nvPr/>
+        </p:nvSpPr>
+        <p:spPr>
+          <a:xfrm>
+            <a:off x="640080" y="4970678"/>
+            <a:ext cx="10911535" cy="844906"/>
+          </a:xfrm>
+          <a:prstGeom prst="roundRect">
+            <a:avLst>
+              <a:gd name="adj" fmla="val 4329"/>
+            </a:avLst>
+          </a:prstGeom>
+          <a:solidFill>
+            <a:srgbClr val="EFF4F8"/>
+          </a:solidFill>
+          <a:ln/>
+        </p:spPr>
+      </p:sp>
+      <p:sp>
+        <p:nvSpPr>
+          <p:cNvPr id="23" name="Shape 20"/>
+          <p:cNvSpPr/>
+          <p:nvPr/>
+        </p:nvSpPr>
+        <p:spPr>
+          <a:xfrm>
+            <a:off x="841248" y="5219395"/>
+            <a:ext cx="347472" cy="347472"/>
+          </a:xfrm>
+          <a:prstGeom prst="ellipse">
+            <a:avLst/>
+          </a:prstGeom>
+          <a:solidFill>
+            <a:srgbClr val="12B198"/>
+          </a:solidFill>
+          <a:ln/>
+        </p:spPr>
+      </p:sp>
+      <p:sp>
+        <p:nvSpPr>
+          <p:cNvPr id="24" name="Text 21"/>
+          <p:cNvSpPr/>
+          <p:nvPr/>
+        </p:nvSpPr>
+        <p:spPr>
+          <a:xfrm>
+            <a:off x="841248" y="5219395"/>
+            <a:ext cx="347472" cy="347472"/>
+          </a:xfrm>
+          <a:prstGeom prst="rect">
+            <a:avLst/>
+          </a:prstGeom>
+          <a:noFill/>
+          <a:ln/>
+        </p:spPr>
+        <p:txBody>
+          <a:bodyPr wrap="square" lIns="0" tIns="0" rIns="0" bIns="0" rtlCol="0" anchor="ctr"/>
+          <a:lstStyle/>
+          <a:p>
+            <a:pPr algn="ctr" indent="0" marL="0">
+              <a:buNone/>
+            </a:pPr>
+            <a:r>
+              <a:rPr lang="en-US" sz="1100" b="1" dirty="0">
+                <a:solidFill>
+                  <a:srgbClr val="FFFFFF"/>
+                </a:solidFill>
+                <a:latin typeface="Calibri" pitchFamily="34" charset="0"/>
+                <a:ea typeface="Calibri" pitchFamily="34" charset="-122"/>
+                <a:cs typeface="Calibri" pitchFamily="34" charset="-120"/>
+              </a:rPr>
+              <a:t>10</a:t>
+            </a:r>
+            <a:endParaRPr lang="en-US" sz="1100" dirty="0"/>
+          </a:p>
+        </p:txBody>
+      </p:sp>
+      <p:sp>
+        <p:nvSpPr>
+          <p:cNvPr id="25" name="Text 22"/>
+          <p:cNvSpPr/>
+          <p:nvPr/>
+        </p:nvSpPr>
+        <p:spPr>
+          <a:xfrm>
+            <a:off x="1280160" y="5034686"/>
+            <a:ext cx="10033711" cy="716890"/>
+          </a:xfrm>
+          <a:prstGeom prst="rect">
+            <a:avLst/>
+          </a:prstGeom>
+          <a:noFill/>
+          <a:ln/>
+        </p:spPr>
+        <p:txBody>
+          <a:bodyPr wrap="square" lIns="0" tIns="0" rIns="0" bIns="0" rtlCol="0" anchor="ctr"/>
+          <a:lstStyle/>
+          <a:p>
+            <a:pPr indent="0" marL="0">
+              <a:lnSpc>
+                <a:spcPct val="88000"/>
+              </a:lnSpc>
+              <a:buNone/>
+            </a:pPr>
+            <a:r>
+              <a:rPr lang="en-US" sz="900" dirty="0">
+                <a:solidFill>
+                  <a:srgbClr val="5F7183"/>
+                </a:solidFill>
+                <a:latin typeface="Yu Gothic" pitchFamily="34" charset="0"/>
+                <a:ea typeface="Yu Gothic" pitchFamily="34" charset="-122"/>
+                <a:cs typeface="Yu Gothic" pitchFamily="34" charset="-120"/>
+              </a:rPr>
+              <a:t>問10　保全と開示の違い</a:t>
+            </a:r>
+            <a:endParaRPr lang="en-US" sz="900" dirty="0"/>
+          </a:p>
+          <a:p>
+            <a:pPr indent="0" marL="0">
+              <a:lnSpc>
+                <a:spcPct val="88000"/>
+              </a:lnSpc>
+              <a:buNone/>
+            </a:pPr>
+            <a:r>
+              <a:rPr lang="en-US" sz="1200" b="1" dirty="0">
+                <a:solidFill>
+                  <a:srgbClr val="1B2733"/>
+                </a:solidFill>
+                <a:latin typeface="Yu Gothic" pitchFamily="34" charset="0"/>
+                <a:ea typeface="Yu Gothic" pitchFamily="34" charset="-122"/>
+                <a:cs typeface="Yu Gothic" pitchFamily="34" charset="-120"/>
+              </a:rPr>
+              <a:t>保全＝上書きを防いで残す。開示＝内容を渡す。警備員が受けられるのは保全のみ。</a:t>
+            </a:r>
+            <a:endParaRPr lang="en-US" sz="900" dirty="0"/>
+          </a:p>
+          <a:p>
+            <a:pPr indent="0" marL="0">
+              <a:lnSpc>
+                <a:spcPct val="88000"/>
+              </a:lnSpc>
+              <a:buNone/>
+            </a:pPr>
+            <a:r>
+              <a:rPr lang="en-US" sz="800" i="1" dirty="0">
+                <a:solidFill>
+                  <a:srgbClr val="5F7183"/>
+                </a:solidFill>
+                <a:latin typeface="Calibri" pitchFamily="34" charset="0"/>
+                <a:ea typeface="Calibri" pitchFamily="34" charset="-122"/>
+                <a:cs typeface="Calibri" pitchFamily="34" charset="-120"/>
+              </a:rPr>
+              <a:t>Preserving keeps it from being overwritten. Disclosing hands over the content. Only preservation is yours to accept.</a:t>
+            </a:r>
+            <a:endParaRPr lang="en-US" sz="900" dirty="0"/>
+          </a:p>
+        </p:txBody>
+      </p:sp>
+      <p:sp>
+        <p:nvSpPr>
+          <p:cNvPr id="26" name="Text 23"/>
+          <p:cNvSpPr/>
+          <p:nvPr/>
+        </p:nvSpPr>
+        <p:spPr>
+          <a:xfrm>
+            <a:off x="640080" y="5907024"/>
+            <a:ext cx="10911535" cy="310896"/>
+          </a:xfrm>
+          <a:prstGeom prst="rect">
+            <a:avLst/>
+          </a:prstGeom>
+          <a:noFill/>
+          <a:ln/>
+        </p:spPr>
+        <p:txBody>
+          <a:bodyPr wrap="square" lIns="0" tIns="0" rIns="0" bIns="0" rtlCol="0" anchor="t"/>
+          <a:lstStyle/>
+          <a:p>
+            <a:pPr indent="0" marL="0">
+              <a:lnSpc>
+                <a:spcPct val="88000"/>
+              </a:lnSpc>
+              <a:buNone/>
+            </a:pPr>
+            <a:r>
+              <a:rPr lang="en-US" sz="900" b="1" dirty="0">
+                <a:solidFill>
+                  <a:srgbClr val="0D8A76"/>
+                </a:solidFill>
+                <a:latin typeface="Yu Gothic" pitchFamily="34" charset="0"/>
+                <a:ea typeface="Yu Gothic" pitchFamily="34" charset="-122"/>
+                <a:cs typeface="Yu Gothic" pitchFamily="34" charset="-120"/>
+              </a:rPr>
+              <a:t>採点の目安　</a:t>
+            </a:r>
+            <a:pPr indent="0" marL="0">
+              <a:lnSpc>
+                <a:spcPct val="88000"/>
+              </a:lnSpc>
+              <a:buNone/>
+            </a:pPr>
+            <a:r>
+              <a:rPr lang="en-US" sz="900" dirty="0">
+                <a:solidFill>
+                  <a:srgbClr val="1B2733"/>
+                </a:solidFill>
+                <a:latin typeface="Yu Gothic" pitchFamily="34" charset="0"/>
+                <a:ea typeface="Yu Gothic" pitchFamily="34" charset="-122"/>
+                <a:cs typeface="Yu Gothic" pitchFamily="34" charset="-120"/>
+              </a:rPr>
+              <a:t>問6と問9は重点問題です。落とした受講者には個別に確認してください。</a:t>
+            </a:r>
+            <a:endParaRPr lang="en-US" sz="900" dirty="0"/>
+          </a:p>
+          <a:p>
+            <a:pPr indent="0" marL="0">
+              <a:lnSpc>
+                <a:spcPct val="88000"/>
+              </a:lnSpc>
+              <a:buNone/>
+            </a:pPr>
+            <a:r>
+              <a:rPr lang="en-US" sz="750" i="1" dirty="0">
+                <a:solidFill>
+                  <a:srgbClr val="5F7183"/>
+                </a:solidFill>
+                <a:latin typeface="Calibri" pitchFamily="34" charset="0"/>
+                <a:ea typeface="Calibri" pitchFamily="34" charset="-122"/>
+                <a:cs typeface="Calibri" pitchFamily="34" charset="-120"/>
+              </a:rPr>
+              <a:t>Questions 6 and 9 are the key items. Follow up individually with anyone who missed them.</a:t>
+            </a:r>
+            <a:endParaRPr lang="en-US" sz="900" dirty="0"/>
+          </a:p>
+        </p:txBody>
+      </p:sp>
+      <p:sp>
+        <p:nvSpPr>
+          <p:cNvPr id="27" name="Text 24"/>
+          <p:cNvSpPr/>
+          <p:nvPr/>
+        </p:nvSpPr>
+        <p:spPr>
+          <a:xfrm>
+            <a:off x="640080" y="6272784"/>
+            <a:ext cx="9905695" cy="237744"/>
+          </a:xfrm>
+          <a:prstGeom prst="rect">
+            <a:avLst/>
+          </a:prstGeom>
+          <a:noFill/>
+          <a:ln/>
+        </p:spPr>
+        <p:txBody>
+          <a:bodyPr wrap="square" lIns="0" tIns="0" rIns="0" bIns="0" rtlCol="0" anchor="t"/>
+          <a:lstStyle/>
+          <a:p>
+            <a:pPr indent="0" marL="0">
+              <a:buNone/>
+            </a:pPr>
+            <a:r>
+              <a:rPr lang="en-US" sz="750" b="1" dirty="0">
+                <a:solidFill>
+                  <a:srgbClr val="D6E0E9"/>
+                </a:solidFill>
+                <a:latin typeface="Yu Gothic" pitchFamily="34" charset="0"/>
+                <a:ea typeface="Yu Gothic" pitchFamily="34" charset="-122"/>
+                <a:cs typeface="Yu Gothic" pitchFamily="34" charset="-120"/>
+              </a:rPr>
+              <a:t>ソース　</a:t>
+            </a:r>
+            <a:pPr indent="0" marL="0">
+              <a:buNone/>
+            </a:pPr>
+            <a:r>
+              <a:rPr lang="en-US" sz="750" dirty="0">
+                <a:solidFill>
+                  <a:srgbClr val="5F7183"/>
+                </a:solidFill>
+                <a:latin typeface="Yu Gothic" pitchFamily="34" charset="0"/>
+                <a:ea typeface="Yu Gothic" pitchFamily="34" charset="-122"/>
+                <a:cs typeface="Yu Gothic" pitchFamily="34" charset="-120"/>
+              </a:rPr>
+              <a:t>消防法、個人情報保護法、警察庁「警備員教育」</a:t>
+            </a:r>
+            <a:endParaRPr lang="en-US" sz="750" dirty="0"/>
+          </a:p>
+        </p:txBody>
+      </p:sp>
+      <p:sp>
+        <p:nvSpPr>
+          <p:cNvPr id="28" name="Text 25"/>
+          <p:cNvSpPr/>
+          <p:nvPr/>
+        </p:nvSpPr>
+        <p:spPr>
+          <a:xfrm>
+            <a:off x="640080" y="6382512"/>
+            <a:ext cx="8778240" cy="292608"/>
+          </a:xfrm>
+          <a:prstGeom prst="rect">
+            <a:avLst/>
+          </a:prstGeom>
+          <a:noFill/>
+          <a:ln/>
+        </p:spPr>
+        <p:txBody>
+          <a:bodyPr wrap="square" lIns="0" tIns="0" rIns="0" bIns="0" rtlCol="0" anchor="ctr"/>
+          <a:lstStyle/>
+          <a:p>
+            <a:pPr indent="0" marL="0">
+              <a:buNone/>
+            </a:pPr>
+            <a:r>
+              <a:rPr lang="en-US" sz="900" dirty="0">
+                <a:solidFill>
+                  <a:srgbClr val="5F7183"/>
+                </a:solidFill>
+                <a:latin typeface="Yu Gothic" pitchFamily="34" charset="0"/>
+                <a:ea typeface="Yu Gothic" pitchFamily="34" charset="-122"/>
+                <a:cs typeface="Yu Gothic" pitchFamily="34" charset="-120"/>
+              </a:rPr>
+              <a:t>第10時限｜業務別教育6 警報装置その他当該警備業務を実施するために使用する機器の使用方法  </a:t>
+            </a:r>
+            <a:pPr indent="0" marL="0">
+              <a:buNone/>
+            </a:pPr>
+            <a:r>
+              <a:rPr lang="en-US" sz="850" i="1" dirty="0">
+                <a:solidFill>
+                  <a:srgbClr val="D6E0E9"/>
+                </a:solidFill>
+                <a:latin typeface="Calibri" pitchFamily="34" charset="0"/>
+                <a:ea typeface="Calibri" pitchFamily="34" charset="-122"/>
+                <a:cs typeface="Calibri" pitchFamily="34" charset="-120"/>
+              </a:rPr>
+              <a:t>Period 10 | Task-Specific Training 6 — Security Equipment</a:t>
+            </a:r>
+            <a:endParaRPr lang="en-US" sz="900" dirty="0"/>
+          </a:p>
+        </p:txBody>
+      </p:sp>
+      <p:sp>
+        <p:nvSpPr>
+          <p:cNvPr id="29" name="Text 26"/>
+          <p:cNvSpPr/>
+          <p:nvPr/>
+        </p:nvSpPr>
+        <p:spPr>
+          <a:xfrm>
+            <a:off x="10637215" y="6382512"/>
+            <a:ext cx="914400" cy="292608"/>
+          </a:xfrm>
+          <a:prstGeom prst="rect">
+            <a:avLst/>
+          </a:prstGeom>
+          <a:noFill/>
+          <a:ln/>
+        </p:spPr>
+        <p:txBody>
+          <a:bodyPr wrap="square" lIns="0" tIns="0" rIns="0" bIns="0" rtlCol="0" anchor="ctr"/>
+          <a:lstStyle/>
+          <a:p>
+            <a:pPr algn="r" indent="0" marL="0">
+              <a:buNone/>
+            </a:pPr>
+            <a:r>
+              <a:rPr lang="en-US" sz="1000" dirty="0">
+                <a:solidFill>
+                  <a:srgbClr val="5F7183"/>
+                </a:solidFill>
+                <a:latin typeface="Calibri" pitchFamily="34" charset="0"/>
+                <a:ea typeface="Calibri" pitchFamily="34" charset="-122"/>
+                <a:cs typeface="Calibri" pitchFamily="34" charset="-120"/>
+              </a:rPr>
+              <a:t>13</a:t>
+            </a:r>
+            <a:endParaRPr lang="en-US" sz="1000" dirty="0"/>
+          </a:p>
+        </p:txBody>
+      </p:sp>
+    </p:spTree>
+  </p:cSld>
+  <p:clrMapOvr>
+    <a:masterClrMapping/>
+  </p:clrMapOvr>
+</p:sld>
+</file>
+
+<file path=ppt/slides/slide14.xml><?xml version="1.0" encoding="utf-8"?>
+<p:sld xmlns:a="http://schemas.openxmlformats.org/drawingml/2006/main" xmlns:r="http://schemas.openxmlformats.org/officeDocument/2006/relationships" xmlns:p="http://schemas.openxmlformats.org/presentationml/2006/main">
+  <p:cSld name="Slide 14">
+    <p:bg>
+      <p:bgPr>
+        <a:solidFill>
+          <a:srgbClr val="FFFFFF"/>
+        </a:solidFill>
+      </p:bgPr>
+    </p:bg>
+    <p:spTree>
+      <p:nvGrpSpPr>
+        <p:cNvPr id="1" name=""/>
+        <p:cNvGrpSpPr/>
+        <p:nvPr/>
+      </p:nvGrpSpPr>
+      <p:grpSpPr>
+        <a:xfrm>
+          <a:off x="0" y="0"/>
+          <a:ext cx="0" cy="0"/>
+          <a:chOff x="0" y="0"/>
+          <a:chExt cx="0" cy="0"/>
+        </a:xfrm>
+      </p:grpSpPr>
+      <p:pic>
+        <p:nvPicPr>
+          <p:cNvPr id="2" name="Image 0" descr="/home/user/Training-/assets/logo.png">    </p:cNvPr>
+          <p:cNvPicPr>
+            <a:picLocks noChangeAspect="1"/>
+          </p:cNvPicPr>
+          <p:nvPr/>
+        </p:nvPicPr>
+        <p:blipFill>
+          <a:blip r:embed="rId1"/>
+          <a:stretch>
+            <a:fillRect/>
+          </a:stretch>
+        </p:blipFill>
+        <p:spPr>
+          <a:xfrm>
+            <a:off x="10765231" y="332912"/>
+            <a:ext cx="786384" cy="742353"/>
+          </a:xfrm>
+          <a:prstGeom prst="rect">
+            <a:avLst/>
+          </a:prstGeom>
+        </p:spPr>
+      </p:pic>
+      <p:sp>
+        <p:nvSpPr>
+          <p:cNvPr id="3" name="Text 0"/>
+          <p:cNvSpPr/>
+          <p:nvPr/>
+        </p:nvSpPr>
+        <p:spPr>
+          <a:xfrm>
+            <a:off x="640080" y="475488"/>
+            <a:ext cx="9805111" cy="960120"/>
+          </a:xfrm>
+          <a:prstGeom prst="rect">
+            <a:avLst/>
+          </a:prstGeom>
+          <a:noFill/>
+          <a:ln/>
+        </p:spPr>
+        <p:txBody>
+          <a:bodyPr wrap="square" lIns="0" tIns="0" rIns="0" bIns="0" rtlCol="0" anchor="t"/>
+          <a:lstStyle/>
+          <a:p>
+            <a:pPr indent="0" marL="0">
+              <a:lnSpc>
+                <a:spcPct val="94000"/>
+              </a:lnSpc>
+              <a:buNone/>
+            </a:pPr>
+            <a:r>
+              <a:rPr lang="en-US" sz="2700" b="1" dirty="0">
+                <a:solidFill>
+                  <a:srgbClr val="093259"/>
+                </a:solidFill>
+                <a:latin typeface="Yu Gothic" pitchFamily="34" charset="0"/>
+                <a:ea typeface="Yu Gothic" pitchFamily="34" charset="-122"/>
+                <a:cs typeface="Yu Gothic" pitchFamily="34" charset="-120"/>
+              </a:rPr>
+              <a:t>AAR ― 振り返り（After Action Review）</a:t>
+            </a:r>
+            <a:endParaRPr lang="en-US" sz="2700" dirty="0"/>
+          </a:p>
+          <a:p>
+            <a:pPr indent="0" marL="0">
+              <a:lnSpc>
+                <a:spcPct val="94000"/>
+              </a:lnSpc>
+              <a:buNone/>
+            </a:pPr>
+            <a:r>
+              <a:rPr lang="en-US" sz="1250" i="1" dirty="0">
+                <a:solidFill>
+                  <a:srgbClr val="12B198"/>
+                </a:solidFill>
+                <a:latin typeface="Calibri" pitchFamily="34" charset="0"/>
+                <a:ea typeface="Calibri" pitchFamily="34" charset="-122"/>
+                <a:cs typeface="Calibri" pitchFamily="34" charset="-120"/>
+              </a:rPr>
+              <a:t>AAR — After Action Review</a:t>
+            </a:r>
+            <a:endParaRPr lang="en-US" sz="2700" dirty="0"/>
+          </a:p>
+        </p:txBody>
+      </p:sp>
+      <p:sp>
+        <p:nvSpPr>
+          <p:cNvPr id="4" name="Text 1"/>
+          <p:cNvSpPr/>
+          <p:nvPr/>
+        </p:nvSpPr>
+        <p:spPr>
+          <a:xfrm>
+            <a:off x="640080" y="1536192"/>
+            <a:ext cx="10911535" cy="566928"/>
+          </a:xfrm>
+          <a:prstGeom prst="rect">
+            <a:avLst/>
+          </a:prstGeom>
+          <a:noFill/>
+          <a:ln/>
+        </p:spPr>
+        <p:txBody>
+          <a:bodyPr wrap="square" lIns="0" tIns="0" rIns="0" bIns="0" rtlCol="0" anchor="t"/>
+          <a:lstStyle/>
+          <a:p>
+            <a:pPr algn="l" indent="0" marL="0">
+              <a:lnSpc>
+                <a:spcPct val="92000"/>
+              </a:lnSpc>
+              <a:buNone/>
+            </a:pPr>
+            <a:r>
+              <a:rPr lang="en-US" sz="1300" dirty="0">
+                <a:solidFill>
+                  <a:srgbClr val="093259"/>
+                </a:solidFill>
+                <a:latin typeface="Yu Gothic" pitchFamily="34" charset="0"/>
+                <a:ea typeface="Yu Gothic" pitchFamily="34" charset="-122"/>
+                <a:cs typeface="Yu Gothic" pitchFamily="34" charset="-120"/>
+              </a:rPr>
+              <a:t>AAR は事案や訓練の直後に行う振り返りです。原則は、犯人探しをしないことです。</a:t>
+            </a:r>
+            <a:endParaRPr lang="en-US" sz="1300" dirty="0"/>
+          </a:p>
+          <a:p>
+            <a:pPr algn="l" indent="0" marL="0">
+              <a:lnSpc>
+                <a:spcPct val="92000"/>
+              </a:lnSpc>
+              <a:buNone/>
+            </a:pPr>
+            <a:r>
+              <a:rPr lang="en-US" sz="1000" i="1" dirty="0">
+                <a:solidFill>
+                  <a:srgbClr val="5F7183"/>
+                </a:solidFill>
+                <a:latin typeface="Calibri" pitchFamily="34" charset="0"/>
+                <a:ea typeface="Calibri" pitchFamily="34" charset="-122"/>
+                <a:cs typeface="Calibri" pitchFamily="34" charset="-120"/>
+              </a:rPr>
+              <a:t>An AAR is a review held immediately after an incident or exercise. The rule is: no blame.</a:t>
+            </a:r>
+            <a:endParaRPr lang="en-US" sz="1300" dirty="0"/>
+          </a:p>
+        </p:txBody>
+      </p:sp>
+      <p:sp>
+        <p:nvSpPr>
+          <p:cNvPr id="5" name="Shape 2"/>
+          <p:cNvSpPr/>
+          <p:nvPr/>
+        </p:nvSpPr>
+        <p:spPr>
+          <a:xfrm>
+            <a:off x="640080" y="2286000"/>
+            <a:ext cx="10911535" cy="702259"/>
+          </a:xfrm>
+          <a:prstGeom prst="roundRect">
+            <a:avLst>
+              <a:gd name="adj" fmla="val 6510"/>
+            </a:avLst>
+          </a:prstGeom>
+          <a:solidFill>
+            <a:srgbClr val="EFF4F8"/>
+          </a:solidFill>
+          <a:ln/>
+        </p:spPr>
+      </p:sp>
+      <p:sp>
+        <p:nvSpPr>
+          <p:cNvPr id="6" name="Shape 3"/>
+          <p:cNvSpPr/>
+          <p:nvPr/>
+        </p:nvSpPr>
+        <p:spPr>
+          <a:xfrm>
+            <a:off x="896112" y="2445106"/>
+            <a:ext cx="384048" cy="384048"/>
+          </a:xfrm>
+          <a:prstGeom prst="ellipse">
+            <a:avLst/>
+          </a:prstGeom>
+          <a:solidFill>
+            <a:srgbClr val="12B198"/>
+          </a:solidFill>
+          <a:ln/>
+        </p:spPr>
+      </p:sp>
+      <p:sp>
+        <p:nvSpPr>
+          <p:cNvPr id="7" name="Text 4"/>
+          <p:cNvSpPr/>
+          <p:nvPr/>
+        </p:nvSpPr>
+        <p:spPr>
+          <a:xfrm>
+            <a:off x="896112" y="2445106"/>
+            <a:ext cx="384048" cy="384048"/>
+          </a:xfrm>
+          <a:prstGeom prst="rect">
+            <a:avLst/>
+          </a:prstGeom>
+          <a:noFill/>
+          <a:ln/>
+        </p:spPr>
+        <p:txBody>
+          <a:bodyPr wrap="square" lIns="0" tIns="0" rIns="0" bIns="0" rtlCol="0" anchor="ctr"/>
+          <a:lstStyle/>
+          <a:p>
+            <a:pPr algn="ctr" indent="0" marL="0">
+              <a:buNone/>
+            </a:pPr>
+            <a:r>
+              <a:rPr lang="en-US" sz="1400" b="1" dirty="0">
+                <a:solidFill>
+                  <a:srgbClr val="FFFFFF"/>
+                </a:solidFill>
+                <a:latin typeface="Calibri" pitchFamily="34" charset="0"/>
+                <a:ea typeface="Calibri" pitchFamily="34" charset="-122"/>
+                <a:cs typeface="Calibri" pitchFamily="34" charset="-120"/>
+              </a:rPr>
+              <a:t>1</a:t>
+            </a:r>
+            <a:endParaRPr lang="en-US" sz="1400" dirty="0"/>
+          </a:p>
+        </p:txBody>
+      </p:sp>
+      <p:sp>
+        <p:nvSpPr>
+          <p:cNvPr id="8" name="Text 5"/>
+          <p:cNvSpPr/>
+          <p:nvPr/>
+        </p:nvSpPr>
+        <p:spPr>
+          <a:xfrm>
+            <a:off x="1499616" y="2395728"/>
+            <a:ext cx="9777679" cy="519379"/>
+          </a:xfrm>
+          <a:prstGeom prst="rect">
+            <a:avLst/>
+          </a:prstGeom>
+          <a:noFill/>
+          <a:ln/>
+        </p:spPr>
+        <p:txBody>
+          <a:bodyPr wrap="square" lIns="0" tIns="0" rIns="0" bIns="0" rtlCol="0" anchor="ctr"/>
+          <a:lstStyle/>
+          <a:p>
+            <a:pPr indent="0" marL="0">
+              <a:lnSpc>
+                <a:spcPct val="92000"/>
+              </a:lnSpc>
+              <a:buNone/>
+            </a:pPr>
+            <a:r>
+              <a:rPr lang="en-US" sz="1450" b="1" dirty="0">
+                <a:solidFill>
+                  <a:srgbClr val="1B2733"/>
+                </a:solidFill>
+                <a:latin typeface="Yu Gothic" pitchFamily="34" charset="0"/>
+                <a:ea typeface="Yu Gothic" pitchFamily="34" charset="-122"/>
+                <a:cs typeface="Yu Gothic" pitchFamily="34" charset="-120"/>
+              </a:rPr>
+              <a:t>何が起きるはずだったか。</a:t>
+            </a:r>
+            <a:endParaRPr lang="en-US" sz="1450" dirty="0"/>
+          </a:p>
+          <a:p>
+            <a:pPr indent="0" marL="0">
+              <a:lnSpc>
+                <a:spcPct val="92000"/>
+              </a:lnSpc>
+              <a:buNone/>
+            </a:pPr>
+            <a:r>
+              <a:rPr lang="en-US" sz="1050" i="1" dirty="0">
+                <a:solidFill>
+                  <a:srgbClr val="5F7183"/>
+                </a:solidFill>
+                <a:latin typeface="Calibri" pitchFamily="34" charset="0"/>
+                <a:ea typeface="Calibri" pitchFamily="34" charset="-122"/>
+                <a:cs typeface="Calibri" pitchFamily="34" charset="-120"/>
+              </a:rPr>
+              <a:t>What was supposed to happen?</a:t>
+            </a:r>
+            <a:endParaRPr lang="en-US" sz="1450" dirty="0"/>
+          </a:p>
+        </p:txBody>
+      </p:sp>
+      <p:sp>
+        <p:nvSpPr>
+          <p:cNvPr id="9" name="Shape 6"/>
+          <p:cNvSpPr/>
+          <p:nvPr/>
+        </p:nvSpPr>
+        <p:spPr>
+          <a:xfrm>
+            <a:off x="640080" y="3097987"/>
+            <a:ext cx="10911535" cy="702259"/>
+          </a:xfrm>
+          <a:prstGeom prst="roundRect">
+            <a:avLst>
+              <a:gd name="adj" fmla="val 6510"/>
+            </a:avLst>
+          </a:prstGeom>
+          <a:solidFill>
+            <a:srgbClr val="F7FAFC"/>
+          </a:solidFill>
+          <a:ln/>
+        </p:spPr>
+      </p:sp>
+      <p:sp>
+        <p:nvSpPr>
+          <p:cNvPr id="10" name="Shape 7"/>
+          <p:cNvSpPr/>
+          <p:nvPr/>
+        </p:nvSpPr>
+        <p:spPr>
+          <a:xfrm>
+            <a:off x="896112" y="3257093"/>
+            <a:ext cx="384048" cy="384048"/>
+          </a:xfrm>
+          <a:prstGeom prst="ellipse">
+            <a:avLst/>
+          </a:prstGeom>
+          <a:solidFill>
+            <a:srgbClr val="12B198"/>
+          </a:solidFill>
+          <a:ln/>
+        </p:spPr>
+      </p:sp>
+      <p:sp>
+        <p:nvSpPr>
+          <p:cNvPr id="11" name="Text 8"/>
+          <p:cNvSpPr/>
+          <p:nvPr/>
+        </p:nvSpPr>
+        <p:spPr>
+          <a:xfrm>
+            <a:off x="896112" y="3257093"/>
+            <a:ext cx="384048" cy="384048"/>
+          </a:xfrm>
+          <a:prstGeom prst="rect">
+            <a:avLst/>
+          </a:prstGeom>
+          <a:noFill/>
+          <a:ln/>
+        </p:spPr>
+        <p:txBody>
+          <a:bodyPr wrap="square" lIns="0" tIns="0" rIns="0" bIns="0" rtlCol="0" anchor="ctr"/>
+          <a:lstStyle/>
+          <a:p>
+            <a:pPr algn="ctr" indent="0" marL="0">
+              <a:buNone/>
+            </a:pPr>
+            <a:r>
+              <a:rPr lang="en-US" sz="1400" b="1" dirty="0">
+                <a:solidFill>
+                  <a:srgbClr val="FFFFFF"/>
+                </a:solidFill>
+                <a:latin typeface="Calibri" pitchFamily="34" charset="0"/>
+                <a:ea typeface="Calibri" pitchFamily="34" charset="-122"/>
+                <a:cs typeface="Calibri" pitchFamily="34" charset="-120"/>
+              </a:rPr>
+              <a:t>2</a:t>
+            </a:r>
+            <a:endParaRPr lang="en-US" sz="1400" dirty="0"/>
+          </a:p>
+        </p:txBody>
+      </p:sp>
+      <p:sp>
+        <p:nvSpPr>
+          <p:cNvPr id="12" name="Text 9"/>
+          <p:cNvSpPr/>
+          <p:nvPr/>
+        </p:nvSpPr>
+        <p:spPr>
+          <a:xfrm>
+            <a:off x="1499616" y="3207715"/>
+            <a:ext cx="9777679" cy="519379"/>
+          </a:xfrm>
+          <a:prstGeom prst="rect">
+            <a:avLst/>
+          </a:prstGeom>
+          <a:noFill/>
+          <a:ln/>
+        </p:spPr>
+        <p:txBody>
+          <a:bodyPr wrap="square" lIns="0" tIns="0" rIns="0" bIns="0" rtlCol="0" anchor="ctr"/>
+          <a:lstStyle/>
+          <a:p>
+            <a:pPr indent="0" marL="0">
+              <a:lnSpc>
+                <a:spcPct val="92000"/>
+              </a:lnSpc>
+              <a:buNone/>
+            </a:pPr>
+            <a:r>
+              <a:rPr lang="en-US" sz="1450" b="1" dirty="0">
+                <a:solidFill>
+                  <a:srgbClr val="1B2733"/>
+                </a:solidFill>
+                <a:latin typeface="Yu Gothic" pitchFamily="34" charset="0"/>
+                <a:ea typeface="Yu Gothic" pitchFamily="34" charset="-122"/>
+                <a:cs typeface="Yu Gothic" pitchFamily="34" charset="-120"/>
+              </a:rPr>
+              <a:t>実際には何が起きたか。</a:t>
+            </a:r>
+            <a:endParaRPr lang="en-US" sz="1450" dirty="0"/>
+          </a:p>
+          <a:p>
+            <a:pPr indent="0" marL="0">
+              <a:lnSpc>
+                <a:spcPct val="92000"/>
+              </a:lnSpc>
+              <a:buNone/>
+            </a:pPr>
+            <a:r>
+              <a:rPr lang="en-US" sz="1050" i="1" dirty="0">
+                <a:solidFill>
+                  <a:srgbClr val="5F7183"/>
+                </a:solidFill>
+                <a:latin typeface="Calibri" pitchFamily="34" charset="0"/>
+                <a:ea typeface="Calibri" pitchFamily="34" charset="-122"/>
+                <a:cs typeface="Calibri" pitchFamily="34" charset="-120"/>
+              </a:rPr>
+              <a:t>What actually happened?</a:t>
+            </a:r>
+            <a:endParaRPr lang="en-US" sz="1450" dirty="0"/>
+          </a:p>
+        </p:txBody>
+      </p:sp>
+      <p:sp>
+        <p:nvSpPr>
+          <p:cNvPr id="13" name="Shape 10"/>
+          <p:cNvSpPr/>
+          <p:nvPr/>
+        </p:nvSpPr>
+        <p:spPr>
+          <a:xfrm>
+            <a:off x="640080" y="3909974"/>
+            <a:ext cx="10911535" cy="702259"/>
+          </a:xfrm>
+          <a:prstGeom prst="roundRect">
+            <a:avLst>
+              <a:gd name="adj" fmla="val 6510"/>
+            </a:avLst>
+          </a:prstGeom>
+          <a:solidFill>
+            <a:srgbClr val="EFF4F8"/>
+          </a:solidFill>
+          <a:ln/>
+        </p:spPr>
+      </p:sp>
+      <p:sp>
+        <p:nvSpPr>
+          <p:cNvPr id="14" name="Shape 11"/>
+          <p:cNvSpPr/>
+          <p:nvPr/>
+        </p:nvSpPr>
+        <p:spPr>
+          <a:xfrm>
+            <a:off x="896112" y="4069080"/>
+            <a:ext cx="384048" cy="384048"/>
+          </a:xfrm>
+          <a:prstGeom prst="ellipse">
+            <a:avLst/>
+          </a:prstGeom>
+          <a:solidFill>
+            <a:srgbClr val="12B198"/>
+          </a:solidFill>
+          <a:ln/>
+        </p:spPr>
+      </p:sp>
+      <p:sp>
+        <p:nvSpPr>
+          <p:cNvPr id="15" name="Text 12"/>
+          <p:cNvSpPr/>
+          <p:nvPr/>
+        </p:nvSpPr>
+        <p:spPr>
+          <a:xfrm>
+            <a:off x="896112" y="4069080"/>
+            <a:ext cx="384048" cy="384048"/>
+          </a:xfrm>
+          <a:prstGeom prst="rect">
+            <a:avLst/>
+          </a:prstGeom>
+          <a:noFill/>
+          <a:ln/>
+        </p:spPr>
+        <p:txBody>
+          <a:bodyPr wrap="square" lIns="0" tIns="0" rIns="0" bIns="0" rtlCol="0" anchor="ctr"/>
+          <a:lstStyle/>
+          <a:p>
+            <a:pPr algn="ctr" indent="0" marL="0">
+              <a:buNone/>
+            </a:pPr>
+            <a:r>
+              <a:rPr lang="en-US" sz="1400" b="1" dirty="0">
+                <a:solidFill>
+                  <a:srgbClr val="FFFFFF"/>
+                </a:solidFill>
+                <a:latin typeface="Calibri" pitchFamily="34" charset="0"/>
+                <a:ea typeface="Calibri" pitchFamily="34" charset="-122"/>
+                <a:cs typeface="Calibri" pitchFamily="34" charset="-120"/>
+              </a:rPr>
+              <a:t>3</a:t>
+            </a:r>
+            <a:endParaRPr lang="en-US" sz="1400" dirty="0"/>
+          </a:p>
+        </p:txBody>
+      </p:sp>
+      <p:sp>
+        <p:nvSpPr>
+          <p:cNvPr id="16" name="Text 13"/>
+          <p:cNvSpPr/>
+          <p:nvPr/>
+        </p:nvSpPr>
+        <p:spPr>
+          <a:xfrm>
+            <a:off x="1499616" y="4019702"/>
+            <a:ext cx="9777679" cy="519379"/>
+          </a:xfrm>
+          <a:prstGeom prst="rect">
+            <a:avLst/>
+          </a:prstGeom>
+          <a:noFill/>
+          <a:ln/>
+        </p:spPr>
+        <p:txBody>
+          <a:bodyPr wrap="square" lIns="0" tIns="0" rIns="0" bIns="0" rtlCol="0" anchor="ctr"/>
+          <a:lstStyle/>
+          <a:p>
+            <a:pPr indent="0" marL="0">
+              <a:lnSpc>
+                <a:spcPct val="92000"/>
+              </a:lnSpc>
+              <a:buNone/>
+            </a:pPr>
+            <a:r>
+              <a:rPr lang="en-US" sz="1450" b="1" dirty="0">
+                <a:solidFill>
+                  <a:srgbClr val="1B2733"/>
+                </a:solidFill>
+                <a:latin typeface="Yu Gothic" pitchFamily="34" charset="0"/>
+                <a:ea typeface="Yu Gothic" pitchFamily="34" charset="-122"/>
+                <a:cs typeface="Yu Gothic" pitchFamily="34" charset="-120"/>
+              </a:rPr>
+              <a:t>なぜ差が生じたか。</a:t>
+            </a:r>
+            <a:endParaRPr lang="en-US" sz="1450" dirty="0"/>
+          </a:p>
+          <a:p>
+            <a:pPr indent="0" marL="0">
+              <a:lnSpc>
+                <a:spcPct val="92000"/>
+              </a:lnSpc>
+              <a:buNone/>
+            </a:pPr>
+            <a:r>
+              <a:rPr lang="en-US" sz="1050" i="1" dirty="0">
+                <a:solidFill>
+                  <a:srgbClr val="5F7183"/>
+                </a:solidFill>
+                <a:latin typeface="Calibri" pitchFamily="34" charset="0"/>
+                <a:ea typeface="Calibri" pitchFamily="34" charset="-122"/>
+                <a:cs typeface="Calibri" pitchFamily="34" charset="-120"/>
+              </a:rPr>
+              <a:t>Why was there a difference?</a:t>
+            </a:r>
+            <a:endParaRPr lang="en-US" sz="1450" dirty="0"/>
+          </a:p>
+        </p:txBody>
+      </p:sp>
+      <p:sp>
+        <p:nvSpPr>
+          <p:cNvPr id="17" name="Shape 14"/>
+          <p:cNvSpPr/>
+          <p:nvPr/>
+        </p:nvSpPr>
+        <p:spPr>
+          <a:xfrm>
+            <a:off x="640080" y="4721962"/>
+            <a:ext cx="10911535" cy="702259"/>
+          </a:xfrm>
+          <a:prstGeom prst="roundRect">
+            <a:avLst>
+              <a:gd name="adj" fmla="val 6510"/>
+            </a:avLst>
+          </a:prstGeom>
+          <a:solidFill>
+            <a:srgbClr val="F7FAFC"/>
+          </a:solidFill>
+          <a:ln/>
+        </p:spPr>
+      </p:sp>
+      <p:sp>
+        <p:nvSpPr>
+          <p:cNvPr id="18" name="Shape 15"/>
+          <p:cNvSpPr/>
+          <p:nvPr/>
+        </p:nvSpPr>
+        <p:spPr>
+          <a:xfrm>
+            <a:off x="896112" y="4881067"/>
+            <a:ext cx="384048" cy="384048"/>
+          </a:xfrm>
+          <a:prstGeom prst="ellipse">
+            <a:avLst/>
+          </a:prstGeom>
+          <a:solidFill>
+            <a:srgbClr val="12B198"/>
+          </a:solidFill>
+          <a:ln/>
+        </p:spPr>
+      </p:sp>
+      <p:sp>
+        <p:nvSpPr>
+          <p:cNvPr id="19" name="Text 16"/>
+          <p:cNvSpPr/>
+          <p:nvPr/>
+        </p:nvSpPr>
+        <p:spPr>
+          <a:xfrm>
+            <a:off x="896112" y="4881067"/>
+            <a:ext cx="384048" cy="384048"/>
+          </a:xfrm>
+          <a:prstGeom prst="rect">
+            <a:avLst/>
+          </a:prstGeom>
+          <a:noFill/>
+          <a:ln/>
+        </p:spPr>
+        <p:txBody>
+          <a:bodyPr wrap="square" lIns="0" tIns="0" rIns="0" bIns="0" rtlCol="0" anchor="ctr"/>
+          <a:lstStyle/>
+          <a:p>
+            <a:pPr algn="ctr" indent="0" marL="0">
+              <a:buNone/>
+            </a:pPr>
+            <a:r>
+              <a:rPr lang="en-US" sz="1400" b="1" dirty="0">
+                <a:solidFill>
+                  <a:srgbClr val="FFFFFF"/>
+                </a:solidFill>
+                <a:latin typeface="Calibri" pitchFamily="34" charset="0"/>
+                <a:ea typeface="Calibri" pitchFamily="34" charset="-122"/>
+                <a:cs typeface="Calibri" pitchFamily="34" charset="-120"/>
+              </a:rPr>
+              <a:t>4</a:t>
+            </a:r>
+            <a:endParaRPr lang="en-US" sz="1400" dirty="0"/>
+          </a:p>
+        </p:txBody>
+      </p:sp>
+      <p:sp>
+        <p:nvSpPr>
+          <p:cNvPr id="20" name="Text 17"/>
+          <p:cNvSpPr/>
+          <p:nvPr/>
+        </p:nvSpPr>
+        <p:spPr>
+          <a:xfrm>
+            <a:off x="1499616" y="4831690"/>
+            <a:ext cx="9777679" cy="519379"/>
+          </a:xfrm>
+          <a:prstGeom prst="rect">
+            <a:avLst/>
+          </a:prstGeom>
+          <a:noFill/>
+          <a:ln/>
+        </p:spPr>
+        <p:txBody>
+          <a:bodyPr wrap="square" lIns="0" tIns="0" rIns="0" bIns="0" rtlCol="0" anchor="ctr"/>
+          <a:lstStyle/>
+          <a:p>
+            <a:pPr indent="0" marL="0">
+              <a:lnSpc>
+                <a:spcPct val="92000"/>
+              </a:lnSpc>
+              <a:buNone/>
+            </a:pPr>
+            <a:r>
+              <a:rPr lang="en-US" sz="1450" b="1" dirty="0">
+                <a:solidFill>
+                  <a:srgbClr val="1B2733"/>
+                </a:solidFill>
+                <a:latin typeface="Yu Gothic" pitchFamily="34" charset="0"/>
+                <a:ea typeface="Yu Gothic" pitchFamily="34" charset="-122"/>
+                <a:cs typeface="Yu Gothic" pitchFamily="34" charset="-120"/>
+              </a:rPr>
+              <a:t>次に何を変えるか。</a:t>
+            </a:r>
+            <a:endParaRPr lang="en-US" sz="1450" dirty="0"/>
+          </a:p>
+          <a:p>
+            <a:pPr indent="0" marL="0">
+              <a:lnSpc>
+                <a:spcPct val="92000"/>
+              </a:lnSpc>
+              <a:buNone/>
+            </a:pPr>
+            <a:r>
+              <a:rPr lang="en-US" sz="1050" i="1" dirty="0">
+                <a:solidFill>
+                  <a:srgbClr val="5F7183"/>
+                </a:solidFill>
+                <a:latin typeface="Calibri" pitchFamily="34" charset="0"/>
+                <a:ea typeface="Calibri" pitchFamily="34" charset="-122"/>
+                <a:cs typeface="Calibri" pitchFamily="34" charset="-120"/>
+              </a:rPr>
+              <a:t>What will we do differently?</a:t>
+            </a:r>
+            <a:endParaRPr lang="en-US" sz="1450" dirty="0"/>
+          </a:p>
+        </p:txBody>
+      </p:sp>
+      <p:sp>
+        <p:nvSpPr>
+          <p:cNvPr id="21" name="Shape 18"/>
+          <p:cNvSpPr/>
+          <p:nvPr/>
+        </p:nvSpPr>
+        <p:spPr>
+          <a:xfrm>
+            <a:off x="640080" y="5533949"/>
+            <a:ext cx="10911535" cy="702259"/>
+          </a:xfrm>
+          <a:prstGeom prst="roundRect">
+            <a:avLst>
+              <a:gd name="adj" fmla="val 6510"/>
+            </a:avLst>
+          </a:prstGeom>
+          <a:solidFill>
+            <a:srgbClr val="EFF4F8"/>
+          </a:solidFill>
+          <a:ln/>
+        </p:spPr>
+      </p:sp>
+      <p:sp>
+        <p:nvSpPr>
+          <p:cNvPr id="22" name="Shape 19"/>
+          <p:cNvSpPr/>
+          <p:nvPr/>
+        </p:nvSpPr>
+        <p:spPr>
+          <a:xfrm>
+            <a:off x="896112" y="5693054"/>
+            <a:ext cx="384048" cy="384048"/>
+          </a:xfrm>
+          <a:prstGeom prst="ellipse">
+            <a:avLst/>
+          </a:prstGeom>
+          <a:solidFill>
+            <a:srgbClr val="12B198"/>
+          </a:solidFill>
+          <a:ln/>
+        </p:spPr>
+      </p:sp>
+      <p:sp>
+        <p:nvSpPr>
+          <p:cNvPr id="23" name="Text 20"/>
+          <p:cNvSpPr/>
+          <p:nvPr/>
+        </p:nvSpPr>
+        <p:spPr>
+          <a:xfrm>
+            <a:off x="896112" y="5693054"/>
+            <a:ext cx="384048" cy="384048"/>
+          </a:xfrm>
+          <a:prstGeom prst="rect">
+            <a:avLst/>
+          </a:prstGeom>
+          <a:noFill/>
+          <a:ln/>
+        </p:spPr>
+        <p:txBody>
+          <a:bodyPr wrap="square" lIns="0" tIns="0" rIns="0" bIns="0" rtlCol="0" anchor="ctr"/>
+          <a:lstStyle/>
+          <a:p>
+            <a:pPr algn="ctr" indent="0" marL="0">
+              <a:buNone/>
+            </a:pPr>
+            <a:r>
+              <a:rPr lang="en-US" sz="1400" b="1" dirty="0">
+                <a:solidFill>
+                  <a:srgbClr val="FFFFFF"/>
+                </a:solidFill>
+                <a:latin typeface="Calibri" pitchFamily="34" charset="0"/>
+                <a:ea typeface="Calibri" pitchFamily="34" charset="-122"/>
+                <a:cs typeface="Calibri" pitchFamily="34" charset="-120"/>
+              </a:rPr>
+              <a:t>5</a:t>
+            </a:r>
+            <a:endParaRPr lang="en-US" sz="1400" dirty="0"/>
+          </a:p>
+        </p:txBody>
+      </p:sp>
+      <p:sp>
+        <p:nvSpPr>
+          <p:cNvPr id="24" name="Text 21"/>
+          <p:cNvSpPr/>
+          <p:nvPr/>
+        </p:nvSpPr>
+        <p:spPr>
+          <a:xfrm>
+            <a:off x="1499616" y="5643677"/>
+            <a:ext cx="9777679" cy="519379"/>
+          </a:xfrm>
+          <a:prstGeom prst="rect">
+            <a:avLst/>
+          </a:prstGeom>
+          <a:noFill/>
+          <a:ln/>
+        </p:spPr>
+        <p:txBody>
+          <a:bodyPr wrap="square" lIns="0" tIns="0" rIns="0" bIns="0" rtlCol="0" anchor="ctr"/>
+          <a:lstStyle/>
+          <a:p>
+            <a:pPr indent="0" marL="0">
+              <a:lnSpc>
+                <a:spcPct val="92000"/>
+              </a:lnSpc>
+              <a:buNone/>
+            </a:pPr>
+            <a:r>
+              <a:rPr lang="en-US" sz="1300" b="1" dirty="0">
+                <a:solidFill>
+                  <a:srgbClr val="1B2733"/>
+                </a:solidFill>
+                <a:latin typeface="Yu Gothic" pitchFamily="34" charset="0"/>
+                <a:ea typeface="Yu Gothic" pitchFamily="34" charset="-122"/>
+                <a:cs typeface="Yu Gothic" pitchFamily="34" charset="-120"/>
+              </a:rPr>
+              <a:t>最後に、各自が明日から変える行動を1つ、声に出して述べます。</a:t>
+            </a:r>
+            <a:endParaRPr lang="en-US" sz="1300" dirty="0"/>
+          </a:p>
+          <a:p>
+            <a:pPr indent="0" marL="0">
+              <a:lnSpc>
+                <a:spcPct val="92000"/>
+              </a:lnSpc>
+              <a:buNone/>
+            </a:pPr>
+            <a:r>
+              <a:rPr lang="en-US" sz="950" i="1" dirty="0">
+                <a:solidFill>
+                  <a:srgbClr val="5F7183"/>
+                </a:solidFill>
+                <a:latin typeface="Calibri" pitchFamily="34" charset="0"/>
+                <a:ea typeface="Calibri" pitchFamily="34" charset="-122"/>
+                <a:cs typeface="Calibri" pitchFamily="34" charset="-120"/>
+              </a:rPr>
+              <a:t>To close, each person states aloud one thing they will change from tomorrow.</a:t>
+            </a:r>
+            <a:endParaRPr lang="en-US" sz="1300" dirty="0"/>
+          </a:p>
+        </p:txBody>
+      </p:sp>
+      <p:sp>
+        <p:nvSpPr>
+          <p:cNvPr id="25" name="Text 22"/>
+          <p:cNvSpPr/>
+          <p:nvPr/>
+        </p:nvSpPr>
+        <p:spPr>
+          <a:xfrm>
+            <a:off x="640080" y="6382512"/>
+            <a:ext cx="8778240" cy="292608"/>
+          </a:xfrm>
+          <a:prstGeom prst="rect">
+            <a:avLst/>
+          </a:prstGeom>
+          <a:noFill/>
+          <a:ln/>
+        </p:spPr>
+        <p:txBody>
+          <a:bodyPr wrap="square" lIns="0" tIns="0" rIns="0" bIns="0" rtlCol="0" anchor="ctr"/>
+          <a:lstStyle/>
+          <a:p>
+            <a:pPr indent="0" marL="0">
+              <a:buNone/>
+            </a:pPr>
+            <a:r>
+              <a:rPr lang="en-US" sz="900" dirty="0">
+                <a:solidFill>
+                  <a:srgbClr val="5F7183"/>
+                </a:solidFill>
+                <a:latin typeface="Yu Gothic" pitchFamily="34" charset="0"/>
+                <a:ea typeface="Yu Gothic" pitchFamily="34" charset="-122"/>
+                <a:cs typeface="Yu Gothic" pitchFamily="34" charset="-120"/>
+              </a:rPr>
+              <a:t>第10時限｜業務別教育6 警報装置その他当該警備業務を実施するために使用する機器の使用方法  </a:t>
+            </a:r>
+            <a:pPr indent="0" marL="0">
+              <a:buNone/>
+            </a:pPr>
+            <a:r>
+              <a:rPr lang="en-US" sz="850" i="1" dirty="0">
+                <a:solidFill>
+                  <a:srgbClr val="D6E0E9"/>
+                </a:solidFill>
+                <a:latin typeface="Calibri" pitchFamily="34" charset="0"/>
+                <a:ea typeface="Calibri" pitchFamily="34" charset="-122"/>
+                <a:cs typeface="Calibri" pitchFamily="34" charset="-120"/>
+              </a:rPr>
+              <a:t>Period 10 | Task-Specific Training 6 — Security Equipment</a:t>
+            </a:r>
+            <a:endParaRPr lang="en-US" sz="900" dirty="0"/>
+          </a:p>
+        </p:txBody>
+      </p:sp>
+      <p:sp>
+        <p:nvSpPr>
+          <p:cNvPr id="26" name="Text 23"/>
+          <p:cNvSpPr/>
+          <p:nvPr/>
+        </p:nvSpPr>
+        <p:spPr>
+          <a:xfrm>
+            <a:off x="10637215" y="6382512"/>
+            <a:ext cx="914400" cy="292608"/>
+          </a:xfrm>
+          <a:prstGeom prst="rect">
+            <a:avLst/>
+          </a:prstGeom>
+          <a:noFill/>
+          <a:ln/>
+        </p:spPr>
+        <p:txBody>
+          <a:bodyPr wrap="square" lIns="0" tIns="0" rIns="0" bIns="0" rtlCol="0" anchor="ctr"/>
+          <a:lstStyle/>
+          <a:p>
+            <a:pPr algn="r" indent="0" marL="0">
+              <a:buNone/>
+            </a:pPr>
+            <a:r>
+              <a:rPr lang="en-US" sz="1000" dirty="0">
+                <a:solidFill>
+                  <a:srgbClr val="5F7183"/>
+                </a:solidFill>
+                <a:latin typeface="Calibri" pitchFamily="34" charset="0"/>
+                <a:ea typeface="Calibri" pitchFamily="34" charset="-122"/>
+                <a:cs typeface="Calibri" pitchFamily="34" charset="-120"/>
+              </a:rPr>
+              <a:t>14</a:t>
+            </a:r>
+            <a:endParaRPr lang="en-US" sz="1000" dirty="0"/>
+          </a:p>
+        </p:txBody>
+      </p:sp>
+    </p:spTree>
+  </p:cSld>
+  <p:clrMapOvr>
+    <a:masterClrMapping/>
+  </p:clrMapOvr>
+</p:sld>
+</file>
+
+<file path=ppt/slides/slide15.xml><?xml version="1.0" encoding="utf-8"?>
+<p:sld xmlns:a="http://schemas.openxmlformats.org/drawingml/2006/main" xmlns:r="http://schemas.openxmlformats.org/officeDocument/2006/relationships" xmlns:p="http://schemas.openxmlformats.org/presentationml/2006/main">
+  <p:cSld name="Slide 15">
     <p:bg>
       <p:bgPr>
         <a:solidFill>
@@ -11855,11 +16559,11 @@
         <p:spPr>
           <a:xfrm>
             <a:off x="640080" y="3081528"/>
-            <a:ext cx="5327752" cy="1074420"/>
+            <a:ext cx="5327752" cy="836676"/>
           </a:xfrm>
           <a:prstGeom prst="roundRect">
             <a:avLst>
-              <a:gd name="adj" fmla="val 3404"/>
+              <a:gd name="adj" fmla="val 4372"/>
             </a:avLst>
           </a:prstGeom>
           <a:solidFill>
@@ -11876,7 +16580,7 @@
         </p:nvSpPr>
         <p:spPr>
           <a:xfrm>
-            <a:off x="804672" y="3472434"/>
+            <a:off x="804672" y="3353562"/>
             <a:ext cx="292608" cy="292608"/>
           </a:xfrm>
           <a:prstGeom prst="ellipse">
@@ -11896,7 +16600,7 @@
         </p:nvSpPr>
         <p:spPr>
           <a:xfrm>
-            <a:off x="804672" y="3472434"/>
+            <a:off x="804672" y="3353562"/>
             <a:ext cx="292608" cy="292608"/>
           </a:xfrm>
           <a:prstGeom prst="rect">
@@ -11936,7 +16640,7 @@
         <p:spPr>
           <a:xfrm>
             <a:off x="1188720" y="3136392"/>
-            <a:ext cx="4596232" cy="964692"/>
+            <a:ext cx="4596232" cy="726948"/>
           </a:xfrm>
           <a:prstGeom prst="rect">
             <a:avLst/>
@@ -11998,11 +16702,11 @@
         <p:spPr>
           <a:xfrm>
             <a:off x="6223864" y="3081528"/>
-            <a:ext cx="5327752" cy="1074420"/>
+            <a:ext cx="5327752" cy="836676"/>
           </a:xfrm>
           <a:prstGeom prst="roundRect">
             <a:avLst>
-              <a:gd name="adj" fmla="val 3404"/>
+              <a:gd name="adj" fmla="val 4372"/>
             </a:avLst>
           </a:prstGeom>
           <a:solidFill>
@@ -12019,7 +16723,7 @@
         </p:nvSpPr>
         <p:spPr>
           <a:xfrm>
-            <a:off x="6388456" y="3472434"/>
+            <a:off x="6388456" y="3353562"/>
             <a:ext cx="292608" cy="292608"/>
           </a:xfrm>
           <a:prstGeom prst="ellipse">
@@ -12039,7 +16743,7 @@
         </p:nvSpPr>
         <p:spPr>
           <a:xfrm>
-            <a:off x="6388456" y="3472434"/>
+            <a:off x="6388456" y="3353562"/>
             <a:ext cx="292608" cy="292608"/>
           </a:xfrm>
           <a:prstGeom prst="rect">
@@ -12079,7 +16783,7 @@
         <p:spPr>
           <a:xfrm>
             <a:off x="6772504" y="3136392"/>
-            <a:ext cx="4596232" cy="964692"/>
+            <a:ext cx="4596232" cy="726948"/>
           </a:xfrm>
           <a:prstGeom prst="rect">
             <a:avLst/>
@@ -12140,12 +16844,12 @@
         </p:nvSpPr>
         <p:spPr>
           <a:xfrm>
-            <a:off x="640080" y="4265676"/>
-            <a:ext cx="5327752" cy="1074420"/>
+            <a:off x="640080" y="4027932"/>
+            <a:ext cx="5327752" cy="836676"/>
           </a:xfrm>
           <a:prstGeom prst="roundRect">
             <a:avLst>
-              <a:gd name="adj" fmla="val 3404"/>
+              <a:gd name="adj" fmla="val 4372"/>
             </a:avLst>
           </a:prstGeom>
           <a:solidFill>
@@ -12162,7 +16866,7 @@
         </p:nvSpPr>
         <p:spPr>
           <a:xfrm>
-            <a:off x="804672" y="4656582"/>
+            <a:off x="804672" y="4299966"/>
             <a:ext cx="292608" cy="292608"/>
           </a:xfrm>
           <a:prstGeom prst="ellipse">
@@ -12182,7 +16886,7 @@
         </p:nvSpPr>
         <p:spPr>
           <a:xfrm>
-            <a:off x="804672" y="4656582"/>
+            <a:off x="804672" y="4299966"/>
             <a:ext cx="292608" cy="292608"/>
           </a:xfrm>
           <a:prstGeom prst="rect">
@@ -12221,8 +16925,8 @@
         </p:nvSpPr>
         <p:spPr>
           <a:xfrm>
-            <a:off x="1188720" y="4320540"/>
-            <a:ext cx="4596232" cy="964692"/>
+            <a:off x="1188720" y="4082796"/>
+            <a:ext cx="4596232" cy="726948"/>
           </a:xfrm>
           <a:prstGeom prst="rect">
             <a:avLst/>
@@ -12283,12 +16987,12 @@
         </p:nvSpPr>
         <p:spPr>
           <a:xfrm>
-            <a:off x="6223864" y="4265676"/>
-            <a:ext cx="5327752" cy="1074420"/>
+            <a:off x="6223864" y="4027932"/>
+            <a:ext cx="5327752" cy="836676"/>
           </a:xfrm>
           <a:prstGeom prst="roundRect">
             <a:avLst>
-              <a:gd name="adj" fmla="val 3404"/>
+              <a:gd name="adj" fmla="val 4372"/>
             </a:avLst>
           </a:prstGeom>
           <a:solidFill>
@@ -12305,7 +17009,7 @@
         </p:nvSpPr>
         <p:spPr>
           <a:xfrm>
-            <a:off x="6388456" y="4656582"/>
+            <a:off x="6388456" y="4299966"/>
             <a:ext cx="292608" cy="292608"/>
           </a:xfrm>
           <a:prstGeom prst="ellipse">
@@ -12325,7 +17029,7 @@
         </p:nvSpPr>
         <p:spPr>
           <a:xfrm>
-            <a:off x="6388456" y="4656582"/>
+            <a:off x="6388456" y="4299966"/>
             <a:ext cx="292608" cy="292608"/>
           </a:xfrm>
           <a:prstGeom prst="rect">
@@ -12364,8 +17068,8 @@
         </p:nvSpPr>
         <p:spPr>
           <a:xfrm>
-            <a:off x="6772504" y="4320540"/>
-            <a:ext cx="4596232" cy="964692"/>
+            <a:off x="6772504" y="4082796"/>
+            <a:ext cx="4596232" cy="726948"/>
           </a:xfrm>
           <a:prstGeom prst="rect">
             <a:avLst/>
@@ -12426,12 +17130,12 @@
         </p:nvSpPr>
         <p:spPr>
           <a:xfrm>
-            <a:off x="640080" y="5394960"/>
-            <a:ext cx="10911535" cy="457200"/>
+            <a:off x="640080" y="4919472"/>
+            <a:ext cx="10911535" cy="420624"/>
           </a:xfrm>
           <a:prstGeom prst="roundRect">
             <a:avLst>
-              <a:gd name="adj" fmla="val 8000"/>
+              <a:gd name="adj" fmla="val 8696"/>
             </a:avLst>
           </a:prstGeom>
           <a:solidFill>
@@ -12448,8 +17152,8 @@
         </p:nvSpPr>
         <p:spPr>
           <a:xfrm>
-            <a:off x="877824" y="5431536"/>
-            <a:ext cx="10436047" cy="384048"/>
+            <a:off x="877824" y="4946904"/>
+            <a:ext cx="10436047" cy="365760"/>
           </a:xfrm>
           <a:prstGeom prst="rect">
             <a:avLst/>
@@ -12476,7 +17180,7 @@
                 <a:ea typeface="Yu Gothic" pitchFamily="34" charset="-122"/>
                 <a:cs typeface="Yu Gothic" pitchFamily="34" charset="-120"/>
               </a:rPr>
-              <a:t>追加付与　</a:t>
+              <a:t>追加付与①　</a:t>
             </a:r>
             <a:pPr indent="0" marL="0">
               <a:lnSpc>
@@ -12521,7 +17225,108 @@
       </p:sp>
       <p:sp>
         <p:nvSpPr>
-          <p:cNvPr id="27" name="Text 24"/>
+          <p:cNvPr id="27" name="Shape 24"/>
+          <p:cNvSpPr/>
+          <p:nvPr/>
+        </p:nvSpPr>
+        <p:spPr>
+          <a:xfrm>
+            <a:off x="640080" y="5394960"/>
+            <a:ext cx="10911535" cy="420624"/>
+          </a:xfrm>
+          <a:prstGeom prst="roundRect">
+            <a:avLst>
+              <a:gd name="adj" fmla="val 8696"/>
+            </a:avLst>
+          </a:prstGeom>
+          <a:solidFill>
+            <a:srgbClr val="E4F4F0"/>
+          </a:solidFill>
+          <a:ln/>
+        </p:spPr>
+      </p:sp>
+      <p:sp>
+        <p:nvSpPr>
+          <p:cNvPr id="28" name="Text 25"/>
+          <p:cNvSpPr/>
+          <p:nvPr/>
+        </p:nvSpPr>
+        <p:spPr>
+          <a:xfrm>
+            <a:off x="877824" y="5422392"/>
+            <a:ext cx="10436047" cy="365760"/>
+          </a:xfrm>
+          <a:prstGeom prst="rect">
+            <a:avLst/>
+          </a:prstGeom>
+          <a:noFill/>
+          <a:ln/>
+        </p:spPr>
+        <p:txBody>
+          <a:bodyPr wrap="square" lIns="0" tIns="0" rIns="0" bIns="0" rtlCol="0" anchor="ctr"/>
+          <a:lstStyle/>
+          <a:p>
+            <a:pPr indent="0" marL="0">
+              <a:lnSpc>
+                <a:spcPct val="86000"/>
+              </a:lnSpc>
+              <a:buNone/>
+            </a:pPr>
+            <a:r>
+              <a:rPr lang="en-US" sz="850" b="1" dirty="0">
+                <a:solidFill>
+                  <a:srgbClr val="0D8A76"/>
+                </a:solidFill>
+                <a:latin typeface="Yu Gothic" pitchFamily="34" charset="0"/>
+                <a:ea typeface="Yu Gothic" pitchFamily="34" charset="-122"/>
+                <a:cs typeface="Yu Gothic" pitchFamily="34" charset="-120"/>
+              </a:rPr>
+              <a:t>追加付与②　</a:t>
+            </a:r>
+            <a:pPr indent="0" marL="0">
+              <a:lnSpc>
+                <a:spcPct val="86000"/>
+              </a:lnSpc>
+              <a:buNone/>
+            </a:pPr>
+            <a:r>
+              <a:rPr lang="en-US" sz="1050" b="1" dirty="0">
+                <a:solidFill>
+                  <a:srgbClr val="1B2733"/>
+                </a:solidFill>
+                <a:latin typeface="Yu Gothic" pitchFamily="34" charset="0"/>
+                <a:ea typeface="Yu Gothic" pitchFamily="34" charset="-122"/>
+                <a:cs typeface="Yu Gothic" pitchFamily="34" charset="-120"/>
+              </a:rPr>
+              <a:t>受信機が、4階西区画で第2報を表示した。</a:t>
+            </a:r>
+            <a:endParaRPr lang="en-US" sz="850" dirty="0"/>
+          </a:p>
+          <a:p>
+            <a:pPr indent="0" marL="0">
+              <a:lnSpc>
+                <a:spcPct val="86000"/>
+              </a:lnSpc>
+              <a:buNone/>
+            </a:pPr>
+            <a:r>
+              <a:rPr lang="en-US" sz="750" i="1" dirty="0">
+                <a:solidFill>
+                  <a:srgbClr val="5F7183"/>
+                </a:solidFill>
+                <a:latin typeface="Calibri" pitchFamily="34" charset="0"/>
+                <a:ea typeface="Calibri" pitchFamily="34" charset="-122"/>
+                <a:cs typeface="Calibri" pitchFamily="34" charset="-120"/>
+              </a:rPr>
+              <a:t>The panel shows a second activation, fourth-floor west zone.</a:t>
+            </a:r>
+            <a:endParaRPr lang="en-US" sz="850" dirty="0"/>
+          </a:p>
+        </p:txBody>
+      </p:sp>
+      <p:sp>
+        <p:nvSpPr>
+          <p:cNvPr id="29" name="Text 26"/>
           <p:cNvSpPr/>
           <p:nvPr/>
         </p:nvSpPr>
@@ -12600,7 +17405,7 @@
       </p:sp>
       <p:sp>
         <p:nvSpPr>
-          <p:cNvPr id="28" name="Text 25"/>
+          <p:cNvPr id="30" name="Text 27"/>
           <p:cNvSpPr/>
           <p:nvPr/>
         </p:nvSpPr>
@@ -12653,7 +17458,7 @@
       </p:sp>
       <p:sp>
         <p:nvSpPr>
-          <p:cNvPr id="29" name="Text 26"/>
+          <p:cNvPr id="31" name="Text 28"/>
           <p:cNvSpPr/>
           <p:nvPr/>
         </p:nvSpPr>
@@ -12706,7 +17511,7 @@
       </p:sp>
       <p:sp>
         <p:nvSpPr>
-          <p:cNvPr id="30" name="Text 27"/>
+          <p:cNvPr id="32" name="Text 29"/>
           <p:cNvSpPr/>
           <p:nvPr/>
         </p:nvSpPr>
@@ -14523,11 +19328,11 @@
         <p:spPr>
           <a:xfrm>
             <a:off x="640080" y="3081528"/>
-            <a:ext cx="5327752" cy="1074420"/>
+            <a:ext cx="5327752" cy="836676"/>
           </a:xfrm>
           <a:prstGeom prst="roundRect">
             <a:avLst>
-              <a:gd name="adj" fmla="val 3404"/>
+              <a:gd name="adj" fmla="val 4372"/>
             </a:avLst>
           </a:prstGeom>
           <a:solidFill>
@@ -14544,7 +19349,7 @@
         </p:nvSpPr>
         <p:spPr>
           <a:xfrm>
-            <a:off x="804672" y="3472434"/>
+            <a:off x="804672" y="3353562"/>
             <a:ext cx="292608" cy="292608"/>
           </a:xfrm>
           <a:prstGeom prst="ellipse">
@@ -14564,7 +19369,7 @@
         </p:nvSpPr>
         <p:spPr>
           <a:xfrm>
-            <a:off x="804672" y="3472434"/>
+            <a:off x="804672" y="3353562"/>
             <a:ext cx="292608" cy="292608"/>
           </a:xfrm>
           <a:prstGeom prst="rect">
@@ -14604,7 +19409,7 @@
         <p:spPr>
           <a:xfrm>
             <a:off x="1188720" y="3136392"/>
-            <a:ext cx="4596232" cy="964692"/>
+            <a:ext cx="4596232" cy="726948"/>
           </a:xfrm>
           <a:prstGeom prst="rect">
             <a:avLst/>
@@ -14666,11 +19471,11 @@
         <p:spPr>
           <a:xfrm>
             <a:off x="6223864" y="3081528"/>
-            <a:ext cx="5327752" cy="1074420"/>
+            <a:ext cx="5327752" cy="836676"/>
           </a:xfrm>
           <a:prstGeom prst="roundRect">
             <a:avLst>
-              <a:gd name="adj" fmla="val 3404"/>
+              <a:gd name="adj" fmla="val 4372"/>
             </a:avLst>
           </a:prstGeom>
           <a:solidFill>
@@ -14687,7 +19492,7 @@
         </p:nvSpPr>
         <p:spPr>
           <a:xfrm>
-            <a:off x="6388456" y="3472434"/>
+            <a:off x="6388456" y="3353562"/>
             <a:ext cx="292608" cy="292608"/>
           </a:xfrm>
           <a:prstGeom prst="ellipse">
@@ -14707,7 +19512,7 @@
         </p:nvSpPr>
         <p:spPr>
           <a:xfrm>
-            <a:off x="6388456" y="3472434"/>
+            <a:off x="6388456" y="3353562"/>
             <a:ext cx="292608" cy="292608"/>
           </a:xfrm>
           <a:prstGeom prst="rect">
@@ -14747,7 +19552,7 @@
         <p:spPr>
           <a:xfrm>
             <a:off x="6772504" y="3136392"/>
-            <a:ext cx="4596232" cy="964692"/>
+            <a:ext cx="4596232" cy="726948"/>
           </a:xfrm>
           <a:prstGeom prst="rect">
             <a:avLst/>
@@ -14808,12 +19613,12 @@
         </p:nvSpPr>
         <p:spPr>
           <a:xfrm>
-            <a:off x="640080" y="4265676"/>
-            <a:ext cx="5327752" cy="1074420"/>
+            <a:off x="640080" y="4027932"/>
+            <a:ext cx="5327752" cy="836676"/>
           </a:xfrm>
           <a:prstGeom prst="roundRect">
             <a:avLst>
-              <a:gd name="adj" fmla="val 3404"/>
+              <a:gd name="adj" fmla="val 4372"/>
             </a:avLst>
           </a:prstGeom>
           <a:solidFill>
@@ -14830,7 +19635,7 @@
         </p:nvSpPr>
         <p:spPr>
           <a:xfrm>
-            <a:off x="804672" y="4656582"/>
+            <a:off x="804672" y="4299966"/>
             <a:ext cx="292608" cy="292608"/>
           </a:xfrm>
           <a:prstGeom prst="ellipse">
@@ -14850,7 +19655,7 @@
         </p:nvSpPr>
         <p:spPr>
           <a:xfrm>
-            <a:off x="804672" y="4656582"/>
+            <a:off x="804672" y="4299966"/>
             <a:ext cx="292608" cy="292608"/>
           </a:xfrm>
           <a:prstGeom prst="rect">
@@ -14889,8 +19694,8 @@
         </p:nvSpPr>
         <p:spPr>
           <a:xfrm>
-            <a:off x="1188720" y="4320540"/>
-            <a:ext cx="4596232" cy="964692"/>
+            <a:off x="1188720" y="4082796"/>
+            <a:ext cx="4596232" cy="726948"/>
           </a:xfrm>
           <a:prstGeom prst="rect">
             <a:avLst/>
@@ -14951,12 +19756,12 @@
         </p:nvSpPr>
         <p:spPr>
           <a:xfrm>
-            <a:off x="6223864" y="4265676"/>
-            <a:ext cx="5327752" cy="1074420"/>
+            <a:off x="6223864" y="4027932"/>
+            <a:ext cx="5327752" cy="836676"/>
           </a:xfrm>
           <a:prstGeom prst="roundRect">
             <a:avLst>
-              <a:gd name="adj" fmla="val 3404"/>
+              <a:gd name="adj" fmla="val 4372"/>
             </a:avLst>
           </a:prstGeom>
           <a:solidFill>
@@ -14973,7 +19778,7 @@
         </p:nvSpPr>
         <p:spPr>
           <a:xfrm>
-            <a:off x="6388456" y="4656582"/>
+            <a:off x="6388456" y="4299966"/>
             <a:ext cx="292608" cy="292608"/>
           </a:xfrm>
           <a:prstGeom prst="ellipse">
@@ -14993,7 +19798,7 @@
         </p:nvSpPr>
         <p:spPr>
           <a:xfrm>
-            <a:off x="6388456" y="4656582"/>
+            <a:off x="6388456" y="4299966"/>
             <a:ext cx="292608" cy="292608"/>
           </a:xfrm>
           <a:prstGeom prst="rect">
@@ -15032,8 +19837,8 @@
         </p:nvSpPr>
         <p:spPr>
           <a:xfrm>
-            <a:off x="6772504" y="4320540"/>
-            <a:ext cx="4596232" cy="964692"/>
+            <a:off x="6772504" y="4082796"/>
+            <a:ext cx="4596232" cy="726948"/>
           </a:xfrm>
           <a:prstGeom prst="rect">
             <a:avLst/>
@@ -15094,12 +19899,12 @@
         </p:nvSpPr>
         <p:spPr>
           <a:xfrm>
-            <a:off x="640080" y="5394960"/>
-            <a:ext cx="10911535" cy="457200"/>
+            <a:off x="640080" y="4919472"/>
+            <a:ext cx="10911535" cy="420624"/>
           </a:xfrm>
           <a:prstGeom prst="roundRect">
             <a:avLst>
-              <a:gd name="adj" fmla="val 8000"/>
+              <a:gd name="adj" fmla="val 8696"/>
             </a:avLst>
           </a:prstGeom>
           <a:solidFill>
@@ -15116,8 +19921,8 @@
         </p:nvSpPr>
         <p:spPr>
           <a:xfrm>
-            <a:off x="877824" y="5431536"/>
-            <a:ext cx="10436047" cy="384048"/>
+            <a:off x="877824" y="4946904"/>
+            <a:ext cx="10436047" cy="365760"/>
           </a:xfrm>
           <a:prstGeom prst="rect">
             <a:avLst/>
@@ -15144,7 +19949,7 @@
                 <a:ea typeface="Yu Gothic" pitchFamily="34" charset="-122"/>
                 <a:cs typeface="Yu Gothic" pitchFamily="34" charset="-120"/>
               </a:rPr>
-              <a:t>追加付与　</a:t>
+              <a:t>追加付与①　</a:t>
             </a:r>
             <a:pPr indent="0" marL="0">
               <a:lnSpc>
@@ -15189,7 +19994,108 @@
       </p:sp>
       <p:sp>
         <p:nvSpPr>
-          <p:cNvPr id="27" name="Text 24"/>
+          <p:cNvPr id="27" name="Shape 24"/>
+          <p:cNvSpPr/>
+          <p:nvPr/>
+        </p:nvSpPr>
+        <p:spPr>
+          <a:xfrm>
+            <a:off x="640080" y="5394960"/>
+            <a:ext cx="10911535" cy="420624"/>
+          </a:xfrm>
+          <a:prstGeom prst="roundRect">
+            <a:avLst>
+              <a:gd name="adj" fmla="val 8696"/>
+            </a:avLst>
+          </a:prstGeom>
+          <a:solidFill>
+            <a:srgbClr val="E4F4F0"/>
+          </a:solidFill>
+          <a:ln/>
+        </p:spPr>
+      </p:sp>
+      <p:sp>
+        <p:nvSpPr>
+          <p:cNvPr id="28" name="Text 25"/>
+          <p:cNvSpPr/>
+          <p:nvPr/>
+        </p:nvSpPr>
+        <p:spPr>
+          <a:xfrm>
+            <a:off x="877824" y="5422392"/>
+            <a:ext cx="10436047" cy="365760"/>
+          </a:xfrm>
+          <a:prstGeom prst="rect">
+            <a:avLst/>
+          </a:prstGeom>
+          <a:noFill/>
+          <a:ln/>
+        </p:spPr>
+        <p:txBody>
+          <a:bodyPr wrap="square" lIns="0" tIns="0" rIns="0" bIns="0" rtlCol="0" anchor="ctr"/>
+          <a:lstStyle/>
+          <a:p>
+            <a:pPr indent="0" marL="0">
+              <a:lnSpc>
+                <a:spcPct val="86000"/>
+              </a:lnSpc>
+              <a:buNone/>
+            </a:pPr>
+            <a:r>
+              <a:rPr lang="en-US" sz="850" b="1" dirty="0">
+                <a:solidFill>
+                  <a:srgbClr val="0D8A76"/>
+                </a:solidFill>
+                <a:latin typeface="Yu Gothic" pitchFamily="34" charset="0"/>
+                <a:ea typeface="Yu Gothic" pitchFamily="34" charset="-122"/>
+                <a:cs typeface="Yu Gothic" pitchFamily="34" charset="-120"/>
+              </a:rPr>
+              <a:t>追加付与②　</a:t>
+            </a:r>
+            <a:pPr indent="0" marL="0">
+              <a:lnSpc>
+                <a:spcPct val="86000"/>
+              </a:lnSpc>
+              <a:buNone/>
+            </a:pPr>
+            <a:r>
+              <a:rPr lang="en-US" sz="1050" b="1" dirty="0">
+                <a:solidFill>
+                  <a:srgbClr val="1B2733"/>
+                </a:solidFill>
+                <a:latin typeface="Yu Gothic" pitchFamily="34" charset="0"/>
+                <a:ea typeface="Yu Gothic" pitchFamily="34" charset="-122"/>
+                <a:cs typeface="Yu Gothic" pitchFamily="34" charset="-120"/>
+              </a:rPr>
+              <a:t>相手が「では正式に依頼書を出す。それまで消さないでくれ」と述べた。</a:t>
+            </a:r>
+            <a:endParaRPr lang="en-US" sz="850" dirty="0"/>
+          </a:p>
+          <a:p>
+            <a:pPr indent="0" marL="0">
+              <a:lnSpc>
+                <a:spcPct val="86000"/>
+              </a:lnSpc>
+              <a:buNone/>
+            </a:pPr>
+            <a:r>
+              <a:rPr lang="en-US" sz="750" i="1" dirty="0">
+                <a:solidFill>
+                  <a:srgbClr val="5F7183"/>
+                </a:solidFill>
+                <a:latin typeface="Calibri" pitchFamily="34" charset="0"/>
+                <a:ea typeface="Calibri" pitchFamily="34" charset="-122"/>
+                <a:cs typeface="Calibri" pitchFamily="34" charset="-120"/>
+              </a:rPr>
+              <a:t>They say: "Then I will submit a formal request. Until then, do not delete it."</a:t>
+            </a:r>
+            <a:endParaRPr lang="en-US" sz="850" dirty="0"/>
+          </a:p>
+        </p:txBody>
+      </p:sp>
+      <p:sp>
+        <p:nvSpPr>
+          <p:cNvPr id="29" name="Text 26"/>
           <p:cNvSpPr/>
           <p:nvPr/>
         </p:nvSpPr>
@@ -15268,7 +20174,7 @@
       </p:sp>
       <p:sp>
         <p:nvSpPr>
-          <p:cNvPr id="28" name="Text 25"/>
+          <p:cNvPr id="30" name="Text 27"/>
           <p:cNvSpPr/>
           <p:nvPr/>
         </p:nvSpPr>
@@ -15321,7 +20227,7 @@
       </p:sp>
       <p:sp>
         <p:nvSpPr>
-          <p:cNvPr id="29" name="Text 26"/>
+          <p:cNvPr id="31" name="Text 28"/>
           <p:cNvSpPr/>
           <p:nvPr/>
         </p:nvSpPr>
@@ -15374,7 +20280,7 @@
       </p:sp>
       <p:sp>
         <p:nvSpPr>
-          <p:cNvPr id="30" name="Text 27"/>
+          <p:cNvPr id="32" name="Text 29"/>
           <p:cNvSpPr/>
           <p:nvPr/>
         </p:nvSpPr>

--- a/decks/06_10限_機器と総括.pptx
+++ b/decks/06_10限_機器と総括.pptx
@@ -2492,7 +2492,7 @@
                 <a:ea typeface="Yu Gothic" pitchFamily="34" charset="-122"/>
                 <a:cs typeface="Yu Gothic" pitchFamily="34" charset="-120"/>
               </a:rPr>
-              <a:t>確認テスト　問1〜問5</a:t>
+              <a:t>AAR ― 振り返り（After Action Review）</a:t>
             </a:r>
             <a:endParaRPr lang="en-US" sz="2700" dirty="0"/>
           </a:p>
@@ -2512,7 +2512,7 @@
                 <a:ea typeface="Calibri" pitchFamily="34" charset="-122"/>
                 <a:cs typeface="Calibri" pitchFamily="34" charset="-120"/>
               </a:rPr>
-              <a:t>Assessment — Questions 1 to 5</a:t>
+              <a:t>AAR — After Action Review</a:t>
             </a:r>
             <a:endParaRPr lang="en-US" sz="2700" dirty="0"/>
           </a:p>
@@ -2526,8 +2526,8 @@
         </p:nvSpPr>
         <p:spPr>
           <a:xfrm>
-            <a:off x="640080" y="1499616"/>
-            <a:ext cx="10911535" cy="512064"/>
+            <a:off x="640080" y="1536192"/>
+            <a:ext cx="10911535" cy="566928"/>
           </a:xfrm>
           <a:prstGeom prst="rect">
             <a:avLst/>
@@ -2554,7 +2554,7 @@
                 <a:ea typeface="Yu Gothic" pitchFamily="34" charset="-122"/>
                 <a:cs typeface="Yu Gothic" pitchFamily="34" charset="-120"/>
               </a:rPr>
-              <a:t>15分。回答は日本語・英語どちらでも構いません。記述は一言で結構です。</a:t>
+              <a:t>AAR は事案や訓練の直後に行う振り返りです。原則は、犯人探しをしないことです。</a:t>
             </a:r>
             <a:endParaRPr lang="en-US" sz="1300" dirty="0"/>
           </a:p>
@@ -2574,7 +2574,7 @@
                 <a:ea typeface="Calibri" pitchFamily="34" charset="-122"/>
                 <a:cs typeface="Calibri" pitchFamily="34" charset="-120"/>
               </a:rPr>
-              <a:t>15 minutes. Answer in Japanese or English. Short answers are fine.</a:t>
+              <a:t>An AAR is a review held immediately after an incident or exercise. The rule is: no blame.</a:t>
             </a:r>
             <a:endParaRPr lang="en-US" sz="1300" dirty="0"/>
           </a:p>
@@ -2588,12 +2588,12 @@
         </p:nvSpPr>
         <p:spPr>
           <a:xfrm>
-            <a:off x="640080" y="2194560"/>
-            <a:ext cx="10911535" cy="691286"/>
+            <a:off x="640080" y="2286000"/>
+            <a:ext cx="10911535" cy="702259"/>
           </a:xfrm>
           <a:prstGeom prst="roundRect">
             <a:avLst>
-              <a:gd name="adj" fmla="val 5291"/>
+              <a:gd name="adj" fmla="val 6510"/>
             </a:avLst>
           </a:prstGeom>
           <a:solidFill>
@@ -2610,14 +2610,14 @@
         </p:nvSpPr>
         <p:spPr>
           <a:xfrm>
-            <a:off x="822960" y="2375611"/>
-            <a:ext cx="329184" cy="329184"/>
+            <a:off x="896112" y="2445106"/>
+            <a:ext cx="384048" cy="384048"/>
           </a:xfrm>
           <a:prstGeom prst="ellipse">
             <a:avLst/>
           </a:prstGeom>
           <a:solidFill>
-            <a:srgbClr val="093259"/>
+            <a:srgbClr val="12B198"/>
           </a:solidFill>
           <a:ln/>
         </p:spPr>
@@ -2630,8 +2630,8 @@
         </p:nvSpPr>
         <p:spPr>
           <a:xfrm>
-            <a:off x="822960" y="2375611"/>
-            <a:ext cx="329184" cy="329184"/>
+            <a:off x="896112" y="2445106"/>
+            <a:ext cx="384048" cy="384048"/>
           </a:xfrm>
           <a:prstGeom prst="rect">
             <a:avLst/>
@@ -2647,7 +2647,7 @@
               <a:buNone/>
             </a:pPr>
             <a:r>
-              <a:rPr lang="en-US" sz="1100" b="1" dirty="0">
+              <a:rPr lang="en-US" sz="1400" b="1" dirty="0">
                 <a:solidFill>
                   <a:srgbClr val="FFFFFF"/>
                 </a:solidFill>
@@ -2657,7 +2657,7 @@
               </a:rPr>
               <a:t>1</a:t>
             </a:r>
-            <a:endParaRPr lang="en-US" sz="1100" dirty="0"/>
+            <a:endParaRPr lang="en-US" sz="1400" dirty="0"/>
           </a:p>
         </p:txBody>
       </p:sp>
@@ -2669,8 +2669,8 @@
         </p:nvSpPr>
         <p:spPr>
           <a:xfrm>
-            <a:off x="1243584" y="2267712"/>
-            <a:ext cx="10070287" cy="544982"/>
+            <a:off x="1499616" y="2395728"/>
+            <a:ext cx="9777679" cy="519379"/>
           </a:xfrm>
           <a:prstGeom prst="rect">
             <a:avLst/>
@@ -2684,12 +2684,12 @@
           <a:p>
             <a:pPr indent="0" marL="0">
               <a:lnSpc>
-                <a:spcPct val="90000"/>
-              </a:lnSpc>
-              <a:buNone/>
-            </a:pPr>
-            <a:r>
-              <a:rPr lang="en-US" sz="1150" b="1" dirty="0">
+                <a:spcPct val="92000"/>
+              </a:lnSpc>
+              <a:buNone/>
+            </a:pPr>
+            <a:r>
+              <a:rPr lang="en-US" sz="1450" b="1" dirty="0">
                 <a:solidFill>
                   <a:srgbClr val="1B2733"/>
                 </a:solidFill>
@@ -2697,19 +2697,19 @@
                 <a:ea typeface="Yu Gothic" pitchFamily="34" charset="-122"/>
                 <a:cs typeface="Yu Gothic" pitchFamily="34" charset="-120"/>
               </a:rPr>
-              <a:t>警備員の法的な立場は何か。また、警察官にあって警備員にない権限を1つ挙げよ。</a:t>
-            </a:r>
-            <a:endParaRPr lang="en-US" sz="1150" dirty="0"/>
-          </a:p>
-          <a:p>
-            <a:pPr indent="0" marL="0">
-              <a:lnSpc>
-                <a:spcPct val="90000"/>
-              </a:lnSpc>
-              <a:buNone/>
-            </a:pPr>
-            <a:r>
-              <a:rPr lang="en-US" sz="900" i="1" dirty="0">
+              <a:t>何が起きるはずだったか。</a:t>
+            </a:r>
+            <a:endParaRPr lang="en-US" sz="1450" dirty="0"/>
+          </a:p>
+          <a:p>
+            <a:pPr indent="0" marL="0">
+              <a:lnSpc>
+                <a:spcPct val="92000"/>
+              </a:lnSpc>
+              <a:buNone/>
+            </a:pPr>
+            <a:r>
+              <a:rPr lang="en-US" sz="1050" i="1" dirty="0">
                 <a:solidFill>
                   <a:srgbClr val="5F7183"/>
                 </a:solidFill>
@@ -2717,9 +2717,9 @@
                 <a:ea typeface="Calibri" pitchFamily="34" charset="-122"/>
                 <a:cs typeface="Calibri" pitchFamily="34" charset="-120"/>
               </a:rPr>
-              <a:t>What is a guard's legal status? Name one power the police have and you do not.</a:t>
-            </a:r>
-            <a:endParaRPr lang="en-US" sz="1150" dirty="0"/>
+              <a:t>What was supposed to happen?</a:t>
+            </a:r>
+            <a:endParaRPr lang="en-US" sz="1450" dirty="0"/>
           </a:p>
         </p:txBody>
       </p:sp>
@@ -2731,12 +2731,155 @@
         </p:nvSpPr>
         <p:spPr>
           <a:xfrm>
-            <a:off x="640080" y="3032150"/>
-            <a:ext cx="10911535" cy="691286"/>
+            <a:off x="640080" y="3097987"/>
+            <a:ext cx="10911535" cy="702259"/>
           </a:xfrm>
           <a:prstGeom prst="roundRect">
             <a:avLst>
-              <a:gd name="adj" fmla="val 5291"/>
+              <a:gd name="adj" fmla="val 6510"/>
+            </a:avLst>
+          </a:prstGeom>
+          <a:solidFill>
+            <a:srgbClr val="F7FAFC"/>
+          </a:solidFill>
+          <a:ln/>
+        </p:spPr>
+      </p:sp>
+      <p:sp>
+        <p:nvSpPr>
+          <p:cNvPr id="10" name="Shape 7"/>
+          <p:cNvSpPr/>
+          <p:nvPr/>
+        </p:nvSpPr>
+        <p:spPr>
+          <a:xfrm>
+            <a:off x="896112" y="3257093"/>
+            <a:ext cx="384048" cy="384048"/>
+          </a:xfrm>
+          <a:prstGeom prst="ellipse">
+            <a:avLst/>
+          </a:prstGeom>
+          <a:solidFill>
+            <a:srgbClr val="12B198"/>
+          </a:solidFill>
+          <a:ln/>
+        </p:spPr>
+      </p:sp>
+      <p:sp>
+        <p:nvSpPr>
+          <p:cNvPr id="11" name="Text 8"/>
+          <p:cNvSpPr/>
+          <p:nvPr/>
+        </p:nvSpPr>
+        <p:spPr>
+          <a:xfrm>
+            <a:off x="896112" y="3257093"/>
+            <a:ext cx="384048" cy="384048"/>
+          </a:xfrm>
+          <a:prstGeom prst="rect">
+            <a:avLst/>
+          </a:prstGeom>
+          <a:noFill/>
+          <a:ln/>
+        </p:spPr>
+        <p:txBody>
+          <a:bodyPr wrap="square" lIns="0" tIns="0" rIns="0" bIns="0" rtlCol="0" anchor="ctr"/>
+          <a:lstStyle/>
+          <a:p>
+            <a:pPr algn="ctr" indent="0" marL="0">
+              <a:buNone/>
+            </a:pPr>
+            <a:r>
+              <a:rPr lang="en-US" sz="1400" b="1" dirty="0">
+                <a:solidFill>
+                  <a:srgbClr val="FFFFFF"/>
+                </a:solidFill>
+                <a:latin typeface="Calibri" pitchFamily="34" charset="0"/>
+                <a:ea typeface="Calibri" pitchFamily="34" charset="-122"/>
+                <a:cs typeface="Calibri" pitchFamily="34" charset="-120"/>
+              </a:rPr>
+              <a:t>2</a:t>
+            </a:r>
+            <a:endParaRPr lang="en-US" sz="1400" dirty="0"/>
+          </a:p>
+        </p:txBody>
+      </p:sp>
+      <p:sp>
+        <p:nvSpPr>
+          <p:cNvPr id="12" name="Text 9"/>
+          <p:cNvSpPr/>
+          <p:nvPr/>
+        </p:nvSpPr>
+        <p:spPr>
+          <a:xfrm>
+            <a:off x="1499616" y="3207715"/>
+            <a:ext cx="9777679" cy="519379"/>
+          </a:xfrm>
+          <a:prstGeom prst="rect">
+            <a:avLst/>
+          </a:prstGeom>
+          <a:noFill/>
+          <a:ln/>
+        </p:spPr>
+        <p:txBody>
+          <a:bodyPr wrap="square" lIns="0" tIns="0" rIns="0" bIns="0" rtlCol="0" anchor="ctr"/>
+          <a:lstStyle/>
+          <a:p>
+            <a:pPr indent="0" marL="0">
+              <a:lnSpc>
+                <a:spcPct val="92000"/>
+              </a:lnSpc>
+              <a:buNone/>
+            </a:pPr>
+            <a:r>
+              <a:rPr lang="en-US" sz="1450" b="1" dirty="0">
+                <a:solidFill>
+                  <a:srgbClr val="1B2733"/>
+                </a:solidFill>
+                <a:latin typeface="Yu Gothic" pitchFamily="34" charset="0"/>
+                <a:ea typeface="Yu Gothic" pitchFamily="34" charset="-122"/>
+                <a:cs typeface="Yu Gothic" pitchFamily="34" charset="-120"/>
+              </a:rPr>
+              <a:t>実際には何が起きたか。</a:t>
+            </a:r>
+            <a:endParaRPr lang="en-US" sz="1450" dirty="0"/>
+          </a:p>
+          <a:p>
+            <a:pPr indent="0" marL="0">
+              <a:lnSpc>
+                <a:spcPct val="92000"/>
+              </a:lnSpc>
+              <a:buNone/>
+            </a:pPr>
+            <a:r>
+              <a:rPr lang="en-US" sz="1050" i="1" dirty="0">
+                <a:solidFill>
+                  <a:srgbClr val="5F7183"/>
+                </a:solidFill>
+                <a:latin typeface="Calibri" pitchFamily="34" charset="0"/>
+                <a:ea typeface="Calibri" pitchFamily="34" charset="-122"/>
+                <a:cs typeface="Calibri" pitchFamily="34" charset="-120"/>
+              </a:rPr>
+              <a:t>What actually happened?</a:t>
+            </a:r>
+            <a:endParaRPr lang="en-US" sz="1450" dirty="0"/>
+          </a:p>
+        </p:txBody>
+      </p:sp>
+      <p:sp>
+        <p:nvSpPr>
+          <p:cNvPr id="13" name="Shape 10"/>
+          <p:cNvSpPr/>
+          <p:nvPr/>
+        </p:nvSpPr>
+        <p:spPr>
+          <a:xfrm>
+            <a:off x="640080" y="3909974"/>
+            <a:ext cx="10911535" cy="702259"/>
+          </a:xfrm>
+          <a:prstGeom prst="roundRect">
+            <a:avLst>
+              <a:gd name="adj" fmla="val 6510"/>
             </a:avLst>
           </a:prstGeom>
           <a:solidFill>
@@ -2747,34 +2890,34 @@
       </p:sp>
       <p:sp>
         <p:nvSpPr>
-          <p:cNvPr id="10" name="Shape 7"/>
-          <p:cNvSpPr/>
-          <p:nvPr/>
-        </p:nvSpPr>
-        <p:spPr>
-          <a:xfrm>
-            <a:off x="822960" y="3213202"/>
-            <a:ext cx="329184" cy="329184"/>
+          <p:cNvPr id="14" name="Shape 11"/>
+          <p:cNvSpPr/>
+          <p:nvPr/>
+        </p:nvSpPr>
+        <p:spPr>
+          <a:xfrm>
+            <a:off x="896112" y="4069080"/>
+            <a:ext cx="384048" cy="384048"/>
           </a:xfrm>
           <a:prstGeom prst="ellipse">
             <a:avLst/>
           </a:prstGeom>
           <a:solidFill>
-            <a:srgbClr val="093259"/>
+            <a:srgbClr val="12B198"/>
           </a:solidFill>
           <a:ln/>
         </p:spPr>
       </p:sp>
       <p:sp>
         <p:nvSpPr>
-          <p:cNvPr id="11" name="Text 8"/>
-          <p:cNvSpPr/>
-          <p:nvPr/>
-        </p:nvSpPr>
-        <p:spPr>
-          <a:xfrm>
-            <a:off x="822960" y="3213202"/>
-            <a:ext cx="329184" cy="329184"/>
+          <p:cNvPr id="15" name="Text 12"/>
+          <p:cNvSpPr/>
+          <p:nvPr/>
+        </p:nvSpPr>
+        <p:spPr>
+          <a:xfrm>
+            <a:off x="896112" y="4069080"/>
+            <a:ext cx="384048" cy="384048"/>
           </a:xfrm>
           <a:prstGeom prst="rect">
             <a:avLst/>
@@ -2790,7 +2933,7 @@
               <a:buNone/>
             </a:pPr>
             <a:r>
-              <a:rPr lang="en-US" sz="1100" b="1" dirty="0">
+              <a:rPr lang="en-US" sz="1400" b="1" dirty="0">
                 <a:solidFill>
                   <a:srgbClr val="FFFFFF"/>
                 </a:solidFill>
@@ -2798,22 +2941,22 @@
                 <a:ea typeface="Calibri" pitchFamily="34" charset="-122"/>
                 <a:cs typeface="Calibri" pitchFamily="34" charset="-120"/>
               </a:rPr>
-              <a:t>2</a:t>
-            </a:r>
-            <a:endParaRPr lang="en-US" sz="1100" dirty="0"/>
-          </a:p>
-        </p:txBody>
-      </p:sp>
-      <p:sp>
-        <p:nvSpPr>
-          <p:cNvPr id="12" name="Text 9"/>
-          <p:cNvSpPr/>
-          <p:nvPr/>
-        </p:nvSpPr>
-        <p:spPr>
-          <a:xfrm>
-            <a:off x="1243584" y="3105302"/>
-            <a:ext cx="10070287" cy="544982"/>
+              <a:t>3</a:t>
+            </a:r>
+            <a:endParaRPr lang="en-US" sz="1400" dirty="0"/>
+          </a:p>
+        </p:txBody>
+      </p:sp>
+      <p:sp>
+        <p:nvSpPr>
+          <p:cNvPr id="16" name="Text 13"/>
+          <p:cNvSpPr/>
+          <p:nvPr/>
+        </p:nvSpPr>
+        <p:spPr>
+          <a:xfrm>
+            <a:off x="1499616" y="4019702"/>
+            <a:ext cx="9777679" cy="519379"/>
           </a:xfrm>
           <a:prstGeom prst="rect">
             <a:avLst/>
@@ -2827,12 +2970,12 @@
           <a:p>
             <a:pPr indent="0" marL="0">
               <a:lnSpc>
-                <a:spcPct val="90000"/>
-              </a:lnSpc>
-              <a:buNone/>
-            </a:pPr>
-            <a:r>
-              <a:rPr lang="en-US" sz="1150" b="1" dirty="0">
+                <a:spcPct val="92000"/>
+              </a:lnSpc>
+              <a:buNone/>
+            </a:pPr>
+            <a:r>
+              <a:rPr lang="en-US" sz="1450" b="1" dirty="0">
                 <a:solidFill>
                   <a:srgbClr val="1B2733"/>
                 </a:solidFill>
@@ -2840,19 +2983,19 @@
                 <a:ea typeface="Yu Gothic" pitchFamily="34" charset="-122"/>
                 <a:cs typeface="Yu Gothic" pitchFamily="34" charset="-120"/>
               </a:rPr>
-              <a:t>De-escalation の目的は何か。一言で述べよ。</a:t>
-            </a:r>
-            <a:endParaRPr lang="en-US" sz="1150" dirty="0"/>
-          </a:p>
-          <a:p>
-            <a:pPr indent="0" marL="0">
-              <a:lnSpc>
-                <a:spcPct val="90000"/>
-              </a:lnSpc>
-              <a:buNone/>
-            </a:pPr>
-            <a:r>
-              <a:rPr lang="en-US" sz="900" i="1" dirty="0">
+              <a:t>なぜ差が生じたか。</a:t>
+            </a:r>
+            <a:endParaRPr lang="en-US" sz="1450" dirty="0"/>
+          </a:p>
+          <a:p>
+            <a:pPr indent="0" marL="0">
+              <a:lnSpc>
+                <a:spcPct val="92000"/>
+              </a:lnSpc>
+              <a:buNone/>
+            </a:pPr>
+            <a:r>
+              <a:rPr lang="en-US" sz="1050" i="1" dirty="0">
                 <a:solidFill>
                   <a:srgbClr val="5F7183"/>
                 </a:solidFill>
@@ -2860,26 +3003,169 @@
                 <a:ea typeface="Calibri" pitchFamily="34" charset="-122"/>
                 <a:cs typeface="Calibri" pitchFamily="34" charset="-120"/>
               </a:rPr>
-              <a:t>In one line: what is the aim of de-escalation?</a:t>
-            </a:r>
-            <a:endParaRPr lang="en-US" sz="1150" dirty="0"/>
-          </a:p>
-        </p:txBody>
-      </p:sp>
-      <p:sp>
-        <p:nvSpPr>
-          <p:cNvPr id="13" name="Shape 10"/>
-          <p:cNvSpPr/>
-          <p:nvPr/>
-        </p:nvSpPr>
-        <p:spPr>
-          <a:xfrm>
-            <a:off x="640080" y="3869741"/>
-            <a:ext cx="10911535" cy="691286"/>
+              <a:t>Why was there a difference?</a:t>
+            </a:r>
+            <a:endParaRPr lang="en-US" sz="1450" dirty="0"/>
+          </a:p>
+        </p:txBody>
+      </p:sp>
+      <p:sp>
+        <p:nvSpPr>
+          <p:cNvPr id="17" name="Shape 14"/>
+          <p:cNvSpPr/>
+          <p:nvPr/>
+        </p:nvSpPr>
+        <p:spPr>
+          <a:xfrm>
+            <a:off x="640080" y="4721962"/>
+            <a:ext cx="10911535" cy="702259"/>
           </a:xfrm>
           <a:prstGeom prst="roundRect">
             <a:avLst>
-              <a:gd name="adj" fmla="val 5291"/>
+              <a:gd name="adj" fmla="val 6510"/>
+            </a:avLst>
+          </a:prstGeom>
+          <a:solidFill>
+            <a:srgbClr val="F7FAFC"/>
+          </a:solidFill>
+          <a:ln/>
+        </p:spPr>
+      </p:sp>
+      <p:sp>
+        <p:nvSpPr>
+          <p:cNvPr id="18" name="Shape 15"/>
+          <p:cNvSpPr/>
+          <p:nvPr/>
+        </p:nvSpPr>
+        <p:spPr>
+          <a:xfrm>
+            <a:off x="896112" y="4881067"/>
+            <a:ext cx="384048" cy="384048"/>
+          </a:xfrm>
+          <a:prstGeom prst="ellipse">
+            <a:avLst/>
+          </a:prstGeom>
+          <a:solidFill>
+            <a:srgbClr val="12B198"/>
+          </a:solidFill>
+          <a:ln/>
+        </p:spPr>
+      </p:sp>
+      <p:sp>
+        <p:nvSpPr>
+          <p:cNvPr id="19" name="Text 16"/>
+          <p:cNvSpPr/>
+          <p:nvPr/>
+        </p:nvSpPr>
+        <p:spPr>
+          <a:xfrm>
+            <a:off x="896112" y="4881067"/>
+            <a:ext cx="384048" cy="384048"/>
+          </a:xfrm>
+          <a:prstGeom prst="rect">
+            <a:avLst/>
+          </a:prstGeom>
+          <a:noFill/>
+          <a:ln/>
+        </p:spPr>
+        <p:txBody>
+          <a:bodyPr wrap="square" lIns="0" tIns="0" rIns="0" bIns="0" rtlCol="0" anchor="ctr"/>
+          <a:lstStyle/>
+          <a:p>
+            <a:pPr algn="ctr" indent="0" marL="0">
+              <a:buNone/>
+            </a:pPr>
+            <a:r>
+              <a:rPr lang="en-US" sz="1400" b="1" dirty="0">
+                <a:solidFill>
+                  <a:srgbClr val="FFFFFF"/>
+                </a:solidFill>
+                <a:latin typeface="Calibri" pitchFamily="34" charset="0"/>
+                <a:ea typeface="Calibri" pitchFamily="34" charset="-122"/>
+                <a:cs typeface="Calibri" pitchFamily="34" charset="-120"/>
+              </a:rPr>
+              <a:t>4</a:t>
+            </a:r>
+            <a:endParaRPr lang="en-US" sz="1400" dirty="0"/>
+          </a:p>
+        </p:txBody>
+      </p:sp>
+      <p:sp>
+        <p:nvSpPr>
+          <p:cNvPr id="20" name="Text 17"/>
+          <p:cNvSpPr/>
+          <p:nvPr/>
+        </p:nvSpPr>
+        <p:spPr>
+          <a:xfrm>
+            <a:off x="1499616" y="4831690"/>
+            <a:ext cx="9777679" cy="519379"/>
+          </a:xfrm>
+          <a:prstGeom prst="rect">
+            <a:avLst/>
+          </a:prstGeom>
+          <a:noFill/>
+          <a:ln/>
+        </p:spPr>
+        <p:txBody>
+          <a:bodyPr wrap="square" lIns="0" tIns="0" rIns="0" bIns="0" rtlCol="0" anchor="ctr"/>
+          <a:lstStyle/>
+          <a:p>
+            <a:pPr indent="0" marL="0">
+              <a:lnSpc>
+                <a:spcPct val="92000"/>
+              </a:lnSpc>
+              <a:buNone/>
+            </a:pPr>
+            <a:r>
+              <a:rPr lang="en-US" sz="1450" b="1" dirty="0">
+                <a:solidFill>
+                  <a:srgbClr val="1B2733"/>
+                </a:solidFill>
+                <a:latin typeface="Yu Gothic" pitchFamily="34" charset="0"/>
+                <a:ea typeface="Yu Gothic" pitchFamily="34" charset="-122"/>
+                <a:cs typeface="Yu Gothic" pitchFamily="34" charset="-120"/>
+              </a:rPr>
+              <a:t>次に何を変えるか。</a:t>
+            </a:r>
+            <a:endParaRPr lang="en-US" sz="1450" dirty="0"/>
+          </a:p>
+          <a:p>
+            <a:pPr indent="0" marL="0">
+              <a:lnSpc>
+                <a:spcPct val="92000"/>
+              </a:lnSpc>
+              <a:buNone/>
+            </a:pPr>
+            <a:r>
+              <a:rPr lang="en-US" sz="1050" i="1" dirty="0">
+                <a:solidFill>
+                  <a:srgbClr val="5F7183"/>
+                </a:solidFill>
+                <a:latin typeface="Calibri" pitchFamily="34" charset="0"/>
+                <a:ea typeface="Calibri" pitchFamily="34" charset="-122"/>
+                <a:cs typeface="Calibri" pitchFamily="34" charset="-120"/>
+              </a:rPr>
+              <a:t>What will we do differently?</a:t>
+            </a:r>
+            <a:endParaRPr lang="en-US" sz="1450" dirty="0"/>
+          </a:p>
+        </p:txBody>
+      </p:sp>
+      <p:sp>
+        <p:nvSpPr>
+          <p:cNvPr id="21" name="Shape 18"/>
+          <p:cNvSpPr/>
+          <p:nvPr/>
+        </p:nvSpPr>
+        <p:spPr>
+          <a:xfrm>
+            <a:off x="640080" y="5533949"/>
+            <a:ext cx="10911535" cy="702259"/>
+          </a:xfrm>
+          <a:prstGeom prst="roundRect">
+            <a:avLst>
+              <a:gd name="adj" fmla="val 6510"/>
             </a:avLst>
           </a:prstGeom>
           <a:solidFill>
@@ -2890,34 +3176,34 @@
       </p:sp>
       <p:sp>
         <p:nvSpPr>
-          <p:cNvPr id="14" name="Shape 11"/>
-          <p:cNvSpPr/>
-          <p:nvPr/>
-        </p:nvSpPr>
-        <p:spPr>
-          <a:xfrm>
-            <a:off x="822960" y="4050792"/>
-            <a:ext cx="329184" cy="329184"/>
+          <p:cNvPr id="22" name="Shape 19"/>
+          <p:cNvSpPr/>
+          <p:nvPr/>
+        </p:nvSpPr>
+        <p:spPr>
+          <a:xfrm>
+            <a:off x="896112" y="5693054"/>
+            <a:ext cx="384048" cy="384048"/>
           </a:xfrm>
           <a:prstGeom prst="ellipse">
             <a:avLst/>
           </a:prstGeom>
           <a:solidFill>
-            <a:srgbClr val="093259"/>
+            <a:srgbClr val="12B198"/>
           </a:solidFill>
           <a:ln/>
         </p:spPr>
       </p:sp>
       <p:sp>
         <p:nvSpPr>
-          <p:cNvPr id="15" name="Text 12"/>
-          <p:cNvSpPr/>
-          <p:nvPr/>
-        </p:nvSpPr>
-        <p:spPr>
-          <a:xfrm>
-            <a:off x="822960" y="4050792"/>
-            <a:ext cx="329184" cy="329184"/>
+          <p:cNvPr id="23" name="Text 20"/>
+          <p:cNvSpPr/>
+          <p:nvPr/>
+        </p:nvSpPr>
+        <p:spPr>
+          <a:xfrm>
+            <a:off x="896112" y="5693054"/>
+            <a:ext cx="384048" cy="384048"/>
           </a:xfrm>
           <a:prstGeom prst="rect">
             <a:avLst/>
@@ -2933,7 +3219,7 @@
               <a:buNone/>
             </a:pPr>
             <a:r>
-              <a:rPr lang="en-US" sz="1100" b="1" dirty="0">
+              <a:rPr lang="en-US" sz="1400" b="1" dirty="0">
                 <a:solidFill>
                   <a:srgbClr val="FFFFFF"/>
                 </a:solidFill>
@@ -2941,22 +3227,22 @@
                 <a:ea typeface="Calibri" pitchFamily="34" charset="-122"/>
                 <a:cs typeface="Calibri" pitchFamily="34" charset="-120"/>
               </a:rPr>
-              <a:t>3</a:t>
-            </a:r>
-            <a:endParaRPr lang="en-US" sz="1100" dirty="0"/>
-          </a:p>
-        </p:txBody>
-      </p:sp>
-      <p:sp>
-        <p:nvSpPr>
-          <p:cNvPr id="16" name="Text 13"/>
-          <p:cNvSpPr/>
-          <p:nvPr/>
-        </p:nvSpPr>
-        <p:spPr>
-          <a:xfrm>
-            <a:off x="1243584" y="3942893"/>
-            <a:ext cx="10070287" cy="544982"/>
+              <a:t>5</a:t>
+            </a:r>
+            <a:endParaRPr lang="en-US" sz="1400" dirty="0"/>
+          </a:p>
+        </p:txBody>
+      </p:sp>
+      <p:sp>
+        <p:nvSpPr>
+          <p:cNvPr id="24" name="Text 21"/>
+          <p:cNvSpPr/>
+          <p:nvPr/>
+        </p:nvSpPr>
+        <p:spPr>
+          <a:xfrm>
+            <a:off x="1499616" y="5643677"/>
+            <a:ext cx="9777679" cy="519379"/>
           </a:xfrm>
           <a:prstGeom prst="rect">
             <a:avLst/>
@@ -2970,12 +3256,12 @@
           <a:p>
             <a:pPr indent="0" marL="0">
               <a:lnSpc>
-                <a:spcPct val="90000"/>
-              </a:lnSpc>
-              <a:buNone/>
-            </a:pPr>
-            <a:r>
-              <a:rPr lang="en-US" sz="1150" b="1" dirty="0">
+                <a:spcPct val="92000"/>
+              </a:lnSpc>
+              <a:buNone/>
+            </a:pPr>
+            <a:r>
+              <a:rPr lang="en-US" sz="1300" b="1" dirty="0">
                 <a:solidFill>
                   <a:srgbClr val="1B2733"/>
                 </a:solidFill>
@@ -2983,19 +3269,19 @@
                 <a:ea typeface="Yu Gothic" pitchFamily="34" charset="-122"/>
                 <a:cs typeface="Yu Gothic" pitchFamily="34" charset="-120"/>
               </a:rPr>
-              <a:t>相手が引き下がれる形を残すのは、なぜか。</a:t>
-            </a:r>
-            <a:endParaRPr lang="en-US" sz="1150" dirty="0"/>
-          </a:p>
-          <a:p>
-            <a:pPr indent="0" marL="0">
-              <a:lnSpc>
-                <a:spcPct val="90000"/>
-              </a:lnSpc>
-              <a:buNone/>
-            </a:pPr>
-            <a:r>
-              <a:rPr lang="en-US" sz="900" i="1" dirty="0">
+              <a:t>出た改善点は、記録に残して次回の教育と警備指令書の見直しに反映します。</a:t>
+            </a:r>
+            <a:endParaRPr lang="en-US" sz="1300" dirty="0"/>
+          </a:p>
+          <a:p>
+            <a:pPr indent="0" marL="0">
+              <a:lnSpc>
+                <a:spcPct val="92000"/>
+              </a:lnSpc>
+              <a:buNone/>
+            </a:pPr>
+            <a:r>
+              <a:rPr lang="en-US" sz="950" i="1" dirty="0">
                 <a:solidFill>
                   <a:srgbClr val="5F7183"/>
                 </a:solidFill>
@@ -3003,295 +3289,9 @@
                 <a:ea typeface="Calibri" pitchFamily="34" charset="-122"/>
                 <a:cs typeface="Calibri" pitchFamily="34" charset="-120"/>
               </a:rPr>
-              <a:t>Why do you leave the other person a way to step back?</a:t>
-            </a:r>
-            <a:endParaRPr lang="en-US" sz="1150" dirty="0"/>
-          </a:p>
-        </p:txBody>
-      </p:sp>
-      <p:sp>
-        <p:nvSpPr>
-          <p:cNvPr id="17" name="Shape 14"/>
-          <p:cNvSpPr/>
-          <p:nvPr/>
-        </p:nvSpPr>
-        <p:spPr>
-          <a:xfrm>
-            <a:off x="640080" y="4707331"/>
-            <a:ext cx="10911535" cy="691286"/>
-          </a:xfrm>
-          <a:prstGeom prst="roundRect">
-            <a:avLst>
-              <a:gd name="adj" fmla="val 5291"/>
-            </a:avLst>
-          </a:prstGeom>
-          <a:solidFill>
-            <a:srgbClr val="EFF4F8"/>
-          </a:solidFill>
-          <a:ln/>
-        </p:spPr>
-      </p:sp>
-      <p:sp>
-        <p:nvSpPr>
-          <p:cNvPr id="18" name="Shape 15"/>
-          <p:cNvSpPr/>
-          <p:nvPr/>
-        </p:nvSpPr>
-        <p:spPr>
-          <a:xfrm>
-            <a:off x="822960" y="4888382"/>
-            <a:ext cx="329184" cy="329184"/>
-          </a:xfrm>
-          <a:prstGeom prst="ellipse">
-            <a:avLst/>
-          </a:prstGeom>
-          <a:solidFill>
-            <a:srgbClr val="093259"/>
-          </a:solidFill>
-          <a:ln/>
-        </p:spPr>
-      </p:sp>
-      <p:sp>
-        <p:nvSpPr>
-          <p:cNvPr id="19" name="Text 16"/>
-          <p:cNvSpPr/>
-          <p:nvPr/>
-        </p:nvSpPr>
-        <p:spPr>
-          <a:xfrm>
-            <a:off x="822960" y="4888382"/>
-            <a:ext cx="329184" cy="329184"/>
-          </a:xfrm>
-          <a:prstGeom prst="rect">
-            <a:avLst/>
-          </a:prstGeom>
-          <a:noFill/>
-          <a:ln/>
-        </p:spPr>
-        <p:txBody>
-          <a:bodyPr wrap="square" lIns="0" tIns="0" rIns="0" bIns="0" rtlCol="0" anchor="ctr"/>
-          <a:lstStyle/>
-          <a:p>
-            <a:pPr algn="ctr" indent="0" marL="0">
-              <a:buNone/>
-            </a:pPr>
-            <a:r>
-              <a:rPr lang="en-US" sz="1100" b="1" dirty="0">
-                <a:solidFill>
-                  <a:srgbClr val="FFFFFF"/>
-                </a:solidFill>
-                <a:latin typeface="Calibri" pitchFamily="34" charset="0"/>
-                <a:ea typeface="Calibri" pitchFamily="34" charset="-122"/>
-                <a:cs typeface="Calibri" pitchFamily="34" charset="-120"/>
-              </a:rPr>
-              <a:t>4</a:t>
-            </a:r>
-            <a:endParaRPr lang="en-US" sz="1100" dirty="0"/>
-          </a:p>
-        </p:txBody>
-      </p:sp>
-      <p:sp>
-        <p:nvSpPr>
-          <p:cNvPr id="20" name="Text 17"/>
-          <p:cNvSpPr/>
-          <p:nvPr/>
-        </p:nvSpPr>
-        <p:spPr>
-          <a:xfrm>
-            <a:off x="1243584" y="4780483"/>
-            <a:ext cx="10070287" cy="544982"/>
-          </a:xfrm>
-          <a:prstGeom prst="rect">
-            <a:avLst/>
-          </a:prstGeom>
-          <a:noFill/>
-          <a:ln/>
-        </p:spPr>
-        <p:txBody>
-          <a:bodyPr wrap="square" lIns="0" tIns="0" rIns="0" bIns="0" rtlCol="0" anchor="ctr"/>
-          <a:lstStyle/>
-          <a:p>
-            <a:pPr indent="0" marL="0">
-              <a:lnSpc>
-                <a:spcPct val="90000"/>
-              </a:lnSpc>
-              <a:buNone/>
-            </a:pPr>
-            <a:r>
-              <a:rPr lang="en-US" sz="1150" b="1" dirty="0">
-                <a:solidFill>
-                  <a:srgbClr val="1B2733"/>
-                </a:solidFill>
-                <a:latin typeface="Yu Gothic" pitchFamily="34" charset="0"/>
-                <a:ea typeface="Yu Gothic" pitchFamily="34" charset="-122"/>
-                <a:cs typeface="Yu Gothic" pitchFamily="34" charset="-120"/>
-              </a:rPr>
-              <a:t>対話をやめて離脱すべき兆候を、2つ挙げよ。</a:t>
-            </a:r>
-            <a:endParaRPr lang="en-US" sz="1150" dirty="0"/>
-          </a:p>
-          <a:p>
-            <a:pPr indent="0" marL="0">
-              <a:lnSpc>
-                <a:spcPct val="90000"/>
-              </a:lnSpc>
-              <a:buNone/>
-            </a:pPr>
-            <a:r>
-              <a:rPr lang="en-US" sz="900" i="1" dirty="0">
-                <a:solidFill>
-                  <a:srgbClr val="5F7183"/>
-                </a:solidFill>
-                <a:latin typeface="Calibri" pitchFamily="34" charset="0"/>
-                <a:ea typeface="Calibri" pitchFamily="34" charset="-122"/>
-                <a:cs typeface="Calibri" pitchFamily="34" charset="-120"/>
-              </a:rPr>
-              <a:t>Name two signs that you should stop talking and disengage.</a:t>
-            </a:r>
-            <a:endParaRPr lang="en-US" sz="1150" dirty="0"/>
-          </a:p>
-        </p:txBody>
-      </p:sp>
-      <p:sp>
-        <p:nvSpPr>
-          <p:cNvPr id="21" name="Shape 18"/>
-          <p:cNvSpPr/>
-          <p:nvPr/>
-        </p:nvSpPr>
-        <p:spPr>
-          <a:xfrm>
-            <a:off x="640080" y="5544922"/>
-            <a:ext cx="10911535" cy="691286"/>
-          </a:xfrm>
-          <a:prstGeom prst="roundRect">
-            <a:avLst>
-              <a:gd name="adj" fmla="val 5291"/>
-            </a:avLst>
-          </a:prstGeom>
-          <a:solidFill>
-            <a:srgbClr val="EFF4F8"/>
-          </a:solidFill>
-          <a:ln/>
-        </p:spPr>
-      </p:sp>
-      <p:sp>
-        <p:nvSpPr>
-          <p:cNvPr id="22" name="Shape 19"/>
-          <p:cNvSpPr/>
-          <p:nvPr/>
-        </p:nvSpPr>
-        <p:spPr>
-          <a:xfrm>
-            <a:off x="822960" y="5725973"/>
-            <a:ext cx="329184" cy="329184"/>
-          </a:xfrm>
-          <a:prstGeom prst="ellipse">
-            <a:avLst/>
-          </a:prstGeom>
-          <a:solidFill>
-            <a:srgbClr val="093259"/>
-          </a:solidFill>
-          <a:ln/>
-        </p:spPr>
-      </p:sp>
-      <p:sp>
-        <p:nvSpPr>
-          <p:cNvPr id="23" name="Text 20"/>
-          <p:cNvSpPr/>
-          <p:nvPr/>
-        </p:nvSpPr>
-        <p:spPr>
-          <a:xfrm>
-            <a:off x="822960" y="5725973"/>
-            <a:ext cx="329184" cy="329184"/>
-          </a:xfrm>
-          <a:prstGeom prst="rect">
-            <a:avLst/>
-          </a:prstGeom>
-          <a:noFill/>
-          <a:ln/>
-        </p:spPr>
-        <p:txBody>
-          <a:bodyPr wrap="square" lIns="0" tIns="0" rIns="0" bIns="0" rtlCol="0" anchor="ctr"/>
-          <a:lstStyle/>
-          <a:p>
-            <a:pPr algn="ctr" indent="0" marL="0">
-              <a:buNone/>
-            </a:pPr>
-            <a:r>
-              <a:rPr lang="en-US" sz="1100" b="1" dirty="0">
-                <a:solidFill>
-                  <a:srgbClr val="FFFFFF"/>
-                </a:solidFill>
-                <a:latin typeface="Calibri" pitchFamily="34" charset="0"/>
-                <a:ea typeface="Calibri" pitchFamily="34" charset="-122"/>
-                <a:cs typeface="Calibri" pitchFamily="34" charset="-120"/>
-              </a:rPr>
-              <a:t>5</a:t>
-            </a:r>
-            <a:endParaRPr lang="en-US" sz="1100" dirty="0"/>
-          </a:p>
-        </p:txBody>
-      </p:sp>
-      <p:sp>
-        <p:nvSpPr>
-          <p:cNvPr id="24" name="Text 21"/>
-          <p:cNvSpPr/>
-          <p:nvPr/>
-        </p:nvSpPr>
-        <p:spPr>
-          <a:xfrm>
-            <a:off x="1243584" y="5618074"/>
-            <a:ext cx="10070287" cy="544982"/>
-          </a:xfrm>
-          <a:prstGeom prst="rect">
-            <a:avLst/>
-          </a:prstGeom>
-          <a:noFill/>
-          <a:ln/>
-        </p:spPr>
-        <p:txBody>
-          <a:bodyPr wrap="square" lIns="0" tIns="0" rIns="0" bIns="0" rtlCol="0" anchor="ctr"/>
-          <a:lstStyle/>
-          <a:p>
-            <a:pPr indent="0" marL="0">
-              <a:lnSpc>
-                <a:spcPct val="90000"/>
-              </a:lnSpc>
-              <a:buNone/>
-            </a:pPr>
-            <a:r>
-              <a:rPr lang="en-US" sz="1150" b="1" dirty="0">
-                <a:solidFill>
-                  <a:srgbClr val="1B2733"/>
-                </a:solidFill>
-                <a:latin typeface="Yu Gothic" pitchFamily="34" charset="0"/>
-                <a:ea typeface="Yu Gothic" pitchFamily="34" charset="-122"/>
-                <a:cs typeface="Yu Gothic" pitchFamily="34" charset="-120"/>
-              </a:rPr>
-              <a:t>退去を求める根拠は、誰の意思に基づくか。</a:t>
-            </a:r>
-            <a:endParaRPr lang="en-US" sz="1150" dirty="0"/>
-          </a:p>
-          <a:p>
-            <a:pPr indent="0" marL="0">
-              <a:lnSpc>
-                <a:spcPct val="90000"/>
-              </a:lnSpc>
-              <a:buNone/>
-            </a:pPr>
-            <a:r>
-              <a:rPr lang="en-US" sz="900" i="1" dirty="0">
-                <a:solidFill>
-                  <a:srgbClr val="5F7183"/>
-                </a:solidFill>
-                <a:latin typeface="Calibri" pitchFamily="34" charset="0"/>
-                <a:ea typeface="Calibri" pitchFamily="34" charset="-122"/>
-                <a:cs typeface="Calibri" pitchFamily="34" charset="-120"/>
-              </a:rPr>
-              <a:t>A request to leave rests on whose intent?</a:t>
-            </a:r>
-            <a:endParaRPr lang="en-US" sz="1150" dirty="0"/>
+              <a:t>Record what comes out of it, and feed it into the next session and the post orders.</a:t>
+            </a:r>
+            <a:endParaRPr lang="en-US" sz="1300" dirty="0"/>
           </a:p>
         </p:txBody>
       </p:sp>
@@ -3479,7 +3479,7 @@
                 <a:ea typeface="Yu Gothic" pitchFamily="34" charset="-122"/>
                 <a:cs typeface="Yu Gothic" pitchFamily="34" charset="-120"/>
               </a:rPr>
-              <a:t>確認テスト　問6〜問10</a:t>
+              <a:t>確認テスト　問1〜問5</a:t>
             </a:r>
             <a:endParaRPr lang="en-US" sz="2700" dirty="0"/>
           </a:p>
@@ -3499,7 +3499,7 @@
                 <a:ea typeface="Calibri" pitchFamily="34" charset="-122"/>
                 <a:cs typeface="Calibri" pitchFamily="34" charset="-120"/>
               </a:rPr>
-              <a:t>Assessment — Questions 6 to 10</a:t>
+              <a:t>Assessment — Questions 1 to 5</a:t>
             </a:r>
             <a:endParaRPr lang="en-US" sz="2700" dirty="0"/>
           </a:p>
@@ -3507,18 +3507,80 @@
       </p:sp>
       <p:sp>
         <p:nvSpPr>
-          <p:cNvPr id="4" name="Shape 1"/>
-          <p:cNvSpPr/>
-          <p:nvPr/>
-        </p:nvSpPr>
-        <p:spPr>
-          <a:xfrm>
-            <a:off x="640080" y="1627632"/>
-            <a:ext cx="10911535" cy="804672"/>
+          <p:cNvPr id="4" name="Text 1"/>
+          <p:cNvSpPr/>
+          <p:nvPr/>
+        </p:nvSpPr>
+        <p:spPr>
+          <a:xfrm>
+            <a:off x="640080" y="1499616"/>
+            <a:ext cx="10911535" cy="512064"/>
+          </a:xfrm>
+          <a:prstGeom prst="rect">
+            <a:avLst/>
+          </a:prstGeom>
+          <a:noFill/>
+          <a:ln/>
+        </p:spPr>
+        <p:txBody>
+          <a:bodyPr wrap="square" lIns="0" tIns="0" rIns="0" bIns="0" rtlCol="0" anchor="t"/>
+          <a:lstStyle/>
+          <a:p>
+            <a:pPr algn="l" indent="0" marL="0">
+              <a:lnSpc>
+                <a:spcPct val="92000"/>
+              </a:lnSpc>
+              <a:buNone/>
+            </a:pPr>
+            <a:r>
+              <a:rPr lang="en-US" sz="1300" dirty="0">
+                <a:solidFill>
+                  <a:srgbClr val="093259"/>
+                </a:solidFill>
+                <a:latin typeface="Yu Gothic" pitchFamily="34" charset="0"/>
+                <a:ea typeface="Yu Gothic" pitchFamily="34" charset="-122"/>
+                <a:cs typeface="Yu Gothic" pitchFamily="34" charset="-120"/>
+              </a:rPr>
+              <a:t>15分。回答は日本語・英語どちらでも構いません。記述は一言で結構です。</a:t>
+            </a:r>
+            <a:endParaRPr lang="en-US" sz="1300" dirty="0"/>
+          </a:p>
+          <a:p>
+            <a:pPr algn="l" indent="0" marL="0">
+              <a:lnSpc>
+                <a:spcPct val="92000"/>
+              </a:lnSpc>
+              <a:buNone/>
+            </a:pPr>
+            <a:r>
+              <a:rPr lang="en-US" sz="1000" i="1" dirty="0">
+                <a:solidFill>
+                  <a:srgbClr val="5F7183"/>
+                </a:solidFill>
+                <a:latin typeface="Calibri" pitchFamily="34" charset="0"/>
+                <a:ea typeface="Calibri" pitchFamily="34" charset="-122"/>
+                <a:cs typeface="Calibri" pitchFamily="34" charset="-120"/>
+              </a:rPr>
+              <a:t>15 minutes. Answer in Japanese or English. Short answers are fine.</a:t>
+            </a:r>
+            <a:endParaRPr lang="en-US" sz="1300" dirty="0"/>
+          </a:p>
+        </p:txBody>
+      </p:sp>
+      <p:sp>
+        <p:nvSpPr>
+          <p:cNvPr id="5" name="Shape 2"/>
+          <p:cNvSpPr/>
+          <p:nvPr/>
+        </p:nvSpPr>
+        <p:spPr>
+          <a:xfrm>
+            <a:off x="640080" y="2194560"/>
+            <a:ext cx="10911535" cy="691286"/>
           </a:xfrm>
           <a:prstGeom prst="roundRect">
             <a:avLst>
-              <a:gd name="adj" fmla="val 4545"/>
+              <a:gd name="adj" fmla="val 5291"/>
             </a:avLst>
           </a:prstGeom>
           <a:solidFill>
@@ -3529,13 +3591,13 @@
       </p:sp>
       <p:sp>
         <p:nvSpPr>
-          <p:cNvPr id="5" name="Shape 2"/>
-          <p:cNvSpPr/>
-          <p:nvPr/>
-        </p:nvSpPr>
-        <p:spPr>
-          <a:xfrm>
-            <a:off x="822960" y="1865376"/>
+          <p:cNvPr id="6" name="Shape 3"/>
+          <p:cNvSpPr/>
+          <p:nvPr/>
+        </p:nvSpPr>
+        <p:spPr>
+          <a:xfrm>
+            <a:off x="822960" y="2375611"/>
             <a:ext cx="329184" cy="329184"/>
           </a:xfrm>
           <a:prstGeom prst="ellipse">
@@ -3549,13 +3611,13 @@
       </p:sp>
       <p:sp>
         <p:nvSpPr>
-          <p:cNvPr id="6" name="Text 3"/>
-          <p:cNvSpPr/>
-          <p:nvPr/>
-        </p:nvSpPr>
-        <p:spPr>
-          <a:xfrm>
-            <a:off x="822960" y="1865376"/>
+          <p:cNvPr id="7" name="Text 4"/>
+          <p:cNvSpPr/>
+          <p:nvPr/>
+        </p:nvSpPr>
+        <p:spPr>
+          <a:xfrm>
+            <a:off x="822960" y="2375611"/>
             <a:ext cx="329184" cy="329184"/>
           </a:xfrm>
           <a:prstGeom prst="rect">
@@ -3580,7 +3642,7 @@
                 <a:ea typeface="Calibri" pitchFamily="34" charset="-122"/>
                 <a:cs typeface="Calibri" pitchFamily="34" charset="-120"/>
               </a:rPr>
-              <a:t>6</a:t>
+              <a:t>1</a:t>
             </a:r>
             <a:endParaRPr lang="en-US" sz="1100" dirty="0"/>
           </a:p>
@@ -3588,14 +3650,14 @@
       </p:sp>
       <p:sp>
         <p:nvSpPr>
-          <p:cNvPr id="7" name="Text 4"/>
-          <p:cNvSpPr/>
-          <p:nvPr/>
-        </p:nvSpPr>
-        <p:spPr>
-          <a:xfrm>
-            <a:off x="1243584" y="1700784"/>
-            <a:ext cx="10070287" cy="658368"/>
+          <p:cNvPr id="8" name="Text 5"/>
+          <p:cNvSpPr/>
+          <p:nvPr/>
+        </p:nvSpPr>
+        <p:spPr>
+          <a:xfrm>
+            <a:off x="1243584" y="2267712"/>
+            <a:ext cx="10070287" cy="544982"/>
           </a:xfrm>
           <a:prstGeom prst="rect">
             <a:avLst/>
@@ -3622,7 +3684,7 @@
                 <a:ea typeface="Yu Gothic" pitchFamily="34" charset="-122"/>
                 <a:cs typeface="Yu Gothic" pitchFamily="34" charset="-120"/>
               </a:rPr>
-              <a:t>次の報告文の問題点を指摘し、書き直せ。「不審者が非常口から入りました」</a:t>
+              <a:t>警備員の法的な立場は何か。また、警察官にあって警備員にない権限を1つ挙げよ。</a:t>
             </a:r>
             <a:endParaRPr lang="en-US" sz="1150" dirty="0"/>
           </a:p>
@@ -3642,7 +3704,7 @@
                 <a:ea typeface="Calibri" pitchFamily="34" charset="-122"/>
                 <a:cs typeface="Calibri" pitchFamily="34" charset="-120"/>
               </a:rPr>
-              <a:t>What is wrong with this report, and how would you rewrite it? "An intruder came in through the emergency exit."</a:t>
+              <a:t>What is a guard's legal status? Name one power the police have and you do not.</a:t>
             </a:r>
             <a:endParaRPr lang="en-US" sz="1150" dirty="0"/>
           </a:p>
@@ -3650,18 +3712,18 @@
       </p:sp>
       <p:sp>
         <p:nvSpPr>
-          <p:cNvPr id="8" name="Shape 5"/>
-          <p:cNvSpPr/>
-          <p:nvPr/>
-        </p:nvSpPr>
-        <p:spPr>
-          <a:xfrm>
-            <a:off x="640080" y="2578608"/>
-            <a:ext cx="10911535" cy="804672"/>
+          <p:cNvPr id="9" name="Shape 6"/>
+          <p:cNvSpPr/>
+          <p:nvPr/>
+        </p:nvSpPr>
+        <p:spPr>
+          <a:xfrm>
+            <a:off x="640080" y="3032150"/>
+            <a:ext cx="10911535" cy="691286"/>
           </a:xfrm>
           <a:prstGeom prst="roundRect">
             <a:avLst>
-              <a:gd name="adj" fmla="val 4545"/>
+              <a:gd name="adj" fmla="val 5291"/>
             </a:avLst>
           </a:prstGeom>
           <a:solidFill>
@@ -3672,13 +3734,13 @@
       </p:sp>
       <p:sp>
         <p:nvSpPr>
-          <p:cNvPr id="9" name="Shape 6"/>
-          <p:cNvSpPr/>
-          <p:nvPr/>
-        </p:nvSpPr>
-        <p:spPr>
-          <a:xfrm>
-            <a:off x="822960" y="2816352"/>
+          <p:cNvPr id="10" name="Shape 7"/>
+          <p:cNvSpPr/>
+          <p:nvPr/>
+        </p:nvSpPr>
+        <p:spPr>
+          <a:xfrm>
+            <a:off x="822960" y="3213202"/>
             <a:ext cx="329184" cy="329184"/>
           </a:xfrm>
           <a:prstGeom prst="ellipse">
@@ -3692,13 +3754,13 @@
       </p:sp>
       <p:sp>
         <p:nvSpPr>
-          <p:cNvPr id="10" name="Text 7"/>
-          <p:cNvSpPr/>
-          <p:nvPr/>
-        </p:nvSpPr>
-        <p:spPr>
-          <a:xfrm>
-            <a:off x="822960" y="2816352"/>
+          <p:cNvPr id="11" name="Text 8"/>
+          <p:cNvSpPr/>
+          <p:nvPr/>
+        </p:nvSpPr>
+        <p:spPr>
+          <a:xfrm>
+            <a:off x="822960" y="3213202"/>
             <a:ext cx="329184" cy="329184"/>
           </a:xfrm>
           <a:prstGeom prst="rect">
@@ -3723,7 +3785,7 @@
                 <a:ea typeface="Calibri" pitchFamily="34" charset="-122"/>
                 <a:cs typeface="Calibri" pitchFamily="34" charset="-120"/>
               </a:rPr>
-              <a:t>7</a:t>
+              <a:t>2</a:t>
             </a:r>
             <a:endParaRPr lang="en-US" sz="1100" dirty="0"/>
           </a:p>
@@ -3731,14 +3793,14 @@
       </p:sp>
       <p:sp>
         <p:nvSpPr>
-          <p:cNvPr id="11" name="Text 8"/>
-          <p:cNvSpPr/>
-          <p:nvPr/>
-        </p:nvSpPr>
-        <p:spPr>
-          <a:xfrm>
-            <a:off x="1243584" y="2651760"/>
-            <a:ext cx="10070287" cy="658368"/>
+          <p:cNvPr id="12" name="Text 9"/>
+          <p:cNvSpPr/>
+          <p:nvPr/>
+        </p:nvSpPr>
+        <p:spPr>
+          <a:xfrm>
+            <a:off x="1243584" y="3105302"/>
+            <a:ext cx="10070287" cy="544982"/>
           </a:xfrm>
           <a:prstGeom prst="rect">
             <a:avLst/>
@@ -3765,7 +3827,7 @@
                 <a:ea typeface="Yu Gothic" pitchFamily="34" charset="-122"/>
                 <a:cs typeface="Yu Gothic" pitchFamily="34" charset="-120"/>
               </a:rPr>
-              <a:t>119番通報で、最初に伝えることは何か。</a:t>
+              <a:t>De-escalation の目的は何か。一言で述べよ。</a:t>
             </a:r>
             <a:endParaRPr lang="en-US" sz="1150" dirty="0"/>
           </a:p>
@@ -3785,7 +3847,7 @@
                 <a:ea typeface="Calibri" pitchFamily="34" charset="-122"/>
                 <a:cs typeface="Calibri" pitchFamily="34" charset="-120"/>
               </a:rPr>
-              <a:t>What must you say first when you call the fire service?</a:t>
+              <a:t>In one line: what is the aim of de-escalation?</a:t>
             </a:r>
             <a:endParaRPr lang="en-US" sz="1150" dirty="0"/>
           </a:p>
@@ -3793,18 +3855,18 @@
       </p:sp>
       <p:sp>
         <p:nvSpPr>
-          <p:cNvPr id="12" name="Shape 9"/>
-          <p:cNvSpPr/>
-          <p:nvPr/>
-        </p:nvSpPr>
-        <p:spPr>
-          <a:xfrm>
-            <a:off x="640080" y="3529584"/>
-            <a:ext cx="10911535" cy="804672"/>
+          <p:cNvPr id="13" name="Shape 10"/>
+          <p:cNvSpPr/>
+          <p:nvPr/>
+        </p:nvSpPr>
+        <p:spPr>
+          <a:xfrm>
+            <a:off x="640080" y="3869741"/>
+            <a:ext cx="10911535" cy="691286"/>
           </a:xfrm>
           <a:prstGeom prst="roundRect">
             <a:avLst>
-              <a:gd name="adj" fmla="val 4545"/>
+              <a:gd name="adj" fmla="val 5291"/>
             </a:avLst>
           </a:prstGeom>
           <a:solidFill>
@@ -3815,13 +3877,13 @@
       </p:sp>
       <p:sp>
         <p:nvSpPr>
-          <p:cNvPr id="13" name="Shape 10"/>
-          <p:cNvSpPr/>
-          <p:nvPr/>
-        </p:nvSpPr>
-        <p:spPr>
-          <a:xfrm>
-            <a:off x="822960" y="3767328"/>
+          <p:cNvPr id="14" name="Shape 11"/>
+          <p:cNvSpPr/>
+          <p:nvPr/>
+        </p:nvSpPr>
+        <p:spPr>
+          <a:xfrm>
+            <a:off x="822960" y="4050792"/>
             <a:ext cx="329184" cy="329184"/>
           </a:xfrm>
           <a:prstGeom prst="ellipse">
@@ -3835,13 +3897,13 @@
       </p:sp>
       <p:sp>
         <p:nvSpPr>
-          <p:cNvPr id="14" name="Text 11"/>
-          <p:cNvSpPr/>
-          <p:nvPr/>
-        </p:nvSpPr>
-        <p:spPr>
-          <a:xfrm>
-            <a:off x="822960" y="3767328"/>
+          <p:cNvPr id="15" name="Text 12"/>
+          <p:cNvSpPr/>
+          <p:nvPr/>
+        </p:nvSpPr>
+        <p:spPr>
+          <a:xfrm>
+            <a:off x="822960" y="4050792"/>
             <a:ext cx="329184" cy="329184"/>
           </a:xfrm>
           <a:prstGeom prst="rect">
@@ -3866,7 +3928,7 @@
                 <a:ea typeface="Calibri" pitchFamily="34" charset="-122"/>
                 <a:cs typeface="Calibri" pitchFamily="34" charset="-120"/>
               </a:rPr>
-              <a:t>8</a:t>
+              <a:t>3</a:t>
             </a:r>
             <a:endParaRPr lang="en-US" sz="1100" dirty="0"/>
           </a:p>
@@ -3874,14 +3936,14 @@
       </p:sp>
       <p:sp>
         <p:nvSpPr>
-          <p:cNvPr id="15" name="Text 12"/>
-          <p:cNvSpPr/>
-          <p:nvPr/>
-        </p:nvSpPr>
-        <p:spPr>
-          <a:xfrm>
-            <a:off x="1243584" y="3602736"/>
-            <a:ext cx="10070287" cy="658368"/>
+          <p:cNvPr id="16" name="Text 13"/>
+          <p:cNvSpPr/>
+          <p:nvPr/>
+        </p:nvSpPr>
+        <p:spPr>
+          <a:xfrm>
+            <a:off x="1243584" y="3942893"/>
+            <a:ext cx="10070287" cy="544982"/>
           </a:xfrm>
           <a:prstGeom prst="rect">
             <a:avLst/>
@@ -3908,7 +3970,7 @@
                 <a:ea typeface="Yu Gothic" pitchFamily="34" charset="-122"/>
                 <a:cs typeface="Yu Gothic" pitchFamily="34" charset="-120"/>
               </a:rPr>
-              <a:t>現場を変えてよい理由は何か。それ以外の場合はどうするか。</a:t>
+              <a:t>相手が引き下がれる形を残すのは、なぜか。</a:t>
             </a:r>
             <a:endParaRPr lang="en-US" sz="1150" dirty="0"/>
           </a:p>
@@ -3928,7 +3990,7 @@
                 <a:ea typeface="Calibri" pitchFamily="34" charset="-122"/>
                 <a:cs typeface="Calibri" pitchFamily="34" charset="-120"/>
               </a:rPr>
-              <a:t>For what reason may you alter the scene? And otherwise?</a:t>
+              <a:t>Why do you leave the other person a way to step back?</a:t>
             </a:r>
             <a:endParaRPr lang="en-US" sz="1150" dirty="0"/>
           </a:p>
@@ -3936,18 +3998,18 @@
       </p:sp>
       <p:sp>
         <p:nvSpPr>
-          <p:cNvPr id="16" name="Shape 13"/>
-          <p:cNvSpPr/>
-          <p:nvPr/>
-        </p:nvSpPr>
-        <p:spPr>
-          <a:xfrm>
-            <a:off x="640080" y="4480560"/>
-            <a:ext cx="10911535" cy="804672"/>
+          <p:cNvPr id="17" name="Shape 14"/>
+          <p:cNvSpPr/>
+          <p:nvPr/>
+        </p:nvSpPr>
+        <p:spPr>
+          <a:xfrm>
+            <a:off x="640080" y="4707331"/>
+            <a:ext cx="10911535" cy="691286"/>
           </a:xfrm>
           <a:prstGeom prst="roundRect">
             <a:avLst>
-              <a:gd name="adj" fmla="val 4545"/>
+              <a:gd name="adj" fmla="val 5291"/>
             </a:avLst>
           </a:prstGeom>
           <a:solidFill>
@@ -3958,13 +4020,13 @@
       </p:sp>
       <p:sp>
         <p:nvSpPr>
-          <p:cNvPr id="17" name="Shape 14"/>
-          <p:cNvSpPr/>
-          <p:nvPr/>
-        </p:nvSpPr>
-        <p:spPr>
-          <a:xfrm>
-            <a:off x="822960" y="4718304"/>
+          <p:cNvPr id="18" name="Shape 15"/>
+          <p:cNvSpPr/>
+          <p:nvPr/>
+        </p:nvSpPr>
+        <p:spPr>
+          <a:xfrm>
+            <a:off x="822960" y="4888382"/>
             <a:ext cx="329184" cy="329184"/>
           </a:xfrm>
           <a:prstGeom prst="ellipse">
@@ -3978,13 +4040,13 @@
       </p:sp>
       <p:sp>
         <p:nvSpPr>
-          <p:cNvPr id="18" name="Text 15"/>
-          <p:cNvSpPr/>
-          <p:nvPr/>
-        </p:nvSpPr>
-        <p:spPr>
-          <a:xfrm>
-            <a:off x="822960" y="4718304"/>
+          <p:cNvPr id="19" name="Text 16"/>
+          <p:cNvSpPr/>
+          <p:nvPr/>
+        </p:nvSpPr>
+        <p:spPr>
+          <a:xfrm>
+            <a:off x="822960" y="4888382"/>
             <a:ext cx="329184" cy="329184"/>
           </a:xfrm>
           <a:prstGeom prst="rect">
@@ -4009,7 +4071,7 @@
                 <a:ea typeface="Calibri" pitchFamily="34" charset="-122"/>
                 <a:cs typeface="Calibri" pitchFamily="34" charset="-120"/>
               </a:rPr>
-              <a:t>9</a:t>
+              <a:t>4</a:t>
             </a:r>
             <a:endParaRPr lang="en-US" sz="1100" dirty="0"/>
           </a:p>
@@ -4017,14 +4079,14 @@
       </p:sp>
       <p:sp>
         <p:nvSpPr>
-          <p:cNvPr id="19" name="Text 16"/>
-          <p:cNvSpPr/>
-          <p:nvPr/>
-        </p:nvSpPr>
-        <p:spPr>
-          <a:xfrm>
-            <a:off x="1243584" y="4553712"/>
-            <a:ext cx="10070287" cy="658368"/>
+          <p:cNvPr id="20" name="Text 17"/>
+          <p:cNvSpPr/>
+          <p:nvPr/>
+        </p:nvSpPr>
+        <p:spPr>
+          <a:xfrm>
+            <a:off x="1243584" y="4780483"/>
+            <a:ext cx="10070287" cy="544982"/>
           </a:xfrm>
           <a:prstGeom prst="rect">
             <a:avLst/>
@@ -4051,7 +4113,7 @@
                 <a:ea typeface="Yu Gothic" pitchFamily="34" charset="-122"/>
                 <a:cs typeface="Yu Gothic" pitchFamily="34" charset="-120"/>
               </a:rPr>
-              <a:t>受信機が発報した。最初に確認するものは何か。無線で「火事です」と言ってよいか。</a:t>
+              <a:t>対話が効いていないと判断する兆候を2つ挙げ、そのとき取る行動を順に述べよ。</a:t>
             </a:r>
             <a:endParaRPr lang="en-US" sz="1150" dirty="0"/>
           </a:p>
@@ -4071,7 +4133,7 @@
                 <a:ea typeface="Calibri" pitchFamily="34" charset="-122"/>
                 <a:cs typeface="Calibri" pitchFamily="34" charset="-120"/>
               </a:rPr>
-              <a:t>The panel activates. What do you check first? May you say "fire" on the radio?</a:t>
+              <a:t>Name two signs that talking is not working, and state the actions you take, in order.</a:t>
             </a:r>
             <a:endParaRPr lang="en-US" sz="1150" dirty="0"/>
           </a:p>
@@ -4079,18 +4141,18 @@
       </p:sp>
       <p:sp>
         <p:nvSpPr>
-          <p:cNvPr id="20" name="Shape 17"/>
-          <p:cNvSpPr/>
-          <p:nvPr/>
-        </p:nvSpPr>
-        <p:spPr>
-          <a:xfrm>
-            <a:off x="640080" y="5431536"/>
-            <a:ext cx="10911535" cy="804672"/>
+          <p:cNvPr id="21" name="Shape 18"/>
+          <p:cNvSpPr/>
+          <p:nvPr/>
+        </p:nvSpPr>
+        <p:spPr>
+          <a:xfrm>
+            <a:off x="640080" y="5544922"/>
+            <a:ext cx="10911535" cy="691286"/>
           </a:xfrm>
           <a:prstGeom prst="roundRect">
             <a:avLst>
-              <a:gd name="adj" fmla="val 4545"/>
+              <a:gd name="adj" fmla="val 5291"/>
             </a:avLst>
           </a:prstGeom>
           <a:solidFill>
@@ -4101,13 +4163,13 @@
       </p:sp>
       <p:sp>
         <p:nvSpPr>
-          <p:cNvPr id="21" name="Shape 18"/>
-          <p:cNvSpPr/>
-          <p:nvPr/>
-        </p:nvSpPr>
-        <p:spPr>
-          <a:xfrm>
-            <a:off x="822960" y="5669280"/>
+          <p:cNvPr id="22" name="Shape 19"/>
+          <p:cNvSpPr/>
+          <p:nvPr/>
+        </p:nvSpPr>
+        <p:spPr>
+          <a:xfrm>
+            <a:off x="822960" y="5725973"/>
             <a:ext cx="329184" cy="329184"/>
           </a:xfrm>
           <a:prstGeom prst="ellipse">
@@ -4121,13 +4183,13 @@
       </p:sp>
       <p:sp>
         <p:nvSpPr>
-          <p:cNvPr id="22" name="Text 19"/>
-          <p:cNvSpPr/>
-          <p:nvPr/>
-        </p:nvSpPr>
-        <p:spPr>
-          <a:xfrm>
-            <a:off x="822960" y="5669280"/>
+          <p:cNvPr id="23" name="Text 20"/>
+          <p:cNvSpPr/>
+          <p:nvPr/>
+        </p:nvSpPr>
+        <p:spPr>
+          <a:xfrm>
+            <a:off x="822960" y="5725973"/>
             <a:ext cx="329184" cy="329184"/>
           </a:xfrm>
           <a:prstGeom prst="rect">
@@ -4152,7 +4214,7 @@
                 <a:ea typeface="Calibri" pitchFamily="34" charset="-122"/>
                 <a:cs typeface="Calibri" pitchFamily="34" charset="-120"/>
               </a:rPr>
-              <a:t>10</a:t>
+              <a:t>5</a:t>
             </a:r>
             <a:endParaRPr lang="en-US" sz="1100" dirty="0"/>
           </a:p>
@@ -4160,14 +4222,14 @@
       </p:sp>
       <p:sp>
         <p:nvSpPr>
-          <p:cNvPr id="23" name="Text 20"/>
-          <p:cNvSpPr/>
-          <p:nvPr/>
-        </p:nvSpPr>
-        <p:spPr>
-          <a:xfrm>
-            <a:off x="1243584" y="5504688"/>
-            <a:ext cx="10070287" cy="658368"/>
+          <p:cNvPr id="24" name="Text 21"/>
+          <p:cNvSpPr/>
+          <p:nvPr/>
+        </p:nvSpPr>
+        <p:spPr>
+          <a:xfrm>
+            <a:off x="1243584" y="5618074"/>
+            <a:ext cx="10070287" cy="544982"/>
           </a:xfrm>
           <a:prstGeom prst="rect">
             <a:avLst/>
@@ -4194,7 +4256,7 @@
                 <a:ea typeface="Yu Gothic" pitchFamily="34" charset="-122"/>
                 <a:cs typeface="Yu Gothic" pitchFamily="34" charset="-120"/>
               </a:rPr>
-              <a:t>入退室ログの「保全」と「開示」の違いは何か。警備員が受けられるのはどちらか。</a:t>
+              <a:t>退去を求める根拠は、誰の意思に基づくか。</a:t>
             </a:r>
             <a:endParaRPr lang="en-US" sz="1150" dirty="0"/>
           </a:p>
@@ -4214,7 +4276,7 @@
                 <a:ea typeface="Calibri" pitchFamily="34" charset="-122"/>
                 <a:cs typeface="Calibri" pitchFamily="34" charset="-120"/>
               </a:rPr>
-              <a:t>What is the difference between preserving and disclosing an access log? Which may a guard accept?</a:t>
+              <a:t>A request to leave rests on whose intent?</a:t>
             </a:r>
             <a:endParaRPr lang="en-US" sz="1150" dirty="0"/>
           </a:p>
@@ -4222,7 +4284,7 @@
       </p:sp>
       <p:sp>
         <p:nvSpPr>
-          <p:cNvPr id="24" name="Text 21"/>
+          <p:cNvPr id="25" name="Text 22"/>
           <p:cNvSpPr/>
           <p:nvPr/>
         </p:nvSpPr>
@@ -4275,7 +4337,7 @@
       </p:sp>
       <p:sp>
         <p:nvSpPr>
-          <p:cNvPr id="25" name="Text 22"/>
+          <p:cNvPr id="26" name="Text 23"/>
           <p:cNvSpPr/>
           <p:nvPr/>
         </p:nvSpPr>
@@ -4376,8 +4438,8 @@
         </p:nvSpPr>
         <p:spPr>
           <a:xfrm>
-            <a:off x="640080" y="384048"/>
-            <a:ext cx="8982151" cy="768096"/>
+            <a:off x="640080" y="475488"/>
+            <a:ext cx="9805111" cy="960120"/>
           </a:xfrm>
           <a:prstGeom prst="rect">
             <a:avLst/>
@@ -4396,7 +4458,7 @@
               <a:buNone/>
             </a:pPr>
             <a:r>
-              <a:rPr lang="en-US" sz="2300" b="1" dirty="0">
+              <a:rPr lang="en-US" sz="2700" b="1" dirty="0">
                 <a:solidFill>
                   <a:srgbClr val="093259"/>
                 </a:solidFill>
@@ -4404,9 +4466,9 @@
                 <a:ea typeface="Yu Gothic" pitchFamily="34" charset="-122"/>
                 <a:cs typeface="Yu Gothic" pitchFamily="34" charset="-120"/>
               </a:rPr>
-              <a:t>確認テスト　解答と解説　問1〜問5</a:t>
-            </a:r>
-            <a:endParaRPr lang="en-US" sz="2300" dirty="0"/>
+              <a:t>確認テスト　問6〜問10</a:t>
+            </a:r>
+            <a:endParaRPr lang="en-US" sz="2700" dirty="0"/>
           </a:p>
           <a:p>
             <a:pPr indent="0" marL="0">
@@ -4416,7 +4478,7 @@
               <a:buNone/>
             </a:pPr>
             <a:r>
-              <a:rPr lang="en-US" sz="1100" i="1" dirty="0">
+              <a:rPr lang="en-US" sz="1250" i="1" dirty="0">
                 <a:solidFill>
                   <a:srgbClr val="12B198"/>
                 </a:solidFill>
@@ -4424,9 +4486,9 @@
                 <a:ea typeface="Calibri" pitchFamily="34" charset="-122"/>
                 <a:cs typeface="Calibri" pitchFamily="34" charset="-120"/>
               </a:rPr>
-              <a:t>Assessment — Answers 1 to 5</a:t>
-            </a:r>
-            <a:endParaRPr lang="en-US" sz="2300" dirty="0"/>
+              <a:t>Assessment — Questions 6 to 10</a:t>
+            </a:r>
+            <a:endParaRPr lang="en-US" sz="2700" dirty="0"/>
           </a:p>
         </p:txBody>
       </p:sp>
@@ -4438,13 +4500,33 @@
         </p:nvSpPr>
         <p:spPr>
           <a:xfrm>
-            <a:off x="9686239" y="438912"/>
-            <a:ext cx="932688" cy="310896"/>
+            <a:off x="640080" y="1627632"/>
+            <a:ext cx="10911535" cy="804672"/>
           </a:xfrm>
           <a:prstGeom prst="roundRect">
             <a:avLst>
-              <a:gd name="adj" fmla="val 14706"/>
+              <a:gd name="adj" fmla="val 4545"/>
             </a:avLst>
+          </a:prstGeom>
+          <a:solidFill>
+            <a:srgbClr val="EFF4F8"/>
+          </a:solidFill>
+          <a:ln/>
+        </p:spPr>
+      </p:sp>
+      <p:sp>
+        <p:nvSpPr>
+          <p:cNvPr id="5" name="Shape 2"/>
+          <p:cNvSpPr/>
+          <p:nvPr/>
+        </p:nvSpPr>
+        <p:spPr>
+          <a:xfrm>
+            <a:off x="822960" y="1865376"/>
+            <a:ext cx="329184" cy="329184"/>
+          </a:xfrm>
+          <a:prstGeom prst="ellipse">
+            <a:avLst/>
           </a:prstGeom>
           <a:solidFill>
             <a:srgbClr val="093259"/>
@@ -4454,14 +4536,14 @@
       </p:sp>
       <p:sp>
         <p:nvSpPr>
-          <p:cNvPr id="5" name="Text 2"/>
-          <p:cNvSpPr/>
-          <p:nvPr/>
-        </p:nvSpPr>
-        <p:spPr>
-          <a:xfrm>
-            <a:off x="9686239" y="438912"/>
-            <a:ext cx="932688" cy="310896"/>
+          <p:cNvPr id="6" name="Text 3"/>
+          <p:cNvSpPr/>
+          <p:nvPr/>
+        </p:nvSpPr>
+        <p:spPr>
+          <a:xfrm>
+            <a:off x="822960" y="1865376"/>
+            <a:ext cx="329184" cy="329184"/>
           </a:xfrm>
           <a:prstGeom prst="rect">
             <a:avLst/>
@@ -4485,7 +4567,7 @@
                 <a:ea typeface="Calibri" pitchFamily="34" charset="-122"/>
                 <a:cs typeface="Calibri" pitchFamily="34" charset="-120"/>
               </a:rPr>
-              <a:t>ANSWERS</a:t>
+              <a:t>6</a:t>
             </a:r>
             <a:endParaRPr lang="en-US" sz="1100" dirty="0"/>
           </a:p>
@@ -4493,181 +4575,80 @@
       </p:sp>
       <p:sp>
         <p:nvSpPr>
-          <p:cNvPr id="6" name="Shape 3"/>
-          <p:cNvSpPr/>
-          <p:nvPr/>
-        </p:nvSpPr>
-        <p:spPr>
-          <a:xfrm>
-            <a:off x="640080" y="1188720"/>
-            <a:ext cx="10911535" cy="844906"/>
+          <p:cNvPr id="7" name="Text 4"/>
+          <p:cNvSpPr/>
+          <p:nvPr/>
+        </p:nvSpPr>
+        <p:spPr>
+          <a:xfrm>
+            <a:off x="1243584" y="1700784"/>
+            <a:ext cx="10070287" cy="658368"/>
+          </a:xfrm>
+          <a:prstGeom prst="rect">
+            <a:avLst/>
+          </a:prstGeom>
+          <a:noFill/>
+          <a:ln/>
+        </p:spPr>
+        <p:txBody>
+          <a:bodyPr wrap="square" lIns="0" tIns="0" rIns="0" bIns="0" rtlCol="0" anchor="ctr"/>
+          <a:lstStyle/>
+          <a:p>
+            <a:pPr indent="0" marL="0">
+              <a:lnSpc>
+                <a:spcPct val="90000"/>
+              </a:lnSpc>
+              <a:buNone/>
+            </a:pPr>
+            <a:r>
+              <a:rPr lang="en-US" sz="1150" b="1" dirty="0">
+                <a:solidFill>
+                  <a:srgbClr val="1B2733"/>
+                </a:solidFill>
+                <a:latin typeface="Yu Gothic" pitchFamily="34" charset="0"/>
+                <a:ea typeface="Yu Gothic" pitchFamily="34" charset="-122"/>
+                <a:cs typeface="Yu Gothic" pitchFamily="34" charset="-120"/>
+              </a:rPr>
+              <a:t>20時15分、B1東側の非常口が15cmほど開いていた。施錠されているはずの扉で、付近に人影はない。同僚は「不審者が非常口から入りました」と報告した。問題点を指摘し、あなたなら何と報告するか書け。</a:t>
+            </a:r>
+            <a:endParaRPr lang="en-US" sz="1150" dirty="0"/>
+          </a:p>
+          <a:p>
+            <a:pPr indent="0" marL="0">
+              <a:lnSpc>
+                <a:spcPct val="90000"/>
+              </a:lnSpc>
+              <a:buNone/>
+            </a:pPr>
+            <a:r>
+              <a:rPr lang="en-US" sz="900" i="1" dirty="0">
+                <a:solidFill>
+                  <a:srgbClr val="5F7183"/>
+                </a:solidFill>
+                <a:latin typeface="Calibri" pitchFamily="34" charset="0"/>
+                <a:ea typeface="Calibri" pitchFamily="34" charset="-122"/>
+                <a:cs typeface="Calibri" pitchFamily="34" charset="-120"/>
+              </a:rPr>
+              <a:t>At 20:15 the B1 east emergency door stood about 15 cm open. It should have been locked, and nobody was nearby. A colleague reported: "An intruder came in through the emergency exit." What is wrong with that, and what would you report?</a:t>
+            </a:r>
+            <a:endParaRPr lang="en-US" sz="1150" dirty="0"/>
+          </a:p>
+        </p:txBody>
+      </p:sp>
+      <p:sp>
+        <p:nvSpPr>
+          <p:cNvPr id="8" name="Shape 5"/>
+          <p:cNvSpPr/>
+          <p:nvPr/>
+        </p:nvSpPr>
+        <p:spPr>
+          <a:xfrm>
+            <a:off x="640080" y="2578608"/>
+            <a:ext cx="10911535" cy="804672"/>
           </a:xfrm>
           <a:prstGeom prst="roundRect">
             <a:avLst>
-              <a:gd name="adj" fmla="val 4329"/>
-            </a:avLst>
-          </a:prstGeom>
-          <a:solidFill>
-            <a:srgbClr val="E4F4F0"/>
-          </a:solidFill>
-          <a:ln/>
-        </p:spPr>
-      </p:sp>
-      <p:sp>
-        <p:nvSpPr>
-          <p:cNvPr id="7" name="Shape 4"/>
-          <p:cNvSpPr/>
-          <p:nvPr/>
-        </p:nvSpPr>
-        <p:spPr>
-          <a:xfrm>
-            <a:off x="841248" y="1437437"/>
-            <a:ext cx="347472" cy="347472"/>
-          </a:xfrm>
-          <a:prstGeom prst="ellipse">
-            <a:avLst/>
-          </a:prstGeom>
-          <a:solidFill>
-            <a:srgbClr val="12B198"/>
-          </a:solidFill>
-          <a:ln/>
-        </p:spPr>
-      </p:sp>
-      <p:sp>
-        <p:nvSpPr>
-          <p:cNvPr id="8" name="Text 5"/>
-          <p:cNvSpPr/>
-          <p:nvPr/>
-        </p:nvSpPr>
-        <p:spPr>
-          <a:xfrm>
-            <a:off x="841248" y="1437437"/>
-            <a:ext cx="347472" cy="347472"/>
-          </a:xfrm>
-          <a:prstGeom prst="rect">
-            <a:avLst/>
-          </a:prstGeom>
-          <a:noFill/>
-          <a:ln/>
-        </p:spPr>
-        <p:txBody>
-          <a:bodyPr wrap="square" lIns="0" tIns="0" rIns="0" bIns="0" rtlCol="0" anchor="ctr"/>
-          <a:lstStyle/>
-          <a:p>
-            <a:pPr algn="ctr" indent="0" marL="0">
-              <a:buNone/>
-            </a:pPr>
-            <a:r>
-              <a:rPr lang="en-US" sz="1100" b="1" dirty="0">
-                <a:solidFill>
-                  <a:srgbClr val="FFFFFF"/>
-                </a:solidFill>
-                <a:latin typeface="Calibri" pitchFamily="34" charset="0"/>
-                <a:ea typeface="Calibri" pitchFamily="34" charset="-122"/>
-                <a:cs typeface="Calibri" pitchFamily="34" charset="-120"/>
-              </a:rPr>
-              <a:t>1</a:t>
-            </a:r>
-            <a:endParaRPr lang="en-US" sz="1100" dirty="0"/>
-          </a:p>
-        </p:txBody>
-      </p:sp>
-      <p:sp>
-        <p:nvSpPr>
-          <p:cNvPr id="9" name="Text 6"/>
-          <p:cNvSpPr/>
-          <p:nvPr/>
-        </p:nvSpPr>
-        <p:spPr>
-          <a:xfrm>
-            <a:off x="1280160" y="1252728"/>
-            <a:ext cx="10033711" cy="716890"/>
-          </a:xfrm>
-          <a:prstGeom prst="rect">
-            <a:avLst/>
-          </a:prstGeom>
-          <a:noFill/>
-          <a:ln/>
-        </p:spPr>
-        <p:txBody>
-          <a:bodyPr wrap="square" lIns="0" tIns="0" rIns="0" bIns="0" rtlCol="0" anchor="ctr"/>
-          <a:lstStyle/>
-          <a:p>
-            <a:pPr indent="0" marL="0">
-              <a:lnSpc>
-                <a:spcPct val="88000"/>
-              </a:lnSpc>
-              <a:buNone/>
-            </a:pPr>
-            <a:r>
-              <a:rPr lang="en-US" sz="900" dirty="0">
-                <a:solidFill>
-                  <a:srgbClr val="5F7183"/>
-                </a:solidFill>
-                <a:latin typeface="Yu Gothic" pitchFamily="34" charset="0"/>
-                <a:ea typeface="Yu Gothic" pitchFamily="34" charset="-122"/>
-                <a:cs typeface="Yu Gothic" pitchFamily="34" charset="-120"/>
-              </a:rPr>
-              <a:t>問1　法的な立場と、警察にあって警備員にない権限</a:t>
-            </a:r>
-            <a:endParaRPr lang="en-US" sz="900" dirty="0"/>
-          </a:p>
-          <a:p>
-            <a:pPr indent="0" marL="0">
-              <a:lnSpc>
-                <a:spcPct val="88000"/>
-              </a:lnSpc>
-              <a:buNone/>
-            </a:pPr>
-            <a:r>
-              <a:rPr lang="en-US" sz="1200" b="1" dirty="0">
-                <a:solidFill>
-                  <a:srgbClr val="1B2733"/>
-                </a:solidFill>
-                <a:latin typeface="Yu Gothic" pitchFamily="34" charset="0"/>
-                <a:ea typeface="Yu Gothic" pitchFamily="34" charset="-122"/>
-                <a:cs typeface="Yu Gothic" pitchFamily="34" charset="-120"/>
-              </a:rPr>
-              <a:t>私人。制服により権限は加わらない。／ 職務質問、保護、避難等の措置、制止、立入、武器の使用、逮捕状による逮捕のいずれか1つ。</a:t>
-            </a:r>
-            <a:endParaRPr lang="en-US" sz="900" dirty="0"/>
-          </a:p>
-          <a:p>
-            <a:pPr indent="0" marL="0">
-              <a:lnSpc>
-                <a:spcPct val="88000"/>
-              </a:lnSpc>
-              <a:buNone/>
-            </a:pPr>
-            <a:r>
-              <a:rPr lang="en-US" sz="800" i="1" dirty="0">
-                <a:solidFill>
-                  <a:srgbClr val="5F7183"/>
-                </a:solidFill>
-                <a:latin typeface="Calibri" pitchFamily="34" charset="0"/>
-                <a:ea typeface="Calibri" pitchFamily="34" charset="-122"/>
-                <a:cs typeface="Calibri" pitchFamily="34" charset="-120"/>
-              </a:rPr>
-              <a:t>A private citizen; the uniform adds nothing. Any one of: stop and question, protective custody, evacuation orders, stopping a crime, entry, weapons, arrest by warrant.</a:t>
-            </a:r>
-            <a:endParaRPr lang="en-US" sz="900" dirty="0"/>
-          </a:p>
-        </p:txBody>
-      </p:sp>
-      <p:sp>
-        <p:nvSpPr>
-          <p:cNvPr id="10" name="Shape 7"/>
-          <p:cNvSpPr/>
-          <p:nvPr/>
-        </p:nvSpPr>
-        <p:spPr>
-          <a:xfrm>
-            <a:off x="640080" y="2134210"/>
-            <a:ext cx="10911535" cy="844906"/>
-          </a:xfrm>
-          <a:prstGeom prst="roundRect">
-            <a:avLst>
-              <a:gd name="adj" fmla="val 4329"/>
+              <a:gd name="adj" fmla="val 4545"/>
             </a:avLst>
           </a:prstGeom>
           <a:solidFill>
@@ -4678,34 +4659,34 @@
       </p:sp>
       <p:sp>
         <p:nvSpPr>
-          <p:cNvPr id="11" name="Shape 8"/>
-          <p:cNvSpPr/>
-          <p:nvPr/>
-        </p:nvSpPr>
-        <p:spPr>
-          <a:xfrm>
-            <a:off x="841248" y="2382926"/>
-            <a:ext cx="347472" cy="347472"/>
+          <p:cNvPr id="9" name="Shape 6"/>
+          <p:cNvSpPr/>
+          <p:nvPr/>
+        </p:nvSpPr>
+        <p:spPr>
+          <a:xfrm>
+            <a:off x="822960" y="2816352"/>
+            <a:ext cx="329184" cy="329184"/>
           </a:xfrm>
           <a:prstGeom prst="ellipse">
             <a:avLst/>
           </a:prstGeom>
           <a:solidFill>
-            <a:srgbClr val="12B198"/>
+            <a:srgbClr val="093259"/>
           </a:solidFill>
           <a:ln/>
         </p:spPr>
       </p:sp>
       <p:sp>
         <p:nvSpPr>
-          <p:cNvPr id="12" name="Text 9"/>
-          <p:cNvSpPr/>
-          <p:nvPr/>
-        </p:nvSpPr>
-        <p:spPr>
-          <a:xfrm>
-            <a:off x="841248" y="2382926"/>
-            <a:ext cx="347472" cy="347472"/>
+          <p:cNvPr id="10" name="Text 7"/>
+          <p:cNvSpPr/>
+          <p:nvPr/>
+        </p:nvSpPr>
+        <p:spPr>
+          <a:xfrm>
+            <a:off x="822960" y="2816352"/>
+            <a:ext cx="329184" cy="329184"/>
           </a:xfrm>
           <a:prstGeom prst="rect">
             <a:avLst/>
@@ -4729,7 +4710,7 @@
                 <a:ea typeface="Calibri" pitchFamily="34" charset="-122"/>
                 <a:cs typeface="Calibri" pitchFamily="34" charset="-120"/>
               </a:rPr>
-              <a:t>2</a:t>
+              <a:t>7</a:t>
             </a:r>
             <a:endParaRPr lang="en-US" sz="1100" dirty="0"/>
           </a:p>
@@ -4737,14 +4718,14 @@
       </p:sp>
       <p:sp>
         <p:nvSpPr>
-          <p:cNvPr id="13" name="Text 10"/>
-          <p:cNvSpPr/>
-          <p:nvPr/>
-        </p:nvSpPr>
-        <p:spPr>
-          <a:xfrm>
-            <a:off x="1280160" y="2198218"/>
-            <a:ext cx="10033711" cy="716890"/>
+          <p:cNvPr id="11" name="Text 8"/>
+          <p:cNvSpPr/>
+          <p:nvPr/>
+        </p:nvSpPr>
+        <p:spPr>
+          <a:xfrm>
+            <a:off x="1243584" y="2651760"/>
+            <a:ext cx="10070287" cy="658368"/>
           </a:xfrm>
           <a:prstGeom prst="rect">
             <a:avLst/>
@@ -4758,79 +4739,59 @@
           <a:p>
             <a:pPr indent="0" marL="0">
               <a:lnSpc>
-                <a:spcPct val="88000"/>
-              </a:lnSpc>
-              <a:buNone/>
-            </a:pPr>
-            <a:r>
-              <a:rPr lang="en-US" sz="900" dirty="0">
+                <a:spcPct val="90000"/>
+              </a:lnSpc>
+              <a:buNone/>
+            </a:pPr>
+            <a:r>
+              <a:rPr lang="en-US" sz="1150" b="1" dirty="0">
+                <a:solidFill>
+                  <a:srgbClr val="1B2733"/>
+                </a:solidFill>
+                <a:latin typeface="Yu Gothic" pitchFamily="34" charset="0"/>
+                <a:ea typeface="Yu Gothic" pitchFamily="34" charset="-122"/>
+                <a:cs typeface="Yu Gothic" pitchFamily="34" charset="-120"/>
+              </a:rPr>
+              <a:t>119番通報で、最初に伝えることは何か。</a:t>
+            </a:r>
+            <a:endParaRPr lang="en-US" sz="1150" dirty="0"/>
+          </a:p>
+          <a:p>
+            <a:pPr indent="0" marL="0">
+              <a:lnSpc>
+                <a:spcPct val="90000"/>
+              </a:lnSpc>
+              <a:buNone/>
+            </a:pPr>
+            <a:r>
+              <a:rPr lang="en-US" sz="900" i="1" dirty="0">
                 <a:solidFill>
                   <a:srgbClr val="5F7183"/>
                 </a:solidFill>
-                <a:latin typeface="Yu Gothic" pitchFamily="34" charset="0"/>
-                <a:ea typeface="Yu Gothic" pitchFamily="34" charset="-122"/>
-                <a:cs typeface="Yu Gothic" pitchFamily="34" charset="-120"/>
-              </a:rPr>
-              <a:t>問2　De-escalation の目的</a:t>
-            </a:r>
-            <a:endParaRPr lang="en-US" sz="900" dirty="0"/>
-          </a:p>
-          <a:p>
-            <a:pPr indent="0" marL="0">
-              <a:lnSpc>
-                <a:spcPct val="88000"/>
-              </a:lnSpc>
-              <a:buNone/>
-            </a:pPr>
-            <a:r>
-              <a:rPr lang="en-US" sz="1200" b="1" dirty="0">
-                <a:solidFill>
-                  <a:srgbClr val="1B2733"/>
-                </a:solidFill>
-                <a:latin typeface="Yu Gothic" pitchFamily="34" charset="0"/>
-                <a:ea typeface="Yu Gothic" pitchFamily="34" charset="-122"/>
-                <a:cs typeface="Yu Gothic" pitchFamily="34" charset="-120"/>
-              </a:rPr>
-              <a:t>有形力を使わずに緊張を下げ、その場を安全に終えること。勝つことではない。</a:t>
-            </a:r>
-            <a:endParaRPr lang="en-US" sz="900" dirty="0"/>
-          </a:p>
-          <a:p>
-            <a:pPr indent="0" marL="0">
-              <a:lnSpc>
-                <a:spcPct val="88000"/>
-              </a:lnSpc>
-              <a:buNone/>
-            </a:pPr>
-            <a:r>
-              <a:rPr lang="en-US" sz="800" i="1" dirty="0">
-                <a:solidFill>
-                  <a:srgbClr val="5F7183"/>
-                </a:solidFill>
-                <a:latin typeface="Calibri" pitchFamily="34" charset="0"/>
-                <a:ea typeface="Calibri" pitchFamily="34" charset="-122"/>
-                <a:cs typeface="Calibri" pitchFamily="34" charset="-120"/>
-              </a:rPr>
-              <a:t>To lower tension without force and end the situation safely. Not to win.</a:t>
-            </a:r>
-            <a:endParaRPr lang="en-US" sz="900" dirty="0"/>
-          </a:p>
-        </p:txBody>
-      </p:sp>
-      <p:sp>
-        <p:nvSpPr>
-          <p:cNvPr id="14" name="Shape 11"/>
-          <p:cNvSpPr/>
-          <p:nvPr/>
-        </p:nvSpPr>
-        <p:spPr>
-          <a:xfrm>
-            <a:off x="640080" y="3079699"/>
-            <a:ext cx="10911535" cy="844906"/>
+                <a:latin typeface="Calibri" pitchFamily="34" charset="0"/>
+                <a:ea typeface="Calibri" pitchFamily="34" charset="-122"/>
+                <a:cs typeface="Calibri" pitchFamily="34" charset="-120"/>
+              </a:rPr>
+              <a:t>What must you say first when you call the fire service?</a:t>
+            </a:r>
+            <a:endParaRPr lang="en-US" sz="1150" dirty="0"/>
+          </a:p>
+        </p:txBody>
+      </p:sp>
+      <p:sp>
+        <p:nvSpPr>
+          <p:cNvPr id="12" name="Shape 9"/>
+          <p:cNvSpPr/>
+          <p:nvPr/>
+        </p:nvSpPr>
+        <p:spPr>
+          <a:xfrm>
+            <a:off x="640080" y="3529584"/>
+            <a:ext cx="10911535" cy="804672"/>
           </a:xfrm>
           <a:prstGeom prst="roundRect">
             <a:avLst>
-              <a:gd name="adj" fmla="val 4329"/>
+              <a:gd name="adj" fmla="val 4545"/>
             </a:avLst>
           </a:prstGeom>
           <a:solidFill>
@@ -4841,34 +4802,34 @@
       </p:sp>
       <p:sp>
         <p:nvSpPr>
-          <p:cNvPr id="15" name="Shape 12"/>
-          <p:cNvSpPr/>
-          <p:nvPr/>
-        </p:nvSpPr>
-        <p:spPr>
-          <a:xfrm>
-            <a:off x="841248" y="3328416"/>
-            <a:ext cx="347472" cy="347472"/>
+          <p:cNvPr id="13" name="Shape 10"/>
+          <p:cNvSpPr/>
+          <p:nvPr/>
+        </p:nvSpPr>
+        <p:spPr>
+          <a:xfrm>
+            <a:off x="822960" y="3767328"/>
+            <a:ext cx="329184" cy="329184"/>
           </a:xfrm>
           <a:prstGeom prst="ellipse">
             <a:avLst/>
           </a:prstGeom>
           <a:solidFill>
-            <a:srgbClr val="12B198"/>
+            <a:srgbClr val="093259"/>
           </a:solidFill>
           <a:ln/>
         </p:spPr>
       </p:sp>
       <p:sp>
         <p:nvSpPr>
-          <p:cNvPr id="16" name="Text 13"/>
-          <p:cNvSpPr/>
-          <p:nvPr/>
-        </p:nvSpPr>
-        <p:spPr>
-          <a:xfrm>
-            <a:off x="841248" y="3328416"/>
-            <a:ext cx="347472" cy="347472"/>
+          <p:cNvPr id="14" name="Text 11"/>
+          <p:cNvSpPr/>
+          <p:nvPr/>
+        </p:nvSpPr>
+        <p:spPr>
+          <a:xfrm>
+            <a:off x="822960" y="3767328"/>
+            <a:ext cx="329184" cy="329184"/>
           </a:xfrm>
           <a:prstGeom prst="rect">
             <a:avLst/>
@@ -4892,7 +4853,7 @@
                 <a:ea typeface="Calibri" pitchFamily="34" charset="-122"/>
                 <a:cs typeface="Calibri" pitchFamily="34" charset="-120"/>
               </a:rPr>
-              <a:t>3</a:t>
+              <a:t>8</a:t>
             </a:r>
             <a:endParaRPr lang="en-US" sz="1100" dirty="0"/>
           </a:p>
@@ -4900,14 +4861,14 @@
       </p:sp>
       <p:sp>
         <p:nvSpPr>
-          <p:cNvPr id="17" name="Text 14"/>
-          <p:cNvSpPr/>
-          <p:nvPr/>
-        </p:nvSpPr>
-        <p:spPr>
-          <a:xfrm>
-            <a:off x="1280160" y="3143707"/>
-            <a:ext cx="10033711" cy="716890"/>
+          <p:cNvPr id="15" name="Text 12"/>
+          <p:cNvSpPr/>
+          <p:nvPr/>
+        </p:nvSpPr>
+        <p:spPr>
+          <a:xfrm>
+            <a:off x="1243584" y="3602736"/>
+            <a:ext cx="10070287" cy="658368"/>
           </a:xfrm>
           <a:prstGeom prst="rect">
             <a:avLst/>
@@ -4921,79 +4882,59 @@
           <a:p>
             <a:pPr indent="0" marL="0">
               <a:lnSpc>
-                <a:spcPct val="88000"/>
-              </a:lnSpc>
-              <a:buNone/>
-            </a:pPr>
-            <a:r>
-              <a:rPr lang="en-US" sz="900" dirty="0">
+                <a:spcPct val="90000"/>
+              </a:lnSpc>
+              <a:buNone/>
+            </a:pPr>
+            <a:r>
+              <a:rPr lang="en-US" sz="1150" b="1" dirty="0">
+                <a:solidFill>
+                  <a:srgbClr val="1B2733"/>
+                </a:solidFill>
+                <a:latin typeface="Yu Gothic" pitchFamily="34" charset="0"/>
+                <a:ea typeface="Yu Gothic" pitchFamily="34" charset="-122"/>
+                <a:cs typeface="Yu Gothic" pitchFamily="34" charset="-120"/>
+              </a:rPr>
+              <a:t>現場を変えてよい理由は何か。それ以外の場合はどうするか。</a:t>
+            </a:r>
+            <a:endParaRPr lang="en-US" sz="1150" dirty="0"/>
+          </a:p>
+          <a:p>
+            <a:pPr indent="0" marL="0">
+              <a:lnSpc>
+                <a:spcPct val="90000"/>
+              </a:lnSpc>
+              <a:buNone/>
+            </a:pPr>
+            <a:r>
+              <a:rPr lang="en-US" sz="900" i="1" dirty="0">
                 <a:solidFill>
                   <a:srgbClr val="5F7183"/>
                 </a:solidFill>
-                <a:latin typeface="Yu Gothic" pitchFamily="34" charset="0"/>
-                <a:ea typeface="Yu Gothic" pitchFamily="34" charset="-122"/>
-                <a:cs typeface="Yu Gothic" pitchFamily="34" charset="-120"/>
-              </a:rPr>
-              <a:t>問3　引き下がれる形を残す理由</a:t>
-            </a:r>
-            <a:endParaRPr lang="en-US" sz="900" dirty="0"/>
-          </a:p>
-          <a:p>
-            <a:pPr indent="0" marL="0">
-              <a:lnSpc>
-                <a:spcPct val="88000"/>
-              </a:lnSpc>
-              <a:buNone/>
-            </a:pPr>
-            <a:r>
-              <a:rPr lang="en-US" sz="1200" b="1" dirty="0">
-                <a:solidFill>
-                  <a:srgbClr val="1B2733"/>
-                </a:solidFill>
-                <a:latin typeface="Yu Gothic" pitchFamily="34" charset="0"/>
-                <a:ea typeface="Yu Gothic" pitchFamily="34" charset="-122"/>
-                <a:cs typeface="Yu Gothic" pitchFamily="34" charset="-120"/>
-              </a:rPr>
-              <a:t>逃げ道がないと、相手は引き下がれず対立を続けるほかなくなるため。</a:t>
-            </a:r>
-            <a:endParaRPr lang="en-US" sz="900" dirty="0"/>
-          </a:p>
-          <a:p>
-            <a:pPr indent="0" marL="0">
-              <a:lnSpc>
-                <a:spcPct val="88000"/>
-              </a:lnSpc>
-              <a:buNone/>
-            </a:pPr>
-            <a:r>
-              <a:rPr lang="en-US" sz="800" i="1" dirty="0">
-                <a:solidFill>
-                  <a:srgbClr val="5F7183"/>
-                </a:solidFill>
-                <a:latin typeface="Calibri" pitchFamily="34" charset="0"/>
-                <a:ea typeface="Calibri" pitchFamily="34" charset="-122"/>
-                <a:cs typeface="Calibri" pitchFamily="34" charset="-120"/>
-              </a:rPr>
-              <a:t>Without a way out, the person has no option but to keep fighting.</a:t>
-            </a:r>
-            <a:endParaRPr lang="en-US" sz="900" dirty="0"/>
-          </a:p>
-        </p:txBody>
-      </p:sp>
-      <p:sp>
-        <p:nvSpPr>
-          <p:cNvPr id="18" name="Shape 15"/>
-          <p:cNvSpPr/>
-          <p:nvPr/>
-        </p:nvSpPr>
-        <p:spPr>
-          <a:xfrm>
-            <a:off x="640080" y="4025189"/>
-            <a:ext cx="10911535" cy="844906"/>
+                <a:latin typeface="Calibri" pitchFamily="34" charset="0"/>
+                <a:ea typeface="Calibri" pitchFamily="34" charset="-122"/>
+                <a:cs typeface="Calibri" pitchFamily="34" charset="-120"/>
+              </a:rPr>
+              <a:t>For what reason may you alter the scene? And otherwise?</a:t>
+            </a:r>
+            <a:endParaRPr lang="en-US" sz="1150" dirty="0"/>
+          </a:p>
+        </p:txBody>
+      </p:sp>
+      <p:sp>
+        <p:nvSpPr>
+          <p:cNvPr id="16" name="Shape 13"/>
+          <p:cNvSpPr/>
+          <p:nvPr/>
+        </p:nvSpPr>
+        <p:spPr>
+          <a:xfrm>
+            <a:off x="640080" y="4480560"/>
+            <a:ext cx="10911535" cy="804672"/>
           </a:xfrm>
           <a:prstGeom prst="roundRect">
             <a:avLst>
-              <a:gd name="adj" fmla="val 4329"/>
+              <a:gd name="adj" fmla="val 4545"/>
             </a:avLst>
           </a:prstGeom>
           <a:solidFill>
@@ -5004,34 +4945,34 @@
       </p:sp>
       <p:sp>
         <p:nvSpPr>
-          <p:cNvPr id="19" name="Shape 16"/>
-          <p:cNvSpPr/>
-          <p:nvPr/>
-        </p:nvSpPr>
-        <p:spPr>
-          <a:xfrm>
-            <a:off x="841248" y="4273906"/>
-            <a:ext cx="347472" cy="347472"/>
+          <p:cNvPr id="17" name="Shape 14"/>
+          <p:cNvSpPr/>
+          <p:nvPr/>
+        </p:nvSpPr>
+        <p:spPr>
+          <a:xfrm>
+            <a:off x="822960" y="4718304"/>
+            <a:ext cx="329184" cy="329184"/>
           </a:xfrm>
           <a:prstGeom prst="ellipse">
             <a:avLst/>
           </a:prstGeom>
           <a:solidFill>
-            <a:srgbClr val="12B198"/>
+            <a:srgbClr val="093259"/>
           </a:solidFill>
           <a:ln/>
         </p:spPr>
       </p:sp>
       <p:sp>
         <p:nvSpPr>
-          <p:cNvPr id="20" name="Text 17"/>
-          <p:cNvSpPr/>
-          <p:nvPr/>
-        </p:nvSpPr>
-        <p:spPr>
-          <a:xfrm>
-            <a:off x="841248" y="4273906"/>
-            <a:ext cx="347472" cy="347472"/>
+          <p:cNvPr id="18" name="Text 15"/>
+          <p:cNvSpPr/>
+          <p:nvPr/>
+        </p:nvSpPr>
+        <p:spPr>
+          <a:xfrm>
+            <a:off x="822960" y="4718304"/>
+            <a:ext cx="329184" cy="329184"/>
           </a:xfrm>
           <a:prstGeom prst="rect">
             <a:avLst/>
@@ -5055,7 +4996,7 @@
                 <a:ea typeface="Calibri" pitchFamily="34" charset="-122"/>
                 <a:cs typeface="Calibri" pitchFamily="34" charset="-120"/>
               </a:rPr>
-              <a:t>4</a:t>
+              <a:t>9</a:t>
             </a:r>
             <a:endParaRPr lang="en-US" sz="1100" dirty="0"/>
           </a:p>
@@ -5063,14 +5004,14 @@
       </p:sp>
       <p:sp>
         <p:nvSpPr>
-          <p:cNvPr id="21" name="Text 18"/>
-          <p:cNvSpPr/>
-          <p:nvPr/>
-        </p:nvSpPr>
-        <p:spPr>
-          <a:xfrm>
-            <a:off x="1280160" y="4089197"/>
-            <a:ext cx="10033711" cy="716890"/>
+          <p:cNvPr id="19" name="Text 16"/>
+          <p:cNvSpPr/>
+          <p:nvPr/>
+        </p:nvSpPr>
+        <p:spPr>
+          <a:xfrm>
+            <a:off x="1243584" y="4553712"/>
+            <a:ext cx="10070287" cy="658368"/>
           </a:xfrm>
           <a:prstGeom prst="rect">
             <a:avLst/>
@@ -5084,79 +5025,59 @@
           <a:p>
             <a:pPr indent="0" marL="0">
               <a:lnSpc>
-                <a:spcPct val="88000"/>
-              </a:lnSpc>
-              <a:buNone/>
-            </a:pPr>
-            <a:r>
-              <a:rPr lang="en-US" sz="900" dirty="0">
+                <a:spcPct val="90000"/>
+              </a:lnSpc>
+              <a:buNone/>
+            </a:pPr>
+            <a:r>
+              <a:rPr lang="en-US" sz="1150" b="1" dirty="0">
+                <a:solidFill>
+                  <a:srgbClr val="1B2733"/>
+                </a:solidFill>
+                <a:latin typeface="Yu Gothic" pitchFamily="34" charset="0"/>
+                <a:ea typeface="Yu Gothic" pitchFamily="34" charset="-122"/>
+                <a:cs typeface="Yu Gothic" pitchFamily="34" charset="-120"/>
+              </a:rPr>
+              <a:t>受信機が発報した。最初に確認するものは何か。無線で「火事です」と言ってよいか。</a:t>
+            </a:r>
+            <a:endParaRPr lang="en-US" sz="1150" dirty="0"/>
+          </a:p>
+          <a:p>
+            <a:pPr indent="0" marL="0">
+              <a:lnSpc>
+                <a:spcPct val="90000"/>
+              </a:lnSpc>
+              <a:buNone/>
+            </a:pPr>
+            <a:r>
+              <a:rPr lang="en-US" sz="900" i="1" dirty="0">
                 <a:solidFill>
                   <a:srgbClr val="5F7183"/>
                 </a:solidFill>
-                <a:latin typeface="Yu Gothic" pitchFamily="34" charset="0"/>
-                <a:ea typeface="Yu Gothic" pitchFamily="34" charset="-122"/>
-                <a:cs typeface="Yu Gothic" pitchFamily="34" charset="-120"/>
-              </a:rPr>
-              <a:t>問4　離脱すべき兆候（2つ）</a:t>
-            </a:r>
-            <a:endParaRPr lang="en-US" sz="900" dirty="0"/>
-          </a:p>
-          <a:p>
-            <a:pPr indent="0" marL="0">
-              <a:lnSpc>
-                <a:spcPct val="88000"/>
-              </a:lnSpc>
-              <a:buNone/>
-            </a:pPr>
-            <a:r>
-              <a:rPr lang="en-US" sz="1200" b="1" dirty="0">
-                <a:solidFill>
-                  <a:srgbClr val="1B2733"/>
-                </a:solidFill>
-                <a:latin typeface="Yu Gothic" pitchFamily="34" charset="0"/>
-                <a:ea typeface="Yu Gothic" pitchFamily="34" charset="-122"/>
-                <a:cs typeface="Yu Gothic" pitchFamily="34" charset="-120"/>
-              </a:rPr>
-              <a:t>声が大きくなり続ける／同じ言葉を繰り返す／距離を詰めてくる／持ち物を握りしめる／視線を外さない。</a:t>
-            </a:r>
-            <a:endParaRPr lang="en-US" sz="900" dirty="0"/>
-          </a:p>
-          <a:p>
-            <a:pPr indent="0" marL="0">
-              <a:lnSpc>
-                <a:spcPct val="88000"/>
-              </a:lnSpc>
-              <a:buNone/>
-            </a:pPr>
-            <a:r>
-              <a:rPr lang="en-US" sz="800" i="1" dirty="0">
-                <a:solidFill>
-                  <a:srgbClr val="5F7183"/>
-                </a:solidFill>
-                <a:latin typeface="Calibri" pitchFamily="34" charset="0"/>
-                <a:ea typeface="Calibri" pitchFamily="34" charset="-122"/>
-                <a:cs typeface="Calibri" pitchFamily="34" charset="-120"/>
-              </a:rPr>
-              <a:t>Rising volume; repeating the same phrase; closing distance; gripping an object; a fixed stare.</a:t>
-            </a:r>
-            <a:endParaRPr lang="en-US" sz="900" dirty="0"/>
-          </a:p>
-        </p:txBody>
-      </p:sp>
-      <p:sp>
-        <p:nvSpPr>
-          <p:cNvPr id="22" name="Shape 19"/>
-          <p:cNvSpPr/>
-          <p:nvPr/>
-        </p:nvSpPr>
-        <p:spPr>
-          <a:xfrm>
-            <a:off x="640080" y="4970678"/>
-            <a:ext cx="10911535" cy="844906"/>
+                <a:latin typeface="Calibri" pitchFamily="34" charset="0"/>
+                <a:ea typeface="Calibri" pitchFamily="34" charset="-122"/>
+                <a:cs typeface="Calibri" pitchFamily="34" charset="-120"/>
+              </a:rPr>
+              <a:t>The panel activates. What do you check first? May you say "fire" on the radio?</a:t>
+            </a:r>
+            <a:endParaRPr lang="en-US" sz="1150" dirty="0"/>
+          </a:p>
+        </p:txBody>
+      </p:sp>
+      <p:sp>
+        <p:nvSpPr>
+          <p:cNvPr id="20" name="Shape 17"/>
+          <p:cNvSpPr/>
+          <p:nvPr/>
+        </p:nvSpPr>
+        <p:spPr>
+          <a:xfrm>
+            <a:off x="640080" y="5431536"/>
+            <a:ext cx="10911535" cy="804672"/>
           </a:xfrm>
           <a:prstGeom prst="roundRect">
             <a:avLst>
-              <a:gd name="adj" fmla="val 4329"/>
+              <a:gd name="adj" fmla="val 4545"/>
             </a:avLst>
           </a:prstGeom>
           <a:solidFill>
@@ -5167,280 +5088,128 @@
       </p:sp>
       <p:sp>
         <p:nvSpPr>
-          <p:cNvPr id="23" name="Shape 20"/>
-          <p:cNvSpPr/>
-          <p:nvPr/>
-        </p:nvSpPr>
-        <p:spPr>
-          <a:xfrm>
-            <a:off x="841248" y="5219395"/>
-            <a:ext cx="347472" cy="347472"/>
+          <p:cNvPr id="21" name="Shape 18"/>
+          <p:cNvSpPr/>
+          <p:nvPr/>
+        </p:nvSpPr>
+        <p:spPr>
+          <a:xfrm>
+            <a:off x="822960" y="5669280"/>
+            <a:ext cx="329184" cy="329184"/>
           </a:xfrm>
           <a:prstGeom prst="ellipse">
             <a:avLst/>
           </a:prstGeom>
           <a:solidFill>
-            <a:srgbClr val="12B198"/>
+            <a:srgbClr val="093259"/>
           </a:solidFill>
           <a:ln/>
         </p:spPr>
       </p:sp>
       <p:sp>
         <p:nvSpPr>
+          <p:cNvPr id="22" name="Text 19"/>
+          <p:cNvSpPr/>
+          <p:nvPr/>
+        </p:nvSpPr>
+        <p:spPr>
+          <a:xfrm>
+            <a:off x="822960" y="5669280"/>
+            <a:ext cx="329184" cy="329184"/>
+          </a:xfrm>
+          <a:prstGeom prst="rect">
+            <a:avLst/>
+          </a:prstGeom>
+          <a:noFill/>
+          <a:ln/>
+        </p:spPr>
+        <p:txBody>
+          <a:bodyPr wrap="square" lIns="0" tIns="0" rIns="0" bIns="0" rtlCol="0" anchor="ctr"/>
+          <a:lstStyle/>
+          <a:p>
+            <a:pPr algn="ctr" indent="0" marL="0">
+              <a:buNone/>
+            </a:pPr>
+            <a:r>
+              <a:rPr lang="en-US" sz="1100" b="1" dirty="0">
+                <a:solidFill>
+                  <a:srgbClr val="FFFFFF"/>
+                </a:solidFill>
+                <a:latin typeface="Calibri" pitchFamily="34" charset="0"/>
+                <a:ea typeface="Calibri" pitchFamily="34" charset="-122"/>
+                <a:cs typeface="Calibri" pitchFamily="34" charset="-120"/>
+              </a:rPr>
+              <a:t>10</a:t>
+            </a:r>
+            <a:endParaRPr lang="en-US" sz="1100" dirty="0"/>
+          </a:p>
+        </p:txBody>
+      </p:sp>
+      <p:sp>
+        <p:nvSpPr>
+          <p:cNvPr id="23" name="Text 20"/>
+          <p:cNvSpPr/>
+          <p:nvPr/>
+        </p:nvSpPr>
+        <p:spPr>
+          <a:xfrm>
+            <a:off x="1243584" y="5504688"/>
+            <a:ext cx="10070287" cy="658368"/>
+          </a:xfrm>
+          <a:prstGeom prst="rect">
+            <a:avLst/>
+          </a:prstGeom>
+          <a:noFill/>
+          <a:ln/>
+        </p:spPr>
+        <p:txBody>
+          <a:bodyPr wrap="square" lIns="0" tIns="0" rIns="0" bIns="0" rtlCol="0" anchor="ctr"/>
+          <a:lstStyle/>
+          <a:p>
+            <a:pPr indent="0" marL="0">
+              <a:lnSpc>
+                <a:spcPct val="90000"/>
+              </a:lnSpc>
+              <a:buNone/>
+            </a:pPr>
+            <a:r>
+              <a:rPr lang="en-US" sz="1150" b="1" dirty="0">
+                <a:solidFill>
+                  <a:srgbClr val="1B2733"/>
+                </a:solidFill>
+                <a:latin typeface="Yu Gothic" pitchFamily="34" charset="0"/>
+                <a:ea typeface="Yu Gothic" pitchFamily="34" charset="-122"/>
+                <a:cs typeface="Yu Gothic" pitchFamily="34" charset="-120"/>
+              </a:rPr>
+              <a:t>入退室ログの「保全」と「開示」の違いは何か。警備員が受けられるのはどちらか。</a:t>
+            </a:r>
+            <a:endParaRPr lang="en-US" sz="1150" dirty="0"/>
+          </a:p>
+          <a:p>
+            <a:pPr indent="0" marL="0">
+              <a:lnSpc>
+                <a:spcPct val="90000"/>
+              </a:lnSpc>
+              <a:buNone/>
+            </a:pPr>
+            <a:r>
+              <a:rPr lang="en-US" sz="900" i="1" dirty="0">
+                <a:solidFill>
+                  <a:srgbClr val="5F7183"/>
+                </a:solidFill>
+                <a:latin typeface="Calibri" pitchFamily="34" charset="0"/>
+                <a:ea typeface="Calibri" pitchFamily="34" charset="-122"/>
+                <a:cs typeface="Calibri" pitchFamily="34" charset="-120"/>
+              </a:rPr>
+              <a:t>What is the difference between preserving and disclosing an access log? Which may a guard accept?</a:t>
+            </a:r>
+            <a:endParaRPr lang="en-US" sz="1150" dirty="0"/>
+          </a:p>
+        </p:txBody>
+      </p:sp>
+      <p:sp>
+        <p:nvSpPr>
           <p:cNvPr id="24" name="Text 21"/>
-          <p:cNvSpPr/>
-          <p:nvPr/>
-        </p:nvSpPr>
-        <p:spPr>
-          <a:xfrm>
-            <a:off x="841248" y="5219395"/>
-            <a:ext cx="347472" cy="347472"/>
-          </a:xfrm>
-          <a:prstGeom prst="rect">
-            <a:avLst/>
-          </a:prstGeom>
-          <a:noFill/>
-          <a:ln/>
-        </p:spPr>
-        <p:txBody>
-          <a:bodyPr wrap="square" lIns="0" tIns="0" rIns="0" bIns="0" rtlCol="0" anchor="ctr"/>
-          <a:lstStyle/>
-          <a:p>
-            <a:pPr algn="ctr" indent="0" marL="0">
-              <a:buNone/>
-            </a:pPr>
-            <a:r>
-              <a:rPr lang="en-US" sz="1100" b="1" dirty="0">
-                <a:solidFill>
-                  <a:srgbClr val="FFFFFF"/>
-                </a:solidFill>
-                <a:latin typeface="Calibri" pitchFamily="34" charset="0"/>
-                <a:ea typeface="Calibri" pitchFamily="34" charset="-122"/>
-                <a:cs typeface="Calibri" pitchFamily="34" charset="-120"/>
-              </a:rPr>
-              <a:t>5</a:t>
-            </a:r>
-            <a:endParaRPr lang="en-US" sz="1100" dirty="0"/>
-          </a:p>
-        </p:txBody>
-      </p:sp>
-      <p:sp>
-        <p:nvSpPr>
-          <p:cNvPr id="25" name="Text 22"/>
-          <p:cNvSpPr/>
-          <p:nvPr/>
-        </p:nvSpPr>
-        <p:spPr>
-          <a:xfrm>
-            <a:off x="1280160" y="5034686"/>
-            <a:ext cx="10033711" cy="716890"/>
-          </a:xfrm>
-          <a:prstGeom prst="rect">
-            <a:avLst/>
-          </a:prstGeom>
-          <a:noFill/>
-          <a:ln/>
-        </p:spPr>
-        <p:txBody>
-          <a:bodyPr wrap="square" lIns="0" tIns="0" rIns="0" bIns="0" rtlCol="0" anchor="ctr"/>
-          <a:lstStyle/>
-          <a:p>
-            <a:pPr indent="0" marL="0">
-              <a:lnSpc>
-                <a:spcPct val="88000"/>
-              </a:lnSpc>
-              <a:buNone/>
-            </a:pPr>
-            <a:r>
-              <a:rPr lang="en-US" sz="900" dirty="0">
-                <a:solidFill>
-                  <a:srgbClr val="5F7183"/>
-                </a:solidFill>
-                <a:latin typeface="Yu Gothic" pitchFamily="34" charset="0"/>
-                <a:ea typeface="Yu Gothic" pitchFamily="34" charset="-122"/>
-                <a:cs typeface="Yu Gothic" pitchFamily="34" charset="-120"/>
-              </a:rPr>
-              <a:t>問5　退去要請の根拠</a:t>
-            </a:r>
-            <a:endParaRPr lang="en-US" sz="900" dirty="0"/>
-          </a:p>
-          <a:p>
-            <a:pPr indent="0" marL="0">
-              <a:lnSpc>
-                <a:spcPct val="88000"/>
-              </a:lnSpc>
-              <a:buNone/>
-            </a:pPr>
-            <a:r>
-              <a:rPr lang="en-US" sz="1200" b="1" dirty="0">
-                <a:solidFill>
-                  <a:srgbClr val="1B2733"/>
-                </a:solidFill>
-                <a:latin typeface="Yu Gothic" pitchFamily="34" charset="0"/>
-                <a:ea typeface="Yu Gothic" pitchFamily="34" charset="-122"/>
-                <a:cs typeface="Yu Gothic" pitchFamily="34" charset="-120"/>
-              </a:rPr>
-              <a:t>管理権者の意思。警備員が自分の判断で命じるものではない。</a:t>
-            </a:r>
-            <a:endParaRPr lang="en-US" sz="900" dirty="0"/>
-          </a:p>
-          <a:p>
-            <a:pPr indent="0" marL="0">
-              <a:lnSpc>
-                <a:spcPct val="88000"/>
-              </a:lnSpc>
-              <a:buNone/>
-            </a:pPr>
-            <a:r>
-              <a:rPr lang="en-US" sz="800" i="1" dirty="0">
-                <a:solidFill>
-                  <a:srgbClr val="5F7183"/>
-                </a:solidFill>
-                <a:latin typeface="Calibri" pitchFamily="34" charset="0"/>
-                <a:ea typeface="Calibri" pitchFamily="34" charset="-122"/>
-                <a:cs typeface="Calibri" pitchFamily="34" charset="-120"/>
-              </a:rPr>
-              <a:t>The site authority's intent. A guard does not order it on their own judgement.</a:t>
-            </a:r>
-            <a:endParaRPr lang="en-US" sz="900" dirty="0"/>
-          </a:p>
-        </p:txBody>
-      </p:sp>
-      <p:sp>
-        <p:nvSpPr>
-          <p:cNvPr id="26" name="Text 23"/>
-          <p:cNvSpPr/>
-          <p:nvPr/>
-        </p:nvSpPr>
-        <p:spPr>
-          <a:xfrm>
-            <a:off x="640080" y="5907024"/>
-            <a:ext cx="10911535" cy="310896"/>
-          </a:xfrm>
-          <a:prstGeom prst="rect">
-            <a:avLst/>
-          </a:prstGeom>
-          <a:noFill/>
-          <a:ln/>
-        </p:spPr>
-        <p:txBody>
-          <a:bodyPr wrap="square" lIns="0" tIns="0" rIns="0" bIns="0" rtlCol="0" anchor="t"/>
-          <a:lstStyle/>
-          <a:p>
-            <a:pPr indent="0" marL="0">
-              <a:lnSpc>
-                <a:spcPct val="88000"/>
-              </a:lnSpc>
-              <a:buNone/>
-            </a:pPr>
-            <a:r>
-              <a:rPr lang="en-US" sz="900" b="1" dirty="0">
-                <a:solidFill>
-                  <a:srgbClr val="0D8A76"/>
-                </a:solidFill>
-                <a:latin typeface="Yu Gothic" pitchFamily="34" charset="0"/>
-                <a:ea typeface="Yu Gothic" pitchFamily="34" charset="-122"/>
-                <a:cs typeface="Yu Gothic" pitchFamily="34" charset="-120"/>
-              </a:rPr>
-              <a:t>採点の目安　</a:t>
-            </a:r>
-            <a:pPr indent="0" marL="0">
-              <a:lnSpc>
-                <a:spcPct val="88000"/>
-              </a:lnSpc>
-              <a:buNone/>
-            </a:pPr>
-            <a:r>
-              <a:rPr lang="en-US" sz="900" dirty="0">
-                <a:solidFill>
-                  <a:srgbClr val="1B2733"/>
-                </a:solidFill>
-                <a:latin typeface="Yu Gothic" pitchFamily="34" charset="0"/>
-                <a:ea typeface="Yu Gothic" pitchFamily="34" charset="-122"/>
-                <a:cs typeface="Yu Gothic" pitchFamily="34" charset="-120"/>
-              </a:rPr>
-              <a:t>表現が異なっても要点が含まれていれば正解とします。英語での回答も同じ基準で採点します。</a:t>
-            </a:r>
-            <a:endParaRPr lang="en-US" sz="900" dirty="0"/>
-          </a:p>
-          <a:p>
-            <a:pPr indent="0" marL="0">
-              <a:lnSpc>
-                <a:spcPct val="88000"/>
-              </a:lnSpc>
-              <a:buNone/>
-            </a:pPr>
-            <a:r>
-              <a:rPr lang="en-US" sz="750" i="1" dirty="0">
-                <a:solidFill>
-                  <a:srgbClr val="5F7183"/>
-                </a:solidFill>
-                <a:latin typeface="Calibri" pitchFamily="34" charset="0"/>
-                <a:ea typeface="Calibri" pitchFamily="34" charset="-122"/>
-                <a:cs typeface="Calibri" pitchFamily="34" charset="-120"/>
-              </a:rPr>
-              <a:t>Different wording is fine if the point is there. Answers in English are marked to the same standard.</a:t>
-            </a:r>
-            <a:endParaRPr lang="en-US" sz="900" dirty="0"/>
-          </a:p>
-        </p:txBody>
-      </p:sp>
-      <p:sp>
-        <p:nvSpPr>
-          <p:cNvPr id="27" name="Text 24"/>
-          <p:cNvSpPr/>
-          <p:nvPr/>
-        </p:nvSpPr>
-        <p:spPr>
-          <a:xfrm>
-            <a:off x="640080" y="6272784"/>
-            <a:ext cx="9905695" cy="237744"/>
-          </a:xfrm>
-          <a:prstGeom prst="rect">
-            <a:avLst/>
-          </a:prstGeom>
-          <a:noFill/>
-          <a:ln/>
-        </p:spPr>
-        <p:txBody>
-          <a:bodyPr wrap="square" lIns="0" tIns="0" rIns="0" bIns="0" rtlCol="0" anchor="t"/>
-          <a:lstStyle/>
-          <a:p>
-            <a:pPr indent="0" marL="0">
-              <a:buNone/>
-            </a:pPr>
-            <a:r>
-              <a:rPr lang="en-US" sz="750" b="1" dirty="0">
-                <a:solidFill>
-                  <a:srgbClr val="D6E0E9"/>
-                </a:solidFill>
-                <a:latin typeface="Yu Gothic" pitchFamily="34" charset="0"/>
-                <a:ea typeface="Yu Gothic" pitchFamily="34" charset="-122"/>
-                <a:cs typeface="Yu Gothic" pitchFamily="34" charset="-120"/>
-              </a:rPr>
-              <a:t>ソース　</a:t>
-            </a:r>
-            <a:pPr indent="0" marL="0">
-              <a:buNone/>
-            </a:pPr>
-            <a:r>
-              <a:rPr lang="en-US" sz="750" dirty="0">
-                <a:solidFill>
-                  <a:srgbClr val="5F7183"/>
-                </a:solidFill>
-                <a:latin typeface="Yu Gothic" pitchFamily="34" charset="0"/>
-                <a:ea typeface="Yu Gothic" pitchFamily="34" charset="-122"/>
-                <a:cs typeface="Yu Gothic" pitchFamily="34" charset="-120"/>
-              </a:rPr>
-              <a:t>警備業法、刑法、刑事訴訟法、警察官職務執行法</a:t>
-            </a:r>
-            <a:endParaRPr lang="en-US" sz="750" dirty="0"/>
-          </a:p>
-        </p:txBody>
-      </p:sp>
-      <p:sp>
-        <p:nvSpPr>
-          <p:cNvPr id="28" name="Text 25"/>
           <p:cNvSpPr/>
           <p:nvPr/>
         </p:nvSpPr>
@@ -5493,7 +5262,7 @@
       </p:sp>
       <p:sp>
         <p:nvSpPr>
-          <p:cNvPr id="29" name="Text 26"/>
+          <p:cNvPr id="25" name="Text 22"/>
           <p:cNvSpPr/>
           <p:nvPr/>
         </p:nvSpPr>
@@ -5622,7 +5391,7 @@
                 <a:ea typeface="Yu Gothic" pitchFamily="34" charset="-122"/>
                 <a:cs typeface="Yu Gothic" pitchFamily="34" charset="-120"/>
               </a:rPr>
-              <a:t>確認テスト　解答と解説　問6〜問10</a:t>
+              <a:t>確認テスト　解答と解説　問1〜問5</a:t>
             </a:r>
             <a:endParaRPr lang="en-US" sz="2300" dirty="0"/>
           </a:p>
@@ -5642,7 +5411,7 @@
                 <a:ea typeface="Calibri" pitchFamily="34" charset="-122"/>
                 <a:cs typeface="Calibri" pitchFamily="34" charset="-120"/>
               </a:rPr>
-              <a:t>Assessment — Answers 6 to 10</a:t>
+              <a:t>Assessment — Answers 1 to 5</a:t>
             </a:r>
             <a:endParaRPr lang="en-US" sz="2300" dirty="0"/>
           </a:p>
@@ -5784,7 +5553,7 @@
                 <a:ea typeface="Calibri" pitchFamily="34" charset="-122"/>
                 <a:cs typeface="Calibri" pitchFamily="34" charset="-120"/>
               </a:rPr>
-              <a:t>6</a:t>
+              <a:t>1</a:t>
             </a:r>
             <a:endParaRPr lang="en-US" sz="1100" dirty="0"/>
           </a:p>
@@ -5826,7 +5595,7 @@
                 <a:ea typeface="Yu Gothic" pitchFamily="34" charset="-122"/>
                 <a:cs typeface="Yu Gothic" pitchFamily="34" charset="-120"/>
               </a:rPr>
-              <a:t>問6　報告文の問題点と書き直し</a:t>
+              <a:t>問1　法的な立場と、警察にあって警備員にない権限</a:t>
             </a:r>
             <a:endParaRPr lang="en-US" sz="900" dirty="0"/>
           </a:p>
@@ -5846,7 +5615,7 @@
                 <a:ea typeface="Yu Gothic" pitchFamily="34" charset="-122"/>
                 <a:cs typeface="Yu Gothic" pitchFamily="34" charset="-120"/>
               </a:rPr>
-              <a:t>見ていないことを断定している（事実と評価の混同）。「20時15分、非常口が15cmほど開いていた。侵入の可能性があると思われる」。</a:t>
+              <a:t>私人。制服により権限は加わらない。／ 職務質問、保護、避難等の措置、制止、立入、武器の使用、逮捕状による逮捕のいずれか1つ。</a:t>
             </a:r>
             <a:endParaRPr lang="en-US" sz="900" dirty="0"/>
           </a:p>
@@ -5866,7 +5635,7 @@
                 <a:ea typeface="Calibri" pitchFamily="34" charset="-122"/>
                 <a:cs typeface="Calibri" pitchFamily="34" charset="-120"/>
               </a:rPr>
-              <a:t>It asserts what you did not see. Rewrite: "At 20:15 the exit stood about 15 cm open. In my judgement there may have been an intrusion."</a:t>
+              <a:t>A private citizen; the uniform adds nothing. Any one of: stop and question, protective custody, evacuation orders, stopping a crime, entry, weapons, arrest by warrant.</a:t>
             </a:r>
             <a:endParaRPr lang="en-US" sz="900" dirty="0"/>
           </a:p>
@@ -5947,7 +5716,7 @@
                 <a:ea typeface="Calibri" pitchFamily="34" charset="-122"/>
                 <a:cs typeface="Calibri" pitchFamily="34" charset="-120"/>
               </a:rPr>
-              <a:t>7</a:t>
+              <a:t>2</a:t>
             </a:r>
             <a:endParaRPr lang="en-US" sz="1100" dirty="0"/>
           </a:p>
@@ -5989,7 +5758,7 @@
                 <a:ea typeface="Yu Gothic" pitchFamily="34" charset="-122"/>
                 <a:cs typeface="Yu Gothic" pitchFamily="34" charset="-120"/>
               </a:rPr>
-              <a:t>問7　119番で最初に伝えること</a:t>
+              <a:t>問2　De-escalation の目的</a:t>
             </a:r>
             <a:endParaRPr lang="en-US" sz="900" dirty="0"/>
           </a:p>
@@ -6009,7 +5778,7 @@
                 <a:ea typeface="Yu Gothic" pitchFamily="34" charset="-122"/>
                 <a:cs typeface="Yu Gothic" pitchFamily="34" charset="-120"/>
               </a:rPr>
-              <a:t>種別。「火事です」か「救急です」。場所より先に言う。</a:t>
+              <a:t>有形力を使わずに緊張を下げ、その場を安全に終えること。勝つことではない。</a:t>
             </a:r>
             <a:endParaRPr lang="en-US" sz="900" dirty="0"/>
           </a:p>
@@ -6029,7 +5798,7 @@
                 <a:ea typeface="Calibri" pitchFamily="34" charset="-122"/>
                 <a:cs typeface="Calibri" pitchFamily="34" charset="-120"/>
               </a:rPr>
-              <a:t>The type — fire, or ambulance. Before the location.</a:t>
+              <a:t>To lower tension without force and end the situation safely. Not to win.</a:t>
             </a:r>
             <a:endParaRPr lang="en-US" sz="900" dirty="0"/>
           </a:p>
@@ -6110,7 +5879,7 @@
                 <a:ea typeface="Calibri" pitchFamily="34" charset="-122"/>
                 <a:cs typeface="Calibri" pitchFamily="34" charset="-120"/>
               </a:rPr>
-              <a:t>8</a:t>
+              <a:t>3</a:t>
             </a:r>
             <a:endParaRPr lang="en-US" sz="1100" dirty="0"/>
           </a:p>
@@ -6152,7 +5921,7 @@
                 <a:ea typeface="Yu Gothic" pitchFamily="34" charset="-122"/>
                 <a:cs typeface="Yu Gothic" pitchFamily="34" charset="-120"/>
               </a:rPr>
-              <a:t>問8　現場を変えてよい理由</a:t>
+              <a:t>問3　引き下がれる形を残す理由</a:t>
             </a:r>
             <a:endParaRPr lang="en-US" sz="900" dirty="0"/>
           </a:p>
@@ -6172,7 +5941,7 @@
                 <a:ea typeface="Yu Gothic" pitchFamily="34" charset="-122"/>
                 <a:cs typeface="Yu Gothic" pitchFamily="34" charset="-120"/>
               </a:rPr>
-              <a:t>人命（救助・救護）のため。それ以外では動かさない。動かした場合は何を・どこから・どこへ・誰が・何時にを記録。</a:t>
+              <a:t>逃げ道がないと、相手は引き下がれず対立を続けるほかなくなるため。</a:t>
             </a:r>
             <a:endParaRPr lang="en-US" sz="900" dirty="0"/>
           </a:p>
@@ -6192,7 +5961,7 @@
                 <a:ea typeface="Calibri" pitchFamily="34" charset="-122"/>
                 <a:cs typeface="Calibri" pitchFamily="34" charset="-120"/>
               </a:rPr>
-              <a:t>To save life. Otherwise change nothing; if you did, record what, from where, to where, by whom and when.</a:t>
+              <a:t>Without a way out, the person has no option but to keep fighting.</a:t>
             </a:r>
             <a:endParaRPr lang="en-US" sz="900" dirty="0"/>
           </a:p>
@@ -6215,7 +5984,7 @@
             </a:avLst>
           </a:prstGeom>
           <a:solidFill>
-            <a:srgbClr val="E4F4F0"/>
+            <a:srgbClr val="EFF4F8"/>
           </a:solidFill>
           <a:ln/>
         </p:spPr>
@@ -6273,7 +6042,7 @@
                 <a:ea typeface="Calibri" pitchFamily="34" charset="-122"/>
                 <a:cs typeface="Calibri" pitchFamily="34" charset="-120"/>
               </a:rPr>
-              <a:t>9</a:t>
+              <a:t>4</a:t>
             </a:r>
             <a:endParaRPr lang="en-US" sz="1100" dirty="0"/>
           </a:p>
@@ -6315,7 +6084,7 @@
                 <a:ea typeface="Yu Gothic" pitchFamily="34" charset="-122"/>
                 <a:cs typeface="Yu Gothic" pitchFamily="34" charset="-120"/>
               </a:rPr>
-              <a:t>問9　受信機の発報時</a:t>
+              <a:t>問4　兆候2つと、そのあとの行動</a:t>
             </a:r>
             <a:endParaRPr lang="en-US" sz="900" dirty="0"/>
           </a:p>
@@ -6335,7 +6104,7 @@
                 <a:ea typeface="Yu Gothic" pitchFamily="34" charset="-122"/>
                 <a:cs typeface="Yu Gothic" pitchFamily="34" charset="-120"/>
               </a:rPr>
-              <a:t>地区表示（どこが鳴っているか）。「火事です」とは言わない。発報は火災の確定ではない。</a:t>
+              <a:t>兆候：声が大きくなり続ける／同じ言葉を繰り返す／距離を詰める／持ち物を握りしめる。行動は順に、離脱する→応援を要請する→通報する。</a:t>
             </a:r>
             <a:endParaRPr lang="en-US" sz="900" dirty="0"/>
           </a:p>
@@ -6355,7 +6124,7 @@
                 <a:ea typeface="Calibri" pitchFamily="34" charset="-122"/>
                 <a:cs typeface="Calibri" pitchFamily="34" charset="-120"/>
               </a:rPr>
-              <a:t>The zone display. Do not say "fire" — an activation is not a confirmed fire.</a:t>
+              <a:t>Signs: rising volume, repeating a phrase, closing distance, gripping an object. Then, in order: disengage, call backup, report to police.</a:t>
             </a:r>
             <a:endParaRPr lang="en-US" sz="900" dirty="0"/>
           </a:p>
@@ -6436,7 +6205,7 @@
                 <a:ea typeface="Calibri" pitchFamily="34" charset="-122"/>
                 <a:cs typeface="Calibri" pitchFamily="34" charset="-120"/>
               </a:rPr>
-              <a:t>10</a:t>
+              <a:t>5</a:t>
             </a:r>
             <a:endParaRPr lang="en-US" sz="1100" dirty="0"/>
           </a:p>
@@ -6478,7 +6247,7 @@
                 <a:ea typeface="Yu Gothic" pitchFamily="34" charset="-122"/>
                 <a:cs typeface="Yu Gothic" pitchFamily="34" charset="-120"/>
               </a:rPr>
-              <a:t>問10　保全と開示の違い</a:t>
+              <a:t>問5　退去要請の根拠</a:t>
             </a:r>
             <a:endParaRPr lang="en-US" sz="900" dirty="0"/>
           </a:p>
@@ -6498,7 +6267,7 @@
                 <a:ea typeface="Yu Gothic" pitchFamily="34" charset="-122"/>
                 <a:cs typeface="Yu Gothic" pitchFamily="34" charset="-120"/>
               </a:rPr>
-              <a:t>保全＝上書きを防いで残す。開示＝内容を渡す。警備員が受けられるのは保全のみ。</a:t>
+              <a:t>管理権者の意思。警備員が自分の判断で命じるものではない。</a:t>
             </a:r>
             <a:endParaRPr lang="en-US" sz="900" dirty="0"/>
           </a:p>
@@ -6518,7 +6287,7 @@
                 <a:ea typeface="Calibri" pitchFamily="34" charset="-122"/>
                 <a:cs typeface="Calibri" pitchFamily="34" charset="-120"/>
               </a:rPr>
-              <a:t>Preserving keeps it from being overwritten. Disclosing hands over the content. Only preservation is yours to accept.</a:t>
+              <a:t>The site authority's intent. A guard does not order it on their own judgement.</a:t>
             </a:r>
             <a:endParaRPr lang="en-US" sz="900" dirty="0"/>
           </a:p>
@@ -6577,7 +6346,7 @@
                 <a:ea typeface="Yu Gothic" pitchFamily="34" charset="-122"/>
                 <a:cs typeface="Yu Gothic" pitchFamily="34" charset="-120"/>
               </a:rPr>
-              <a:t>問6と問9は重点問題です。落とした受講者には個別に確認してください。</a:t>
+              <a:t>表現が異なっても要点が含まれていれば正解とします。英語での回答も同じ基準で採点します。</a:t>
             </a:r>
             <a:endParaRPr lang="en-US" sz="900" dirty="0"/>
           </a:p>
@@ -6597,7 +6366,7 @@
                 <a:ea typeface="Calibri" pitchFamily="34" charset="-122"/>
                 <a:cs typeface="Calibri" pitchFamily="34" charset="-120"/>
               </a:rPr>
-              <a:t>Questions 6 and 9 are the key items. Follow up individually with anyone who missed them.</a:t>
+              <a:t>Different wording is fine if the point is there. Answers in English are marked to the same standard.</a:t>
             </a:r>
             <a:endParaRPr lang="en-US" sz="900" dirty="0"/>
           </a:p>
@@ -6650,7 +6419,7 @@
                 <a:ea typeface="Yu Gothic" pitchFamily="34" charset="-122"/>
                 <a:cs typeface="Yu Gothic" pitchFamily="34" charset="-120"/>
               </a:rPr>
-              <a:t>消防法、個人情報保護法、警察庁「警備員教育」</a:t>
+              <a:t>警備業法、刑法、刑事訴訟法、警察官職務執行法</a:t>
             </a:r>
             <a:endParaRPr lang="en-US" sz="750" dirty="0"/>
           </a:p>
@@ -6812,8 +6581,8 @@
         </p:nvSpPr>
         <p:spPr>
           <a:xfrm>
-            <a:off x="640080" y="475488"/>
-            <a:ext cx="9805111" cy="960120"/>
+            <a:off x="640080" y="384048"/>
+            <a:ext cx="8982151" cy="768096"/>
           </a:xfrm>
           <a:prstGeom prst="rect">
             <a:avLst/>
@@ -6832,7 +6601,7 @@
               <a:buNone/>
             </a:pPr>
             <a:r>
-              <a:rPr lang="en-US" sz="2700" b="1" dirty="0">
+              <a:rPr lang="en-US" sz="2300" b="1" dirty="0">
                 <a:solidFill>
                   <a:srgbClr val="093259"/>
                 </a:solidFill>
@@ -6840,9 +6609,9 @@
                 <a:ea typeface="Yu Gothic" pitchFamily="34" charset="-122"/>
                 <a:cs typeface="Yu Gothic" pitchFamily="34" charset="-120"/>
               </a:rPr>
-              <a:t>AAR ― 振り返り（After Action Review）</a:t>
-            </a:r>
-            <a:endParaRPr lang="en-US" sz="2700" dirty="0"/>
+              <a:t>確認テスト　解答と解説　問6〜問10</a:t>
+            </a:r>
+            <a:endParaRPr lang="en-US" sz="2300" dirty="0"/>
           </a:p>
           <a:p>
             <a:pPr indent="0" marL="0">
@@ -6852,7 +6621,7 @@
               <a:buNone/>
             </a:pPr>
             <a:r>
-              <a:rPr lang="en-US" sz="1250" i="1" dirty="0">
+              <a:rPr lang="en-US" sz="1100" i="1" dirty="0">
                 <a:solidFill>
                   <a:srgbClr val="12B198"/>
                 </a:solidFill>
@@ -6860,88 +6629,250 @@
                 <a:ea typeface="Calibri" pitchFamily="34" charset="-122"/>
                 <a:cs typeface="Calibri" pitchFamily="34" charset="-120"/>
               </a:rPr>
-              <a:t>AAR — After Action Review</a:t>
-            </a:r>
-            <a:endParaRPr lang="en-US" sz="2700" dirty="0"/>
-          </a:p>
-        </p:txBody>
-      </p:sp>
-      <p:sp>
-        <p:nvSpPr>
-          <p:cNvPr id="4" name="Text 1"/>
-          <p:cNvSpPr/>
-          <p:nvPr/>
-        </p:nvSpPr>
-        <p:spPr>
-          <a:xfrm>
-            <a:off x="640080" y="1536192"/>
-            <a:ext cx="10911535" cy="566928"/>
-          </a:xfrm>
-          <a:prstGeom prst="rect">
-            <a:avLst/>
-          </a:prstGeom>
-          <a:noFill/>
-          <a:ln/>
-        </p:spPr>
-        <p:txBody>
-          <a:bodyPr wrap="square" lIns="0" tIns="0" rIns="0" bIns="0" rtlCol="0" anchor="t"/>
-          <a:lstStyle/>
-          <a:p>
-            <a:pPr algn="l" indent="0" marL="0">
-              <a:lnSpc>
-                <a:spcPct val="92000"/>
-              </a:lnSpc>
-              <a:buNone/>
-            </a:pPr>
-            <a:r>
-              <a:rPr lang="en-US" sz="1300" dirty="0">
-                <a:solidFill>
-                  <a:srgbClr val="093259"/>
-                </a:solidFill>
-                <a:latin typeface="Yu Gothic" pitchFamily="34" charset="0"/>
-                <a:ea typeface="Yu Gothic" pitchFamily="34" charset="-122"/>
-                <a:cs typeface="Yu Gothic" pitchFamily="34" charset="-120"/>
-              </a:rPr>
-              <a:t>AAR は事案や訓練の直後に行う振り返りです。原則は、犯人探しをしないことです。</a:t>
-            </a:r>
-            <a:endParaRPr lang="en-US" sz="1300" dirty="0"/>
-          </a:p>
-          <a:p>
-            <a:pPr algn="l" indent="0" marL="0">
-              <a:lnSpc>
-                <a:spcPct val="92000"/>
-              </a:lnSpc>
-              <a:buNone/>
-            </a:pPr>
-            <a:r>
-              <a:rPr lang="en-US" sz="1000" i="1" dirty="0">
-                <a:solidFill>
-                  <a:srgbClr val="5F7183"/>
-                </a:solidFill>
-                <a:latin typeface="Calibri" pitchFamily="34" charset="0"/>
-                <a:ea typeface="Calibri" pitchFamily="34" charset="-122"/>
-                <a:cs typeface="Calibri" pitchFamily="34" charset="-120"/>
-              </a:rPr>
-              <a:t>An AAR is a review held immediately after an incident or exercise. The rule is: no blame.</a:t>
-            </a:r>
-            <a:endParaRPr lang="en-US" sz="1300" dirty="0"/>
-          </a:p>
-        </p:txBody>
-      </p:sp>
-      <p:sp>
-        <p:nvSpPr>
-          <p:cNvPr id="5" name="Shape 2"/>
-          <p:cNvSpPr/>
-          <p:nvPr/>
-        </p:nvSpPr>
-        <p:spPr>
-          <a:xfrm>
-            <a:off x="640080" y="2286000"/>
-            <a:ext cx="10911535" cy="702259"/>
+              <a:t>Assessment — Answers 6 to 10</a:t>
+            </a:r>
+            <a:endParaRPr lang="en-US" sz="2300" dirty="0"/>
+          </a:p>
+        </p:txBody>
+      </p:sp>
+      <p:sp>
+        <p:nvSpPr>
+          <p:cNvPr id="4" name="Shape 1"/>
+          <p:cNvSpPr/>
+          <p:nvPr/>
+        </p:nvSpPr>
+        <p:spPr>
+          <a:xfrm>
+            <a:off x="9686239" y="438912"/>
+            <a:ext cx="932688" cy="310896"/>
           </a:xfrm>
           <a:prstGeom prst="roundRect">
             <a:avLst>
-              <a:gd name="adj" fmla="val 6510"/>
+              <a:gd name="adj" fmla="val 14706"/>
+            </a:avLst>
+          </a:prstGeom>
+          <a:solidFill>
+            <a:srgbClr val="093259"/>
+          </a:solidFill>
+          <a:ln/>
+        </p:spPr>
+      </p:sp>
+      <p:sp>
+        <p:nvSpPr>
+          <p:cNvPr id="5" name="Text 2"/>
+          <p:cNvSpPr/>
+          <p:nvPr/>
+        </p:nvSpPr>
+        <p:spPr>
+          <a:xfrm>
+            <a:off x="9686239" y="438912"/>
+            <a:ext cx="932688" cy="310896"/>
+          </a:xfrm>
+          <a:prstGeom prst="rect">
+            <a:avLst/>
+          </a:prstGeom>
+          <a:noFill/>
+          <a:ln/>
+        </p:spPr>
+        <p:txBody>
+          <a:bodyPr wrap="square" lIns="0" tIns="0" rIns="0" bIns="0" rtlCol="0" anchor="ctr"/>
+          <a:lstStyle/>
+          <a:p>
+            <a:pPr algn="ctr" indent="0" marL="0">
+              <a:buNone/>
+            </a:pPr>
+            <a:r>
+              <a:rPr lang="en-US" sz="1100" b="1" dirty="0">
+                <a:solidFill>
+                  <a:srgbClr val="FFFFFF"/>
+                </a:solidFill>
+                <a:latin typeface="Calibri" pitchFamily="34" charset="0"/>
+                <a:ea typeface="Calibri" pitchFamily="34" charset="-122"/>
+                <a:cs typeface="Calibri" pitchFamily="34" charset="-120"/>
+              </a:rPr>
+              <a:t>ANSWERS</a:t>
+            </a:r>
+            <a:endParaRPr lang="en-US" sz="1100" dirty="0"/>
+          </a:p>
+        </p:txBody>
+      </p:sp>
+      <p:sp>
+        <p:nvSpPr>
+          <p:cNvPr id="6" name="Shape 3"/>
+          <p:cNvSpPr/>
+          <p:nvPr/>
+        </p:nvSpPr>
+        <p:spPr>
+          <a:xfrm>
+            <a:off x="640080" y="1188720"/>
+            <a:ext cx="10911535" cy="844906"/>
+          </a:xfrm>
+          <a:prstGeom prst="roundRect">
+            <a:avLst>
+              <a:gd name="adj" fmla="val 4329"/>
+            </a:avLst>
+          </a:prstGeom>
+          <a:solidFill>
+            <a:srgbClr val="E4F4F0"/>
+          </a:solidFill>
+          <a:ln/>
+        </p:spPr>
+      </p:sp>
+      <p:sp>
+        <p:nvSpPr>
+          <p:cNvPr id="7" name="Shape 4"/>
+          <p:cNvSpPr/>
+          <p:nvPr/>
+        </p:nvSpPr>
+        <p:spPr>
+          <a:xfrm>
+            <a:off x="841248" y="1437437"/>
+            <a:ext cx="347472" cy="347472"/>
+          </a:xfrm>
+          <a:prstGeom prst="ellipse">
+            <a:avLst/>
+          </a:prstGeom>
+          <a:solidFill>
+            <a:srgbClr val="12B198"/>
+          </a:solidFill>
+          <a:ln/>
+        </p:spPr>
+      </p:sp>
+      <p:sp>
+        <p:nvSpPr>
+          <p:cNvPr id="8" name="Text 5"/>
+          <p:cNvSpPr/>
+          <p:nvPr/>
+        </p:nvSpPr>
+        <p:spPr>
+          <a:xfrm>
+            <a:off x="841248" y="1437437"/>
+            <a:ext cx="347472" cy="347472"/>
+          </a:xfrm>
+          <a:prstGeom prst="rect">
+            <a:avLst/>
+          </a:prstGeom>
+          <a:noFill/>
+          <a:ln/>
+        </p:spPr>
+        <p:txBody>
+          <a:bodyPr wrap="square" lIns="0" tIns="0" rIns="0" bIns="0" rtlCol="0" anchor="ctr"/>
+          <a:lstStyle/>
+          <a:p>
+            <a:pPr algn="ctr" indent="0" marL="0">
+              <a:buNone/>
+            </a:pPr>
+            <a:r>
+              <a:rPr lang="en-US" sz="1100" b="1" dirty="0">
+                <a:solidFill>
+                  <a:srgbClr val="FFFFFF"/>
+                </a:solidFill>
+                <a:latin typeface="Calibri" pitchFamily="34" charset="0"/>
+                <a:ea typeface="Calibri" pitchFamily="34" charset="-122"/>
+                <a:cs typeface="Calibri" pitchFamily="34" charset="-120"/>
+              </a:rPr>
+              <a:t>6</a:t>
+            </a:r>
+            <a:endParaRPr lang="en-US" sz="1100" dirty="0"/>
+          </a:p>
+        </p:txBody>
+      </p:sp>
+      <p:sp>
+        <p:nvSpPr>
+          <p:cNvPr id="9" name="Text 6"/>
+          <p:cNvSpPr/>
+          <p:nvPr/>
+        </p:nvSpPr>
+        <p:spPr>
+          <a:xfrm>
+            <a:off x="1280160" y="1252728"/>
+            <a:ext cx="10033711" cy="716890"/>
+          </a:xfrm>
+          <a:prstGeom prst="rect">
+            <a:avLst/>
+          </a:prstGeom>
+          <a:noFill/>
+          <a:ln/>
+        </p:spPr>
+        <p:txBody>
+          <a:bodyPr wrap="square" lIns="0" tIns="0" rIns="0" bIns="0" rtlCol="0" anchor="ctr"/>
+          <a:lstStyle/>
+          <a:p>
+            <a:pPr indent="0" marL="0">
+              <a:lnSpc>
+                <a:spcPct val="88000"/>
+              </a:lnSpc>
+              <a:buNone/>
+            </a:pPr>
+            <a:r>
+              <a:rPr lang="en-US" sz="900" dirty="0">
+                <a:solidFill>
+                  <a:srgbClr val="5F7183"/>
+                </a:solidFill>
+                <a:latin typeface="Yu Gothic" pitchFamily="34" charset="0"/>
+                <a:ea typeface="Yu Gothic" pitchFamily="34" charset="-122"/>
+                <a:cs typeface="Yu Gothic" pitchFamily="34" charset="-120"/>
+              </a:rPr>
+              <a:t>問6　問題点と、あなたの報告文</a:t>
+            </a:r>
+            <a:endParaRPr lang="en-US" sz="900" dirty="0"/>
+          </a:p>
+          <a:p>
+            <a:pPr indent="0" marL="0">
+              <a:lnSpc>
+                <a:spcPct val="88000"/>
+              </a:lnSpc>
+              <a:buNone/>
+            </a:pPr>
+            <a:r>
+              <a:rPr lang="en-US" sz="1200" b="1" dirty="0">
+                <a:solidFill>
+                  <a:srgbClr val="1B2733"/>
+                </a:solidFill>
+                <a:latin typeface="Yu Gothic" pitchFamily="34" charset="0"/>
+                <a:ea typeface="Yu Gothic" pitchFamily="34" charset="-122"/>
+                <a:cs typeface="Yu Gothic" pitchFamily="34" charset="-120"/>
+              </a:rPr>
+              <a:t>問題点は、見ていない「侵入」を断定していること。報告例「20時15分、B1東側非常口が15cmほど開いていた。施錠されているはずの扉で、付近に人影はない。侵入の可能性があると思われる」。</a:t>
+            </a:r>
+            <a:endParaRPr lang="en-US" sz="900" dirty="0"/>
+          </a:p>
+          <a:p>
+            <a:pPr indent="0" marL="0">
+              <a:lnSpc>
+                <a:spcPct val="88000"/>
+              </a:lnSpc>
+              <a:buNone/>
+            </a:pPr>
+            <a:r>
+              <a:rPr lang="en-US" sz="800" i="1" dirty="0">
+                <a:solidFill>
+                  <a:srgbClr val="5F7183"/>
+                </a:solidFill>
+                <a:latin typeface="Calibri" pitchFamily="34" charset="0"/>
+                <a:ea typeface="Calibri" pitchFamily="34" charset="-122"/>
+                <a:cs typeface="Calibri" pitchFamily="34" charset="-120"/>
+              </a:rPr>
+              <a:t>The problem is asserting an intrusion nobody saw. Report: "At 20:15 the B1 east exit stood about 15 cm open. It should have been locked and nobody was nearby. In my judgement there may have been an intrusion."</a:t>
+            </a:r>
+            <a:endParaRPr lang="en-US" sz="900" dirty="0"/>
+          </a:p>
+        </p:txBody>
+      </p:sp>
+      <p:sp>
+        <p:nvSpPr>
+          <p:cNvPr id="10" name="Shape 7"/>
+          <p:cNvSpPr/>
+          <p:nvPr/>
+        </p:nvSpPr>
+        <p:spPr>
+          <a:xfrm>
+            <a:off x="640080" y="2134210"/>
+            <a:ext cx="10911535" cy="844906"/>
+          </a:xfrm>
+          <a:prstGeom prst="roundRect">
+            <a:avLst>
+              <a:gd name="adj" fmla="val 4329"/>
             </a:avLst>
           </a:prstGeom>
           <a:solidFill>
@@ -6952,14 +6883,14 @@
       </p:sp>
       <p:sp>
         <p:nvSpPr>
-          <p:cNvPr id="6" name="Shape 3"/>
-          <p:cNvSpPr/>
-          <p:nvPr/>
-        </p:nvSpPr>
-        <p:spPr>
-          <a:xfrm>
-            <a:off x="896112" y="2445106"/>
-            <a:ext cx="384048" cy="384048"/>
+          <p:cNvPr id="11" name="Shape 8"/>
+          <p:cNvSpPr/>
+          <p:nvPr/>
+        </p:nvSpPr>
+        <p:spPr>
+          <a:xfrm>
+            <a:off x="841248" y="2382926"/>
+            <a:ext cx="347472" cy="347472"/>
           </a:xfrm>
           <a:prstGeom prst="ellipse">
             <a:avLst/>
@@ -6972,14 +6903,14 @@
       </p:sp>
       <p:sp>
         <p:nvSpPr>
-          <p:cNvPr id="7" name="Text 4"/>
-          <p:cNvSpPr/>
-          <p:nvPr/>
-        </p:nvSpPr>
-        <p:spPr>
-          <a:xfrm>
-            <a:off x="896112" y="2445106"/>
-            <a:ext cx="384048" cy="384048"/>
+          <p:cNvPr id="12" name="Text 9"/>
+          <p:cNvSpPr/>
+          <p:nvPr/>
+        </p:nvSpPr>
+        <p:spPr>
+          <a:xfrm>
+            <a:off x="841248" y="2382926"/>
+            <a:ext cx="347472" cy="347472"/>
           </a:xfrm>
           <a:prstGeom prst="rect">
             <a:avLst/>
@@ -6995,7 +6926,7 @@
               <a:buNone/>
             </a:pPr>
             <a:r>
-              <a:rPr lang="en-US" sz="1400" b="1" dirty="0">
+              <a:rPr lang="en-US" sz="1100" b="1" dirty="0">
                 <a:solidFill>
                   <a:srgbClr val="FFFFFF"/>
                 </a:solidFill>
@@ -7003,22 +6934,22 @@
                 <a:ea typeface="Calibri" pitchFamily="34" charset="-122"/>
                 <a:cs typeface="Calibri" pitchFamily="34" charset="-120"/>
               </a:rPr>
-              <a:t>1</a:t>
-            </a:r>
-            <a:endParaRPr lang="en-US" sz="1400" dirty="0"/>
-          </a:p>
-        </p:txBody>
-      </p:sp>
-      <p:sp>
-        <p:nvSpPr>
-          <p:cNvPr id="8" name="Text 5"/>
-          <p:cNvSpPr/>
-          <p:nvPr/>
-        </p:nvSpPr>
-        <p:spPr>
-          <a:xfrm>
-            <a:off x="1499616" y="2395728"/>
-            <a:ext cx="9777679" cy="519379"/>
+              <a:t>7</a:t>
+            </a:r>
+            <a:endParaRPr lang="en-US" sz="1100" dirty="0"/>
+          </a:p>
+        </p:txBody>
+      </p:sp>
+      <p:sp>
+        <p:nvSpPr>
+          <p:cNvPr id="13" name="Text 10"/>
+          <p:cNvSpPr/>
+          <p:nvPr/>
+        </p:nvSpPr>
+        <p:spPr>
+          <a:xfrm>
+            <a:off x="1280160" y="2198218"/>
+            <a:ext cx="10033711" cy="716890"/>
           </a:xfrm>
           <a:prstGeom prst="rect">
             <a:avLst/>
@@ -7032,12 +6963,32 @@
           <a:p>
             <a:pPr indent="0" marL="0">
               <a:lnSpc>
-                <a:spcPct val="92000"/>
-              </a:lnSpc>
-              <a:buNone/>
-            </a:pPr>
-            <a:r>
-              <a:rPr lang="en-US" sz="1450" b="1" dirty="0">
+                <a:spcPct val="88000"/>
+              </a:lnSpc>
+              <a:buNone/>
+            </a:pPr>
+            <a:r>
+              <a:rPr lang="en-US" sz="900" dirty="0">
+                <a:solidFill>
+                  <a:srgbClr val="5F7183"/>
+                </a:solidFill>
+                <a:latin typeface="Yu Gothic" pitchFamily="34" charset="0"/>
+                <a:ea typeface="Yu Gothic" pitchFamily="34" charset="-122"/>
+                <a:cs typeface="Yu Gothic" pitchFamily="34" charset="-120"/>
+              </a:rPr>
+              <a:t>問7　119番で最初に伝えること</a:t>
+            </a:r>
+            <a:endParaRPr lang="en-US" sz="900" dirty="0"/>
+          </a:p>
+          <a:p>
+            <a:pPr indent="0" marL="0">
+              <a:lnSpc>
+                <a:spcPct val="88000"/>
+              </a:lnSpc>
+              <a:buNone/>
+            </a:pPr>
+            <a:r>
+              <a:rPr lang="en-US" sz="1200" b="1" dirty="0">
                 <a:solidFill>
                   <a:srgbClr val="1B2733"/>
                 </a:solidFill>
@@ -7045,19 +6996,19 @@
                 <a:ea typeface="Yu Gothic" pitchFamily="34" charset="-122"/>
                 <a:cs typeface="Yu Gothic" pitchFamily="34" charset="-120"/>
               </a:rPr>
-              <a:t>何が起きるはずだったか。</a:t>
-            </a:r>
-            <a:endParaRPr lang="en-US" sz="1450" dirty="0"/>
-          </a:p>
-          <a:p>
-            <a:pPr indent="0" marL="0">
-              <a:lnSpc>
-                <a:spcPct val="92000"/>
-              </a:lnSpc>
-              <a:buNone/>
-            </a:pPr>
-            <a:r>
-              <a:rPr lang="en-US" sz="1050" i="1" dirty="0">
+              <a:t>種別。「火事です」か「救急です」。場所より先に言う。</a:t>
+            </a:r>
+            <a:endParaRPr lang="en-US" sz="900" dirty="0"/>
+          </a:p>
+          <a:p>
+            <a:pPr indent="0" marL="0">
+              <a:lnSpc>
+                <a:spcPct val="88000"/>
+              </a:lnSpc>
+              <a:buNone/>
+            </a:pPr>
+            <a:r>
+              <a:rPr lang="en-US" sz="800" i="1" dirty="0">
                 <a:solidFill>
                   <a:srgbClr val="5F7183"/>
                 </a:solidFill>
@@ -7065,44 +7016,44 @@
                 <a:ea typeface="Calibri" pitchFamily="34" charset="-122"/>
                 <a:cs typeface="Calibri" pitchFamily="34" charset="-120"/>
               </a:rPr>
-              <a:t>What was supposed to happen?</a:t>
-            </a:r>
-            <a:endParaRPr lang="en-US" sz="1450" dirty="0"/>
-          </a:p>
-        </p:txBody>
-      </p:sp>
-      <p:sp>
-        <p:nvSpPr>
-          <p:cNvPr id="9" name="Shape 6"/>
-          <p:cNvSpPr/>
-          <p:nvPr/>
-        </p:nvSpPr>
-        <p:spPr>
-          <a:xfrm>
-            <a:off x="640080" y="3097987"/>
-            <a:ext cx="10911535" cy="702259"/>
+              <a:t>The type — fire, or ambulance. Before the location.</a:t>
+            </a:r>
+            <a:endParaRPr lang="en-US" sz="900" dirty="0"/>
+          </a:p>
+        </p:txBody>
+      </p:sp>
+      <p:sp>
+        <p:nvSpPr>
+          <p:cNvPr id="14" name="Shape 11"/>
+          <p:cNvSpPr/>
+          <p:nvPr/>
+        </p:nvSpPr>
+        <p:spPr>
+          <a:xfrm>
+            <a:off x="640080" y="3079699"/>
+            <a:ext cx="10911535" cy="844906"/>
           </a:xfrm>
           <a:prstGeom prst="roundRect">
             <a:avLst>
-              <a:gd name="adj" fmla="val 6510"/>
+              <a:gd name="adj" fmla="val 4329"/>
             </a:avLst>
           </a:prstGeom>
           <a:solidFill>
-            <a:srgbClr val="F7FAFC"/>
+            <a:srgbClr val="EFF4F8"/>
           </a:solidFill>
           <a:ln/>
         </p:spPr>
       </p:sp>
       <p:sp>
         <p:nvSpPr>
-          <p:cNvPr id="10" name="Shape 7"/>
-          <p:cNvSpPr/>
-          <p:nvPr/>
-        </p:nvSpPr>
-        <p:spPr>
-          <a:xfrm>
-            <a:off x="896112" y="3257093"/>
-            <a:ext cx="384048" cy="384048"/>
+          <p:cNvPr id="15" name="Shape 12"/>
+          <p:cNvSpPr/>
+          <p:nvPr/>
+        </p:nvSpPr>
+        <p:spPr>
+          <a:xfrm>
+            <a:off x="841248" y="3328416"/>
+            <a:ext cx="347472" cy="347472"/>
           </a:xfrm>
           <a:prstGeom prst="ellipse">
             <a:avLst/>
@@ -7115,14 +7066,14 @@
       </p:sp>
       <p:sp>
         <p:nvSpPr>
-          <p:cNvPr id="11" name="Text 8"/>
-          <p:cNvSpPr/>
-          <p:nvPr/>
-        </p:nvSpPr>
-        <p:spPr>
-          <a:xfrm>
-            <a:off x="896112" y="3257093"/>
-            <a:ext cx="384048" cy="384048"/>
+          <p:cNvPr id="16" name="Text 13"/>
+          <p:cNvSpPr/>
+          <p:nvPr/>
+        </p:nvSpPr>
+        <p:spPr>
+          <a:xfrm>
+            <a:off x="841248" y="3328416"/>
+            <a:ext cx="347472" cy="347472"/>
           </a:xfrm>
           <a:prstGeom prst="rect">
             <a:avLst/>
@@ -7138,7 +7089,7 @@
               <a:buNone/>
             </a:pPr>
             <a:r>
-              <a:rPr lang="en-US" sz="1400" b="1" dirty="0">
+              <a:rPr lang="en-US" sz="1100" b="1" dirty="0">
                 <a:solidFill>
                   <a:srgbClr val="FFFFFF"/>
                 </a:solidFill>
@@ -7146,22 +7097,22 @@
                 <a:ea typeface="Calibri" pitchFamily="34" charset="-122"/>
                 <a:cs typeface="Calibri" pitchFamily="34" charset="-120"/>
               </a:rPr>
-              <a:t>2</a:t>
-            </a:r>
-            <a:endParaRPr lang="en-US" sz="1400" dirty="0"/>
-          </a:p>
-        </p:txBody>
-      </p:sp>
-      <p:sp>
-        <p:nvSpPr>
-          <p:cNvPr id="12" name="Text 9"/>
-          <p:cNvSpPr/>
-          <p:nvPr/>
-        </p:nvSpPr>
-        <p:spPr>
-          <a:xfrm>
-            <a:off x="1499616" y="3207715"/>
-            <a:ext cx="9777679" cy="519379"/>
+              <a:t>8</a:t>
+            </a:r>
+            <a:endParaRPr lang="en-US" sz="1100" dirty="0"/>
+          </a:p>
+        </p:txBody>
+      </p:sp>
+      <p:sp>
+        <p:nvSpPr>
+          <p:cNvPr id="17" name="Text 14"/>
+          <p:cNvSpPr/>
+          <p:nvPr/>
+        </p:nvSpPr>
+        <p:spPr>
+          <a:xfrm>
+            <a:off x="1280160" y="3143707"/>
+            <a:ext cx="10033711" cy="716890"/>
           </a:xfrm>
           <a:prstGeom prst="rect">
             <a:avLst/>
@@ -7175,12 +7126,32 @@
           <a:p>
             <a:pPr indent="0" marL="0">
               <a:lnSpc>
-                <a:spcPct val="92000"/>
-              </a:lnSpc>
-              <a:buNone/>
-            </a:pPr>
-            <a:r>
-              <a:rPr lang="en-US" sz="1450" b="1" dirty="0">
+                <a:spcPct val="88000"/>
+              </a:lnSpc>
+              <a:buNone/>
+            </a:pPr>
+            <a:r>
+              <a:rPr lang="en-US" sz="900" dirty="0">
+                <a:solidFill>
+                  <a:srgbClr val="5F7183"/>
+                </a:solidFill>
+                <a:latin typeface="Yu Gothic" pitchFamily="34" charset="0"/>
+                <a:ea typeface="Yu Gothic" pitchFamily="34" charset="-122"/>
+                <a:cs typeface="Yu Gothic" pitchFamily="34" charset="-120"/>
+              </a:rPr>
+              <a:t>問8　現場を変えてよい理由</a:t>
+            </a:r>
+            <a:endParaRPr lang="en-US" sz="900" dirty="0"/>
+          </a:p>
+          <a:p>
+            <a:pPr indent="0" marL="0">
+              <a:lnSpc>
+                <a:spcPct val="88000"/>
+              </a:lnSpc>
+              <a:buNone/>
+            </a:pPr>
+            <a:r>
+              <a:rPr lang="en-US" sz="1200" b="1" dirty="0">
                 <a:solidFill>
                   <a:srgbClr val="1B2733"/>
                 </a:solidFill>
@@ -7188,19 +7159,19 @@
                 <a:ea typeface="Yu Gothic" pitchFamily="34" charset="-122"/>
                 <a:cs typeface="Yu Gothic" pitchFamily="34" charset="-120"/>
               </a:rPr>
-              <a:t>実際には何が起きたか。</a:t>
-            </a:r>
-            <a:endParaRPr lang="en-US" sz="1450" dirty="0"/>
-          </a:p>
-          <a:p>
-            <a:pPr indent="0" marL="0">
-              <a:lnSpc>
-                <a:spcPct val="92000"/>
-              </a:lnSpc>
-              <a:buNone/>
-            </a:pPr>
-            <a:r>
-              <a:rPr lang="en-US" sz="1050" i="1" dirty="0">
+              <a:t>人命（救助・救護）のため。それ以外では動かさない。動かした場合は何を・どこから・どこへ・誰が・何時にを記録。</a:t>
+            </a:r>
+            <a:endParaRPr lang="en-US" sz="900" dirty="0"/>
+          </a:p>
+          <a:p>
+            <a:pPr indent="0" marL="0">
+              <a:lnSpc>
+                <a:spcPct val="88000"/>
+              </a:lnSpc>
+              <a:buNone/>
+            </a:pPr>
+            <a:r>
+              <a:rPr lang="en-US" sz="800" i="1" dirty="0">
                 <a:solidFill>
                   <a:srgbClr val="5F7183"/>
                 </a:solidFill>
@@ -7208,26 +7179,189 @@
                 <a:ea typeface="Calibri" pitchFamily="34" charset="-122"/>
                 <a:cs typeface="Calibri" pitchFamily="34" charset="-120"/>
               </a:rPr>
-              <a:t>What actually happened?</a:t>
-            </a:r>
-            <a:endParaRPr lang="en-US" sz="1450" dirty="0"/>
-          </a:p>
-        </p:txBody>
-      </p:sp>
-      <p:sp>
-        <p:nvSpPr>
-          <p:cNvPr id="13" name="Shape 10"/>
-          <p:cNvSpPr/>
-          <p:nvPr/>
-        </p:nvSpPr>
-        <p:spPr>
-          <a:xfrm>
-            <a:off x="640080" y="3909974"/>
-            <a:ext cx="10911535" cy="702259"/>
+              <a:t>To save life. Otherwise change nothing; if you did, record what, from where, to where, by whom and when.</a:t>
+            </a:r>
+            <a:endParaRPr lang="en-US" sz="900" dirty="0"/>
+          </a:p>
+        </p:txBody>
+      </p:sp>
+      <p:sp>
+        <p:nvSpPr>
+          <p:cNvPr id="18" name="Shape 15"/>
+          <p:cNvSpPr/>
+          <p:nvPr/>
+        </p:nvSpPr>
+        <p:spPr>
+          <a:xfrm>
+            <a:off x="640080" y="4025189"/>
+            <a:ext cx="10911535" cy="844906"/>
           </a:xfrm>
           <a:prstGeom prst="roundRect">
             <a:avLst>
-              <a:gd name="adj" fmla="val 6510"/>
+              <a:gd name="adj" fmla="val 4329"/>
+            </a:avLst>
+          </a:prstGeom>
+          <a:solidFill>
+            <a:srgbClr val="E4F4F0"/>
+          </a:solidFill>
+          <a:ln/>
+        </p:spPr>
+      </p:sp>
+      <p:sp>
+        <p:nvSpPr>
+          <p:cNvPr id="19" name="Shape 16"/>
+          <p:cNvSpPr/>
+          <p:nvPr/>
+        </p:nvSpPr>
+        <p:spPr>
+          <a:xfrm>
+            <a:off x="841248" y="4273906"/>
+            <a:ext cx="347472" cy="347472"/>
+          </a:xfrm>
+          <a:prstGeom prst="ellipse">
+            <a:avLst/>
+          </a:prstGeom>
+          <a:solidFill>
+            <a:srgbClr val="12B198"/>
+          </a:solidFill>
+          <a:ln/>
+        </p:spPr>
+      </p:sp>
+      <p:sp>
+        <p:nvSpPr>
+          <p:cNvPr id="20" name="Text 17"/>
+          <p:cNvSpPr/>
+          <p:nvPr/>
+        </p:nvSpPr>
+        <p:spPr>
+          <a:xfrm>
+            <a:off x="841248" y="4273906"/>
+            <a:ext cx="347472" cy="347472"/>
+          </a:xfrm>
+          <a:prstGeom prst="rect">
+            <a:avLst/>
+          </a:prstGeom>
+          <a:noFill/>
+          <a:ln/>
+        </p:spPr>
+        <p:txBody>
+          <a:bodyPr wrap="square" lIns="0" tIns="0" rIns="0" bIns="0" rtlCol="0" anchor="ctr"/>
+          <a:lstStyle/>
+          <a:p>
+            <a:pPr algn="ctr" indent="0" marL="0">
+              <a:buNone/>
+            </a:pPr>
+            <a:r>
+              <a:rPr lang="en-US" sz="1100" b="1" dirty="0">
+                <a:solidFill>
+                  <a:srgbClr val="FFFFFF"/>
+                </a:solidFill>
+                <a:latin typeface="Calibri" pitchFamily="34" charset="0"/>
+                <a:ea typeface="Calibri" pitchFamily="34" charset="-122"/>
+                <a:cs typeface="Calibri" pitchFamily="34" charset="-120"/>
+              </a:rPr>
+              <a:t>9</a:t>
+            </a:r>
+            <a:endParaRPr lang="en-US" sz="1100" dirty="0"/>
+          </a:p>
+        </p:txBody>
+      </p:sp>
+      <p:sp>
+        <p:nvSpPr>
+          <p:cNvPr id="21" name="Text 18"/>
+          <p:cNvSpPr/>
+          <p:nvPr/>
+        </p:nvSpPr>
+        <p:spPr>
+          <a:xfrm>
+            <a:off x="1280160" y="4089197"/>
+            <a:ext cx="10033711" cy="716890"/>
+          </a:xfrm>
+          <a:prstGeom prst="rect">
+            <a:avLst/>
+          </a:prstGeom>
+          <a:noFill/>
+          <a:ln/>
+        </p:spPr>
+        <p:txBody>
+          <a:bodyPr wrap="square" lIns="0" tIns="0" rIns="0" bIns="0" rtlCol="0" anchor="ctr"/>
+          <a:lstStyle/>
+          <a:p>
+            <a:pPr indent="0" marL="0">
+              <a:lnSpc>
+                <a:spcPct val="88000"/>
+              </a:lnSpc>
+              <a:buNone/>
+            </a:pPr>
+            <a:r>
+              <a:rPr lang="en-US" sz="900" dirty="0">
+                <a:solidFill>
+                  <a:srgbClr val="5F7183"/>
+                </a:solidFill>
+                <a:latin typeface="Yu Gothic" pitchFamily="34" charset="0"/>
+                <a:ea typeface="Yu Gothic" pitchFamily="34" charset="-122"/>
+                <a:cs typeface="Yu Gothic" pitchFamily="34" charset="-120"/>
+              </a:rPr>
+              <a:t>問9　受信機の発報時</a:t>
+            </a:r>
+            <a:endParaRPr lang="en-US" sz="900" dirty="0"/>
+          </a:p>
+          <a:p>
+            <a:pPr indent="0" marL="0">
+              <a:lnSpc>
+                <a:spcPct val="88000"/>
+              </a:lnSpc>
+              <a:buNone/>
+            </a:pPr>
+            <a:r>
+              <a:rPr lang="en-US" sz="1200" b="1" dirty="0">
+                <a:solidFill>
+                  <a:srgbClr val="1B2733"/>
+                </a:solidFill>
+                <a:latin typeface="Yu Gothic" pitchFamily="34" charset="0"/>
+                <a:ea typeface="Yu Gothic" pitchFamily="34" charset="-122"/>
+                <a:cs typeface="Yu Gothic" pitchFamily="34" charset="-120"/>
+              </a:rPr>
+              <a:t>地区表示（どこが鳴っているか）。「火事です」とは言わない。発報は火災の確定ではない。</a:t>
+            </a:r>
+            <a:endParaRPr lang="en-US" sz="900" dirty="0"/>
+          </a:p>
+          <a:p>
+            <a:pPr indent="0" marL="0">
+              <a:lnSpc>
+                <a:spcPct val="88000"/>
+              </a:lnSpc>
+              <a:buNone/>
+            </a:pPr>
+            <a:r>
+              <a:rPr lang="en-US" sz="800" i="1" dirty="0">
+                <a:solidFill>
+                  <a:srgbClr val="5F7183"/>
+                </a:solidFill>
+                <a:latin typeface="Calibri" pitchFamily="34" charset="0"/>
+                <a:ea typeface="Calibri" pitchFamily="34" charset="-122"/>
+                <a:cs typeface="Calibri" pitchFamily="34" charset="-120"/>
+              </a:rPr>
+              <a:t>The zone display. Do not say "fire" — an activation is not a confirmed fire.</a:t>
+            </a:r>
+            <a:endParaRPr lang="en-US" sz="900" dirty="0"/>
+          </a:p>
+        </p:txBody>
+      </p:sp>
+      <p:sp>
+        <p:nvSpPr>
+          <p:cNvPr id="22" name="Shape 19"/>
+          <p:cNvSpPr/>
+          <p:nvPr/>
+        </p:nvSpPr>
+        <p:spPr>
+          <a:xfrm>
+            <a:off x="640080" y="4970678"/>
+            <a:ext cx="10911535" cy="844906"/>
+          </a:xfrm>
+          <a:prstGeom prst="roundRect">
+            <a:avLst>
+              <a:gd name="adj" fmla="val 4329"/>
             </a:avLst>
           </a:prstGeom>
           <a:solidFill>
@@ -7238,14 +7372,14 @@
       </p:sp>
       <p:sp>
         <p:nvSpPr>
-          <p:cNvPr id="14" name="Shape 11"/>
-          <p:cNvSpPr/>
-          <p:nvPr/>
-        </p:nvSpPr>
-        <p:spPr>
-          <a:xfrm>
-            <a:off x="896112" y="4069080"/>
-            <a:ext cx="384048" cy="384048"/>
+          <p:cNvPr id="23" name="Shape 20"/>
+          <p:cNvSpPr/>
+          <p:nvPr/>
+        </p:nvSpPr>
+        <p:spPr>
+          <a:xfrm>
+            <a:off x="841248" y="5219395"/>
+            <a:ext cx="347472" cy="347472"/>
           </a:xfrm>
           <a:prstGeom prst="ellipse">
             <a:avLst/>
@@ -7258,14 +7392,14 @@
       </p:sp>
       <p:sp>
         <p:nvSpPr>
-          <p:cNvPr id="15" name="Text 12"/>
-          <p:cNvSpPr/>
-          <p:nvPr/>
-        </p:nvSpPr>
-        <p:spPr>
-          <a:xfrm>
-            <a:off x="896112" y="4069080"/>
-            <a:ext cx="384048" cy="384048"/>
+          <p:cNvPr id="24" name="Text 21"/>
+          <p:cNvSpPr/>
+          <p:nvPr/>
+        </p:nvSpPr>
+        <p:spPr>
+          <a:xfrm>
+            <a:off x="841248" y="5219395"/>
+            <a:ext cx="347472" cy="347472"/>
           </a:xfrm>
           <a:prstGeom prst="rect">
             <a:avLst/>
@@ -7281,7 +7415,7 @@
               <a:buNone/>
             </a:pPr>
             <a:r>
-              <a:rPr lang="en-US" sz="1400" b="1" dirty="0">
+              <a:rPr lang="en-US" sz="1100" b="1" dirty="0">
                 <a:solidFill>
                   <a:srgbClr val="FFFFFF"/>
                 </a:solidFill>
@@ -7289,22 +7423,22 @@
                 <a:ea typeface="Calibri" pitchFamily="34" charset="-122"/>
                 <a:cs typeface="Calibri" pitchFamily="34" charset="-120"/>
               </a:rPr>
-              <a:t>3</a:t>
-            </a:r>
-            <a:endParaRPr lang="en-US" sz="1400" dirty="0"/>
-          </a:p>
-        </p:txBody>
-      </p:sp>
-      <p:sp>
-        <p:nvSpPr>
-          <p:cNvPr id="16" name="Text 13"/>
-          <p:cNvSpPr/>
-          <p:nvPr/>
-        </p:nvSpPr>
-        <p:spPr>
-          <a:xfrm>
-            <a:off x="1499616" y="4019702"/>
-            <a:ext cx="9777679" cy="519379"/>
+              <a:t>10</a:t>
+            </a:r>
+            <a:endParaRPr lang="en-US" sz="1100" dirty="0"/>
+          </a:p>
+        </p:txBody>
+      </p:sp>
+      <p:sp>
+        <p:nvSpPr>
+          <p:cNvPr id="25" name="Text 22"/>
+          <p:cNvSpPr/>
+          <p:nvPr/>
+        </p:nvSpPr>
+        <p:spPr>
+          <a:xfrm>
+            <a:off x="1280160" y="5034686"/>
+            <a:ext cx="10033711" cy="716890"/>
           </a:xfrm>
           <a:prstGeom prst="rect">
             <a:avLst/>
@@ -7318,12 +7452,32 @@
           <a:p>
             <a:pPr indent="0" marL="0">
               <a:lnSpc>
-                <a:spcPct val="92000"/>
-              </a:lnSpc>
-              <a:buNone/>
-            </a:pPr>
-            <a:r>
-              <a:rPr lang="en-US" sz="1450" b="1" dirty="0">
+                <a:spcPct val="88000"/>
+              </a:lnSpc>
+              <a:buNone/>
+            </a:pPr>
+            <a:r>
+              <a:rPr lang="en-US" sz="900" dirty="0">
+                <a:solidFill>
+                  <a:srgbClr val="5F7183"/>
+                </a:solidFill>
+                <a:latin typeface="Yu Gothic" pitchFamily="34" charset="0"/>
+                <a:ea typeface="Yu Gothic" pitchFamily="34" charset="-122"/>
+                <a:cs typeface="Yu Gothic" pitchFamily="34" charset="-120"/>
+              </a:rPr>
+              <a:t>問10　保全と開示の違い</a:t>
+            </a:r>
+            <a:endParaRPr lang="en-US" sz="900" dirty="0"/>
+          </a:p>
+          <a:p>
+            <a:pPr indent="0" marL="0">
+              <a:lnSpc>
+                <a:spcPct val="88000"/>
+              </a:lnSpc>
+              <a:buNone/>
+            </a:pPr>
+            <a:r>
+              <a:rPr lang="en-US" sz="1200" b="1" dirty="0">
                 <a:solidFill>
                   <a:srgbClr val="1B2733"/>
                 </a:solidFill>
@@ -7331,19 +7485,19 @@
                 <a:ea typeface="Yu Gothic" pitchFamily="34" charset="-122"/>
                 <a:cs typeface="Yu Gothic" pitchFamily="34" charset="-120"/>
               </a:rPr>
-              <a:t>なぜ差が生じたか。</a:t>
-            </a:r>
-            <a:endParaRPr lang="en-US" sz="1450" dirty="0"/>
-          </a:p>
-          <a:p>
-            <a:pPr indent="0" marL="0">
-              <a:lnSpc>
-                <a:spcPct val="92000"/>
-              </a:lnSpc>
-              <a:buNone/>
-            </a:pPr>
-            <a:r>
-              <a:rPr lang="en-US" sz="1050" i="1" dirty="0">
+              <a:t>保全＝上書きを防いで残す。開示＝内容を渡す。警備員が受けられるのは保全のみ。</a:t>
+            </a:r>
+            <a:endParaRPr lang="en-US" sz="900" dirty="0"/>
+          </a:p>
+          <a:p>
+            <a:pPr indent="0" marL="0">
+              <a:lnSpc>
+                <a:spcPct val="88000"/>
+              </a:lnSpc>
+              <a:buNone/>
+            </a:pPr>
+            <a:r>
+              <a:rPr lang="en-US" sz="800" i="1" dirty="0">
                 <a:solidFill>
                   <a:srgbClr val="5F7183"/>
                 </a:solidFill>
@@ -7351,122 +7505,58 @@
                 <a:ea typeface="Calibri" pitchFamily="34" charset="-122"/>
                 <a:cs typeface="Calibri" pitchFamily="34" charset="-120"/>
               </a:rPr>
-              <a:t>Why was there a difference?</a:t>
-            </a:r>
-            <a:endParaRPr lang="en-US" sz="1450" dirty="0"/>
-          </a:p>
-        </p:txBody>
-      </p:sp>
-      <p:sp>
-        <p:nvSpPr>
-          <p:cNvPr id="17" name="Shape 14"/>
-          <p:cNvSpPr/>
-          <p:nvPr/>
-        </p:nvSpPr>
-        <p:spPr>
-          <a:xfrm>
-            <a:off x="640080" y="4721962"/>
-            <a:ext cx="10911535" cy="702259"/>
-          </a:xfrm>
-          <a:prstGeom prst="roundRect">
-            <a:avLst>
-              <a:gd name="adj" fmla="val 6510"/>
-            </a:avLst>
-          </a:prstGeom>
-          <a:solidFill>
-            <a:srgbClr val="F7FAFC"/>
-          </a:solidFill>
-          <a:ln/>
-        </p:spPr>
-      </p:sp>
-      <p:sp>
-        <p:nvSpPr>
-          <p:cNvPr id="18" name="Shape 15"/>
-          <p:cNvSpPr/>
-          <p:nvPr/>
-        </p:nvSpPr>
-        <p:spPr>
-          <a:xfrm>
-            <a:off x="896112" y="4881067"/>
-            <a:ext cx="384048" cy="384048"/>
-          </a:xfrm>
-          <a:prstGeom prst="ellipse">
-            <a:avLst/>
-          </a:prstGeom>
-          <a:solidFill>
-            <a:srgbClr val="12B198"/>
-          </a:solidFill>
-          <a:ln/>
-        </p:spPr>
-      </p:sp>
-      <p:sp>
-        <p:nvSpPr>
-          <p:cNvPr id="19" name="Text 16"/>
-          <p:cNvSpPr/>
-          <p:nvPr/>
-        </p:nvSpPr>
-        <p:spPr>
-          <a:xfrm>
-            <a:off x="896112" y="4881067"/>
-            <a:ext cx="384048" cy="384048"/>
-          </a:xfrm>
-          <a:prstGeom prst="rect">
-            <a:avLst/>
-          </a:prstGeom>
-          <a:noFill/>
-          <a:ln/>
-        </p:spPr>
-        <p:txBody>
-          <a:bodyPr wrap="square" lIns="0" tIns="0" rIns="0" bIns="0" rtlCol="0" anchor="ctr"/>
-          <a:lstStyle/>
-          <a:p>
-            <a:pPr algn="ctr" indent="0" marL="0">
-              <a:buNone/>
-            </a:pPr>
-            <a:r>
-              <a:rPr lang="en-US" sz="1400" b="1" dirty="0">
-                <a:solidFill>
-                  <a:srgbClr val="FFFFFF"/>
-                </a:solidFill>
-                <a:latin typeface="Calibri" pitchFamily="34" charset="0"/>
-                <a:ea typeface="Calibri" pitchFamily="34" charset="-122"/>
-                <a:cs typeface="Calibri" pitchFamily="34" charset="-120"/>
-              </a:rPr>
-              <a:t>4</a:t>
-            </a:r>
-            <a:endParaRPr lang="en-US" sz="1400" dirty="0"/>
-          </a:p>
-        </p:txBody>
-      </p:sp>
-      <p:sp>
-        <p:nvSpPr>
-          <p:cNvPr id="20" name="Text 17"/>
-          <p:cNvSpPr/>
-          <p:nvPr/>
-        </p:nvSpPr>
-        <p:spPr>
-          <a:xfrm>
-            <a:off x="1499616" y="4831690"/>
-            <a:ext cx="9777679" cy="519379"/>
-          </a:xfrm>
-          <a:prstGeom prst="rect">
-            <a:avLst/>
-          </a:prstGeom>
-          <a:noFill/>
-          <a:ln/>
-        </p:spPr>
-        <p:txBody>
-          <a:bodyPr wrap="square" lIns="0" tIns="0" rIns="0" bIns="0" rtlCol="0" anchor="ctr"/>
-          <a:lstStyle/>
-          <a:p>
-            <a:pPr indent="0" marL="0">
-              <a:lnSpc>
-                <a:spcPct val="92000"/>
-              </a:lnSpc>
-              <a:buNone/>
-            </a:pPr>
-            <a:r>
-              <a:rPr lang="en-US" sz="1450" b="1" dirty="0">
+              <a:t>Preserving keeps it from being overwritten. Disclosing hands over the content. Only preservation is yours to accept.</a:t>
+            </a:r>
+            <a:endParaRPr lang="en-US" sz="900" dirty="0"/>
+          </a:p>
+        </p:txBody>
+      </p:sp>
+      <p:sp>
+        <p:nvSpPr>
+          <p:cNvPr id="26" name="Text 23"/>
+          <p:cNvSpPr/>
+          <p:nvPr/>
+        </p:nvSpPr>
+        <p:spPr>
+          <a:xfrm>
+            <a:off x="640080" y="5907024"/>
+            <a:ext cx="10911535" cy="310896"/>
+          </a:xfrm>
+          <a:prstGeom prst="rect">
+            <a:avLst/>
+          </a:prstGeom>
+          <a:noFill/>
+          <a:ln/>
+        </p:spPr>
+        <p:txBody>
+          <a:bodyPr wrap="square" lIns="0" tIns="0" rIns="0" bIns="0" rtlCol="0" anchor="t"/>
+          <a:lstStyle/>
+          <a:p>
+            <a:pPr indent="0" marL="0">
+              <a:lnSpc>
+                <a:spcPct val="88000"/>
+              </a:lnSpc>
+              <a:buNone/>
+            </a:pPr>
+            <a:r>
+              <a:rPr lang="en-US" sz="900" b="1" dirty="0">
+                <a:solidFill>
+                  <a:srgbClr val="0D8A76"/>
+                </a:solidFill>
+                <a:latin typeface="Yu Gothic" pitchFamily="34" charset="0"/>
+                <a:ea typeface="Yu Gothic" pitchFamily="34" charset="-122"/>
+                <a:cs typeface="Yu Gothic" pitchFamily="34" charset="-120"/>
+              </a:rPr>
+              <a:t>採点の目安　</a:t>
+            </a:r>
+            <a:pPr indent="0" marL="0">
+              <a:lnSpc>
+                <a:spcPct val="88000"/>
+              </a:lnSpc>
+              <a:buNone/>
+            </a:pPr>
+            <a:r>
+              <a:rPr lang="en-US" sz="900" dirty="0">
                 <a:solidFill>
                   <a:srgbClr val="1B2733"/>
                 </a:solidFill>
@@ -7474,19 +7564,19 @@
                 <a:ea typeface="Yu Gothic" pitchFamily="34" charset="-122"/>
                 <a:cs typeface="Yu Gothic" pitchFamily="34" charset="-120"/>
               </a:rPr>
-              <a:t>次に何を変えるか。</a:t>
-            </a:r>
-            <a:endParaRPr lang="en-US" sz="1450" dirty="0"/>
-          </a:p>
-          <a:p>
-            <a:pPr indent="0" marL="0">
-              <a:lnSpc>
-                <a:spcPct val="92000"/>
-              </a:lnSpc>
-              <a:buNone/>
-            </a:pPr>
-            <a:r>
-              <a:rPr lang="en-US" sz="1050" i="1" dirty="0">
+              <a:t>問6と問9は重点問題です。落とした受講者には個別に確認してください。</a:t>
+            </a:r>
+            <a:endParaRPr lang="en-US" sz="900" dirty="0"/>
+          </a:p>
+          <a:p>
+            <a:pPr indent="0" marL="0">
+              <a:lnSpc>
+                <a:spcPct val="88000"/>
+              </a:lnSpc>
+              <a:buNone/>
+            </a:pPr>
+            <a:r>
+              <a:rPr lang="en-US" sz="750" i="1" dirty="0">
                 <a:solidFill>
                   <a:srgbClr val="5F7183"/>
                 </a:solidFill>
@@ -7494,158 +7584,68 @@
                 <a:ea typeface="Calibri" pitchFamily="34" charset="-122"/>
                 <a:cs typeface="Calibri" pitchFamily="34" charset="-120"/>
               </a:rPr>
-              <a:t>What will we do differently?</a:t>
-            </a:r>
-            <a:endParaRPr lang="en-US" sz="1450" dirty="0"/>
-          </a:p>
-        </p:txBody>
-      </p:sp>
-      <p:sp>
-        <p:nvSpPr>
-          <p:cNvPr id="21" name="Shape 18"/>
-          <p:cNvSpPr/>
-          <p:nvPr/>
-        </p:nvSpPr>
-        <p:spPr>
-          <a:xfrm>
-            <a:off x="640080" y="5533949"/>
-            <a:ext cx="10911535" cy="702259"/>
-          </a:xfrm>
-          <a:prstGeom prst="roundRect">
-            <a:avLst>
-              <a:gd name="adj" fmla="val 6510"/>
-            </a:avLst>
-          </a:prstGeom>
-          <a:solidFill>
-            <a:srgbClr val="EFF4F8"/>
-          </a:solidFill>
-          <a:ln/>
-        </p:spPr>
-      </p:sp>
-      <p:sp>
-        <p:nvSpPr>
-          <p:cNvPr id="22" name="Shape 19"/>
-          <p:cNvSpPr/>
-          <p:nvPr/>
-        </p:nvSpPr>
-        <p:spPr>
-          <a:xfrm>
-            <a:off x="896112" y="5693054"/>
-            <a:ext cx="384048" cy="384048"/>
-          </a:xfrm>
-          <a:prstGeom prst="ellipse">
-            <a:avLst/>
-          </a:prstGeom>
-          <a:solidFill>
-            <a:srgbClr val="12B198"/>
-          </a:solidFill>
-          <a:ln/>
-        </p:spPr>
-      </p:sp>
-      <p:sp>
-        <p:nvSpPr>
-          <p:cNvPr id="23" name="Text 20"/>
-          <p:cNvSpPr/>
-          <p:nvPr/>
-        </p:nvSpPr>
-        <p:spPr>
-          <a:xfrm>
-            <a:off x="896112" y="5693054"/>
-            <a:ext cx="384048" cy="384048"/>
-          </a:xfrm>
-          <a:prstGeom prst="rect">
-            <a:avLst/>
-          </a:prstGeom>
-          <a:noFill/>
-          <a:ln/>
-        </p:spPr>
-        <p:txBody>
-          <a:bodyPr wrap="square" lIns="0" tIns="0" rIns="0" bIns="0" rtlCol="0" anchor="ctr"/>
-          <a:lstStyle/>
-          <a:p>
-            <a:pPr algn="ctr" indent="0" marL="0">
-              <a:buNone/>
-            </a:pPr>
-            <a:r>
-              <a:rPr lang="en-US" sz="1400" b="1" dirty="0">
-                <a:solidFill>
-                  <a:srgbClr val="FFFFFF"/>
-                </a:solidFill>
-                <a:latin typeface="Calibri" pitchFamily="34" charset="0"/>
-                <a:ea typeface="Calibri" pitchFamily="34" charset="-122"/>
-                <a:cs typeface="Calibri" pitchFamily="34" charset="-120"/>
-              </a:rPr>
-              <a:t>5</a:t>
-            </a:r>
-            <a:endParaRPr lang="en-US" sz="1400" dirty="0"/>
-          </a:p>
-        </p:txBody>
-      </p:sp>
-      <p:sp>
-        <p:nvSpPr>
-          <p:cNvPr id="24" name="Text 21"/>
-          <p:cNvSpPr/>
-          <p:nvPr/>
-        </p:nvSpPr>
-        <p:spPr>
-          <a:xfrm>
-            <a:off x="1499616" y="5643677"/>
-            <a:ext cx="9777679" cy="519379"/>
-          </a:xfrm>
-          <a:prstGeom prst="rect">
-            <a:avLst/>
-          </a:prstGeom>
-          <a:noFill/>
-          <a:ln/>
-        </p:spPr>
-        <p:txBody>
-          <a:bodyPr wrap="square" lIns="0" tIns="0" rIns="0" bIns="0" rtlCol="0" anchor="ctr"/>
-          <a:lstStyle/>
-          <a:p>
-            <a:pPr indent="0" marL="0">
-              <a:lnSpc>
-                <a:spcPct val="92000"/>
-              </a:lnSpc>
-              <a:buNone/>
-            </a:pPr>
-            <a:r>
-              <a:rPr lang="en-US" sz="1300" b="1" dirty="0">
-                <a:solidFill>
-                  <a:srgbClr val="1B2733"/>
-                </a:solidFill>
-                <a:latin typeface="Yu Gothic" pitchFamily="34" charset="0"/>
-                <a:ea typeface="Yu Gothic" pitchFamily="34" charset="-122"/>
-                <a:cs typeface="Yu Gothic" pitchFamily="34" charset="-120"/>
-              </a:rPr>
-              <a:t>最後に、各自が明日から変える行動を1つ、声に出して述べます。</a:t>
-            </a:r>
-            <a:endParaRPr lang="en-US" sz="1300" dirty="0"/>
-          </a:p>
-          <a:p>
-            <a:pPr indent="0" marL="0">
-              <a:lnSpc>
-                <a:spcPct val="92000"/>
-              </a:lnSpc>
-              <a:buNone/>
-            </a:pPr>
-            <a:r>
-              <a:rPr lang="en-US" sz="950" i="1" dirty="0">
+              <a:t>Questions 6 and 9 are the key items. Follow up individually with anyone who missed them.</a:t>
+            </a:r>
+            <a:endParaRPr lang="en-US" sz="900" dirty="0"/>
+          </a:p>
+        </p:txBody>
+      </p:sp>
+      <p:sp>
+        <p:nvSpPr>
+          <p:cNvPr id="27" name="Text 24"/>
+          <p:cNvSpPr/>
+          <p:nvPr/>
+        </p:nvSpPr>
+        <p:spPr>
+          <a:xfrm>
+            <a:off x="640080" y="6272784"/>
+            <a:ext cx="9905695" cy="237744"/>
+          </a:xfrm>
+          <a:prstGeom prst="rect">
+            <a:avLst/>
+          </a:prstGeom>
+          <a:noFill/>
+          <a:ln/>
+        </p:spPr>
+        <p:txBody>
+          <a:bodyPr wrap="square" lIns="0" tIns="0" rIns="0" bIns="0" rtlCol="0" anchor="t"/>
+          <a:lstStyle/>
+          <a:p>
+            <a:pPr indent="0" marL="0">
+              <a:buNone/>
+            </a:pPr>
+            <a:r>
+              <a:rPr lang="en-US" sz="750" b="1" dirty="0">
+                <a:solidFill>
+                  <a:srgbClr val="D6E0E9"/>
+                </a:solidFill>
+                <a:latin typeface="Yu Gothic" pitchFamily="34" charset="0"/>
+                <a:ea typeface="Yu Gothic" pitchFamily="34" charset="-122"/>
+                <a:cs typeface="Yu Gothic" pitchFamily="34" charset="-120"/>
+              </a:rPr>
+              <a:t>ソース　</a:t>
+            </a:r>
+            <a:pPr indent="0" marL="0">
+              <a:buNone/>
+            </a:pPr>
+            <a:r>
+              <a:rPr lang="en-US" sz="750" dirty="0">
                 <a:solidFill>
                   <a:srgbClr val="5F7183"/>
                 </a:solidFill>
-                <a:latin typeface="Calibri" pitchFamily="34" charset="0"/>
-                <a:ea typeface="Calibri" pitchFamily="34" charset="-122"/>
-                <a:cs typeface="Calibri" pitchFamily="34" charset="-120"/>
-              </a:rPr>
-              <a:t>To close, each person states aloud one thing they will change from tomorrow.</a:t>
-            </a:r>
-            <a:endParaRPr lang="en-US" sz="1300" dirty="0"/>
-          </a:p>
-        </p:txBody>
-      </p:sp>
-      <p:sp>
-        <p:nvSpPr>
-          <p:cNvPr id="25" name="Text 22"/>
+                <a:latin typeface="Yu Gothic" pitchFamily="34" charset="0"/>
+                <a:ea typeface="Yu Gothic" pitchFamily="34" charset="-122"/>
+                <a:cs typeface="Yu Gothic" pitchFamily="34" charset="-120"/>
+              </a:rPr>
+              <a:t>消防法、個人情報保護法、警察庁「警備員教育」</a:t>
+            </a:r>
+            <a:endParaRPr lang="en-US" sz="750" dirty="0"/>
+          </a:p>
+        </p:txBody>
+      </p:sp>
+      <p:sp>
+        <p:nvSpPr>
+          <p:cNvPr id="28" name="Text 25"/>
           <p:cNvSpPr/>
           <p:nvPr/>
         </p:nvSpPr>
@@ -7698,7 +7698,7 @@
       </p:sp>
       <p:sp>
         <p:nvSpPr>
-          <p:cNvPr id="26" name="Text 23"/>
+          <p:cNvPr id="29" name="Text 26"/>
           <p:cNvSpPr/>
           <p:nvPr/>
         </p:nvSpPr>
@@ -19214,7 +19214,7 @@
                 <a:ea typeface="Yu Gothic" pitchFamily="34" charset="-122"/>
                 <a:cs typeface="Yu Gothic" pitchFamily="34" charset="-120"/>
               </a:rPr>
-              <a:t>21時、クライアント企業の部長が防災センターに来る。「うちの部員が備品を持ち出した疑いがある。今日の入退室ログとエレベーターホールのカメラ画像を、いま見せてほしい」と述べる。相手はクライアント側の管理職で、日頃から警備に協力的である。上長は不在。</a:t>
+              <a:t>21時、クライアント企業の部長がセキュリティデスクに来る。「うちの部員が備品を持ち出した疑いがある。今日の入退室ログとエレベーターホールのカメラ画像を、いま見せてほしい」と述べる。相手はクライアント側の管理職で、日頃から警備に協力的である。上長は不在。</a:t>
             </a:r>
             <a:endParaRPr lang="en-US" sz="950" dirty="0"/>
           </a:p>
@@ -19234,7 +19234,7 @@
                 <a:ea typeface="Calibri" pitchFamily="34" charset="-122"/>
                 <a:cs typeface="Calibri" pitchFamily="34" charset="-120"/>
               </a:rPr>
-              <a:t>21:00. A department head from the client company comes to the security office. "One of my staff may have taken equipment. I want to see today's access log and the lift-lobby footage now." They are a client manager who has always been cooperative. Your supervisor is away.</a:t>
+              <a:t>21:00. A department head from the client company comes to the security desk. "One of my staff may have taken equipment. I want to see today's access log and the lift-lobby footage now." They are a client manager who has always been cooperative. Your supervisor is away.</a:t>
             </a:r>
             <a:endParaRPr lang="en-US" sz="950" dirty="0"/>
           </a:p>

--- a/decks/06_10限_機器と総括.pptx
+++ b/decks/06_10限_機器と総括.pptx
@@ -2209,7 +2209,7 @@
               <a:buNone/>
             </a:pPr>
             <a:r>
-              <a:rPr lang="en-US" sz="1050" i="1" dirty="0">
+              <a:rPr lang="en-US" sz="1050" dirty="0">
                 <a:solidFill>
                   <a:srgbClr val="A9BCCE"/>
                 </a:solidFill>
@@ -2386,7 +2386,7 @@
               <a:buNone/>
             </a:pPr>
             <a:r>
-              <a:rPr lang="en-US" sz="1000" i="1" dirty="0">
+              <a:rPr lang="en-US" sz="1000" dirty="0">
                 <a:solidFill>
                   <a:srgbClr val="8EA3B7"/>
                 </a:solidFill>
@@ -2504,7 +2504,7 @@
               <a:buNone/>
             </a:pPr>
             <a:r>
-              <a:rPr lang="en-US" sz="1250" i="1" dirty="0">
+              <a:rPr lang="en-US" sz="1350" dirty="0">
                 <a:solidFill>
                   <a:srgbClr val="12B198"/>
                 </a:solidFill>
@@ -2566,9 +2566,9 @@
               <a:buNone/>
             </a:pPr>
             <a:r>
-              <a:rPr lang="en-US" sz="1000" i="1" dirty="0">
-                <a:solidFill>
-                  <a:srgbClr val="5F7183"/>
+              <a:rPr lang="en-US" sz="1000" dirty="0">
+                <a:solidFill>
+                  <a:srgbClr val="1B2733"/>
                 </a:solidFill>
                 <a:latin typeface="Calibri" pitchFamily="34" charset="0"/>
                 <a:ea typeface="Calibri" pitchFamily="34" charset="-122"/>
@@ -2709,9 +2709,9 @@
               <a:buNone/>
             </a:pPr>
             <a:r>
-              <a:rPr lang="en-US" sz="1050" i="1" dirty="0">
-                <a:solidFill>
-                  <a:srgbClr val="5F7183"/>
+              <a:rPr lang="en-US" sz="1250" dirty="0">
+                <a:solidFill>
+                  <a:srgbClr val="1B2733"/>
                 </a:solidFill>
                 <a:latin typeface="Calibri" pitchFamily="34" charset="0"/>
                 <a:ea typeface="Calibri" pitchFamily="34" charset="-122"/>
@@ -2852,9 +2852,9 @@
               <a:buNone/>
             </a:pPr>
             <a:r>
-              <a:rPr lang="en-US" sz="1050" i="1" dirty="0">
-                <a:solidFill>
-                  <a:srgbClr val="5F7183"/>
+              <a:rPr lang="en-US" sz="1250" dirty="0">
+                <a:solidFill>
+                  <a:srgbClr val="1B2733"/>
                 </a:solidFill>
                 <a:latin typeface="Calibri" pitchFamily="34" charset="0"/>
                 <a:ea typeface="Calibri" pitchFamily="34" charset="-122"/>
@@ -2995,9 +2995,9 @@
               <a:buNone/>
             </a:pPr>
             <a:r>
-              <a:rPr lang="en-US" sz="1050" i="1" dirty="0">
-                <a:solidFill>
-                  <a:srgbClr val="5F7183"/>
+              <a:rPr lang="en-US" sz="1250" dirty="0">
+                <a:solidFill>
+                  <a:srgbClr val="1B2733"/>
                 </a:solidFill>
                 <a:latin typeface="Calibri" pitchFamily="34" charset="0"/>
                 <a:ea typeface="Calibri" pitchFamily="34" charset="-122"/>
@@ -3138,9 +3138,9 @@
               <a:buNone/>
             </a:pPr>
             <a:r>
-              <a:rPr lang="en-US" sz="1050" i="1" dirty="0">
-                <a:solidFill>
-                  <a:srgbClr val="5F7183"/>
+              <a:rPr lang="en-US" sz="1250" dirty="0">
+                <a:solidFill>
+                  <a:srgbClr val="1B2733"/>
                 </a:solidFill>
                 <a:latin typeface="Calibri" pitchFamily="34" charset="0"/>
                 <a:ea typeface="Calibri" pitchFamily="34" charset="-122"/>
@@ -3281,49 +3281,49 @@
               <a:buNone/>
             </a:pPr>
             <a:r>
-              <a:rPr lang="en-US" sz="950" i="1" dirty="0">
+              <a:rPr lang="en-US" sz="1100" dirty="0">
+                <a:solidFill>
+                  <a:srgbClr val="1B2733"/>
+                </a:solidFill>
+                <a:latin typeface="Calibri" pitchFamily="34" charset="0"/>
+                <a:ea typeface="Calibri" pitchFamily="34" charset="-122"/>
+                <a:cs typeface="Calibri" pitchFamily="34" charset="-120"/>
+              </a:rPr>
+              <a:t>Record what comes out of it, and feed it into the next session and the post orders.</a:t>
+            </a:r>
+            <a:endParaRPr lang="en-US" sz="1300" dirty="0"/>
+          </a:p>
+        </p:txBody>
+      </p:sp>
+      <p:sp>
+        <p:nvSpPr>
+          <p:cNvPr id="25" name="Text 22"/>
+          <p:cNvSpPr/>
+          <p:nvPr/>
+        </p:nvSpPr>
+        <p:spPr>
+          <a:xfrm>
+            <a:off x="640080" y="6492240"/>
+            <a:ext cx="8778240" cy="292608"/>
+          </a:xfrm>
+          <a:prstGeom prst="rect">
+            <a:avLst/>
+          </a:prstGeom>
+          <a:noFill/>
+          <a:ln/>
+        </p:spPr>
+        <p:txBody>
+          <a:bodyPr wrap="square" lIns="0" tIns="0" rIns="0" bIns="0" rtlCol="0" anchor="ctr"/>
+          <a:lstStyle/>
+          <a:p>
+            <a:pPr indent="0" marL="0">
+              <a:buNone/>
+            </a:pPr>
+            <a:r>
+              <a:rPr lang="en-US" sz="900" dirty="0">
                 <a:solidFill>
                   <a:srgbClr val="5F7183"/>
                 </a:solidFill>
-                <a:latin typeface="Calibri" pitchFamily="34" charset="0"/>
-                <a:ea typeface="Calibri" pitchFamily="34" charset="-122"/>
-                <a:cs typeface="Calibri" pitchFamily="34" charset="-120"/>
-              </a:rPr>
-              <a:t>Record what comes out of it, and feed it into the next session and the post orders.</a:t>
-            </a:r>
-            <a:endParaRPr lang="en-US" sz="1300" dirty="0"/>
-          </a:p>
-        </p:txBody>
-      </p:sp>
-      <p:sp>
-        <p:nvSpPr>
-          <p:cNvPr id="25" name="Text 22"/>
-          <p:cNvSpPr/>
-          <p:nvPr/>
-        </p:nvSpPr>
-        <p:spPr>
-          <a:xfrm>
-            <a:off x="640080" y="6382512"/>
-            <a:ext cx="8778240" cy="292608"/>
-          </a:xfrm>
-          <a:prstGeom prst="rect">
-            <a:avLst/>
-          </a:prstGeom>
-          <a:noFill/>
-          <a:ln/>
-        </p:spPr>
-        <p:txBody>
-          <a:bodyPr wrap="square" lIns="0" tIns="0" rIns="0" bIns="0" rtlCol="0" anchor="ctr"/>
-          <a:lstStyle/>
-          <a:p>
-            <a:pPr indent="0" marL="0">
-              <a:buNone/>
-            </a:pPr>
-            <a:r>
-              <a:rPr lang="en-US" sz="900" dirty="0">
-                <a:solidFill>
-                  <a:srgbClr val="5F7183"/>
-                </a:solidFill>
                 <a:latin typeface="Yu Gothic" pitchFamily="34" charset="0"/>
                 <a:ea typeface="Yu Gothic" pitchFamily="34" charset="-122"/>
                 <a:cs typeface="Yu Gothic" pitchFamily="34" charset="-120"/>
@@ -3356,7 +3356,7 @@
         </p:nvSpPr>
         <p:spPr>
           <a:xfrm>
-            <a:off x="10637215" y="6382512"/>
+            <a:off x="10637215" y="6492240"/>
             <a:ext cx="914400" cy="292608"/>
           </a:xfrm>
           <a:prstGeom prst="rect">
@@ -3491,7 +3491,7 @@
               <a:buNone/>
             </a:pPr>
             <a:r>
-              <a:rPr lang="en-US" sz="1250" i="1" dirty="0">
+              <a:rPr lang="en-US" sz="1350" dirty="0">
                 <a:solidFill>
                   <a:srgbClr val="12B198"/>
                 </a:solidFill>
@@ -3553,9 +3553,9 @@
               <a:buNone/>
             </a:pPr>
             <a:r>
-              <a:rPr lang="en-US" sz="1000" i="1" dirty="0">
-                <a:solidFill>
-                  <a:srgbClr val="5F7183"/>
+              <a:rPr lang="en-US" sz="1000" dirty="0">
+                <a:solidFill>
+                  <a:srgbClr val="1B2733"/>
                 </a:solidFill>
                 <a:latin typeface="Calibri" pitchFamily="34" charset="0"/>
                 <a:ea typeface="Calibri" pitchFamily="34" charset="-122"/>
@@ -3696,9 +3696,9 @@
               <a:buNone/>
             </a:pPr>
             <a:r>
-              <a:rPr lang="en-US" sz="900" i="1" dirty="0">
-                <a:solidFill>
-                  <a:srgbClr val="5F7183"/>
+              <a:rPr lang="en-US" sz="1050" dirty="0">
+                <a:solidFill>
+                  <a:srgbClr val="1B2733"/>
                 </a:solidFill>
                 <a:latin typeface="Calibri" pitchFamily="34" charset="0"/>
                 <a:ea typeface="Calibri" pitchFamily="34" charset="-122"/>
@@ -3839,9 +3839,9 @@
               <a:buNone/>
             </a:pPr>
             <a:r>
-              <a:rPr lang="en-US" sz="900" i="1" dirty="0">
-                <a:solidFill>
-                  <a:srgbClr val="5F7183"/>
+              <a:rPr lang="en-US" sz="1050" dirty="0">
+                <a:solidFill>
+                  <a:srgbClr val="1B2733"/>
                 </a:solidFill>
                 <a:latin typeface="Calibri" pitchFamily="34" charset="0"/>
                 <a:ea typeface="Calibri" pitchFamily="34" charset="-122"/>
@@ -3982,9 +3982,9 @@
               <a:buNone/>
             </a:pPr>
             <a:r>
-              <a:rPr lang="en-US" sz="900" i="1" dirty="0">
-                <a:solidFill>
-                  <a:srgbClr val="5F7183"/>
+              <a:rPr lang="en-US" sz="1050" dirty="0">
+                <a:solidFill>
+                  <a:srgbClr val="1B2733"/>
                 </a:solidFill>
                 <a:latin typeface="Calibri" pitchFamily="34" charset="0"/>
                 <a:ea typeface="Calibri" pitchFamily="34" charset="-122"/>
@@ -4125,9 +4125,9 @@
               <a:buNone/>
             </a:pPr>
             <a:r>
-              <a:rPr lang="en-US" sz="900" i="1" dirty="0">
-                <a:solidFill>
-                  <a:srgbClr val="5F7183"/>
+              <a:rPr lang="en-US" sz="1050" dirty="0">
+                <a:solidFill>
+                  <a:srgbClr val="1B2733"/>
                 </a:solidFill>
                 <a:latin typeface="Calibri" pitchFamily="34" charset="0"/>
                 <a:ea typeface="Calibri" pitchFamily="34" charset="-122"/>
@@ -4268,49 +4268,49 @@
               <a:buNone/>
             </a:pPr>
             <a:r>
-              <a:rPr lang="en-US" sz="900" i="1" dirty="0">
+              <a:rPr lang="en-US" sz="1050" dirty="0">
+                <a:solidFill>
+                  <a:srgbClr val="1B2733"/>
+                </a:solidFill>
+                <a:latin typeface="Calibri" pitchFamily="34" charset="0"/>
+                <a:ea typeface="Calibri" pitchFamily="34" charset="-122"/>
+                <a:cs typeface="Calibri" pitchFamily="34" charset="-120"/>
+              </a:rPr>
+              <a:t>A request to leave rests on whose intent?</a:t>
+            </a:r>
+            <a:endParaRPr lang="en-US" sz="1150" dirty="0"/>
+          </a:p>
+        </p:txBody>
+      </p:sp>
+      <p:sp>
+        <p:nvSpPr>
+          <p:cNvPr id="25" name="Text 22"/>
+          <p:cNvSpPr/>
+          <p:nvPr/>
+        </p:nvSpPr>
+        <p:spPr>
+          <a:xfrm>
+            <a:off x="640080" y="6492240"/>
+            <a:ext cx="8778240" cy="292608"/>
+          </a:xfrm>
+          <a:prstGeom prst="rect">
+            <a:avLst/>
+          </a:prstGeom>
+          <a:noFill/>
+          <a:ln/>
+        </p:spPr>
+        <p:txBody>
+          <a:bodyPr wrap="square" lIns="0" tIns="0" rIns="0" bIns="0" rtlCol="0" anchor="ctr"/>
+          <a:lstStyle/>
+          <a:p>
+            <a:pPr indent="0" marL="0">
+              <a:buNone/>
+            </a:pPr>
+            <a:r>
+              <a:rPr lang="en-US" sz="900" dirty="0">
                 <a:solidFill>
                   <a:srgbClr val="5F7183"/>
                 </a:solidFill>
-                <a:latin typeface="Calibri" pitchFamily="34" charset="0"/>
-                <a:ea typeface="Calibri" pitchFamily="34" charset="-122"/>
-                <a:cs typeface="Calibri" pitchFamily="34" charset="-120"/>
-              </a:rPr>
-              <a:t>A request to leave rests on whose intent?</a:t>
-            </a:r>
-            <a:endParaRPr lang="en-US" sz="1150" dirty="0"/>
-          </a:p>
-        </p:txBody>
-      </p:sp>
-      <p:sp>
-        <p:nvSpPr>
-          <p:cNvPr id="25" name="Text 22"/>
-          <p:cNvSpPr/>
-          <p:nvPr/>
-        </p:nvSpPr>
-        <p:spPr>
-          <a:xfrm>
-            <a:off x="640080" y="6382512"/>
-            <a:ext cx="8778240" cy="292608"/>
-          </a:xfrm>
-          <a:prstGeom prst="rect">
-            <a:avLst/>
-          </a:prstGeom>
-          <a:noFill/>
-          <a:ln/>
-        </p:spPr>
-        <p:txBody>
-          <a:bodyPr wrap="square" lIns="0" tIns="0" rIns="0" bIns="0" rtlCol="0" anchor="ctr"/>
-          <a:lstStyle/>
-          <a:p>
-            <a:pPr indent="0" marL="0">
-              <a:buNone/>
-            </a:pPr>
-            <a:r>
-              <a:rPr lang="en-US" sz="900" dirty="0">
-                <a:solidFill>
-                  <a:srgbClr val="5F7183"/>
-                </a:solidFill>
                 <a:latin typeface="Yu Gothic" pitchFamily="34" charset="0"/>
                 <a:ea typeface="Yu Gothic" pitchFamily="34" charset="-122"/>
                 <a:cs typeface="Yu Gothic" pitchFamily="34" charset="-120"/>
@@ -4343,7 +4343,7 @@
         </p:nvSpPr>
         <p:spPr>
           <a:xfrm>
-            <a:off x="10637215" y="6382512"/>
+            <a:off x="10637215" y="6492240"/>
             <a:ext cx="914400" cy="292608"/>
           </a:xfrm>
           <a:prstGeom prst="rect">
@@ -4478,7 +4478,7 @@
               <a:buNone/>
             </a:pPr>
             <a:r>
-              <a:rPr lang="en-US" sz="1250" i="1" dirty="0">
+              <a:rPr lang="en-US" sz="1350" dirty="0">
                 <a:solidFill>
                   <a:srgbClr val="12B198"/>
                 </a:solidFill>
@@ -4621,9 +4621,9 @@
               <a:buNone/>
             </a:pPr>
             <a:r>
-              <a:rPr lang="en-US" sz="900" i="1" dirty="0">
-                <a:solidFill>
-                  <a:srgbClr val="5F7183"/>
+              <a:rPr lang="en-US" sz="1050" dirty="0">
+                <a:solidFill>
+                  <a:srgbClr val="1B2733"/>
                 </a:solidFill>
                 <a:latin typeface="Calibri" pitchFamily="34" charset="0"/>
                 <a:ea typeface="Calibri" pitchFamily="34" charset="-122"/>
@@ -4764,9 +4764,9 @@
               <a:buNone/>
             </a:pPr>
             <a:r>
-              <a:rPr lang="en-US" sz="900" i="1" dirty="0">
-                <a:solidFill>
-                  <a:srgbClr val="5F7183"/>
+              <a:rPr lang="en-US" sz="1050" dirty="0">
+                <a:solidFill>
+                  <a:srgbClr val="1B2733"/>
                 </a:solidFill>
                 <a:latin typeface="Calibri" pitchFamily="34" charset="0"/>
                 <a:ea typeface="Calibri" pitchFamily="34" charset="-122"/>
@@ -4907,9 +4907,9 @@
               <a:buNone/>
             </a:pPr>
             <a:r>
-              <a:rPr lang="en-US" sz="900" i="1" dirty="0">
-                <a:solidFill>
-                  <a:srgbClr val="5F7183"/>
+              <a:rPr lang="en-US" sz="1050" dirty="0">
+                <a:solidFill>
+                  <a:srgbClr val="1B2733"/>
                 </a:solidFill>
                 <a:latin typeface="Calibri" pitchFamily="34" charset="0"/>
                 <a:ea typeface="Calibri" pitchFamily="34" charset="-122"/>
@@ -5050,9 +5050,9 @@
               <a:buNone/>
             </a:pPr>
             <a:r>
-              <a:rPr lang="en-US" sz="900" i="1" dirty="0">
-                <a:solidFill>
-                  <a:srgbClr val="5F7183"/>
+              <a:rPr lang="en-US" sz="1050" dirty="0">
+                <a:solidFill>
+                  <a:srgbClr val="1B2733"/>
                 </a:solidFill>
                 <a:latin typeface="Calibri" pitchFamily="34" charset="0"/>
                 <a:ea typeface="Calibri" pitchFamily="34" charset="-122"/>
@@ -5193,49 +5193,49 @@
               <a:buNone/>
             </a:pPr>
             <a:r>
-              <a:rPr lang="en-US" sz="900" i="1" dirty="0">
+              <a:rPr lang="en-US" sz="1050" dirty="0">
+                <a:solidFill>
+                  <a:srgbClr val="1B2733"/>
+                </a:solidFill>
+                <a:latin typeface="Calibri" pitchFamily="34" charset="0"/>
+                <a:ea typeface="Calibri" pitchFamily="34" charset="-122"/>
+                <a:cs typeface="Calibri" pitchFamily="34" charset="-120"/>
+              </a:rPr>
+              <a:t>What is the difference between preserving and disclosing an access log? Which may a guard accept?</a:t>
+            </a:r>
+            <a:endParaRPr lang="en-US" sz="1150" dirty="0"/>
+          </a:p>
+        </p:txBody>
+      </p:sp>
+      <p:sp>
+        <p:nvSpPr>
+          <p:cNvPr id="24" name="Text 21"/>
+          <p:cNvSpPr/>
+          <p:nvPr/>
+        </p:nvSpPr>
+        <p:spPr>
+          <a:xfrm>
+            <a:off x="640080" y="6492240"/>
+            <a:ext cx="8778240" cy="292608"/>
+          </a:xfrm>
+          <a:prstGeom prst="rect">
+            <a:avLst/>
+          </a:prstGeom>
+          <a:noFill/>
+          <a:ln/>
+        </p:spPr>
+        <p:txBody>
+          <a:bodyPr wrap="square" lIns="0" tIns="0" rIns="0" bIns="0" rtlCol="0" anchor="ctr"/>
+          <a:lstStyle/>
+          <a:p>
+            <a:pPr indent="0" marL="0">
+              <a:buNone/>
+            </a:pPr>
+            <a:r>
+              <a:rPr lang="en-US" sz="900" dirty="0">
                 <a:solidFill>
                   <a:srgbClr val="5F7183"/>
                 </a:solidFill>
-                <a:latin typeface="Calibri" pitchFamily="34" charset="0"/>
-                <a:ea typeface="Calibri" pitchFamily="34" charset="-122"/>
-                <a:cs typeface="Calibri" pitchFamily="34" charset="-120"/>
-              </a:rPr>
-              <a:t>What is the difference between preserving and disclosing an access log? Which may a guard accept?</a:t>
-            </a:r>
-            <a:endParaRPr lang="en-US" sz="1150" dirty="0"/>
-          </a:p>
-        </p:txBody>
-      </p:sp>
-      <p:sp>
-        <p:nvSpPr>
-          <p:cNvPr id="24" name="Text 21"/>
-          <p:cNvSpPr/>
-          <p:nvPr/>
-        </p:nvSpPr>
-        <p:spPr>
-          <a:xfrm>
-            <a:off x="640080" y="6382512"/>
-            <a:ext cx="8778240" cy="292608"/>
-          </a:xfrm>
-          <a:prstGeom prst="rect">
-            <a:avLst/>
-          </a:prstGeom>
-          <a:noFill/>
-          <a:ln/>
-        </p:spPr>
-        <p:txBody>
-          <a:bodyPr wrap="square" lIns="0" tIns="0" rIns="0" bIns="0" rtlCol="0" anchor="ctr"/>
-          <a:lstStyle/>
-          <a:p>
-            <a:pPr indent="0" marL="0">
-              <a:buNone/>
-            </a:pPr>
-            <a:r>
-              <a:rPr lang="en-US" sz="900" dirty="0">
-                <a:solidFill>
-                  <a:srgbClr val="5F7183"/>
-                </a:solidFill>
                 <a:latin typeface="Yu Gothic" pitchFamily="34" charset="0"/>
                 <a:ea typeface="Yu Gothic" pitchFamily="34" charset="-122"/>
                 <a:cs typeface="Yu Gothic" pitchFamily="34" charset="-120"/>
@@ -5268,7 +5268,7 @@
         </p:nvSpPr>
         <p:spPr>
           <a:xfrm>
-            <a:off x="10637215" y="6382512"/>
+            <a:off x="10637215" y="6492240"/>
             <a:ext cx="914400" cy="292608"/>
           </a:xfrm>
           <a:prstGeom prst="rect">
@@ -5363,8 +5363,8 @@
         </p:nvSpPr>
         <p:spPr>
           <a:xfrm>
-            <a:off x="640080" y="384048"/>
-            <a:ext cx="8982151" cy="768096"/>
+            <a:off x="640080" y="365760"/>
+            <a:ext cx="8982151" cy="749808"/>
           </a:xfrm>
           <a:prstGeom prst="rect">
             <a:avLst/>
@@ -5403,7 +5403,7 @@
               <a:buNone/>
             </a:pPr>
             <a:r>
-              <a:rPr lang="en-US" sz="1100" i="1" dirty="0">
+              <a:rPr lang="en-US" sz="1100" dirty="0">
                 <a:solidFill>
                   <a:srgbClr val="12B198"/>
                 </a:solidFill>
@@ -5425,7 +5425,7 @@
         </p:nvSpPr>
         <p:spPr>
           <a:xfrm>
-            <a:off x="9686239" y="438912"/>
+            <a:off x="9686239" y="420624"/>
             <a:ext cx="932688" cy="310896"/>
           </a:xfrm>
           <a:prstGeom prst="roundRect">
@@ -5447,7 +5447,7 @@
         </p:nvSpPr>
         <p:spPr>
           <a:xfrm>
-            <a:off x="9686239" y="438912"/>
+            <a:off x="9686239" y="420624"/>
             <a:ext cx="932688" cy="310896"/>
           </a:xfrm>
           <a:prstGeom prst="rect">
@@ -5486,12 +5486,12 @@
         </p:nvSpPr>
         <p:spPr>
           <a:xfrm>
-            <a:off x="640080" y="1188720"/>
-            <a:ext cx="10911535" cy="844906"/>
+            <a:off x="640080" y="1115568"/>
+            <a:ext cx="10911535" cy="870509"/>
           </a:xfrm>
           <a:prstGeom prst="roundRect">
             <a:avLst>
-              <a:gd name="adj" fmla="val 4329"/>
+              <a:gd name="adj" fmla="val 4202"/>
             </a:avLst>
           </a:prstGeom>
           <a:solidFill>
@@ -5508,7 +5508,7 @@
         </p:nvSpPr>
         <p:spPr>
           <a:xfrm>
-            <a:off x="841248" y="1437437"/>
+            <a:off x="841248" y="1377086"/>
             <a:ext cx="347472" cy="347472"/>
           </a:xfrm>
           <a:prstGeom prst="ellipse">
@@ -5528,7 +5528,7 @@
         </p:nvSpPr>
         <p:spPr>
           <a:xfrm>
-            <a:off x="841248" y="1437437"/>
+            <a:off x="841248" y="1377086"/>
             <a:ext cx="347472" cy="347472"/>
           </a:xfrm>
           <a:prstGeom prst="rect">
@@ -5567,8 +5567,8 @@
         </p:nvSpPr>
         <p:spPr>
           <a:xfrm>
-            <a:off x="1280160" y="1252728"/>
-            <a:ext cx="10033711" cy="716890"/>
+            <a:off x="1280160" y="1179576"/>
+            <a:ext cx="10033711" cy="742493"/>
           </a:xfrm>
           <a:prstGeom prst="rect">
             <a:avLst/>
@@ -5587,7 +5587,7 @@
               <a:buNone/>
             </a:pPr>
             <a:r>
-              <a:rPr lang="en-US" sz="900" dirty="0">
+              <a:rPr lang="en-US" sz="950" dirty="0">
                 <a:solidFill>
                   <a:srgbClr val="5F7183"/>
                 </a:solidFill>
@@ -5597,7 +5597,7 @@
               </a:rPr>
               <a:t>問1　法的な立場と、警察にあって警備員にない権限</a:t>
             </a:r>
-            <a:endParaRPr lang="en-US" sz="900" dirty="0"/>
+            <a:endParaRPr lang="en-US" sz="950" dirty="0"/>
           </a:p>
           <a:p>
             <a:pPr indent="0" marL="0">
@@ -5617,7 +5617,7 @@
               </a:rPr>
               <a:t>私人。制服により権限は加わらない。／ 職務質問、保護、避難等の措置、制止、立入、武器の使用、逮捕状による逮捕のいずれか1つ。</a:t>
             </a:r>
-            <a:endParaRPr lang="en-US" sz="900" dirty="0"/>
+            <a:endParaRPr lang="en-US" sz="950" dirty="0"/>
           </a:p>
           <a:p>
             <a:pPr indent="0" marL="0">
@@ -5627,9 +5627,9 @@
               <a:buNone/>
             </a:pPr>
             <a:r>
-              <a:rPr lang="en-US" sz="800" i="1" dirty="0">
-                <a:solidFill>
-                  <a:srgbClr val="5F7183"/>
+              <a:rPr lang="en-US" sz="1100" dirty="0">
+                <a:solidFill>
+                  <a:srgbClr val="1B2733"/>
                 </a:solidFill>
                 <a:latin typeface="Calibri" pitchFamily="34" charset="0"/>
                 <a:ea typeface="Calibri" pitchFamily="34" charset="-122"/>
@@ -5637,7 +5637,7 @@
               </a:rPr>
               <a:t>A private citizen; the uniform adds nothing. Any one of: stop and question, protective custody, evacuation orders, stopping a crime, entry, weapons, arrest by warrant.</a:t>
             </a:r>
-            <a:endParaRPr lang="en-US" sz="900" dirty="0"/>
+            <a:endParaRPr lang="en-US" sz="950" dirty="0"/>
           </a:p>
         </p:txBody>
       </p:sp>
@@ -5649,12 +5649,12 @@
         </p:nvSpPr>
         <p:spPr>
           <a:xfrm>
-            <a:off x="640080" y="2134210"/>
-            <a:ext cx="10911535" cy="844906"/>
+            <a:off x="640080" y="2086661"/>
+            <a:ext cx="10911535" cy="870509"/>
           </a:xfrm>
           <a:prstGeom prst="roundRect">
             <a:avLst>
-              <a:gd name="adj" fmla="val 4329"/>
+              <a:gd name="adj" fmla="val 4202"/>
             </a:avLst>
           </a:prstGeom>
           <a:solidFill>
@@ -5671,7 +5671,7 @@
         </p:nvSpPr>
         <p:spPr>
           <a:xfrm>
-            <a:off x="841248" y="2382926"/>
+            <a:off x="841248" y="2348179"/>
             <a:ext cx="347472" cy="347472"/>
           </a:xfrm>
           <a:prstGeom prst="ellipse">
@@ -5691,7 +5691,7 @@
         </p:nvSpPr>
         <p:spPr>
           <a:xfrm>
-            <a:off x="841248" y="2382926"/>
+            <a:off x="841248" y="2348179"/>
             <a:ext cx="347472" cy="347472"/>
           </a:xfrm>
           <a:prstGeom prst="rect">
@@ -5730,8 +5730,8 @@
         </p:nvSpPr>
         <p:spPr>
           <a:xfrm>
-            <a:off x="1280160" y="2198218"/>
-            <a:ext cx="10033711" cy="716890"/>
+            <a:off x="1280160" y="2150669"/>
+            <a:ext cx="10033711" cy="742493"/>
           </a:xfrm>
           <a:prstGeom prst="rect">
             <a:avLst/>
@@ -5750,7 +5750,7 @@
               <a:buNone/>
             </a:pPr>
             <a:r>
-              <a:rPr lang="en-US" sz="900" dirty="0">
+              <a:rPr lang="en-US" sz="950" dirty="0">
                 <a:solidFill>
                   <a:srgbClr val="5F7183"/>
                 </a:solidFill>
@@ -5760,7 +5760,7 @@
               </a:rPr>
               <a:t>問2　De-escalation の目的</a:t>
             </a:r>
-            <a:endParaRPr lang="en-US" sz="900" dirty="0"/>
+            <a:endParaRPr lang="en-US" sz="950" dirty="0"/>
           </a:p>
           <a:p>
             <a:pPr indent="0" marL="0">
@@ -5780,7 +5780,7 @@
               </a:rPr>
               <a:t>有形力を使わずに緊張を下げ、その場を安全に終えること。勝つことではない。</a:t>
             </a:r>
-            <a:endParaRPr lang="en-US" sz="900" dirty="0"/>
+            <a:endParaRPr lang="en-US" sz="950" dirty="0"/>
           </a:p>
           <a:p>
             <a:pPr indent="0" marL="0">
@@ -5790,9 +5790,9 @@
               <a:buNone/>
             </a:pPr>
             <a:r>
-              <a:rPr lang="en-US" sz="800" i="1" dirty="0">
-                <a:solidFill>
-                  <a:srgbClr val="5F7183"/>
+              <a:rPr lang="en-US" sz="1100" dirty="0">
+                <a:solidFill>
+                  <a:srgbClr val="1B2733"/>
                 </a:solidFill>
                 <a:latin typeface="Calibri" pitchFamily="34" charset="0"/>
                 <a:ea typeface="Calibri" pitchFamily="34" charset="-122"/>
@@ -5800,7 +5800,7 @@
               </a:rPr>
               <a:t>To lower tension without force and end the situation safely. Not to win.</a:t>
             </a:r>
-            <a:endParaRPr lang="en-US" sz="900" dirty="0"/>
+            <a:endParaRPr lang="en-US" sz="950" dirty="0"/>
           </a:p>
         </p:txBody>
       </p:sp>
@@ -5812,12 +5812,12 @@
         </p:nvSpPr>
         <p:spPr>
           <a:xfrm>
-            <a:off x="640080" y="3079699"/>
-            <a:ext cx="10911535" cy="844906"/>
+            <a:off x="640080" y="3057754"/>
+            <a:ext cx="10911535" cy="870509"/>
           </a:xfrm>
           <a:prstGeom prst="roundRect">
             <a:avLst>
-              <a:gd name="adj" fmla="val 4329"/>
+              <a:gd name="adj" fmla="val 4202"/>
             </a:avLst>
           </a:prstGeom>
           <a:solidFill>
@@ -5834,7 +5834,7 @@
         </p:nvSpPr>
         <p:spPr>
           <a:xfrm>
-            <a:off x="841248" y="3328416"/>
+            <a:off x="841248" y="3319272"/>
             <a:ext cx="347472" cy="347472"/>
           </a:xfrm>
           <a:prstGeom prst="ellipse">
@@ -5854,7 +5854,7 @@
         </p:nvSpPr>
         <p:spPr>
           <a:xfrm>
-            <a:off x="841248" y="3328416"/>
+            <a:off x="841248" y="3319272"/>
             <a:ext cx="347472" cy="347472"/>
           </a:xfrm>
           <a:prstGeom prst="rect">
@@ -5893,8 +5893,8 @@
         </p:nvSpPr>
         <p:spPr>
           <a:xfrm>
-            <a:off x="1280160" y="3143707"/>
-            <a:ext cx="10033711" cy="716890"/>
+            <a:off x="1280160" y="3121762"/>
+            <a:ext cx="10033711" cy="742493"/>
           </a:xfrm>
           <a:prstGeom prst="rect">
             <a:avLst/>
@@ -5913,7 +5913,7 @@
               <a:buNone/>
             </a:pPr>
             <a:r>
-              <a:rPr lang="en-US" sz="900" dirty="0">
+              <a:rPr lang="en-US" sz="950" dirty="0">
                 <a:solidFill>
                   <a:srgbClr val="5F7183"/>
                 </a:solidFill>
@@ -5923,7 +5923,7 @@
               </a:rPr>
               <a:t>問3　引き下がれる形を残す理由</a:t>
             </a:r>
-            <a:endParaRPr lang="en-US" sz="900" dirty="0"/>
+            <a:endParaRPr lang="en-US" sz="950" dirty="0"/>
           </a:p>
           <a:p>
             <a:pPr indent="0" marL="0">
@@ -5943,7 +5943,7 @@
               </a:rPr>
               <a:t>逃げ道がないと、相手は引き下がれず対立を続けるほかなくなるため。</a:t>
             </a:r>
-            <a:endParaRPr lang="en-US" sz="900" dirty="0"/>
+            <a:endParaRPr lang="en-US" sz="950" dirty="0"/>
           </a:p>
           <a:p>
             <a:pPr indent="0" marL="0">
@@ -5953,9 +5953,9 @@
               <a:buNone/>
             </a:pPr>
             <a:r>
-              <a:rPr lang="en-US" sz="800" i="1" dirty="0">
-                <a:solidFill>
-                  <a:srgbClr val="5F7183"/>
+              <a:rPr lang="en-US" sz="1100" dirty="0">
+                <a:solidFill>
+                  <a:srgbClr val="1B2733"/>
                 </a:solidFill>
                 <a:latin typeface="Calibri" pitchFamily="34" charset="0"/>
                 <a:ea typeface="Calibri" pitchFamily="34" charset="-122"/>
@@ -5963,7 +5963,7 @@
               </a:rPr>
               <a:t>Without a way out, the person has no option but to keep fighting.</a:t>
             </a:r>
-            <a:endParaRPr lang="en-US" sz="900" dirty="0"/>
+            <a:endParaRPr lang="en-US" sz="950" dirty="0"/>
           </a:p>
         </p:txBody>
       </p:sp>
@@ -5975,12 +5975,12 @@
         </p:nvSpPr>
         <p:spPr>
           <a:xfrm>
-            <a:off x="640080" y="4025189"/>
-            <a:ext cx="10911535" cy="844906"/>
+            <a:off x="640080" y="4028846"/>
+            <a:ext cx="10911535" cy="870509"/>
           </a:xfrm>
           <a:prstGeom prst="roundRect">
             <a:avLst>
-              <a:gd name="adj" fmla="val 4329"/>
+              <a:gd name="adj" fmla="val 4202"/>
             </a:avLst>
           </a:prstGeom>
           <a:solidFill>
@@ -5997,7 +5997,7 @@
         </p:nvSpPr>
         <p:spPr>
           <a:xfrm>
-            <a:off x="841248" y="4273906"/>
+            <a:off x="841248" y="4290365"/>
             <a:ext cx="347472" cy="347472"/>
           </a:xfrm>
           <a:prstGeom prst="ellipse">
@@ -6017,7 +6017,7 @@
         </p:nvSpPr>
         <p:spPr>
           <a:xfrm>
-            <a:off x="841248" y="4273906"/>
+            <a:off x="841248" y="4290365"/>
             <a:ext cx="347472" cy="347472"/>
           </a:xfrm>
           <a:prstGeom prst="rect">
@@ -6056,8 +6056,8 @@
         </p:nvSpPr>
         <p:spPr>
           <a:xfrm>
-            <a:off x="1280160" y="4089197"/>
-            <a:ext cx="10033711" cy="716890"/>
+            <a:off x="1280160" y="4092854"/>
+            <a:ext cx="10033711" cy="742493"/>
           </a:xfrm>
           <a:prstGeom prst="rect">
             <a:avLst/>
@@ -6076,7 +6076,7 @@
               <a:buNone/>
             </a:pPr>
             <a:r>
-              <a:rPr lang="en-US" sz="900" dirty="0">
+              <a:rPr lang="en-US" sz="950" dirty="0">
                 <a:solidFill>
                   <a:srgbClr val="5F7183"/>
                 </a:solidFill>
@@ -6086,7 +6086,7 @@
               </a:rPr>
               <a:t>問4　兆候2つと、そのあとの行動</a:t>
             </a:r>
-            <a:endParaRPr lang="en-US" sz="900" dirty="0"/>
+            <a:endParaRPr lang="en-US" sz="950" dirty="0"/>
           </a:p>
           <a:p>
             <a:pPr indent="0" marL="0">
@@ -6106,7 +6106,7 @@
               </a:rPr>
               <a:t>兆候：声が大きくなり続ける／同じ言葉を繰り返す／距離を詰める／持ち物を握りしめる。行動は順に、離脱する→応援を要請する→通報する。</a:t>
             </a:r>
-            <a:endParaRPr lang="en-US" sz="900" dirty="0"/>
+            <a:endParaRPr lang="en-US" sz="950" dirty="0"/>
           </a:p>
           <a:p>
             <a:pPr indent="0" marL="0">
@@ -6116,9 +6116,9 @@
               <a:buNone/>
             </a:pPr>
             <a:r>
-              <a:rPr lang="en-US" sz="800" i="1" dirty="0">
-                <a:solidFill>
-                  <a:srgbClr val="5F7183"/>
+              <a:rPr lang="en-US" sz="1100" dirty="0">
+                <a:solidFill>
+                  <a:srgbClr val="1B2733"/>
                 </a:solidFill>
                 <a:latin typeface="Calibri" pitchFamily="34" charset="0"/>
                 <a:ea typeface="Calibri" pitchFamily="34" charset="-122"/>
@@ -6126,7 +6126,7 @@
               </a:rPr>
               <a:t>Signs: rising volume, repeating a phrase, closing distance, gripping an object. Then, in order: disengage, call backup, report to police.</a:t>
             </a:r>
-            <a:endParaRPr lang="en-US" sz="900" dirty="0"/>
+            <a:endParaRPr lang="en-US" sz="950" dirty="0"/>
           </a:p>
         </p:txBody>
       </p:sp>
@@ -6138,12 +6138,12 @@
         </p:nvSpPr>
         <p:spPr>
           <a:xfrm>
-            <a:off x="640080" y="4970678"/>
-            <a:ext cx="10911535" cy="844906"/>
+            <a:off x="640080" y="4999939"/>
+            <a:ext cx="10911535" cy="870509"/>
           </a:xfrm>
           <a:prstGeom prst="roundRect">
             <a:avLst>
-              <a:gd name="adj" fmla="val 4329"/>
+              <a:gd name="adj" fmla="val 4202"/>
             </a:avLst>
           </a:prstGeom>
           <a:solidFill>
@@ -6160,7 +6160,7 @@
         </p:nvSpPr>
         <p:spPr>
           <a:xfrm>
-            <a:off x="841248" y="5219395"/>
+            <a:off x="841248" y="5261458"/>
             <a:ext cx="347472" cy="347472"/>
           </a:xfrm>
           <a:prstGeom prst="ellipse">
@@ -6180,7 +6180,7 @@
         </p:nvSpPr>
         <p:spPr>
           <a:xfrm>
-            <a:off x="841248" y="5219395"/>
+            <a:off x="841248" y="5261458"/>
             <a:ext cx="347472" cy="347472"/>
           </a:xfrm>
           <a:prstGeom prst="rect">
@@ -6219,8 +6219,8 @@
         </p:nvSpPr>
         <p:spPr>
           <a:xfrm>
-            <a:off x="1280160" y="5034686"/>
-            <a:ext cx="10033711" cy="716890"/>
+            <a:off x="1280160" y="5063947"/>
+            <a:ext cx="10033711" cy="742493"/>
           </a:xfrm>
           <a:prstGeom prst="rect">
             <a:avLst/>
@@ -6239,243 +6239,243 @@
               <a:buNone/>
             </a:pPr>
             <a:r>
+              <a:rPr lang="en-US" sz="950" dirty="0">
+                <a:solidFill>
+                  <a:srgbClr val="5F7183"/>
+                </a:solidFill>
+                <a:latin typeface="Yu Gothic" pitchFamily="34" charset="0"/>
+                <a:ea typeface="Yu Gothic" pitchFamily="34" charset="-122"/>
+                <a:cs typeface="Yu Gothic" pitchFamily="34" charset="-120"/>
+              </a:rPr>
+              <a:t>問5　退去要請の根拠</a:t>
+            </a:r>
+            <a:endParaRPr lang="en-US" sz="950" dirty="0"/>
+          </a:p>
+          <a:p>
+            <a:pPr indent="0" marL="0">
+              <a:lnSpc>
+                <a:spcPct val="88000"/>
+              </a:lnSpc>
+              <a:buNone/>
+            </a:pPr>
+            <a:r>
+              <a:rPr lang="en-US" sz="1200" b="1" dirty="0">
+                <a:solidFill>
+                  <a:srgbClr val="1B2733"/>
+                </a:solidFill>
+                <a:latin typeface="Yu Gothic" pitchFamily="34" charset="0"/>
+                <a:ea typeface="Yu Gothic" pitchFamily="34" charset="-122"/>
+                <a:cs typeface="Yu Gothic" pitchFamily="34" charset="-120"/>
+              </a:rPr>
+              <a:t>管理権者の意思。警備員が自分の判断で命じるものではない。</a:t>
+            </a:r>
+            <a:endParaRPr lang="en-US" sz="950" dirty="0"/>
+          </a:p>
+          <a:p>
+            <a:pPr indent="0" marL="0">
+              <a:lnSpc>
+                <a:spcPct val="88000"/>
+              </a:lnSpc>
+              <a:buNone/>
+            </a:pPr>
+            <a:r>
+              <a:rPr lang="en-US" sz="1100" dirty="0">
+                <a:solidFill>
+                  <a:srgbClr val="1B2733"/>
+                </a:solidFill>
+                <a:latin typeface="Calibri" pitchFamily="34" charset="0"/>
+                <a:ea typeface="Calibri" pitchFamily="34" charset="-122"/>
+                <a:cs typeface="Calibri" pitchFamily="34" charset="-120"/>
+              </a:rPr>
+              <a:t>The site authority's intent. A guard does not order it on their own judgement.</a:t>
+            </a:r>
+            <a:endParaRPr lang="en-US" sz="950" dirty="0"/>
+          </a:p>
+        </p:txBody>
+      </p:sp>
+      <p:sp>
+        <p:nvSpPr>
+          <p:cNvPr id="26" name="Text 23"/>
+          <p:cNvSpPr/>
+          <p:nvPr/>
+        </p:nvSpPr>
+        <p:spPr>
+          <a:xfrm>
+            <a:off x="640080" y="5961888"/>
+            <a:ext cx="10911535" cy="292608"/>
+          </a:xfrm>
+          <a:prstGeom prst="rect">
+            <a:avLst/>
+          </a:prstGeom>
+          <a:noFill/>
+          <a:ln/>
+        </p:spPr>
+        <p:txBody>
+          <a:bodyPr wrap="square" lIns="0" tIns="0" rIns="0" bIns="0" rtlCol="0" anchor="t"/>
+          <a:lstStyle/>
+          <a:p>
+            <a:pPr indent="0" marL="0">
+              <a:lnSpc>
+                <a:spcPct val="88000"/>
+              </a:lnSpc>
+              <a:buNone/>
+            </a:pPr>
+            <a:r>
+              <a:rPr lang="en-US" sz="900" b="1" dirty="0">
+                <a:solidFill>
+                  <a:srgbClr val="0D8A76"/>
+                </a:solidFill>
+                <a:latin typeface="Yu Gothic" pitchFamily="34" charset="0"/>
+                <a:ea typeface="Yu Gothic" pitchFamily="34" charset="-122"/>
+                <a:cs typeface="Yu Gothic" pitchFamily="34" charset="-120"/>
+              </a:rPr>
+              <a:t>採点の目安　</a:t>
+            </a:r>
+            <a:pPr indent="0" marL="0">
+              <a:lnSpc>
+                <a:spcPct val="88000"/>
+              </a:lnSpc>
+              <a:buNone/>
+            </a:pPr>
+            <a:r>
               <a:rPr lang="en-US" sz="900" dirty="0">
                 <a:solidFill>
+                  <a:srgbClr val="1B2733"/>
+                </a:solidFill>
+                <a:latin typeface="Yu Gothic" pitchFamily="34" charset="0"/>
+                <a:ea typeface="Yu Gothic" pitchFamily="34" charset="-122"/>
+                <a:cs typeface="Yu Gothic" pitchFamily="34" charset="-120"/>
+              </a:rPr>
+              <a:t>表現が異なっても要点が含まれていれば正解とします。英語での回答も同じ基準で採点します。</a:t>
+            </a:r>
+            <a:endParaRPr lang="en-US" sz="900" dirty="0"/>
+          </a:p>
+          <a:p>
+            <a:pPr indent="0" marL="0">
+              <a:lnSpc>
+                <a:spcPct val="88000"/>
+              </a:lnSpc>
+              <a:buNone/>
+            </a:pPr>
+            <a:r>
+              <a:rPr lang="en-US" sz="800" i="1" dirty="0">
+                <a:solidFill>
                   <a:srgbClr val="5F7183"/>
                 </a:solidFill>
-                <a:latin typeface="Yu Gothic" pitchFamily="34" charset="0"/>
-                <a:ea typeface="Yu Gothic" pitchFamily="34" charset="-122"/>
-                <a:cs typeface="Yu Gothic" pitchFamily="34" charset="-120"/>
-              </a:rPr>
-              <a:t>問5　退去要請の根拠</a:t>
+                <a:latin typeface="Calibri" pitchFamily="34" charset="0"/>
+                <a:ea typeface="Calibri" pitchFamily="34" charset="-122"/>
+                <a:cs typeface="Calibri" pitchFamily="34" charset="-120"/>
+              </a:rPr>
+              <a:t>Different wording is fine if the point is there. Answers in English are marked to the same standard.</a:t>
             </a:r>
             <a:endParaRPr lang="en-US" sz="900" dirty="0"/>
           </a:p>
-          <a:p>
-            <a:pPr indent="0" marL="0">
-              <a:lnSpc>
-                <a:spcPct val="88000"/>
-              </a:lnSpc>
-              <a:buNone/>
-            </a:pPr>
-            <a:r>
-              <a:rPr lang="en-US" sz="1200" b="1" dirty="0">
-                <a:solidFill>
-                  <a:srgbClr val="1B2733"/>
-                </a:solidFill>
-                <a:latin typeface="Yu Gothic" pitchFamily="34" charset="0"/>
-                <a:ea typeface="Yu Gothic" pitchFamily="34" charset="-122"/>
-                <a:cs typeface="Yu Gothic" pitchFamily="34" charset="-120"/>
-              </a:rPr>
-              <a:t>管理権者の意思。警備員が自分の判断で命じるものではない。</a:t>
+        </p:txBody>
+      </p:sp>
+      <p:sp>
+        <p:nvSpPr>
+          <p:cNvPr id="27" name="Text 24"/>
+          <p:cNvSpPr/>
+          <p:nvPr/>
+        </p:nvSpPr>
+        <p:spPr>
+          <a:xfrm>
+            <a:off x="640080" y="6272784"/>
+            <a:ext cx="9905695" cy="219456"/>
+          </a:xfrm>
+          <a:prstGeom prst="rect">
+            <a:avLst/>
+          </a:prstGeom>
+          <a:noFill/>
+          <a:ln/>
+        </p:spPr>
+        <p:txBody>
+          <a:bodyPr wrap="square" lIns="0" tIns="0" rIns="0" bIns="0" rtlCol="0" anchor="t"/>
+          <a:lstStyle/>
+          <a:p>
+            <a:pPr indent="0" marL="0">
+              <a:buNone/>
+            </a:pPr>
+            <a:r>
+              <a:rPr lang="en-US" sz="750" b="1" dirty="0">
+                <a:solidFill>
+                  <a:srgbClr val="D6E0E9"/>
+                </a:solidFill>
+                <a:latin typeface="Yu Gothic" pitchFamily="34" charset="0"/>
+                <a:ea typeface="Yu Gothic" pitchFamily="34" charset="-122"/>
+                <a:cs typeface="Yu Gothic" pitchFamily="34" charset="-120"/>
+              </a:rPr>
+              <a:t>ソース　</a:t>
+            </a:r>
+            <a:pPr indent="0" marL="0">
+              <a:buNone/>
+            </a:pPr>
+            <a:r>
+              <a:rPr lang="en-US" sz="750" dirty="0">
+                <a:solidFill>
+                  <a:srgbClr val="5F7183"/>
+                </a:solidFill>
+                <a:latin typeface="Yu Gothic" pitchFamily="34" charset="0"/>
+                <a:ea typeface="Yu Gothic" pitchFamily="34" charset="-122"/>
+                <a:cs typeface="Yu Gothic" pitchFamily="34" charset="-120"/>
+              </a:rPr>
+              <a:t>警備業法、刑法、刑事訴訟法、警察官職務執行法</a:t>
+            </a:r>
+            <a:endParaRPr lang="en-US" sz="750" dirty="0"/>
+          </a:p>
+        </p:txBody>
+      </p:sp>
+      <p:sp>
+        <p:nvSpPr>
+          <p:cNvPr id="28" name="Text 25"/>
+          <p:cNvSpPr/>
+          <p:nvPr/>
+        </p:nvSpPr>
+        <p:spPr>
+          <a:xfrm>
+            <a:off x="640080" y="6492240"/>
+            <a:ext cx="8778240" cy="292608"/>
+          </a:xfrm>
+          <a:prstGeom prst="rect">
+            <a:avLst/>
+          </a:prstGeom>
+          <a:noFill/>
+          <a:ln/>
+        </p:spPr>
+        <p:txBody>
+          <a:bodyPr wrap="square" lIns="0" tIns="0" rIns="0" bIns="0" rtlCol="0" anchor="ctr"/>
+          <a:lstStyle/>
+          <a:p>
+            <a:pPr indent="0" marL="0">
+              <a:buNone/>
+            </a:pPr>
+            <a:r>
+              <a:rPr lang="en-US" sz="900" dirty="0">
+                <a:solidFill>
+                  <a:srgbClr val="5F7183"/>
+                </a:solidFill>
+                <a:latin typeface="Yu Gothic" pitchFamily="34" charset="0"/>
+                <a:ea typeface="Yu Gothic" pitchFamily="34" charset="-122"/>
+                <a:cs typeface="Yu Gothic" pitchFamily="34" charset="-120"/>
+              </a:rPr>
+              <a:t>第10時限｜業務別教育6 警報装置その他当該警備業務を実施するために使用する機器の使用方法  </a:t>
+            </a:r>
+            <a:pPr indent="0" marL="0">
+              <a:buNone/>
+            </a:pPr>
+            <a:r>
+              <a:rPr lang="en-US" sz="850" i="1" dirty="0">
+                <a:solidFill>
+                  <a:srgbClr val="D6E0E9"/>
+                </a:solidFill>
+                <a:latin typeface="Calibri" pitchFamily="34" charset="0"/>
+                <a:ea typeface="Calibri" pitchFamily="34" charset="-122"/>
+                <a:cs typeface="Calibri" pitchFamily="34" charset="-120"/>
+              </a:rPr>
+              <a:t>Period 10 | Task-Specific Training 6 — Security Equipment</a:t>
             </a:r>
             <a:endParaRPr lang="en-US" sz="900" dirty="0"/>
           </a:p>
-          <a:p>
-            <a:pPr indent="0" marL="0">
-              <a:lnSpc>
-                <a:spcPct val="88000"/>
-              </a:lnSpc>
-              <a:buNone/>
-            </a:pPr>
-            <a:r>
-              <a:rPr lang="en-US" sz="800" i="1" dirty="0">
-                <a:solidFill>
-                  <a:srgbClr val="5F7183"/>
-                </a:solidFill>
-                <a:latin typeface="Calibri" pitchFamily="34" charset="0"/>
-                <a:ea typeface="Calibri" pitchFamily="34" charset="-122"/>
-                <a:cs typeface="Calibri" pitchFamily="34" charset="-120"/>
-              </a:rPr>
-              <a:t>The site authority's intent. A guard does not order it on their own judgement.</a:t>
-            </a:r>
-            <a:endParaRPr lang="en-US" sz="900" dirty="0"/>
-          </a:p>
-        </p:txBody>
-      </p:sp>
-      <p:sp>
-        <p:nvSpPr>
-          <p:cNvPr id="26" name="Text 23"/>
-          <p:cNvSpPr/>
-          <p:nvPr/>
-        </p:nvSpPr>
-        <p:spPr>
-          <a:xfrm>
-            <a:off x="640080" y="5907024"/>
-            <a:ext cx="10911535" cy="310896"/>
-          </a:xfrm>
-          <a:prstGeom prst="rect">
-            <a:avLst/>
-          </a:prstGeom>
-          <a:noFill/>
-          <a:ln/>
-        </p:spPr>
-        <p:txBody>
-          <a:bodyPr wrap="square" lIns="0" tIns="0" rIns="0" bIns="0" rtlCol="0" anchor="t"/>
-          <a:lstStyle/>
-          <a:p>
-            <a:pPr indent="0" marL="0">
-              <a:lnSpc>
-                <a:spcPct val="88000"/>
-              </a:lnSpc>
-              <a:buNone/>
-            </a:pPr>
-            <a:r>
-              <a:rPr lang="en-US" sz="900" b="1" dirty="0">
-                <a:solidFill>
-                  <a:srgbClr val="0D8A76"/>
-                </a:solidFill>
-                <a:latin typeface="Yu Gothic" pitchFamily="34" charset="0"/>
-                <a:ea typeface="Yu Gothic" pitchFamily="34" charset="-122"/>
-                <a:cs typeface="Yu Gothic" pitchFamily="34" charset="-120"/>
-              </a:rPr>
-              <a:t>採点の目安　</a:t>
-            </a:r>
-            <a:pPr indent="0" marL="0">
-              <a:lnSpc>
-                <a:spcPct val="88000"/>
-              </a:lnSpc>
-              <a:buNone/>
-            </a:pPr>
-            <a:r>
-              <a:rPr lang="en-US" sz="900" dirty="0">
-                <a:solidFill>
-                  <a:srgbClr val="1B2733"/>
-                </a:solidFill>
-                <a:latin typeface="Yu Gothic" pitchFamily="34" charset="0"/>
-                <a:ea typeface="Yu Gothic" pitchFamily="34" charset="-122"/>
-                <a:cs typeface="Yu Gothic" pitchFamily="34" charset="-120"/>
-              </a:rPr>
-              <a:t>表現が異なっても要点が含まれていれば正解とします。英語での回答も同じ基準で採点します。</a:t>
-            </a:r>
-            <a:endParaRPr lang="en-US" sz="900" dirty="0"/>
-          </a:p>
-          <a:p>
-            <a:pPr indent="0" marL="0">
-              <a:lnSpc>
-                <a:spcPct val="88000"/>
-              </a:lnSpc>
-              <a:buNone/>
-            </a:pPr>
-            <a:r>
-              <a:rPr lang="en-US" sz="750" i="1" dirty="0">
-                <a:solidFill>
-                  <a:srgbClr val="5F7183"/>
-                </a:solidFill>
-                <a:latin typeface="Calibri" pitchFamily="34" charset="0"/>
-                <a:ea typeface="Calibri" pitchFamily="34" charset="-122"/>
-                <a:cs typeface="Calibri" pitchFamily="34" charset="-120"/>
-              </a:rPr>
-              <a:t>Different wording is fine if the point is there. Answers in English are marked to the same standard.</a:t>
-            </a:r>
-            <a:endParaRPr lang="en-US" sz="900" dirty="0"/>
-          </a:p>
-        </p:txBody>
-      </p:sp>
-      <p:sp>
-        <p:nvSpPr>
-          <p:cNvPr id="27" name="Text 24"/>
-          <p:cNvSpPr/>
-          <p:nvPr/>
-        </p:nvSpPr>
-        <p:spPr>
-          <a:xfrm>
-            <a:off x="640080" y="6272784"/>
-            <a:ext cx="9905695" cy="237744"/>
-          </a:xfrm>
-          <a:prstGeom prst="rect">
-            <a:avLst/>
-          </a:prstGeom>
-          <a:noFill/>
-          <a:ln/>
-        </p:spPr>
-        <p:txBody>
-          <a:bodyPr wrap="square" lIns="0" tIns="0" rIns="0" bIns="0" rtlCol="0" anchor="t"/>
-          <a:lstStyle/>
-          <a:p>
-            <a:pPr indent="0" marL="0">
-              <a:buNone/>
-            </a:pPr>
-            <a:r>
-              <a:rPr lang="en-US" sz="750" b="1" dirty="0">
-                <a:solidFill>
-                  <a:srgbClr val="D6E0E9"/>
-                </a:solidFill>
-                <a:latin typeface="Yu Gothic" pitchFamily="34" charset="0"/>
-                <a:ea typeface="Yu Gothic" pitchFamily="34" charset="-122"/>
-                <a:cs typeface="Yu Gothic" pitchFamily="34" charset="-120"/>
-              </a:rPr>
-              <a:t>ソース　</a:t>
-            </a:r>
-            <a:pPr indent="0" marL="0">
-              <a:buNone/>
-            </a:pPr>
-            <a:r>
-              <a:rPr lang="en-US" sz="750" dirty="0">
-                <a:solidFill>
-                  <a:srgbClr val="5F7183"/>
-                </a:solidFill>
-                <a:latin typeface="Yu Gothic" pitchFamily="34" charset="0"/>
-                <a:ea typeface="Yu Gothic" pitchFamily="34" charset="-122"/>
-                <a:cs typeface="Yu Gothic" pitchFamily="34" charset="-120"/>
-              </a:rPr>
-              <a:t>警備業法、刑法、刑事訴訟法、警察官職務執行法</a:t>
-            </a:r>
-            <a:endParaRPr lang="en-US" sz="750" dirty="0"/>
-          </a:p>
-        </p:txBody>
-      </p:sp>
-      <p:sp>
-        <p:nvSpPr>
-          <p:cNvPr id="28" name="Text 25"/>
-          <p:cNvSpPr/>
-          <p:nvPr/>
-        </p:nvSpPr>
-        <p:spPr>
-          <a:xfrm>
-            <a:off x="640080" y="6382512"/>
-            <a:ext cx="8778240" cy="292608"/>
-          </a:xfrm>
-          <a:prstGeom prst="rect">
-            <a:avLst/>
-          </a:prstGeom>
-          <a:noFill/>
-          <a:ln/>
-        </p:spPr>
-        <p:txBody>
-          <a:bodyPr wrap="square" lIns="0" tIns="0" rIns="0" bIns="0" rtlCol="0" anchor="ctr"/>
-          <a:lstStyle/>
-          <a:p>
-            <a:pPr indent="0" marL="0">
-              <a:buNone/>
-            </a:pPr>
-            <a:r>
-              <a:rPr lang="en-US" sz="900" dirty="0">
-                <a:solidFill>
-                  <a:srgbClr val="5F7183"/>
-                </a:solidFill>
-                <a:latin typeface="Yu Gothic" pitchFamily="34" charset="0"/>
-                <a:ea typeface="Yu Gothic" pitchFamily="34" charset="-122"/>
-                <a:cs typeface="Yu Gothic" pitchFamily="34" charset="-120"/>
-              </a:rPr>
-              <a:t>第10時限｜業務別教育6 警報装置その他当該警備業務を実施するために使用する機器の使用方法  </a:t>
-            </a:r>
-            <a:pPr indent="0" marL="0">
-              <a:buNone/>
-            </a:pPr>
-            <a:r>
-              <a:rPr lang="en-US" sz="850" i="1" dirty="0">
-                <a:solidFill>
-                  <a:srgbClr val="D6E0E9"/>
-                </a:solidFill>
-                <a:latin typeface="Calibri" pitchFamily="34" charset="0"/>
-                <a:ea typeface="Calibri" pitchFamily="34" charset="-122"/>
-                <a:cs typeface="Calibri" pitchFamily="34" charset="-120"/>
-              </a:rPr>
-              <a:t>Period 10 | Task-Specific Training 6 — Security Equipment</a:t>
-            </a:r>
-            <a:endParaRPr lang="en-US" sz="900" dirty="0"/>
-          </a:p>
         </p:txBody>
       </p:sp>
       <p:sp>
@@ -6486,7 +6486,7 @@
         </p:nvSpPr>
         <p:spPr>
           <a:xfrm>
-            <a:off x="10637215" y="6382512"/>
+            <a:off x="10637215" y="6492240"/>
             <a:ext cx="914400" cy="292608"/>
           </a:xfrm>
           <a:prstGeom prst="rect">
@@ -6581,8 +6581,8 @@
         </p:nvSpPr>
         <p:spPr>
           <a:xfrm>
-            <a:off x="640080" y="384048"/>
-            <a:ext cx="8982151" cy="768096"/>
+            <a:off x="640080" y="365760"/>
+            <a:ext cx="8982151" cy="749808"/>
           </a:xfrm>
           <a:prstGeom prst="rect">
             <a:avLst/>
@@ -6621,7 +6621,7 @@
               <a:buNone/>
             </a:pPr>
             <a:r>
-              <a:rPr lang="en-US" sz="1100" i="1" dirty="0">
+              <a:rPr lang="en-US" sz="1100" dirty="0">
                 <a:solidFill>
                   <a:srgbClr val="12B198"/>
                 </a:solidFill>
@@ -6643,7 +6643,7 @@
         </p:nvSpPr>
         <p:spPr>
           <a:xfrm>
-            <a:off x="9686239" y="438912"/>
+            <a:off x="9686239" y="420624"/>
             <a:ext cx="932688" cy="310896"/>
           </a:xfrm>
           <a:prstGeom prst="roundRect">
@@ -6665,7 +6665,7 @@
         </p:nvSpPr>
         <p:spPr>
           <a:xfrm>
-            <a:off x="9686239" y="438912"/>
+            <a:off x="9686239" y="420624"/>
             <a:ext cx="932688" cy="310896"/>
           </a:xfrm>
           <a:prstGeom prst="rect">
@@ -6704,12 +6704,12 @@
         </p:nvSpPr>
         <p:spPr>
           <a:xfrm>
-            <a:off x="640080" y="1188720"/>
-            <a:ext cx="10911535" cy="844906"/>
+            <a:off x="640080" y="1115568"/>
+            <a:ext cx="10911535" cy="870509"/>
           </a:xfrm>
           <a:prstGeom prst="roundRect">
             <a:avLst>
-              <a:gd name="adj" fmla="val 4329"/>
+              <a:gd name="adj" fmla="val 4202"/>
             </a:avLst>
           </a:prstGeom>
           <a:solidFill>
@@ -6726,7 +6726,7 @@
         </p:nvSpPr>
         <p:spPr>
           <a:xfrm>
-            <a:off x="841248" y="1437437"/>
+            <a:off x="841248" y="1377086"/>
             <a:ext cx="347472" cy="347472"/>
           </a:xfrm>
           <a:prstGeom prst="ellipse">
@@ -6746,7 +6746,7 @@
         </p:nvSpPr>
         <p:spPr>
           <a:xfrm>
-            <a:off x="841248" y="1437437"/>
+            <a:off x="841248" y="1377086"/>
             <a:ext cx="347472" cy="347472"/>
           </a:xfrm>
           <a:prstGeom prst="rect">
@@ -6785,8 +6785,8 @@
         </p:nvSpPr>
         <p:spPr>
           <a:xfrm>
-            <a:off x="1280160" y="1252728"/>
-            <a:ext cx="10033711" cy="716890"/>
+            <a:off x="1280160" y="1179576"/>
+            <a:ext cx="10033711" cy="742493"/>
           </a:xfrm>
           <a:prstGeom prst="rect">
             <a:avLst/>
@@ -6805,7 +6805,7 @@
               <a:buNone/>
             </a:pPr>
             <a:r>
-              <a:rPr lang="en-US" sz="900" dirty="0">
+              <a:rPr lang="en-US" sz="950" dirty="0">
                 <a:solidFill>
                   <a:srgbClr val="5F7183"/>
                 </a:solidFill>
@@ -6815,7 +6815,7 @@
               </a:rPr>
               <a:t>問6　問題点と、あなたの報告文</a:t>
             </a:r>
-            <a:endParaRPr lang="en-US" sz="900" dirty="0"/>
+            <a:endParaRPr lang="en-US" sz="950" dirty="0"/>
           </a:p>
           <a:p>
             <a:pPr indent="0" marL="0">
@@ -6835,7 +6835,7 @@
               </a:rPr>
               <a:t>問題点は、見ていない「侵入」を断定していること。報告例「20時15分、B1東側非常口が15cmほど開いていた。施錠されているはずの扉で、付近に人影はない。侵入の可能性があると思われる」。</a:t>
             </a:r>
-            <a:endParaRPr lang="en-US" sz="900" dirty="0"/>
+            <a:endParaRPr lang="en-US" sz="950" dirty="0"/>
           </a:p>
           <a:p>
             <a:pPr indent="0" marL="0">
@@ -6845,9 +6845,9 @@
               <a:buNone/>
             </a:pPr>
             <a:r>
-              <a:rPr lang="en-US" sz="800" i="1" dirty="0">
-                <a:solidFill>
-                  <a:srgbClr val="5F7183"/>
+              <a:rPr lang="en-US" sz="1100" dirty="0">
+                <a:solidFill>
+                  <a:srgbClr val="1B2733"/>
                 </a:solidFill>
                 <a:latin typeface="Calibri" pitchFamily="34" charset="0"/>
                 <a:ea typeface="Calibri" pitchFamily="34" charset="-122"/>
@@ -6855,7 +6855,7 @@
               </a:rPr>
               <a:t>The problem is asserting an intrusion nobody saw. Report: "At 20:15 the B1 east exit stood about 15 cm open. It should have been locked and nobody was nearby. In my judgement there may have been an intrusion."</a:t>
             </a:r>
-            <a:endParaRPr lang="en-US" sz="900" dirty="0"/>
+            <a:endParaRPr lang="en-US" sz="950" dirty="0"/>
           </a:p>
         </p:txBody>
       </p:sp>
@@ -6867,12 +6867,12 @@
         </p:nvSpPr>
         <p:spPr>
           <a:xfrm>
-            <a:off x="640080" y="2134210"/>
-            <a:ext cx="10911535" cy="844906"/>
+            <a:off x="640080" y="2086661"/>
+            <a:ext cx="10911535" cy="870509"/>
           </a:xfrm>
           <a:prstGeom prst="roundRect">
             <a:avLst>
-              <a:gd name="adj" fmla="val 4329"/>
+              <a:gd name="adj" fmla="val 4202"/>
             </a:avLst>
           </a:prstGeom>
           <a:solidFill>
@@ -6889,7 +6889,7 @@
         </p:nvSpPr>
         <p:spPr>
           <a:xfrm>
-            <a:off x="841248" y="2382926"/>
+            <a:off x="841248" y="2348179"/>
             <a:ext cx="347472" cy="347472"/>
           </a:xfrm>
           <a:prstGeom prst="ellipse">
@@ -6909,7 +6909,7 @@
         </p:nvSpPr>
         <p:spPr>
           <a:xfrm>
-            <a:off x="841248" y="2382926"/>
+            <a:off x="841248" y="2348179"/>
             <a:ext cx="347472" cy="347472"/>
           </a:xfrm>
           <a:prstGeom prst="rect">
@@ -6948,8 +6948,8 @@
         </p:nvSpPr>
         <p:spPr>
           <a:xfrm>
-            <a:off x="1280160" y="2198218"/>
-            <a:ext cx="10033711" cy="716890"/>
+            <a:off x="1280160" y="2150669"/>
+            <a:ext cx="10033711" cy="742493"/>
           </a:xfrm>
           <a:prstGeom prst="rect">
             <a:avLst/>
@@ -6968,7 +6968,7 @@
               <a:buNone/>
             </a:pPr>
             <a:r>
-              <a:rPr lang="en-US" sz="900" dirty="0">
+              <a:rPr lang="en-US" sz="950" dirty="0">
                 <a:solidFill>
                   <a:srgbClr val="5F7183"/>
                 </a:solidFill>
@@ -6978,7 +6978,7 @@
               </a:rPr>
               <a:t>問7　119番で最初に伝えること</a:t>
             </a:r>
-            <a:endParaRPr lang="en-US" sz="900" dirty="0"/>
+            <a:endParaRPr lang="en-US" sz="950" dirty="0"/>
           </a:p>
           <a:p>
             <a:pPr indent="0" marL="0">
@@ -6998,7 +6998,7 @@
               </a:rPr>
               <a:t>種別。「火事です」か「救急です」。場所より先に言う。</a:t>
             </a:r>
-            <a:endParaRPr lang="en-US" sz="900" dirty="0"/>
+            <a:endParaRPr lang="en-US" sz="950" dirty="0"/>
           </a:p>
           <a:p>
             <a:pPr indent="0" marL="0">
@@ -7008,9 +7008,9 @@
               <a:buNone/>
             </a:pPr>
             <a:r>
-              <a:rPr lang="en-US" sz="800" i="1" dirty="0">
-                <a:solidFill>
-                  <a:srgbClr val="5F7183"/>
+              <a:rPr lang="en-US" sz="1100" dirty="0">
+                <a:solidFill>
+                  <a:srgbClr val="1B2733"/>
                 </a:solidFill>
                 <a:latin typeface="Calibri" pitchFamily="34" charset="0"/>
                 <a:ea typeface="Calibri" pitchFamily="34" charset="-122"/>
@@ -7018,7 +7018,7 @@
               </a:rPr>
               <a:t>The type — fire, or ambulance. Before the location.</a:t>
             </a:r>
-            <a:endParaRPr lang="en-US" sz="900" dirty="0"/>
+            <a:endParaRPr lang="en-US" sz="950" dirty="0"/>
           </a:p>
         </p:txBody>
       </p:sp>
@@ -7030,12 +7030,12 @@
         </p:nvSpPr>
         <p:spPr>
           <a:xfrm>
-            <a:off x="640080" y="3079699"/>
-            <a:ext cx="10911535" cy="844906"/>
+            <a:off x="640080" y="3057754"/>
+            <a:ext cx="10911535" cy="870509"/>
           </a:xfrm>
           <a:prstGeom prst="roundRect">
             <a:avLst>
-              <a:gd name="adj" fmla="val 4329"/>
+              <a:gd name="adj" fmla="val 4202"/>
             </a:avLst>
           </a:prstGeom>
           <a:solidFill>
@@ -7052,7 +7052,7 @@
         </p:nvSpPr>
         <p:spPr>
           <a:xfrm>
-            <a:off x="841248" y="3328416"/>
+            <a:off x="841248" y="3319272"/>
             <a:ext cx="347472" cy="347472"/>
           </a:xfrm>
           <a:prstGeom prst="ellipse">
@@ -7072,7 +7072,7 @@
         </p:nvSpPr>
         <p:spPr>
           <a:xfrm>
-            <a:off x="841248" y="3328416"/>
+            <a:off x="841248" y="3319272"/>
             <a:ext cx="347472" cy="347472"/>
           </a:xfrm>
           <a:prstGeom prst="rect">
@@ -7111,8 +7111,8 @@
         </p:nvSpPr>
         <p:spPr>
           <a:xfrm>
-            <a:off x="1280160" y="3143707"/>
-            <a:ext cx="10033711" cy="716890"/>
+            <a:off x="1280160" y="3121762"/>
+            <a:ext cx="10033711" cy="742493"/>
           </a:xfrm>
           <a:prstGeom prst="rect">
             <a:avLst/>
@@ -7131,7 +7131,7 @@
               <a:buNone/>
             </a:pPr>
             <a:r>
-              <a:rPr lang="en-US" sz="900" dirty="0">
+              <a:rPr lang="en-US" sz="950" dirty="0">
                 <a:solidFill>
                   <a:srgbClr val="5F7183"/>
                 </a:solidFill>
@@ -7141,7 +7141,7 @@
               </a:rPr>
               <a:t>問8　現場を変えてよい理由</a:t>
             </a:r>
-            <a:endParaRPr lang="en-US" sz="900" dirty="0"/>
+            <a:endParaRPr lang="en-US" sz="950" dirty="0"/>
           </a:p>
           <a:p>
             <a:pPr indent="0" marL="0">
@@ -7161,7 +7161,7 @@
               </a:rPr>
               <a:t>人命（救助・救護）のため。それ以外では動かさない。動かした場合は何を・どこから・どこへ・誰が・何時にを記録。</a:t>
             </a:r>
-            <a:endParaRPr lang="en-US" sz="900" dirty="0"/>
+            <a:endParaRPr lang="en-US" sz="950" dirty="0"/>
           </a:p>
           <a:p>
             <a:pPr indent="0" marL="0">
@@ -7171,9 +7171,9 @@
               <a:buNone/>
             </a:pPr>
             <a:r>
-              <a:rPr lang="en-US" sz="800" i="1" dirty="0">
-                <a:solidFill>
-                  <a:srgbClr val="5F7183"/>
+              <a:rPr lang="en-US" sz="1100" dirty="0">
+                <a:solidFill>
+                  <a:srgbClr val="1B2733"/>
                 </a:solidFill>
                 <a:latin typeface="Calibri" pitchFamily="34" charset="0"/>
                 <a:ea typeface="Calibri" pitchFamily="34" charset="-122"/>
@@ -7181,7 +7181,7 @@
               </a:rPr>
               <a:t>To save life. Otherwise change nothing; if you did, record what, from where, to where, by whom and when.</a:t>
             </a:r>
-            <a:endParaRPr lang="en-US" sz="900" dirty="0"/>
+            <a:endParaRPr lang="en-US" sz="950" dirty="0"/>
           </a:p>
         </p:txBody>
       </p:sp>
@@ -7193,12 +7193,12 @@
         </p:nvSpPr>
         <p:spPr>
           <a:xfrm>
-            <a:off x="640080" y="4025189"/>
-            <a:ext cx="10911535" cy="844906"/>
+            <a:off x="640080" y="4028846"/>
+            <a:ext cx="10911535" cy="870509"/>
           </a:xfrm>
           <a:prstGeom prst="roundRect">
             <a:avLst>
-              <a:gd name="adj" fmla="val 4329"/>
+              <a:gd name="adj" fmla="val 4202"/>
             </a:avLst>
           </a:prstGeom>
           <a:solidFill>
@@ -7215,7 +7215,7 @@
         </p:nvSpPr>
         <p:spPr>
           <a:xfrm>
-            <a:off x="841248" y="4273906"/>
+            <a:off x="841248" y="4290365"/>
             <a:ext cx="347472" cy="347472"/>
           </a:xfrm>
           <a:prstGeom prst="ellipse">
@@ -7235,7 +7235,7 @@
         </p:nvSpPr>
         <p:spPr>
           <a:xfrm>
-            <a:off x="841248" y="4273906"/>
+            <a:off x="841248" y="4290365"/>
             <a:ext cx="347472" cy="347472"/>
           </a:xfrm>
           <a:prstGeom prst="rect">
@@ -7274,8 +7274,8 @@
         </p:nvSpPr>
         <p:spPr>
           <a:xfrm>
-            <a:off x="1280160" y="4089197"/>
-            <a:ext cx="10033711" cy="716890"/>
+            <a:off x="1280160" y="4092854"/>
+            <a:ext cx="10033711" cy="742493"/>
           </a:xfrm>
           <a:prstGeom prst="rect">
             <a:avLst/>
@@ -7294,7 +7294,7 @@
               <a:buNone/>
             </a:pPr>
             <a:r>
-              <a:rPr lang="en-US" sz="900" dirty="0">
+              <a:rPr lang="en-US" sz="950" dirty="0">
                 <a:solidFill>
                   <a:srgbClr val="5F7183"/>
                 </a:solidFill>
@@ -7304,7 +7304,7 @@
               </a:rPr>
               <a:t>問9　受信機の発報時</a:t>
             </a:r>
-            <a:endParaRPr lang="en-US" sz="900" dirty="0"/>
+            <a:endParaRPr lang="en-US" sz="950" dirty="0"/>
           </a:p>
           <a:p>
             <a:pPr indent="0" marL="0">
@@ -7324,7 +7324,7 @@
               </a:rPr>
               <a:t>地区表示（どこが鳴っているか）。「火事です」とは言わない。発報は火災の確定ではない。</a:t>
             </a:r>
-            <a:endParaRPr lang="en-US" sz="900" dirty="0"/>
+            <a:endParaRPr lang="en-US" sz="950" dirty="0"/>
           </a:p>
           <a:p>
             <a:pPr indent="0" marL="0">
@@ -7334,9 +7334,9 @@
               <a:buNone/>
             </a:pPr>
             <a:r>
-              <a:rPr lang="en-US" sz="800" i="1" dirty="0">
-                <a:solidFill>
-                  <a:srgbClr val="5F7183"/>
+              <a:rPr lang="en-US" sz="1100" dirty="0">
+                <a:solidFill>
+                  <a:srgbClr val="1B2733"/>
                 </a:solidFill>
                 <a:latin typeface="Calibri" pitchFamily="34" charset="0"/>
                 <a:ea typeface="Calibri" pitchFamily="34" charset="-122"/>
@@ -7344,7 +7344,7 @@
               </a:rPr>
               <a:t>The zone display. Do not say "fire" — an activation is not a confirmed fire.</a:t>
             </a:r>
-            <a:endParaRPr lang="en-US" sz="900" dirty="0"/>
+            <a:endParaRPr lang="en-US" sz="950" dirty="0"/>
           </a:p>
         </p:txBody>
       </p:sp>
@@ -7356,12 +7356,12 @@
         </p:nvSpPr>
         <p:spPr>
           <a:xfrm>
-            <a:off x="640080" y="4970678"/>
-            <a:ext cx="10911535" cy="844906"/>
+            <a:off x="640080" y="4999939"/>
+            <a:ext cx="10911535" cy="870509"/>
           </a:xfrm>
           <a:prstGeom prst="roundRect">
             <a:avLst>
-              <a:gd name="adj" fmla="val 4329"/>
+              <a:gd name="adj" fmla="val 4202"/>
             </a:avLst>
           </a:prstGeom>
           <a:solidFill>
@@ -7378,7 +7378,7 @@
         </p:nvSpPr>
         <p:spPr>
           <a:xfrm>
-            <a:off x="841248" y="5219395"/>
+            <a:off x="841248" y="5261458"/>
             <a:ext cx="347472" cy="347472"/>
           </a:xfrm>
           <a:prstGeom prst="ellipse">
@@ -7398,7 +7398,7 @@
         </p:nvSpPr>
         <p:spPr>
           <a:xfrm>
-            <a:off x="841248" y="5219395"/>
+            <a:off x="841248" y="5261458"/>
             <a:ext cx="347472" cy="347472"/>
           </a:xfrm>
           <a:prstGeom prst="rect">
@@ -7437,8 +7437,8 @@
         </p:nvSpPr>
         <p:spPr>
           <a:xfrm>
-            <a:off x="1280160" y="5034686"/>
-            <a:ext cx="10033711" cy="716890"/>
+            <a:off x="1280160" y="5063947"/>
+            <a:ext cx="10033711" cy="742493"/>
           </a:xfrm>
           <a:prstGeom prst="rect">
             <a:avLst/>
@@ -7457,243 +7457,243 @@
               <a:buNone/>
             </a:pPr>
             <a:r>
+              <a:rPr lang="en-US" sz="950" dirty="0">
+                <a:solidFill>
+                  <a:srgbClr val="5F7183"/>
+                </a:solidFill>
+                <a:latin typeface="Yu Gothic" pitchFamily="34" charset="0"/>
+                <a:ea typeface="Yu Gothic" pitchFamily="34" charset="-122"/>
+                <a:cs typeface="Yu Gothic" pitchFamily="34" charset="-120"/>
+              </a:rPr>
+              <a:t>問10　保全と開示の違い</a:t>
+            </a:r>
+            <a:endParaRPr lang="en-US" sz="950" dirty="0"/>
+          </a:p>
+          <a:p>
+            <a:pPr indent="0" marL="0">
+              <a:lnSpc>
+                <a:spcPct val="88000"/>
+              </a:lnSpc>
+              <a:buNone/>
+            </a:pPr>
+            <a:r>
+              <a:rPr lang="en-US" sz="1200" b="1" dirty="0">
+                <a:solidFill>
+                  <a:srgbClr val="1B2733"/>
+                </a:solidFill>
+                <a:latin typeface="Yu Gothic" pitchFamily="34" charset="0"/>
+                <a:ea typeface="Yu Gothic" pitchFamily="34" charset="-122"/>
+                <a:cs typeface="Yu Gothic" pitchFamily="34" charset="-120"/>
+              </a:rPr>
+              <a:t>保全＝上書きを防いで残す。開示＝内容を渡す。警備員が受けられるのは保全のみ。</a:t>
+            </a:r>
+            <a:endParaRPr lang="en-US" sz="950" dirty="0"/>
+          </a:p>
+          <a:p>
+            <a:pPr indent="0" marL="0">
+              <a:lnSpc>
+                <a:spcPct val="88000"/>
+              </a:lnSpc>
+              <a:buNone/>
+            </a:pPr>
+            <a:r>
+              <a:rPr lang="en-US" sz="1100" dirty="0">
+                <a:solidFill>
+                  <a:srgbClr val="1B2733"/>
+                </a:solidFill>
+                <a:latin typeface="Calibri" pitchFamily="34" charset="0"/>
+                <a:ea typeface="Calibri" pitchFamily="34" charset="-122"/>
+                <a:cs typeface="Calibri" pitchFamily="34" charset="-120"/>
+              </a:rPr>
+              <a:t>Preserving keeps it from being overwritten. Disclosing hands over the content. Only preservation is yours to accept.</a:t>
+            </a:r>
+            <a:endParaRPr lang="en-US" sz="950" dirty="0"/>
+          </a:p>
+        </p:txBody>
+      </p:sp>
+      <p:sp>
+        <p:nvSpPr>
+          <p:cNvPr id="26" name="Text 23"/>
+          <p:cNvSpPr/>
+          <p:nvPr/>
+        </p:nvSpPr>
+        <p:spPr>
+          <a:xfrm>
+            <a:off x="640080" y="5961888"/>
+            <a:ext cx="10911535" cy="292608"/>
+          </a:xfrm>
+          <a:prstGeom prst="rect">
+            <a:avLst/>
+          </a:prstGeom>
+          <a:noFill/>
+          <a:ln/>
+        </p:spPr>
+        <p:txBody>
+          <a:bodyPr wrap="square" lIns="0" tIns="0" rIns="0" bIns="0" rtlCol="0" anchor="t"/>
+          <a:lstStyle/>
+          <a:p>
+            <a:pPr indent="0" marL="0">
+              <a:lnSpc>
+                <a:spcPct val="88000"/>
+              </a:lnSpc>
+              <a:buNone/>
+            </a:pPr>
+            <a:r>
+              <a:rPr lang="en-US" sz="900" b="1" dirty="0">
+                <a:solidFill>
+                  <a:srgbClr val="0D8A76"/>
+                </a:solidFill>
+                <a:latin typeface="Yu Gothic" pitchFamily="34" charset="0"/>
+                <a:ea typeface="Yu Gothic" pitchFamily="34" charset="-122"/>
+                <a:cs typeface="Yu Gothic" pitchFamily="34" charset="-120"/>
+              </a:rPr>
+              <a:t>採点の目安　</a:t>
+            </a:r>
+            <a:pPr indent="0" marL="0">
+              <a:lnSpc>
+                <a:spcPct val="88000"/>
+              </a:lnSpc>
+              <a:buNone/>
+            </a:pPr>
+            <a:r>
               <a:rPr lang="en-US" sz="900" dirty="0">
                 <a:solidFill>
+                  <a:srgbClr val="1B2733"/>
+                </a:solidFill>
+                <a:latin typeface="Yu Gothic" pitchFamily="34" charset="0"/>
+                <a:ea typeface="Yu Gothic" pitchFamily="34" charset="-122"/>
+                <a:cs typeface="Yu Gothic" pitchFamily="34" charset="-120"/>
+              </a:rPr>
+              <a:t>問6と問9は重点問題です。落とした受講者には個別に確認してください。</a:t>
+            </a:r>
+            <a:endParaRPr lang="en-US" sz="900" dirty="0"/>
+          </a:p>
+          <a:p>
+            <a:pPr indent="0" marL="0">
+              <a:lnSpc>
+                <a:spcPct val="88000"/>
+              </a:lnSpc>
+              <a:buNone/>
+            </a:pPr>
+            <a:r>
+              <a:rPr lang="en-US" sz="800" i="1" dirty="0">
+                <a:solidFill>
                   <a:srgbClr val="5F7183"/>
                 </a:solidFill>
-                <a:latin typeface="Yu Gothic" pitchFamily="34" charset="0"/>
-                <a:ea typeface="Yu Gothic" pitchFamily="34" charset="-122"/>
-                <a:cs typeface="Yu Gothic" pitchFamily="34" charset="-120"/>
-              </a:rPr>
-              <a:t>問10　保全と開示の違い</a:t>
+                <a:latin typeface="Calibri" pitchFamily="34" charset="0"/>
+                <a:ea typeface="Calibri" pitchFamily="34" charset="-122"/>
+                <a:cs typeface="Calibri" pitchFamily="34" charset="-120"/>
+              </a:rPr>
+              <a:t>Questions 6 and 9 are the key items. Follow up individually with anyone who missed them.</a:t>
             </a:r>
             <a:endParaRPr lang="en-US" sz="900" dirty="0"/>
           </a:p>
-          <a:p>
-            <a:pPr indent="0" marL="0">
-              <a:lnSpc>
-                <a:spcPct val="88000"/>
-              </a:lnSpc>
-              <a:buNone/>
-            </a:pPr>
-            <a:r>
-              <a:rPr lang="en-US" sz="1200" b="1" dirty="0">
-                <a:solidFill>
-                  <a:srgbClr val="1B2733"/>
-                </a:solidFill>
-                <a:latin typeface="Yu Gothic" pitchFamily="34" charset="0"/>
-                <a:ea typeface="Yu Gothic" pitchFamily="34" charset="-122"/>
-                <a:cs typeface="Yu Gothic" pitchFamily="34" charset="-120"/>
-              </a:rPr>
-              <a:t>保全＝上書きを防いで残す。開示＝内容を渡す。警備員が受けられるのは保全のみ。</a:t>
+        </p:txBody>
+      </p:sp>
+      <p:sp>
+        <p:nvSpPr>
+          <p:cNvPr id="27" name="Text 24"/>
+          <p:cNvSpPr/>
+          <p:nvPr/>
+        </p:nvSpPr>
+        <p:spPr>
+          <a:xfrm>
+            <a:off x="640080" y="6272784"/>
+            <a:ext cx="9905695" cy="219456"/>
+          </a:xfrm>
+          <a:prstGeom prst="rect">
+            <a:avLst/>
+          </a:prstGeom>
+          <a:noFill/>
+          <a:ln/>
+        </p:spPr>
+        <p:txBody>
+          <a:bodyPr wrap="square" lIns="0" tIns="0" rIns="0" bIns="0" rtlCol="0" anchor="t"/>
+          <a:lstStyle/>
+          <a:p>
+            <a:pPr indent="0" marL="0">
+              <a:buNone/>
+            </a:pPr>
+            <a:r>
+              <a:rPr lang="en-US" sz="750" b="1" dirty="0">
+                <a:solidFill>
+                  <a:srgbClr val="D6E0E9"/>
+                </a:solidFill>
+                <a:latin typeface="Yu Gothic" pitchFamily="34" charset="0"/>
+                <a:ea typeface="Yu Gothic" pitchFamily="34" charset="-122"/>
+                <a:cs typeface="Yu Gothic" pitchFamily="34" charset="-120"/>
+              </a:rPr>
+              <a:t>ソース　</a:t>
+            </a:r>
+            <a:pPr indent="0" marL="0">
+              <a:buNone/>
+            </a:pPr>
+            <a:r>
+              <a:rPr lang="en-US" sz="750" dirty="0">
+                <a:solidFill>
+                  <a:srgbClr val="5F7183"/>
+                </a:solidFill>
+                <a:latin typeface="Yu Gothic" pitchFamily="34" charset="0"/>
+                <a:ea typeface="Yu Gothic" pitchFamily="34" charset="-122"/>
+                <a:cs typeface="Yu Gothic" pitchFamily="34" charset="-120"/>
+              </a:rPr>
+              <a:t>消防法、個人情報保護法、警察庁「警備員教育」</a:t>
+            </a:r>
+            <a:endParaRPr lang="en-US" sz="750" dirty="0"/>
+          </a:p>
+        </p:txBody>
+      </p:sp>
+      <p:sp>
+        <p:nvSpPr>
+          <p:cNvPr id="28" name="Text 25"/>
+          <p:cNvSpPr/>
+          <p:nvPr/>
+        </p:nvSpPr>
+        <p:spPr>
+          <a:xfrm>
+            <a:off x="640080" y="6492240"/>
+            <a:ext cx="8778240" cy="292608"/>
+          </a:xfrm>
+          <a:prstGeom prst="rect">
+            <a:avLst/>
+          </a:prstGeom>
+          <a:noFill/>
+          <a:ln/>
+        </p:spPr>
+        <p:txBody>
+          <a:bodyPr wrap="square" lIns="0" tIns="0" rIns="0" bIns="0" rtlCol="0" anchor="ctr"/>
+          <a:lstStyle/>
+          <a:p>
+            <a:pPr indent="0" marL="0">
+              <a:buNone/>
+            </a:pPr>
+            <a:r>
+              <a:rPr lang="en-US" sz="900" dirty="0">
+                <a:solidFill>
+                  <a:srgbClr val="5F7183"/>
+                </a:solidFill>
+                <a:latin typeface="Yu Gothic" pitchFamily="34" charset="0"/>
+                <a:ea typeface="Yu Gothic" pitchFamily="34" charset="-122"/>
+                <a:cs typeface="Yu Gothic" pitchFamily="34" charset="-120"/>
+              </a:rPr>
+              <a:t>第10時限｜業務別教育6 警報装置その他当該警備業務を実施するために使用する機器の使用方法  </a:t>
+            </a:r>
+            <a:pPr indent="0" marL="0">
+              <a:buNone/>
+            </a:pPr>
+            <a:r>
+              <a:rPr lang="en-US" sz="850" i="1" dirty="0">
+                <a:solidFill>
+                  <a:srgbClr val="D6E0E9"/>
+                </a:solidFill>
+                <a:latin typeface="Calibri" pitchFamily="34" charset="0"/>
+                <a:ea typeface="Calibri" pitchFamily="34" charset="-122"/>
+                <a:cs typeface="Calibri" pitchFamily="34" charset="-120"/>
+              </a:rPr>
+              <a:t>Period 10 | Task-Specific Training 6 — Security Equipment</a:t>
             </a:r>
             <a:endParaRPr lang="en-US" sz="900" dirty="0"/>
           </a:p>
-          <a:p>
-            <a:pPr indent="0" marL="0">
-              <a:lnSpc>
-                <a:spcPct val="88000"/>
-              </a:lnSpc>
-              <a:buNone/>
-            </a:pPr>
-            <a:r>
-              <a:rPr lang="en-US" sz="800" i="1" dirty="0">
-                <a:solidFill>
-                  <a:srgbClr val="5F7183"/>
-                </a:solidFill>
-                <a:latin typeface="Calibri" pitchFamily="34" charset="0"/>
-                <a:ea typeface="Calibri" pitchFamily="34" charset="-122"/>
-                <a:cs typeface="Calibri" pitchFamily="34" charset="-120"/>
-              </a:rPr>
-              <a:t>Preserving keeps it from being overwritten. Disclosing hands over the content. Only preservation is yours to accept.</a:t>
-            </a:r>
-            <a:endParaRPr lang="en-US" sz="900" dirty="0"/>
-          </a:p>
-        </p:txBody>
-      </p:sp>
-      <p:sp>
-        <p:nvSpPr>
-          <p:cNvPr id="26" name="Text 23"/>
-          <p:cNvSpPr/>
-          <p:nvPr/>
-        </p:nvSpPr>
-        <p:spPr>
-          <a:xfrm>
-            <a:off x="640080" y="5907024"/>
-            <a:ext cx="10911535" cy="310896"/>
-          </a:xfrm>
-          <a:prstGeom prst="rect">
-            <a:avLst/>
-          </a:prstGeom>
-          <a:noFill/>
-          <a:ln/>
-        </p:spPr>
-        <p:txBody>
-          <a:bodyPr wrap="square" lIns="0" tIns="0" rIns="0" bIns="0" rtlCol="0" anchor="t"/>
-          <a:lstStyle/>
-          <a:p>
-            <a:pPr indent="0" marL="0">
-              <a:lnSpc>
-                <a:spcPct val="88000"/>
-              </a:lnSpc>
-              <a:buNone/>
-            </a:pPr>
-            <a:r>
-              <a:rPr lang="en-US" sz="900" b="1" dirty="0">
-                <a:solidFill>
-                  <a:srgbClr val="0D8A76"/>
-                </a:solidFill>
-                <a:latin typeface="Yu Gothic" pitchFamily="34" charset="0"/>
-                <a:ea typeface="Yu Gothic" pitchFamily="34" charset="-122"/>
-                <a:cs typeface="Yu Gothic" pitchFamily="34" charset="-120"/>
-              </a:rPr>
-              <a:t>採点の目安　</a:t>
-            </a:r>
-            <a:pPr indent="0" marL="0">
-              <a:lnSpc>
-                <a:spcPct val="88000"/>
-              </a:lnSpc>
-              <a:buNone/>
-            </a:pPr>
-            <a:r>
-              <a:rPr lang="en-US" sz="900" dirty="0">
-                <a:solidFill>
-                  <a:srgbClr val="1B2733"/>
-                </a:solidFill>
-                <a:latin typeface="Yu Gothic" pitchFamily="34" charset="0"/>
-                <a:ea typeface="Yu Gothic" pitchFamily="34" charset="-122"/>
-                <a:cs typeface="Yu Gothic" pitchFamily="34" charset="-120"/>
-              </a:rPr>
-              <a:t>問6と問9は重点問題です。落とした受講者には個別に確認してください。</a:t>
-            </a:r>
-            <a:endParaRPr lang="en-US" sz="900" dirty="0"/>
-          </a:p>
-          <a:p>
-            <a:pPr indent="0" marL="0">
-              <a:lnSpc>
-                <a:spcPct val="88000"/>
-              </a:lnSpc>
-              <a:buNone/>
-            </a:pPr>
-            <a:r>
-              <a:rPr lang="en-US" sz="750" i="1" dirty="0">
-                <a:solidFill>
-                  <a:srgbClr val="5F7183"/>
-                </a:solidFill>
-                <a:latin typeface="Calibri" pitchFamily="34" charset="0"/>
-                <a:ea typeface="Calibri" pitchFamily="34" charset="-122"/>
-                <a:cs typeface="Calibri" pitchFamily="34" charset="-120"/>
-              </a:rPr>
-              <a:t>Questions 6 and 9 are the key items. Follow up individually with anyone who missed them.</a:t>
-            </a:r>
-            <a:endParaRPr lang="en-US" sz="900" dirty="0"/>
-          </a:p>
-        </p:txBody>
-      </p:sp>
-      <p:sp>
-        <p:nvSpPr>
-          <p:cNvPr id="27" name="Text 24"/>
-          <p:cNvSpPr/>
-          <p:nvPr/>
-        </p:nvSpPr>
-        <p:spPr>
-          <a:xfrm>
-            <a:off x="640080" y="6272784"/>
-            <a:ext cx="9905695" cy="237744"/>
-          </a:xfrm>
-          <a:prstGeom prst="rect">
-            <a:avLst/>
-          </a:prstGeom>
-          <a:noFill/>
-          <a:ln/>
-        </p:spPr>
-        <p:txBody>
-          <a:bodyPr wrap="square" lIns="0" tIns="0" rIns="0" bIns="0" rtlCol="0" anchor="t"/>
-          <a:lstStyle/>
-          <a:p>
-            <a:pPr indent="0" marL="0">
-              <a:buNone/>
-            </a:pPr>
-            <a:r>
-              <a:rPr lang="en-US" sz="750" b="1" dirty="0">
-                <a:solidFill>
-                  <a:srgbClr val="D6E0E9"/>
-                </a:solidFill>
-                <a:latin typeface="Yu Gothic" pitchFamily="34" charset="0"/>
-                <a:ea typeface="Yu Gothic" pitchFamily="34" charset="-122"/>
-                <a:cs typeface="Yu Gothic" pitchFamily="34" charset="-120"/>
-              </a:rPr>
-              <a:t>ソース　</a:t>
-            </a:r>
-            <a:pPr indent="0" marL="0">
-              <a:buNone/>
-            </a:pPr>
-            <a:r>
-              <a:rPr lang="en-US" sz="750" dirty="0">
-                <a:solidFill>
-                  <a:srgbClr val="5F7183"/>
-                </a:solidFill>
-                <a:latin typeface="Yu Gothic" pitchFamily="34" charset="0"/>
-                <a:ea typeface="Yu Gothic" pitchFamily="34" charset="-122"/>
-                <a:cs typeface="Yu Gothic" pitchFamily="34" charset="-120"/>
-              </a:rPr>
-              <a:t>消防法、個人情報保護法、警察庁「警備員教育」</a:t>
-            </a:r>
-            <a:endParaRPr lang="en-US" sz="750" dirty="0"/>
-          </a:p>
-        </p:txBody>
-      </p:sp>
-      <p:sp>
-        <p:nvSpPr>
-          <p:cNvPr id="28" name="Text 25"/>
-          <p:cNvSpPr/>
-          <p:nvPr/>
-        </p:nvSpPr>
-        <p:spPr>
-          <a:xfrm>
-            <a:off x="640080" y="6382512"/>
-            <a:ext cx="8778240" cy="292608"/>
-          </a:xfrm>
-          <a:prstGeom prst="rect">
-            <a:avLst/>
-          </a:prstGeom>
-          <a:noFill/>
-          <a:ln/>
-        </p:spPr>
-        <p:txBody>
-          <a:bodyPr wrap="square" lIns="0" tIns="0" rIns="0" bIns="0" rtlCol="0" anchor="ctr"/>
-          <a:lstStyle/>
-          <a:p>
-            <a:pPr indent="0" marL="0">
-              <a:buNone/>
-            </a:pPr>
-            <a:r>
-              <a:rPr lang="en-US" sz="900" dirty="0">
-                <a:solidFill>
-                  <a:srgbClr val="5F7183"/>
-                </a:solidFill>
-                <a:latin typeface="Yu Gothic" pitchFamily="34" charset="0"/>
-                <a:ea typeface="Yu Gothic" pitchFamily="34" charset="-122"/>
-                <a:cs typeface="Yu Gothic" pitchFamily="34" charset="-120"/>
-              </a:rPr>
-              <a:t>第10時限｜業務別教育6 警報装置その他当該警備業務を実施するために使用する機器の使用方法  </a:t>
-            </a:r>
-            <a:pPr indent="0" marL="0">
-              <a:buNone/>
-            </a:pPr>
-            <a:r>
-              <a:rPr lang="en-US" sz="850" i="1" dirty="0">
-                <a:solidFill>
-                  <a:srgbClr val="D6E0E9"/>
-                </a:solidFill>
-                <a:latin typeface="Calibri" pitchFamily="34" charset="0"/>
-                <a:ea typeface="Calibri" pitchFamily="34" charset="-122"/>
-                <a:cs typeface="Calibri" pitchFamily="34" charset="-120"/>
-              </a:rPr>
-              <a:t>Period 10 | Task-Specific Training 6 — Security Equipment</a:t>
-            </a:r>
-            <a:endParaRPr lang="en-US" sz="900" dirty="0"/>
-          </a:p>
         </p:txBody>
       </p:sp>
       <p:sp>
@@ -7704,7 +7704,7 @@
         </p:nvSpPr>
         <p:spPr>
           <a:xfrm>
-            <a:off x="10637215" y="6382512"/>
+            <a:off x="10637215" y="6492240"/>
             <a:ext cx="914400" cy="292608"/>
           </a:xfrm>
           <a:prstGeom prst="rect">
@@ -7861,7 +7861,7 @@
               <a:buNone/>
             </a:pPr>
             <a:r>
-              <a:rPr lang="en-US" sz="1300" i="1" dirty="0">
+              <a:rPr lang="en-US" sz="1300" dirty="0">
                 <a:solidFill>
                   <a:srgbClr val="9FD8CD"/>
                 </a:solidFill>
@@ -8004,7 +8004,7 @@
               <a:buNone/>
             </a:pPr>
             <a:r>
-              <a:rPr lang="en-US" sz="1050" i="1" dirty="0">
+              <a:rPr lang="en-US" sz="1050" dirty="0">
                 <a:solidFill>
                   <a:srgbClr val="9FB6CB"/>
                 </a:solidFill>
@@ -8147,7 +8147,7 @@
               <a:buNone/>
             </a:pPr>
             <a:r>
-              <a:rPr lang="en-US" sz="1050" i="1" dirty="0">
+              <a:rPr lang="en-US" sz="1050" dirty="0">
                 <a:solidFill>
                   <a:srgbClr val="9FB6CB"/>
                 </a:solidFill>
@@ -8290,7 +8290,7 @@
               <a:buNone/>
             </a:pPr>
             <a:r>
-              <a:rPr lang="en-US" sz="1050" i="1" dirty="0">
+              <a:rPr lang="en-US" sz="1050" dirty="0">
                 <a:solidFill>
                   <a:srgbClr val="9FB6CB"/>
                 </a:solidFill>
@@ -8433,7 +8433,7 @@
               <a:buNone/>
             </a:pPr>
             <a:r>
-              <a:rPr lang="en-US" sz="1050" i="1" dirty="0">
+              <a:rPr lang="en-US" sz="1050" dirty="0">
                 <a:solidFill>
                   <a:srgbClr val="9FB6CB"/>
                 </a:solidFill>
@@ -8489,7 +8489,7 @@
               <a:buNone/>
             </a:pPr>
             <a:r>
-              <a:rPr lang="en-US" sz="950" i="1" dirty="0">
+              <a:rPr lang="en-US" sz="950" dirty="0">
                 <a:solidFill>
                   <a:srgbClr val="8EA3B7"/>
                 </a:solidFill>
@@ -8567,8 +8567,8 @@
         </p:nvSpPr>
         <p:spPr>
           <a:xfrm>
-            <a:off x="640080" y="384048"/>
-            <a:ext cx="8982151" cy="768096"/>
+            <a:off x="640080" y="365760"/>
+            <a:ext cx="8982151" cy="749808"/>
           </a:xfrm>
           <a:prstGeom prst="rect">
             <a:avLst/>
@@ -8607,7 +8607,7 @@
               <a:buNone/>
             </a:pPr>
             <a:r>
-              <a:rPr lang="en-US" sz="1100" i="1" dirty="0">
+              <a:rPr lang="en-US" sz="1100" dirty="0">
                 <a:solidFill>
                   <a:srgbClr val="12B198"/>
                 </a:solidFill>
@@ -8629,7 +8629,7 @@
         </p:nvSpPr>
         <p:spPr>
           <a:xfrm>
-            <a:off x="9686239" y="438912"/>
+            <a:off x="9686239" y="420624"/>
             <a:ext cx="932688" cy="310896"/>
           </a:xfrm>
           <a:prstGeom prst="roundRect">
@@ -8651,7 +8651,7 @@
         </p:nvSpPr>
         <p:spPr>
           <a:xfrm>
-            <a:off x="9686239" y="438912"/>
+            <a:off x="9686239" y="420624"/>
             <a:ext cx="932688" cy="310896"/>
           </a:xfrm>
           <a:prstGeom prst="rect">
@@ -8690,12 +8690,12 @@
         </p:nvSpPr>
         <p:spPr>
           <a:xfrm>
-            <a:off x="640080" y="1188720"/>
-            <a:ext cx="10911535" cy="530352"/>
+            <a:off x="640080" y="1115568"/>
+            <a:ext cx="10911535" cy="585216"/>
           </a:xfrm>
           <a:prstGeom prst="roundRect">
             <a:avLst>
-              <a:gd name="adj" fmla="val 6897"/>
+              <a:gd name="adj" fmla="val 6250"/>
             </a:avLst>
           </a:prstGeom>
           <a:solidFill>
@@ -8712,8 +8712,8 @@
         </p:nvSpPr>
         <p:spPr>
           <a:xfrm>
-            <a:off x="877824" y="1234440"/>
-            <a:ext cx="10436047" cy="438912"/>
+            <a:off x="877824" y="1161288"/>
+            <a:ext cx="10436047" cy="493776"/>
           </a:xfrm>
           <a:prstGeom prst="rect">
             <a:avLst/>
@@ -8749,7 +8749,7 @@
               <a:buNone/>
             </a:pPr>
             <a:r>
-              <a:rPr lang="en-US" sz="800" dirty="0">
+              <a:rPr lang="en-US" sz="900" dirty="0">
                 <a:solidFill>
                   <a:srgbClr val="0D8A76"/>
                 </a:solidFill>
@@ -8786,9 +8786,9 @@
               <a:buNone/>
             </a:pPr>
             <a:r>
-              <a:rPr lang="en-US" sz="850" i="1" dirty="0">
-                <a:solidFill>
-                  <a:srgbClr val="5F7183"/>
+              <a:rPr lang="en-US" sz="1050" dirty="0">
+                <a:solidFill>
+                  <a:srgbClr val="1B2733"/>
                 </a:solidFill>
                 <a:latin typeface="Calibri" pitchFamily="34" charset="0"/>
                 <a:ea typeface="Calibri" pitchFamily="34" charset="-122"/>
@@ -8808,12 +8808,12 @@
         </p:nvSpPr>
         <p:spPr>
           <a:xfrm>
-            <a:off x="640080" y="1810512"/>
-            <a:ext cx="5327752" cy="1920240"/>
+            <a:off x="640080" y="1773936"/>
+            <a:ext cx="5327752" cy="1965960"/>
           </a:xfrm>
           <a:prstGeom prst="roundRect">
             <a:avLst>
-              <a:gd name="adj" fmla="val 1905"/>
+              <a:gd name="adj" fmla="val 1860"/>
             </a:avLst>
           </a:prstGeom>
           <a:solidFill>
@@ -8830,7 +8830,7 @@
         </p:nvSpPr>
         <p:spPr>
           <a:xfrm>
-            <a:off x="822960" y="1975104"/>
+            <a:off x="822960" y="1938528"/>
             <a:ext cx="310896" cy="310896"/>
           </a:xfrm>
           <a:prstGeom prst="ellipse">
@@ -8850,7 +8850,7 @@
         </p:nvSpPr>
         <p:spPr>
           <a:xfrm>
-            <a:off x="822960" y="1975104"/>
+            <a:off x="822960" y="1938528"/>
             <a:ext cx="310896" cy="310896"/>
           </a:xfrm>
           <a:prstGeom prst="rect">
@@ -8889,7 +8889,7 @@
         </p:nvSpPr>
         <p:spPr>
           <a:xfrm>
-            <a:off x="1207008" y="1938528"/>
+            <a:off x="1207008" y="1901952"/>
             <a:ext cx="4559656" cy="512064"/>
           </a:xfrm>
           <a:prstGeom prst="rect">
@@ -8929,7 +8929,7 @@
               <a:buNone/>
             </a:pPr>
             <a:r>
-              <a:rPr lang="en-US" sz="800" i="1" dirty="0">
+              <a:rPr lang="en-US" sz="1050" dirty="0">
                 <a:solidFill>
                   <a:srgbClr val="12B198"/>
                 </a:solidFill>
@@ -8951,8 +8951,8 @@
         </p:nvSpPr>
         <p:spPr>
           <a:xfrm>
-            <a:off x="859536" y="2487168"/>
-            <a:ext cx="4888840" cy="1097280"/>
+            <a:off x="859536" y="2450592"/>
+            <a:ext cx="4888840" cy="1143000"/>
           </a:xfrm>
           <a:prstGeom prst="rect">
             <a:avLst/>
@@ -8997,9 +8997,9 @@
               <a:buNone/>
             </a:pPr>
             <a:r>
-              <a:rPr lang="en-US" sz="750" i="1" dirty="0">
-                <a:solidFill>
-                  <a:srgbClr val="5F7183"/>
+              <a:rPr lang="en-US" sz="950" dirty="0">
+                <a:solidFill>
+                  <a:srgbClr val="1B2733"/>
                 </a:solidFill>
                 <a:latin typeface="Calibri" pitchFamily="34" charset="0"/>
                 <a:ea typeface="Calibri" pitchFamily="34" charset="-122"/>
@@ -9043,9 +9043,9 @@
               <a:buNone/>
             </a:pPr>
             <a:r>
-              <a:rPr lang="en-US" sz="750" i="1" dirty="0">
-                <a:solidFill>
-                  <a:srgbClr val="5F7183"/>
+              <a:rPr lang="en-US" sz="950" dirty="0">
+                <a:solidFill>
+                  <a:srgbClr val="1B2733"/>
                 </a:solidFill>
                 <a:latin typeface="Calibri" pitchFamily="34" charset="0"/>
                 <a:ea typeface="Calibri" pitchFamily="34" charset="-122"/>
@@ -9089,9 +9089,9 @@
               <a:buNone/>
             </a:pPr>
             <a:r>
-              <a:rPr lang="en-US" sz="750" i="1" dirty="0">
-                <a:solidFill>
-                  <a:srgbClr val="5F7183"/>
+              <a:rPr lang="en-US" sz="950" dirty="0">
+                <a:solidFill>
+                  <a:srgbClr val="1B2733"/>
                 </a:solidFill>
                 <a:latin typeface="Calibri" pitchFamily="34" charset="0"/>
                 <a:ea typeface="Calibri" pitchFamily="34" charset="-122"/>
@@ -9135,9 +9135,9 @@
               <a:buNone/>
             </a:pPr>
             <a:r>
-              <a:rPr lang="en-US" sz="750" i="1" dirty="0">
-                <a:solidFill>
-                  <a:srgbClr val="5F7183"/>
+              <a:rPr lang="en-US" sz="950" dirty="0">
+                <a:solidFill>
+                  <a:srgbClr val="1B2733"/>
                 </a:solidFill>
                 <a:latin typeface="Calibri" pitchFamily="34" charset="0"/>
                 <a:ea typeface="Calibri" pitchFamily="34" charset="-122"/>
@@ -9157,12 +9157,12 @@
         </p:nvSpPr>
         <p:spPr>
           <a:xfrm>
-            <a:off x="6223864" y="1810512"/>
-            <a:ext cx="5327752" cy="1920240"/>
+            <a:off x="6223864" y="1773936"/>
+            <a:ext cx="5327752" cy="1965960"/>
           </a:xfrm>
           <a:prstGeom prst="roundRect">
             <a:avLst>
-              <a:gd name="adj" fmla="val 1905"/>
+              <a:gd name="adj" fmla="val 1860"/>
             </a:avLst>
           </a:prstGeom>
           <a:solidFill>
@@ -9179,7 +9179,7 @@
         </p:nvSpPr>
         <p:spPr>
           <a:xfrm>
-            <a:off x="6406744" y="1975104"/>
+            <a:off x="6406744" y="1938528"/>
             <a:ext cx="310896" cy="310896"/>
           </a:xfrm>
           <a:prstGeom prst="ellipse">
@@ -9199,7 +9199,7 @@
         </p:nvSpPr>
         <p:spPr>
           <a:xfrm>
-            <a:off x="6406744" y="1975104"/>
+            <a:off x="6406744" y="1938528"/>
             <a:ext cx="310896" cy="310896"/>
           </a:xfrm>
           <a:prstGeom prst="rect">
@@ -9238,7 +9238,7 @@
         </p:nvSpPr>
         <p:spPr>
           <a:xfrm>
-            <a:off x="6790792" y="1938528"/>
+            <a:off x="6790792" y="1901952"/>
             <a:ext cx="4559656" cy="512064"/>
           </a:xfrm>
           <a:prstGeom prst="rect">
@@ -9278,7 +9278,7 @@
               <a:buNone/>
             </a:pPr>
             <a:r>
-              <a:rPr lang="en-US" sz="800" i="1" dirty="0">
+              <a:rPr lang="en-US" sz="1050" dirty="0">
                 <a:solidFill>
                   <a:srgbClr val="12B198"/>
                 </a:solidFill>
@@ -9300,8 +9300,8 @@
         </p:nvSpPr>
         <p:spPr>
           <a:xfrm>
-            <a:off x="6443320" y="2487168"/>
-            <a:ext cx="4888840" cy="1097280"/>
+            <a:off x="6443320" y="2450592"/>
+            <a:ext cx="4888840" cy="1143000"/>
           </a:xfrm>
           <a:prstGeom prst="rect">
             <a:avLst/>
@@ -9346,9 +9346,9 @@
               <a:buNone/>
             </a:pPr>
             <a:r>
-              <a:rPr lang="en-US" sz="750" i="1" dirty="0">
-                <a:solidFill>
-                  <a:srgbClr val="5F7183"/>
+              <a:rPr lang="en-US" sz="950" dirty="0">
+                <a:solidFill>
+                  <a:srgbClr val="1B2733"/>
                 </a:solidFill>
                 <a:latin typeface="Calibri" pitchFamily="34" charset="0"/>
                 <a:ea typeface="Calibri" pitchFamily="34" charset="-122"/>
@@ -9392,9 +9392,9 @@
               <a:buNone/>
             </a:pPr>
             <a:r>
-              <a:rPr lang="en-US" sz="750" i="1" dirty="0">
-                <a:solidFill>
-                  <a:srgbClr val="5F7183"/>
+              <a:rPr lang="en-US" sz="950" dirty="0">
+                <a:solidFill>
+                  <a:srgbClr val="1B2733"/>
                 </a:solidFill>
                 <a:latin typeface="Calibri" pitchFamily="34" charset="0"/>
                 <a:ea typeface="Calibri" pitchFamily="34" charset="-122"/>
@@ -9438,9 +9438,9 @@
               <a:buNone/>
             </a:pPr>
             <a:r>
-              <a:rPr lang="en-US" sz="750" i="1" dirty="0">
-                <a:solidFill>
-                  <a:srgbClr val="5F7183"/>
+              <a:rPr lang="en-US" sz="950" dirty="0">
+                <a:solidFill>
+                  <a:srgbClr val="1B2733"/>
                 </a:solidFill>
                 <a:latin typeface="Calibri" pitchFamily="34" charset="0"/>
                 <a:ea typeface="Calibri" pitchFamily="34" charset="-122"/>
@@ -9484,9 +9484,9 @@
               <a:buNone/>
             </a:pPr>
             <a:r>
-              <a:rPr lang="en-US" sz="750" i="1" dirty="0">
-                <a:solidFill>
-                  <a:srgbClr val="5F7183"/>
+              <a:rPr lang="en-US" sz="950" dirty="0">
+                <a:solidFill>
+                  <a:srgbClr val="1B2733"/>
                 </a:solidFill>
                 <a:latin typeface="Calibri" pitchFamily="34" charset="0"/>
                 <a:ea typeface="Calibri" pitchFamily="34" charset="-122"/>
@@ -9506,12 +9506,12 @@
         </p:nvSpPr>
         <p:spPr>
           <a:xfrm>
-            <a:off x="640080" y="3931920"/>
-            <a:ext cx="5327752" cy="1920240"/>
+            <a:off x="640080" y="3941064"/>
+            <a:ext cx="5327752" cy="1965960"/>
           </a:xfrm>
           <a:prstGeom prst="roundRect">
             <a:avLst>
-              <a:gd name="adj" fmla="val 1905"/>
+              <a:gd name="adj" fmla="val 1860"/>
             </a:avLst>
           </a:prstGeom>
           <a:solidFill>
@@ -9528,7 +9528,7 @@
         </p:nvSpPr>
         <p:spPr>
           <a:xfrm>
-            <a:off x="822960" y="4096512"/>
+            <a:off x="822960" y="4105656"/>
             <a:ext cx="310896" cy="310896"/>
           </a:xfrm>
           <a:prstGeom prst="ellipse">
@@ -9548,7 +9548,7 @@
         </p:nvSpPr>
         <p:spPr>
           <a:xfrm>
-            <a:off x="822960" y="4096512"/>
+            <a:off x="822960" y="4105656"/>
             <a:ext cx="310896" cy="310896"/>
           </a:xfrm>
           <a:prstGeom prst="rect">
@@ -9587,7 +9587,7 @@
         </p:nvSpPr>
         <p:spPr>
           <a:xfrm>
-            <a:off x="1207008" y="4059936"/>
+            <a:off x="1207008" y="4069080"/>
             <a:ext cx="4559656" cy="512064"/>
           </a:xfrm>
           <a:prstGeom prst="rect">
@@ -9627,7 +9627,7 @@
               <a:buNone/>
             </a:pPr>
             <a:r>
-              <a:rPr lang="en-US" sz="800" i="1" dirty="0">
+              <a:rPr lang="en-US" sz="1050" dirty="0">
                 <a:solidFill>
                   <a:srgbClr val="12B198"/>
                 </a:solidFill>
@@ -9649,8 +9649,8 @@
         </p:nvSpPr>
         <p:spPr>
           <a:xfrm>
-            <a:off x="859536" y="4608576"/>
-            <a:ext cx="4888840" cy="1097280"/>
+            <a:off x="859536" y="4617720"/>
+            <a:ext cx="4888840" cy="1143000"/>
           </a:xfrm>
           <a:prstGeom prst="rect">
             <a:avLst/>
@@ -9695,9 +9695,9 @@
               <a:buNone/>
             </a:pPr>
             <a:r>
-              <a:rPr lang="en-US" sz="750" i="1" dirty="0">
-                <a:solidFill>
-                  <a:srgbClr val="5F7183"/>
+              <a:rPr lang="en-US" sz="950" dirty="0">
+                <a:solidFill>
+                  <a:srgbClr val="1B2733"/>
                 </a:solidFill>
                 <a:latin typeface="Calibri" pitchFamily="34" charset="0"/>
                 <a:ea typeface="Calibri" pitchFamily="34" charset="-122"/>
@@ -9741,9 +9741,9 @@
               <a:buNone/>
             </a:pPr>
             <a:r>
-              <a:rPr lang="en-US" sz="750" i="1" dirty="0">
-                <a:solidFill>
-                  <a:srgbClr val="5F7183"/>
+              <a:rPr lang="en-US" sz="950" dirty="0">
+                <a:solidFill>
+                  <a:srgbClr val="1B2733"/>
                 </a:solidFill>
                 <a:latin typeface="Calibri" pitchFamily="34" charset="0"/>
                 <a:ea typeface="Calibri" pitchFamily="34" charset="-122"/>
@@ -9787,9 +9787,9 @@
               <a:buNone/>
             </a:pPr>
             <a:r>
-              <a:rPr lang="en-US" sz="750" i="1" dirty="0">
-                <a:solidFill>
-                  <a:srgbClr val="5F7183"/>
+              <a:rPr lang="en-US" sz="950" dirty="0">
+                <a:solidFill>
+                  <a:srgbClr val="1B2733"/>
                 </a:solidFill>
                 <a:latin typeface="Calibri" pitchFamily="34" charset="0"/>
                 <a:ea typeface="Calibri" pitchFamily="34" charset="-122"/>
@@ -9833,9 +9833,9 @@
               <a:buNone/>
             </a:pPr>
             <a:r>
-              <a:rPr lang="en-US" sz="750" i="1" dirty="0">
-                <a:solidFill>
-                  <a:srgbClr val="5F7183"/>
+              <a:rPr lang="en-US" sz="950" dirty="0">
+                <a:solidFill>
+                  <a:srgbClr val="1B2733"/>
                 </a:solidFill>
                 <a:latin typeface="Calibri" pitchFamily="34" charset="0"/>
                 <a:ea typeface="Calibri" pitchFamily="34" charset="-122"/>
@@ -9855,12 +9855,12 @@
         </p:nvSpPr>
         <p:spPr>
           <a:xfrm>
-            <a:off x="6223864" y="3931920"/>
-            <a:ext cx="5327752" cy="1920240"/>
+            <a:off x="6223864" y="3941064"/>
+            <a:ext cx="5327752" cy="1965960"/>
           </a:xfrm>
           <a:prstGeom prst="roundRect">
             <a:avLst>
-              <a:gd name="adj" fmla="val 1905"/>
+              <a:gd name="adj" fmla="val 1860"/>
             </a:avLst>
           </a:prstGeom>
           <a:solidFill>
@@ -9877,7 +9877,7 @@
         </p:nvSpPr>
         <p:spPr>
           <a:xfrm>
-            <a:off x="6406744" y="4096512"/>
+            <a:off x="6406744" y="4105656"/>
             <a:ext cx="310896" cy="310896"/>
           </a:xfrm>
           <a:prstGeom prst="ellipse">
@@ -9897,7 +9897,7 @@
         </p:nvSpPr>
         <p:spPr>
           <a:xfrm>
-            <a:off x="6406744" y="4096512"/>
+            <a:off x="6406744" y="4105656"/>
             <a:ext cx="310896" cy="310896"/>
           </a:xfrm>
           <a:prstGeom prst="rect">
@@ -9936,7 +9936,7 @@
         </p:nvSpPr>
         <p:spPr>
           <a:xfrm>
-            <a:off x="6790792" y="4059936"/>
+            <a:off x="6790792" y="4069080"/>
             <a:ext cx="4559656" cy="512064"/>
           </a:xfrm>
           <a:prstGeom prst="rect">
@@ -9976,7 +9976,7 @@
               <a:buNone/>
             </a:pPr>
             <a:r>
-              <a:rPr lang="en-US" sz="800" i="1" dirty="0">
+              <a:rPr lang="en-US" sz="1050" dirty="0">
                 <a:solidFill>
                   <a:srgbClr val="12B198"/>
                 </a:solidFill>
@@ -9998,8 +9998,8 @@
         </p:nvSpPr>
         <p:spPr>
           <a:xfrm>
-            <a:off x="6443320" y="4608576"/>
-            <a:ext cx="4888840" cy="1097280"/>
+            <a:off x="6443320" y="4617720"/>
+            <a:ext cx="4888840" cy="1143000"/>
           </a:xfrm>
           <a:prstGeom prst="rect">
             <a:avLst/>
@@ -10044,9 +10044,9 @@
               <a:buNone/>
             </a:pPr>
             <a:r>
-              <a:rPr lang="en-US" sz="750" i="1" dirty="0">
-                <a:solidFill>
-                  <a:srgbClr val="5F7183"/>
+              <a:rPr lang="en-US" sz="950" dirty="0">
+                <a:solidFill>
+                  <a:srgbClr val="1B2733"/>
                 </a:solidFill>
                 <a:latin typeface="Calibri" pitchFamily="34" charset="0"/>
                 <a:ea typeface="Calibri" pitchFamily="34" charset="-122"/>
@@ -10090,9 +10090,9 @@
               <a:buNone/>
             </a:pPr>
             <a:r>
-              <a:rPr lang="en-US" sz="750" i="1" dirty="0">
-                <a:solidFill>
-                  <a:srgbClr val="5F7183"/>
+              <a:rPr lang="en-US" sz="950" dirty="0">
+                <a:solidFill>
+                  <a:srgbClr val="1B2733"/>
                 </a:solidFill>
                 <a:latin typeface="Calibri" pitchFamily="34" charset="0"/>
                 <a:ea typeface="Calibri" pitchFamily="34" charset="-122"/>
@@ -10136,9 +10136,9 @@
               <a:buNone/>
             </a:pPr>
             <a:r>
-              <a:rPr lang="en-US" sz="750" i="1" dirty="0">
-                <a:solidFill>
-                  <a:srgbClr val="5F7183"/>
+              <a:rPr lang="en-US" sz="950" dirty="0">
+                <a:solidFill>
+                  <a:srgbClr val="1B2733"/>
                 </a:solidFill>
                 <a:latin typeface="Calibri" pitchFamily="34" charset="0"/>
                 <a:ea typeface="Calibri" pitchFamily="34" charset="-122"/>
@@ -10182,7 +10182,86 @@
               <a:buNone/>
             </a:pPr>
             <a:r>
-              <a:rPr lang="en-US" sz="750" i="1" dirty="0">
+              <a:rPr lang="en-US" sz="950" dirty="0">
+                <a:solidFill>
+                  <a:srgbClr val="1B2733"/>
+                </a:solidFill>
+                <a:latin typeface="Calibri" pitchFamily="34" charset="0"/>
+                <a:ea typeface="Calibri" pitchFamily="34" charset="-122"/>
+                <a:cs typeface="Calibri" pitchFamily="34" charset="-120"/>
+              </a:rPr>
+              <a:t>  Activations are logged. Record your operations too</a:t>
+            </a:r>
+            <a:endParaRPr lang="en-US" sz="950" dirty="0"/>
+          </a:p>
+        </p:txBody>
+      </p:sp>
+      <p:sp>
+        <p:nvSpPr>
+          <p:cNvPr id="28" name="Text 25"/>
+          <p:cNvSpPr/>
+          <p:nvPr/>
+        </p:nvSpPr>
+        <p:spPr>
+          <a:xfrm>
+            <a:off x="640080" y="5961888"/>
+            <a:ext cx="10911535" cy="292608"/>
+          </a:xfrm>
+          <a:prstGeom prst="rect">
+            <a:avLst/>
+          </a:prstGeom>
+          <a:noFill/>
+          <a:ln/>
+        </p:spPr>
+        <p:txBody>
+          <a:bodyPr wrap="square" lIns="0" tIns="0" rIns="0" bIns="0" rtlCol="0" anchor="t"/>
+          <a:lstStyle/>
+          <a:p>
+            <a:pPr indent="0" marL="0">
+              <a:lnSpc>
+                <a:spcPct val="88000"/>
+              </a:lnSpc>
+              <a:buNone/>
+            </a:pPr>
+            <a:r>
+              <a:rPr lang="en-US" sz="900" b="1" dirty="0">
+                <a:solidFill>
+                  <a:srgbClr val="0D8A76"/>
+                </a:solidFill>
+                <a:latin typeface="Yu Gothic" pitchFamily="34" charset="0"/>
+                <a:ea typeface="Yu Gothic" pitchFamily="34" charset="-122"/>
+                <a:cs typeface="Yu Gothic" pitchFamily="34" charset="-120"/>
+              </a:rPr>
+              <a:t>Site SOP優先　</a:t>
+            </a:r>
+            <a:pPr indent="0" marL="0">
+              <a:lnSpc>
+                <a:spcPct val="88000"/>
+              </a:lnSpc>
+              <a:buNone/>
+            </a:pPr>
+            <a:r>
+              <a:rPr lang="en-US" sz="900" dirty="0">
+                <a:solidFill>
+                  <a:srgbClr val="1B2733"/>
+                </a:solidFill>
+                <a:latin typeface="Yu Gothic" pitchFamily="34" charset="0"/>
+                <a:ea typeface="Yu Gothic" pitchFamily="34" charset="-122"/>
+                <a:cs typeface="Yu Gothic" pitchFamily="34" charset="-120"/>
+              </a:rPr>
+              <a:t>設置設備、操作権限、受信機の位置は現場ごとに異なる。Site SOPと設備配置図を確認する。</a:t>
+            </a:r>
+            <a:endParaRPr lang="en-US" sz="900" dirty="0"/>
+          </a:p>
+          <a:p>
+            <a:pPr indent="0" marL="0">
+              <a:lnSpc>
+                <a:spcPct val="88000"/>
+              </a:lnSpc>
+              <a:buNone/>
+            </a:pPr>
+            <a:r>
+              <a:rPr lang="en-US" sz="800" i="1" dirty="0">
                 <a:solidFill>
                   <a:srgbClr val="5F7183"/>
                 </a:solidFill>
@@ -10190,22 +10269,22 @@
                 <a:ea typeface="Calibri" pitchFamily="34" charset="-122"/>
                 <a:cs typeface="Calibri" pitchFamily="34" charset="-120"/>
               </a:rPr>
-              <a:t>  Activations are logged. Record your operations too</a:t>
-            </a:r>
-            <a:endParaRPr lang="en-US" sz="950" dirty="0"/>
-          </a:p>
-        </p:txBody>
-      </p:sp>
-      <p:sp>
-        <p:nvSpPr>
-          <p:cNvPr id="28" name="Text 25"/>
-          <p:cNvSpPr/>
-          <p:nvPr/>
-        </p:nvSpPr>
-        <p:spPr>
-          <a:xfrm>
-            <a:off x="640080" y="5907024"/>
-            <a:ext cx="10911535" cy="310896"/>
+              <a:t>Installed equipment, operating rights and panel locations differ by site.</a:t>
+            </a:r>
+            <a:endParaRPr lang="en-US" sz="900" dirty="0"/>
+          </a:p>
+        </p:txBody>
+      </p:sp>
+      <p:sp>
+        <p:nvSpPr>
+          <p:cNvPr id="29" name="Text 26"/>
+          <p:cNvSpPr/>
+          <p:nvPr/>
+        </p:nvSpPr>
+        <p:spPr>
+          <a:xfrm>
+            <a:off x="640080" y="6272784"/>
+            <a:ext cx="9905695" cy="219456"/>
           </a:xfrm>
           <a:prstGeom prst="rect">
             <a:avLst/>
@@ -10218,167 +10297,88 @@
           <a:lstStyle/>
           <a:p>
             <a:pPr indent="0" marL="0">
-              <a:lnSpc>
-                <a:spcPct val="88000"/>
-              </a:lnSpc>
-              <a:buNone/>
-            </a:pPr>
-            <a:r>
-              <a:rPr lang="en-US" sz="900" b="1" dirty="0">
-                <a:solidFill>
-                  <a:srgbClr val="0D8A76"/>
-                </a:solidFill>
-                <a:latin typeface="Yu Gothic" pitchFamily="34" charset="0"/>
-                <a:ea typeface="Yu Gothic" pitchFamily="34" charset="-122"/>
-                <a:cs typeface="Yu Gothic" pitchFamily="34" charset="-120"/>
-              </a:rPr>
-              <a:t>Site SOP優先　</a:t>
-            </a:r>
-            <a:pPr indent="0" marL="0">
-              <a:lnSpc>
-                <a:spcPct val="88000"/>
-              </a:lnSpc>
+              <a:buNone/>
+            </a:pPr>
+            <a:r>
+              <a:rPr lang="en-US" sz="750" b="1" dirty="0">
+                <a:solidFill>
+                  <a:srgbClr val="D6E0E9"/>
+                </a:solidFill>
+                <a:latin typeface="Yu Gothic" pitchFamily="34" charset="0"/>
+                <a:ea typeface="Yu Gothic" pitchFamily="34" charset="-122"/>
+                <a:cs typeface="Yu Gothic" pitchFamily="34" charset="-120"/>
+              </a:rPr>
+              <a:t>ソース　</a:t>
+            </a:r>
+            <a:pPr indent="0" marL="0">
+              <a:buNone/>
+            </a:pPr>
+            <a:r>
+              <a:rPr lang="en-US" sz="750" dirty="0">
+                <a:solidFill>
+                  <a:srgbClr val="5F7183"/>
+                </a:solidFill>
+                <a:latin typeface="Yu Gothic" pitchFamily="34" charset="0"/>
+                <a:ea typeface="Yu Gothic" pitchFamily="34" charset="-122"/>
+                <a:cs typeface="Yu Gothic" pitchFamily="34" charset="-120"/>
+              </a:rPr>
+              <a:t>消防法、警備業法、警察庁「警備員教育」</a:t>
+            </a:r>
+            <a:endParaRPr lang="en-US" sz="750" dirty="0"/>
+          </a:p>
+        </p:txBody>
+      </p:sp>
+      <p:sp>
+        <p:nvSpPr>
+          <p:cNvPr id="30" name="Text 27"/>
+          <p:cNvSpPr/>
+          <p:nvPr/>
+        </p:nvSpPr>
+        <p:spPr>
+          <a:xfrm>
+            <a:off x="640080" y="6492240"/>
+            <a:ext cx="8778240" cy="292608"/>
+          </a:xfrm>
+          <a:prstGeom prst="rect">
+            <a:avLst/>
+          </a:prstGeom>
+          <a:noFill/>
+          <a:ln/>
+        </p:spPr>
+        <p:txBody>
+          <a:bodyPr wrap="square" lIns="0" tIns="0" rIns="0" bIns="0" rtlCol="0" anchor="ctr"/>
+          <a:lstStyle/>
+          <a:p>
+            <a:pPr indent="0" marL="0">
               <a:buNone/>
             </a:pPr>
             <a:r>
               <a:rPr lang="en-US" sz="900" dirty="0">
                 <a:solidFill>
-                  <a:srgbClr val="1B2733"/>
-                </a:solidFill>
-                <a:latin typeface="Yu Gothic" pitchFamily="34" charset="0"/>
-                <a:ea typeface="Yu Gothic" pitchFamily="34" charset="-122"/>
-                <a:cs typeface="Yu Gothic" pitchFamily="34" charset="-120"/>
-              </a:rPr>
-              <a:t>設置設備、操作権限、受信機の位置は現場ごとに異なる。Site SOPと設備配置図を確認する。</a:t>
+                  <a:srgbClr val="5F7183"/>
+                </a:solidFill>
+                <a:latin typeface="Yu Gothic" pitchFamily="34" charset="0"/>
+                <a:ea typeface="Yu Gothic" pitchFamily="34" charset="-122"/>
+                <a:cs typeface="Yu Gothic" pitchFamily="34" charset="-120"/>
+              </a:rPr>
+              <a:t>第10時限｜業務別教育6 警報装置その他当該警備業務を実施するために使用する機器の使用方法  </a:t>
+            </a:r>
+            <a:pPr indent="0" marL="0">
+              <a:buNone/>
+            </a:pPr>
+            <a:r>
+              <a:rPr lang="en-US" sz="850" i="1" dirty="0">
+                <a:solidFill>
+                  <a:srgbClr val="D6E0E9"/>
+                </a:solidFill>
+                <a:latin typeface="Calibri" pitchFamily="34" charset="0"/>
+                <a:ea typeface="Calibri" pitchFamily="34" charset="-122"/>
+                <a:cs typeface="Calibri" pitchFamily="34" charset="-120"/>
+              </a:rPr>
+              <a:t>Period 10 | Task-Specific Training 6 — Security Equipment</a:t>
             </a:r>
             <a:endParaRPr lang="en-US" sz="900" dirty="0"/>
           </a:p>
-          <a:p>
-            <a:pPr indent="0" marL="0">
-              <a:lnSpc>
-                <a:spcPct val="88000"/>
-              </a:lnSpc>
-              <a:buNone/>
-            </a:pPr>
-            <a:r>
-              <a:rPr lang="en-US" sz="750" i="1" dirty="0">
-                <a:solidFill>
-                  <a:srgbClr val="5F7183"/>
-                </a:solidFill>
-                <a:latin typeface="Calibri" pitchFamily="34" charset="0"/>
-                <a:ea typeface="Calibri" pitchFamily="34" charset="-122"/>
-                <a:cs typeface="Calibri" pitchFamily="34" charset="-120"/>
-              </a:rPr>
-              <a:t>Installed equipment, operating rights and panel locations differ by site.</a:t>
-            </a:r>
-            <a:endParaRPr lang="en-US" sz="900" dirty="0"/>
-          </a:p>
-        </p:txBody>
-      </p:sp>
-      <p:sp>
-        <p:nvSpPr>
-          <p:cNvPr id="29" name="Text 26"/>
-          <p:cNvSpPr/>
-          <p:nvPr/>
-        </p:nvSpPr>
-        <p:spPr>
-          <a:xfrm>
-            <a:off x="640080" y="6272784"/>
-            <a:ext cx="9905695" cy="237744"/>
-          </a:xfrm>
-          <a:prstGeom prst="rect">
-            <a:avLst/>
-          </a:prstGeom>
-          <a:noFill/>
-          <a:ln/>
-        </p:spPr>
-        <p:txBody>
-          <a:bodyPr wrap="square" lIns="0" tIns="0" rIns="0" bIns="0" rtlCol="0" anchor="t"/>
-          <a:lstStyle/>
-          <a:p>
-            <a:pPr indent="0" marL="0">
-              <a:buNone/>
-            </a:pPr>
-            <a:r>
-              <a:rPr lang="en-US" sz="750" b="1" dirty="0">
-                <a:solidFill>
-                  <a:srgbClr val="D6E0E9"/>
-                </a:solidFill>
-                <a:latin typeface="Yu Gothic" pitchFamily="34" charset="0"/>
-                <a:ea typeface="Yu Gothic" pitchFamily="34" charset="-122"/>
-                <a:cs typeface="Yu Gothic" pitchFamily="34" charset="-120"/>
-              </a:rPr>
-              <a:t>ソース　</a:t>
-            </a:r>
-            <a:pPr indent="0" marL="0">
-              <a:buNone/>
-            </a:pPr>
-            <a:r>
-              <a:rPr lang="en-US" sz="750" dirty="0">
-                <a:solidFill>
-                  <a:srgbClr val="5F7183"/>
-                </a:solidFill>
-                <a:latin typeface="Yu Gothic" pitchFamily="34" charset="0"/>
-                <a:ea typeface="Yu Gothic" pitchFamily="34" charset="-122"/>
-                <a:cs typeface="Yu Gothic" pitchFamily="34" charset="-120"/>
-              </a:rPr>
-              <a:t>消防法、警備業法、警察庁「警備員教育」</a:t>
-            </a:r>
-            <a:endParaRPr lang="en-US" sz="750" dirty="0"/>
-          </a:p>
-        </p:txBody>
-      </p:sp>
-      <p:sp>
-        <p:nvSpPr>
-          <p:cNvPr id="30" name="Text 27"/>
-          <p:cNvSpPr/>
-          <p:nvPr/>
-        </p:nvSpPr>
-        <p:spPr>
-          <a:xfrm>
-            <a:off x="640080" y="6382512"/>
-            <a:ext cx="8778240" cy="292608"/>
-          </a:xfrm>
-          <a:prstGeom prst="rect">
-            <a:avLst/>
-          </a:prstGeom>
-          <a:noFill/>
-          <a:ln/>
-        </p:spPr>
-        <p:txBody>
-          <a:bodyPr wrap="square" lIns="0" tIns="0" rIns="0" bIns="0" rtlCol="0" anchor="ctr"/>
-          <a:lstStyle/>
-          <a:p>
-            <a:pPr indent="0" marL="0">
-              <a:buNone/>
-            </a:pPr>
-            <a:r>
-              <a:rPr lang="en-US" sz="900" dirty="0">
-                <a:solidFill>
-                  <a:srgbClr val="5F7183"/>
-                </a:solidFill>
-                <a:latin typeface="Yu Gothic" pitchFamily="34" charset="0"/>
-                <a:ea typeface="Yu Gothic" pitchFamily="34" charset="-122"/>
-                <a:cs typeface="Yu Gothic" pitchFamily="34" charset="-120"/>
-              </a:rPr>
-              <a:t>第10時限｜業務別教育6 警報装置その他当該警備業務を実施するために使用する機器の使用方法  </a:t>
-            </a:r>
-            <a:pPr indent="0" marL="0">
-              <a:buNone/>
-            </a:pPr>
-            <a:r>
-              <a:rPr lang="en-US" sz="850" i="1" dirty="0">
-                <a:solidFill>
-                  <a:srgbClr val="D6E0E9"/>
-                </a:solidFill>
-                <a:latin typeface="Calibri" pitchFamily="34" charset="0"/>
-                <a:ea typeface="Calibri" pitchFamily="34" charset="-122"/>
-                <a:cs typeface="Calibri" pitchFamily="34" charset="-120"/>
-              </a:rPr>
-              <a:t>Period 10 | Task-Specific Training 6 — Security Equipment</a:t>
-            </a:r>
-            <a:endParaRPr lang="en-US" sz="900" dirty="0"/>
-          </a:p>
         </p:txBody>
       </p:sp>
       <p:sp>
@@ -10389,7 +10389,7 @@
         </p:nvSpPr>
         <p:spPr>
           <a:xfrm>
-            <a:off x="10637215" y="6382512"/>
+            <a:off x="10637215" y="6492240"/>
             <a:ext cx="914400" cy="292608"/>
           </a:xfrm>
           <a:prstGeom prst="rect">
@@ -10484,8 +10484,8 @@
         </p:nvSpPr>
         <p:spPr>
           <a:xfrm>
-            <a:off x="640080" y="384048"/>
-            <a:ext cx="8982151" cy="768096"/>
+            <a:off x="640080" y="365760"/>
+            <a:ext cx="8982151" cy="749808"/>
           </a:xfrm>
           <a:prstGeom prst="rect">
             <a:avLst/>
@@ -10524,7 +10524,7 @@
               <a:buNone/>
             </a:pPr>
             <a:r>
-              <a:rPr lang="en-US" sz="1100" i="1" dirty="0">
+              <a:rPr lang="en-US" sz="1100" dirty="0">
                 <a:solidFill>
                   <a:srgbClr val="12B198"/>
                 </a:solidFill>
@@ -10546,7 +10546,7 @@
         </p:nvSpPr>
         <p:spPr>
           <a:xfrm>
-            <a:off x="9686239" y="438912"/>
+            <a:off x="9686239" y="420624"/>
             <a:ext cx="932688" cy="310896"/>
           </a:xfrm>
           <a:prstGeom prst="roundRect">
@@ -10568,7 +10568,7 @@
         </p:nvSpPr>
         <p:spPr>
           <a:xfrm>
-            <a:off x="9686239" y="438912"/>
+            <a:off x="9686239" y="420624"/>
             <a:ext cx="932688" cy="310896"/>
           </a:xfrm>
           <a:prstGeom prst="rect">
@@ -10607,12 +10607,12 @@
         </p:nvSpPr>
         <p:spPr>
           <a:xfrm>
-            <a:off x="640080" y="1188720"/>
-            <a:ext cx="10911535" cy="530352"/>
+            <a:off x="640080" y="1115568"/>
+            <a:ext cx="10911535" cy="585216"/>
           </a:xfrm>
           <a:prstGeom prst="roundRect">
             <a:avLst>
-              <a:gd name="adj" fmla="val 6897"/>
+              <a:gd name="adj" fmla="val 6250"/>
             </a:avLst>
           </a:prstGeom>
           <a:solidFill>
@@ -10629,8 +10629,8 @@
         </p:nvSpPr>
         <p:spPr>
           <a:xfrm>
-            <a:off x="877824" y="1234440"/>
-            <a:ext cx="10436047" cy="438912"/>
+            <a:off x="877824" y="1161288"/>
+            <a:ext cx="10436047" cy="493776"/>
           </a:xfrm>
           <a:prstGeom prst="rect">
             <a:avLst/>
@@ -10666,7 +10666,7 @@
               <a:buNone/>
             </a:pPr>
             <a:r>
-              <a:rPr lang="en-US" sz="800" dirty="0">
+              <a:rPr lang="en-US" sz="900" dirty="0">
                 <a:solidFill>
                   <a:srgbClr val="0D8A76"/>
                 </a:solidFill>
@@ -10703,9 +10703,9 @@
               <a:buNone/>
             </a:pPr>
             <a:r>
-              <a:rPr lang="en-US" sz="850" i="1" dirty="0">
-                <a:solidFill>
-                  <a:srgbClr val="5F7183"/>
+              <a:rPr lang="en-US" sz="1050" dirty="0">
+                <a:solidFill>
+                  <a:srgbClr val="1B2733"/>
                 </a:solidFill>
                 <a:latin typeface="Calibri" pitchFamily="34" charset="0"/>
                 <a:ea typeface="Calibri" pitchFamily="34" charset="-122"/>
@@ -10725,12 +10725,12 @@
         </p:nvSpPr>
         <p:spPr>
           <a:xfrm>
-            <a:off x="640080" y="1810512"/>
-            <a:ext cx="5327752" cy="1920240"/>
+            <a:off x="640080" y="1773936"/>
+            <a:ext cx="5327752" cy="1965960"/>
           </a:xfrm>
           <a:prstGeom prst="roundRect">
             <a:avLst>
-              <a:gd name="adj" fmla="val 1905"/>
+              <a:gd name="adj" fmla="val 1860"/>
             </a:avLst>
           </a:prstGeom>
           <a:solidFill>
@@ -10747,7 +10747,7 @@
         </p:nvSpPr>
         <p:spPr>
           <a:xfrm>
-            <a:off x="822960" y="1975104"/>
+            <a:off x="822960" y="1938528"/>
             <a:ext cx="310896" cy="310896"/>
           </a:xfrm>
           <a:prstGeom prst="ellipse">
@@ -10767,7 +10767,7 @@
         </p:nvSpPr>
         <p:spPr>
           <a:xfrm>
-            <a:off x="822960" y="1975104"/>
+            <a:off x="822960" y="1938528"/>
             <a:ext cx="310896" cy="310896"/>
           </a:xfrm>
           <a:prstGeom prst="rect">
@@ -10806,7 +10806,7 @@
         </p:nvSpPr>
         <p:spPr>
           <a:xfrm>
-            <a:off x="1207008" y="1938528"/>
+            <a:off x="1207008" y="1901952"/>
             <a:ext cx="4559656" cy="512064"/>
           </a:xfrm>
           <a:prstGeom prst="rect">
@@ -10846,7 +10846,7 @@
               <a:buNone/>
             </a:pPr>
             <a:r>
-              <a:rPr lang="en-US" sz="800" i="1" dirty="0">
+              <a:rPr lang="en-US" sz="1050" dirty="0">
                 <a:solidFill>
                   <a:srgbClr val="12B198"/>
                 </a:solidFill>
@@ -10868,8 +10868,8 @@
         </p:nvSpPr>
         <p:spPr>
           <a:xfrm>
-            <a:off x="859536" y="2487168"/>
-            <a:ext cx="4888840" cy="1097280"/>
+            <a:off x="859536" y="2450592"/>
+            <a:ext cx="4888840" cy="1143000"/>
           </a:xfrm>
           <a:prstGeom prst="rect">
             <a:avLst/>
@@ -10914,9 +10914,9 @@
               <a:buNone/>
             </a:pPr>
             <a:r>
-              <a:rPr lang="en-US" sz="750" i="1" dirty="0">
-                <a:solidFill>
-                  <a:srgbClr val="5F7183"/>
+              <a:rPr lang="en-US" sz="950" dirty="0">
+                <a:solidFill>
+                  <a:srgbClr val="1B2733"/>
                 </a:solidFill>
                 <a:latin typeface="Calibri" pitchFamily="34" charset="0"/>
                 <a:ea typeface="Calibri" pitchFamily="34" charset="-122"/>
@@ -10960,9 +10960,9 @@
               <a:buNone/>
             </a:pPr>
             <a:r>
-              <a:rPr lang="en-US" sz="750" i="1" dirty="0">
-                <a:solidFill>
-                  <a:srgbClr val="5F7183"/>
+              <a:rPr lang="en-US" sz="950" dirty="0">
+                <a:solidFill>
+                  <a:srgbClr val="1B2733"/>
                 </a:solidFill>
                 <a:latin typeface="Calibri" pitchFamily="34" charset="0"/>
                 <a:ea typeface="Calibri" pitchFamily="34" charset="-122"/>
@@ -11006,9 +11006,9 @@
               <a:buNone/>
             </a:pPr>
             <a:r>
-              <a:rPr lang="en-US" sz="750" i="1" dirty="0">
-                <a:solidFill>
-                  <a:srgbClr val="5F7183"/>
+              <a:rPr lang="en-US" sz="950" dirty="0">
+                <a:solidFill>
+                  <a:srgbClr val="1B2733"/>
                 </a:solidFill>
                 <a:latin typeface="Calibri" pitchFamily="34" charset="0"/>
                 <a:ea typeface="Calibri" pitchFamily="34" charset="-122"/>
@@ -11052,9 +11052,9 @@
               <a:buNone/>
             </a:pPr>
             <a:r>
-              <a:rPr lang="en-US" sz="750" i="1" dirty="0">
-                <a:solidFill>
-                  <a:srgbClr val="5F7183"/>
+              <a:rPr lang="en-US" sz="950" dirty="0">
+                <a:solidFill>
+                  <a:srgbClr val="1B2733"/>
                 </a:solidFill>
                 <a:latin typeface="Calibri" pitchFamily="34" charset="0"/>
                 <a:ea typeface="Calibri" pitchFamily="34" charset="-122"/>
@@ -11074,12 +11074,12 @@
         </p:nvSpPr>
         <p:spPr>
           <a:xfrm>
-            <a:off x="6223864" y="1810512"/>
-            <a:ext cx="5327752" cy="1920240"/>
+            <a:off x="6223864" y="1773936"/>
+            <a:ext cx="5327752" cy="1965960"/>
           </a:xfrm>
           <a:prstGeom prst="roundRect">
             <a:avLst>
-              <a:gd name="adj" fmla="val 1905"/>
+              <a:gd name="adj" fmla="val 1860"/>
             </a:avLst>
           </a:prstGeom>
           <a:solidFill>
@@ -11096,7 +11096,7 @@
         </p:nvSpPr>
         <p:spPr>
           <a:xfrm>
-            <a:off x="6406744" y="1975104"/>
+            <a:off x="6406744" y="1938528"/>
             <a:ext cx="310896" cy="310896"/>
           </a:xfrm>
           <a:prstGeom prst="ellipse">
@@ -11116,7 +11116,7 @@
         </p:nvSpPr>
         <p:spPr>
           <a:xfrm>
-            <a:off x="6406744" y="1975104"/>
+            <a:off x="6406744" y="1938528"/>
             <a:ext cx="310896" cy="310896"/>
           </a:xfrm>
           <a:prstGeom prst="rect">
@@ -11155,7 +11155,7 @@
         </p:nvSpPr>
         <p:spPr>
           <a:xfrm>
-            <a:off x="6790792" y="1938528"/>
+            <a:off x="6790792" y="1901952"/>
             <a:ext cx="4559656" cy="512064"/>
           </a:xfrm>
           <a:prstGeom prst="rect">
@@ -11195,7 +11195,7 @@
               <a:buNone/>
             </a:pPr>
             <a:r>
-              <a:rPr lang="en-US" sz="800" i="1" dirty="0">
+              <a:rPr lang="en-US" sz="1050" dirty="0">
                 <a:solidFill>
                   <a:srgbClr val="12B198"/>
                 </a:solidFill>
@@ -11217,8 +11217,8 @@
         </p:nvSpPr>
         <p:spPr>
           <a:xfrm>
-            <a:off x="6443320" y="2487168"/>
-            <a:ext cx="4888840" cy="1097280"/>
+            <a:off x="6443320" y="2450592"/>
+            <a:ext cx="4888840" cy="1143000"/>
           </a:xfrm>
           <a:prstGeom prst="rect">
             <a:avLst/>
@@ -11263,9 +11263,9 @@
               <a:buNone/>
             </a:pPr>
             <a:r>
-              <a:rPr lang="en-US" sz="750" i="1" dirty="0">
-                <a:solidFill>
-                  <a:srgbClr val="5F7183"/>
+              <a:rPr lang="en-US" sz="950" dirty="0">
+                <a:solidFill>
+                  <a:srgbClr val="1B2733"/>
                 </a:solidFill>
                 <a:latin typeface="Calibri" pitchFamily="34" charset="0"/>
                 <a:ea typeface="Calibri" pitchFamily="34" charset="-122"/>
@@ -11309,9 +11309,9 @@
               <a:buNone/>
             </a:pPr>
             <a:r>
-              <a:rPr lang="en-US" sz="750" i="1" dirty="0">
-                <a:solidFill>
-                  <a:srgbClr val="5F7183"/>
+              <a:rPr lang="en-US" sz="950" dirty="0">
+                <a:solidFill>
+                  <a:srgbClr val="1B2733"/>
                 </a:solidFill>
                 <a:latin typeface="Calibri" pitchFamily="34" charset="0"/>
                 <a:ea typeface="Calibri" pitchFamily="34" charset="-122"/>
@@ -11355,9 +11355,9 @@
               <a:buNone/>
             </a:pPr>
             <a:r>
-              <a:rPr lang="en-US" sz="750" i="1" dirty="0">
-                <a:solidFill>
-                  <a:srgbClr val="5F7183"/>
+              <a:rPr lang="en-US" sz="950" dirty="0">
+                <a:solidFill>
+                  <a:srgbClr val="1B2733"/>
                 </a:solidFill>
                 <a:latin typeface="Calibri" pitchFamily="34" charset="0"/>
                 <a:ea typeface="Calibri" pitchFamily="34" charset="-122"/>
@@ -11401,9 +11401,9 @@
               <a:buNone/>
             </a:pPr>
             <a:r>
-              <a:rPr lang="en-US" sz="750" i="1" dirty="0">
-                <a:solidFill>
-                  <a:srgbClr val="5F7183"/>
+              <a:rPr lang="en-US" sz="950" dirty="0">
+                <a:solidFill>
+                  <a:srgbClr val="1B2733"/>
                 </a:solidFill>
                 <a:latin typeface="Calibri" pitchFamily="34" charset="0"/>
                 <a:ea typeface="Calibri" pitchFamily="34" charset="-122"/>
@@ -11423,12 +11423,12 @@
         </p:nvSpPr>
         <p:spPr>
           <a:xfrm>
-            <a:off x="640080" y="3931920"/>
-            <a:ext cx="5327752" cy="1920240"/>
+            <a:off x="640080" y="3941064"/>
+            <a:ext cx="5327752" cy="1965960"/>
           </a:xfrm>
           <a:prstGeom prst="roundRect">
             <a:avLst>
-              <a:gd name="adj" fmla="val 1905"/>
+              <a:gd name="adj" fmla="val 1860"/>
             </a:avLst>
           </a:prstGeom>
           <a:solidFill>
@@ -11445,7 +11445,7 @@
         </p:nvSpPr>
         <p:spPr>
           <a:xfrm>
-            <a:off x="822960" y="4096512"/>
+            <a:off x="822960" y="4105656"/>
             <a:ext cx="310896" cy="310896"/>
           </a:xfrm>
           <a:prstGeom prst="ellipse">
@@ -11465,7 +11465,7 @@
         </p:nvSpPr>
         <p:spPr>
           <a:xfrm>
-            <a:off x="822960" y="4096512"/>
+            <a:off x="822960" y="4105656"/>
             <a:ext cx="310896" cy="310896"/>
           </a:xfrm>
           <a:prstGeom prst="rect">
@@ -11504,7 +11504,7 @@
         </p:nvSpPr>
         <p:spPr>
           <a:xfrm>
-            <a:off x="1207008" y="4059936"/>
+            <a:off x="1207008" y="4069080"/>
             <a:ext cx="4559656" cy="512064"/>
           </a:xfrm>
           <a:prstGeom prst="rect">
@@ -11544,7 +11544,7 @@
               <a:buNone/>
             </a:pPr>
             <a:r>
-              <a:rPr lang="en-US" sz="800" i="1" dirty="0">
+              <a:rPr lang="en-US" sz="1050" dirty="0">
                 <a:solidFill>
                   <a:srgbClr val="12B198"/>
                 </a:solidFill>
@@ -11566,8 +11566,8 @@
         </p:nvSpPr>
         <p:spPr>
           <a:xfrm>
-            <a:off x="859536" y="4608576"/>
-            <a:ext cx="4888840" cy="1097280"/>
+            <a:off x="859536" y="4617720"/>
+            <a:ext cx="4888840" cy="1143000"/>
           </a:xfrm>
           <a:prstGeom prst="rect">
             <a:avLst/>
@@ -11612,9 +11612,9 @@
               <a:buNone/>
             </a:pPr>
             <a:r>
-              <a:rPr lang="en-US" sz="750" i="1" dirty="0">
-                <a:solidFill>
-                  <a:srgbClr val="5F7183"/>
+              <a:rPr lang="en-US" sz="950" dirty="0">
+                <a:solidFill>
+                  <a:srgbClr val="1B2733"/>
                 </a:solidFill>
                 <a:latin typeface="Calibri" pitchFamily="34" charset="0"/>
                 <a:ea typeface="Calibri" pitchFamily="34" charset="-122"/>
@@ -11658,9 +11658,9 @@
               <a:buNone/>
             </a:pPr>
             <a:r>
-              <a:rPr lang="en-US" sz="750" i="1" dirty="0">
-                <a:solidFill>
-                  <a:srgbClr val="5F7183"/>
+              <a:rPr lang="en-US" sz="950" dirty="0">
+                <a:solidFill>
+                  <a:srgbClr val="1B2733"/>
                 </a:solidFill>
                 <a:latin typeface="Calibri" pitchFamily="34" charset="0"/>
                 <a:ea typeface="Calibri" pitchFamily="34" charset="-122"/>
@@ -11704,9 +11704,9 @@
               <a:buNone/>
             </a:pPr>
             <a:r>
-              <a:rPr lang="en-US" sz="750" i="1" dirty="0">
-                <a:solidFill>
-                  <a:srgbClr val="5F7183"/>
+              <a:rPr lang="en-US" sz="950" dirty="0">
+                <a:solidFill>
+                  <a:srgbClr val="1B2733"/>
                 </a:solidFill>
                 <a:latin typeface="Calibri" pitchFamily="34" charset="0"/>
                 <a:ea typeface="Calibri" pitchFamily="34" charset="-122"/>
@@ -11750,9 +11750,9 @@
               <a:buNone/>
             </a:pPr>
             <a:r>
-              <a:rPr lang="en-US" sz="750" i="1" dirty="0">
-                <a:solidFill>
-                  <a:srgbClr val="5F7183"/>
+              <a:rPr lang="en-US" sz="950" dirty="0">
+                <a:solidFill>
+                  <a:srgbClr val="1B2733"/>
                 </a:solidFill>
                 <a:latin typeface="Calibri" pitchFamily="34" charset="0"/>
                 <a:ea typeface="Calibri" pitchFamily="34" charset="-122"/>
@@ -11772,12 +11772,12 @@
         </p:nvSpPr>
         <p:spPr>
           <a:xfrm>
-            <a:off x="6223864" y="3931920"/>
-            <a:ext cx="5327752" cy="1920240"/>
+            <a:off x="6223864" y="3941064"/>
+            <a:ext cx="5327752" cy="1965960"/>
           </a:xfrm>
           <a:prstGeom prst="roundRect">
             <a:avLst>
-              <a:gd name="adj" fmla="val 1905"/>
+              <a:gd name="adj" fmla="val 1860"/>
             </a:avLst>
           </a:prstGeom>
           <a:solidFill>
@@ -11794,7 +11794,7 @@
         </p:nvSpPr>
         <p:spPr>
           <a:xfrm>
-            <a:off x="6406744" y="4096512"/>
+            <a:off x="6406744" y="4105656"/>
             <a:ext cx="310896" cy="310896"/>
           </a:xfrm>
           <a:prstGeom prst="ellipse">
@@ -11814,7 +11814,7 @@
         </p:nvSpPr>
         <p:spPr>
           <a:xfrm>
-            <a:off x="6406744" y="4096512"/>
+            <a:off x="6406744" y="4105656"/>
             <a:ext cx="310896" cy="310896"/>
           </a:xfrm>
           <a:prstGeom prst="rect">
@@ -11853,7 +11853,7 @@
         </p:nvSpPr>
         <p:spPr>
           <a:xfrm>
-            <a:off x="6790792" y="4059936"/>
+            <a:off x="6790792" y="4069080"/>
             <a:ext cx="4559656" cy="512064"/>
           </a:xfrm>
           <a:prstGeom prst="rect">
@@ -11893,7 +11893,7 @@
               <a:buNone/>
             </a:pPr>
             <a:r>
-              <a:rPr lang="en-US" sz="800" i="1" dirty="0">
+              <a:rPr lang="en-US" sz="1050" dirty="0">
                 <a:solidFill>
                   <a:srgbClr val="12B198"/>
                 </a:solidFill>
@@ -11915,8 +11915,8 @@
         </p:nvSpPr>
         <p:spPr>
           <a:xfrm>
-            <a:off x="6443320" y="4608576"/>
-            <a:ext cx="4888840" cy="1097280"/>
+            <a:off x="6443320" y="4617720"/>
+            <a:ext cx="4888840" cy="1143000"/>
           </a:xfrm>
           <a:prstGeom prst="rect">
             <a:avLst/>
@@ -11961,9 +11961,9 @@
               <a:buNone/>
             </a:pPr>
             <a:r>
-              <a:rPr lang="en-US" sz="750" i="1" dirty="0">
-                <a:solidFill>
-                  <a:srgbClr val="5F7183"/>
+              <a:rPr lang="en-US" sz="950" dirty="0">
+                <a:solidFill>
+                  <a:srgbClr val="1B2733"/>
                 </a:solidFill>
                 <a:latin typeface="Calibri" pitchFamily="34" charset="0"/>
                 <a:ea typeface="Calibri" pitchFamily="34" charset="-122"/>
@@ -12007,9 +12007,9 @@
               <a:buNone/>
             </a:pPr>
             <a:r>
-              <a:rPr lang="en-US" sz="750" i="1" dirty="0">
-                <a:solidFill>
-                  <a:srgbClr val="5F7183"/>
+              <a:rPr lang="en-US" sz="950" dirty="0">
+                <a:solidFill>
+                  <a:srgbClr val="1B2733"/>
                 </a:solidFill>
                 <a:latin typeface="Calibri" pitchFamily="34" charset="0"/>
                 <a:ea typeface="Calibri" pitchFamily="34" charset="-122"/>
@@ -12053,9 +12053,9 @@
               <a:buNone/>
             </a:pPr>
             <a:r>
-              <a:rPr lang="en-US" sz="750" i="1" dirty="0">
-                <a:solidFill>
-                  <a:srgbClr val="5F7183"/>
+              <a:rPr lang="en-US" sz="950" dirty="0">
+                <a:solidFill>
+                  <a:srgbClr val="1B2733"/>
                 </a:solidFill>
                 <a:latin typeface="Calibri" pitchFamily="34" charset="0"/>
                 <a:ea typeface="Calibri" pitchFamily="34" charset="-122"/>
@@ -12099,7 +12099,86 @@
               <a:buNone/>
             </a:pPr>
             <a:r>
-              <a:rPr lang="en-US" sz="750" i="1" dirty="0">
+              <a:rPr lang="en-US" sz="950" dirty="0">
+                <a:solidFill>
+                  <a:srgbClr val="1B2733"/>
+                </a:solidFill>
+                <a:latin typeface="Calibri" pitchFamily="34" charset="0"/>
+                <a:ea typeface="Calibri" pitchFamily="34" charset="-122"/>
+                <a:cs typeface="Calibri" pitchFamily="34" charset="-120"/>
+              </a:rPr>
+              <a:t>  When in doubt, act as though it is a fire</a:t>
+            </a:r>
+            <a:endParaRPr lang="en-US" sz="950" dirty="0"/>
+          </a:p>
+        </p:txBody>
+      </p:sp>
+      <p:sp>
+        <p:nvSpPr>
+          <p:cNvPr id="28" name="Text 25"/>
+          <p:cNvSpPr/>
+          <p:nvPr/>
+        </p:nvSpPr>
+        <p:spPr>
+          <a:xfrm>
+            <a:off x="640080" y="5961888"/>
+            <a:ext cx="10911535" cy="292608"/>
+          </a:xfrm>
+          <a:prstGeom prst="rect">
+            <a:avLst/>
+          </a:prstGeom>
+          <a:noFill/>
+          <a:ln/>
+        </p:spPr>
+        <p:txBody>
+          <a:bodyPr wrap="square" lIns="0" tIns="0" rIns="0" bIns="0" rtlCol="0" anchor="t"/>
+          <a:lstStyle/>
+          <a:p>
+            <a:pPr indent="0" marL="0">
+              <a:lnSpc>
+                <a:spcPct val="88000"/>
+              </a:lnSpc>
+              <a:buNone/>
+            </a:pPr>
+            <a:r>
+              <a:rPr lang="en-US" sz="900" b="1" dirty="0">
+                <a:solidFill>
+                  <a:srgbClr val="0D8A76"/>
+                </a:solidFill>
+                <a:latin typeface="Yu Gothic" pitchFamily="34" charset="0"/>
+                <a:ea typeface="Yu Gothic" pitchFamily="34" charset="-122"/>
+                <a:cs typeface="Yu Gothic" pitchFamily="34" charset="-120"/>
+              </a:rPr>
+              <a:t>Site SOP優先　</a:t>
+            </a:r>
+            <a:pPr indent="0" marL="0">
+              <a:lnSpc>
+                <a:spcPct val="88000"/>
+              </a:lnSpc>
+              <a:buNone/>
+            </a:pPr>
+            <a:r>
+              <a:rPr lang="en-US" sz="900" dirty="0">
+                <a:solidFill>
+                  <a:srgbClr val="1B2733"/>
+                </a:solidFill>
+                <a:latin typeface="Yu Gothic" pitchFamily="34" charset="0"/>
+                <a:ea typeface="Yu Gothic" pitchFamily="34" charset="-122"/>
+                <a:cs typeface="Yu Gothic" pitchFamily="34" charset="-120"/>
+              </a:rPr>
+              <a:t>現場確認の人数、通報の判断者、非常放送の操作権限は現場ごとに定められている。Site SOPによる。</a:t>
+            </a:r>
+            <a:endParaRPr lang="en-US" sz="900" dirty="0"/>
+          </a:p>
+          <a:p>
+            <a:pPr indent="0" marL="0">
+              <a:lnSpc>
+                <a:spcPct val="88000"/>
+              </a:lnSpc>
+              <a:buNone/>
+            </a:pPr>
+            <a:r>
+              <a:rPr lang="en-US" sz="800" i="1" dirty="0">
                 <a:solidFill>
                   <a:srgbClr val="5F7183"/>
                 </a:solidFill>
@@ -12107,22 +12186,22 @@
                 <a:ea typeface="Calibri" pitchFamily="34" charset="-122"/>
                 <a:cs typeface="Calibri" pitchFamily="34" charset="-120"/>
               </a:rPr>
-              <a:t>  When in doubt, act as though it is a fire</a:t>
-            </a:r>
-            <a:endParaRPr lang="en-US" sz="950" dirty="0"/>
-          </a:p>
-        </p:txBody>
-      </p:sp>
-      <p:sp>
-        <p:nvSpPr>
-          <p:cNvPr id="28" name="Text 25"/>
-          <p:cNvSpPr/>
-          <p:nvPr/>
-        </p:nvSpPr>
-        <p:spPr>
-          <a:xfrm>
-            <a:off x="640080" y="5907024"/>
-            <a:ext cx="10911535" cy="310896"/>
+              <a:t>How many go to verify, who decides on the call, and who may operate the PA are set per site.</a:t>
+            </a:r>
+            <a:endParaRPr lang="en-US" sz="900" dirty="0"/>
+          </a:p>
+        </p:txBody>
+      </p:sp>
+      <p:sp>
+        <p:nvSpPr>
+          <p:cNvPr id="29" name="Text 26"/>
+          <p:cNvSpPr/>
+          <p:nvPr/>
+        </p:nvSpPr>
+        <p:spPr>
+          <a:xfrm>
+            <a:off x="640080" y="6272784"/>
+            <a:ext cx="9905695" cy="219456"/>
           </a:xfrm>
           <a:prstGeom prst="rect">
             <a:avLst/>
@@ -12135,167 +12214,88 @@
           <a:lstStyle/>
           <a:p>
             <a:pPr indent="0" marL="0">
-              <a:lnSpc>
-                <a:spcPct val="88000"/>
-              </a:lnSpc>
-              <a:buNone/>
-            </a:pPr>
-            <a:r>
-              <a:rPr lang="en-US" sz="900" b="1" dirty="0">
-                <a:solidFill>
-                  <a:srgbClr val="0D8A76"/>
-                </a:solidFill>
-                <a:latin typeface="Yu Gothic" pitchFamily="34" charset="0"/>
-                <a:ea typeface="Yu Gothic" pitchFamily="34" charset="-122"/>
-                <a:cs typeface="Yu Gothic" pitchFamily="34" charset="-120"/>
-              </a:rPr>
-              <a:t>Site SOP優先　</a:t>
-            </a:r>
-            <a:pPr indent="0" marL="0">
-              <a:lnSpc>
-                <a:spcPct val="88000"/>
-              </a:lnSpc>
+              <a:buNone/>
+            </a:pPr>
+            <a:r>
+              <a:rPr lang="en-US" sz="750" b="1" dirty="0">
+                <a:solidFill>
+                  <a:srgbClr val="D6E0E9"/>
+                </a:solidFill>
+                <a:latin typeface="Yu Gothic" pitchFamily="34" charset="0"/>
+                <a:ea typeface="Yu Gothic" pitchFamily="34" charset="-122"/>
+                <a:cs typeface="Yu Gothic" pitchFamily="34" charset="-120"/>
+              </a:rPr>
+              <a:t>ソース　</a:t>
+            </a:r>
+            <a:pPr indent="0" marL="0">
+              <a:buNone/>
+            </a:pPr>
+            <a:r>
+              <a:rPr lang="en-US" sz="750" dirty="0">
+                <a:solidFill>
+                  <a:srgbClr val="5F7183"/>
+                </a:solidFill>
+                <a:latin typeface="Yu Gothic" pitchFamily="34" charset="0"/>
+                <a:ea typeface="Yu Gothic" pitchFamily="34" charset="-122"/>
+                <a:cs typeface="Yu Gothic" pitchFamily="34" charset="-120"/>
+              </a:rPr>
+              <a:t>消防法、警備業法、警察庁「警備員教育」</a:t>
+            </a:r>
+            <a:endParaRPr lang="en-US" sz="750" dirty="0"/>
+          </a:p>
+        </p:txBody>
+      </p:sp>
+      <p:sp>
+        <p:nvSpPr>
+          <p:cNvPr id="30" name="Text 27"/>
+          <p:cNvSpPr/>
+          <p:nvPr/>
+        </p:nvSpPr>
+        <p:spPr>
+          <a:xfrm>
+            <a:off x="640080" y="6492240"/>
+            <a:ext cx="8778240" cy="292608"/>
+          </a:xfrm>
+          <a:prstGeom prst="rect">
+            <a:avLst/>
+          </a:prstGeom>
+          <a:noFill/>
+          <a:ln/>
+        </p:spPr>
+        <p:txBody>
+          <a:bodyPr wrap="square" lIns="0" tIns="0" rIns="0" bIns="0" rtlCol="0" anchor="ctr"/>
+          <a:lstStyle/>
+          <a:p>
+            <a:pPr indent="0" marL="0">
               <a:buNone/>
             </a:pPr>
             <a:r>
               <a:rPr lang="en-US" sz="900" dirty="0">
                 <a:solidFill>
-                  <a:srgbClr val="1B2733"/>
-                </a:solidFill>
-                <a:latin typeface="Yu Gothic" pitchFamily="34" charset="0"/>
-                <a:ea typeface="Yu Gothic" pitchFamily="34" charset="-122"/>
-                <a:cs typeface="Yu Gothic" pitchFamily="34" charset="-120"/>
-              </a:rPr>
-              <a:t>現場確認の人数、通報の判断者、非常放送の操作権限は現場ごとに定められている。Site SOPによる。</a:t>
+                  <a:srgbClr val="5F7183"/>
+                </a:solidFill>
+                <a:latin typeface="Yu Gothic" pitchFamily="34" charset="0"/>
+                <a:ea typeface="Yu Gothic" pitchFamily="34" charset="-122"/>
+                <a:cs typeface="Yu Gothic" pitchFamily="34" charset="-120"/>
+              </a:rPr>
+              <a:t>第10時限｜業務別教育6 警報装置その他当該警備業務を実施するために使用する機器の使用方法  </a:t>
+            </a:r>
+            <a:pPr indent="0" marL="0">
+              <a:buNone/>
+            </a:pPr>
+            <a:r>
+              <a:rPr lang="en-US" sz="850" i="1" dirty="0">
+                <a:solidFill>
+                  <a:srgbClr val="D6E0E9"/>
+                </a:solidFill>
+                <a:latin typeface="Calibri" pitchFamily="34" charset="0"/>
+                <a:ea typeface="Calibri" pitchFamily="34" charset="-122"/>
+                <a:cs typeface="Calibri" pitchFamily="34" charset="-120"/>
+              </a:rPr>
+              <a:t>Period 10 | Task-Specific Training 6 — Security Equipment</a:t>
             </a:r>
             <a:endParaRPr lang="en-US" sz="900" dirty="0"/>
           </a:p>
-          <a:p>
-            <a:pPr indent="0" marL="0">
-              <a:lnSpc>
-                <a:spcPct val="88000"/>
-              </a:lnSpc>
-              <a:buNone/>
-            </a:pPr>
-            <a:r>
-              <a:rPr lang="en-US" sz="750" i="1" dirty="0">
-                <a:solidFill>
-                  <a:srgbClr val="5F7183"/>
-                </a:solidFill>
-                <a:latin typeface="Calibri" pitchFamily="34" charset="0"/>
-                <a:ea typeface="Calibri" pitchFamily="34" charset="-122"/>
-                <a:cs typeface="Calibri" pitchFamily="34" charset="-120"/>
-              </a:rPr>
-              <a:t>How many go to verify, who decides on the call, and who may operate the PA are set per site.</a:t>
-            </a:r>
-            <a:endParaRPr lang="en-US" sz="900" dirty="0"/>
-          </a:p>
-        </p:txBody>
-      </p:sp>
-      <p:sp>
-        <p:nvSpPr>
-          <p:cNvPr id="29" name="Text 26"/>
-          <p:cNvSpPr/>
-          <p:nvPr/>
-        </p:nvSpPr>
-        <p:spPr>
-          <a:xfrm>
-            <a:off x="640080" y="6272784"/>
-            <a:ext cx="9905695" cy="237744"/>
-          </a:xfrm>
-          <a:prstGeom prst="rect">
-            <a:avLst/>
-          </a:prstGeom>
-          <a:noFill/>
-          <a:ln/>
-        </p:spPr>
-        <p:txBody>
-          <a:bodyPr wrap="square" lIns="0" tIns="0" rIns="0" bIns="0" rtlCol="0" anchor="t"/>
-          <a:lstStyle/>
-          <a:p>
-            <a:pPr indent="0" marL="0">
-              <a:buNone/>
-            </a:pPr>
-            <a:r>
-              <a:rPr lang="en-US" sz="750" b="1" dirty="0">
-                <a:solidFill>
-                  <a:srgbClr val="D6E0E9"/>
-                </a:solidFill>
-                <a:latin typeface="Yu Gothic" pitchFamily="34" charset="0"/>
-                <a:ea typeface="Yu Gothic" pitchFamily="34" charset="-122"/>
-                <a:cs typeface="Yu Gothic" pitchFamily="34" charset="-120"/>
-              </a:rPr>
-              <a:t>ソース　</a:t>
-            </a:r>
-            <a:pPr indent="0" marL="0">
-              <a:buNone/>
-            </a:pPr>
-            <a:r>
-              <a:rPr lang="en-US" sz="750" dirty="0">
-                <a:solidFill>
-                  <a:srgbClr val="5F7183"/>
-                </a:solidFill>
-                <a:latin typeface="Yu Gothic" pitchFamily="34" charset="0"/>
-                <a:ea typeface="Yu Gothic" pitchFamily="34" charset="-122"/>
-                <a:cs typeface="Yu Gothic" pitchFamily="34" charset="-120"/>
-              </a:rPr>
-              <a:t>消防法、警備業法、警察庁「警備員教育」</a:t>
-            </a:r>
-            <a:endParaRPr lang="en-US" sz="750" dirty="0"/>
-          </a:p>
-        </p:txBody>
-      </p:sp>
-      <p:sp>
-        <p:nvSpPr>
-          <p:cNvPr id="30" name="Text 27"/>
-          <p:cNvSpPr/>
-          <p:nvPr/>
-        </p:nvSpPr>
-        <p:spPr>
-          <a:xfrm>
-            <a:off x="640080" y="6382512"/>
-            <a:ext cx="8778240" cy="292608"/>
-          </a:xfrm>
-          <a:prstGeom prst="rect">
-            <a:avLst/>
-          </a:prstGeom>
-          <a:noFill/>
-          <a:ln/>
-        </p:spPr>
-        <p:txBody>
-          <a:bodyPr wrap="square" lIns="0" tIns="0" rIns="0" bIns="0" rtlCol="0" anchor="ctr"/>
-          <a:lstStyle/>
-          <a:p>
-            <a:pPr indent="0" marL="0">
-              <a:buNone/>
-            </a:pPr>
-            <a:r>
-              <a:rPr lang="en-US" sz="900" dirty="0">
-                <a:solidFill>
-                  <a:srgbClr val="5F7183"/>
-                </a:solidFill>
-                <a:latin typeface="Yu Gothic" pitchFamily="34" charset="0"/>
-                <a:ea typeface="Yu Gothic" pitchFamily="34" charset="-122"/>
-                <a:cs typeface="Yu Gothic" pitchFamily="34" charset="-120"/>
-              </a:rPr>
-              <a:t>第10時限｜業務別教育6 警報装置その他当該警備業務を実施するために使用する機器の使用方法  </a:t>
-            </a:r>
-            <a:pPr indent="0" marL="0">
-              <a:buNone/>
-            </a:pPr>
-            <a:r>
-              <a:rPr lang="en-US" sz="850" i="1" dirty="0">
-                <a:solidFill>
-                  <a:srgbClr val="D6E0E9"/>
-                </a:solidFill>
-                <a:latin typeface="Calibri" pitchFamily="34" charset="0"/>
-                <a:ea typeface="Calibri" pitchFamily="34" charset="-122"/>
-                <a:cs typeface="Calibri" pitchFamily="34" charset="-120"/>
-              </a:rPr>
-              <a:t>Period 10 | Task-Specific Training 6 — Security Equipment</a:t>
-            </a:r>
-            <a:endParaRPr lang="en-US" sz="900" dirty="0"/>
-          </a:p>
         </p:txBody>
       </p:sp>
       <p:sp>
@@ -12306,7 +12306,7 @@
         </p:nvSpPr>
         <p:spPr>
           <a:xfrm>
-            <a:off x="10637215" y="6382512"/>
+            <a:off x="10637215" y="6492240"/>
             <a:ext cx="914400" cy="292608"/>
           </a:xfrm>
           <a:prstGeom prst="rect">
@@ -12401,8 +12401,8 @@
         </p:nvSpPr>
         <p:spPr>
           <a:xfrm>
-            <a:off x="640080" y="384048"/>
-            <a:ext cx="8982151" cy="768096"/>
+            <a:off x="640080" y="365760"/>
+            <a:ext cx="8982151" cy="749808"/>
           </a:xfrm>
           <a:prstGeom prst="rect">
             <a:avLst/>
@@ -12441,7 +12441,7 @@
               <a:buNone/>
             </a:pPr>
             <a:r>
-              <a:rPr lang="en-US" sz="1100" i="1" dirty="0">
+              <a:rPr lang="en-US" sz="1100" dirty="0">
                 <a:solidFill>
                   <a:srgbClr val="12B198"/>
                 </a:solidFill>
@@ -12463,7 +12463,7 @@
         </p:nvSpPr>
         <p:spPr>
           <a:xfrm>
-            <a:off x="9686239" y="438912"/>
+            <a:off x="9686239" y="420624"/>
             <a:ext cx="932688" cy="310896"/>
           </a:xfrm>
           <a:prstGeom prst="roundRect">
@@ -12485,7 +12485,7 @@
         </p:nvSpPr>
         <p:spPr>
           <a:xfrm>
-            <a:off x="9686239" y="438912"/>
+            <a:off x="9686239" y="420624"/>
             <a:ext cx="932688" cy="310896"/>
           </a:xfrm>
           <a:prstGeom prst="rect">
@@ -12524,12 +12524,12 @@
         </p:nvSpPr>
         <p:spPr>
           <a:xfrm>
-            <a:off x="640080" y="1188720"/>
-            <a:ext cx="10911535" cy="530352"/>
+            <a:off x="640080" y="1115568"/>
+            <a:ext cx="10911535" cy="585216"/>
           </a:xfrm>
           <a:prstGeom prst="roundRect">
             <a:avLst>
-              <a:gd name="adj" fmla="val 6897"/>
+              <a:gd name="adj" fmla="val 6250"/>
             </a:avLst>
           </a:prstGeom>
           <a:solidFill>
@@ -12546,8 +12546,8 @@
         </p:nvSpPr>
         <p:spPr>
           <a:xfrm>
-            <a:off x="877824" y="1234440"/>
-            <a:ext cx="10436047" cy="438912"/>
+            <a:off x="877824" y="1161288"/>
+            <a:ext cx="10436047" cy="493776"/>
           </a:xfrm>
           <a:prstGeom prst="rect">
             <a:avLst/>
@@ -12583,7 +12583,7 @@
               <a:buNone/>
             </a:pPr>
             <a:r>
-              <a:rPr lang="en-US" sz="800" dirty="0">
+              <a:rPr lang="en-US" sz="900" dirty="0">
                 <a:solidFill>
                   <a:srgbClr val="0D8A76"/>
                 </a:solidFill>
@@ -12620,9 +12620,9 @@
               <a:buNone/>
             </a:pPr>
             <a:r>
-              <a:rPr lang="en-US" sz="850" i="1" dirty="0">
-                <a:solidFill>
-                  <a:srgbClr val="5F7183"/>
+              <a:rPr lang="en-US" sz="1050" dirty="0">
+                <a:solidFill>
+                  <a:srgbClr val="1B2733"/>
                 </a:solidFill>
                 <a:latin typeface="Calibri" pitchFamily="34" charset="0"/>
                 <a:ea typeface="Calibri" pitchFamily="34" charset="-122"/>
@@ -12642,12 +12642,12 @@
         </p:nvSpPr>
         <p:spPr>
           <a:xfrm>
-            <a:off x="640080" y="1810512"/>
-            <a:ext cx="5327752" cy="1920240"/>
+            <a:off x="640080" y="1773936"/>
+            <a:ext cx="5327752" cy="1965960"/>
           </a:xfrm>
           <a:prstGeom prst="roundRect">
             <a:avLst>
-              <a:gd name="adj" fmla="val 1905"/>
+              <a:gd name="adj" fmla="val 1860"/>
             </a:avLst>
           </a:prstGeom>
           <a:solidFill>
@@ -12664,7 +12664,7 @@
         </p:nvSpPr>
         <p:spPr>
           <a:xfrm>
-            <a:off x="822960" y="1975104"/>
+            <a:off x="822960" y="1938528"/>
             <a:ext cx="310896" cy="310896"/>
           </a:xfrm>
           <a:prstGeom prst="ellipse">
@@ -12684,7 +12684,7 @@
         </p:nvSpPr>
         <p:spPr>
           <a:xfrm>
-            <a:off x="822960" y="1975104"/>
+            <a:off x="822960" y="1938528"/>
             <a:ext cx="310896" cy="310896"/>
           </a:xfrm>
           <a:prstGeom prst="rect">
@@ -12723,7 +12723,7 @@
         </p:nvSpPr>
         <p:spPr>
           <a:xfrm>
-            <a:off x="1207008" y="1938528"/>
+            <a:off x="1207008" y="1901952"/>
             <a:ext cx="4559656" cy="512064"/>
           </a:xfrm>
           <a:prstGeom prst="rect">
@@ -12763,7 +12763,7 @@
               <a:buNone/>
             </a:pPr>
             <a:r>
-              <a:rPr lang="en-US" sz="800" i="1" dirty="0">
+              <a:rPr lang="en-US" sz="1050" dirty="0">
                 <a:solidFill>
                   <a:srgbClr val="12B198"/>
                 </a:solidFill>
@@ -12785,8 +12785,8 @@
         </p:nvSpPr>
         <p:spPr>
           <a:xfrm>
-            <a:off x="859536" y="2487168"/>
-            <a:ext cx="4888840" cy="1097280"/>
+            <a:off x="859536" y="2450592"/>
+            <a:ext cx="4888840" cy="1143000"/>
           </a:xfrm>
           <a:prstGeom prst="rect">
             <a:avLst/>
@@ -12831,9 +12831,9 @@
               <a:buNone/>
             </a:pPr>
             <a:r>
-              <a:rPr lang="en-US" sz="750" i="1" dirty="0">
-                <a:solidFill>
-                  <a:srgbClr val="5F7183"/>
+              <a:rPr lang="en-US" sz="950" dirty="0">
+                <a:solidFill>
+                  <a:srgbClr val="1B2733"/>
                 </a:solidFill>
                 <a:latin typeface="Calibri" pitchFamily="34" charset="0"/>
                 <a:ea typeface="Calibri" pitchFamily="34" charset="-122"/>
@@ -12877,9 +12877,9 @@
               <a:buNone/>
             </a:pPr>
             <a:r>
-              <a:rPr lang="en-US" sz="750" i="1" dirty="0">
-                <a:solidFill>
-                  <a:srgbClr val="5F7183"/>
+              <a:rPr lang="en-US" sz="950" dirty="0">
+                <a:solidFill>
+                  <a:srgbClr val="1B2733"/>
                 </a:solidFill>
                 <a:latin typeface="Calibri" pitchFamily="34" charset="0"/>
                 <a:ea typeface="Calibri" pitchFamily="34" charset="-122"/>
@@ -12923,9 +12923,9 @@
               <a:buNone/>
             </a:pPr>
             <a:r>
-              <a:rPr lang="en-US" sz="750" i="1" dirty="0">
-                <a:solidFill>
-                  <a:srgbClr val="5F7183"/>
+              <a:rPr lang="en-US" sz="950" dirty="0">
+                <a:solidFill>
+                  <a:srgbClr val="1B2733"/>
                 </a:solidFill>
                 <a:latin typeface="Calibri" pitchFamily="34" charset="0"/>
                 <a:ea typeface="Calibri" pitchFamily="34" charset="-122"/>
@@ -12969,9 +12969,9 @@
               <a:buNone/>
             </a:pPr>
             <a:r>
-              <a:rPr lang="en-US" sz="750" i="1" dirty="0">
-                <a:solidFill>
-                  <a:srgbClr val="5F7183"/>
+              <a:rPr lang="en-US" sz="950" dirty="0">
+                <a:solidFill>
+                  <a:srgbClr val="1B2733"/>
                 </a:solidFill>
                 <a:latin typeface="Calibri" pitchFamily="34" charset="0"/>
                 <a:ea typeface="Calibri" pitchFamily="34" charset="-122"/>
@@ -12991,12 +12991,12 @@
         </p:nvSpPr>
         <p:spPr>
           <a:xfrm>
-            <a:off x="6223864" y="1810512"/>
-            <a:ext cx="5327752" cy="1920240"/>
+            <a:off x="6223864" y="1773936"/>
+            <a:ext cx="5327752" cy="1965960"/>
           </a:xfrm>
           <a:prstGeom prst="roundRect">
             <a:avLst>
-              <a:gd name="adj" fmla="val 1905"/>
+              <a:gd name="adj" fmla="val 1860"/>
             </a:avLst>
           </a:prstGeom>
           <a:solidFill>
@@ -13013,7 +13013,7 @@
         </p:nvSpPr>
         <p:spPr>
           <a:xfrm>
-            <a:off x="6406744" y="1975104"/>
+            <a:off x="6406744" y="1938528"/>
             <a:ext cx="310896" cy="310896"/>
           </a:xfrm>
           <a:prstGeom prst="ellipse">
@@ -13033,7 +13033,7 @@
         </p:nvSpPr>
         <p:spPr>
           <a:xfrm>
-            <a:off x="6406744" y="1975104"/>
+            <a:off x="6406744" y="1938528"/>
             <a:ext cx="310896" cy="310896"/>
           </a:xfrm>
           <a:prstGeom prst="rect">
@@ -13072,7 +13072,7 @@
         </p:nvSpPr>
         <p:spPr>
           <a:xfrm>
-            <a:off x="6790792" y="1938528"/>
+            <a:off x="6790792" y="1901952"/>
             <a:ext cx="4559656" cy="512064"/>
           </a:xfrm>
           <a:prstGeom prst="rect">
@@ -13112,7 +13112,7 @@
               <a:buNone/>
             </a:pPr>
             <a:r>
-              <a:rPr lang="en-US" sz="800" i="1" dirty="0">
+              <a:rPr lang="en-US" sz="1050" dirty="0">
                 <a:solidFill>
                   <a:srgbClr val="12B198"/>
                 </a:solidFill>
@@ -13134,8 +13134,8 @@
         </p:nvSpPr>
         <p:spPr>
           <a:xfrm>
-            <a:off x="6443320" y="2487168"/>
-            <a:ext cx="4888840" cy="1097280"/>
+            <a:off x="6443320" y="2450592"/>
+            <a:ext cx="4888840" cy="1143000"/>
           </a:xfrm>
           <a:prstGeom prst="rect">
             <a:avLst/>
@@ -13180,9 +13180,9 @@
               <a:buNone/>
             </a:pPr>
             <a:r>
-              <a:rPr lang="en-US" sz="750" i="1" dirty="0">
-                <a:solidFill>
-                  <a:srgbClr val="5F7183"/>
+              <a:rPr lang="en-US" sz="950" dirty="0">
+                <a:solidFill>
+                  <a:srgbClr val="1B2733"/>
                 </a:solidFill>
                 <a:latin typeface="Calibri" pitchFamily="34" charset="0"/>
                 <a:ea typeface="Calibri" pitchFamily="34" charset="-122"/>
@@ -13226,9 +13226,9 @@
               <a:buNone/>
             </a:pPr>
             <a:r>
-              <a:rPr lang="en-US" sz="750" i="1" dirty="0">
-                <a:solidFill>
-                  <a:srgbClr val="5F7183"/>
+              <a:rPr lang="en-US" sz="950" dirty="0">
+                <a:solidFill>
+                  <a:srgbClr val="1B2733"/>
                 </a:solidFill>
                 <a:latin typeface="Calibri" pitchFamily="34" charset="0"/>
                 <a:ea typeface="Calibri" pitchFamily="34" charset="-122"/>
@@ -13272,9 +13272,9 @@
               <a:buNone/>
             </a:pPr>
             <a:r>
-              <a:rPr lang="en-US" sz="750" i="1" dirty="0">
-                <a:solidFill>
-                  <a:srgbClr val="5F7183"/>
+              <a:rPr lang="en-US" sz="950" dirty="0">
+                <a:solidFill>
+                  <a:srgbClr val="1B2733"/>
                 </a:solidFill>
                 <a:latin typeface="Calibri" pitchFamily="34" charset="0"/>
                 <a:ea typeface="Calibri" pitchFamily="34" charset="-122"/>
@@ -13318,9 +13318,9 @@
               <a:buNone/>
             </a:pPr>
             <a:r>
-              <a:rPr lang="en-US" sz="750" i="1" dirty="0">
-                <a:solidFill>
-                  <a:srgbClr val="5F7183"/>
+              <a:rPr lang="en-US" sz="950" dirty="0">
+                <a:solidFill>
+                  <a:srgbClr val="1B2733"/>
                 </a:solidFill>
                 <a:latin typeface="Calibri" pitchFamily="34" charset="0"/>
                 <a:ea typeface="Calibri" pitchFamily="34" charset="-122"/>
@@ -13340,12 +13340,12 @@
         </p:nvSpPr>
         <p:spPr>
           <a:xfrm>
-            <a:off x="640080" y="3931920"/>
-            <a:ext cx="5327752" cy="1920240"/>
+            <a:off x="640080" y="3941064"/>
+            <a:ext cx="5327752" cy="1965960"/>
           </a:xfrm>
           <a:prstGeom prst="roundRect">
             <a:avLst>
-              <a:gd name="adj" fmla="val 1905"/>
+              <a:gd name="adj" fmla="val 1860"/>
             </a:avLst>
           </a:prstGeom>
           <a:solidFill>
@@ -13362,7 +13362,7 @@
         </p:nvSpPr>
         <p:spPr>
           <a:xfrm>
-            <a:off x="822960" y="4096512"/>
+            <a:off x="822960" y="4105656"/>
             <a:ext cx="310896" cy="310896"/>
           </a:xfrm>
           <a:prstGeom prst="ellipse">
@@ -13382,7 +13382,7 @@
         </p:nvSpPr>
         <p:spPr>
           <a:xfrm>
-            <a:off x="822960" y="4096512"/>
+            <a:off x="822960" y="4105656"/>
             <a:ext cx="310896" cy="310896"/>
           </a:xfrm>
           <a:prstGeom prst="rect">
@@ -13421,7 +13421,7 @@
         </p:nvSpPr>
         <p:spPr>
           <a:xfrm>
-            <a:off x="1207008" y="4059936"/>
+            <a:off x="1207008" y="4069080"/>
             <a:ext cx="4559656" cy="512064"/>
           </a:xfrm>
           <a:prstGeom prst="rect">
@@ -13461,7 +13461,7 @@
               <a:buNone/>
             </a:pPr>
             <a:r>
-              <a:rPr lang="en-US" sz="800" i="1" dirty="0">
+              <a:rPr lang="en-US" sz="1050" dirty="0">
                 <a:solidFill>
                   <a:srgbClr val="12B198"/>
                 </a:solidFill>
@@ -13483,8 +13483,8 @@
         </p:nvSpPr>
         <p:spPr>
           <a:xfrm>
-            <a:off x="859536" y="4608576"/>
-            <a:ext cx="4888840" cy="1097280"/>
+            <a:off x="859536" y="4617720"/>
+            <a:ext cx="4888840" cy="1143000"/>
           </a:xfrm>
           <a:prstGeom prst="rect">
             <a:avLst/>
@@ -13529,9 +13529,9 @@
               <a:buNone/>
             </a:pPr>
             <a:r>
-              <a:rPr lang="en-US" sz="750" i="1" dirty="0">
-                <a:solidFill>
-                  <a:srgbClr val="5F7183"/>
+              <a:rPr lang="en-US" sz="950" dirty="0">
+                <a:solidFill>
+                  <a:srgbClr val="1B2733"/>
                 </a:solidFill>
                 <a:latin typeface="Calibri" pitchFamily="34" charset="0"/>
                 <a:ea typeface="Calibri" pitchFamily="34" charset="-122"/>
@@ -13575,9 +13575,9 @@
               <a:buNone/>
             </a:pPr>
             <a:r>
-              <a:rPr lang="en-US" sz="750" i="1" dirty="0">
-                <a:solidFill>
-                  <a:srgbClr val="5F7183"/>
+              <a:rPr lang="en-US" sz="950" dirty="0">
+                <a:solidFill>
+                  <a:srgbClr val="1B2733"/>
                 </a:solidFill>
                 <a:latin typeface="Calibri" pitchFamily="34" charset="0"/>
                 <a:ea typeface="Calibri" pitchFamily="34" charset="-122"/>
@@ -13621,9 +13621,9 @@
               <a:buNone/>
             </a:pPr>
             <a:r>
-              <a:rPr lang="en-US" sz="750" i="1" dirty="0">
-                <a:solidFill>
-                  <a:srgbClr val="5F7183"/>
+              <a:rPr lang="en-US" sz="950" dirty="0">
+                <a:solidFill>
+                  <a:srgbClr val="1B2733"/>
                 </a:solidFill>
                 <a:latin typeface="Calibri" pitchFamily="34" charset="0"/>
                 <a:ea typeface="Calibri" pitchFamily="34" charset="-122"/>
@@ -13667,9 +13667,9 @@
               <a:buNone/>
             </a:pPr>
             <a:r>
-              <a:rPr lang="en-US" sz="750" i="1" dirty="0">
-                <a:solidFill>
-                  <a:srgbClr val="5F7183"/>
+              <a:rPr lang="en-US" sz="950" dirty="0">
+                <a:solidFill>
+                  <a:srgbClr val="1B2733"/>
                 </a:solidFill>
                 <a:latin typeface="Calibri" pitchFamily="34" charset="0"/>
                 <a:ea typeface="Calibri" pitchFamily="34" charset="-122"/>
@@ -13689,12 +13689,12 @@
         </p:nvSpPr>
         <p:spPr>
           <a:xfrm>
-            <a:off x="6223864" y="3931920"/>
-            <a:ext cx="5327752" cy="1920240"/>
+            <a:off x="6223864" y="3941064"/>
+            <a:ext cx="5327752" cy="1965960"/>
           </a:xfrm>
           <a:prstGeom prst="roundRect">
             <a:avLst>
-              <a:gd name="adj" fmla="val 1905"/>
+              <a:gd name="adj" fmla="val 1860"/>
             </a:avLst>
           </a:prstGeom>
           <a:solidFill>
@@ -13711,7 +13711,7 @@
         </p:nvSpPr>
         <p:spPr>
           <a:xfrm>
-            <a:off x="6406744" y="4096512"/>
+            <a:off x="6406744" y="4105656"/>
             <a:ext cx="310896" cy="310896"/>
           </a:xfrm>
           <a:prstGeom prst="ellipse">
@@ -13731,7 +13731,7 @@
         </p:nvSpPr>
         <p:spPr>
           <a:xfrm>
-            <a:off x="6406744" y="4096512"/>
+            <a:off x="6406744" y="4105656"/>
             <a:ext cx="310896" cy="310896"/>
           </a:xfrm>
           <a:prstGeom prst="rect">
@@ -13770,7 +13770,7 @@
         </p:nvSpPr>
         <p:spPr>
           <a:xfrm>
-            <a:off x="6790792" y="4059936"/>
+            <a:off x="6790792" y="4069080"/>
             <a:ext cx="4559656" cy="512064"/>
           </a:xfrm>
           <a:prstGeom prst="rect">
@@ -13810,7 +13810,7 @@
               <a:buNone/>
             </a:pPr>
             <a:r>
-              <a:rPr lang="en-US" sz="800" i="1" dirty="0">
+              <a:rPr lang="en-US" sz="1050" dirty="0">
                 <a:solidFill>
                   <a:srgbClr val="12B198"/>
                 </a:solidFill>
@@ -13832,8 +13832,8 @@
         </p:nvSpPr>
         <p:spPr>
           <a:xfrm>
-            <a:off x="6443320" y="4608576"/>
-            <a:ext cx="4888840" cy="1097280"/>
+            <a:off x="6443320" y="4617720"/>
+            <a:ext cx="4888840" cy="1143000"/>
           </a:xfrm>
           <a:prstGeom prst="rect">
             <a:avLst/>
@@ -13878,9 +13878,9 @@
               <a:buNone/>
             </a:pPr>
             <a:r>
-              <a:rPr lang="en-US" sz="750" i="1" dirty="0">
-                <a:solidFill>
-                  <a:srgbClr val="5F7183"/>
+              <a:rPr lang="en-US" sz="950" dirty="0">
+                <a:solidFill>
+                  <a:srgbClr val="1B2733"/>
                 </a:solidFill>
                 <a:latin typeface="Calibri" pitchFamily="34" charset="0"/>
                 <a:ea typeface="Calibri" pitchFamily="34" charset="-122"/>
@@ -13924,9 +13924,9 @@
               <a:buNone/>
             </a:pPr>
             <a:r>
-              <a:rPr lang="en-US" sz="750" i="1" dirty="0">
-                <a:solidFill>
-                  <a:srgbClr val="5F7183"/>
+              <a:rPr lang="en-US" sz="950" dirty="0">
+                <a:solidFill>
+                  <a:srgbClr val="1B2733"/>
                 </a:solidFill>
                 <a:latin typeface="Calibri" pitchFamily="34" charset="0"/>
                 <a:ea typeface="Calibri" pitchFamily="34" charset="-122"/>
@@ -13970,9 +13970,9 @@
               <a:buNone/>
             </a:pPr>
             <a:r>
-              <a:rPr lang="en-US" sz="750" i="1" dirty="0">
-                <a:solidFill>
-                  <a:srgbClr val="5F7183"/>
+              <a:rPr lang="en-US" sz="950" dirty="0">
+                <a:solidFill>
+                  <a:srgbClr val="1B2733"/>
                 </a:solidFill>
                 <a:latin typeface="Calibri" pitchFamily="34" charset="0"/>
                 <a:ea typeface="Calibri" pitchFamily="34" charset="-122"/>
@@ -14016,7 +14016,86 @@
               <a:buNone/>
             </a:pPr>
             <a:r>
-              <a:rPr lang="en-US" sz="750" i="1" dirty="0">
+              <a:rPr lang="en-US" sz="950" dirty="0">
+                <a:solidFill>
+                  <a:srgbClr val="1B2733"/>
+                </a:solidFill>
+                <a:latin typeface="Calibri" pitchFamily="34" charset="0"/>
+                <a:ea typeface="Calibri" pitchFamily="34" charset="-122"/>
+                <a:cs typeface="Calibri" pitchFamily="34" charset="-120"/>
+              </a:rPr>
+              <a:t>  Reference only: NATO and Japanese phonetic alphabets</a:t>
+            </a:r>
+            <a:endParaRPr lang="en-US" sz="950" dirty="0"/>
+          </a:p>
+        </p:txBody>
+      </p:sp>
+      <p:sp>
+        <p:nvSpPr>
+          <p:cNvPr id="28" name="Text 25"/>
+          <p:cNvSpPr/>
+          <p:nvPr/>
+        </p:nvSpPr>
+        <p:spPr>
+          <a:xfrm>
+            <a:off x="640080" y="5961888"/>
+            <a:ext cx="10911535" cy="292608"/>
+          </a:xfrm>
+          <a:prstGeom prst="rect">
+            <a:avLst/>
+          </a:prstGeom>
+          <a:noFill/>
+          <a:ln/>
+        </p:spPr>
+        <p:txBody>
+          <a:bodyPr wrap="square" lIns="0" tIns="0" rIns="0" bIns="0" rtlCol="0" anchor="t"/>
+          <a:lstStyle/>
+          <a:p>
+            <a:pPr indent="0" marL="0">
+              <a:lnSpc>
+                <a:spcPct val="88000"/>
+              </a:lnSpc>
+              <a:buNone/>
+            </a:pPr>
+            <a:r>
+              <a:rPr lang="en-US" sz="900" b="1" dirty="0">
+                <a:solidFill>
+                  <a:srgbClr val="0D8A76"/>
+                </a:solidFill>
+                <a:latin typeface="Yu Gothic" pitchFamily="34" charset="0"/>
+                <a:ea typeface="Yu Gothic" pitchFamily="34" charset="-122"/>
+                <a:cs typeface="Yu Gothic" pitchFamily="34" charset="-120"/>
+              </a:rPr>
+              <a:t>Site SOP優先　</a:t>
+            </a:r>
+            <a:pPr indent="0" marL="0">
+              <a:lnSpc>
+                <a:spcPct val="88000"/>
+              </a:lnSpc>
+              <a:buNone/>
+            </a:pPr>
+            <a:r>
+              <a:rPr lang="en-US" sz="900" dirty="0">
+                <a:solidFill>
+                  <a:srgbClr val="1B2733"/>
+                </a:solidFill>
+                <a:latin typeface="Yu Gothic" pitchFamily="34" charset="0"/>
+                <a:ea typeface="Yu Gothic" pitchFamily="34" charset="-122"/>
+                <a:cs typeface="Yu Gothic" pitchFamily="34" charset="-120"/>
+              </a:rPr>
+              <a:t>避難誘導の担当区分と、無線の呼出符号は現場ごとに定められている。Site SOPによる。</a:t>
+            </a:r>
+            <a:endParaRPr lang="en-US" sz="900" dirty="0"/>
+          </a:p>
+          <a:p>
+            <a:pPr indent="0" marL="0">
+              <a:lnSpc>
+                <a:spcPct val="88000"/>
+              </a:lnSpc>
+              <a:buNone/>
+            </a:pPr>
+            <a:r>
+              <a:rPr lang="en-US" sz="800" i="1" dirty="0">
                 <a:solidFill>
                   <a:srgbClr val="5F7183"/>
                 </a:solidFill>
@@ -14024,22 +14103,22 @@
                 <a:ea typeface="Calibri" pitchFamily="34" charset="-122"/>
                 <a:cs typeface="Calibri" pitchFamily="34" charset="-120"/>
               </a:rPr>
-              <a:t>  Reference only: NATO and Japanese phonetic alphabets</a:t>
-            </a:r>
-            <a:endParaRPr lang="en-US" sz="950" dirty="0"/>
-          </a:p>
-        </p:txBody>
-      </p:sp>
-      <p:sp>
-        <p:nvSpPr>
-          <p:cNvPr id="28" name="Text 25"/>
-          <p:cNvSpPr/>
-          <p:nvPr/>
-        </p:nvSpPr>
-        <p:spPr>
-          <a:xfrm>
-            <a:off x="640080" y="5907024"/>
-            <a:ext cx="10911535" cy="310896"/>
+              <a:t>Evacuation responsibilities and radio call signs are set per site.</a:t>
+            </a:r>
+            <a:endParaRPr lang="en-US" sz="900" dirty="0"/>
+          </a:p>
+        </p:txBody>
+      </p:sp>
+      <p:sp>
+        <p:nvSpPr>
+          <p:cNvPr id="29" name="Text 26"/>
+          <p:cNvSpPr/>
+          <p:nvPr/>
+        </p:nvSpPr>
+        <p:spPr>
+          <a:xfrm>
+            <a:off x="640080" y="6272784"/>
+            <a:ext cx="9905695" cy="219456"/>
           </a:xfrm>
           <a:prstGeom prst="rect">
             <a:avLst/>
@@ -14052,167 +14131,88 @@
           <a:lstStyle/>
           <a:p>
             <a:pPr indent="0" marL="0">
-              <a:lnSpc>
-                <a:spcPct val="88000"/>
-              </a:lnSpc>
-              <a:buNone/>
-            </a:pPr>
-            <a:r>
-              <a:rPr lang="en-US" sz="900" b="1" dirty="0">
-                <a:solidFill>
-                  <a:srgbClr val="0D8A76"/>
-                </a:solidFill>
-                <a:latin typeface="Yu Gothic" pitchFamily="34" charset="0"/>
-                <a:ea typeface="Yu Gothic" pitchFamily="34" charset="-122"/>
-                <a:cs typeface="Yu Gothic" pitchFamily="34" charset="-120"/>
-              </a:rPr>
-              <a:t>Site SOP優先　</a:t>
-            </a:r>
-            <a:pPr indent="0" marL="0">
-              <a:lnSpc>
-                <a:spcPct val="88000"/>
-              </a:lnSpc>
+              <a:buNone/>
+            </a:pPr>
+            <a:r>
+              <a:rPr lang="en-US" sz="750" b="1" dirty="0">
+                <a:solidFill>
+                  <a:srgbClr val="D6E0E9"/>
+                </a:solidFill>
+                <a:latin typeface="Yu Gothic" pitchFamily="34" charset="0"/>
+                <a:ea typeface="Yu Gothic" pitchFamily="34" charset="-122"/>
+                <a:cs typeface="Yu Gothic" pitchFamily="34" charset="-120"/>
+              </a:rPr>
+              <a:t>ソース　</a:t>
+            </a:r>
+            <a:pPr indent="0" marL="0">
+              <a:buNone/>
+            </a:pPr>
+            <a:r>
+              <a:rPr lang="en-US" sz="750" dirty="0">
+                <a:solidFill>
+                  <a:srgbClr val="5F7183"/>
+                </a:solidFill>
+                <a:latin typeface="Yu Gothic" pitchFamily="34" charset="0"/>
+                <a:ea typeface="Yu Gothic" pitchFamily="34" charset="-122"/>
+                <a:cs typeface="Yu Gothic" pitchFamily="34" charset="-120"/>
+              </a:rPr>
+              <a:t>消防法、警備業法、警察庁「警備員教育」</a:t>
+            </a:r>
+            <a:endParaRPr lang="en-US" sz="750" dirty="0"/>
+          </a:p>
+        </p:txBody>
+      </p:sp>
+      <p:sp>
+        <p:nvSpPr>
+          <p:cNvPr id="30" name="Text 27"/>
+          <p:cNvSpPr/>
+          <p:nvPr/>
+        </p:nvSpPr>
+        <p:spPr>
+          <a:xfrm>
+            <a:off x="640080" y="6492240"/>
+            <a:ext cx="8778240" cy="292608"/>
+          </a:xfrm>
+          <a:prstGeom prst="rect">
+            <a:avLst/>
+          </a:prstGeom>
+          <a:noFill/>
+          <a:ln/>
+        </p:spPr>
+        <p:txBody>
+          <a:bodyPr wrap="square" lIns="0" tIns="0" rIns="0" bIns="0" rtlCol="0" anchor="ctr"/>
+          <a:lstStyle/>
+          <a:p>
+            <a:pPr indent="0" marL="0">
               <a:buNone/>
             </a:pPr>
             <a:r>
               <a:rPr lang="en-US" sz="900" dirty="0">
                 <a:solidFill>
-                  <a:srgbClr val="1B2733"/>
-                </a:solidFill>
-                <a:latin typeface="Yu Gothic" pitchFamily="34" charset="0"/>
-                <a:ea typeface="Yu Gothic" pitchFamily="34" charset="-122"/>
-                <a:cs typeface="Yu Gothic" pitchFamily="34" charset="-120"/>
-              </a:rPr>
-              <a:t>避難誘導の担当区分と、無線の呼出符号は現場ごとに定められている。Site SOPによる。</a:t>
+                  <a:srgbClr val="5F7183"/>
+                </a:solidFill>
+                <a:latin typeface="Yu Gothic" pitchFamily="34" charset="0"/>
+                <a:ea typeface="Yu Gothic" pitchFamily="34" charset="-122"/>
+                <a:cs typeface="Yu Gothic" pitchFamily="34" charset="-120"/>
+              </a:rPr>
+              <a:t>第10時限｜業務別教育6 警報装置その他当該警備業務を実施するために使用する機器の使用方法  </a:t>
+            </a:r>
+            <a:pPr indent="0" marL="0">
+              <a:buNone/>
+            </a:pPr>
+            <a:r>
+              <a:rPr lang="en-US" sz="850" i="1" dirty="0">
+                <a:solidFill>
+                  <a:srgbClr val="D6E0E9"/>
+                </a:solidFill>
+                <a:latin typeface="Calibri" pitchFamily="34" charset="0"/>
+                <a:ea typeface="Calibri" pitchFamily="34" charset="-122"/>
+                <a:cs typeface="Calibri" pitchFamily="34" charset="-120"/>
+              </a:rPr>
+              <a:t>Period 10 | Task-Specific Training 6 — Security Equipment</a:t>
             </a:r>
             <a:endParaRPr lang="en-US" sz="900" dirty="0"/>
           </a:p>
-          <a:p>
-            <a:pPr indent="0" marL="0">
-              <a:lnSpc>
-                <a:spcPct val="88000"/>
-              </a:lnSpc>
-              <a:buNone/>
-            </a:pPr>
-            <a:r>
-              <a:rPr lang="en-US" sz="750" i="1" dirty="0">
-                <a:solidFill>
-                  <a:srgbClr val="5F7183"/>
-                </a:solidFill>
-                <a:latin typeface="Calibri" pitchFamily="34" charset="0"/>
-                <a:ea typeface="Calibri" pitchFamily="34" charset="-122"/>
-                <a:cs typeface="Calibri" pitchFamily="34" charset="-120"/>
-              </a:rPr>
-              <a:t>Evacuation responsibilities and radio call signs are set per site.</a:t>
-            </a:r>
-            <a:endParaRPr lang="en-US" sz="900" dirty="0"/>
-          </a:p>
-        </p:txBody>
-      </p:sp>
-      <p:sp>
-        <p:nvSpPr>
-          <p:cNvPr id="29" name="Text 26"/>
-          <p:cNvSpPr/>
-          <p:nvPr/>
-        </p:nvSpPr>
-        <p:spPr>
-          <a:xfrm>
-            <a:off x="640080" y="6272784"/>
-            <a:ext cx="9905695" cy="237744"/>
-          </a:xfrm>
-          <a:prstGeom prst="rect">
-            <a:avLst/>
-          </a:prstGeom>
-          <a:noFill/>
-          <a:ln/>
-        </p:spPr>
-        <p:txBody>
-          <a:bodyPr wrap="square" lIns="0" tIns="0" rIns="0" bIns="0" rtlCol="0" anchor="t"/>
-          <a:lstStyle/>
-          <a:p>
-            <a:pPr indent="0" marL="0">
-              <a:buNone/>
-            </a:pPr>
-            <a:r>
-              <a:rPr lang="en-US" sz="750" b="1" dirty="0">
-                <a:solidFill>
-                  <a:srgbClr val="D6E0E9"/>
-                </a:solidFill>
-                <a:latin typeface="Yu Gothic" pitchFamily="34" charset="0"/>
-                <a:ea typeface="Yu Gothic" pitchFamily="34" charset="-122"/>
-                <a:cs typeface="Yu Gothic" pitchFamily="34" charset="-120"/>
-              </a:rPr>
-              <a:t>ソース　</a:t>
-            </a:r>
-            <a:pPr indent="0" marL="0">
-              <a:buNone/>
-            </a:pPr>
-            <a:r>
-              <a:rPr lang="en-US" sz="750" dirty="0">
-                <a:solidFill>
-                  <a:srgbClr val="5F7183"/>
-                </a:solidFill>
-                <a:latin typeface="Yu Gothic" pitchFamily="34" charset="0"/>
-                <a:ea typeface="Yu Gothic" pitchFamily="34" charset="-122"/>
-                <a:cs typeface="Yu Gothic" pitchFamily="34" charset="-120"/>
-              </a:rPr>
-              <a:t>消防法、警備業法、警察庁「警備員教育」</a:t>
-            </a:r>
-            <a:endParaRPr lang="en-US" sz="750" dirty="0"/>
-          </a:p>
-        </p:txBody>
-      </p:sp>
-      <p:sp>
-        <p:nvSpPr>
-          <p:cNvPr id="30" name="Text 27"/>
-          <p:cNvSpPr/>
-          <p:nvPr/>
-        </p:nvSpPr>
-        <p:spPr>
-          <a:xfrm>
-            <a:off x="640080" y="6382512"/>
-            <a:ext cx="8778240" cy="292608"/>
-          </a:xfrm>
-          <a:prstGeom prst="rect">
-            <a:avLst/>
-          </a:prstGeom>
-          <a:noFill/>
-          <a:ln/>
-        </p:spPr>
-        <p:txBody>
-          <a:bodyPr wrap="square" lIns="0" tIns="0" rIns="0" bIns="0" rtlCol="0" anchor="ctr"/>
-          <a:lstStyle/>
-          <a:p>
-            <a:pPr indent="0" marL="0">
-              <a:buNone/>
-            </a:pPr>
-            <a:r>
-              <a:rPr lang="en-US" sz="900" dirty="0">
-                <a:solidFill>
-                  <a:srgbClr val="5F7183"/>
-                </a:solidFill>
-                <a:latin typeface="Yu Gothic" pitchFamily="34" charset="0"/>
-                <a:ea typeface="Yu Gothic" pitchFamily="34" charset="-122"/>
-                <a:cs typeface="Yu Gothic" pitchFamily="34" charset="-120"/>
-              </a:rPr>
-              <a:t>第10時限｜業務別教育6 警報装置その他当該警備業務を実施するために使用する機器の使用方法  </a:t>
-            </a:r>
-            <a:pPr indent="0" marL="0">
-              <a:buNone/>
-            </a:pPr>
-            <a:r>
-              <a:rPr lang="en-US" sz="850" i="1" dirty="0">
-                <a:solidFill>
-                  <a:srgbClr val="D6E0E9"/>
-                </a:solidFill>
-                <a:latin typeface="Calibri" pitchFamily="34" charset="0"/>
-                <a:ea typeface="Calibri" pitchFamily="34" charset="-122"/>
-                <a:cs typeface="Calibri" pitchFamily="34" charset="-120"/>
-              </a:rPr>
-              <a:t>Period 10 | Task-Specific Training 6 — Security Equipment</a:t>
-            </a:r>
-            <a:endParaRPr lang="en-US" sz="900" dirty="0"/>
-          </a:p>
         </p:txBody>
       </p:sp>
       <p:sp>
@@ -14223,7 +14223,7 @@
         </p:nvSpPr>
         <p:spPr>
           <a:xfrm>
-            <a:off x="10637215" y="6382512"/>
+            <a:off x="10637215" y="6492240"/>
             <a:ext cx="914400" cy="292608"/>
           </a:xfrm>
           <a:prstGeom prst="rect">
@@ -14318,8 +14318,8 @@
         </p:nvSpPr>
         <p:spPr>
           <a:xfrm>
-            <a:off x="640080" y="384048"/>
-            <a:ext cx="8982151" cy="768096"/>
+            <a:off x="640080" y="365760"/>
+            <a:ext cx="8982151" cy="749808"/>
           </a:xfrm>
           <a:prstGeom prst="rect">
             <a:avLst/>
@@ -14358,7 +14358,7 @@
               <a:buNone/>
             </a:pPr>
             <a:r>
-              <a:rPr lang="en-US" sz="1100" i="1" dirty="0">
+              <a:rPr lang="en-US" sz="1100" dirty="0">
                 <a:solidFill>
                   <a:srgbClr val="12B198"/>
                 </a:solidFill>
@@ -14380,7 +14380,7 @@
         </p:nvSpPr>
         <p:spPr>
           <a:xfrm>
-            <a:off x="9686239" y="438912"/>
+            <a:off x="9686239" y="420624"/>
             <a:ext cx="932688" cy="310896"/>
           </a:xfrm>
           <a:prstGeom prst="roundRect">
@@ -14402,7 +14402,7 @@
         </p:nvSpPr>
         <p:spPr>
           <a:xfrm>
-            <a:off x="9686239" y="438912"/>
+            <a:off x="9686239" y="420624"/>
             <a:ext cx="932688" cy="310896"/>
           </a:xfrm>
           <a:prstGeom prst="rect">
@@ -14441,12 +14441,12 @@
         </p:nvSpPr>
         <p:spPr>
           <a:xfrm>
-            <a:off x="640080" y="1188720"/>
-            <a:ext cx="10911535" cy="530352"/>
+            <a:off x="640080" y="1115568"/>
+            <a:ext cx="10911535" cy="585216"/>
           </a:xfrm>
           <a:prstGeom prst="roundRect">
             <a:avLst>
-              <a:gd name="adj" fmla="val 6897"/>
+              <a:gd name="adj" fmla="val 6250"/>
             </a:avLst>
           </a:prstGeom>
           <a:solidFill>
@@ -14463,8 +14463,8 @@
         </p:nvSpPr>
         <p:spPr>
           <a:xfrm>
-            <a:off x="877824" y="1234440"/>
-            <a:ext cx="10436047" cy="438912"/>
+            <a:off x="877824" y="1161288"/>
+            <a:ext cx="10436047" cy="493776"/>
           </a:xfrm>
           <a:prstGeom prst="rect">
             <a:avLst/>
@@ -14500,7 +14500,7 @@
               <a:buNone/>
             </a:pPr>
             <a:r>
-              <a:rPr lang="en-US" sz="800" dirty="0">
+              <a:rPr lang="en-US" sz="900" dirty="0">
                 <a:solidFill>
                   <a:srgbClr val="0D8A76"/>
                 </a:solidFill>
@@ -14537,9 +14537,9 @@
               <a:buNone/>
             </a:pPr>
             <a:r>
-              <a:rPr lang="en-US" sz="850" i="1" dirty="0">
-                <a:solidFill>
-                  <a:srgbClr val="5F7183"/>
+              <a:rPr lang="en-US" sz="1050" dirty="0">
+                <a:solidFill>
+                  <a:srgbClr val="1B2733"/>
                 </a:solidFill>
                 <a:latin typeface="Calibri" pitchFamily="34" charset="0"/>
                 <a:ea typeface="Calibri" pitchFamily="34" charset="-122"/>
@@ -14559,12 +14559,12 @@
         </p:nvSpPr>
         <p:spPr>
           <a:xfrm>
-            <a:off x="640080" y="1810512"/>
-            <a:ext cx="5327752" cy="1920240"/>
+            <a:off x="640080" y="1773936"/>
+            <a:ext cx="5327752" cy="1965960"/>
           </a:xfrm>
           <a:prstGeom prst="roundRect">
             <a:avLst>
-              <a:gd name="adj" fmla="val 1905"/>
+              <a:gd name="adj" fmla="val 1860"/>
             </a:avLst>
           </a:prstGeom>
           <a:solidFill>
@@ -14581,7 +14581,7 @@
         </p:nvSpPr>
         <p:spPr>
           <a:xfrm>
-            <a:off x="822960" y="1975104"/>
+            <a:off x="822960" y="1938528"/>
             <a:ext cx="310896" cy="310896"/>
           </a:xfrm>
           <a:prstGeom prst="ellipse">
@@ -14601,7 +14601,7 @@
         </p:nvSpPr>
         <p:spPr>
           <a:xfrm>
-            <a:off x="822960" y="1975104"/>
+            <a:off x="822960" y="1938528"/>
             <a:ext cx="310896" cy="310896"/>
           </a:xfrm>
           <a:prstGeom prst="rect">
@@ -14640,7 +14640,7 @@
         </p:nvSpPr>
         <p:spPr>
           <a:xfrm>
-            <a:off x="1207008" y="1938528"/>
+            <a:off x="1207008" y="1901952"/>
             <a:ext cx="4559656" cy="512064"/>
           </a:xfrm>
           <a:prstGeom prst="rect">
@@ -14680,7 +14680,7 @@
               <a:buNone/>
             </a:pPr>
             <a:r>
-              <a:rPr lang="en-US" sz="800" i="1" dirty="0">
+              <a:rPr lang="en-US" sz="1050" dirty="0">
                 <a:solidFill>
                   <a:srgbClr val="12B198"/>
                 </a:solidFill>
@@ -14702,8 +14702,8 @@
         </p:nvSpPr>
         <p:spPr>
           <a:xfrm>
-            <a:off x="859536" y="2487168"/>
-            <a:ext cx="4888840" cy="1097280"/>
+            <a:off x="859536" y="2450592"/>
+            <a:ext cx="4888840" cy="1143000"/>
           </a:xfrm>
           <a:prstGeom prst="rect">
             <a:avLst/>
@@ -14748,9 +14748,9 @@
               <a:buNone/>
             </a:pPr>
             <a:r>
-              <a:rPr lang="en-US" sz="750" i="1" dirty="0">
-                <a:solidFill>
-                  <a:srgbClr val="5F7183"/>
+              <a:rPr lang="en-US" sz="950" dirty="0">
+                <a:solidFill>
+                  <a:srgbClr val="1B2733"/>
                 </a:solidFill>
                 <a:latin typeface="Calibri" pitchFamily="34" charset="0"/>
                 <a:ea typeface="Calibri" pitchFamily="34" charset="-122"/>
@@ -14794,9 +14794,9 @@
               <a:buNone/>
             </a:pPr>
             <a:r>
-              <a:rPr lang="en-US" sz="750" i="1" dirty="0">
-                <a:solidFill>
-                  <a:srgbClr val="5F7183"/>
+              <a:rPr lang="en-US" sz="950" dirty="0">
+                <a:solidFill>
+                  <a:srgbClr val="1B2733"/>
                 </a:solidFill>
                 <a:latin typeface="Calibri" pitchFamily="34" charset="0"/>
                 <a:ea typeface="Calibri" pitchFamily="34" charset="-122"/>
@@ -14840,9 +14840,9 @@
               <a:buNone/>
             </a:pPr>
             <a:r>
-              <a:rPr lang="en-US" sz="750" i="1" dirty="0">
-                <a:solidFill>
-                  <a:srgbClr val="5F7183"/>
+              <a:rPr lang="en-US" sz="950" dirty="0">
+                <a:solidFill>
+                  <a:srgbClr val="1B2733"/>
                 </a:solidFill>
                 <a:latin typeface="Calibri" pitchFamily="34" charset="0"/>
                 <a:ea typeface="Calibri" pitchFamily="34" charset="-122"/>
@@ -14886,9 +14886,9 @@
               <a:buNone/>
             </a:pPr>
             <a:r>
-              <a:rPr lang="en-US" sz="750" i="1" dirty="0">
-                <a:solidFill>
-                  <a:srgbClr val="5F7183"/>
+              <a:rPr lang="en-US" sz="950" dirty="0">
+                <a:solidFill>
+                  <a:srgbClr val="1B2733"/>
                 </a:solidFill>
                 <a:latin typeface="Calibri" pitchFamily="34" charset="0"/>
                 <a:ea typeface="Calibri" pitchFamily="34" charset="-122"/>
@@ -14908,12 +14908,12 @@
         </p:nvSpPr>
         <p:spPr>
           <a:xfrm>
-            <a:off x="6223864" y="1810512"/>
-            <a:ext cx="5327752" cy="1920240"/>
+            <a:off x="6223864" y="1773936"/>
+            <a:ext cx="5327752" cy="1965960"/>
           </a:xfrm>
           <a:prstGeom prst="roundRect">
             <a:avLst>
-              <a:gd name="adj" fmla="val 1905"/>
+              <a:gd name="adj" fmla="val 1860"/>
             </a:avLst>
           </a:prstGeom>
           <a:solidFill>
@@ -14930,7 +14930,7 @@
         </p:nvSpPr>
         <p:spPr>
           <a:xfrm>
-            <a:off x="6406744" y="1975104"/>
+            <a:off x="6406744" y="1938528"/>
             <a:ext cx="310896" cy="310896"/>
           </a:xfrm>
           <a:prstGeom prst="ellipse">
@@ -14950,7 +14950,7 @@
         </p:nvSpPr>
         <p:spPr>
           <a:xfrm>
-            <a:off x="6406744" y="1975104"/>
+            <a:off x="6406744" y="1938528"/>
             <a:ext cx="310896" cy="310896"/>
           </a:xfrm>
           <a:prstGeom prst="rect">
@@ -14989,7 +14989,7 @@
         </p:nvSpPr>
         <p:spPr>
           <a:xfrm>
-            <a:off x="6790792" y="1938528"/>
+            <a:off x="6790792" y="1901952"/>
             <a:ext cx="4559656" cy="512064"/>
           </a:xfrm>
           <a:prstGeom prst="rect">
@@ -15029,7 +15029,7 @@
               <a:buNone/>
             </a:pPr>
             <a:r>
-              <a:rPr lang="en-US" sz="800" i="1" dirty="0">
+              <a:rPr lang="en-US" sz="1050" dirty="0">
                 <a:solidFill>
                   <a:srgbClr val="12B198"/>
                 </a:solidFill>
@@ -15051,8 +15051,8 @@
         </p:nvSpPr>
         <p:spPr>
           <a:xfrm>
-            <a:off x="6443320" y="2487168"/>
-            <a:ext cx="4888840" cy="1097280"/>
+            <a:off x="6443320" y="2450592"/>
+            <a:ext cx="4888840" cy="1143000"/>
           </a:xfrm>
           <a:prstGeom prst="rect">
             <a:avLst/>
@@ -15097,9 +15097,9 @@
               <a:buNone/>
             </a:pPr>
             <a:r>
-              <a:rPr lang="en-US" sz="750" i="1" dirty="0">
-                <a:solidFill>
-                  <a:srgbClr val="5F7183"/>
+              <a:rPr lang="en-US" sz="950" dirty="0">
+                <a:solidFill>
+                  <a:srgbClr val="1B2733"/>
                 </a:solidFill>
                 <a:latin typeface="Calibri" pitchFamily="34" charset="0"/>
                 <a:ea typeface="Calibri" pitchFamily="34" charset="-122"/>
@@ -15143,9 +15143,9 @@
               <a:buNone/>
             </a:pPr>
             <a:r>
-              <a:rPr lang="en-US" sz="750" i="1" dirty="0">
-                <a:solidFill>
-                  <a:srgbClr val="5F7183"/>
+              <a:rPr lang="en-US" sz="950" dirty="0">
+                <a:solidFill>
+                  <a:srgbClr val="1B2733"/>
                 </a:solidFill>
                 <a:latin typeface="Calibri" pitchFamily="34" charset="0"/>
                 <a:ea typeface="Calibri" pitchFamily="34" charset="-122"/>
@@ -15189,9 +15189,9 @@
               <a:buNone/>
             </a:pPr>
             <a:r>
-              <a:rPr lang="en-US" sz="750" i="1" dirty="0">
-                <a:solidFill>
-                  <a:srgbClr val="5F7183"/>
+              <a:rPr lang="en-US" sz="950" dirty="0">
+                <a:solidFill>
+                  <a:srgbClr val="1B2733"/>
                 </a:solidFill>
                 <a:latin typeface="Calibri" pitchFamily="34" charset="0"/>
                 <a:ea typeface="Calibri" pitchFamily="34" charset="-122"/>
@@ -15235,9 +15235,9 @@
               <a:buNone/>
             </a:pPr>
             <a:r>
-              <a:rPr lang="en-US" sz="750" i="1" dirty="0">
-                <a:solidFill>
-                  <a:srgbClr val="5F7183"/>
+              <a:rPr lang="en-US" sz="950" dirty="0">
+                <a:solidFill>
+                  <a:srgbClr val="1B2733"/>
                 </a:solidFill>
                 <a:latin typeface="Calibri" pitchFamily="34" charset="0"/>
                 <a:ea typeface="Calibri" pitchFamily="34" charset="-122"/>
@@ -15257,12 +15257,12 @@
         </p:nvSpPr>
         <p:spPr>
           <a:xfrm>
-            <a:off x="640080" y="3931920"/>
-            <a:ext cx="5327752" cy="1920240"/>
+            <a:off x="640080" y="3941064"/>
+            <a:ext cx="5327752" cy="1965960"/>
           </a:xfrm>
           <a:prstGeom prst="roundRect">
             <a:avLst>
-              <a:gd name="adj" fmla="val 1905"/>
+              <a:gd name="adj" fmla="val 1860"/>
             </a:avLst>
           </a:prstGeom>
           <a:solidFill>
@@ -15279,7 +15279,7 @@
         </p:nvSpPr>
         <p:spPr>
           <a:xfrm>
-            <a:off x="822960" y="4096512"/>
+            <a:off x="822960" y="4105656"/>
             <a:ext cx="310896" cy="310896"/>
           </a:xfrm>
           <a:prstGeom prst="ellipse">
@@ -15299,7 +15299,7 @@
         </p:nvSpPr>
         <p:spPr>
           <a:xfrm>
-            <a:off x="822960" y="4096512"/>
+            <a:off x="822960" y="4105656"/>
             <a:ext cx="310896" cy="310896"/>
           </a:xfrm>
           <a:prstGeom prst="rect">
@@ -15338,7 +15338,7 @@
         </p:nvSpPr>
         <p:spPr>
           <a:xfrm>
-            <a:off x="1207008" y="4059936"/>
+            <a:off x="1207008" y="4069080"/>
             <a:ext cx="4559656" cy="512064"/>
           </a:xfrm>
           <a:prstGeom prst="rect">
@@ -15378,7 +15378,7 @@
               <a:buNone/>
             </a:pPr>
             <a:r>
-              <a:rPr lang="en-US" sz="800" i="1" dirty="0">
+              <a:rPr lang="en-US" sz="1050" dirty="0">
                 <a:solidFill>
                   <a:srgbClr val="12B198"/>
                 </a:solidFill>
@@ -15400,8 +15400,8 @@
         </p:nvSpPr>
         <p:spPr>
           <a:xfrm>
-            <a:off x="859536" y="4608576"/>
-            <a:ext cx="4888840" cy="1097280"/>
+            <a:off x="859536" y="4617720"/>
+            <a:ext cx="4888840" cy="1143000"/>
           </a:xfrm>
           <a:prstGeom prst="rect">
             <a:avLst/>
@@ -15446,9 +15446,9 @@
               <a:buNone/>
             </a:pPr>
             <a:r>
-              <a:rPr lang="en-US" sz="750" i="1" dirty="0">
-                <a:solidFill>
-                  <a:srgbClr val="5F7183"/>
+              <a:rPr lang="en-US" sz="950" dirty="0">
+                <a:solidFill>
+                  <a:srgbClr val="1B2733"/>
                 </a:solidFill>
                 <a:latin typeface="Calibri" pitchFamily="34" charset="0"/>
                 <a:ea typeface="Calibri" pitchFamily="34" charset="-122"/>
@@ -15492,9 +15492,9 @@
               <a:buNone/>
             </a:pPr>
             <a:r>
-              <a:rPr lang="en-US" sz="750" i="1" dirty="0">
-                <a:solidFill>
-                  <a:srgbClr val="5F7183"/>
+              <a:rPr lang="en-US" sz="950" dirty="0">
+                <a:solidFill>
+                  <a:srgbClr val="1B2733"/>
                 </a:solidFill>
                 <a:latin typeface="Calibri" pitchFamily="34" charset="0"/>
                 <a:ea typeface="Calibri" pitchFamily="34" charset="-122"/>
@@ -15538,9 +15538,9 @@
               <a:buNone/>
             </a:pPr>
             <a:r>
-              <a:rPr lang="en-US" sz="750" i="1" dirty="0">
-                <a:solidFill>
-                  <a:srgbClr val="5F7183"/>
+              <a:rPr lang="en-US" sz="950" dirty="0">
+                <a:solidFill>
+                  <a:srgbClr val="1B2733"/>
                 </a:solidFill>
                 <a:latin typeface="Calibri" pitchFamily="34" charset="0"/>
                 <a:ea typeface="Calibri" pitchFamily="34" charset="-122"/>
@@ -15584,9 +15584,9 @@
               <a:buNone/>
             </a:pPr>
             <a:r>
-              <a:rPr lang="en-US" sz="750" i="1" dirty="0">
-                <a:solidFill>
-                  <a:srgbClr val="5F7183"/>
+              <a:rPr lang="en-US" sz="950" dirty="0">
+                <a:solidFill>
+                  <a:srgbClr val="1B2733"/>
                 </a:solidFill>
                 <a:latin typeface="Calibri" pitchFamily="34" charset="0"/>
                 <a:ea typeface="Calibri" pitchFamily="34" charset="-122"/>
@@ -15606,12 +15606,12 @@
         </p:nvSpPr>
         <p:spPr>
           <a:xfrm>
-            <a:off x="6223864" y="3931920"/>
-            <a:ext cx="5327752" cy="1920240"/>
+            <a:off x="6223864" y="3941064"/>
+            <a:ext cx="5327752" cy="1965960"/>
           </a:xfrm>
           <a:prstGeom prst="roundRect">
             <a:avLst>
-              <a:gd name="adj" fmla="val 1905"/>
+              <a:gd name="adj" fmla="val 1860"/>
             </a:avLst>
           </a:prstGeom>
           <a:solidFill>
@@ -15628,7 +15628,7 @@
         </p:nvSpPr>
         <p:spPr>
           <a:xfrm>
-            <a:off x="6406744" y="4096512"/>
+            <a:off x="6406744" y="4105656"/>
             <a:ext cx="310896" cy="310896"/>
           </a:xfrm>
           <a:prstGeom prst="ellipse">
@@ -15648,7 +15648,7 @@
         </p:nvSpPr>
         <p:spPr>
           <a:xfrm>
-            <a:off x="6406744" y="4096512"/>
+            <a:off x="6406744" y="4105656"/>
             <a:ext cx="310896" cy="310896"/>
           </a:xfrm>
           <a:prstGeom prst="rect">
@@ -15687,7 +15687,7 @@
         </p:nvSpPr>
         <p:spPr>
           <a:xfrm>
-            <a:off x="6790792" y="4059936"/>
+            <a:off x="6790792" y="4069080"/>
             <a:ext cx="4559656" cy="512064"/>
           </a:xfrm>
           <a:prstGeom prst="rect">
@@ -15727,7 +15727,7 @@
               <a:buNone/>
             </a:pPr>
             <a:r>
-              <a:rPr lang="en-US" sz="800" i="1" dirty="0">
+              <a:rPr lang="en-US" sz="1050" dirty="0">
                 <a:solidFill>
                   <a:srgbClr val="12B198"/>
                 </a:solidFill>
@@ -15749,8 +15749,8 @@
         </p:nvSpPr>
         <p:spPr>
           <a:xfrm>
-            <a:off x="6443320" y="4608576"/>
-            <a:ext cx="4888840" cy="1097280"/>
+            <a:off x="6443320" y="4617720"/>
+            <a:ext cx="4888840" cy="1143000"/>
           </a:xfrm>
           <a:prstGeom prst="rect">
             <a:avLst/>
@@ -15795,9 +15795,9 @@
               <a:buNone/>
             </a:pPr>
             <a:r>
-              <a:rPr lang="en-US" sz="750" i="1" dirty="0">
-                <a:solidFill>
-                  <a:srgbClr val="5F7183"/>
+              <a:rPr lang="en-US" sz="950" dirty="0">
+                <a:solidFill>
+                  <a:srgbClr val="1B2733"/>
                 </a:solidFill>
                 <a:latin typeface="Calibri" pitchFamily="34" charset="0"/>
                 <a:ea typeface="Calibri" pitchFamily="34" charset="-122"/>
@@ -15841,9 +15841,9 @@
               <a:buNone/>
             </a:pPr>
             <a:r>
-              <a:rPr lang="en-US" sz="750" i="1" dirty="0">
-                <a:solidFill>
-                  <a:srgbClr val="5F7183"/>
+              <a:rPr lang="en-US" sz="950" dirty="0">
+                <a:solidFill>
+                  <a:srgbClr val="1B2733"/>
                 </a:solidFill>
                 <a:latin typeface="Calibri" pitchFamily="34" charset="0"/>
                 <a:ea typeface="Calibri" pitchFamily="34" charset="-122"/>
@@ -15887,9 +15887,9 @@
               <a:buNone/>
             </a:pPr>
             <a:r>
-              <a:rPr lang="en-US" sz="750" i="1" dirty="0">
-                <a:solidFill>
-                  <a:srgbClr val="5F7183"/>
+              <a:rPr lang="en-US" sz="950" dirty="0">
+                <a:solidFill>
+                  <a:srgbClr val="1B2733"/>
                 </a:solidFill>
                 <a:latin typeface="Calibri" pitchFamily="34" charset="0"/>
                 <a:ea typeface="Calibri" pitchFamily="34" charset="-122"/>
@@ -15933,7 +15933,86 @@
               <a:buNone/>
             </a:pPr>
             <a:r>
-              <a:rPr lang="en-US" sz="750" i="1" dirty="0">
+              <a:rPr lang="en-US" sz="950" dirty="0">
+                <a:solidFill>
+                  <a:srgbClr val="1B2733"/>
+                </a:solidFill>
+                <a:latin typeface="Calibri" pitchFamily="34" charset="0"/>
+                <a:ea typeface="Calibri" pitchFamily="34" charset="-122"/>
+                <a:cs typeface="Calibri" pitchFamily="34" charset="-120"/>
+              </a:rPr>
+              <a:t>  Record that you declined, why, and when</a:t>
+            </a:r>
+            <a:endParaRPr lang="en-US" sz="950" dirty="0"/>
+          </a:p>
+        </p:txBody>
+      </p:sp>
+      <p:sp>
+        <p:nvSpPr>
+          <p:cNvPr id="28" name="Text 25"/>
+          <p:cNvSpPr/>
+          <p:nvPr/>
+        </p:nvSpPr>
+        <p:spPr>
+          <a:xfrm>
+            <a:off x="640080" y="5961888"/>
+            <a:ext cx="10911535" cy="292608"/>
+          </a:xfrm>
+          <a:prstGeom prst="rect">
+            <a:avLst/>
+          </a:prstGeom>
+          <a:noFill/>
+          <a:ln/>
+        </p:spPr>
+        <p:txBody>
+          <a:bodyPr wrap="square" lIns="0" tIns="0" rIns="0" bIns="0" rtlCol="0" anchor="t"/>
+          <a:lstStyle/>
+          <a:p>
+            <a:pPr indent="0" marL="0">
+              <a:lnSpc>
+                <a:spcPct val="88000"/>
+              </a:lnSpc>
+              <a:buNone/>
+            </a:pPr>
+            <a:r>
+              <a:rPr lang="en-US" sz="900" b="1" dirty="0">
+                <a:solidFill>
+                  <a:srgbClr val="0D8A76"/>
+                </a:solidFill>
+                <a:latin typeface="Yu Gothic" pitchFamily="34" charset="0"/>
+                <a:ea typeface="Yu Gothic" pitchFamily="34" charset="-122"/>
+                <a:cs typeface="Yu Gothic" pitchFamily="34" charset="-120"/>
+              </a:rPr>
+              <a:t>Site SOP優先　</a:t>
+            </a:r>
+            <a:pPr indent="0" marL="0">
+              <a:lnSpc>
+                <a:spcPct val="88000"/>
+              </a:lnSpc>
+              <a:buNone/>
+            </a:pPr>
+            <a:r>
+              <a:rPr lang="en-US" sz="900" dirty="0">
+                <a:solidFill>
+                  <a:srgbClr val="1B2733"/>
+                </a:solidFill>
+                <a:latin typeface="Yu Gothic" pitchFamily="34" charset="0"/>
+                <a:ea typeface="Yu Gothic" pitchFamily="34" charset="-122"/>
+                <a:cs typeface="Yu Gothic" pitchFamily="34" charset="-120"/>
+              </a:rPr>
+              <a:t>保存期間、閲覧権限、開示手続、保全依頼の宛先は現場ごとに異なる。Site SOPと契約による。</a:t>
+            </a:r>
+            <a:endParaRPr lang="en-US" sz="900" dirty="0"/>
+          </a:p>
+          <a:p>
+            <a:pPr indent="0" marL="0">
+              <a:lnSpc>
+                <a:spcPct val="88000"/>
+              </a:lnSpc>
+              <a:buNone/>
+            </a:pPr>
+            <a:r>
+              <a:rPr lang="en-US" sz="800" i="1" dirty="0">
                 <a:solidFill>
                   <a:srgbClr val="5F7183"/>
                 </a:solidFill>
@@ -15941,22 +16020,22 @@
                 <a:ea typeface="Calibri" pitchFamily="34" charset="-122"/>
                 <a:cs typeface="Calibri" pitchFamily="34" charset="-120"/>
               </a:rPr>
-              <a:t>  Record that you declined, why, and when</a:t>
-            </a:r>
-            <a:endParaRPr lang="en-US" sz="950" dirty="0"/>
-          </a:p>
-        </p:txBody>
-      </p:sp>
-      <p:sp>
-        <p:nvSpPr>
-          <p:cNvPr id="28" name="Text 25"/>
-          <p:cNvSpPr/>
-          <p:nvPr/>
-        </p:nvSpPr>
-        <p:spPr>
-          <a:xfrm>
-            <a:off x="640080" y="5907024"/>
-            <a:ext cx="10911535" cy="310896"/>
+              <a:t>Retention, viewing rights, disclosure procedure and who to ask for preservation differ by site.</a:t>
+            </a:r>
+            <a:endParaRPr lang="en-US" sz="900" dirty="0"/>
+          </a:p>
+        </p:txBody>
+      </p:sp>
+      <p:sp>
+        <p:nvSpPr>
+          <p:cNvPr id="29" name="Text 26"/>
+          <p:cNvSpPr/>
+          <p:nvPr/>
+        </p:nvSpPr>
+        <p:spPr>
+          <a:xfrm>
+            <a:off x="640080" y="6272784"/>
+            <a:ext cx="9905695" cy="219456"/>
           </a:xfrm>
           <a:prstGeom prst="rect">
             <a:avLst/>
@@ -15969,167 +16048,88 @@
           <a:lstStyle/>
           <a:p>
             <a:pPr indent="0" marL="0">
-              <a:lnSpc>
-                <a:spcPct val="88000"/>
-              </a:lnSpc>
-              <a:buNone/>
-            </a:pPr>
-            <a:r>
-              <a:rPr lang="en-US" sz="900" b="1" dirty="0">
-                <a:solidFill>
-                  <a:srgbClr val="0D8A76"/>
-                </a:solidFill>
-                <a:latin typeface="Yu Gothic" pitchFamily="34" charset="0"/>
-                <a:ea typeface="Yu Gothic" pitchFamily="34" charset="-122"/>
-                <a:cs typeface="Yu Gothic" pitchFamily="34" charset="-120"/>
-              </a:rPr>
-              <a:t>Site SOP優先　</a:t>
-            </a:r>
-            <a:pPr indent="0" marL="0">
-              <a:lnSpc>
-                <a:spcPct val="88000"/>
-              </a:lnSpc>
+              <a:buNone/>
+            </a:pPr>
+            <a:r>
+              <a:rPr lang="en-US" sz="750" b="1" dirty="0">
+                <a:solidFill>
+                  <a:srgbClr val="D6E0E9"/>
+                </a:solidFill>
+                <a:latin typeface="Yu Gothic" pitchFamily="34" charset="0"/>
+                <a:ea typeface="Yu Gothic" pitchFamily="34" charset="-122"/>
+                <a:cs typeface="Yu Gothic" pitchFamily="34" charset="-120"/>
+              </a:rPr>
+              <a:t>ソース　</a:t>
+            </a:r>
+            <a:pPr indent="0" marL="0">
+              <a:buNone/>
+            </a:pPr>
+            <a:r>
+              <a:rPr lang="en-US" sz="750" dirty="0">
+                <a:solidFill>
+                  <a:srgbClr val="5F7183"/>
+                </a:solidFill>
+                <a:latin typeface="Yu Gothic" pitchFamily="34" charset="0"/>
+                <a:ea typeface="Yu Gothic" pitchFamily="34" charset="-122"/>
+                <a:cs typeface="Yu Gothic" pitchFamily="34" charset="-120"/>
+              </a:rPr>
+              <a:t>個人情報保護法、不正競争防止法、経済産業省「営業秘密管理指針」</a:t>
+            </a:r>
+            <a:endParaRPr lang="en-US" sz="750" dirty="0"/>
+          </a:p>
+        </p:txBody>
+      </p:sp>
+      <p:sp>
+        <p:nvSpPr>
+          <p:cNvPr id="30" name="Text 27"/>
+          <p:cNvSpPr/>
+          <p:nvPr/>
+        </p:nvSpPr>
+        <p:spPr>
+          <a:xfrm>
+            <a:off x="640080" y="6492240"/>
+            <a:ext cx="8778240" cy="292608"/>
+          </a:xfrm>
+          <a:prstGeom prst="rect">
+            <a:avLst/>
+          </a:prstGeom>
+          <a:noFill/>
+          <a:ln/>
+        </p:spPr>
+        <p:txBody>
+          <a:bodyPr wrap="square" lIns="0" tIns="0" rIns="0" bIns="0" rtlCol="0" anchor="ctr"/>
+          <a:lstStyle/>
+          <a:p>
+            <a:pPr indent="0" marL="0">
               <a:buNone/>
             </a:pPr>
             <a:r>
               <a:rPr lang="en-US" sz="900" dirty="0">
                 <a:solidFill>
-                  <a:srgbClr val="1B2733"/>
-                </a:solidFill>
-                <a:latin typeface="Yu Gothic" pitchFamily="34" charset="0"/>
-                <a:ea typeface="Yu Gothic" pitchFamily="34" charset="-122"/>
-                <a:cs typeface="Yu Gothic" pitchFamily="34" charset="-120"/>
-              </a:rPr>
-              <a:t>保存期間、閲覧権限、開示手続、保全依頼の宛先は現場ごとに異なる。Site SOPと契約による。</a:t>
+                  <a:srgbClr val="5F7183"/>
+                </a:solidFill>
+                <a:latin typeface="Yu Gothic" pitchFamily="34" charset="0"/>
+                <a:ea typeface="Yu Gothic" pitchFamily="34" charset="-122"/>
+                <a:cs typeface="Yu Gothic" pitchFamily="34" charset="-120"/>
+              </a:rPr>
+              <a:t>第10時限｜業務別教育6 警報装置その他当該警備業務を実施するために使用する機器の使用方法  </a:t>
+            </a:r>
+            <a:pPr indent="0" marL="0">
+              <a:buNone/>
+            </a:pPr>
+            <a:r>
+              <a:rPr lang="en-US" sz="850" i="1" dirty="0">
+                <a:solidFill>
+                  <a:srgbClr val="D6E0E9"/>
+                </a:solidFill>
+                <a:latin typeface="Calibri" pitchFamily="34" charset="0"/>
+                <a:ea typeface="Calibri" pitchFamily="34" charset="-122"/>
+                <a:cs typeface="Calibri" pitchFamily="34" charset="-120"/>
+              </a:rPr>
+              <a:t>Period 10 | Task-Specific Training 6 — Security Equipment</a:t>
             </a:r>
             <a:endParaRPr lang="en-US" sz="900" dirty="0"/>
           </a:p>
-          <a:p>
-            <a:pPr indent="0" marL="0">
-              <a:lnSpc>
-                <a:spcPct val="88000"/>
-              </a:lnSpc>
-              <a:buNone/>
-            </a:pPr>
-            <a:r>
-              <a:rPr lang="en-US" sz="750" i="1" dirty="0">
-                <a:solidFill>
-                  <a:srgbClr val="5F7183"/>
-                </a:solidFill>
-                <a:latin typeface="Calibri" pitchFamily="34" charset="0"/>
-                <a:ea typeface="Calibri" pitchFamily="34" charset="-122"/>
-                <a:cs typeface="Calibri" pitchFamily="34" charset="-120"/>
-              </a:rPr>
-              <a:t>Retention, viewing rights, disclosure procedure and who to ask for preservation differ by site.</a:t>
-            </a:r>
-            <a:endParaRPr lang="en-US" sz="900" dirty="0"/>
-          </a:p>
-        </p:txBody>
-      </p:sp>
-      <p:sp>
-        <p:nvSpPr>
-          <p:cNvPr id="29" name="Text 26"/>
-          <p:cNvSpPr/>
-          <p:nvPr/>
-        </p:nvSpPr>
-        <p:spPr>
-          <a:xfrm>
-            <a:off x="640080" y="6272784"/>
-            <a:ext cx="9905695" cy="237744"/>
-          </a:xfrm>
-          <a:prstGeom prst="rect">
-            <a:avLst/>
-          </a:prstGeom>
-          <a:noFill/>
-          <a:ln/>
-        </p:spPr>
-        <p:txBody>
-          <a:bodyPr wrap="square" lIns="0" tIns="0" rIns="0" bIns="0" rtlCol="0" anchor="t"/>
-          <a:lstStyle/>
-          <a:p>
-            <a:pPr indent="0" marL="0">
-              <a:buNone/>
-            </a:pPr>
-            <a:r>
-              <a:rPr lang="en-US" sz="750" b="1" dirty="0">
-                <a:solidFill>
-                  <a:srgbClr val="D6E0E9"/>
-                </a:solidFill>
-                <a:latin typeface="Yu Gothic" pitchFamily="34" charset="0"/>
-                <a:ea typeface="Yu Gothic" pitchFamily="34" charset="-122"/>
-                <a:cs typeface="Yu Gothic" pitchFamily="34" charset="-120"/>
-              </a:rPr>
-              <a:t>ソース　</a:t>
-            </a:r>
-            <a:pPr indent="0" marL="0">
-              <a:buNone/>
-            </a:pPr>
-            <a:r>
-              <a:rPr lang="en-US" sz="750" dirty="0">
-                <a:solidFill>
-                  <a:srgbClr val="5F7183"/>
-                </a:solidFill>
-                <a:latin typeface="Yu Gothic" pitchFamily="34" charset="0"/>
-                <a:ea typeface="Yu Gothic" pitchFamily="34" charset="-122"/>
-                <a:cs typeface="Yu Gothic" pitchFamily="34" charset="-120"/>
-              </a:rPr>
-              <a:t>個人情報保護法、不正競争防止法、経済産業省「営業秘密管理指針」</a:t>
-            </a:r>
-            <a:endParaRPr lang="en-US" sz="750" dirty="0"/>
-          </a:p>
-        </p:txBody>
-      </p:sp>
-      <p:sp>
-        <p:nvSpPr>
-          <p:cNvPr id="30" name="Text 27"/>
-          <p:cNvSpPr/>
-          <p:nvPr/>
-        </p:nvSpPr>
-        <p:spPr>
-          <a:xfrm>
-            <a:off x="640080" y="6382512"/>
-            <a:ext cx="8778240" cy="292608"/>
-          </a:xfrm>
-          <a:prstGeom prst="rect">
-            <a:avLst/>
-          </a:prstGeom>
-          <a:noFill/>
-          <a:ln/>
-        </p:spPr>
-        <p:txBody>
-          <a:bodyPr wrap="square" lIns="0" tIns="0" rIns="0" bIns="0" rtlCol="0" anchor="ctr"/>
-          <a:lstStyle/>
-          <a:p>
-            <a:pPr indent="0" marL="0">
-              <a:buNone/>
-            </a:pPr>
-            <a:r>
-              <a:rPr lang="en-US" sz="900" dirty="0">
-                <a:solidFill>
-                  <a:srgbClr val="5F7183"/>
-                </a:solidFill>
-                <a:latin typeface="Yu Gothic" pitchFamily="34" charset="0"/>
-                <a:ea typeface="Yu Gothic" pitchFamily="34" charset="-122"/>
-                <a:cs typeface="Yu Gothic" pitchFamily="34" charset="-120"/>
-              </a:rPr>
-              <a:t>第10時限｜業務別教育6 警報装置その他当該警備業務を実施するために使用する機器の使用方法  </a:t>
-            </a:r>
-            <a:pPr indent="0" marL="0">
-              <a:buNone/>
-            </a:pPr>
-            <a:r>
-              <a:rPr lang="en-US" sz="850" i="1" dirty="0">
-                <a:solidFill>
-                  <a:srgbClr val="D6E0E9"/>
-                </a:solidFill>
-                <a:latin typeface="Calibri" pitchFamily="34" charset="0"/>
-                <a:ea typeface="Calibri" pitchFamily="34" charset="-122"/>
-                <a:cs typeface="Calibri" pitchFamily="34" charset="-120"/>
-              </a:rPr>
-              <a:t>Period 10 | Task-Specific Training 6 — Security Equipment</a:t>
-            </a:r>
-            <a:endParaRPr lang="en-US" sz="900" dirty="0"/>
-          </a:p>
         </p:txBody>
       </p:sp>
       <p:sp>
@@ -16140,7 +16140,7 @@
         </p:nvSpPr>
         <p:spPr>
           <a:xfrm>
-            <a:off x="10637215" y="6382512"/>
+            <a:off x="10637215" y="6492240"/>
             <a:ext cx="914400" cy="292608"/>
           </a:xfrm>
           <a:prstGeom prst="rect">
@@ -16235,8 +16235,8 @@
         </p:nvSpPr>
         <p:spPr>
           <a:xfrm>
-            <a:off x="640080" y="384048"/>
-            <a:ext cx="8982151" cy="768096"/>
+            <a:off x="640080" y="365760"/>
+            <a:ext cx="8982151" cy="749808"/>
           </a:xfrm>
           <a:prstGeom prst="rect">
             <a:avLst/>
@@ -16275,7 +16275,7 @@
               <a:buNone/>
             </a:pPr>
             <a:r>
-              <a:rPr lang="en-US" sz="1100" i="1" dirty="0">
+              <a:rPr lang="en-US" sz="1100" dirty="0">
                 <a:solidFill>
                   <a:srgbClr val="12B198"/>
                 </a:solidFill>
@@ -16297,7 +16297,7 @@
         </p:nvSpPr>
         <p:spPr>
           <a:xfrm>
-            <a:off x="9686239" y="438912"/>
+            <a:off x="9686239" y="420624"/>
             <a:ext cx="932688" cy="310896"/>
           </a:xfrm>
           <a:prstGeom prst="roundRect">
@@ -16319,7 +16319,7 @@
         </p:nvSpPr>
         <p:spPr>
           <a:xfrm>
-            <a:off x="9686239" y="438912"/>
+            <a:off x="9686239" y="420624"/>
             <a:ext cx="932688" cy="310896"/>
           </a:xfrm>
           <a:prstGeom prst="rect">
@@ -16358,7 +16358,7 @@
         </p:nvSpPr>
         <p:spPr>
           <a:xfrm>
-            <a:off x="640080" y="1188720"/>
+            <a:off x="640080" y="1115568"/>
             <a:ext cx="10911535" cy="1124712"/>
           </a:xfrm>
           <a:prstGeom prst="roundRect">
@@ -16380,7 +16380,7 @@
         </p:nvSpPr>
         <p:spPr>
           <a:xfrm>
-            <a:off x="950976" y="1316736"/>
+            <a:off x="950976" y="1243584"/>
             <a:ext cx="10289743" cy="868680"/>
           </a:xfrm>
           <a:prstGeom prst="rect">
@@ -16457,9 +16457,9 @@
               <a:buNone/>
             </a:pPr>
             <a:r>
-              <a:rPr lang="en-US" sz="800" i="1" dirty="0">
-                <a:solidFill>
-                  <a:srgbClr val="9FD8CD"/>
+              <a:rPr lang="en-US" sz="1000" dirty="0">
+                <a:solidFill>
+                  <a:srgbClr val="DCEFEB"/>
                 </a:solidFill>
                 <a:latin typeface="Calibri" pitchFamily="34" charset="0"/>
                 <a:ea typeface="Calibri" pitchFamily="34" charset="-122"/>
@@ -16479,7 +16479,7 @@
         </p:nvSpPr>
         <p:spPr>
           <a:xfrm>
-            <a:off x="640080" y="2459736"/>
+            <a:off x="640080" y="2386584"/>
             <a:ext cx="10911535" cy="566928"/>
           </a:xfrm>
           <a:prstGeom prst="rect">
@@ -16536,9 +16536,9 @@
               <a:buNone/>
             </a:pPr>
             <a:r>
-              <a:rPr lang="en-US" sz="850" i="1" dirty="0">
-                <a:solidFill>
-                  <a:srgbClr val="5F7183"/>
+              <a:rPr lang="en-US" sz="1050" dirty="0">
+                <a:solidFill>
+                  <a:srgbClr val="1B2733"/>
                 </a:solidFill>
                 <a:latin typeface="Calibri" pitchFamily="34" charset="0"/>
                 <a:ea typeface="Calibri" pitchFamily="34" charset="-122"/>
@@ -16558,12 +16558,12 @@
         </p:nvSpPr>
         <p:spPr>
           <a:xfrm>
-            <a:off x="640080" y="3081528"/>
-            <a:ext cx="5327752" cy="836676"/>
+            <a:off x="640080" y="3008376"/>
+            <a:ext cx="5327752" cy="900684"/>
           </a:xfrm>
           <a:prstGeom prst="roundRect">
             <a:avLst>
-              <a:gd name="adj" fmla="val 4372"/>
+              <a:gd name="adj" fmla="val 4061"/>
             </a:avLst>
           </a:prstGeom>
           <a:solidFill>
@@ -16580,7 +16580,7 @@
         </p:nvSpPr>
         <p:spPr>
           <a:xfrm>
-            <a:off x="804672" y="3353562"/>
+            <a:off x="804672" y="3312414"/>
             <a:ext cx="292608" cy="292608"/>
           </a:xfrm>
           <a:prstGeom prst="ellipse">
@@ -16600,7 +16600,7 @@
         </p:nvSpPr>
         <p:spPr>
           <a:xfrm>
-            <a:off x="804672" y="3353562"/>
+            <a:off x="804672" y="3312414"/>
             <a:ext cx="292608" cy="292608"/>
           </a:xfrm>
           <a:prstGeom prst="rect">
@@ -16639,8 +16639,8 @@
         </p:nvSpPr>
         <p:spPr>
           <a:xfrm>
-            <a:off x="1188720" y="3136392"/>
-            <a:ext cx="4596232" cy="726948"/>
+            <a:off x="1188720" y="3063240"/>
+            <a:ext cx="4596232" cy="790956"/>
           </a:xfrm>
           <a:prstGeom prst="rect">
             <a:avLst/>
@@ -16679,9 +16679,9 @@
               <a:buNone/>
             </a:pPr>
             <a:r>
-              <a:rPr lang="en-US" sz="800" i="1" dirty="0">
-                <a:solidFill>
-                  <a:srgbClr val="5F7183"/>
+              <a:rPr lang="en-US" sz="1050" dirty="0">
+                <a:solidFill>
+                  <a:srgbClr val="1B2733"/>
                 </a:solidFill>
                 <a:latin typeface="Calibri" pitchFamily="34" charset="0"/>
                 <a:ea typeface="Calibri" pitchFamily="34" charset="-122"/>
@@ -16701,12 +16701,12 @@
         </p:nvSpPr>
         <p:spPr>
           <a:xfrm>
-            <a:off x="6223864" y="3081528"/>
-            <a:ext cx="5327752" cy="836676"/>
+            <a:off x="6223864" y="3008376"/>
+            <a:ext cx="5327752" cy="900684"/>
           </a:xfrm>
           <a:prstGeom prst="roundRect">
             <a:avLst>
-              <a:gd name="adj" fmla="val 4372"/>
+              <a:gd name="adj" fmla="val 4061"/>
             </a:avLst>
           </a:prstGeom>
           <a:solidFill>
@@ -16723,7 +16723,7 @@
         </p:nvSpPr>
         <p:spPr>
           <a:xfrm>
-            <a:off x="6388456" y="3353562"/>
+            <a:off x="6388456" y="3312414"/>
             <a:ext cx="292608" cy="292608"/>
           </a:xfrm>
           <a:prstGeom prst="ellipse">
@@ -16743,7 +16743,7 @@
         </p:nvSpPr>
         <p:spPr>
           <a:xfrm>
-            <a:off x="6388456" y="3353562"/>
+            <a:off x="6388456" y="3312414"/>
             <a:ext cx="292608" cy="292608"/>
           </a:xfrm>
           <a:prstGeom prst="rect">
@@ -16782,8 +16782,8 @@
         </p:nvSpPr>
         <p:spPr>
           <a:xfrm>
-            <a:off x="6772504" y="3136392"/>
-            <a:ext cx="4596232" cy="726948"/>
+            <a:off x="6772504" y="3063240"/>
+            <a:ext cx="4596232" cy="790956"/>
           </a:xfrm>
           <a:prstGeom prst="rect">
             <a:avLst/>
@@ -16822,9 +16822,9 @@
               <a:buNone/>
             </a:pPr>
             <a:r>
-              <a:rPr lang="en-US" sz="800" i="1" dirty="0">
-                <a:solidFill>
-                  <a:srgbClr val="5F7183"/>
+              <a:rPr lang="en-US" sz="1050" dirty="0">
+                <a:solidFill>
+                  <a:srgbClr val="1B2733"/>
                 </a:solidFill>
                 <a:latin typeface="Calibri" pitchFamily="34" charset="0"/>
                 <a:ea typeface="Calibri" pitchFamily="34" charset="-122"/>
@@ -16844,12 +16844,12 @@
         </p:nvSpPr>
         <p:spPr>
           <a:xfrm>
-            <a:off x="640080" y="4027932"/>
-            <a:ext cx="5327752" cy="836676"/>
+            <a:off x="640080" y="4018788"/>
+            <a:ext cx="5327752" cy="900684"/>
           </a:xfrm>
           <a:prstGeom prst="roundRect">
             <a:avLst>
-              <a:gd name="adj" fmla="val 4372"/>
+              <a:gd name="adj" fmla="val 4061"/>
             </a:avLst>
           </a:prstGeom>
           <a:solidFill>
@@ -16866,7 +16866,7 @@
         </p:nvSpPr>
         <p:spPr>
           <a:xfrm>
-            <a:off x="804672" y="4299966"/>
+            <a:off x="804672" y="4322826"/>
             <a:ext cx="292608" cy="292608"/>
           </a:xfrm>
           <a:prstGeom prst="ellipse">
@@ -16886,7 +16886,7 @@
         </p:nvSpPr>
         <p:spPr>
           <a:xfrm>
-            <a:off x="804672" y="4299966"/>
+            <a:off x="804672" y="4322826"/>
             <a:ext cx="292608" cy="292608"/>
           </a:xfrm>
           <a:prstGeom prst="rect">
@@ -16925,8 +16925,8 @@
         </p:nvSpPr>
         <p:spPr>
           <a:xfrm>
-            <a:off x="1188720" y="4082796"/>
-            <a:ext cx="4596232" cy="726948"/>
+            <a:off x="1188720" y="4073652"/>
+            <a:ext cx="4596232" cy="790956"/>
           </a:xfrm>
           <a:prstGeom prst="rect">
             <a:avLst/>
@@ -16965,9 +16965,9 @@
               <a:buNone/>
             </a:pPr>
             <a:r>
-              <a:rPr lang="en-US" sz="800" i="1" dirty="0">
-                <a:solidFill>
-                  <a:srgbClr val="5F7183"/>
+              <a:rPr lang="en-US" sz="1050" dirty="0">
+                <a:solidFill>
+                  <a:srgbClr val="1B2733"/>
                 </a:solidFill>
                 <a:latin typeface="Calibri" pitchFamily="34" charset="0"/>
                 <a:ea typeface="Calibri" pitchFamily="34" charset="-122"/>
@@ -16987,12 +16987,12 @@
         </p:nvSpPr>
         <p:spPr>
           <a:xfrm>
-            <a:off x="6223864" y="4027932"/>
-            <a:ext cx="5327752" cy="836676"/>
+            <a:off x="6223864" y="4018788"/>
+            <a:ext cx="5327752" cy="900684"/>
           </a:xfrm>
           <a:prstGeom prst="roundRect">
             <a:avLst>
-              <a:gd name="adj" fmla="val 4372"/>
+              <a:gd name="adj" fmla="val 4061"/>
             </a:avLst>
           </a:prstGeom>
           <a:solidFill>
@@ -17009,7 +17009,7 @@
         </p:nvSpPr>
         <p:spPr>
           <a:xfrm>
-            <a:off x="6388456" y="4299966"/>
+            <a:off x="6388456" y="4322826"/>
             <a:ext cx="292608" cy="292608"/>
           </a:xfrm>
           <a:prstGeom prst="ellipse">
@@ -17029,7 +17029,7 @@
         </p:nvSpPr>
         <p:spPr>
           <a:xfrm>
-            <a:off x="6388456" y="4299966"/>
+            <a:off x="6388456" y="4322826"/>
             <a:ext cx="292608" cy="292608"/>
           </a:xfrm>
           <a:prstGeom prst="rect">
@@ -17068,8 +17068,8 @@
         </p:nvSpPr>
         <p:spPr>
           <a:xfrm>
-            <a:off x="6772504" y="4082796"/>
-            <a:ext cx="4596232" cy="726948"/>
+            <a:off x="6772504" y="4073652"/>
+            <a:ext cx="4596232" cy="790956"/>
           </a:xfrm>
           <a:prstGeom prst="rect">
             <a:avLst/>
@@ -17108,9 +17108,9 @@
               <a:buNone/>
             </a:pPr>
             <a:r>
-              <a:rPr lang="en-US" sz="800" i="1" dirty="0">
-                <a:solidFill>
-                  <a:srgbClr val="5F7183"/>
+              <a:rPr lang="en-US" sz="1050" dirty="0">
+                <a:solidFill>
+                  <a:srgbClr val="1B2733"/>
                 </a:solidFill>
                 <a:latin typeface="Calibri" pitchFamily="34" charset="0"/>
                 <a:ea typeface="Calibri" pitchFamily="34" charset="-122"/>
@@ -17130,7 +17130,7 @@
         </p:nvSpPr>
         <p:spPr>
           <a:xfrm>
-            <a:off x="640080" y="4919472"/>
+            <a:off x="640080" y="4974336"/>
             <a:ext cx="10911535" cy="420624"/>
           </a:xfrm>
           <a:prstGeom prst="roundRect">
@@ -17152,7 +17152,7 @@
         </p:nvSpPr>
         <p:spPr>
           <a:xfrm>
-            <a:off x="877824" y="4946904"/>
+            <a:off x="877824" y="5001768"/>
             <a:ext cx="10436047" cy="365760"/>
           </a:xfrm>
           <a:prstGeom prst="rect">
@@ -17209,9 +17209,9 @@
               <a:buNone/>
             </a:pPr>
             <a:r>
-              <a:rPr lang="en-US" sz="750" i="1" dirty="0">
-                <a:solidFill>
-                  <a:srgbClr val="5F7183"/>
+              <a:rPr lang="en-US" sz="950" dirty="0">
+                <a:solidFill>
+                  <a:srgbClr val="1B2733"/>
                 </a:solidFill>
                 <a:latin typeface="Calibri" pitchFamily="34" charset="0"/>
                 <a:ea typeface="Calibri" pitchFamily="34" charset="-122"/>
@@ -17231,7 +17231,7 @@
         </p:nvSpPr>
         <p:spPr>
           <a:xfrm>
-            <a:off x="640080" y="5394960"/>
+            <a:off x="640080" y="5449824"/>
             <a:ext cx="10911535" cy="420624"/>
           </a:xfrm>
           <a:prstGeom prst="roundRect">
@@ -17253,7 +17253,7 @@
         </p:nvSpPr>
         <p:spPr>
           <a:xfrm>
-            <a:off x="877824" y="5422392"/>
+            <a:off x="877824" y="5477256"/>
             <a:ext cx="10436047" cy="365760"/>
           </a:xfrm>
           <a:prstGeom prst="rect">
@@ -17310,7 +17310,86 @@
               <a:buNone/>
             </a:pPr>
             <a:r>
-              <a:rPr lang="en-US" sz="750" i="1" dirty="0">
+              <a:rPr lang="en-US" sz="950" dirty="0">
+                <a:solidFill>
+                  <a:srgbClr val="1B2733"/>
+                </a:solidFill>
+                <a:latin typeface="Calibri" pitchFamily="34" charset="0"/>
+                <a:ea typeface="Calibri" pitchFamily="34" charset="-122"/>
+                <a:cs typeface="Calibri" pitchFamily="34" charset="-120"/>
+              </a:rPr>
+              <a:t>The panel shows a second activation, fourth-floor west zone.</a:t>
+            </a:r>
+            <a:endParaRPr lang="en-US" sz="850" dirty="0"/>
+          </a:p>
+        </p:txBody>
+      </p:sp>
+      <p:sp>
+        <p:nvSpPr>
+          <p:cNvPr id="29" name="Text 26"/>
+          <p:cNvSpPr/>
+          <p:nvPr/>
+        </p:nvSpPr>
+        <p:spPr>
+          <a:xfrm>
+            <a:off x="640080" y="5961888"/>
+            <a:ext cx="10911535" cy="292608"/>
+          </a:xfrm>
+          <a:prstGeom prst="rect">
+            <a:avLst/>
+          </a:prstGeom>
+          <a:noFill/>
+          <a:ln/>
+        </p:spPr>
+        <p:txBody>
+          <a:bodyPr wrap="square" lIns="0" tIns="0" rIns="0" bIns="0" rtlCol="0" anchor="t"/>
+          <a:lstStyle/>
+          <a:p>
+            <a:pPr indent="0" marL="0">
+              <a:lnSpc>
+                <a:spcPct val="88000"/>
+              </a:lnSpc>
+              <a:buNone/>
+            </a:pPr>
+            <a:r>
+              <a:rPr lang="en-US" sz="900" b="1" dirty="0">
+                <a:solidFill>
+                  <a:srgbClr val="0D8A76"/>
+                </a:solidFill>
+                <a:latin typeface="Yu Gothic" pitchFamily="34" charset="0"/>
+                <a:ea typeface="Yu Gothic" pitchFamily="34" charset="-122"/>
+                <a:cs typeface="Yu Gothic" pitchFamily="34" charset="-120"/>
+              </a:rPr>
+              <a:t>Site SOP優先　</a:t>
+            </a:r>
+            <a:pPr indent="0" marL="0">
+              <a:lnSpc>
+                <a:spcPct val="88000"/>
+              </a:lnSpc>
+              <a:buNone/>
+            </a:pPr>
+            <a:r>
+              <a:rPr lang="en-US" sz="900" dirty="0">
+                <a:solidFill>
+                  <a:srgbClr val="1B2733"/>
+                </a:solidFill>
+                <a:latin typeface="Yu Gothic" pitchFamily="34" charset="0"/>
+                <a:ea typeface="Yu Gothic" pitchFamily="34" charset="-122"/>
+                <a:cs typeface="Yu Gothic" pitchFamily="34" charset="-120"/>
+              </a:rPr>
+              <a:t>人員配置、通報の判断者、保全依頼の宛先は現場ごとに異なる。Site SOPと緊急連絡体制による。</a:t>
+            </a:r>
+            <a:endParaRPr lang="en-US" sz="900" dirty="0"/>
+          </a:p>
+          <a:p>
+            <a:pPr indent="0" marL="0">
+              <a:lnSpc>
+                <a:spcPct val="88000"/>
+              </a:lnSpc>
+              <a:buNone/>
+            </a:pPr>
+            <a:r>
+              <a:rPr lang="en-US" sz="800" i="1" dirty="0">
                 <a:solidFill>
                   <a:srgbClr val="5F7183"/>
                 </a:solidFill>
@@ -17318,22 +17397,22 @@
                 <a:ea typeface="Calibri" pitchFamily="34" charset="-122"/>
                 <a:cs typeface="Calibri" pitchFamily="34" charset="-120"/>
               </a:rPr>
-              <a:t>The panel shows a second activation, fourth-floor west zone.</a:t>
-            </a:r>
-            <a:endParaRPr lang="en-US" sz="850" dirty="0"/>
-          </a:p>
-        </p:txBody>
-      </p:sp>
-      <p:sp>
-        <p:nvSpPr>
-          <p:cNvPr id="29" name="Text 26"/>
-          <p:cNvSpPr/>
-          <p:nvPr/>
-        </p:nvSpPr>
-        <p:spPr>
-          <a:xfrm>
-            <a:off x="640080" y="5907024"/>
-            <a:ext cx="10911535" cy="310896"/>
+              <a:t>Deployment, who decides on the call, and who to ask for preservation differ by site.</a:t>
+            </a:r>
+            <a:endParaRPr lang="en-US" sz="900" dirty="0"/>
+          </a:p>
+        </p:txBody>
+      </p:sp>
+      <p:sp>
+        <p:nvSpPr>
+          <p:cNvPr id="30" name="Text 27"/>
+          <p:cNvSpPr/>
+          <p:nvPr/>
+        </p:nvSpPr>
+        <p:spPr>
+          <a:xfrm>
+            <a:off x="640080" y="6272784"/>
+            <a:ext cx="9905695" cy="219456"/>
           </a:xfrm>
           <a:prstGeom prst="rect">
             <a:avLst/>
@@ -17346,167 +17425,88 @@
           <a:lstStyle/>
           <a:p>
             <a:pPr indent="0" marL="0">
-              <a:lnSpc>
-                <a:spcPct val="88000"/>
-              </a:lnSpc>
-              <a:buNone/>
-            </a:pPr>
-            <a:r>
-              <a:rPr lang="en-US" sz="900" b="1" dirty="0">
-                <a:solidFill>
-                  <a:srgbClr val="0D8A76"/>
-                </a:solidFill>
-                <a:latin typeface="Yu Gothic" pitchFamily="34" charset="0"/>
-                <a:ea typeface="Yu Gothic" pitchFamily="34" charset="-122"/>
-                <a:cs typeface="Yu Gothic" pitchFamily="34" charset="-120"/>
-              </a:rPr>
-              <a:t>Site SOP優先　</a:t>
-            </a:r>
-            <a:pPr indent="0" marL="0">
-              <a:lnSpc>
-                <a:spcPct val="88000"/>
-              </a:lnSpc>
+              <a:buNone/>
+            </a:pPr>
+            <a:r>
+              <a:rPr lang="en-US" sz="750" b="1" dirty="0">
+                <a:solidFill>
+                  <a:srgbClr val="D6E0E9"/>
+                </a:solidFill>
+                <a:latin typeface="Yu Gothic" pitchFamily="34" charset="0"/>
+                <a:ea typeface="Yu Gothic" pitchFamily="34" charset="-122"/>
+                <a:cs typeface="Yu Gothic" pitchFamily="34" charset="-120"/>
+              </a:rPr>
+              <a:t>ソース　</a:t>
+            </a:r>
+            <a:pPr indent="0" marL="0">
+              <a:buNone/>
+            </a:pPr>
+            <a:r>
+              <a:rPr lang="en-US" sz="750" dirty="0">
+                <a:solidFill>
+                  <a:srgbClr val="5F7183"/>
+                </a:solidFill>
+                <a:latin typeface="Yu Gothic" pitchFamily="34" charset="0"/>
+                <a:ea typeface="Yu Gothic" pitchFamily="34" charset="-122"/>
+                <a:cs typeface="Yu Gothic" pitchFamily="34" charset="-120"/>
+              </a:rPr>
+              <a:t>消防法、警備業法、警察庁「警備員教育」</a:t>
+            </a:r>
+            <a:endParaRPr lang="en-US" sz="750" dirty="0"/>
+          </a:p>
+        </p:txBody>
+      </p:sp>
+      <p:sp>
+        <p:nvSpPr>
+          <p:cNvPr id="31" name="Text 28"/>
+          <p:cNvSpPr/>
+          <p:nvPr/>
+        </p:nvSpPr>
+        <p:spPr>
+          <a:xfrm>
+            <a:off x="640080" y="6492240"/>
+            <a:ext cx="8778240" cy="292608"/>
+          </a:xfrm>
+          <a:prstGeom prst="rect">
+            <a:avLst/>
+          </a:prstGeom>
+          <a:noFill/>
+          <a:ln/>
+        </p:spPr>
+        <p:txBody>
+          <a:bodyPr wrap="square" lIns="0" tIns="0" rIns="0" bIns="0" rtlCol="0" anchor="ctr"/>
+          <a:lstStyle/>
+          <a:p>
+            <a:pPr indent="0" marL="0">
               <a:buNone/>
             </a:pPr>
             <a:r>
               <a:rPr lang="en-US" sz="900" dirty="0">
                 <a:solidFill>
-                  <a:srgbClr val="1B2733"/>
-                </a:solidFill>
-                <a:latin typeface="Yu Gothic" pitchFamily="34" charset="0"/>
-                <a:ea typeface="Yu Gothic" pitchFamily="34" charset="-122"/>
-                <a:cs typeface="Yu Gothic" pitchFamily="34" charset="-120"/>
-              </a:rPr>
-              <a:t>人員配置、通報の判断者、保全依頼の宛先は現場ごとに異なる。Site SOPと緊急連絡体制による。</a:t>
+                  <a:srgbClr val="5F7183"/>
+                </a:solidFill>
+                <a:latin typeface="Yu Gothic" pitchFamily="34" charset="0"/>
+                <a:ea typeface="Yu Gothic" pitchFamily="34" charset="-122"/>
+                <a:cs typeface="Yu Gothic" pitchFamily="34" charset="-120"/>
+              </a:rPr>
+              <a:t>第10時限｜業務別教育6 警報装置その他当該警備業務を実施するために使用する機器の使用方法  </a:t>
+            </a:r>
+            <a:pPr indent="0" marL="0">
+              <a:buNone/>
+            </a:pPr>
+            <a:r>
+              <a:rPr lang="en-US" sz="850" i="1" dirty="0">
+                <a:solidFill>
+                  <a:srgbClr val="D6E0E9"/>
+                </a:solidFill>
+                <a:latin typeface="Calibri" pitchFamily="34" charset="0"/>
+                <a:ea typeface="Calibri" pitchFamily="34" charset="-122"/>
+                <a:cs typeface="Calibri" pitchFamily="34" charset="-120"/>
+              </a:rPr>
+              <a:t>Period 10 | Task-Specific Training 6 — Security Equipment</a:t>
             </a:r>
             <a:endParaRPr lang="en-US" sz="900" dirty="0"/>
           </a:p>
-          <a:p>
-            <a:pPr indent="0" marL="0">
-              <a:lnSpc>
-                <a:spcPct val="88000"/>
-              </a:lnSpc>
-              <a:buNone/>
-            </a:pPr>
-            <a:r>
-              <a:rPr lang="en-US" sz="750" i="1" dirty="0">
-                <a:solidFill>
-                  <a:srgbClr val="5F7183"/>
-                </a:solidFill>
-                <a:latin typeface="Calibri" pitchFamily="34" charset="0"/>
-                <a:ea typeface="Calibri" pitchFamily="34" charset="-122"/>
-                <a:cs typeface="Calibri" pitchFamily="34" charset="-120"/>
-              </a:rPr>
-              <a:t>Deployment, who decides on the call, and who to ask for preservation differ by site.</a:t>
-            </a:r>
-            <a:endParaRPr lang="en-US" sz="900" dirty="0"/>
-          </a:p>
-        </p:txBody>
-      </p:sp>
-      <p:sp>
-        <p:nvSpPr>
-          <p:cNvPr id="30" name="Text 27"/>
-          <p:cNvSpPr/>
-          <p:nvPr/>
-        </p:nvSpPr>
-        <p:spPr>
-          <a:xfrm>
-            <a:off x="640080" y="6272784"/>
-            <a:ext cx="9905695" cy="237744"/>
-          </a:xfrm>
-          <a:prstGeom prst="rect">
-            <a:avLst/>
-          </a:prstGeom>
-          <a:noFill/>
-          <a:ln/>
-        </p:spPr>
-        <p:txBody>
-          <a:bodyPr wrap="square" lIns="0" tIns="0" rIns="0" bIns="0" rtlCol="0" anchor="t"/>
-          <a:lstStyle/>
-          <a:p>
-            <a:pPr indent="0" marL="0">
-              <a:buNone/>
-            </a:pPr>
-            <a:r>
-              <a:rPr lang="en-US" sz="750" b="1" dirty="0">
-                <a:solidFill>
-                  <a:srgbClr val="D6E0E9"/>
-                </a:solidFill>
-                <a:latin typeface="Yu Gothic" pitchFamily="34" charset="0"/>
-                <a:ea typeface="Yu Gothic" pitchFamily="34" charset="-122"/>
-                <a:cs typeface="Yu Gothic" pitchFamily="34" charset="-120"/>
-              </a:rPr>
-              <a:t>ソース　</a:t>
-            </a:r>
-            <a:pPr indent="0" marL="0">
-              <a:buNone/>
-            </a:pPr>
-            <a:r>
-              <a:rPr lang="en-US" sz="750" dirty="0">
-                <a:solidFill>
-                  <a:srgbClr val="5F7183"/>
-                </a:solidFill>
-                <a:latin typeface="Yu Gothic" pitchFamily="34" charset="0"/>
-                <a:ea typeface="Yu Gothic" pitchFamily="34" charset="-122"/>
-                <a:cs typeface="Yu Gothic" pitchFamily="34" charset="-120"/>
-              </a:rPr>
-              <a:t>消防法、警備業法、警察庁「警備員教育」</a:t>
-            </a:r>
-            <a:endParaRPr lang="en-US" sz="750" dirty="0"/>
-          </a:p>
-        </p:txBody>
-      </p:sp>
-      <p:sp>
-        <p:nvSpPr>
-          <p:cNvPr id="31" name="Text 28"/>
-          <p:cNvSpPr/>
-          <p:nvPr/>
-        </p:nvSpPr>
-        <p:spPr>
-          <a:xfrm>
-            <a:off x="640080" y="6382512"/>
-            <a:ext cx="8778240" cy="292608"/>
-          </a:xfrm>
-          <a:prstGeom prst="rect">
-            <a:avLst/>
-          </a:prstGeom>
-          <a:noFill/>
-          <a:ln/>
-        </p:spPr>
-        <p:txBody>
-          <a:bodyPr wrap="square" lIns="0" tIns="0" rIns="0" bIns="0" rtlCol="0" anchor="ctr"/>
-          <a:lstStyle/>
-          <a:p>
-            <a:pPr indent="0" marL="0">
-              <a:buNone/>
-            </a:pPr>
-            <a:r>
-              <a:rPr lang="en-US" sz="900" dirty="0">
-                <a:solidFill>
-                  <a:srgbClr val="5F7183"/>
-                </a:solidFill>
-                <a:latin typeface="Yu Gothic" pitchFamily="34" charset="0"/>
-                <a:ea typeface="Yu Gothic" pitchFamily="34" charset="-122"/>
-                <a:cs typeface="Yu Gothic" pitchFamily="34" charset="-120"/>
-              </a:rPr>
-              <a:t>第10時限｜業務別教育6 警報装置その他当該警備業務を実施するために使用する機器の使用方法  </a:t>
-            </a:r>
-            <a:pPr indent="0" marL="0">
-              <a:buNone/>
-            </a:pPr>
-            <a:r>
-              <a:rPr lang="en-US" sz="850" i="1" dirty="0">
-                <a:solidFill>
-                  <a:srgbClr val="D6E0E9"/>
-                </a:solidFill>
-                <a:latin typeface="Calibri" pitchFamily="34" charset="0"/>
-                <a:ea typeface="Calibri" pitchFamily="34" charset="-122"/>
-                <a:cs typeface="Calibri" pitchFamily="34" charset="-120"/>
-              </a:rPr>
-              <a:t>Period 10 | Task-Specific Training 6 — Security Equipment</a:t>
-            </a:r>
-            <a:endParaRPr lang="en-US" sz="900" dirty="0"/>
-          </a:p>
         </p:txBody>
       </p:sp>
       <p:sp>
@@ -17517,7 +17517,7 @@
         </p:nvSpPr>
         <p:spPr>
           <a:xfrm>
-            <a:off x="10637215" y="6382512"/>
+            <a:off x="10637215" y="6492240"/>
             <a:ext cx="914400" cy="292608"/>
           </a:xfrm>
           <a:prstGeom prst="rect">
@@ -17612,8 +17612,8 @@
         </p:nvSpPr>
         <p:spPr>
           <a:xfrm>
-            <a:off x="640080" y="384048"/>
-            <a:ext cx="8982151" cy="768096"/>
+            <a:off x="640080" y="365760"/>
+            <a:ext cx="8982151" cy="749808"/>
           </a:xfrm>
           <a:prstGeom prst="rect">
             <a:avLst/>
@@ -17652,7 +17652,7 @@
               <a:buNone/>
             </a:pPr>
             <a:r>
-              <a:rPr lang="en-US" sz="1100" i="1" dirty="0">
+              <a:rPr lang="en-US" sz="1100" dirty="0">
                 <a:solidFill>
                   <a:srgbClr val="12B198"/>
                 </a:solidFill>
@@ -17674,7 +17674,7 @@
         </p:nvSpPr>
         <p:spPr>
           <a:xfrm>
-            <a:off x="9686239" y="438912"/>
+            <a:off x="9686239" y="420624"/>
             <a:ext cx="932688" cy="310896"/>
           </a:xfrm>
           <a:prstGeom prst="roundRect">
@@ -17696,7 +17696,7 @@
         </p:nvSpPr>
         <p:spPr>
           <a:xfrm>
-            <a:off x="9686239" y="438912"/>
+            <a:off x="9686239" y="420624"/>
             <a:ext cx="932688" cy="310896"/>
           </a:xfrm>
           <a:prstGeom prst="rect">
@@ -17735,12 +17735,12 @@
         </p:nvSpPr>
         <p:spPr>
           <a:xfrm>
-            <a:off x="640080" y="1188720"/>
-            <a:ext cx="10911535" cy="683514"/>
+            <a:off x="640080" y="1115568"/>
+            <a:ext cx="10911535" cy="715518"/>
           </a:xfrm>
           <a:prstGeom prst="roundRect">
             <a:avLst>
-              <a:gd name="adj" fmla="val 5351"/>
+              <a:gd name="adj" fmla="val 5112"/>
             </a:avLst>
           </a:prstGeom>
           <a:solidFill>
@@ -17757,7 +17757,7 @@
         </p:nvSpPr>
         <p:spPr>
           <a:xfrm>
-            <a:off x="841248" y="1356741"/>
+            <a:off x="841248" y="1299591"/>
             <a:ext cx="347472" cy="347472"/>
           </a:xfrm>
           <a:prstGeom prst="ellipse">
@@ -17777,7 +17777,7 @@
         </p:nvSpPr>
         <p:spPr>
           <a:xfrm>
-            <a:off x="841248" y="1356741"/>
+            <a:off x="841248" y="1299591"/>
             <a:ext cx="347472" cy="347472"/>
           </a:xfrm>
           <a:prstGeom prst="rect">
@@ -17816,8 +17816,8 @@
         </p:nvSpPr>
         <p:spPr>
           <a:xfrm>
-            <a:off x="1280160" y="1252728"/>
-            <a:ext cx="10033711" cy="555498"/>
+            <a:off x="1280160" y="1179576"/>
+            <a:ext cx="10033711" cy="587502"/>
           </a:xfrm>
           <a:prstGeom prst="rect">
             <a:avLst/>
@@ -17836,7 +17836,7 @@
               <a:buNone/>
             </a:pPr>
             <a:r>
-              <a:rPr lang="en-US" sz="900" dirty="0">
+              <a:rPr lang="en-US" sz="950" dirty="0">
                 <a:solidFill>
                   <a:srgbClr val="5F7183"/>
                 </a:solidFill>
@@ -17846,7 +17846,7 @@
               </a:rPr>
               <a:t>問1　最初の60秒。2名の配置</a:t>
             </a:r>
-            <a:endParaRPr lang="en-US" sz="900" dirty="0"/>
+            <a:endParaRPr lang="en-US" sz="950" dirty="0"/>
           </a:p>
           <a:p>
             <a:pPr indent="0" marL="0">
@@ -17866,7 +17866,7 @@
               </a:rPr>
               <a:t>地区表示を読む→一報→現場確認。単独行動の回避と受信機の常駐は両立しない。選んだ方を説明する。</a:t>
             </a:r>
-            <a:endParaRPr lang="en-US" sz="900" dirty="0"/>
+            <a:endParaRPr lang="en-US" sz="950" dirty="0"/>
           </a:p>
           <a:p>
             <a:pPr indent="0" marL="0">
@@ -17876,9 +17876,9 @@
               <a:buNone/>
             </a:pPr>
             <a:r>
-              <a:rPr lang="en-US" sz="800" i="1" dirty="0">
-                <a:solidFill>
-                  <a:srgbClr val="5F7183"/>
+              <a:rPr lang="en-US" sz="1100" dirty="0">
+                <a:solidFill>
+                  <a:srgbClr val="1B2733"/>
                 </a:solidFill>
                 <a:latin typeface="Calibri" pitchFamily="34" charset="0"/>
                 <a:ea typeface="Calibri" pitchFamily="34" charset="-122"/>
@@ -17886,7 +17886,7 @@
               </a:rPr>
               <a:t>Read the zone, report, then verify. Not going alone and manning the panel cannot both hold — justify which you chose.</a:t>
             </a:r>
-            <a:endParaRPr lang="en-US" sz="900" dirty="0"/>
+            <a:endParaRPr lang="en-US" sz="950" dirty="0"/>
           </a:p>
         </p:txBody>
       </p:sp>
@@ -17898,12 +17898,12 @@
         </p:nvSpPr>
         <p:spPr>
           <a:xfrm>
-            <a:off x="640080" y="1972818"/>
-            <a:ext cx="10911535" cy="683514"/>
+            <a:off x="640080" y="1931670"/>
+            <a:ext cx="10911535" cy="715518"/>
           </a:xfrm>
           <a:prstGeom prst="roundRect">
             <a:avLst>
-              <a:gd name="adj" fmla="val 5351"/>
+              <a:gd name="adj" fmla="val 5112"/>
             </a:avLst>
           </a:prstGeom>
           <a:solidFill>
@@ -17920,7 +17920,7 @@
         </p:nvSpPr>
         <p:spPr>
           <a:xfrm>
-            <a:off x="841248" y="2140839"/>
+            <a:off x="841248" y="2115693"/>
             <a:ext cx="347472" cy="347472"/>
           </a:xfrm>
           <a:prstGeom prst="ellipse">
@@ -17940,7 +17940,7 @@
         </p:nvSpPr>
         <p:spPr>
           <a:xfrm>
-            <a:off x="841248" y="2140839"/>
+            <a:off x="841248" y="2115693"/>
             <a:ext cx="347472" cy="347472"/>
           </a:xfrm>
           <a:prstGeom prst="rect">
@@ -17979,8 +17979,8 @@
         </p:nvSpPr>
         <p:spPr>
           <a:xfrm>
-            <a:off x="1280160" y="2036826"/>
-            <a:ext cx="10033711" cy="555498"/>
+            <a:off x="1280160" y="1995678"/>
+            <a:ext cx="10033711" cy="587502"/>
           </a:xfrm>
           <a:prstGeom prst="rect">
             <a:avLst/>
@@ -17999,7 +17999,7 @@
               <a:buNone/>
             </a:pPr>
             <a:r>
-              <a:rPr lang="en-US" sz="900" dirty="0">
+              <a:rPr lang="en-US" sz="950" dirty="0">
                 <a:solidFill>
                   <a:srgbClr val="5F7183"/>
                 </a:solidFill>
@@ -18009,7 +18009,7 @@
               </a:rPr>
               <a:t>問2　通報するか。110か119か</a:t>
             </a:r>
-            <a:endParaRPr lang="en-US" sz="900" dirty="0"/>
+            <a:endParaRPr lang="en-US" sz="950" dirty="0"/>
           </a:p>
           <a:p>
             <a:pPr indent="0" marL="0">
@@ -18029,7 +18029,7 @@
               </a:rPr>
               <a:t>119番。発報は火災の確定ではないが、防火戸閉鎖まで進んでいる。不正解錠は後から110番。</a:t>
             </a:r>
-            <a:endParaRPr lang="en-US" sz="900" dirty="0"/>
+            <a:endParaRPr lang="en-US" sz="950" dirty="0"/>
           </a:p>
           <a:p>
             <a:pPr indent="0" marL="0">
@@ -18039,9 +18039,9 @@
               <a:buNone/>
             </a:pPr>
             <a:r>
-              <a:rPr lang="en-US" sz="800" i="1" dirty="0">
-                <a:solidFill>
-                  <a:srgbClr val="5F7183"/>
+              <a:rPr lang="en-US" sz="1100" dirty="0">
+                <a:solidFill>
+                  <a:srgbClr val="1B2733"/>
                 </a:solidFill>
                 <a:latin typeface="Calibri" pitchFamily="34" charset="0"/>
                 <a:ea typeface="Calibri" pitchFamily="34" charset="-122"/>
@@ -18049,7 +18049,7 @@
               </a:rPr>
               <a:t>Call the fire service. The alarm is not proof of fire, but the doors have closed. The unauthorised entry goes to police later.</a:t>
             </a:r>
-            <a:endParaRPr lang="en-US" sz="900" dirty="0"/>
+            <a:endParaRPr lang="en-US" sz="950" dirty="0"/>
           </a:p>
         </p:txBody>
       </p:sp>
@@ -18061,12 +18061,12 @@
         </p:nvSpPr>
         <p:spPr>
           <a:xfrm>
-            <a:off x="640080" y="2756916"/>
-            <a:ext cx="10911535" cy="683514"/>
+            <a:off x="640080" y="2747772"/>
+            <a:ext cx="10911535" cy="715518"/>
           </a:xfrm>
           <a:prstGeom prst="roundRect">
             <a:avLst>
-              <a:gd name="adj" fmla="val 5351"/>
+              <a:gd name="adj" fmla="val 5112"/>
             </a:avLst>
           </a:prstGeom>
           <a:solidFill>
@@ -18083,7 +18083,7 @@
         </p:nvSpPr>
         <p:spPr>
           <a:xfrm>
-            <a:off x="841248" y="2924937"/>
+            <a:off x="841248" y="2931795"/>
             <a:ext cx="347472" cy="347472"/>
           </a:xfrm>
           <a:prstGeom prst="ellipse">
@@ -18103,7 +18103,7 @@
         </p:nvSpPr>
         <p:spPr>
           <a:xfrm>
-            <a:off x="841248" y="2924937"/>
+            <a:off x="841248" y="2931795"/>
             <a:ext cx="347472" cy="347472"/>
           </a:xfrm>
           <a:prstGeom prst="rect">
@@ -18142,8 +18142,8 @@
         </p:nvSpPr>
         <p:spPr>
           <a:xfrm>
-            <a:off x="1280160" y="2820924"/>
-            <a:ext cx="10033711" cy="555498"/>
+            <a:off x="1280160" y="2811780"/>
+            <a:ext cx="10033711" cy="587502"/>
           </a:xfrm>
           <a:prstGeom prst="rect">
             <a:avLst/>
@@ -18162,7 +18162,7 @@
               <a:buNone/>
             </a:pPr>
             <a:r>
-              <a:rPr lang="en-US" sz="900" dirty="0">
+              <a:rPr lang="en-US" sz="950" dirty="0">
                 <a:solidFill>
                   <a:srgbClr val="5F7183"/>
                 </a:solidFill>
@@ -18172,7 +18172,7 @@
               </a:rPr>
               <a:t>問3　保全すべきもの。誰に依頼するか</a:t>
             </a:r>
-            <a:endParaRPr lang="en-US" sz="900" dirty="0"/>
+            <a:endParaRPr lang="en-US" sz="950" dirty="0"/>
           </a:p>
           <a:p>
             <a:pPr indent="0" marL="0">
@@ -18192,7 +18192,7 @@
               </a:rPr>
               <a:t>退職者カードの解錠ログと3階カメラ画像。管理権者不在なら緊急連絡体制の次順位者へ。</a:t>
             </a:r>
-            <a:endParaRPr lang="en-US" sz="900" dirty="0"/>
+            <a:endParaRPr lang="en-US" sz="950" dirty="0"/>
           </a:p>
           <a:p>
             <a:pPr indent="0" marL="0">
@@ -18202,9 +18202,9 @@
               <a:buNone/>
             </a:pPr>
             <a:r>
-              <a:rPr lang="en-US" sz="800" i="1" dirty="0">
-                <a:solidFill>
-                  <a:srgbClr val="5F7183"/>
+              <a:rPr lang="en-US" sz="1100" dirty="0">
+                <a:solidFill>
+                  <a:srgbClr val="1B2733"/>
                 </a:solidFill>
                 <a:latin typeface="Calibri" pitchFamily="34" charset="0"/>
                 <a:ea typeface="Calibri" pitchFamily="34" charset="-122"/>
@@ -18212,7 +18212,7 @@
               </a:rPr>
               <a:t>The leaver-card unlock log and the third-floor footage. With the authority away, go to the next contact.</a:t>
             </a:r>
-            <a:endParaRPr lang="en-US" sz="900" dirty="0"/>
+            <a:endParaRPr lang="en-US" sz="950" dirty="0"/>
           </a:p>
         </p:txBody>
       </p:sp>
@@ -18224,12 +18224,12 @@
         </p:nvSpPr>
         <p:spPr>
           <a:xfrm>
-            <a:off x="640080" y="3541014"/>
-            <a:ext cx="10911535" cy="683514"/>
+            <a:off x="640080" y="3563874"/>
+            <a:ext cx="10911535" cy="715518"/>
           </a:xfrm>
           <a:prstGeom prst="roundRect">
             <a:avLst>
-              <a:gd name="adj" fmla="val 5351"/>
+              <a:gd name="adj" fmla="val 5112"/>
             </a:avLst>
           </a:prstGeom>
           <a:solidFill>
@@ -18246,7 +18246,7 @@
         </p:nvSpPr>
         <p:spPr>
           <a:xfrm>
-            <a:off x="841248" y="3709035"/>
+            <a:off x="841248" y="3747897"/>
             <a:ext cx="347472" cy="347472"/>
           </a:xfrm>
           <a:prstGeom prst="ellipse">
@@ -18266,7 +18266,7 @@
         </p:nvSpPr>
         <p:spPr>
           <a:xfrm>
-            <a:off x="841248" y="3709035"/>
+            <a:off x="841248" y="3747897"/>
             <a:ext cx="347472" cy="347472"/>
           </a:xfrm>
           <a:prstGeom prst="rect">
@@ -18305,8 +18305,8 @@
         </p:nvSpPr>
         <p:spPr>
           <a:xfrm>
-            <a:off x="1280160" y="3605022"/>
-            <a:ext cx="10033711" cy="555498"/>
+            <a:off x="1280160" y="3627882"/>
+            <a:ext cx="10033711" cy="587502"/>
           </a:xfrm>
           <a:prstGeom prst="rect">
             <a:avLst/>
@@ -18325,7 +18325,7 @@
               <a:buNone/>
             </a:pPr>
             <a:r>
-              <a:rPr lang="en-US" sz="900" dirty="0">
+              <a:rPr lang="en-US" sz="950" dirty="0">
                 <a:solidFill>
                   <a:srgbClr val="5F7183"/>
                 </a:solidFill>
@@ -18335,7 +18335,7 @@
               </a:rPr>
               <a:t>問4　何を後回しにするか</a:t>
             </a:r>
-            <a:endParaRPr lang="en-US" sz="900" dirty="0"/>
+            <a:endParaRPr lang="en-US" sz="950" dirty="0"/>
           </a:p>
           <a:p>
             <a:pPr indent="0" marL="0">
@@ -18355,7 +18355,7 @@
               </a:rPr>
               <a:t>不正解錠の追跡。人命と火災対応が先。捨てた判断と理由を記録に残す。</a:t>
             </a:r>
-            <a:endParaRPr lang="en-US" sz="900" dirty="0"/>
+            <a:endParaRPr lang="en-US" sz="950" dirty="0"/>
           </a:p>
           <a:p>
             <a:pPr indent="0" marL="0">
@@ -18365,9 +18365,9 @@
               <a:buNone/>
             </a:pPr>
             <a:r>
-              <a:rPr lang="en-US" sz="800" i="1" dirty="0">
-                <a:solidFill>
-                  <a:srgbClr val="5F7183"/>
+              <a:rPr lang="en-US" sz="1100" dirty="0">
+                <a:solidFill>
+                  <a:srgbClr val="1B2733"/>
                 </a:solidFill>
                 <a:latin typeface="Calibri" pitchFamily="34" charset="0"/>
                 <a:ea typeface="Calibri" pitchFamily="34" charset="-122"/>
@@ -18375,7 +18375,7 @@
               </a:rPr>
               <a:t>Pursuing the unauthorised entry. Life and fire come first — and record what you dropped, and why.</a:t>
             </a:r>
-            <a:endParaRPr lang="en-US" sz="900" dirty="0"/>
+            <a:endParaRPr lang="en-US" sz="950" dirty="0"/>
           </a:p>
         </p:txBody>
       </p:sp>
@@ -18387,7 +18387,7 @@
         </p:nvSpPr>
         <p:spPr>
           <a:xfrm>
-            <a:off x="640080" y="4334256"/>
+            <a:off x="640080" y="4389120"/>
             <a:ext cx="10911535" cy="420624"/>
           </a:xfrm>
           <a:prstGeom prst="roundRect">
@@ -18409,7 +18409,7 @@
         </p:nvSpPr>
         <p:spPr>
           <a:xfrm>
-            <a:off x="859536" y="4361688"/>
+            <a:off x="859536" y="4416552"/>
             <a:ext cx="10472623" cy="365760"/>
           </a:xfrm>
           <a:prstGeom prst="rect">
@@ -18483,9 +18483,9 @@
               <a:buNone/>
             </a:pPr>
             <a:r>
-              <a:rPr lang="en-US" sz="750" i="1" dirty="0">
-                <a:solidFill>
-                  <a:srgbClr val="5F7183"/>
+              <a:rPr lang="en-US" sz="950" dirty="0">
+                <a:solidFill>
+                  <a:srgbClr val="1B2733"/>
                 </a:solidFill>
                 <a:latin typeface="Calibri" pitchFamily="34" charset="0"/>
                 <a:ea typeface="Calibri" pitchFamily="34" charset="-122"/>
@@ -18505,7 +18505,7 @@
         </p:nvSpPr>
         <p:spPr>
           <a:xfrm>
-            <a:off x="640080" y="4828032"/>
+            <a:off x="640080" y="4882896"/>
             <a:ext cx="10911535" cy="420624"/>
           </a:xfrm>
           <a:prstGeom prst="roundRect">
@@ -18527,7 +18527,7 @@
         </p:nvSpPr>
         <p:spPr>
           <a:xfrm>
-            <a:off x="859536" y="4855464"/>
+            <a:off x="859536" y="4910328"/>
             <a:ext cx="10472623" cy="365760"/>
           </a:xfrm>
           <a:prstGeom prst="rect">
@@ -18601,9 +18601,9 @@
               <a:buNone/>
             </a:pPr>
             <a:r>
-              <a:rPr lang="en-US" sz="750" i="1" dirty="0">
-                <a:solidFill>
-                  <a:srgbClr val="5F7183"/>
+              <a:rPr lang="en-US" sz="950" dirty="0">
+                <a:solidFill>
+                  <a:srgbClr val="1B2733"/>
                 </a:solidFill>
                 <a:latin typeface="Calibri" pitchFamily="34" charset="0"/>
                 <a:ea typeface="Calibri" pitchFamily="34" charset="-122"/>
@@ -18623,7 +18623,7 @@
         </p:nvSpPr>
         <p:spPr>
           <a:xfrm>
-            <a:off x="640080" y="5358384"/>
+            <a:off x="640080" y="5413248"/>
             <a:ext cx="10911535" cy="457200"/>
           </a:xfrm>
           <a:prstGeom prst="roundRect">
@@ -18645,7 +18645,7 @@
         </p:nvSpPr>
         <p:spPr>
           <a:xfrm>
-            <a:off x="859536" y="5385816"/>
+            <a:off x="859536" y="5440680"/>
             <a:ext cx="10472623" cy="402336"/>
           </a:xfrm>
           <a:prstGeom prst="rect">
@@ -18702,9 +18702,9 @@
               <a:buNone/>
             </a:pPr>
             <a:r>
-              <a:rPr lang="en-US" sz="750" i="1" dirty="0">
-                <a:solidFill>
-                  <a:srgbClr val="9FD8CD"/>
+              <a:rPr lang="en-US" sz="950" dirty="0">
+                <a:solidFill>
+                  <a:srgbClr val="DCEFEB"/>
                 </a:solidFill>
                 <a:latin typeface="Calibri" pitchFamily="34" charset="0"/>
                 <a:ea typeface="Calibri" pitchFamily="34" charset="-122"/>
@@ -18724,8 +18724,8 @@
         </p:nvSpPr>
         <p:spPr>
           <a:xfrm>
-            <a:off x="640080" y="5907024"/>
-            <a:ext cx="10911535" cy="310896"/>
+            <a:off x="640080" y="5961888"/>
+            <a:ext cx="10911535" cy="292608"/>
           </a:xfrm>
           <a:prstGeom prst="rect">
             <a:avLst/>
@@ -18781,7 +18781,7 @@
               <a:buNone/>
             </a:pPr>
             <a:r>
-              <a:rPr lang="en-US" sz="750" i="1" dirty="0">
+              <a:rPr lang="en-US" sz="800" i="1" dirty="0">
                 <a:solidFill>
                   <a:srgbClr val="5F7183"/>
                 </a:solidFill>
@@ -18804,7 +18804,7 @@
         <p:spPr>
           <a:xfrm>
             <a:off x="640080" y="6272784"/>
-            <a:ext cx="9905695" cy="237744"/>
+            <a:ext cx="9905695" cy="219456"/>
           </a:xfrm>
           <a:prstGeom prst="rect">
             <a:avLst/>
@@ -18856,7 +18856,7 @@
         </p:nvSpPr>
         <p:spPr>
           <a:xfrm>
-            <a:off x="640080" y="6382512"/>
+            <a:off x="640080" y="6492240"/>
             <a:ext cx="8778240" cy="292608"/>
           </a:xfrm>
           <a:prstGeom prst="rect">
@@ -18909,7 +18909,7 @@
         </p:nvSpPr>
         <p:spPr>
           <a:xfrm>
-            <a:off x="10637215" y="6382512"/>
+            <a:off x="10637215" y="6492240"/>
             <a:ext cx="914400" cy="292608"/>
           </a:xfrm>
           <a:prstGeom prst="rect">
@@ -19004,8 +19004,8 @@
         </p:nvSpPr>
         <p:spPr>
           <a:xfrm>
-            <a:off x="640080" y="384048"/>
-            <a:ext cx="8982151" cy="768096"/>
+            <a:off x="640080" y="365760"/>
+            <a:ext cx="8982151" cy="749808"/>
           </a:xfrm>
           <a:prstGeom prst="rect">
             <a:avLst/>
@@ -19044,7 +19044,7 @@
               <a:buNone/>
             </a:pPr>
             <a:r>
-              <a:rPr lang="en-US" sz="1100" i="1" dirty="0">
+              <a:rPr lang="en-US" sz="1100" dirty="0">
                 <a:solidFill>
                   <a:srgbClr val="12B198"/>
                 </a:solidFill>
@@ -19066,7 +19066,7 @@
         </p:nvSpPr>
         <p:spPr>
           <a:xfrm>
-            <a:off x="9686239" y="438912"/>
+            <a:off x="9686239" y="420624"/>
             <a:ext cx="932688" cy="310896"/>
           </a:xfrm>
           <a:prstGeom prst="roundRect">
@@ -19088,7 +19088,7 @@
         </p:nvSpPr>
         <p:spPr>
           <a:xfrm>
-            <a:off x="9686239" y="438912"/>
+            <a:off x="9686239" y="420624"/>
             <a:ext cx="932688" cy="310896"/>
           </a:xfrm>
           <a:prstGeom prst="rect">
@@ -19127,7 +19127,7 @@
         </p:nvSpPr>
         <p:spPr>
           <a:xfrm>
-            <a:off x="640080" y="1188720"/>
+            <a:off x="640080" y="1115568"/>
             <a:ext cx="10911535" cy="1124712"/>
           </a:xfrm>
           <a:prstGeom prst="roundRect">
@@ -19149,7 +19149,7 @@
         </p:nvSpPr>
         <p:spPr>
           <a:xfrm>
-            <a:off x="950976" y="1316736"/>
+            <a:off x="950976" y="1243584"/>
             <a:ext cx="10289743" cy="868680"/>
           </a:xfrm>
           <a:prstGeom prst="rect">
@@ -19226,9 +19226,9 @@
               <a:buNone/>
             </a:pPr>
             <a:r>
-              <a:rPr lang="en-US" sz="800" i="1" dirty="0">
-                <a:solidFill>
-                  <a:srgbClr val="9FD8CD"/>
+              <a:rPr lang="en-US" sz="1000" dirty="0">
+                <a:solidFill>
+                  <a:srgbClr val="DCEFEB"/>
                 </a:solidFill>
                 <a:latin typeface="Calibri" pitchFamily="34" charset="0"/>
                 <a:ea typeface="Calibri" pitchFamily="34" charset="-122"/>
@@ -19248,7 +19248,7 @@
         </p:nvSpPr>
         <p:spPr>
           <a:xfrm>
-            <a:off x="640080" y="2459736"/>
+            <a:off x="640080" y="2386584"/>
             <a:ext cx="10911535" cy="566928"/>
           </a:xfrm>
           <a:prstGeom prst="rect">
@@ -19305,9 +19305,9 @@
               <a:buNone/>
             </a:pPr>
             <a:r>
-              <a:rPr lang="en-US" sz="850" i="1" dirty="0">
-                <a:solidFill>
-                  <a:srgbClr val="5F7183"/>
+              <a:rPr lang="en-US" sz="1050" dirty="0">
+                <a:solidFill>
+                  <a:srgbClr val="1B2733"/>
                 </a:solidFill>
                 <a:latin typeface="Calibri" pitchFamily="34" charset="0"/>
                 <a:ea typeface="Calibri" pitchFamily="34" charset="-122"/>
@@ -19327,12 +19327,12 @@
         </p:nvSpPr>
         <p:spPr>
           <a:xfrm>
-            <a:off x="640080" y="3081528"/>
-            <a:ext cx="5327752" cy="836676"/>
+            <a:off x="640080" y="3008376"/>
+            <a:ext cx="5327752" cy="900684"/>
           </a:xfrm>
           <a:prstGeom prst="roundRect">
             <a:avLst>
-              <a:gd name="adj" fmla="val 4372"/>
+              <a:gd name="adj" fmla="val 4061"/>
             </a:avLst>
           </a:prstGeom>
           <a:solidFill>
@@ -19349,7 +19349,7 @@
         </p:nvSpPr>
         <p:spPr>
           <a:xfrm>
-            <a:off x="804672" y="3353562"/>
+            <a:off x="804672" y="3312414"/>
             <a:ext cx="292608" cy="292608"/>
           </a:xfrm>
           <a:prstGeom prst="ellipse">
@@ -19369,7 +19369,7 @@
         </p:nvSpPr>
         <p:spPr>
           <a:xfrm>
-            <a:off x="804672" y="3353562"/>
+            <a:off x="804672" y="3312414"/>
             <a:ext cx="292608" cy="292608"/>
           </a:xfrm>
           <a:prstGeom prst="rect">
@@ -19408,8 +19408,8 @@
         </p:nvSpPr>
         <p:spPr>
           <a:xfrm>
-            <a:off x="1188720" y="3136392"/>
-            <a:ext cx="4596232" cy="726948"/>
+            <a:off x="1188720" y="3063240"/>
+            <a:ext cx="4596232" cy="790956"/>
           </a:xfrm>
           <a:prstGeom prst="rect">
             <a:avLst/>
@@ -19448,9 +19448,9 @@
               <a:buNone/>
             </a:pPr>
             <a:r>
-              <a:rPr lang="en-US" sz="800" i="1" dirty="0">
-                <a:solidFill>
-                  <a:srgbClr val="5F7183"/>
+              <a:rPr lang="en-US" sz="1050" dirty="0">
+                <a:solidFill>
+                  <a:srgbClr val="1B2733"/>
                 </a:solidFill>
                 <a:latin typeface="Calibri" pitchFamily="34" charset="0"/>
                 <a:ea typeface="Calibri" pitchFamily="34" charset="-122"/>
@@ -19470,12 +19470,12 @@
         </p:nvSpPr>
         <p:spPr>
           <a:xfrm>
-            <a:off x="6223864" y="3081528"/>
-            <a:ext cx="5327752" cy="836676"/>
+            <a:off x="6223864" y="3008376"/>
+            <a:ext cx="5327752" cy="900684"/>
           </a:xfrm>
           <a:prstGeom prst="roundRect">
             <a:avLst>
-              <a:gd name="adj" fmla="val 4372"/>
+              <a:gd name="adj" fmla="val 4061"/>
             </a:avLst>
           </a:prstGeom>
           <a:solidFill>
@@ -19492,7 +19492,7 @@
         </p:nvSpPr>
         <p:spPr>
           <a:xfrm>
-            <a:off x="6388456" y="3353562"/>
+            <a:off x="6388456" y="3312414"/>
             <a:ext cx="292608" cy="292608"/>
           </a:xfrm>
           <a:prstGeom prst="ellipse">
@@ -19512,7 +19512,7 @@
         </p:nvSpPr>
         <p:spPr>
           <a:xfrm>
-            <a:off x="6388456" y="3353562"/>
+            <a:off x="6388456" y="3312414"/>
             <a:ext cx="292608" cy="292608"/>
           </a:xfrm>
           <a:prstGeom prst="rect">
@@ -19551,8 +19551,8 @@
         </p:nvSpPr>
         <p:spPr>
           <a:xfrm>
-            <a:off x="6772504" y="3136392"/>
-            <a:ext cx="4596232" cy="726948"/>
+            <a:off x="6772504" y="3063240"/>
+            <a:ext cx="4596232" cy="790956"/>
           </a:xfrm>
           <a:prstGeom prst="rect">
             <a:avLst/>
@@ -19591,9 +19591,9 @@
               <a:buNone/>
             </a:pPr>
             <a:r>
-              <a:rPr lang="en-US" sz="800" i="1" dirty="0">
-                <a:solidFill>
-                  <a:srgbClr val="5F7183"/>
+              <a:rPr lang="en-US" sz="1050" dirty="0">
+                <a:solidFill>
+                  <a:srgbClr val="1B2733"/>
                 </a:solidFill>
                 <a:latin typeface="Calibri" pitchFamily="34" charset="0"/>
                 <a:ea typeface="Calibri" pitchFamily="34" charset="-122"/>
@@ -19613,12 +19613,12 @@
         </p:nvSpPr>
         <p:spPr>
           <a:xfrm>
-            <a:off x="640080" y="4027932"/>
-            <a:ext cx="5327752" cy="836676"/>
+            <a:off x="640080" y="4018788"/>
+            <a:ext cx="5327752" cy="900684"/>
           </a:xfrm>
           <a:prstGeom prst="roundRect">
             <a:avLst>
-              <a:gd name="adj" fmla="val 4372"/>
+              <a:gd name="adj" fmla="val 4061"/>
             </a:avLst>
           </a:prstGeom>
           <a:solidFill>
@@ -19635,7 +19635,7 @@
         </p:nvSpPr>
         <p:spPr>
           <a:xfrm>
-            <a:off x="804672" y="4299966"/>
+            <a:off x="804672" y="4322826"/>
             <a:ext cx="292608" cy="292608"/>
           </a:xfrm>
           <a:prstGeom prst="ellipse">
@@ -19655,7 +19655,7 @@
         </p:nvSpPr>
         <p:spPr>
           <a:xfrm>
-            <a:off x="804672" y="4299966"/>
+            <a:off x="804672" y="4322826"/>
             <a:ext cx="292608" cy="292608"/>
           </a:xfrm>
           <a:prstGeom prst="rect">
@@ -19694,8 +19694,8 @@
         </p:nvSpPr>
         <p:spPr>
           <a:xfrm>
-            <a:off x="1188720" y="4082796"/>
-            <a:ext cx="4596232" cy="726948"/>
+            <a:off x="1188720" y="4073652"/>
+            <a:ext cx="4596232" cy="790956"/>
           </a:xfrm>
           <a:prstGeom prst="rect">
             <a:avLst/>
@@ -19734,9 +19734,9 @@
               <a:buNone/>
             </a:pPr>
             <a:r>
-              <a:rPr lang="en-US" sz="800" i="1" dirty="0">
-                <a:solidFill>
-                  <a:srgbClr val="5F7183"/>
+              <a:rPr lang="en-US" sz="1050" dirty="0">
+                <a:solidFill>
+                  <a:srgbClr val="1B2733"/>
                 </a:solidFill>
                 <a:latin typeface="Calibri" pitchFamily="34" charset="0"/>
                 <a:ea typeface="Calibri" pitchFamily="34" charset="-122"/>
@@ -19756,12 +19756,12 @@
         </p:nvSpPr>
         <p:spPr>
           <a:xfrm>
-            <a:off x="6223864" y="4027932"/>
-            <a:ext cx="5327752" cy="836676"/>
+            <a:off x="6223864" y="4018788"/>
+            <a:ext cx="5327752" cy="900684"/>
           </a:xfrm>
           <a:prstGeom prst="roundRect">
             <a:avLst>
-              <a:gd name="adj" fmla="val 4372"/>
+              <a:gd name="adj" fmla="val 4061"/>
             </a:avLst>
           </a:prstGeom>
           <a:solidFill>
@@ -19778,7 +19778,7 @@
         </p:nvSpPr>
         <p:spPr>
           <a:xfrm>
-            <a:off x="6388456" y="4299966"/>
+            <a:off x="6388456" y="4322826"/>
             <a:ext cx="292608" cy="292608"/>
           </a:xfrm>
           <a:prstGeom prst="ellipse">
@@ -19798,7 +19798,7 @@
         </p:nvSpPr>
         <p:spPr>
           <a:xfrm>
-            <a:off x="6388456" y="4299966"/>
+            <a:off x="6388456" y="4322826"/>
             <a:ext cx="292608" cy="292608"/>
           </a:xfrm>
           <a:prstGeom prst="rect">
@@ -19837,8 +19837,8 @@
         </p:nvSpPr>
         <p:spPr>
           <a:xfrm>
-            <a:off x="6772504" y="4082796"/>
-            <a:ext cx="4596232" cy="726948"/>
+            <a:off x="6772504" y="4073652"/>
+            <a:ext cx="4596232" cy="790956"/>
           </a:xfrm>
           <a:prstGeom prst="rect">
             <a:avLst/>
@@ -19877,9 +19877,9 @@
               <a:buNone/>
             </a:pPr>
             <a:r>
-              <a:rPr lang="en-US" sz="800" i="1" dirty="0">
-                <a:solidFill>
-                  <a:srgbClr val="5F7183"/>
+              <a:rPr lang="en-US" sz="1050" dirty="0">
+                <a:solidFill>
+                  <a:srgbClr val="1B2733"/>
                 </a:solidFill>
                 <a:latin typeface="Calibri" pitchFamily="34" charset="0"/>
                 <a:ea typeface="Calibri" pitchFamily="34" charset="-122"/>
@@ -19899,7 +19899,7 @@
         </p:nvSpPr>
         <p:spPr>
           <a:xfrm>
-            <a:off x="640080" y="4919472"/>
+            <a:off x="640080" y="4974336"/>
             <a:ext cx="10911535" cy="420624"/>
           </a:xfrm>
           <a:prstGeom prst="roundRect">
@@ -19921,7 +19921,7 @@
         </p:nvSpPr>
         <p:spPr>
           <a:xfrm>
-            <a:off x="877824" y="4946904"/>
+            <a:off x="877824" y="5001768"/>
             <a:ext cx="10436047" cy="365760"/>
           </a:xfrm>
           <a:prstGeom prst="rect">
@@ -19978,9 +19978,9 @@
               <a:buNone/>
             </a:pPr>
             <a:r>
-              <a:rPr lang="en-US" sz="750" i="1" dirty="0">
-                <a:solidFill>
-                  <a:srgbClr val="5F7183"/>
+              <a:rPr lang="en-US" sz="950" dirty="0">
+                <a:solidFill>
+                  <a:srgbClr val="1B2733"/>
                 </a:solidFill>
                 <a:latin typeface="Calibri" pitchFamily="34" charset="0"/>
                 <a:ea typeface="Calibri" pitchFamily="34" charset="-122"/>
@@ -20000,7 +20000,7 @@
         </p:nvSpPr>
         <p:spPr>
           <a:xfrm>
-            <a:off x="640080" y="5394960"/>
+            <a:off x="640080" y="5449824"/>
             <a:ext cx="10911535" cy="420624"/>
           </a:xfrm>
           <a:prstGeom prst="roundRect">
@@ -20022,7 +20022,7 @@
         </p:nvSpPr>
         <p:spPr>
           <a:xfrm>
-            <a:off x="877824" y="5422392"/>
+            <a:off x="877824" y="5477256"/>
             <a:ext cx="10436047" cy="365760"/>
           </a:xfrm>
           <a:prstGeom prst="rect">
@@ -20079,7 +20079,86 @@
               <a:buNone/>
             </a:pPr>
             <a:r>
-              <a:rPr lang="en-US" sz="750" i="1" dirty="0">
+              <a:rPr lang="en-US" sz="950" dirty="0">
+                <a:solidFill>
+                  <a:srgbClr val="1B2733"/>
+                </a:solidFill>
+                <a:latin typeface="Calibri" pitchFamily="34" charset="0"/>
+                <a:ea typeface="Calibri" pitchFamily="34" charset="-122"/>
+                <a:cs typeface="Calibri" pitchFamily="34" charset="-120"/>
+              </a:rPr>
+              <a:t>They say: "Then I will submit a formal request. Until then, do not delete it."</a:t>
+            </a:r>
+            <a:endParaRPr lang="en-US" sz="850" dirty="0"/>
+          </a:p>
+        </p:txBody>
+      </p:sp>
+      <p:sp>
+        <p:nvSpPr>
+          <p:cNvPr id="29" name="Text 26"/>
+          <p:cNvSpPr/>
+          <p:nvPr/>
+        </p:nvSpPr>
+        <p:spPr>
+          <a:xfrm>
+            <a:off x="640080" y="5961888"/>
+            <a:ext cx="10911535" cy="292608"/>
+          </a:xfrm>
+          <a:prstGeom prst="rect">
+            <a:avLst/>
+          </a:prstGeom>
+          <a:noFill/>
+          <a:ln/>
+        </p:spPr>
+        <p:txBody>
+          <a:bodyPr wrap="square" lIns="0" tIns="0" rIns="0" bIns="0" rtlCol="0" anchor="t"/>
+          <a:lstStyle/>
+          <a:p>
+            <a:pPr indent="0" marL="0">
+              <a:lnSpc>
+                <a:spcPct val="88000"/>
+              </a:lnSpc>
+              <a:buNone/>
+            </a:pPr>
+            <a:r>
+              <a:rPr lang="en-US" sz="900" b="1" dirty="0">
+                <a:solidFill>
+                  <a:srgbClr val="0D8A76"/>
+                </a:solidFill>
+                <a:latin typeface="Yu Gothic" pitchFamily="34" charset="0"/>
+                <a:ea typeface="Yu Gothic" pitchFamily="34" charset="-122"/>
+                <a:cs typeface="Yu Gothic" pitchFamily="34" charset="-120"/>
+              </a:rPr>
+              <a:t>Site SOP優先　</a:t>
+            </a:r>
+            <a:pPr indent="0" marL="0">
+              <a:lnSpc>
+                <a:spcPct val="88000"/>
+              </a:lnSpc>
+              <a:buNone/>
+            </a:pPr>
+            <a:r>
+              <a:rPr lang="en-US" sz="900" dirty="0">
+                <a:solidFill>
+                  <a:srgbClr val="1B2733"/>
+                </a:solidFill>
+                <a:latin typeface="Yu Gothic" pitchFamily="34" charset="0"/>
+                <a:ea typeface="Yu Gothic" pitchFamily="34" charset="-122"/>
+                <a:cs typeface="Yu Gothic" pitchFamily="34" charset="-120"/>
+              </a:rPr>
+              <a:t>開示の判断者、保全依頼の受付方法、記録の様式は現場ごとに異なる。Site SOPと契約による。</a:t>
+            </a:r>
+            <a:endParaRPr lang="en-US" sz="900" dirty="0"/>
+          </a:p>
+          <a:p>
+            <a:pPr indent="0" marL="0">
+              <a:lnSpc>
+                <a:spcPct val="88000"/>
+              </a:lnSpc>
+              <a:buNone/>
+            </a:pPr>
+            <a:r>
+              <a:rPr lang="en-US" sz="800" i="1" dirty="0">
                 <a:solidFill>
                   <a:srgbClr val="5F7183"/>
                 </a:solidFill>
@@ -20087,22 +20166,22 @@
                 <a:ea typeface="Calibri" pitchFamily="34" charset="-122"/>
                 <a:cs typeface="Calibri" pitchFamily="34" charset="-120"/>
               </a:rPr>
-              <a:t>They say: "Then I will submit a formal request. Until then, do not delete it."</a:t>
-            </a:r>
-            <a:endParaRPr lang="en-US" sz="850" dirty="0"/>
-          </a:p>
-        </p:txBody>
-      </p:sp>
-      <p:sp>
-        <p:nvSpPr>
-          <p:cNvPr id="29" name="Text 26"/>
-          <p:cNvSpPr/>
-          <p:nvPr/>
-        </p:nvSpPr>
-        <p:spPr>
-          <a:xfrm>
-            <a:off x="640080" y="5907024"/>
-            <a:ext cx="10911535" cy="310896"/>
+              <a:t>Who decides on disclosure, how preservation requests are accepted, and the record format differ by site.</a:t>
+            </a:r>
+            <a:endParaRPr lang="en-US" sz="900" dirty="0"/>
+          </a:p>
+        </p:txBody>
+      </p:sp>
+      <p:sp>
+        <p:nvSpPr>
+          <p:cNvPr id="30" name="Text 27"/>
+          <p:cNvSpPr/>
+          <p:nvPr/>
+        </p:nvSpPr>
+        <p:spPr>
+          <a:xfrm>
+            <a:off x="640080" y="6272784"/>
+            <a:ext cx="9905695" cy="219456"/>
           </a:xfrm>
           <a:prstGeom prst="rect">
             <a:avLst/>
@@ -20115,167 +20194,88 @@
           <a:lstStyle/>
           <a:p>
             <a:pPr indent="0" marL="0">
-              <a:lnSpc>
-                <a:spcPct val="88000"/>
-              </a:lnSpc>
-              <a:buNone/>
-            </a:pPr>
-            <a:r>
-              <a:rPr lang="en-US" sz="900" b="1" dirty="0">
-                <a:solidFill>
-                  <a:srgbClr val="0D8A76"/>
-                </a:solidFill>
-                <a:latin typeface="Yu Gothic" pitchFamily="34" charset="0"/>
-                <a:ea typeface="Yu Gothic" pitchFamily="34" charset="-122"/>
-                <a:cs typeface="Yu Gothic" pitchFamily="34" charset="-120"/>
-              </a:rPr>
-              <a:t>Site SOP優先　</a:t>
-            </a:r>
-            <a:pPr indent="0" marL="0">
-              <a:lnSpc>
-                <a:spcPct val="88000"/>
-              </a:lnSpc>
+              <a:buNone/>
+            </a:pPr>
+            <a:r>
+              <a:rPr lang="en-US" sz="750" b="1" dirty="0">
+                <a:solidFill>
+                  <a:srgbClr val="D6E0E9"/>
+                </a:solidFill>
+                <a:latin typeface="Yu Gothic" pitchFamily="34" charset="0"/>
+                <a:ea typeface="Yu Gothic" pitchFamily="34" charset="-122"/>
+                <a:cs typeface="Yu Gothic" pitchFamily="34" charset="-120"/>
+              </a:rPr>
+              <a:t>ソース　</a:t>
+            </a:r>
+            <a:pPr indent="0" marL="0">
+              <a:buNone/>
+            </a:pPr>
+            <a:r>
+              <a:rPr lang="en-US" sz="750" dirty="0">
+                <a:solidFill>
+                  <a:srgbClr val="5F7183"/>
+                </a:solidFill>
+                <a:latin typeface="Yu Gothic" pitchFamily="34" charset="0"/>
+                <a:ea typeface="Yu Gothic" pitchFamily="34" charset="-122"/>
+                <a:cs typeface="Yu Gothic" pitchFamily="34" charset="-120"/>
+              </a:rPr>
+              <a:t>個人情報保護法、不正競争防止法、経済産業省「営業秘密管理指針」</a:t>
+            </a:r>
+            <a:endParaRPr lang="en-US" sz="750" dirty="0"/>
+          </a:p>
+        </p:txBody>
+      </p:sp>
+      <p:sp>
+        <p:nvSpPr>
+          <p:cNvPr id="31" name="Text 28"/>
+          <p:cNvSpPr/>
+          <p:nvPr/>
+        </p:nvSpPr>
+        <p:spPr>
+          <a:xfrm>
+            <a:off x="640080" y="6492240"/>
+            <a:ext cx="8778240" cy="292608"/>
+          </a:xfrm>
+          <a:prstGeom prst="rect">
+            <a:avLst/>
+          </a:prstGeom>
+          <a:noFill/>
+          <a:ln/>
+        </p:spPr>
+        <p:txBody>
+          <a:bodyPr wrap="square" lIns="0" tIns="0" rIns="0" bIns="0" rtlCol="0" anchor="ctr"/>
+          <a:lstStyle/>
+          <a:p>
+            <a:pPr indent="0" marL="0">
               <a:buNone/>
             </a:pPr>
             <a:r>
               <a:rPr lang="en-US" sz="900" dirty="0">
                 <a:solidFill>
-                  <a:srgbClr val="1B2733"/>
-                </a:solidFill>
-                <a:latin typeface="Yu Gothic" pitchFamily="34" charset="0"/>
-                <a:ea typeface="Yu Gothic" pitchFamily="34" charset="-122"/>
-                <a:cs typeface="Yu Gothic" pitchFamily="34" charset="-120"/>
-              </a:rPr>
-              <a:t>開示の判断者、保全依頼の受付方法、記録の様式は現場ごとに異なる。Site SOPと契約による。</a:t>
+                  <a:srgbClr val="5F7183"/>
+                </a:solidFill>
+                <a:latin typeface="Yu Gothic" pitchFamily="34" charset="0"/>
+                <a:ea typeface="Yu Gothic" pitchFamily="34" charset="-122"/>
+                <a:cs typeface="Yu Gothic" pitchFamily="34" charset="-120"/>
+              </a:rPr>
+              <a:t>第10時限｜業務別教育6 警報装置その他当該警備業務を実施するために使用する機器の使用方法  </a:t>
+            </a:r>
+            <a:pPr indent="0" marL="0">
+              <a:buNone/>
+            </a:pPr>
+            <a:r>
+              <a:rPr lang="en-US" sz="850" i="1" dirty="0">
+                <a:solidFill>
+                  <a:srgbClr val="D6E0E9"/>
+                </a:solidFill>
+                <a:latin typeface="Calibri" pitchFamily="34" charset="0"/>
+                <a:ea typeface="Calibri" pitchFamily="34" charset="-122"/>
+                <a:cs typeface="Calibri" pitchFamily="34" charset="-120"/>
+              </a:rPr>
+              <a:t>Period 10 | Task-Specific Training 6 — Security Equipment</a:t>
             </a:r>
             <a:endParaRPr lang="en-US" sz="900" dirty="0"/>
           </a:p>
-          <a:p>
-            <a:pPr indent="0" marL="0">
-              <a:lnSpc>
-                <a:spcPct val="88000"/>
-              </a:lnSpc>
-              <a:buNone/>
-            </a:pPr>
-            <a:r>
-              <a:rPr lang="en-US" sz="750" i="1" dirty="0">
-                <a:solidFill>
-                  <a:srgbClr val="5F7183"/>
-                </a:solidFill>
-                <a:latin typeface="Calibri" pitchFamily="34" charset="0"/>
-                <a:ea typeface="Calibri" pitchFamily="34" charset="-122"/>
-                <a:cs typeface="Calibri" pitchFamily="34" charset="-120"/>
-              </a:rPr>
-              <a:t>Who decides on disclosure, how preservation requests are accepted, and the record format differ by site.</a:t>
-            </a:r>
-            <a:endParaRPr lang="en-US" sz="900" dirty="0"/>
-          </a:p>
-        </p:txBody>
-      </p:sp>
-      <p:sp>
-        <p:nvSpPr>
-          <p:cNvPr id="30" name="Text 27"/>
-          <p:cNvSpPr/>
-          <p:nvPr/>
-        </p:nvSpPr>
-        <p:spPr>
-          <a:xfrm>
-            <a:off x="640080" y="6272784"/>
-            <a:ext cx="9905695" cy="237744"/>
-          </a:xfrm>
-          <a:prstGeom prst="rect">
-            <a:avLst/>
-          </a:prstGeom>
-          <a:noFill/>
-          <a:ln/>
-        </p:spPr>
-        <p:txBody>
-          <a:bodyPr wrap="square" lIns="0" tIns="0" rIns="0" bIns="0" rtlCol="0" anchor="t"/>
-          <a:lstStyle/>
-          <a:p>
-            <a:pPr indent="0" marL="0">
-              <a:buNone/>
-            </a:pPr>
-            <a:r>
-              <a:rPr lang="en-US" sz="750" b="1" dirty="0">
-                <a:solidFill>
-                  <a:srgbClr val="D6E0E9"/>
-                </a:solidFill>
-                <a:latin typeface="Yu Gothic" pitchFamily="34" charset="0"/>
-                <a:ea typeface="Yu Gothic" pitchFamily="34" charset="-122"/>
-                <a:cs typeface="Yu Gothic" pitchFamily="34" charset="-120"/>
-              </a:rPr>
-              <a:t>ソース　</a:t>
-            </a:r>
-            <a:pPr indent="0" marL="0">
-              <a:buNone/>
-            </a:pPr>
-            <a:r>
-              <a:rPr lang="en-US" sz="750" dirty="0">
-                <a:solidFill>
-                  <a:srgbClr val="5F7183"/>
-                </a:solidFill>
-                <a:latin typeface="Yu Gothic" pitchFamily="34" charset="0"/>
-                <a:ea typeface="Yu Gothic" pitchFamily="34" charset="-122"/>
-                <a:cs typeface="Yu Gothic" pitchFamily="34" charset="-120"/>
-              </a:rPr>
-              <a:t>個人情報保護法、不正競争防止法、経済産業省「営業秘密管理指針」</a:t>
-            </a:r>
-            <a:endParaRPr lang="en-US" sz="750" dirty="0"/>
-          </a:p>
-        </p:txBody>
-      </p:sp>
-      <p:sp>
-        <p:nvSpPr>
-          <p:cNvPr id="31" name="Text 28"/>
-          <p:cNvSpPr/>
-          <p:nvPr/>
-        </p:nvSpPr>
-        <p:spPr>
-          <a:xfrm>
-            <a:off x="640080" y="6382512"/>
-            <a:ext cx="8778240" cy="292608"/>
-          </a:xfrm>
-          <a:prstGeom prst="rect">
-            <a:avLst/>
-          </a:prstGeom>
-          <a:noFill/>
-          <a:ln/>
-        </p:spPr>
-        <p:txBody>
-          <a:bodyPr wrap="square" lIns="0" tIns="0" rIns="0" bIns="0" rtlCol="0" anchor="ctr"/>
-          <a:lstStyle/>
-          <a:p>
-            <a:pPr indent="0" marL="0">
-              <a:buNone/>
-            </a:pPr>
-            <a:r>
-              <a:rPr lang="en-US" sz="900" dirty="0">
-                <a:solidFill>
-                  <a:srgbClr val="5F7183"/>
-                </a:solidFill>
-                <a:latin typeface="Yu Gothic" pitchFamily="34" charset="0"/>
-                <a:ea typeface="Yu Gothic" pitchFamily="34" charset="-122"/>
-                <a:cs typeface="Yu Gothic" pitchFamily="34" charset="-120"/>
-              </a:rPr>
-              <a:t>第10時限｜業務別教育6 警報装置その他当該警備業務を実施するために使用する機器の使用方法  </a:t>
-            </a:r>
-            <a:pPr indent="0" marL="0">
-              <a:buNone/>
-            </a:pPr>
-            <a:r>
-              <a:rPr lang="en-US" sz="850" i="1" dirty="0">
-                <a:solidFill>
-                  <a:srgbClr val="D6E0E9"/>
-                </a:solidFill>
-                <a:latin typeface="Calibri" pitchFamily="34" charset="0"/>
-                <a:ea typeface="Calibri" pitchFamily="34" charset="-122"/>
-                <a:cs typeface="Calibri" pitchFamily="34" charset="-120"/>
-              </a:rPr>
-              <a:t>Period 10 | Task-Specific Training 6 — Security Equipment</a:t>
-            </a:r>
-            <a:endParaRPr lang="en-US" sz="900" dirty="0"/>
-          </a:p>
         </p:txBody>
       </p:sp>
       <p:sp>
@@ -20286,7 +20286,7 @@
         </p:nvSpPr>
         <p:spPr>
           <a:xfrm>
-            <a:off x="10637215" y="6382512"/>
+            <a:off x="10637215" y="6492240"/>
             <a:ext cx="914400" cy="292608"/>
           </a:xfrm>
           <a:prstGeom prst="rect">
@@ -20381,8 +20381,8 @@
         </p:nvSpPr>
         <p:spPr>
           <a:xfrm>
-            <a:off x="640080" y="384048"/>
-            <a:ext cx="8982151" cy="768096"/>
+            <a:off x="640080" y="365760"/>
+            <a:ext cx="8982151" cy="749808"/>
           </a:xfrm>
           <a:prstGeom prst="rect">
             <a:avLst/>
@@ -20421,7 +20421,7 @@
               <a:buNone/>
             </a:pPr>
             <a:r>
-              <a:rPr lang="en-US" sz="1100" i="1" dirty="0">
+              <a:rPr lang="en-US" sz="1100" dirty="0">
                 <a:solidFill>
                   <a:srgbClr val="12B198"/>
                 </a:solidFill>
@@ -20443,7 +20443,7 @@
         </p:nvSpPr>
         <p:spPr>
           <a:xfrm>
-            <a:off x="9686239" y="438912"/>
+            <a:off x="9686239" y="420624"/>
             <a:ext cx="932688" cy="310896"/>
           </a:xfrm>
           <a:prstGeom prst="roundRect">
@@ -20465,7 +20465,7 @@
         </p:nvSpPr>
         <p:spPr>
           <a:xfrm>
-            <a:off x="9686239" y="438912"/>
+            <a:off x="9686239" y="420624"/>
             <a:ext cx="932688" cy="310896"/>
           </a:xfrm>
           <a:prstGeom prst="rect">
@@ -20504,12 +20504,12 @@
         </p:nvSpPr>
         <p:spPr>
           <a:xfrm>
-            <a:off x="640080" y="1188720"/>
-            <a:ext cx="10911535" cy="683514"/>
+            <a:off x="640080" y="1115568"/>
+            <a:ext cx="10911535" cy="715518"/>
           </a:xfrm>
           <a:prstGeom prst="roundRect">
             <a:avLst>
-              <a:gd name="adj" fmla="val 5351"/>
+              <a:gd name="adj" fmla="val 5112"/>
             </a:avLst>
           </a:prstGeom>
           <a:solidFill>
@@ -20526,7 +20526,7 @@
         </p:nvSpPr>
         <p:spPr>
           <a:xfrm>
-            <a:off x="841248" y="1356741"/>
+            <a:off x="841248" y="1299591"/>
             <a:ext cx="347472" cy="347472"/>
           </a:xfrm>
           <a:prstGeom prst="ellipse">
@@ -20546,7 +20546,7 @@
         </p:nvSpPr>
         <p:spPr>
           <a:xfrm>
-            <a:off x="841248" y="1356741"/>
+            <a:off x="841248" y="1299591"/>
             <a:ext cx="347472" cy="347472"/>
           </a:xfrm>
           <a:prstGeom prst="rect">
@@ -20585,8 +20585,8 @@
         </p:nvSpPr>
         <p:spPr>
           <a:xfrm>
-            <a:off x="1280160" y="1252728"/>
-            <a:ext cx="10033711" cy="555498"/>
+            <a:off x="1280160" y="1179576"/>
+            <a:ext cx="10033711" cy="587502"/>
           </a:xfrm>
           <a:prstGeom prst="rect">
             <a:avLst/>
@@ -20605,7 +20605,7 @@
               <a:buNone/>
             </a:pPr>
             <a:r>
-              <a:rPr lang="en-US" sz="900" dirty="0">
+              <a:rPr lang="en-US" sz="950" dirty="0">
                 <a:solidFill>
                   <a:srgbClr val="5F7183"/>
                 </a:solidFill>
@@ -20615,7 +20615,7 @@
               </a:rPr>
               <a:t>問1　管理職であることは根拠になるか</a:t>
             </a:r>
-            <a:endParaRPr lang="en-US" sz="900" dirty="0"/>
+            <a:endParaRPr lang="en-US" sz="950" dirty="0"/>
           </a:p>
           <a:p>
             <a:pPr indent="0" marL="0">
@@ -20635,7 +20635,7 @@
               </a:rPr>
               <a:t>ならない。開示の可否は契約とクライアントの規程で決まる。役職では決まらない。</a:t>
             </a:r>
-            <a:endParaRPr lang="en-US" sz="900" dirty="0"/>
+            <a:endParaRPr lang="en-US" sz="950" dirty="0"/>
           </a:p>
           <a:p>
             <a:pPr indent="0" marL="0">
@@ -20645,9 +20645,9 @@
               <a:buNone/>
             </a:pPr>
             <a:r>
-              <a:rPr lang="en-US" sz="800" i="1" dirty="0">
-                <a:solidFill>
-                  <a:srgbClr val="5F7183"/>
+              <a:rPr lang="en-US" sz="1100" dirty="0">
+                <a:solidFill>
+                  <a:srgbClr val="1B2733"/>
                 </a:solidFill>
                 <a:latin typeface="Calibri" pitchFamily="34" charset="0"/>
                 <a:ea typeface="Calibri" pitchFamily="34" charset="-122"/>
@@ -20655,7 +20655,7 @@
               </a:rPr>
               <a:t>No. The contract and the client's rules decide, not the person's rank.</a:t>
             </a:r>
-            <a:endParaRPr lang="en-US" sz="900" dirty="0"/>
+            <a:endParaRPr lang="en-US" sz="950" dirty="0"/>
           </a:p>
         </p:txBody>
       </p:sp>
@@ -20667,12 +20667,12 @@
         </p:nvSpPr>
         <p:spPr>
           <a:xfrm>
-            <a:off x="640080" y="1972818"/>
-            <a:ext cx="10911535" cy="683514"/>
+            <a:off x="640080" y="1931670"/>
+            <a:ext cx="10911535" cy="715518"/>
           </a:xfrm>
           <a:prstGeom prst="roundRect">
             <a:avLst>
-              <a:gd name="adj" fmla="val 5351"/>
+              <a:gd name="adj" fmla="val 5112"/>
             </a:avLst>
           </a:prstGeom>
           <a:solidFill>
@@ -20689,7 +20689,7 @@
         </p:nvSpPr>
         <p:spPr>
           <a:xfrm>
-            <a:off x="841248" y="2140839"/>
+            <a:off x="841248" y="2115693"/>
             <a:ext cx="347472" cy="347472"/>
           </a:xfrm>
           <a:prstGeom prst="ellipse">
@@ -20709,7 +20709,7 @@
         </p:nvSpPr>
         <p:spPr>
           <a:xfrm>
-            <a:off x="841248" y="2140839"/>
+            <a:off x="841248" y="2115693"/>
             <a:ext cx="347472" cy="347472"/>
           </a:xfrm>
           <a:prstGeom prst="rect">
@@ -20748,8 +20748,8 @@
         </p:nvSpPr>
         <p:spPr>
           <a:xfrm>
-            <a:off x="1280160" y="2036826"/>
-            <a:ext cx="10033711" cy="555498"/>
+            <a:off x="1280160" y="1995678"/>
+            <a:ext cx="10033711" cy="587502"/>
           </a:xfrm>
           <a:prstGeom prst="rect">
             <a:avLst/>
@@ -20768,7 +20768,7 @@
               <a:buNone/>
             </a:pPr>
             <a:r>
-              <a:rPr lang="en-US" sz="900" dirty="0">
+              <a:rPr lang="en-US" sz="950" dirty="0">
                 <a:solidFill>
                   <a:srgbClr val="5F7183"/>
                 </a:solidFill>
@@ -20778,7 +20778,7 @@
               </a:rPr>
               <a:t>問2　警備員に判断する権限はあるか</a:t>
             </a:r>
-            <a:endParaRPr lang="en-US" sz="900" dirty="0"/>
+            <a:endParaRPr lang="en-US" sz="950" dirty="0"/>
           </a:p>
           <a:p>
             <a:pPr indent="0" marL="0">
@@ -20798,7 +20798,7 @@
               </a:rPr>
               <a:t>ない。取り次ぐところまで。日頃の協力関係は判断を変える理由にならない。</a:t>
             </a:r>
-            <a:endParaRPr lang="en-US" sz="900" dirty="0"/>
+            <a:endParaRPr lang="en-US" sz="950" dirty="0"/>
           </a:p>
           <a:p>
             <a:pPr indent="0" marL="0">
@@ -20808,9 +20808,9 @@
               <a:buNone/>
             </a:pPr>
             <a:r>
-              <a:rPr lang="en-US" sz="800" i="1" dirty="0">
-                <a:solidFill>
-                  <a:srgbClr val="5F7183"/>
+              <a:rPr lang="en-US" sz="1100" dirty="0">
+                <a:solidFill>
+                  <a:srgbClr val="1B2733"/>
                 </a:solidFill>
                 <a:latin typeface="Calibri" pitchFamily="34" charset="0"/>
                 <a:ea typeface="Calibri" pitchFamily="34" charset="-122"/>
@@ -20818,7 +20818,7 @@
               </a:rPr>
               <a:t>No. Your role ends at referral. A good working relationship does not change that.</a:t>
             </a:r>
-            <a:endParaRPr lang="en-US" sz="900" dirty="0"/>
+            <a:endParaRPr lang="en-US" sz="950" dirty="0"/>
           </a:p>
         </p:txBody>
       </p:sp>
@@ -20830,12 +20830,12 @@
         </p:nvSpPr>
         <p:spPr>
           <a:xfrm>
-            <a:off x="640080" y="2756916"/>
-            <a:ext cx="10911535" cy="683514"/>
+            <a:off x="640080" y="2747772"/>
+            <a:ext cx="10911535" cy="715518"/>
           </a:xfrm>
           <a:prstGeom prst="roundRect">
             <a:avLst>
-              <a:gd name="adj" fmla="val 5351"/>
+              <a:gd name="adj" fmla="val 5112"/>
             </a:avLst>
           </a:prstGeom>
           <a:solidFill>
@@ -20852,7 +20852,7 @@
         </p:nvSpPr>
         <p:spPr>
           <a:xfrm>
-            <a:off x="841248" y="2924937"/>
+            <a:off x="841248" y="2931795"/>
             <a:ext cx="347472" cy="347472"/>
           </a:xfrm>
           <a:prstGeom prst="ellipse">
@@ -20872,7 +20872,7 @@
         </p:nvSpPr>
         <p:spPr>
           <a:xfrm>
-            <a:off x="841248" y="2924937"/>
+            <a:off x="841248" y="2931795"/>
             <a:ext cx="347472" cy="347472"/>
           </a:xfrm>
           <a:prstGeom prst="rect">
@@ -20911,8 +20911,8 @@
         </p:nvSpPr>
         <p:spPr>
           <a:xfrm>
-            <a:off x="1280160" y="2820924"/>
-            <a:ext cx="10033711" cy="555498"/>
+            <a:off x="1280160" y="2811780"/>
+            <a:ext cx="10033711" cy="587502"/>
           </a:xfrm>
           <a:prstGeom prst="rect">
             <a:avLst/>
@@ -20931,7 +20931,7 @@
               <a:buNone/>
             </a:pPr>
             <a:r>
-              <a:rPr lang="en-US" sz="900" dirty="0">
+              <a:rPr lang="en-US" sz="950" dirty="0">
                 <a:solidFill>
                   <a:srgbClr val="5F7183"/>
                 </a:solidFill>
@@ -20941,7 +20941,7 @@
               </a:rPr>
               <a:t>問3　断り方。関係を壊さずに断れるか</a:t>
             </a:r>
-            <a:endParaRPr lang="en-US" sz="900" dirty="0"/>
+            <a:endParaRPr lang="en-US" sz="950" dirty="0"/>
           </a:p>
           <a:p>
             <a:pPr indent="0" marL="0">
@@ -20961,7 +20961,7 @@
               </a:rPr>
               <a:t>「私には開示の判断ができません。担当へお繋ぎします」。断るのではなく、繋ぐと伝える。</a:t>
             </a:r>
-            <a:endParaRPr lang="en-US" sz="900" dirty="0"/>
+            <a:endParaRPr lang="en-US" sz="950" dirty="0"/>
           </a:p>
           <a:p>
             <a:pPr indent="0" marL="0">
@@ -20971,9 +20971,9 @@
               <a:buNone/>
             </a:pPr>
             <a:r>
-              <a:rPr lang="en-US" sz="800" i="1" dirty="0">
-                <a:solidFill>
-                  <a:srgbClr val="5F7183"/>
+              <a:rPr lang="en-US" sz="1100" dirty="0">
+                <a:solidFill>
+                  <a:srgbClr val="1B2733"/>
                 </a:solidFill>
                 <a:latin typeface="Calibri" pitchFamily="34" charset="0"/>
                 <a:ea typeface="Calibri" pitchFamily="34" charset="-122"/>
@@ -20981,7 +20981,7 @@
               </a:rPr>
               <a:t>"I am not able to decide that. Let me connect you with the right person." You are not refusing — you are routing.</a:t>
             </a:r>
-            <a:endParaRPr lang="en-US" sz="900" dirty="0"/>
+            <a:endParaRPr lang="en-US" sz="950" dirty="0"/>
           </a:p>
         </p:txBody>
       </p:sp>
@@ -20993,12 +20993,12 @@
         </p:nvSpPr>
         <p:spPr>
           <a:xfrm>
-            <a:off x="640080" y="3541014"/>
-            <a:ext cx="10911535" cy="683514"/>
+            <a:off x="640080" y="3563874"/>
+            <a:ext cx="10911535" cy="715518"/>
           </a:xfrm>
           <a:prstGeom prst="roundRect">
             <a:avLst>
-              <a:gd name="adj" fmla="val 5351"/>
+              <a:gd name="adj" fmla="val 5112"/>
             </a:avLst>
           </a:prstGeom>
           <a:solidFill>
@@ -21015,7 +21015,7 @@
         </p:nvSpPr>
         <p:spPr>
           <a:xfrm>
-            <a:off x="841248" y="3709035"/>
+            <a:off x="841248" y="3747897"/>
             <a:ext cx="347472" cy="347472"/>
           </a:xfrm>
           <a:prstGeom prst="ellipse">
@@ -21035,7 +21035,7 @@
         </p:nvSpPr>
         <p:spPr>
           <a:xfrm>
-            <a:off x="841248" y="3709035"/>
+            <a:off x="841248" y="3747897"/>
             <a:ext cx="347472" cy="347472"/>
           </a:xfrm>
           <a:prstGeom prst="rect">
@@ -21074,8 +21074,8 @@
         </p:nvSpPr>
         <p:spPr>
           <a:xfrm>
-            <a:off x="1280160" y="3605022"/>
-            <a:ext cx="10033711" cy="555498"/>
+            <a:off x="1280160" y="3627882"/>
+            <a:ext cx="10033711" cy="587502"/>
           </a:xfrm>
           <a:prstGeom prst="rect">
             <a:avLst/>
@@ -21094,7 +21094,7 @@
               <a:buNone/>
             </a:pPr>
             <a:r>
-              <a:rPr lang="en-US" sz="900" dirty="0">
+              <a:rPr lang="en-US" sz="950" dirty="0">
                 <a:solidFill>
                   <a:srgbClr val="5F7183"/>
                 </a:solidFill>
@@ -21104,7 +21104,7 @@
               </a:rPr>
               <a:t>問4　保全の依頼は受けてよいか</a:t>
             </a:r>
-            <a:endParaRPr lang="en-US" sz="900" dirty="0"/>
+            <a:endParaRPr lang="en-US" sz="950" dirty="0"/>
           </a:p>
           <a:p>
             <a:pPr indent="0" marL="0">
@@ -21124,7 +21124,7 @@
               </a:rPr>
               <a:t>受けてよい。保全＝残す、開示＝渡す。警備員が受けられるのは前者だけ。</a:t>
             </a:r>
-            <a:endParaRPr lang="en-US" sz="900" dirty="0"/>
+            <a:endParaRPr lang="en-US" sz="950" dirty="0"/>
           </a:p>
           <a:p>
             <a:pPr indent="0" marL="0">
@@ -21134,9 +21134,9 @@
               <a:buNone/>
             </a:pPr>
             <a:r>
-              <a:rPr lang="en-US" sz="800" i="1" dirty="0">
-                <a:solidFill>
-                  <a:srgbClr val="5F7183"/>
+              <a:rPr lang="en-US" sz="1100" dirty="0">
+                <a:solidFill>
+                  <a:srgbClr val="1B2733"/>
                 </a:solidFill>
                 <a:latin typeface="Calibri" pitchFamily="34" charset="0"/>
                 <a:ea typeface="Calibri" pitchFamily="34" charset="-122"/>
@@ -21144,7 +21144,7 @@
               </a:rPr>
               <a:t>Yes. Preserving means keeping; disclosing means handing over. Only the first is yours to accept.</a:t>
             </a:r>
-            <a:endParaRPr lang="en-US" sz="900" dirty="0"/>
+            <a:endParaRPr lang="en-US" sz="950" dirty="0"/>
           </a:p>
         </p:txBody>
       </p:sp>
@@ -21156,7 +21156,7 @@
         </p:nvSpPr>
         <p:spPr>
           <a:xfrm>
-            <a:off x="640080" y="4334256"/>
+            <a:off x="640080" y="4389120"/>
             <a:ext cx="10911535" cy="420624"/>
           </a:xfrm>
           <a:prstGeom prst="roundRect">
@@ -21178,7 +21178,7 @@
         </p:nvSpPr>
         <p:spPr>
           <a:xfrm>
-            <a:off x="859536" y="4361688"/>
+            <a:off x="859536" y="4416552"/>
             <a:ext cx="10472623" cy="365760"/>
           </a:xfrm>
           <a:prstGeom prst="rect">
@@ -21252,9 +21252,9 @@
               <a:buNone/>
             </a:pPr>
             <a:r>
-              <a:rPr lang="en-US" sz="750" i="1" dirty="0">
-                <a:solidFill>
-                  <a:srgbClr val="5F7183"/>
+              <a:rPr lang="en-US" sz="950" dirty="0">
+                <a:solidFill>
+                  <a:srgbClr val="1B2733"/>
                 </a:solidFill>
                 <a:latin typeface="Calibri" pitchFamily="34" charset="0"/>
                 <a:ea typeface="Calibri" pitchFamily="34" charset="-122"/>
@@ -21274,7 +21274,7 @@
         </p:nvSpPr>
         <p:spPr>
           <a:xfrm>
-            <a:off x="640080" y="4828032"/>
+            <a:off x="640080" y="4882896"/>
             <a:ext cx="10911535" cy="420624"/>
           </a:xfrm>
           <a:prstGeom prst="roundRect">
@@ -21296,7 +21296,7 @@
         </p:nvSpPr>
         <p:spPr>
           <a:xfrm>
-            <a:off x="859536" y="4855464"/>
+            <a:off x="859536" y="4910328"/>
             <a:ext cx="10472623" cy="365760"/>
           </a:xfrm>
           <a:prstGeom prst="rect">
@@ -21370,9 +21370,9 @@
               <a:buNone/>
             </a:pPr>
             <a:r>
-              <a:rPr lang="en-US" sz="750" i="1" dirty="0">
-                <a:solidFill>
-                  <a:srgbClr val="5F7183"/>
+              <a:rPr lang="en-US" sz="950" dirty="0">
+                <a:solidFill>
+                  <a:srgbClr val="1B2733"/>
                 </a:solidFill>
                 <a:latin typeface="Calibri" pitchFamily="34" charset="0"/>
                 <a:ea typeface="Calibri" pitchFamily="34" charset="-122"/>
@@ -21392,7 +21392,7 @@
         </p:nvSpPr>
         <p:spPr>
           <a:xfrm>
-            <a:off x="640080" y="5358384"/>
+            <a:off x="640080" y="5413248"/>
             <a:ext cx="10911535" cy="457200"/>
           </a:xfrm>
           <a:prstGeom prst="roundRect">
@@ -21414,7 +21414,7 @@
         </p:nvSpPr>
         <p:spPr>
           <a:xfrm>
-            <a:off x="859536" y="5385816"/>
+            <a:off x="859536" y="5440680"/>
             <a:ext cx="10472623" cy="402336"/>
           </a:xfrm>
           <a:prstGeom prst="rect">
@@ -21471,9 +21471,9 @@
               <a:buNone/>
             </a:pPr>
             <a:r>
-              <a:rPr lang="en-US" sz="750" i="1" dirty="0">
-                <a:solidFill>
-                  <a:srgbClr val="9FD8CD"/>
+              <a:rPr lang="en-US" sz="950" dirty="0">
+                <a:solidFill>
+                  <a:srgbClr val="DCEFEB"/>
                 </a:solidFill>
                 <a:latin typeface="Calibri" pitchFamily="34" charset="0"/>
                 <a:ea typeface="Calibri" pitchFamily="34" charset="-122"/>
@@ -21493,8 +21493,8 @@
         </p:nvSpPr>
         <p:spPr>
           <a:xfrm>
-            <a:off x="640080" y="5907024"/>
-            <a:ext cx="10911535" cy="310896"/>
+            <a:off x="640080" y="5961888"/>
+            <a:ext cx="10911535" cy="292608"/>
           </a:xfrm>
           <a:prstGeom prst="rect">
             <a:avLst/>
@@ -21550,7 +21550,7 @@
               <a:buNone/>
             </a:pPr>
             <a:r>
-              <a:rPr lang="en-US" sz="750" i="1" dirty="0">
+              <a:rPr lang="en-US" sz="800" i="1" dirty="0">
                 <a:solidFill>
                   <a:srgbClr val="5F7183"/>
                 </a:solidFill>
@@ -21573,7 +21573,7 @@
         <p:spPr>
           <a:xfrm>
             <a:off x="640080" y="6272784"/>
-            <a:ext cx="9905695" cy="237744"/>
+            <a:ext cx="9905695" cy="219456"/>
           </a:xfrm>
           <a:prstGeom prst="rect">
             <a:avLst/>
@@ -21625,7 +21625,7 @@
         </p:nvSpPr>
         <p:spPr>
           <a:xfrm>
-            <a:off x="640080" y="6382512"/>
+            <a:off x="640080" y="6492240"/>
             <a:ext cx="8778240" cy="292608"/>
           </a:xfrm>
           <a:prstGeom prst="rect">
@@ -21678,7 +21678,7 @@
         </p:nvSpPr>
         <p:spPr>
           <a:xfrm>
-            <a:off x="10637215" y="6382512"/>
+            <a:off x="10637215" y="6492240"/>
             <a:ext cx="914400" cy="292608"/>
           </a:xfrm>
           <a:prstGeom prst="rect">

--- a/decks/06_10限_機器と総括.pptx
+++ b/decks/06_10限_機器と総括.pptx
@@ -3042,7 +3042,7 @@
               <a:buNone/>
             </a:pPr>
             <a:r>
-              <a:rPr lang="en-US" sz="1350" dirty="0">
+              <a:rPr lang="en-US" sz="1450" dirty="0">
                 <a:solidFill>
                   <a:srgbClr val="DCEFEB"/>
                 </a:solidFill>
@@ -3121,7 +3121,7 @@
               <a:buNone/>
             </a:pPr>
             <a:r>
-              <a:rPr lang="en-US" sz="1350" dirty="0">
+              <a:rPr lang="en-US" sz="1500" dirty="0">
                 <a:solidFill>
                   <a:srgbClr val="1B2733"/>
                 </a:solidFill>
@@ -3264,7 +3264,7 @@
               <a:buNone/>
             </a:pPr>
             <a:r>
-              <a:rPr lang="en-US" sz="1350" dirty="0">
+              <a:rPr lang="en-US" sz="1400" dirty="0">
                 <a:solidFill>
                   <a:srgbClr val="1B2733"/>
                 </a:solidFill>
@@ -3407,7 +3407,7 @@
               <a:buNone/>
             </a:pPr>
             <a:r>
-              <a:rPr lang="en-US" sz="1350" dirty="0">
+              <a:rPr lang="en-US" sz="1400" dirty="0">
                 <a:solidFill>
                   <a:srgbClr val="1B2733"/>
                 </a:solidFill>
@@ -3550,7 +3550,7 @@
               <a:buNone/>
             </a:pPr>
             <a:r>
-              <a:rPr lang="en-US" sz="1350" dirty="0">
+              <a:rPr lang="en-US" sz="1400" dirty="0">
                 <a:solidFill>
                   <a:srgbClr val="1B2733"/>
                 </a:solidFill>
@@ -3693,7 +3693,7 @@
               <a:buNone/>
             </a:pPr>
             <a:r>
-              <a:rPr lang="en-US" sz="1350" dirty="0">
+              <a:rPr lang="en-US" sz="1400" dirty="0">
                 <a:solidFill>
                   <a:srgbClr val="1B2733"/>
                 </a:solidFill>
@@ -3794,7 +3794,7 @@
               <a:buNone/>
             </a:pPr>
             <a:r>
-              <a:rPr lang="en-US" sz="1250" dirty="0">
+              <a:rPr lang="en-US" sz="1350" dirty="0">
                 <a:solidFill>
                   <a:srgbClr val="1B2733"/>
                 </a:solidFill>
@@ -3895,7 +3895,7 @@
               <a:buNone/>
             </a:pPr>
             <a:r>
-              <a:rPr lang="en-US" sz="1250" dirty="0">
+              <a:rPr lang="en-US" sz="1350" dirty="0">
                 <a:solidFill>
                   <a:srgbClr val="1B2733"/>
                 </a:solidFill>
@@ -4321,11 +4321,11 @@
         <p:spPr>
           <a:xfrm>
             <a:off x="640080" y="1115568"/>
-            <a:ext cx="10911535" cy="715518"/>
+            <a:ext cx="10911535" cy="920878"/>
           </a:xfrm>
           <a:prstGeom prst="roundRect">
             <a:avLst>
-              <a:gd name="adj" fmla="val 5112"/>
+              <a:gd name="adj" fmla="val 3972"/>
             </a:avLst>
           </a:prstGeom>
           <a:solidFill>
@@ -4342,7 +4342,7 @@
         </p:nvSpPr>
         <p:spPr>
           <a:xfrm>
-            <a:off x="841248" y="1299591"/>
+            <a:off x="841248" y="1402271"/>
             <a:ext cx="347472" cy="347472"/>
           </a:xfrm>
           <a:prstGeom prst="ellipse">
@@ -4362,7 +4362,7 @@
         </p:nvSpPr>
         <p:spPr>
           <a:xfrm>
-            <a:off x="841248" y="1299591"/>
+            <a:off x="841248" y="1402271"/>
             <a:ext cx="347472" cy="347472"/>
           </a:xfrm>
           <a:prstGeom prst="rect">
@@ -4402,7 +4402,7 @@
         <p:spPr>
           <a:xfrm>
             <a:off x="1280160" y="1179576"/>
-            <a:ext cx="10033711" cy="587502"/>
+            <a:ext cx="10033711" cy="792862"/>
           </a:xfrm>
           <a:prstGeom prst="rect">
             <a:avLst/>
@@ -4449,7 +4449,7 @@
                 <a:ea typeface="Yu Gothic" pitchFamily="34" charset="-122"/>
                 <a:cs typeface="Yu Gothic" pitchFamily="34" charset="-120"/>
               </a:rPr>
-              <a:t>地区表示を読む→一報→現場確認。単独行動の回避と受信機の常駐は両立しない。選んだ方を説明する。</a:t>
+              <a:t>①地区表示を確認 ②上長へ一報 ③1名は受信機に残って連絡と記録、1名が3階へ確認に向かう。単独になるため所在を無線で共有し続ける。</a:t>
             </a:r>
             <a:endParaRPr lang="en-US" sz="1150" dirty="0"/>
           </a:p>
@@ -4461,15 +4461,15 @@
               <a:buNone/>
             </a:pPr>
             <a:r>
-              <a:rPr lang="en-US" sz="1400" dirty="0">
-                <a:solidFill>
-                  <a:srgbClr val="1B2733"/>
-                </a:solidFill>
-                <a:latin typeface="Calibri" pitchFamily="34" charset="0"/>
-                <a:ea typeface="Calibri" pitchFamily="34" charset="-122"/>
-                <a:cs typeface="Calibri" pitchFamily="34" charset="-120"/>
-              </a:rPr>
-              <a:t>Read the zone, report, then verify. Not going alone and manning the panel cannot both hold — justify which you chose.</a:t>
+              <a:rPr lang="en-US" sz="1500" dirty="0">
+                <a:solidFill>
+                  <a:srgbClr val="1B2733"/>
+                </a:solidFill>
+                <a:latin typeface="Calibri" pitchFamily="34" charset="0"/>
+                <a:ea typeface="Calibri" pitchFamily="34" charset="-122"/>
+                <a:cs typeface="Calibri" pitchFamily="34" charset="-120"/>
+              </a:rPr>
+              <a:t>1) Read the zone. 2) Report to your supervisor. 3) One stays at the panel to log and communicate; one verifies the third floor — alone, so keep them on the radio.</a:t>
             </a:r>
             <a:endParaRPr lang="en-US" sz="1150" dirty="0"/>
           </a:p>
@@ -4483,12 +4483,12 @@
         </p:nvSpPr>
         <p:spPr>
           <a:xfrm>
-            <a:off x="640080" y="1931670"/>
-            <a:ext cx="10911535" cy="715518"/>
+            <a:off x="640080" y="2137030"/>
+            <a:ext cx="10911535" cy="756590"/>
           </a:xfrm>
           <a:prstGeom prst="roundRect">
             <a:avLst>
-              <a:gd name="adj" fmla="val 5112"/>
+              <a:gd name="adj" fmla="val 4834"/>
             </a:avLst>
           </a:prstGeom>
           <a:solidFill>
@@ -4505,7 +4505,7 @@
         </p:nvSpPr>
         <p:spPr>
           <a:xfrm>
-            <a:off x="841248" y="2115693"/>
+            <a:off x="841248" y="2341589"/>
             <a:ext cx="347472" cy="347472"/>
           </a:xfrm>
           <a:prstGeom prst="ellipse">
@@ -4525,7 +4525,7 @@
         </p:nvSpPr>
         <p:spPr>
           <a:xfrm>
-            <a:off x="841248" y="2115693"/>
+            <a:off x="841248" y="2341589"/>
             <a:ext cx="347472" cy="347472"/>
           </a:xfrm>
           <a:prstGeom prst="rect">
@@ -4564,8 +4564,8 @@
         </p:nvSpPr>
         <p:spPr>
           <a:xfrm>
-            <a:off x="1280160" y="1995678"/>
-            <a:ext cx="10033711" cy="587502"/>
+            <a:off x="1280160" y="2201038"/>
+            <a:ext cx="10033711" cy="628574"/>
           </a:xfrm>
           <a:prstGeom prst="rect">
             <a:avLst/>
@@ -4624,7 +4624,7 @@
               <a:buNone/>
             </a:pPr>
             <a:r>
-              <a:rPr lang="en-US" sz="1400" dirty="0">
+              <a:rPr lang="en-US" sz="1500" dirty="0">
                 <a:solidFill>
                   <a:srgbClr val="1B2733"/>
                 </a:solidFill>
@@ -4646,12 +4646,12 @@
         </p:nvSpPr>
         <p:spPr>
           <a:xfrm>
-            <a:off x="640080" y="2747772"/>
-            <a:ext cx="10911535" cy="715518"/>
+            <a:off x="640080" y="2994204"/>
+            <a:ext cx="10911535" cy="592302"/>
           </a:xfrm>
           <a:prstGeom prst="roundRect">
             <a:avLst>
-              <a:gd name="adj" fmla="val 5112"/>
+              <a:gd name="adj" fmla="val 6175"/>
             </a:avLst>
           </a:prstGeom>
           <a:solidFill>
@@ -4668,7 +4668,7 @@
         </p:nvSpPr>
         <p:spPr>
           <a:xfrm>
-            <a:off x="841248" y="2931795"/>
+            <a:off x="841248" y="3116619"/>
             <a:ext cx="347472" cy="347472"/>
           </a:xfrm>
           <a:prstGeom prst="ellipse">
@@ -4688,7 +4688,7 @@
         </p:nvSpPr>
         <p:spPr>
           <a:xfrm>
-            <a:off x="841248" y="2931795"/>
+            <a:off x="841248" y="3116619"/>
             <a:ext cx="347472" cy="347472"/>
           </a:xfrm>
           <a:prstGeom prst="rect">
@@ -4727,8 +4727,8 @@
         </p:nvSpPr>
         <p:spPr>
           <a:xfrm>
-            <a:off x="1280160" y="2811780"/>
-            <a:ext cx="10033711" cy="587502"/>
+            <a:off x="1280160" y="3058212"/>
+            <a:ext cx="10033711" cy="464286"/>
           </a:xfrm>
           <a:prstGeom prst="rect">
             <a:avLst/>
@@ -4787,7 +4787,7 @@
               <a:buNone/>
             </a:pPr>
             <a:r>
-              <a:rPr lang="en-US" sz="1400" dirty="0">
+              <a:rPr lang="en-US" sz="1500" dirty="0">
                 <a:solidFill>
                   <a:srgbClr val="1B2733"/>
                 </a:solidFill>
@@ -4809,12 +4809,12 @@
         </p:nvSpPr>
         <p:spPr>
           <a:xfrm>
-            <a:off x="640080" y="3563874"/>
-            <a:ext cx="10911535" cy="715518"/>
+            <a:off x="640080" y="3687090"/>
+            <a:ext cx="10911535" cy="592302"/>
           </a:xfrm>
           <a:prstGeom prst="roundRect">
             <a:avLst>
-              <a:gd name="adj" fmla="val 5112"/>
+              <a:gd name="adj" fmla="val 6175"/>
             </a:avLst>
           </a:prstGeom>
           <a:solidFill>
@@ -4831,7 +4831,7 @@
         </p:nvSpPr>
         <p:spPr>
           <a:xfrm>
-            <a:off x="841248" y="3747897"/>
+            <a:off x="841248" y="3809505"/>
             <a:ext cx="347472" cy="347472"/>
           </a:xfrm>
           <a:prstGeom prst="ellipse">
@@ -4851,7 +4851,7 @@
         </p:nvSpPr>
         <p:spPr>
           <a:xfrm>
-            <a:off x="841248" y="3747897"/>
+            <a:off x="841248" y="3809505"/>
             <a:ext cx="347472" cy="347472"/>
           </a:xfrm>
           <a:prstGeom prst="rect">
@@ -4890,8 +4890,8 @@
         </p:nvSpPr>
         <p:spPr>
           <a:xfrm>
-            <a:off x="1280160" y="3627882"/>
-            <a:ext cx="10033711" cy="587502"/>
+            <a:off x="1280160" y="3751098"/>
+            <a:ext cx="10033711" cy="464286"/>
           </a:xfrm>
           <a:prstGeom prst="rect">
             <a:avLst/>
@@ -4950,7 +4950,7 @@
               <a:buNone/>
             </a:pPr>
             <a:r>
-              <a:rPr lang="en-US" sz="1400" dirty="0">
+              <a:rPr lang="en-US" sz="1500" dirty="0">
                 <a:solidFill>
                   <a:srgbClr val="1B2733"/>
                 </a:solidFill>
@@ -5068,7 +5068,7 @@
               <a:buNone/>
             </a:pPr>
             <a:r>
-              <a:rPr lang="en-US" sz="1250" dirty="0">
+              <a:rPr lang="en-US" sz="1350" dirty="0">
                 <a:solidFill>
                   <a:srgbClr val="1B2733"/>
                 </a:solidFill>
@@ -5186,7 +5186,7 @@
               <a:buNone/>
             </a:pPr>
             <a:r>
-              <a:rPr lang="en-US" sz="1250" dirty="0">
+              <a:rPr lang="en-US" sz="1350" dirty="0">
                 <a:solidFill>
                   <a:srgbClr val="1B2733"/>
                 </a:solidFill>
@@ -5287,7 +5287,7 @@
               <a:buNone/>
             </a:pPr>
             <a:r>
-              <a:rPr lang="en-US" sz="1200" dirty="0">
+              <a:rPr lang="en-US" sz="1300" dirty="0">
                 <a:solidFill>
                   <a:srgbClr val="DCEFEB"/>
                 </a:solidFill>
@@ -5811,7 +5811,7 @@
               <a:buNone/>
             </a:pPr>
             <a:r>
-              <a:rPr lang="en-US" sz="1350" dirty="0">
+              <a:rPr lang="en-US" sz="1450" dirty="0">
                 <a:solidFill>
                   <a:srgbClr val="DCEFEB"/>
                 </a:solidFill>
@@ -5890,7 +5890,7 @@
               <a:buNone/>
             </a:pPr>
             <a:r>
-              <a:rPr lang="en-US" sz="1350" dirty="0">
+              <a:rPr lang="en-US" sz="1500" dirty="0">
                 <a:solidFill>
                   <a:srgbClr val="1B2733"/>
                 </a:solidFill>
@@ -6033,7 +6033,7 @@
               <a:buNone/>
             </a:pPr>
             <a:r>
-              <a:rPr lang="en-US" sz="1350" dirty="0">
+              <a:rPr lang="en-US" sz="1400" dirty="0">
                 <a:solidFill>
                   <a:srgbClr val="1B2733"/>
                 </a:solidFill>
@@ -6176,7 +6176,7 @@
               <a:buNone/>
             </a:pPr>
             <a:r>
-              <a:rPr lang="en-US" sz="1350" dirty="0">
+              <a:rPr lang="en-US" sz="1400" dirty="0">
                 <a:solidFill>
                   <a:srgbClr val="1B2733"/>
                 </a:solidFill>
@@ -6319,7 +6319,7 @@
               <a:buNone/>
             </a:pPr>
             <a:r>
-              <a:rPr lang="en-US" sz="1350" dirty="0">
+              <a:rPr lang="en-US" sz="1400" dirty="0">
                 <a:solidFill>
                   <a:srgbClr val="1B2733"/>
                 </a:solidFill>
@@ -6462,7 +6462,7 @@
               <a:buNone/>
             </a:pPr>
             <a:r>
-              <a:rPr lang="en-US" sz="1350" dirty="0">
+              <a:rPr lang="en-US" sz="1400" dirty="0">
                 <a:solidFill>
                   <a:srgbClr val="1B2733"/>
                 </a:solidFill>
@@ -6563,7 +6563,7 @@
               <a:buNone/>
             </a:pPr>
             <a:r>
-              <a:rPr lang="en-US" sz="1250" dirty="0">
+              <a:rPr lang="en-US" sz="1350" dirty="0">
                 <a:solidFill>
                   <a:srgbClr val="1B2733"/>
                 </a:solidFill>
@@ -6664,7 +6664,7 @@
               <a:buNone/>
             </a:pPr>
             <a:r>
-              <a:rPr lang="en-US" sz="1250" dirty="0">
+              <a:rPr lang="en-US" sz="1350" dirty="0">
                 <a:solidFill>
                   <a:srgbClr val="1B2733"/>
                 </a:solidFill>
@@ -7090,11 +7090,11 @@
         <p:spPr>
           <a:xfrm>
             <a:off x="640080" y="1115568"/>
-            <a:ext cx="10911535" cy="715518"/>
+            <a:ext cx="10911535" cy="669119"/>
           </a:xfrm>
           <a:prstGeom prst="roundRect">
             <a:avLst>
-              <a:gd name="adj" fmla="val 5112"/>
+              <a:gd name="adj" fmla="val 5466"/>
             </a:avLst>
           </a:prstGeom>
           <a:solidFill>
@@ -7111,7 +7111,7 @@
         </p:nvSpPr>
         <p:spPr>
           <a:xfrm>
-            <a:off x="841248" y="1299591"/>
+            <a:off x="841248" y="1276392"/>
             <a:ext cx="347472" cy="347472"/>
           </a:xfrm>
           <a:prstGeom prst="ellipse">
@@ -7131,7 +7131,7 @@
         </p:nvSpPr>
         <p:spPr>
           <a:xfrm>
-            <a:off x="841248" y="1299591"/>
+            <a:off x="841248" y="1276392"/>
             <a:ext cx="347472" cy="347472"/>
           </a:xfrm>
           <a:prstGeom prst="rect">
@@ -7171,7 +7171,7 @@
         <p:spPr>
           <a:xfrm>
             <a:off x="1280160" y="1179576"/>
-            <a:ext cx="10033711" cy="587502"/>
+            <a:ext cx="10033711" cy="541103"/>
           </a:xfrm>
           <a:prstGeom prst="rect">
             <a:avLst/>
@@ -7230,7 +7230,7 @@
               <a:buNone/>
             </a:pPr>
             <a:r>
-              <a:rPr lang="en-US" sz="1400" dirty="0">
+              <a:rPr lang="en-US" sz="1500" dirty="0">
                 <a:solidFill>
                   <a:srgbClr val="1B2733"/>
                 </a:solidFill>
@@ -7252,12 +7252,12 @@
         </p:nvSpPr>
         <p:spPr>
           <a:xfrm>
-            <a:off x="640080" y="1931670"/>
-            <a:ext cx="10911535" cy="715518"/>
+            <a:off x="640080" y="1885271"/>
+            <a:ext cx="10911535" cy="669119"/>
           </a:xfrm>
           <a:prstGeom prst="roundRect">
             <a:avLst>
-              <a:gd name="adj" fmla="val 5112"/>
+              <a:gd name="adj" fmla="val 5466"/>
             </a:avLst>
           </a:prstGeom>
           <a:solidFill>
@@ -7274,7 +7274,7 @@
         </p:nvSpPr>
         <p:spPr>
           <a:xfrm>
-            <a:off x="841248" y="2115693"/>
+            <a:off x="841248" y="2046095"/>
             <a:ext cx="347472" cy="347472"/>
           </a:xfrm>
           <a:prstGeom prst="ellipse">
@@ -7294,7 +7294,7 @@
         </p:nvSpPr>
         <p:spPr>
           <a:xfrm>
-            <a:off x="841248" y="2115693"/>
+            <a:off x="841248" y="2046095"/>
             <a:ext cx="347472" cy="347472"/>
           </a:xfrm>
           <a:prstGeom prst="rect">
@@ -7333,8 +7333,8 @@
         </p:nvSpPr>
         <p:spPr>
           <a:xfrm>
-            <a:off x="1280160" y="1995678"/>
-            <a:ext cx="10033711" cy="587502"/>
+            <a:off x="1280160" y="1949279"/>
+            <a:ext cx="10033711" cy="541103"/>
           </a:xfrm>
           <a:prstGeom prst="rect">
             <a:avLst/>
@@ -7393,7 +7393,7 @@
               <a:buNone/>
             </a:pPr>
             <a:r>
-              <a:rPr lang="en-US" sz="1400" dirty="0">
+              <a:rPr lang="en-US" sz="1500" dirty="0">
                 <a:solidFill>
                   <a:srgbClr val="1B2733"/>
                 </a:solidFill>
@@ -7415,12 +7415,12 @@
         </p:nvSpPr>
         <p:spPr>
           <a:xfrm>
-            <a:off x="640080" y="2747772"/>
-            <a:ext cx="10911535" cy="715518"/>
+            <a:off x="640080" y="2654974"/>
+            <a:ext cx="10911535" cy="854714"/>
           </a:xfrm>
           <a:prstGeom prst="roundRect">
             <a:avLst>
-              <a:gd name="adj" fmla="val 5112"/>
+              <a:gd name="adj" fmla="val 4279"/>
             </a:avLst>
           </a:prstGeom>
           <a:solidFill>
@@ -7437,7 +7437,7 @@
         </p:nvSpPr>
         <p:spPr>
           <a:xfrm>
-            <a:off x="841248" y="2931795"/>
+            <a:off x="841248" y="2908596"/>
             <a:ext cx="347472" cy="347472"/>
           </a:xfrm>
           <a:prstGeom prst="ellipse">
@@ -7457,7 +7457,7 @@
         </p:nvSpPr>
         <p:spPr>
           <a:xfrm>
-            <a:off x="841248" y="2931795"/>
+            <a:off x="841248" y="2908596"/>
             <a:ext cx="347472" cy="347472"/>
           </a:xfrm>
           <a:prstGeom prst="rect">
@@ -7496,8 +7496,8 @@
         </p:nvSpPr>
         <p:spPr>
           <a:xfrm>
-            <a:off x="1280160" y="2811780"/>
-            <a:ext cx="10033711" cy="587502"/>
+            <a:off x="1280160" y="2718982"/>
+            <a:ext cx="10033711" cy="726698"/>
           </a:xfrm>
           <a:prstGeom prst="rect">
             <a:avLst/>
@@ -7556,7 +7556,7 @@
               <a:buNone/>
             </a:pPr>
             <a:r>
-              <a:rPr lang="en-US" sz="1400" dirty="0">
+              <a:rPr lang="en-US" sz="1500" dirty="0">
                 <a:solidFill>
                   <a:srgbClr val="1B2733"/>
                 </a:solidFill>
@@ -7578,12 +7578,12 @@
         </p:nvSpPr>
         <p:spPr>
           <a:xfrm>
-            <a:off x="640080" y="3563874"/>
-            <a:ext cx="10911535" cy="715518"/>
+            <a:off x="640080" y="3610273"/>
+            <a:ext cx="10911535" cy="669119"/>
           </a:xfrm>
           <a:prstGeom prst="roundRect">
             <a:avLst>
-              <a:gd name="adj" fmla="val 5112"/>
+              <a:gd name="adj" fmla="val 5466"/>
             </a:avLst>
           </a:prstGeom>
           <a:solidFill>
@@ -7600,7 +7600,7 @@
         </p:nvSpPr>
         <p:spPr>
           <a:xfrm>
-            <a:off x="841248" y="3747897"/>
+            <a:off x="841248" y="3771096"/>
             <a:ext cx="347472" cy="347472"/>
           </a:xfrm>
           <a:prstGeom prst="ellipse">
@@ -7620,7 +7620,7 @@
         </p:nvSpPr>
         <p:spPr>
           <a:xfrm>
-            <a:off x="841248" y="3747897"/>
+            <a:off x="841248" y="3771096"/>
             <a:ext cx="347472" cy="347472"/>
           </a:xfrm>
           <a:prstGeom prst="rect">
@@ -7659,8 +7659,8 @@
         </p:nvSpPr>
         <p:spPr>
           <a:xfrm>
-            <a:off x="1280160" y="3627882"/>
-            <a:ext cx="10033711" cy="587502"/>
+            <a:off x="1280160" y="3674281"/>
+            <a:ext cx="10033711" cy="541103"/>
           </a:xfrm>
           <a:prstGeom prst="rect">
             <a:avLst/>
@@ -7719,7 +7719,7 @@
               <a:buNone/>
             </a:pPr>
             <a:r>
-              <a:rPr lang="en-US" sz="1400" dirty="0">
+              <a:rPr lang="en-US" sz="1500" dirty="0">
                 <a:solidFill>
                   <a:srgbClr val="1B2733"/>
                 </a:solidFill>
@@ -7837,7 +7837,7 @@
               <a:buNone/>
             </a:pPr>
             <a:r>
-              <a:rPr lang="en-US" sz="1250" dirty="0">
+              <a:rPr lang="en-US" sz="1350" dirty="0">
                 <a:solidFill>
                   <a:srgbClr val="1B2733"/>
                 </a:solidFill>
@@ -7955,7 +7955,7 @@
               <a:buNone/>
             </a:pPr>
             <a:r>
-              <a:rPr lang="en-US" sz="1250" dirty="0">
+              <a:rPr lang="en-US" sz="1350" dirty="0">
                 <a:solidFill>
                   <a:srgbClr val="1B2733"/>
                 </a:solidFill>
@@ -8056,7 +8056,7 @@
               <a:buNone/>
             </a:pPr>
             <a:r>
-              <a:rPr lang="en-US" sz="1200" dirty="0">
+              <a:rPr lang="en-US" sz="1300" dirty="0">
                 <a:solidFill>
                   <a:srgbClr val="DCEFEB"/>
                 </a:solidFill>
@@ -8603,7 +8603,7 @@
               <a:buNone/>
             </a:pPr>
             <a:r>
-              <a:rPr lang="en-US" sz="1500" dirty="0">
+              <a:rPr lang="en-US" sz="1600" dirty="0">
                 <a:solidFill>
                   <a:srgbClr val="1B2733"/>
                 </a:solidFill>
@@ -8746,7 +8746,7 @@
               <a:buNone/>
             </a:pPr>
             <a:r>
-              <a:rPr lang="en-US" sz="1500" dirty="0">
+              <a:rPr lang="en-US" sz="1600" dirty="0">
                 <a:solidFill>
                   <a:srgbClr val="1B2733"/>
                 </a:solidFill>
@@ -8889,7 +8889,7 @@
               <a:buNone/>
             </a:pPr>
             <a:r>
-              <a:rPr lang="en-US" sz="1500" dirty="0">
+              <a:rPr lang="en-US" sz="1600" dirty="0">
                 <a:solidFill>
                   <a:srgbClr val="1B2733"/>
                 </a:solidFill>
@@ -9032,7 +9032,7 @@
               <a:buNone/>
             </a:pPr>
             <a:r>
-              <a:rPr lang="en-US" sz="1500" dirty="0">
+              <a:rPr lang="en-US" sz="1600" dirty="0">
                 <a:solidFill>
                   <a:srgbClr val="1B2733"/>
                 </a:solidFill>
@@ -9175,7 +9175,7 @@
               <a:buNone/>
             </a:pPr>
             <a:r>
-              <a:rPr lang="en-US" sz="1350" dirty="0">
+              <a:rPr lang="en-US" sz="1500" dirty="0">
                 <a:solidFill>
                   <a:srgbClr val="1B2733"/>
                 </a:solidFill>
@@ -9590,7 +9590,7 @@
               <a:buNone/>
             </a:pPr>
             <a:r>
-              <a:rPr lang="en-US" sz="1400" dirty="0">
+              <a:rPr lang="en-US" sz="1500" dirty="0">
                 <a:solidFill>
                   <a:srgbClr val="1B2733"/>
                 </a:solidFill>
@@ -9733,7 +9733,7 @@
               <a:buNone/>
             </a:pPr>
             <a:r>
-              <a:rPr lang="en-US" sz="1400" dirty="0">
+              <a:rPr lang="en-US" sz="1500" dirty="0">
                 <a:solidFill>
                   <a:srgbClr val="1B2733"/>
                 </a:solidFill>
@@ -9876,7 +9876,7 @@
               <a:buNone/>
             </a:pPr>
             <a:r>
-              <a:rPr lang="en-US" sz="1400" dirty="0">
+              <a:rPr lang="en-US" sz="1500" dirty="0">
                 <a:solidFill>
                   <a:srgbClr val="1B2733"/>
                 </a:solidFill>
@@ -10019,7 +10019,7 @@
               <a:buNone/>
             </a:pPr>
             <a:r>
-              <a:rPr lang="en-US" sz="1400" dirty="0">
+              <a:rPr lang="en-US" sz="1500" dirty="0">
                 <a:solidFill>
                   <a:srgbClr val="1B2733"/>
                 </a:solidFill>
@@ -10162,7 +10162,7 @@
               <a:buNone/>
             </a:pPr>
             <a:r>
-              <a:rPr lang="en-US" sz="1400" dirty="0">
+              <a:rPr lang="en-US" sz="1500" dirty="0">
                 <a:solidFill>
                   <a:srgbClr val="1B2733"/>
                 </a:solidFill>
@@ -10515,7 +10515,7 @@
               <a:buNone/>
             </a:pPr>
             <a:r>
-              <a:rPr lang="en-US" sz="1400" dirty="0">
+              <a:rPr lang="en-US" sz="1500" dirty="0">
                 <a:solidFill>
                   <a:srgbClr val="1B2733"/>
                 </a:solidFill>
@@ -10658,7 +10658,7 @@
               <a:buNone/>
             </a:pPr>
             <a:r>
-              <a:rPr lang="en-US" sz="1400" dirty="0">
+              <a:rPr lang="en-US" sz="1500" dirty="0">
                 <a:solidFill>
                   <a:srgbClr val="1B2733"/>
                 </a:solidFill>
@@ -10801,7 +10801,7 @@
               <a:buNone/>
             </a:pPr>
             <a:r>
-              <a:rPr lang="en-US" sz="1400" dirty="0">
+              <a:rPr lang="en-US" sz="1500" dirty="0">
                 <a:solidFill>
                   <a:srgbClr val="1B2733"/>
                 </a:solidFill>
@@ -10944,7 +10944,7 @@
               <a:buNone/>
             </a:pPr>
             <a:r>
-              <a:rPr lang="en-US" sz="1400" dirty="0">
+              <a:rPr lang="en-US" sz="1500" dirty="0">
                 <a:solidFill>
                   <a:srgbClr val="1B2733"/>
                 </a:solidFill>
@@ -11087,7 +11087,7 @@
               <a:buNone/>
             </a:pPr>
             <a:r>
-              <a:rPr lang="en-US" sz="1400" dirty="0">
+              <a:rPr lang="en-US" sz="1500" dirty="0">
                 <a:solidFill>
                   <a:srgbClr val="1B2733"/>
                 </a:solidFill>
@@ -11381,11 +11381,11 @@
         <p:spPr>
           <a:xfrm>
             <a:off x="640080" y="1115568"/>
-            <a:ext cx="10911535" cy="870509"/>
+            <a:ext cx="10911535" cy="1107637"/>
           </a:xfrm>
           <a:prstGeom prst="roundRect">
             <a:avLst>
-              <a:gd name="adj" fmla="val 4202"/>
+              <a:gd name="adj" fmla="val 3302"/>
             </a:avLst>
           </a:prstGeom>
           <a:solidFill>
@@ -11402,7 +11402,7 @@
         </p:nvSpPr>
         <p:spPr>
           <a:xfrm>
-            <a:off x="841248" y="1377086"/>
+            <a:off x="841248" y="1495650"/>
             <a:ext cx="347472" cy="347472"/>
           </a:xfrm>
           <a:prstGeom prst="ellipse">
@@ -11422,7 +11422,7 @@
         </p:nvSpPr>
         <p:spPr>
           <a:xfrm>
-            <a:off x="841248" y="1377086"/>
+            <a:off x="841248" y="1495650"/>
             <a:ext cx="347472" cy="347472"/>
           </a:xfrm>
           <a:prstGeom prst="rect">
@@ -11462,7 +11462,7 @@
         <p:spPr>
           <a:xfrm>
             <a:off x="1280160" y="1179576"/>
-            <a:ext cx="10033711" cy="742493"/>
+            <a:ext cx="10033711" cy="979621"/>
           </a:xfrm>
           <a:prstGeom prst="rect">
             <a:avLst/>
@@ -11521,7 +11521,7 @@
               <a:buNone/>
             </a:pPr>
             <a:r>
-              <a:rPr lang="en-US" sz="1400" dirty="0">
+              <a:rPr lang="en-US" sz="1500" dirty="0">
                 <a:solidFill>
                   <a:srgbClr val="1B2733"/>
                 </a:solidFill>
@@ -11543,12 +11543,12 @@
         </p:nvSpPr>
         <p:spPr>
           <a:xfrm>
-            <a:off x="640080" y="2086661"/>
-            <a:ext cx="10911535" cy="870509"/>
+            <a:off x="640080" y="2323789"/>
+            <a:ext cx="10911535" cy="712424"/>
           </a:xfrm>
           <a:prstGeom prst="roundRect">
             <a:avLst>
-              <a:gd name="adj" fmla="val 4202"/>
+              <a:gd name="adj" fmla="val 5134"/>
             </a:avLst>
           </a:prstGeom>
           <a:solidFill>
@@ -11565,7 +11565,7 @@
         </p:nvSpPr>
         <p:spPr>
           <a:xfrm>
-            <a:off x="841248" y="2348179"/>
+            <a:off x="841248" y="2506264"/>
             <a:ext cx="347472" cy="347472"/>
           </a:xfrm>
           <a:prstGeom prst="ellipse">
@@ -11585,7 +11585,7 @@
         </p:nvSpPr>
         <p:spPr>
           <a:xfrm>
-            <a:off x="841248" y="2348179"/>
+            <a:off x="841248" y="2506264"/>
             <a:ext cx="347472" cy="347472"/>
           </a:xfrm>
           <a:prstGeom prst="rect">
@@ -11624,8 +11624,8 @@
         </p:nvSpPr>
         <p:spPr>
           <a:xfrm>
-            <a:off x="1280160" y="2150669"/>
-            <a:ext cx="10033711" cy="742493"/>
+            <a:off x="1280160" y="2387797"/>
+            <a:ext cx="10033711" cy="584408"/>
           </a:xfrm>
           <a:prstGeom prst="rect">
             <a:avLst/>
@@ -11684,7 +11684,7 @@
               <a:buNone/>
             </a:pPr>
             <a:r>
-              <a:rPr lang="en-US" sz="1400" dirty="0">
+              <a:rPr lang="en-US" sz="1500" dirty="0">
                 <a:solidFill>
                   <a:srgbClr val="1B2733"/>
                 </a:solidFill>
@@ -11706,12 +11706,12 @@
         </p:nvSpPr>
         <p:spPr>
           <a:xfrm>
-            <a:off x="640080" y="3057754"/>
-            <a:ext cx="10911535" cy="870509"/>
+            <a:off x="640080" y="3136796"/>
+            <a:ext cx="10911535" cy="712424"/>
           </a:xfrm>
           <a:prstGeom prst="roundRect">
             <a:avLst>
-              <a:gd name="adj" fmla="val 4202"/>
+              <a:gd name="adj" fmla="val 5134"/>
             </a:avLst>
           </a:prstGeom>
           <a:solidFill>
@@ -11787,8 +11787,8 @@
         </p:nvSpPr>
         <p:spPr>
           <a:xfrm>
-            <a:off x="1280160" y="3121762"/>
-            <a:ext cx="10033711" cy="742493"/>
+            <a:off x="1280160" y="3200804"/>
+            <a:ext cx="10033711" cy="584408"/>
           </a:xfrm>
           <a:prstGeom prst="rect">
             <a:avLst/>
@@ -11847,7 +11847,7 @@
               <a:buNone/>
             </a:pPr>
             <a:r>
-              <a:rPr lang="en-US" sz="1400" dirty="0">
+              <a:rPr lang="en-US" sz="1500" dirty="0">
                 <a:solidFill>
                   <a:srgbClr val="1B2733"/>
                 </a:solidFill>
@@ -11869,12 +11869,12 @@
         </p:nvSpPr>
         <p:spPr>
           <a:xfrm>
-            <a:off x="640080" y="4028846"/>
-            <a:ext cx="10911535" cy="870509"/>
+            <a:off x="640080" y="3949804"/>
+            <a:ext cx="10911535" cy="1107637"/>
           </a:xfrm>
           <a:prstGeom prst="roundRect">
             <a:avLst>
-              <a:gd name="adj" fmla="val 4202"/>
+              <a:gd name="adj" fmla="val 3302"/>
             </a:avLst>
           </a:prstGeom>
           <a:solidFill>
@@ -11891,7 +11891,7 @@
         </p:nvSpPr>
         <p:spPr>
           <a:xfrm>
-            <a:off x="841248" y="4290365"/>
+            <a:off x="841248" y="4329886"/>
             <a:ext cx="347472" cy="347472"/>
           </a:xfrm>
           <a:prstGeom prst="ellipse">
@@ -11911,7 +11911,7 @@
         </p:nvSpPr>
         <p:spPr>
           <a:xfrm>
-            <a:off x="841248" y="4290365"/>
+            <a:off x="841248" y="4329886"/>
             <a:ext cx="347472" cy="347472"/>
           </a:xfrm>
           <a:prstGeom prst="rect">
@@ -11950,8 +11950,8 @@
         </p:nvSpPr>
         <p:spPr>
           <a:xfrm>
-            <a:off x="1280160" y="4092854"/>
-            <a:ext cx="10033711" cy="742493"/>
+            <a:off x="1280160" y="4013812"/>
+            <a:ext cx="10033711" cy="979621"/>
           </a:xfrm>
           <a:prstGeom prst="rect">
             <a:avLst/>
@@ -12010,7 +12010,7 @@
               <a:buNone/>
             </a:pPr>
             <a:r>
-              <a:rPr lang="en-US" sz="1400" dirty="0">
+              <a:rPr lang="en-US" sz="1500" dirty="0">
                 <a:solidFill>
                   <a:srgbClr val="1B2733"/>
                 </a:solidFill>
@@ -12032,12 +12032,12 @@
         </p:nvSpPr>
         <p:spPr>
           <a:xfrm>
-            <a:off x="640080" y="4999939"/>
-            <a:ext cx="10911535" cy="870509"/>
+            <a:off x="640080" y="5158024"/>
+            <a:ext cx="10911535" cy="712424"/>
           </a:xfrm>
           <a:prstGeom prst="roundRect">
             <a:avLst>
-              <a:gd name="adj" fmla="val 4202"/>
+              <a:gd name="adj" fmla="val 5134"/>
             </a:avLst>
           </a:prstGeom>
           <a:solidFill>
@@ -12054,7 +12054,7 @@
         </p:nvSpPr>
         <p:spPr>
           <a:xfrm>
-            <a:off x="841248" y="5261458"/>
+            <a:off x="841248" y="5340500"/>
             <a:ext cx="347472" cy="347472"/>
           </a:xfrm>
           <a:prstGeom prst="ellipse">
@@ -12074,7 +12074,7 @@
         </p:nvSpPr>
         <p:spPr>
           <a:xfrm>
-            <a:off x="841248" y="5261458"/>
+            <a:off x="841248" y="5340500"/>
             <a:ext cx="347472" cy="347472"/>
           </a:xfrm>
           <a:prstGeom prst="rect">
@@ -12113,8 +12113,8 @@
         </p:nvSpPr>
         <p:spPr>
           <a:xfrm>
-            <a:off x="1280160" y="5063947"/>
-            <a:ext cx="10033711" cy="742493"/>
+            <a:off x="1280160" y="5222032"/>
+            <a:ext cx="10033711" cy="584408"/>
           </a:xfrm>
           <a:prstGeom prst="rect">
             <a:avLst/>
@@ -12173,7 +12173,7 @@
               <a:buNone/>
             </a:pPr>
             <a:r>
-              <a:rPr lang="en-US" sz="1400" dirty="0">
+              <a:rPr lang="en-US" sz="1500" dirty="0">
                 <a:solidFill>
                   <a:srgbClr val="1B2733"/>
                 </a:solidFill>
@@ -12599,11 +12599,11 @@
         <p:spPr>
           <a:xfrm>
             <a:off x="640080" y="1115568"/>
-            <a:ext cx="10911535" cy="870509"/>
+            <a:ext cx="10911535" cy="1107637"/>
           </a:xfrm>
           <a:prstGeom prst="roundRect">
             <a:avLst>
-              <a:gd name="adj" fmla="val 4202"/>
+              <a:gd name="adj" fmla="val 3302"/>
             </a:avLst>
           </a:prstGeom>
           <a:solidFill>
@@ -12620,7 +12620,7 @@
         </p:nvSpPr>
         <p:spPr>
           <a:xfrm>
-            <a:off x="841248" y="1377086"/>
+            <a:off x="841248" y="1495650"/>
             <a:ext cx="347472" cy="347472"/>
           </a:xfrm>
           <a:prstGeom prst="ellipse">
@@ -12640,7 +12640,7 @@
         </p:nvSpPr>
         <p:spPr>
           <a:xfrm>
-            <a:off x="841248" y="1377086"/>
+            <a:off x="841248" y="1495650"/>
             <a:ext cx="347472" cy="347472"/>
           </a:xfrm>
           <a:prstGeom prst="rect">
@@ -12680,7 +12680,7 @@
         <p:spPr>
           <a:xfrm>
             <a:off x="1280160" y="1179576"/>
-            <a:ext cx="10033711" cy="742493"/>
+            <a:ext cx="10033711" cy="979621"/>
           </a:xfrm>
           <a:prstGeom prst="rect">
             <a:avLst/>
@@ -12739,7 +12739,7 @@
               <a:buNone/>
             </a:pPr>
             <a:r>
-              <a:rPr lang="en-US" sz="1400" dirty="0">
+              <a:rPr lang="en-US" sz="1500" dirty="0">
                 <a:solidFill>
                   <a:srgbClr val="1B2733"/>
                 </a:solidFill>
@@ -12761,12 +12761,12 @@
         </p:nvSpPr>
         <p:spPr>
           <a:xfrm>
-            <a:off x="640080" y="2086661"/>
-            <a:ext cx="10911535" cy="870509"/>
+            <a:off x="640080" y="2323789"/>
+            <a:ext cx="10911535" cy="712424"/>
           </a:xfrm>
           <a:prstGeom prst="roundRect">
             <a:avLst>
-              <a:gd name="adj" fmla="val 4202"/>
+              <a:gd name="adj" fmla="val 5134"/>
             </a:avLst>
           </a:prstGeom>
           <a:solidFill>
@@ -12783,7 +12783,7 @@
         </p:nvSpPr>
         <p:spPr>
           <a:xfrm>
-            <a:off x="841248" y="2348179"/>
+            <a:off x="841248" y="2506264"/>
             <a:ext cx="347472" cy="347472"/>
           </a:xfrm>
           <a:prstGeom prst="ellipse">
@@ -12803,7 +12803,7 @@
         </p:nvSpPr>
         <p:spPr>
           <a:xfrm>
-            <a:off x="841248" y="2348179"/>
+            <a:off x="841248" y="2506264"/>
             <a:ext cx="347472" cy="347472"/>
           </a:xfrm>
           <a:prstGeom prst="rect">
@@ -12842,8 +12842,8 @@
         </p:nvSpPr>
         <p:spPr>
           <a:xfrm>
-            <a:off x="1280160" y="2150669"/>
-            <a:ext cx="10033711" cy="742493"/>
+            <a:off x="1280160" y="2387797"/>
+            <a:ext cx="10033711" cy="584408"/>
           </a:xfrm>
           <a:prstGeom prst="rect">
             <a:avLst/>
@@ -12902,7 +12902,7 @@
               <a:buNone/>
             </a:pPr>
             <a:r>
-              <a:rPr lang="en-US" sz="1400" dirty="0">
+              <a:rPr lang="en-US" sz="1500" dirty="0">
                 <a:solidFill>
                   <a:srgbClr val="1B2733"/>
                 </a:solidFill>
@@ -12924,12 +12924,12 @@
         </p:nvSpPr>
         <p:spPr>
           <a:xfrm>
-            <a:off x="640080" y="3057754"/>
-            <a:ext cx="10911535" cy="870509"/>
+            <a:off x="640080" y="3136796"/>
+            <a:ext cx="10911535" cy="910030"/>
           </a:xfrm>
           <a:prstGeom prst="roundRect">
             <a:avLst>
-              <a:gd name="adj" fmla="val 4202"/>
+              <a:gd name="adj" fmla="val 4019"/>
             </a:avLst>
           </a:prstGeom>
           <a:solidFill>
@@ -12946,7 +12946,7 @@
         </p:nvSpPr>
         <p:spPr>
           <a:xfrm>
-            <a:off x="841248" y="3319272"/>
+            <a:off x="841248" y="3418075"/>
             <a:ext cx="347472" cy="347472"/>
           </a:xfrm>
           <a:prstGeom prst="ellipse">
@@ -12966,7 +12966,7 @@
         </p:nvSpPr>
         <p:spPr>
           <a:xfrm>
-            <a:off x="841248" y="3319272"/>
+            <a:off x="841248" y="3418075"/>
             <a:ext cx="347472" cy="347472"/>
           </a:xfrm>
           <a:prstGeom prst="rect">
@@ -13005,8 +13005,8 @@
         </p:nvSpPr>
         <p:spPr>
           <a:xfrm>
-            <a:off x="1280160" y="3121762"/>
-            <a:ext cx="10033711" cy="742493"/>
+            <a:off x="1280160" y="3200804"/>
+            <a:ext cx="10033711" cy="782014"/>
           </a:xfrm>
           <a:prstGeom prst="rect">
             <a:avLst/>
@@ -13065,7 +13065,7 @@
               <a:buNone/>
             </a:pPr>
             <a:r>
-              <a:rPr lang="en-US" sz="1400" dirty="0">
+              <a:rPr lang="en-US" sz="1500" dirty="0">
                 <a:solidFill>
                   <a:srgbClr val="1B2733"/>
                 </a:solidFill>
@@ -13087,12 +13087,12 @@
         </p:nvSpPr>
         <p:spPr>
           <a:xfrm>
-            <a:off x="640080" y="4028846"/>
-            <a:ext cx="10911535" cy="870509"/>
+            <a:off x="640080" y="4147410"/>
+            <a:ext cx="10911535" cy="712424"/>
           </a:xfrm>
           <a:prstGeom prst="roundRect">
             <a:avLst>
-              <a:gd name="adj" fmla="val 4202"/>
+              <a:gd name="adj" fmla="val 5134"/>
             </a:avLst>
           </a:prstGeom>
           <a:solidFill>
@@ -13109,7 +13109,7 @@
         </p:nvSpPr>
         <p:spPr>
           <a:xfrm>
-            <a:off x="841248" y="4290365"/>
+            <a:off x="841248" y="4329886"/>
             <a:ext cx="347472" cy="347472"/>
           </a:xfrm>
           <a:prstGeom prst="ellipse">
@@ -13129,7 +13129,7 @@
         </p:nvSpPr>
         <p:spPr>
           <a:xfrm>
-            <a:off x="841248" y="4290365"/>
+            <a:off x="841248" y="4329886"/>
             <a:ext cx="347472" cy="347472"/>
           </a:xfrm>
           <a:prstGeom prst="rect">
@@ -13168,8 +13168,8 @@
         </p:nvSpPr>
         <p:spPr>
           <a:xfrm>
-            <a:off x="1280160" y="4092854"/>
-            <a:ext cx="10033711" cy="742493"/>
+            <a:off x="1280160" y="4211418"/>
+            <a:ext cx="10033711" cy="584408"/>
           </a:xfrm>
           <a:prstGeom prst="rect">
             <a:avLst/>
@@ -13228,7 +13228,7 @@
               <a:buNone/>
             </a:pPr>
             <a:r>
-              <a:rPr lang="en-US" sz="1400" dirty="0">
+              <a:rPr lang="en-US" sz="1500" dirty="0">
                 <a:solidFill>
                   <a:srgbClr val="1B2733"/>
                 </a:solidFill>
@@ -13250,12 +13250,12 @@
         </p:nvSpPr>
         <p:spPr>
           <a:xfrm>
-            <a:off x="640080" y="4999939"/>
-            <a:ext cx="10911535" cy="870509"/>
+            <a:off x="640080" y="4960418"/>
+            <a:ext cx="10911535" cy="910030"/>
           </a:xfrm>
           <a:prstGeom prst="roundRect">
             <a:avLst>
-              <a:gd name="adj" fmla="val 4202"/>
+              <a:gd name="adj" fmla="val 4019"/>
             </a:avLst>
           </a:prstGeom>
           <a:solidFill>
@@ -13272,7 +13272,7 @@
         </p:nvSpPr>
         <p:spPr>
           <a:xfrm>
-            <a:off x="841248" y="5261458"/>
+            <a:off x="841248" y="5241697"/>
             <a:ext cx="347472" cy="347472"/>
           </a:xfrm>
           <a:prstGeom prst="ellipse">
@@ -13292,7 +13292,7 @@
         </p:nvSpPr>
         <p:spPr>
           <a:xfrm>
-            <a:off x="841248" y="5261458"/>
+            <a:off x="841248" y="5241697"/>
             <a:ext cx="347472" cy="347472"/>
           </a:xfrm>
           <a:prstGeom prst="rect">
@@ -13331,8 +13331,8 @@
         </p:nvSpPr>
         <p:spPr>
           <a:xfrm>
-            <a:off x="1280160" y="5063947"/>
-            <a:ext cx="10033711" cy="742493"/>
+            <a:off x="1280160" y="5024426"/>
+            <a:ext cx="10033711" cy="782014"/>
           </a:xfrm>
           <a:prstGeom prst="rect">
             <a:avLst/>
@@ -13391,7 +13391,7 @@
               <a:buNone/>
             </a:pPr>
             <a:r>
-              <a:rPr lang="en-US" sz="1400" dirty="0">
+              <a:rPr lang="en-US" sz="1500" dirty="0">
                 <a:solidFill>
                   <a:srgbClr val="1B2733"/>
                 </a:solidFill>
@@ -14651,7 +14651,7 @@
                 <a:ea typeface="Calibri" pitchFamily="34" charset="-122"/>
                 <a:cs typeface="Calibri" pitchFamily="34" charset="-120"/>
               </a:rPr>
-              <a:t>What You'll Learn　</a:t>
+              <a:t>What You'll Learn  </a:t>
             </a:r>
             <a:pPr indent="0" marL="0">
               <a:lnSpc>
@@ -14680,7 +14680,7 @@
               <a:buNone/>
             </a:pPr>
             <a:r>
-              <a:rPr lang="en-US" sz="1250" dirty="0">
+              <a:rPr lang="en-US" sz="1300" dirty="0">
                 <a:solidFill>
                   <a:srgbClr val="1B2733"/>
                 </a:solidFill>
@@ -14823,7 +14823,7 @@
               <a:buNone/>
             </a:pPr>
             <a:r>
-              <a:rPr lang="en-US" sz="1400" dirty="0">
+              <a:rPr lang="en-US" sz="1500" dirty="0">
                 <a:solidFill>
                   <a:srgbClr val="12B198"/>
                 </a:solidFill>
@@ -14891,7 +14891,7 @@
               <a:buNone/>
             </a:pPr>
             <a:r>
-              <a:rPr lang="en-US" sz="1350" dirty="0">
+              <a:rPr lang="en-US" sz="1400" dirty="0">
                 <a:solidFill>
                   <a:srgbClr val="1B2733"/>
                 </a:solidFill>
@@ -14937,7 +14937,7 @@
               <a:buNone/>
             </a:pPr>
             <a:r>
-              <a:rPr lang="en-US" sz="1350" dirty="0">
+              <a:rPr lang="en-US" sz="1400" dirty="0">
                 <a:solidFill>
                   <a:srgbClr val="1B2733"/>
                 </a:solidFill>
@@ -14983,7 +14983,7 @@
               <a:buNone/>
             </a:pPr>
             <a:r>
-              <a:rPr lang="en-US" sz="1350" dirty="0">
+              <a:rPr lang="en-US" sz="1400" dirty="0">
                 <a:solidFill>
                   <a:srgbClr val="1B2733"/>
                 </a:solidFill>
@@ -15029,7 +15029,7 @@
               <a:buNone/>
             </a:pPr>
             <a:r>
-              <a:rPr lang="en-US" sz="1350" dirty="0">
+              <a:rPr lang="en-US" sz="1400" dirty="0">
                 <a:solidFill>
                   <a:srgbClr val="1B2733"/>
                 </a:solidFill>
@@ -15172,7 +15172,7 @@
               <a:buNone/>
             </a:pPr>
             <a:r>
-              <a:rPr lang="en-US" sz="1400" dirty="0">
+              <a:rPr lang="en-US" sz="1500" dirty="0">
                 <a:solidFill>
                   <a:srgbClr val="12B198"/>
                 </a:solidFill>
@@ -15240,7 +15240,7 @@
               <a:buNone/>
             </a:pPr>
             <a:r>
-              <a:rPr lang="en-US" sz="1350" dirty="0">
+              <a:rPr lang="en-US" sz="1400" dirty="0">
                 <a:solidFill>
                   <a:srgbClr val="1B2733"/>
                 </a:solidFill>
@@ -15286,7 +15286,7 @@
               <a:buNone/>
             </a:pPr>
             <a:r>
-              <a:rPr lang="en-US" sz="1350" dirty="0">
+              <a:rPr lang="en-US" sz="1400" dirty="0">
                 <a:solidFill>
                   <a:srgbClr val="1B2733"/>
                 </a:solidFill>
@@ -15332,7 +15332,7 @@
               <a:buNone/>
             </a:pPr>
             <a:r>
-              <a:rPr lang="en-US" sz="1350" dirty="0">
+              <a:rPr lang="en-US" sz="1400" dirty="0">
                 <a:solidFill>
                   <a:srgbClr val="1B2733"/>
                 </a:solidFill>
@@ -15378,7 +15378,7 @@
               <a:buNone/>
             </a:pPr>
             <a:r>
-              <a:rPr lang="en-US" sz="1350" dirty="0">
+              <a:rPr lang="en-US" sz="1400" dirty="0">
                 <a:solidFill>
                   <a:srgbClr val="1B2733"/>
                 </a:solidFill>
@@ -15924,7 +15924,7 @@
               <a:buNone/>
             </a:pPr>
             <a:r>
-              <a:rPr lang="en-US" sz="1400" dirty="0">
+              <a:rPr lang="en-US" sz="1500" dirty="0">
                 <a:solidFill>
                   <a:srgbClr val="12B198"/>
                 </a:solidFill>
@@ -15992,7 +15992,7 @@
               <a:buNone/>
             </a:pPr>
             <a:r>
-              <a:rPr lang="en-US" sz="1350" dirty="0">
+              <a:rPr lang="en-US" sz="1400" dirty="0">
                 <a:solidFill>
                   <a:srgbClr val="1B2733"/>
                 </a:solidFill>
@@ -16038,7 +16038,7 @@
               <a:buNone/>
             </a:pPr>
             <a:r>
-              <a:rPr lang="en-US" sz="1350" dirty="0">
+              <a:rPr lang="en-US" sz="1400" dirty="0">
                 <a:solidFill>
                   <a:srgbClr val="1B2733"/>
                 </a:solidFill>
@@ -16084,7 +16084,7 @@
               <a:buNone/>
             </a:pPr>
             <a:r>
-              <a:rPr lang="en-US" sz="1350" dirty="0">
+              <a:rPr lang="en-US" sz="1400" dirty="0">
                 <a:solidFill>
                   <a:srgbClr val="1B2733"/>
                 </a:solidFill>
@@ -16130,7 +16130,7 @@
               <a:buNone/>
             </a:pPr>
             <a:r>
-              <a:rPr lang="en-US" sz="1350" dirty="0">
+              <a:rPr lang="en-US" sz="1400" dirty="0">
                 <a:solidFill>
                   <a:srgbClr val="1B2733"/>
                 </a:solidFill>
@@ -16273,7 +16273,7 @@
               <a:buNone/>
             </a:pPr>
             <a:r>
-              <a:rPr lang="en-US" sz="1400" dirty="0">
+              <a:rPr lang="en-US" sz="1500" dirty="0">
                 <a:solidFill>
                   <a:srgbClr val="12B198"/>
                 </a:solidFill>
@@ -16341,7 +16341,7 @@
               <a:buNone/>
             </a:pPr>
             <a:r>
-              <a:rPr lang="en-US" sz="1350" dirty="0">
+              <a:rPr lang="en-US" sz="1400" dirty="0">
                 <a:solidFill>
                   <a:srgbClr val="1B2733"/>
                 </a:solidFill>
@@ -16387,7 +16387,7 @@
               <a:buNone/>
             </a:pPr>
             <a:r>
-              <a:rPr lang="en-US" sz="1350" dirty="0">
+              <a:rPr lang="en-US" sz="1400" dirty="0">
                 <a:solidFill>
                   <a:srgbClr val="1B2733"/>
                 </a:solidFill>
@@ -16433,7 +16433,7 @@
               <a:buNone/>
             </a:pPr>
             <a:r>
-              <a:rPr lang="en-US" sz="1350" dirty="0">
+              <a:rPr lang="en-US" sz="1400" dirty="0">
                 <a:solidFill>
                   <a:srgbClr val="1B2733"/>
                 </a:solidFill>
@@ -16479,7 +16479,7 @@
               <a:buNone/>
             </a:pPr>
             <a:r>
-              <a:rPr lang="en-US" sz="1350" dirty="0">
+              <a:rPr lang="en-US" sz="1400" dirty="0">
                 <a:solidFill>
                   <a:srgbClr val="1B2733"/>
                 </a:solidFill>
@@ -16971,7 +16971,7 @@
                 <a:ea typeface="Calibri" pitchFamily="34" charset="-122"/>
                 <a:cs typeface="Calibri" pitchFamily="34" charset="-120"/>
               </a:rPr>
-              <a:t>What You'll Learn　</a:t>
+              <a:t>What You'll Learn  </a:t>
             </a:r>
             <a:pPr indent="0" marL="0">
               <a:lnSpc>
@@ -17000,7 +17000,7 @@
               <a:buNone/>
             </a:pPr>
             <a:r>
-              <a:rPr lang="en-US" sz="1250" dirty="0">
+              <a:rPr lang="en-US" sz="1300" dirty="0">
                 <a:solidFill>
                   <a:srgbClr val="1B2733"/>
                 </a:solidFill>
@@ -17143,7 +17143,7 @@
               <a:buNone/>
             </a:pPr>
             <a:r>
-              <a:rPr lang="en-US" sz="1400" dirty="0">
+              <a:rPr lang="en-US" sz="1500" dirty="0">
                 <a:solidFill>
                   <a:srgbClr val="12B198"/>
                 </a:solidFill>
@@ -17211,7 +17211,7 @@
               <a:buNone/>
             </a:pPr>
             <a:r>
-              <a:rPr lang="en-US" sz="1350" dirty="0">
+              <a:rPr lang="en-US" sz="1400" dirty="0">
                 <a:solidFill>
                   <a:srgbClr val="1B2733"/>
                 </a:solidFill>
@@ -17257,7 +17257,7 @@
               <a:buNone/>
             </a:pPr>
             <a:r>
-              <a:rPr lang="en-US" sz="1350" dirty="0">
+              <a:rPr lang="en-US" sz="1400" dirty="0">
                 <a:solidFill>
                   <a:srgbClr val="1B2733"/>
                 </a:solidFill>
@@ -17303,7 +17303,7 @@
               <a:buNone/>
             </a:pPr>
             <a:r>
-              <a:rPr lang="en-US" sz="1350" dirty="0">
+              <a:rPr lang="en-US" sz="1400" dirty="0">
                 <a:solidFill>
                   <a:srgbClr val="1B2733"/>
                 </a:solidFill>
@@ -17349,7 +17349,7 @@
               <a:buNone/>
             </a:pPr>
             <a:r>
-              <a:rPr lang="en-US" sz="1350" dirty="0">
+              <a:rPr lang="en-US" sz="1400" dirty="0">
                 <a:solidFill>
                   <a:srgbClr val="1B2733"/>
                 </a:solidFill>
@@ -17492,7 +17492,7 @@
               <a:buNone/>
             </a:pPr>
             <a:r>
-              <a:rPr lang="en-US" sz="1400" dirty="0">
+              <a:rPr lang="en-US" sz="1500" dirty="0">
                 <a:solidFill>
                   <a:srgbClr val="12B198"/>
                 </a:solidFill>
@@ -17560,7 +17560,7 @@
               <a:buNone/>
             </a:pPr>
             <a:r>
-              <a:rPr lang="en-US" sz="1350" dirty="0">
+              <a:rPr lang="en-US" sz="1400" dirty="0">
                 <a:solidFill>
                   <a:srgbClr val="1B2733"/>
                 </a:solidFill>
@@ -17606,7 +17606,7 @@
               <a:buNone/>
             </a:pPr>
             <a:r>
-              <a:rPr lang="en-US" sz="1350" dirty="0">
+              <a:rPr lang="en-US" sz="1400" dirty="0">
                 <a:solidFill>
                   <a:srgbClr val="1B2733"/>
                 </a:solidFill>
@@ -17652,7 +17652,7 @@
               <a:buNone/>
             </a:pPr>
             <a:r>
-              <a:rPr lang="en-US" sz="1350" dirty="0">
+              <a:rPr lang="en-US" sz="1400" dirty="0">
                 <a:solidFill>
                   <a:srgbClr val="1B2733"/>
                 </a:solidFill>
@@ -17698,7 +17698,7 @@
               <a:buNone/>
             </a:pPr>
             <a:r>
-              <a:rPr lang="en-US" sz="1350" dirty="0">
+              <a:rPr lang="en-US" sz="1400" dirty="0">
                 <a:solidFill>
                   <a:srgbClr val="1B2733"/>
                 </a:solidFill>
@@ -18244,7 +18244,7 @@
               <a:buNone/>
             </a:pPr>
             <a:r>
-              <a:rPr lang="en-US" sz="1400" dirty="0">
+              <a:rPr lang="en-US" sz="1500" dirty="0">
                 <a:solidFill>
                   <a:srgbClr val="12B198"/>
                 </a:solidFill>
@@ -18312,7 +18312,7 @@
               <a:buNone/>
             </a:pPr>
             <a:r>
-              <a:rPr lang="en-US" sz="1350" dirty="0">
+              <a:rPr lang="en-US" sz="1400" dirty="0">
                 <a:solidFill>
                   <a:srgbClr val="1B2733"/>
                 </a:solidFill>
@@ -18358,7 +18358,7 @@
               <a:buNone/>
             </a:pPr>
             <a:r>
-              <a:rPr lang="en-US" sz="1350" dirty="0">
+              <a:rPr lang="en-US" sz="1400" dirty="0">
                 <a:solidFill>
                   <a:srgbClr val="1B2733"/>
                 </a:solidFill>
@@ -18404,7 +18404,7 @@
               <a:buNone/>
             </a:pPr>
             <a:r>
-              <a:rPr lang="en-US" sz="1350" dirty="0">
+              <a:rPr lang="en-US" sz="1400" dirty="0">
                 <a:solidFill>
                   <a:srgbClr val="1B2733"/>
                 </a:solidFill>
@@ -18450,7 +18450,7 @@
               <a:buNone/>
             </a:pPr>
             <a:r>
-              <a:rPr lang="en-US" sz="1350" dirty="0">
+              <a:rPr lang="en-US" sz="1400" dirty="0">
                 <a:solidFill>
                   <a:srgbClr val="1B2733"/>
                 </a:solidFill>
@@ -18593,7 +18593,7 @@
               <a:buNone/>
             </a:pPr>
             <a:r>
-              <a:rPr lang="en-US" sz="1400" dirty="0">
+              <a:rPr lang="en-US" sz="1500" dirty="0">
                 <a:solidFill>
                   <a:srgbClr val="12B198"/>
                 </a:solidFill>
@@ -18661,7 +18661,7 @@
               <a:buNone/>
             </a:pPr>
             <a:r>
-              <a:rPr lang="en-US" sz="1350" dirty="0">
+              <a:rPr lang="en-US" sz="1400" dirty="0">
                 <a:solidFill>
                   <a:srgbClr val="1B2733"/>
                 </a:solidFill>
@@ -18707,7 +18707,7 @@
               <a:buNone/>
             </a:pPr>
             <a:r>
-              <a:rPr lang="en-US" sz="1350" dirty="0">
+              <a:rPr lang="en-US" sz="1400" dirty="0">
                 <a:solidFill>
                   <a:srgbClr val="1B2733"/>
                 </a:solidFill>
@@ -18753,7 +18753,7 @@
               <a:buNone/>
             </a:pPr>
             <a:r>
-              <a:rPr lang="en-US" sz="1350" dirty="0">
+              <a:rPr lang="en-US" sz="1400" dirty="0">
                 <a:solidFill>
                   <a:srgbClr val="1B2733"/>
                 </a:solidFill>
@@ -18799,7 +18799,7 @@
               <a:buNone/>
             </a:pPr>
             <a:r>
-              <a:rPr lang="en-US" sz="1350" dirty="0">
+              <a:rPr lang="en-US" sz="1400" dirty="0">
                 <a:solidFill>
                   <a:srgbClr val="1B2733"/>
                 </a:solidFill>
@@ -19291,7 +19291,7 @@
                 <a:ea typeface="Calibri" pitchFamily="34" charset="-122"/>
                 <a:cs typeface="Calibri" pitchFamily="34" charset="-120"/>
               </a:rPr>
-              <a:t>What You'll Learn　</a:t>
+              <a:t>What You'll Learn  </a:t>
             </a:r>
             <a:pPr indent="0" marL="0">
               <a:lnSpc>
@@ -19320,7 +19320,7 @@
               <a:buNone/>
             </a:pPr>
             <a:r>
-              <a:rPr lang="en-US" sz="1250" dirty="0">
+              <a:rPr lang="en-US" sz="1300" dirty="0">
                 <a:solidFill>
                   <a:srgbClr val="1B2733"/>
                 </a:solidFill>
@@ -19463,7 +19463,7 @@
               <a:buNone/>
             </a:pPr>
             <a:r>
-              <a:rPr lang="en-US" sz="1400" dirty="0">
+              <a:rPr lang="en-US" sz="1500" dirty="0">
                 <a:solidFill>
                   <a:srgbClr val="12B198"/>
                 </a:solidFill>
@@ -19531,7 +19531,7 @@
               <a:buNone/>
             </a:pPr>
             <a:r>
-              <a:rPr lang="en-US" sz="1350" dirty="0">
+              <a:rPr lang="en-US" sz="1400" dirty="0">
                 <a:solidFill>
                   <a:srgbClr val="1B2733"/>
                 </a:solidFill>
@@ -19577,7 +19577,7 @@
               <a:buNone/>
             </a:pPr>
             <a:r>
-              <a:rPr lang="en-US" sz="1350" dirty="0">
+              <a:rPr lang="en-US" sz="1400" dirty="0">
                 <a:solidFill>
                   <a:srgbClr val="1B2733"/>
                 </a:solidFill>
@@ -19623,7 +19623,7 @@
               <a:buNone/>
             </a:pPr>
             <a:r>
-              <a:rPr lang="en-US" sz="1350" dirty="0">
+              <a:rPr lang="en-US" sz="1400" dirty="0">
                 <a:solidFill>
                   <a:srgbClr val="1B2733"/>
                 </a:solidFill>
@@ -19669,7 +19669,7 @@
               <a:buNone/>
             </a:pPr>
             <a:r>
-              <a:rPr lang="en-US" sz="1350" dirty="0">
+              <a:rPr lang="en-US" sz="1400" dirty="0">
                 <a:solidFill>
                   <a:srgbClr val="1B2733"/>
                 </a:solidFill>
@@ -19812,7 +19812,7 @@
               <a:buNone/>
             </a:pPr>
             <a:r>
-              <a:rPr lang="en-US" sz="1400" dirty="0">
+              <a:rPr lang="en-US" sz="1500" dirty="0">
                 <a:solidFill>
                   <a:srgbClr val="12B198"/>
                 </a:solidFill>
@@ -19880,7 +19880,7 @@
               <a:buNone/>
             </a:pPr>
             <a:r>
-              <a:rPr lang="en-US" sz="1350" dirty="0">
+              <a:rPr lang="en-US" sz="1400" dirty="0">
                 <a:solidFill>
                   <a:srgbClr val="1B2733"/>
                 </a:solidFill>
@@ -19926,7 +19926,7 @@
               <a:buNone/>
             </a:pPr>
             <a:r>
-              <a:rPr lang="en-US" sz="1350" dirty="0">
+              <a:rPr lang="en-US" sz="1400" dirty="0">
                 <a:solidFill>
                   <a:srgbClr val="1B2733"/>
                 </a:solidFill>
@@ -19972,7 +19972,7 @@
               <a:buNone/>
             </a:pPr>
             <a:r>
-              <a:rPr lang="en-US" sz="1350" dirty="0">
+              <a:rPr lang="en-US" sz="1400" dirty="0">
                 <a:solidFill>
                   <a:srgbClr val="1B2733"/>
                 </a:solidFill>
@@ -20018,7 +20018,7 @@
               <a:buNone/>
             </a:pPr>
             <a:r>
-              <a:rPr lang="en-US" sz="1350" dirty="0">
+              <a:rPr lang="en-US" sz="1400" dirty="0">
                 <a:solidFill>
                   <a:srgbClr val="1B2733"/>
                 </a:solidFill>
@@ -20564,7 +20564,7 @@
               <a:buNone/>
             </a:pPr>
             <a:r>
-              <a:rPr lang="en-US" sz="1400" dirty="0">
+              <a:rPr lang="en-US" sz="1500" dirty="0">
                 <a:solidFill>
                   <a:srgbClr val="12B198"/>
                 </a:solidFill>
@@ -20632,7 +20632,7 @@
               <a:buNone/>
             </a:pPr>
             <a:r>
-              <a:rPr lang="en-US" sz="1350" dirty="0">
+              <a:rPr lang="en-US" sz="1400" dirty="0">
                 <a:solidFill>
                   <a:srgbClr val="1B2733"/>
                 </a:solidFill>
@@ -20678,7 +20678,7 @@
               <a:buNone/>
             </a:pPr>
             <a:r>
-              <a:rPr lang="en-US" sz="1350" dirty="0">
+              <a:rPr lang="en-US" sz="1400" dirty="0">
                 <a:solidFill>
                   <a:srgbClr val="1B2733"/>
                 </a:solidFill>
@@ -20724,7 +20724,7 @@
               <a:buNone/>
             </a:pPr>
             <a:r>
-              <a:rPr lang="en-US" sz="1350" dirty="0">
+              <a:rPr lang="en-US" sz="1400" dirty="0">
                 <a:solidFill>
                   <a:srgbClr val="1B2733"/>
                 </a:solidFill>
@@ -20770,7 +20770,7 @@
               <a:buNone/>
             </a:pPr>
             <a:r>
-              <a:rPr lang="en-US" sz="1350" dirty="0">
+              <a:rPr lang="en-US" sz="1400" dirty="0">
                 <a:solidFill>
                   <a:srgbClr val="1B2733"/>
                 </a:solidFill>
@@ -20913,7 +20913,7 @@
               <a:buNone/>
             </a:pPr>
             <a:r>
-              <a:rPr lang="en-US" sz="1400" dirty="0">
+              <a:rPr lang="en-US" sz="1500" dirty="0">
                 <a:solidFill>
                   <a:srgbClr val="12B198"/>
                 </a:solidFill>
@@ -20981,7 +20981,7 @@
               <a:buNone/>
             </a:pPr>
             <a:r>
-              <a:rPr lang="en-US" sz="1350" dirty="0">
+              <a:rPr lang="en-US" sz="1400" dirty="0">
                 <a:solidFill>
                   <a:srgbClr val="1B2733"/>
                 </a:solidFill>
@@ -21027,7 +21027,7 @@
               <a:buNone/>
             </a:pPr>
             <a:r>
-              <a:rPr lang="en-US" sz="1350" dirty="0">
+              <a:rPr lang="en-US" sz="1400" dirty="0">
                 <a:solidFill>
                   <a:srgbClr val="1B2733"/>
                 </a:solidFill>
@@ -21073,7 +21073,7 @@
               <a:buNone/>
             </a:pPr>
             <a:r>
-              <a:rPr lang="en-US" sz="1350" dirty="0">
+              <a:rPr lang="en-US" sz="1400" dirty="0">
                 <a:solidFill>
                   <a:srgbClr val="1B2733"/>
                 </a:solidFill>
@@ -21119,7 +21119,7 @@
               <a:buNone/>
             </a:pPr>
             <a:r>
-              <a:rPr lang="en-US" sz="1350" dirty="0">
+              <a:rPr lang="en-US" sz="1400" dirty="0">
                 <a:solidFill>
                   <a:srgbClr val="1B2733"/>
                 </a:solidFill>
@@ -21611,7 +21611,7 @@
                 <a:ea typeface="Calibri" pitchFamily="34" charset="-122"/>
                 <a:cs typeface="Calibri" pitchFamily="34" charset="-120"/>
               </a:rPr>
-              <a:t>What You'll Learn　</a:t>
+              <a:t>What You'll Learn  </a:t>
             </a:r>
             <a:pPr indent="0" marL="0">
               <a:lnSpc>
@@ -21640,7 +21640,7 @@
               <a:buNone/>
             </a:pPr>
             <a:r>
-              <a:rPr lang="en-US" sz="1250" dirty="0">
+              <a:rPr lang="en-US" sz="1300" dirty="0">
                 <a:solidFill>
                   <a:srgbClr val="1B2733"/>
                 </a:solidFill>
@@ -21783,7 +21783,7 @@
               <a:buNone/>
             </a:pPr>
             <a:r>
-              <a:rPr lang="en-US" sz="1400" dirty="0">
+              <a:rPr lang="en-US" sz="1500" dirty="0">
                 <a:solidFill>
                   <a:srgbClr val="12B198"/>
                 </a:solidFill>
@@ -21851,7 +21851,7 @@
               <a:buNone/>
             </a:pPr>
             <a:r>
-              <a:rPr lang="en-US" sz="1350" dirty="0">
+              <a:rPr lang="en-US" sz="1400" dirty="0">
                 <a:solidFill>
                   <a:srgbClr val="1B2733"/>
                 </a:solidFill>
@@ -21897,7 +21897,7 @@
               <a:buNone/>
             </a:pPr>
             <a:r>
-              <a:rPr lang="en-US" sz="1350" dirty="0">
+              <a:rPr lang="en-US" sz="1400" dirty="0">
                 <a:solidFill>
                   <a:srgbClr val="1B2733"/>
                 </a:solidFill>
@@ -21943,7 +21943,7 @@
               <a:buNone/>
             </a:pPr>
             <a:r>
-              <a:rPr lang="en-US" sz="1350" dirty="0">
+              <a:rPr lang="en-US" sz="1400" dirty="0">
                 <a:solidFill>
                   <a:srgbClr val="1B2733"/>
                 </a:solidFill>
@@ -21989,7 +21989,7 @@
               <a:buNone/>
             </a:pPr>
             <a:r>
-              <a:rPr lang="en-US" sz="1350" dirty="0">
+              <a:rPr lang="en-US" sz="1400" dirty="0">
                 <a:solidFill>
                   <a:srgbClr val="1B2733"/>
                 </a:solidFill>
@@ -22132,7 +22132,7 @@
               <a:buNone/>
             </a:pPr>
             <a:r>
-              <a:rPr lang="en-US" sz="1400" dirty="0">
+              <a:rPr lang="en-US" sz="1500" dirty="0">
                 <a:solidFill>
                   <a:srgbClr val="12B198"/>
                 </a:solidFill>
@@ -22200,7 +22200,7 @@
               <a:buNone/>
             </a:pPr>
             <a:r>
-              <a:rPr lang="en-US" sz="1350" dirty="0">
+              <a:rPr lang="en-US" sz="1400" dirty="0">
                 <a:solidFill>
                   <a:srgbClr val="1B2733"/>
                 </a:solidFill>
@@ -22246,7 +22246,7 @@
               <a:buNone/>
             </a:pPr>
             <a:r>
-              <a:rPr lang="en-US" sz="1350" dirty="0">
+              <a:rPr lang="en-US" sz="1400" dirty="0">
                 <a:solidFill>
                   <a:srgbClr val="1B2733"/>
                 </a:solidFill>
@@ -22292,7 +22292,7 @@
               <a:buNone/>
             </a:pPr>
             <a:r>
-              <a:rPr lang="en-US" sz="1350" dirty="0">
+              <a:rPr lang="en-US" sz="1400" dirty="0">
                 <a:solidFill>
                   <a:srgbClr val="1B2733"/>
                 </a:solidFill>
@@ -22338,7 +22338,7 @@
               <a:buNone/>
             </a:pPr>
             <a:r>
-              <a:rPr lang="en-US" sz="1350" dirty="0">
+              <a:rPr lang="en-US" sz="1400" dirty="0">
                 <a:solidFill>
                   <a:srgbClr val="1B2733"/>
                 </a:solidFill>
@@ -22884,7 +22884,7 @@
               <a:buNone/>
             </a:pPr>
             <a:r>
-              <a:rPr lang="en-US" sz="1400" dirty="0">
+              <a:rPr lang="en-US" sz="1500" dirty="0">
                 <a:solidFill>
                   <a:srgbClr val="12B198"/>
                 </a:solidFill>
@@ -22952,7 +22952,7 @@
               <a:buNone/>
             </a:pPr>
             <a:r>
-              <a:rPr lang="en-US" sz="1350" dirty="0">
+              <a:rPr lang="en-US" sz="1400" dirty="0">
                 <a:solidFill>
                   <a:srgbClr val="1B2733"/>
                 </a:solidFill>
@@ -22998,7 +22998,7 @@
               <a:buNone/>
             </a:pPr>
             <a:r>
-              <a:rPr lang="en-US" sz="1350" dirty="0">
+              <a:rPr lang="en-US" sz="1400" dirty="0">
                 <a:solidFill>
                   <a:srgbClr val="1B2733"/>
                 </a:solidFill>
@@ -23044,7 +23044,7 @@
               <a:buNone/>
             </a:pPr>
             <a:r>
-              <a:rPr lang="en-US" sz="1350" dirty="0">
+              <a:rPr lang="en-US" sz="1400" dirty="0">
                 <a:solidFill>
                   <a:srgbClr val="1B2733"/>
                 </a:solidFill>
@@ -23090,7 +23090,7 @@
               <a:buNone/>
             </a:pPr>
             <a:r>
-              <a:rPr lang="en-US" sz="1350" dirty="0">
+              <a:rPr lang="en-US" sz="1400" dirty="0">
                 <a:solidFill>
                   <a:srgbClr val="1B2733"/>
                 </a:solidFill>
@@ -23233,7 +23233,7 @@
               <a:buNone/>
             </a:pPr>
             <a:r>
-              <a:rPr lang="en-US" sz="1400" dirty="0">
+              <a:rPr lang="en-US" sz="1500" dirty="0">
                 <a:solidFill>
                   <a:srgbClr val="12B198"/>
                 </a:solidFill>
@@ -23301,7 +23301,7 @@
               <a:buNone/>
             </a:pPr>
             <a:r>
-              <a:rPr lang="en-US" sz="1350" dirty="0">
+              <a:rPr lang="en-US" sz="1400" dirty="0">
                 <a:solidFill>
                   <a:srgbClr val="1B2733"/>
                 </a:solidFill>
@@ -23347,7 +23347,7 @@
               <a:buNone/>
             </a:pPr>
             <a:r>
-              <a:rPr lang="en-US" sz="1350" dirty="0">
+              <a:rPr lang="en-US" sz="1400" dirty="0">
                 <a:solidFill>
                   <a:srgbClr val="1B2733"/>
                 </a:solidFill>
@@ -23393,7 +23393,7 @@
               <a:buNone/>
             </a:pPr>
             <a:r>
-              <a:rPr lang="en-US" sz="1350" dirty="0">
+              <a:rPr lang="en-US" sz="1400" dirty="0">
                 <a:solidFill>
                   <a:srgbClr val="1B2733"/>
                 </a:solidFill>
@@ -23439,7 +23439,7 @@
               <a:buNone/>
             </a:pPr>
             <a:r>
-              <a:rPr lang="en-US" sz="1350" dirty="0">
+              <a:rPr lang="en-US" sz="1400" dirty="0">
                 <a:solidFill>
                   <a:srgbClr val="1B2733"/>
                 </a:solidFill>
